--- a/NCT-Slide-Template-Demo.pptx
+++ b/NCT-Slide-Template-Demo.pptx
@@ -24,6 +24,7 @@
     <p:sldId id="272" r:id="rId18"/>
     <p:sldId id="273" r:id="rId19"/>
     <p:sldId id="274" r:id="rId20"/>
+    <p:sldId id="275" r:id="rId21"/>
   </p:sldIdLst>
   <p:sldSz cx="12192000" cy="6858000"/>
   <p:notesSz cx="6858000" cy="9144000"/>
@@ -398,20 +399,9 @@
   <p:cSld name="01 Title Slide">
     <p:bg>
       <p:bgPr>
-        <a:gradFill rotWithShape="1">
-          <a:gsLst>
-            <a:gs pos="0">
-              <a:srgbClr val="23436D"/>
-            </a:gs>
-            <a:gs pos="55000">
-              <a:srgbClr val="1E5473"/>
-            </a:gs>
-            <a:gs pos="100000">
-              <a:srgbClr val="1A8D92"/>
-            </a:gs>
-          </a:gsLst>
-          <a:lin ang="2700000" scaled="0"/>
-        </a:gradFill>
+        <a:solidFill>
+          <a:srgbClr val="FFFFFF"/>
+        </a:solidFill>
         <a:effectLst/>
       </p:bgPr>
     </p:bg>
@@ -429,27 +419,79 @@
           <a:chExt cx="0" cy="0"/>
         </a:xfrm>
       </p:grpSpPr>
-      <p:sp>
-        <p:nvSpPr>
-          <p:cNvPr id="10" name="Decor Diamond"/>
+      <p:pic>
+        <p:nvPicPr>
+          <p:cNvPr id="10" name="Watermark A"/>
+          <p:cNvPicPr>
+            <a:picLocks noChangeAspect="1"/>
+          </p:cNvPicPr>
+          <p:nvPr/>
+        </p:nvPicPr>
+        <p:blipFill>
+          <a:blip r:embed="rId3">
+            <a:alphaModFix amt="3500"/>
+          </a:blip>
+          <a:stretch>
+            <a:fillRect/>
+          </a:stretch>
+        </p:blipFill>
+        <p:spPr>
+          <a:xfrm>
+            <a:off x="1371600" y="-2103120"/>
+            <a:ext cx="7315200" cy="4653280"/>
+          </a:xfrm>
+          <a:prstGeom prst="rect">
+            <a:avLst/>
+          </a:prstGeom>
+        </p:spPr>
+      </p:pic>
+      <p:pic>
+        <p:nvPicPr>
+          <p:cNvPr id="11" name="Watermark B"/>
+          <p:cNvPicPr>
+            <a:picLocks noChangeAspect="1"/>
+          </p:cNvPicPr>
+          <p:nvPr/>
+        </p:nvPicPr>
+        <p:blipFill>
+          <a:blip r:embed="rId3">
+            <a:alphaModFix amt="3500"/>
+          </a:blip>
+          <a:stretch>
+            <a:fillRect/>
+          </a:stretch>
+        </p:blipFill>
+        <p:spPr>
+          <a:xfrm>
+            <a:off x="4114800" y="2286000"/>
+            <a:ext cx="7315200" cy="4653280"/>
+          </a:xfrm>
+          <a:prstGeom prst="rect">
+            <a:avLst/>
+          </a:prstGeom>
+        </p:spPr>
+      </p:pic>
+      <p:sp>
+        <p:nvSpPr>
+          <p:cNvPr id="12" name="Scatter 1"/>
           <p:cNvSpPr/>
           <p:nvPr/>
         </p:nvSpPr>
         <p:spPr>
           <a:xfrm>
-            <a:off x="8534400" y="-914400"/>
-            <a:ext cx="4572000" cy="4572000"/>
-          </a:xfrm>
-          <a:prstGeom prst="diamond">
-            <a:avLst/>
-          </a:prstGeom>
-          <a:noFill/>
-          <a:ln w="19050">
-            <a:solidFill>
-              <a:srgbClr val="FFFFFF">
-                <a:alpha val="9000"/>
-              </a:srgbClr>
-            </a:solidFill>
+            <a:off x="10290552" y="298450"/>
+            <a:ext cx="491103" cy="431800"/>
+          </a:xfrm>
+          <a:prstGeom prst="rect">
+            <a:avLst/>
+          </a:prstGeom>
+          <a:solidFill>
+            <a:srgbClr val="216B7F">
+              <a:alpha val="10000"/>
+            </a:srgbClr>
+          </a:solidFill>
+          <a:ln>
+            <a:noFill/>
           </a:ln>
         </p:spPr>
         <p:txBody>
@@ -462,25 +504,831 @@
       </p:sp>
       <p:sp>
         <p:nvSpPr>
-          <p:cNvPr id="11" name="Decor Diamond"/>
+          <p:cNvPr id="13" name="Scatter 2"/>
           <p:cNvSpPr/>
           <p:nvPr/>
         </p:nvSpPr>
         <p:spPr>
           <a:xfrm>
-            <a:off x="9906000" y="2743200"/>
-            <a:ext cx="2743200" cy="2743200"/>
-          </a:xfrm>
-          <a:prstGeom prst="diamond">
-            <a:avLst/>
-          </a:prstGeom>
-          <a:noFill/>
-          <a:ln w="19050">
-            <a:solidFill>
-              <a:srgbClr val="FFFFFF">
-                <a:alpha val="7000"/>
-              </a:srgbClr>
-            </a:solidFill>
+            <a:off x="10517214" y="184150"/>
+            <a:ext cx="264440" cy="546100"/>
+          </a:xfrm>
+          <a:prstGeom prst="rect">
+            <a:avLst/>
+          </a:prstGeom>
+          <a:solidFill>
+            <a:srgbClr val="216B7F">
+              <a:alpha val="33000"/>
+            </a:srgbClr>
+          </a:solidFill>
+          <a:ln>
+            <a:noFill/>
+          </a:ln>
+        </p:spPr>
+        <p:txBody>
+          <a:bodyPr/>
+          <a:lstStyle/>
+          <a:p>
+            <a:endParaRPr lang="th-TH"/>
+          </a:p>
+        </p:txBody>
+      </p:sp>
+      <p:sp>
+        <p:nvSpPr>
+          <p:cNvPr id="14" name="Scatter 3"/>
+          <p:cNvSpPr/>
+          <p:nvPr/>
+        </p:nvSpPr>
+        <p:spPr>
+          <a:xfrm>
+            <a:off x="11486827" y="400050"/>
+            <a:ext cx="377771" cy="558800"/>
+          </a:xfrm>
+          <a:prstGeom prst="rect">
+            <a:avLst/>
+          </a:prstGeom>
+          <a:solidFill>
+            <a:srgbClr val="216B7F">
+              <a:alpha val="75000"/>
+            </a:srgbClr>
+          </a:solidFill>
+          <a:ln>
+            <a:noFill/>
+          </a:ln>
+        </p:spPr>
+        <p:txBody>
+          <a:bodyPr/>
+          <a:lstStyle/>
+          <a:p>
+            <a:endParaRPr lang="th-TH"/>
+          </a:p>
+        </p:txBody>
+      </p:sp>
+      <p:sp>
+        <p:nvSpPr>
+          <p:cNvPr id="15" name="Scatter 4"/>
+          <p:cNvSpPr/>
+          <p:nvPr/>
+        </p:nvSpPr>
+        <p:spPr>
+          <a:xfrm>
+            <a:off x="9862411" y="577850"/>
+            <a:ext cx="163701" cy="177800"/>
+          </a:xfrm>
+          <a:prstGeom prst="rect">
+            <a:avLst/>
+          </a:prstGeom>
+          <a:solidFill>
+            <a:srgbClr val="216B7F">
+              <a:alpha val="15000"/>
+            </a:srgbClr>
+          </a:solidFill>
+          <a:ln>
+            <a:noFill/>
+          </a:ln>
+        </p:spPr>
+        <p:txBody>
+          <a:bodyPr/>
+          <a:lstStyle/>
+          <a:p>
+            <a:endParaRPr lang="th-TH"/>
+          </a:p>
+        </p:txBody>
+      </p:sp>
+      <p:sp>
+        <p:nvSpPr>
+          <p:cNvPr id="16" name="Scatter 5"/>
+          <p:cNvSpPr/>
+          <p:nvPr/>
+        </p:nvSpPr>
+        <p:spPr>
+          <a:xfrm>
+            <a:off x="11310534" y="577850"/>
+            <a:ext cx="176293" cy="381000"/>
+          </a:xfrm>
+          <a:prstGeom prst="rect">
+            <a:avLst/>
+          </a:prstGeom>
+          <a:solidFill>
+            <a:srgbClr val="216B7F">
+              <a:alpha val="5000"/>
+            </a:srgbClr>
+          </a:solidFill>
+          <a:ln>
+            <a:noFill/>
+          </a:ln>
+        </p:spPr>
+        <p:txBody>
+          <a:bodyPr/>
+          <a:lstStyle/>
+          <a:p>
+            <a:endParaRPr lang="th-TH"/>
+          </a:p>
+        </p:txBody>
+      </p:sp>
+      <p:sp>
+        <p:nvSpPr>
+          <p:cNvPr id="17" name="Scatter 6"/>
+          <p:cNvSpPr/>
+          <p:nvPr/>
+        </p:nvSpPr>
+        <p:spPr>
+          <a:xfrm>
+            <a:off x="10076481" y="971550"/>
+            <a:ext cx="415548" cy="304800"/>
+          </a:xfrm>
+          <a:prstGeom prst="rect">
+            <a:avLst/>
+          </a:prstGeom>
+          <a:solidFill>
+            <a:srgbClr val="216B7F">
+              <a:alpha val="5000"/>
+            </a:srgbClr>
+          </a:solidFill>
+          <a:ln>
+            <a:noFill/>
+          </a:ln>
+        </p:spPr>
+        <p:txBody>
+          <a:bodyPr/>
+          <a:lstStyle/>
+          <a:p>
+            <a:endParaRPr lang="th-TH"/>
+          </a:p>
+        </p:txBody>
+      </p:sp>
+      <p:sp>
+        <p:nvSpPr>
+          <p:cNvPr id="18" name="Scatter 7"/>
+          <p:cNvSpPr/>
+          <p:nvPr/>
+        </p:nvSpPr>
+        <p:spPr>
+          <a:xfrm>
+            <a:off x="10756469" y="1060450"/>
+            <a:ext cx="352586" cy="254000"/>
+          </a:xfrm>
+          <a:prstGeom prst="rect">
+            <a:avLst/>
+          </a:prstGeom>
+          <a:solidFill>
+            <a:srgbClr val="216B7F">
+              <a:alpha val="60000"/>
+            </a:srgbClr>
+          </a:solidFill>
+          <a:ln>
+            <a:noFill/>
+          </a:ln>
+        </p:spPr>
+        <p:txBody>
+          <a:bodyPr/>
+          <a:lstStyle/>
+          <a:p>
+            <a:endParaRPr lang="th-TH"/>
+          </a:p>
+        </p:txBody>
+      </p:sp>
+      <p:sp>
+        <p:nvSpPr>
+          <p:cNvPr id="19" name="Scatter 8"/>
+          <p:cNvSpPr/>
+          <p:nvPr/>
+        </p:nvSpPr>
+        <p:spPr>
+          <a:xfrm>
+            <a:off x="10492030" y="1682750"/>
+            <a:ext cx="516287" cy="393700"/>
+          </a:xfrm>
+          <a:prstGeom prst="rect">
+            <a:avLst/>
+          </a:prstGeom>
+          <a:solidFill>
+            <a:srgbClr val="216B7F">
+              <a:alpha val="50000"/>
+            </a:srgbClr>
+          </a:solidFill>
+          <a:ln>
+            <a:noFill/>
+          </a:ln>
+        </p:spPr>
+        <p:txBody>
+          <a:bodyPr/>
+          <a:lstStyle/>
+          <a:p>
+            <a:endParaRPr lang="th-TH"/>
+          </a:p>
+        </p:txBody>
+      </p:sp>
+      <p:sp>
+        <p:nvSpPr>
+          <p:cNvPr id="20" name="Scatter 9"/>
+          <p:cNvSpPr/>
+          <p:nvPr/>
+        </p:nvSpPr>
+        <p:spPr>
+          <a:xfrm>
+            <a:off x="11587566" y="2228850"/>
+            <a:ext cx="277032" cy="317500"/>
+          </a:xfrm>
+          <a:prstGeom prst="rect">
+            <a:avLst/>
+          </a:prstGeom>
+          <a:solidFill>
+            <a:srgbClr val="216B7F">
+              <a:alpha val="60000"/>
+            </a:srgbClr>
+          </a:solidFill>
+          <a:ln>
+            <a:noFill/>
+          </a:ln>
+        </p:spPr>
+        <p:txBody>
+          <a:bodyPr/>
+          <a:lstStyle/>
+          <a:p>
+            <a:endParaRPr lang="th-TH"/>
+          </a:p>
+        </p:txBody>
+      </p:sp>
+      <p:sp>
+        <p:nvSpPr>
+          <p:cNvPr id="21" name="Scatter 10"/>
+          <p:cNvSpPr/>
+          <p:nvPr/>
+        </p:nvSpPr>
+        <p:spPr>
+          <a:xfrm>
+            <a:off x="9900188" y="2254250"/>
+            <a:ext cx="314809" cy="241300"/>
+          </a:xfrm>
+          <a:prstGeom prst="rect">
+            <a:avLst/>
+          </a:prstGeom>
+          <a:solidFill>
+            <a:srgbClr val="216B7F">
+              <a:alpha val="5000"/>
+            </a:srgbClr>
+          </a:solidFill>
+          <a:ln>
+            <a:noFill/>
+          </a:ln>
+        </p:spPr>
+        <p:txBody>
+          <a:bodyPr/>
+          <a:lstStyle/>
+          <a:p>
+            <a:endParaRPr lang="th-TH"/>
+          </a:p>
+        </p:txBody>
+      </p:sp>
+      <p:sp>
+        <p:nvSpPr>
+          <p:cNvPr id="22" name="Scatter 11"/>
+          <p:cNvSpPr/>
+          <p:nvPr/>
+        </p:nvSpPr>
+        <p:spPr>
+          <a:xfrm>
+            <a:off x="10517214" y="2571750"/>
+            <a:ext cx="491103" cy="457200"/>
+          </a:xfrm>
+          <a:prstGeom prst="rect">
+            <a:avLst/>
+          </a:prstGeom>
+          <a:solidFill>
+            <a:srgbClr val="216B7F">
+              <a:alpha val="5000"/>
+            </a:srgbClr>
+          </a:solidFill>
+          <a:ln>
+            <a:noFill/>
+          </a:ln>
+        </p:spPr>
+        <p:txBody>
+          <a:bodyPr/>
+          <a:lstStyle/>
+          <a:p>
+            <a:endParaRPr lang="th-TH"/>
+          </a:p>
+        </p:txBody>
+      </p:sp>
+      <p:sp>
+        <p:nvSpPr>
+          <p:cNvPr id="23" name="Scatter 12"/>
+          <p:cNvSpPr/>
+          <p:nvPr/>
+        </p:nvSpPr>
+        <p:spPr>
+          <a:xfrm>
+            <a:off x="11033502" y="2889250"/>
+            <a:ext cx="239255" cy="254000"/>
+          </a:xfrm>
+          <a:prstGeom prst="rect">
+            <a:avLst/>
+          </a:prstGeom>
+          <a:solidFill>
+            <a:srgbClr val="216B7F">
+              <a:alpha val="20000"/>
+            </a:srgbClr>
+          </a:solidFill>
+          <a:ln>
+            <a:noFill/>
+          </a:ln>
+        </p:spPr>
+        <p:txBody>
+          <a:bodyPr/>
+          <a:lstStyle/>
+          <a:p>
+            <a:endParaRPr lang="th-TH"/>
+          </a:p>
+        </p:txBody>
+      </p:sp>
+      <p:sp>
+        <p:nvSpPr>
+          <p:cNvPr id="24" name="Scatter 13"/>
+          <p:cNvSpPr/>
+          <p:nvPr/>
+        </p:nvSpPr>
+        <p:spPr>
+          <a:xfrm>
+            <a:off x="11297942" y="3117850"/>
+            <a:ext cx="591842" cy="457200"/>
+          </a:xfrm>
+          <a:prstGeom prst="rect">
+            <a:avLst/>
+          </a:prstGeom>
+          <a:solidFill>
+            <a:srgbClr val="216B7F">
+              <a:alpha val="10000"/>
+            </a:srgbClr>
+          </a:solidFill>
+          <a:ln>
+            <a:noFill/>
+          </a:ln>
+        </p:spPr>
+        <p:txBody>
+          <a:bodyPr/>
+          <a:lstStyle/>
+          <a:p>
+            <a:endParaRPr lang="th-TH"/>
+          </a:p>
+        </p:txBody>
+      </p:sp>
+      <p:sp>
+        <p:nvSpPr>
+          <p:cNvPr id="25" name="Scatter 14"/>
+          <p:cNvSpPr/>
+          <p:nvPr/>
+        </p:nvSpPr>
+        <p:spPr>
+          <a:xfrm>
+            <a:off x="11046094" y="3359150"/>
+            <a:ext cx="125924" cy="114300"/>
+          </a:xfrm>
+          <a:prstGeom prst="rect">
+            <a:avLst/>
+          </a:prstGeom>
+          <a:solidFill>
+            <a:srgbClr val="216B7F">
+              <a:alpha val="50000"/>
+            </a:srgbClr>
+          </a:solidFill>
+          <a:ln>
+            <a:noFill/>
+          </a:ln>
+        </p:spPr>
+        <p:txBody>
+          <a:bodyPr/>
+          <a:lstStyle/>
+          <a:p>
+            <a:endParaRPr lang="th-TH"/>
+          </a:p>
+        </p:txBody>
+      </p:sp>
+      <p:sp>
+        <p:nvSpPr>
+          <p:cNvPr id="26" name="Scatter 15"/>
+          <p:cNvSpPr/>
+          <p:nvPr/>
+        </p:nvSpPr>
+        <p:spPr>
+          <a:xfrm>
+            <a:off x="10655731" y="3549650"/>
+            <a:ext cx="226663" cy="228600"/>
+          </a:xfrm>
+          <a:prstGeom prst="rect">
+            <a:avLst/>
+          </a:prstGeom>
+          <a:solidFill>
+            <a:srgbClr val="216B7F">
+              <a:alpha val="5000"/>
+            </a:srgbClr>
+          </a:solidFill>
+          <a:ln>
+            <a:noFill/>
+          </a:ln>
+        </p:spPr>
+        <p:txBody>
+          <a:bodyPr/>
+          <a:lstStyle/>
+          <a:p>
+            <a:endParaRPr lang="th-TH"/>
+          </a:p>
+        </p:txBody>
+      </p:sp>
+      <p:sp>
+        <p:nvSpPr>
+          <p:cNvPr id="27" name="Scatter 16"/>
+          <p:cNvSpPr/>
+          <p:nvPr/>
+        </p:nvSpPr>
+        <p:spPr>
+          <a:xfrm>
+            <a:off x="11234980" y="3816350"/>
+            <a:ext cx="314809" cy="368300"/>
+          </a:xfrm>
+          <a:prstGeom prst="rect">
+            <a:avLst/>
+          </a:prstGeom>
+          <a:solidFill>
+            <a:srgbClr val="216B7F">
+              <a:alpha val="20000"/>
+            </a:srgbClr>
+          </a:solidFill>
+          <a:ln>
+            <a:noFill/>
+          </a:ln>
+        </p:spPr>
+        <p:txBody>
+          <a:bodyPr/>
+          <a:lstStyle/>
+          <a:p>
+            <a:endParaRPr lang="th-TH"/>
+          </a:p>
+        </p:txBody>
+      </p:sp>
+      <p:sp>
+        <p:nvSpPr>
+          <p:cNvPr id="28" name="Scatter 17"/>
+          <p:cNvSpPr/>
+          <p:nvPr/>
+        </p:nvSpPr>
+        <p:spPr>
+          <a:xfrm>
+            <a:off x="11612751" y="4362450"/>
+            <a:ext cx="176293" cy="266700"/>
+          </a:xfrm>
+          <a:prstGeom prst="rect">
+            <a:avLst/>
+          </a:prstGeom>
+          <a:solidFill>
+            <a:srgbClr val="216B7F">
+              <a:alpha val="50000"/>
+            </a:srgbClr>
+          </a:solidFill>
+          <a:ln>
+            <a:noFill/>
+          </a:ln>
+        </p:spPr>
+        <p:txBody>
+          <a:bodyPr/>
+          <a:lstStyle/>
+          <a:p>
+            <a:endParaRPr lang="th-TH"/>
+          </a:p>
+        </p:txBody>
+      </p:sp>
+      <p:sp>
+        <p:nvSpPr>
+          <p:cNvPr id="29" name="Scatter 18"/>
+          <p:cNvSpPr/>
+          <p:nvPr/>
+        </p:nvSpPr>
+        <p:spPr>
+          <a:xfrm>
+            <a:off x="10026112" y="4425950"/>
+            <a:ext cx="251847" cy="203200"/>
+          </a:xfrm>
+          <a:prstGeom prst="rect">
+            <a:avLst/>
+          </a:prstGeom>
+          <a:solidFill>
+            <a:srgbClr val="216B7F">
+              <a:alpha val="5000"/>
+            </a:srgbClr>
+          </a:solidFill>
+          <a:ln>
+            <a:noFill/>
+          </a:ln>
+        </p:spPr>
+        <p:txBody>
+          <a:bodyPr/>
+          <a:lstStyle/>
+          <a:p>
+            <a:endParaRPr lang="th-TH"/>
+          </a:p>
+        </p:txBody>
+      </p:sp>
+      <p:sp>
+        <p:nvSpPr>
+          <p:cNvPr id="30" name="Scatter 19"/>
+          <p:cNvSpPr/>
+          <p:nvPr/>
+        </p:nvSpPr>
+        <p:spPr>
+          <a:xfrm>
+            <a:off x="10492030" y="4705350"/>
+            <a:ext cx="314809" cy="292100"/>
+          </a:xfrm>
+          <a:prstGeom prst="rect">
+            <a:avLst/>
+          </a:prstGeom>
+          <a:solidFill>
+            <a:srgbClr val="216B7F">
+              <a:alpha val="40000"/>
+            </a:srgbClr>
+          </a:solidFill>
+          <a:ln>
+            <a:noFill/>
+          </a:ln>
+        </p:spPr>
+        <p:txBody>
+          <a:bodyPr/>
+          <a:lstStyle/>
+          <a:p>
+            <a:endParaRPr lang="th-TH"/>
+          </a:p>
+        </p:txBody>
+      </p:sp>
+      <p:sp>
+        <p:nvSpPr>
+          <p:cNvPr id="31" name="Scatter 20"/>
+          <p:cNvSpPr/>
+          <p:nvPr/>
+        </p:nvSpPr>
+        <p:spPr>
+          <a:xfrm>
+            <a:off x="9220200" y="4756150"/>
+            <a:ext cx="264440" cy="292100"/>
+          </a:xfrm>
+          <a:prstGeom prst="rect">
+            <a:avLst/>
+          </a:prstGeom>
+          <a:solidFill>
+            <a:srgbClr val="216B7F">
+              <a:alpha val="5000"/>
+            </a:srgbClr>
+          </a:solidFill>
+          <a:ln>
+            <a:noFill/>
+          </a:ln>
+        </p:spPr>
+        <p:txBody>
+          <a:bodyPr/>
+          <a:lstStyle/>
+          <a:p>
+            <a:endParaRPr lang="th-TH"/>
+          </a:p>
+        </p:txBody>
+      </p:sp>
+      <p:sp>
+        <p:nvSpPr>
+          <p:cNvPr id="32" name="Scatter 21"/>
+          <p:cNvSpPr/>
+          <p:nvPr/>
+        </p:nvSpPr>
+        <p:spPr>
+          <a:xfrm>
+            <a:off x="11260164" y="5099050"/>
+            <a:ext cx="415548" cy="330200"/>
+          </a:xfrm>
+          <a:prstGeom prst="rect">
+            <a:avLst/>
+          </a:prstGeom>
+          <a:solidFill>
+            <a:srgbClr val="216B7F">
+              <a:alpha val="5000"/>
+            </a:srgbClr>
+          </a:solidFill>
+          <a:ln>
+            <a:noFill/>
+          </a:ln>
+        </p:spPr>
+        <p:txBody>
+          <a:bodyPr/>
+          <a:lstStyle/>
+          <a:p>
+            <a:endParaRPr lang="th-TH"/>
+          </a:p>
+        </p:txBody>
+      </p:sp>
+      <p:sp>
+        <p:nvSpPr>
+          <p:cNvPr id="33" name="Scatter 22"/>
+          <p:cNvSpPr/>
+          <p:nvPr/>
+        </p:nvSpPr>
+        <p:spPr>
+          <a:xfrm>
+            <a:off x="10202405" y="5238750"/>
+            <a:ext cx="554064" cy="495300"/>
+          </a:xfrm>
+          <a:prstGeom prst="rect">
+            <a:avLst/>
+          </a:prstGeom>
+          <a:solidFill>
+            <a:srgbClr val="216B7F">
+              <a:alpha val="10000"/>
+            </a:srgbClr>
+          </a:solidFill>
+          <a:ln>
+            <a:noFill/>
+          </a:ln>
+        </p:spPr>
+        <p:txBody>
+          <a:bodyPr/>
+          <a:lstStyle/>
+          <a:p>
+            <a:endParaRPr lang="th-TH"/>
+          </a:p>
+        </p:txBody>
+      </p:sp>
+      <p:sp>
+        <p:nvSpPr>
+          <p:cNvPr id="34" name="Scatter 23"/>
+          <p:cNvSpPr/>
+          <p:nvPr/>
+        </p:nvSpPr>
+        <p:spPr>
+          <a:xfrm>
+            <a:off x="10957947" y="5429250"/>
+            <a:ext cx="302217" cy="444500"/>
+          </a:xfrm>
+          <a:prstGeom prst="rect">
+            <a:avLst/>
+          </a:prstGeom>
+          <a:solidFill>
+            <a:srgbClr val="216B7F">
+              <a:alpha val="50000"/>
+            </a:srgbClr>
+          </a:solidFill>
+          <a:ln>
+            <a:noFill/>
+          </a:ln>
+        </p:spPr>
+        <p:txBody>
+          <a:bodyPr/>
+          <a:lstStyle/>
+          <a:p>
+            <a:endParaRPr lang="th-TH"/>
+          </a:p>
+        </p:txBody>
+      </p:sp>
+      <p:sp>
+        <p:nvSpPr>
+          <p:cNvPr id="35" name="Scatter 24"/>
+          <p:cNvSpPr/>
+          <p:nvPr/>
+        </p:nvSpPr>
+        <p:spPr>
+          <a:xfrm>
+            <a:off x="9535009" y="5518150"/>
+            <a:ext cx="88147" cy="76200"/>
+          </a:xfrm>
+          <a:prstGeom prst="rect">
+            <a:avLst/>
+          </a:prstGeom>
+          <a:solidFill>
+            <a:srgbClr val="216B7F">
+              <a:alpha val="40000"/>
+            </a:srgbClr>
+          </a:solidFill>
+          <a:ln>
+            <a:noFill/>
+          </a:ln>
+        </p:spPr>
+        <p:txBody>
+          <a:bodyPr/>
+          <a:lstStyle/>
+          <a:p>
+            <a:endParaRPr lang="th-TH"/>
+          </a:p>
+        </p:txBody>
+      </p:sp>
+      <p:sp>
+        <p:nvSpPr>
+          <p:cNvPr id="36" name="Scatter 25"/>
+          <p:cNvSpPr/>
+          <p:nvPr/>
+        </p:nvSpPr>
+        <p:spPr>
+          <a:xfrm>
+            <a:off x="9837226" y="5949950"/>
+            <a:ext cx="226663" cy="241300"/>
+          </a:xfrm>
+          <a:prstGeom prst="rect">
+            <a:avLst/>
+          </a:prstGeom>
+          <a:solidFill>
+            <a:srgbClr val="216B7F">
+              <a:alpha val="20000"/>
+            </a:srgbClr>
+          </a:solidFill>
+          <a:ln>
+            <a:noFill/>
+          </a:ln>
+        </p:spPr>
+        <p:txBody>
+          <a:bodyPr/>
+          <a:lstStyle/>
+          <a:p>
+            <a:endParaRPr lang="th-TH"/>
+          </a:p>
+        </p:txBody>
+      </p:sp>
+      <p:sp>
+        <p:nvSpPr>
+          <p:cNvPr id="37" name="Scatter 26"/>
+          <p:cNvSpPr/>
+          <p:nvPr/>
+        </p:nvSpPr>
+        <p:spPr>
+          <a:xfrm>
+            <a:off x="11310534" y="6064250"/>
+            <a:ext cx="163701" cy="203200"/>
+          </a:xfrm>
+          <a:prstGeom prst="rect">
+            <a:avLst/>
+          </a:prstGeom>
+          <a:solidFill>
+            <a:srgbClr val="216B7F">
+              <a:alpha val="60000"/>
+            </a:srgbClr>
+          </a:solidFill>
+          <a:ln>
+            <a:noFill/>
+          </a:ln>
+        </p:spPr>
+        <p:txBody>
+          <a:bodyPr/>
+          <a:lstStyle/>
+          <a:p>
+            <a:endParaRPr lang="th-TH"/>
+          </a:p>
+        </p:txBody>
+      </p:sp>
+      <p:sp>
+        <p:nvSpPr>
+          <p:cNvPr id="38" name="Scatter 27"/>
+          <p:cNvSpPr/>
+          <p:nvPr/>
+        </p:nvSpPr>
+        <p:spPr>
+          <a:xfrm>
+            <a:off x="10492030" y="6127750"/>
+            <a:ext cx="201478" cy="165100"/>
+          </a:xfrm>
+          <a:prstGeom prst="rect">
+            <a:avLst/>
+          </a:prstGeom>
+          <a:solidFill>
+            <a:srgbClr val="216B7F">
+              <a:alpha val="20000"/>
+            </a:srgbClr>
+          </a:solidFill>
+          <a:ln>
+            <a:noFill/>
+          </a:ln>
+        </p:spPr>
+        <p:txBody>
+          <a:bodyPr/>
+          <a:lstStyle/>
+          <a:p>
+            <a:endParaRPr lang="th-TH"/>
+          </a:p>
+        </p:txBody>
+      </p:sp>
+      <p:sp>
+        <p:nvSpPr>
+          <p:cNvPr id="39" name="Scatter 28"/>
+          <p:cNvSpPr/>
+          <p:nvPr/>
+        </p:nvSpPr>
+        <p:spPr>
+          <a:xfrm>
+            <a:off x="11549789" y="6267450"/>
+            <a:ext cx="302217" cy="317500"/>
+          </a:xfrm>
+          <a:prstGeom prst="rect">
+            <a:avLst/>
+          </a:prstGeom>
+          <a:solidFill>
+            <a:srgbClr val="216B7F">
+              <a:alpha val="75000"/>
+            </a:srgbClr>
+          </a:solidFill>
+          <a:ln>
+            <a:noFill/>
           </a:ln>
         </p:spPr>
         <p:txBody>
@@ -493,7 +1341,7 @@
       </p:sp>
       <p:pic>
         <p:nvPicPr>
-          <p:cNvPr id="12" name="NCT Logo"/>
+          <p:cNvPr id="40" name="NCT Logo"/>
           <p:cNvPicPr>
             <a:picLocks noChangeAspect="1"/>
           </p:cNvPicPr>
@@ -507,8 +1355,8 @@
         </p:blipFill>
         <p:spPr>
           <a:xfrm>
-            <a:off x="914400" y="868680"/>
-            <a:ext cx="2560320" cy="1302864"/>
+            <a:off x="4095750" y="685800"/>
+            <a:ext cx="4000500" cy="2035725"/>
           </a:xfrm>
           <a:prstGeom prst="rect">
             <a:avLst/>
@@ -517,7 +1365,36 @@
       </p:pic>
       <p:sp>
         <p:nvSpPr>
-          <p:cNvPr id="13" name="Title Placeholder"/>
+          <p:cNvPr id="41" name="Accent Rule"/>
+          <p:cNvSpPr/>
+          <p:nvPr/>
+        </p:nvSpPr>
+        <p:spPr>
+          <a:xfrm>
+            <a:off x="2941320" y="3429000"/>
+            <a:ext cx="6309360" cy="28575"/>
+          </a:xfrm>
+          <a:prstGeom prst="rect">
+            <a:avLst/>
+          </a:prstGeom>
+          <a:solidFill>
+            <a:srgbClr val="216B7F"/>
+          </a:solidFill>
+          <a:ln>
+            <a:noFill/>
+          </a:ln>
+        </p:spPr>
+        <p:txBody>
+          <a:bodyPr/>
+          <a:lstStyle/>
+          <a:p>
+            <a:endParaRPr lang="th-TH"/>
+          </a:p>
+        </p:txBody>
+      </p:sp>
+      <p:sp>
+        <p:nvSpPr>
+          <p:cNvPr id="42" name="Title Placeholder"/>
           <p:cNvSpPr>
             <a:spLocks noGrp="1"/>
           </p:cNvSpPr>
@@ -527,24 +1404,24 @@
         </p:nvSpPr>
         <p:spPr>
           <a:xfrm>
-            <a:off x="914400" y="2560320"/>
-            <a:ext cx="8229600" cy="1463040"/>
-          </a:xfrm>
-          <a:prstGeom prst="rect">
-            <a:avLst/>
-          </a:prstGeom>
-        </p:spPr>
-        <p:txBody>
-          <a:bodyPr wrap="square" anchor="b" lIns="0" tIns="0" rIns="0" bIns="0" rtlCol="0"/>
+            <a:off x="914400" y="3715200"/>
+            <a:ext cx="10363200" cy="2057400"/>
+          </a:xfrm>
+          <a:prstGeom prst="rect">
+            <a:avLst/>
+          </a:prstGeom>
+        </p:spPr>
+        <p:txBody>
+          <a:bodyPr wrap="square" anchor="ctr" lIns="0" tIns="0" rIns="0" bIns="0" rtlCol="0"/>
           <a:lstStyle>
-            <a:lvl1pPr algn="l" marL="0" indent="0">
-              <a:lnSpc>
-                <a:spcPct val="106000"/>
+            <a:lvl1pPr algn="ctr" marL="0" indent="0">
+              <a:lnSpc>
+                <a:spcPct val="115000"/>
               </a:lnSpc>
               <a:buNone/>
               <a:defRPr lang="th-TH" sz="4400" b="1" dirty="0">
                 <a:solidFill>
-                  <a:srgbClr val="FFFFFF"/>
+                  <a:srgbClr val="333333"/>
                 </a:solidFill>
                 <a:latin typeface="+mj-lt"/>
                 <a:ea typeface="+mj-ea"/>
@@ -553,60 +1430,29 @@
             </a:lvl1pPr>
           </a:lstStyle>
           <a:p>
-            <a:pPr algn="l" marL="0" indent="0">
-              <a:lnSpc>
-                <a:spcPct val="106000"/>
+            <a:pPr algn="ctr" marL="0" indent="0">
+              <a:lnSpc>
+                <a:spcPct val="115000"/>
               </a:lnSpc>
               <a:buNone/>
             </a:pPr>
             <a:r>
               <a:rPr lang="th-TH" sz="4400" b="1" dirty="0">
                 <a:solidFill>
-                  <a:srgbClr val="FFFFFF"/>
+                  <a:srgbClr val="333333"/>
                 </a:solidFill>
                 <a:latin typeface="+mj-lt"/>
                 <a:ea typeface="+mj-ea"/>
                 <a:cs typeface="+mj-cs"/>
               </a:rPr>
-              <a:t>ชื่อเรื่องงานนำเสนอ</a:t>
-            </a:r>
-          </a:p>
-        </p:txBody>
-      </p:sp>
-      <p:sp>
-        <p:nvSpPr>
-          <p:cNvPr id="14" name="Accent Rule"/>
-          <p:cNvSpPr/>
-          <p:nvPr/>
-        </p:nvSpPr>
-        <p:spPr>
-          <a:xfrm>
-            <a:off x="914400" y="4206240"/>
-            <a:ext cx="548640" cy="45720"/>
-          </a:xfrm>
-          <a:prstGeom prst="rect">
-            <a:avLst/>
-          </a:prstGeom>
-          <a:solidFill>
-            <a:srgbClr val="FFFFFF">
-              <a:alpha val="72000"/>
-            </a:srgbClr>
-          </a:solidFill>
-          <a:ln>
-            <a:noFill/>
-          </a:ln>
-        </p:spPr>
-        <p:txBody>
-          <a:bodyPr/>
-          <a:lstStyle/>
-          <a:p>
-            <a:endParaRPr lang="th-TH"/>
-          </a:p>
-        </p:txBody>
-      </p:sp>
-      <p:sp>
-        <p:nvSpPr>
-          <p:cNvPr id="15" name="Subtitle"/>
+              <a:t>PROPOSAL</a:t>
+            </a:r>
+          </a:p>
+        </p:txBody>
+      </p:sp>
+      <p:sp>
+        <p:nvSpPr>
+          <p:cNvPr id="43" name="Subtitle"/>
           <p:cNvSpPr>
             <a:spLocks noGrp="1"/>
           </p:cNvSpPr>
@@ -616,8 +1462,8 @@
         </p:nvSpPr>
         <p:spPr>
           <a:xfrm>
-            <a:off x="914400" y="4480560"/>
-            <a:ext cx="7315200" cy="731520"/>
+            <a:off x="914400" y="5909760"/>
+            <a:ext cx="10363200" cy="457200"/>
           </a:xfrm>
           <a:prstGeom prst="rect">
             <a:avLst/>
@@ -626,16 +1472,14 @@
         <p:txBody>
           <a:bodyPr wrap="square" anchor="t" lIns="0" tIns="0" rIns="0" bIns="0" rtlCol="0"/>
           <a:lstStyle>
-            <a:lvl1pPr algn="l" marL="0" indent="0">
+            <a:lvl1pPr algn="ctr" marL="0" indent="0">
               <a:lnSpc>
                 <a:spcPct val="130000"/>
               </a:lnSpc>
               <a:buNone/>
               <a:defRPr lang="th-TH" sz="2000" dirty="0">
                 <a:solidFill>
-                  <a:srgbClr val="FFFFFF">
-                    <a:alpha val="80000"/>
-                  </a:srgbClr>
+                  <a:srgbClr val="5F5F5F"/>
                 </a:solidFill>
                 <a:latin typeface="+mn-lt"/>
                 <a:ea typeface="+mn-ea"/>
@@ -644,7 +1488,7 @@
             </a:lvl1pPr>
           </a:lstStyle>
           <a:p>
-            <a:pPr algn="l" marL="0" indent="0">
+            <a:pPr algn="ctr" marL="0" indent="0">
               <a:lnSpc>
                 <a:spcPct val="130000"/>
               </a:lnSpc>
@@ -653,99 +1497,20 @@
             <a:r>
               <a:rPr lang="th-TH" sz="2000" dirty="0">
                 <a:solidFill>
-                  <a:srgbClr val="FFFFFF">
-                    <a:alpha val="80000"/>
-                  </a:srgbClr>
+                  <a:srgbClr val="5F5F5F"/>
                 </a:solidFill>
                 <a:latin typeface="+mn-lt"/>
                 <a:ea typeface="+mn-ea"/>
                 <a:cs typeface="+mn-cs"/>
               </a:rPr>
-              <a:t>คำโปรย / ชื่อลูกค้า / วันที่</a:t>
-            </a:r>
-          </a:p>
-        </p:txBody>
-      </p:sp>
-      <p:sp>
-        <p:nvSpPr>
-          <p:cNvPr id="16" name="Footer Scrim"/>
-          <p:cNvSpPr/>
-          <p:nvPr/>
-        </p:nvSpPr>
-        <p:spPr>
-          <a:xfrm>
-            <a:off x="0" y="5394960"/>
-            <a:ext cx="12192000" cy="1463040"/>
-          </a:xfrm>
-          <a:prstGeom prst="rect">
-            <a:avLst/>
-          </a:prstGeom>
-          <a:gradFill rotWithShape="1">
-            <a:gsLst>
-              <a:gs pos="0">
-                <a:srgbClr val="16324F">
-                  <a:alpha val="0"/>
-                </a:srgbClr>
-              </a:gs>
-              <a:gs pos="55000">
-                <a:srgbClr val="16324F">
-                  <a:alpha val="60000"/>
-                </a:srgbClr>
-              </a:gs>
-              <a:gs pos="100000">
-                <a:srgbClr val="16324F">
-                  <a:alpha val="90000"/>
-                </a:srgbClr>
-              </a:gs>
-            </a:gsLst>
-            <a:lin ang="5400000" scaled="0"/>
-          </a:gradFill>
-          <a:ln>
-            <a:noFill/>
-          </a:ln>
-        </p:spPr>
-        <p:txBody>
-          <a:bodyPr/>
-          <a:lstStyle/>
-          <a:p>
-            <a:endParaRPr lang="th-TH"/>
-          </a:p>
-        </p:txBody>
-      </p:sp>
-      <p:sp>
-        <p:nvSpPr>
-          <p:cNvPr id="90" name="Footer Rule"/>
-          <p:cNvSpPr/>
-          <p:nvPr/>
-        </p:nvSpPr>
-        <p:spPr>
-          <a:xfrm>
-            <a:off x="914400" y="6172200"/>
-            <a:ext cx="10363200" cy="12700"/>
-          </a:xfrm>
-          <a:prstGeom prst="rect">
-            <a:avLst/>
-          </a:prstGeom>
-          <a:solidFill>
-            <a:srgbClr val="FFFFFF">
-              <a:alpha val="28000"/>
-            </a:srgbClr>
-          </a:solidFill>
-          <a:ln>
-            <a:noFill/>
-          </a:ln>
-        </p:spPr>
-        <p:txBody>
-          <a:bodyPr/>
-          <a:lstStyle/>
-          <a:p>
-            <a:endParaRPr lang="th-TH"/>
-          </a:p>
-        </p:txBody>
-      </p:sp>
-      <p:sp>
-        <p:nvSpPr>
-          <p:cNvPr id="91" name="Date Placeholder"/>
+              <a:t>คำโปรย / ชื่อลูกค้า</a:t>
+            </a:r>
+          </a:p>
+        </p:txBody>
+      </p:sp>
+      <p:sp>
+        <p:nvSpPr>
+          <p:cNvPr id="44" name="Date Placeholder"/>
           <p:cNvSpPr>
             <a:spLocks noGrp="1"/>
           </p:cNvSpPr>
@@ -755,8 +1520,8 @@
         </p:nvSpPr>
         <p:spPr>
           <a:xfrm>
-            <a:off x="914400" y="6309360"/>
-            <a:ext cx="2743200" cy="274320"/>
+            <a:off x="228600" y="6400800"/>
+            <a:ext cx="4572000" cy="274320"/>
           </a:xfrm>
           <a:prstGeom prst="rect">
             <a:avLst/>
@@ -772,9 +1537,7 @@
               <a:buNone/>
               <a:defRPr lang="th-TH" sz="1000" dirty="0">
                 <a:solidFill>
-                  <a:srgbClr val="FFFFFF">
-                    <a:alpha val="72000"/>
-                  </a:srgbClr>
+                  <a:srgbClr val="5F5F5F"/>
                 </a:solidFill>
                 <a:latin typeface="+mn-lt"/>
                 <a:ea typeface="+mn-ea"/>
@@ -795,36 +1558,34 @@
       </p:sp>
       <p:sp>
         <p:nvSpPr>
-          <p:cNvPr id="92" name="Footer Placeholder"/>
-          <p:cNvSpPr>
-            <a:spLocks noGrp="1"/>
-          </p:cNvSpPr>
-          <p:nvPr>
-            <p:ph type="ftr" idx="11"/>
-          </p:nvPr>
-        </p:nvSpPr>
-        <p:spPr>
-          <a:xfrm>
-            <a:off x="4572000" y="6309360"/>
-            <a:ext cx="3657600" cy="274320"/>
-          </a:xfrm>
-          <a:prstGeom prst="rect">
-            <a:avLst/>
-          </a:prstGeom>
-        </p:spPr>
-        <p:txBody>
-          <a:bodyPr wrap="square" anchor="ctr" lIns="0" tIns="0" rIns="0" bIns="0" rtlCol="0"/>
+          <p:cNvPr id="45" name="Slide Number Placeholder"/>
+          <p:cNvSpPr>
+            <a:spLocks noGrp="1"/>
+          </p:cNvSpPr>
+          <p:nvPr>
+            <p:ph type="sldNum" sz="quarter" idx="12"/>
+          </p:nvPr>
+        </p:nvSpPr>
+        <p:spPr>
+          <a:xfrm>
+            <a:off x="10591800" y="6400800"/>
+            <a:ext cx="1371600" cy="274320"/>
+          </a:xfrm>
+          <a:prstGeom prst="rect">
+            <a:avLst/>
+          </a:prstGeom>
+        </p:spPr>
+        <p:txBody>
+          <a:bodyPr anchor="ctr"/>
           <a:lstStyle>
-            <a:lvl1pPr algn="ctr" marL="0" indent="0">
+            <a:lvl1pPr algn="r" marL="0" indent="0">
               <a:lnSpc>
                 <a:spcPct val="100000"/>
               </a:lnSpc>
               <a:buNone/>
               <a:defRPr lang="th-TH" sz="1000" dirty="0">
                 <a:solidFill>
-                  <a:srgbClr val="FFFFFF">
-                    <a:alpha val="72000"/>
-                  </a:srgbClr>
+                  <a:srgbClr val="5F5F5F"/>
                 </a:solidFill>
                 <a:latin typeface="+mn-lt"/>
                 <a:ea typeface="+mn-ea"/>
@@ -833,65 +1594,13 @@
             </a:lvl1pPr>
           </a:lstStyle>
           <a:p>
-            <a:pPr algn="ctr" marL="0" indent="0">
-              <a:lnSpc>
-                <a:spcPct val="100000"/>
-              </a:lnSpc>
-              <a:buNone/>
-            </a:pPr>
-            <a:endParaRPr lang="th-TH" sz="1000"/>
-          </a:p>
-        </p:txBody>
-      </p:sp>
-      <p:sp>
-        <p:nvSpPr>
-          <p:cNvPr id="93" name="Slide Number Placeholder"/>
-          <p:cNvSpPr>
-            <a:spLocks noGrp="1"/>
-          </p:cNvSpPr>
-          <p:nvPr>
-            <p:ph type="sldNum" sz="quarter" idx="12"/>
-          </p:nvPr>
-        </p:nvSpPr>
-        <p:spPr>
-          <a:xfrm>
-            <a:off x="9906000" y="6309360"/>
-            <a:ext cx="1371600" cy="274320"/>
-          </a:xfrm>
-          <a:prstGeom prst="rect">
-            <a:avLst/>
-          </a:prstGeom>
-        </p:spPr>
-        <p:txBody>
-          <a:bodyPr anchor="ctr"/>
-          <a:lstStyle>
-            <a:lvl1pPr algn="r" marL="0" indent="0">
-              <a:lnSpc>
-                <a:spcPct val="100000"/>
-              </a:lnSpc>
-              <a:buNone/>
-              <a:defRPr lang="th-TH" sz="1000" dirty="0">
-                <a:solidFill>
-                  <a:srgbClr val="FFFFFF">
-                    <a:alpha val="72000"/>
-                  </a:srgbClr>
-                </a:solidFill>
-                <a:latin typeface="+mn-lt"/>
-                <a:ea typeface="+mn-ea"/>
-                <a:cs typeface="+mn-cs"/>
-              </a:defRPr>
-            </a:lvl1pPr>
-          </a:lstStyle>
-          <a:p>
             <a:pPr algn="r" marL="0" indent="0">
               <a:buNone/>
             </a:pPr>
             <a:fld id="{B7E3A1C2-4F5D-4A88-9C1E-6D2F0A93B451}" type="slidenum">
               <a:rPr lang="th-TH" sz="1000">
                 <a:solidFill>
-                  <a:srgbClr val="FFFFFF">
-                    <a:alpha val="72000"/>
-                  </a:srgbClr>
+                  <a:srgbClr val="5F5F5F"/>
                 </a:solidFill>
                 <a:latin typeface="+mn-lt"/>
                 <a:cs typeface="+mn-cs"/>
@@ -902,30 +1611,6 @@
           </a:p>
         </p:txBody>
       </p:sp>
-      <p:pic>
-        <p:nvPicPr>
-          <p:cNvPr id="94" name="NCT Mark"/>
-          <p:cNvPicPr>
-            <a:picLocks noChangeAspect="1"/>
-          </p:cNvPicPr>
-          <p:nvPr/>
-        </p:nvPicPr>
-        <p:blipFill>
-          <a:blip r:embed="rId3"/>
-          <a:stretch>
-            <a:fillRect/>
-          </a:stretch>
-        </p:blipFill>
-        <p:spPr>
-          <a:xfrm>
-            <a:off x="9494520" y="6289360"/>
-            <a:ext cx="274320" cy="174498"/>
-          </a:xfrm>
-          <a:prstGeom prst="rect">
-            <a:avLst/>
-          </a:prstGeom>
-        </p:spPr>
-      </p:pic>
     </p:spTree>
   </p:cSld>
   <p:clrMapOvr>
@@ -11214,6 +11899,547 @@
 </p:sldLayout>
 </file>
 
+<file path=ppt/slideLayouts/slideLayout20.xml><?xml version="1.0" encoding="utf-8"?>
+<p:sldLayout xmlns:a="http://schemas.openxmlformats.org/drawingml/2006/main" xmlns:r="http://schemas.openxmlformats.org/officeDocument/2006/relationships" xmlns:p="http://schemas.openxmlformats.org/presentationml/2006/main" type="title" showMasterSp="0" preserve="1">
+  <p:cSld name="20 Title Slide Gradient">
+    <p:bg>
+      <p:bgPr>
+        <a:gradFill rotWithShape="1">
+          <a:gsLst>
+            <a:gs pos="0">
+              <a:srgbClr val="23436D"/>
+            </a:gs>
+            <a:gs pos="55000">
+              <a:srgbClr val="1E5473"/>
+            </a:gs>
+            <a:gs pos="100000">
+              <a:srgbClr val="1A8D92"/>
+            </a:gs>
+          </a:gsLst>
+          <a:lin ang="2700000" scaled="0"/>
+        </a:gradFill>
+        <a:effectLst/>
+      </p:bgPr>
+    </p:bg>
+    <p:spTree>
+      <p:nvGrpSpPr>
+        <p:cNvPr id="1" name=""/>
+        <p:cNvGrpSpPr/>
+        <p:nvPr/>
+      </p:nvGrpSpPr>
+      <p:grpSpPr>
+        <a:xfrm>
+          <a:off x="0" y="0"/>
+          <a:ext cx="0" cy="0"/>
+          <a:chOff x="0" y="0"/>
+          <a:chExt cx="0" cy="0"/>
+        </a:xfrm>
+      </p:grpSpPr>
+      <p:sp>
+        <p:nvSpPr>
+          <p:cNvPr id="10" name="Decor Diamond"/>
+          <p:cNvSpPr/>
+          <p:nvPr/>
+        </p:nvSpPr>
+        <p:spPr>
+          <a:xfrm>
+            <a:off x="8534400" y="-914400"/>
+            <a:ext cx="4572000" cy="4572000"/>
+          </a:xfrm>
+          <a:prstGeom prst="diamond">
+            <a:avLst/>
+          </a:prstGeom>
+          <a:noFill/>
+          <a:ln w="19050">
+            <a:solidFill>
+              <a:srgbClr val="FFFFFF">
+                <a:alpha val="9000"/>
+              </a:srgbClr>
+            </a:solidFill>
+          </a:ln>
+        </p:spPr>
+        <p:txBody>
+          <a:bodyPr/>
+          <a:lstStyle/>
+          <a:p>
+            <a:endParaRPr lang="th-TH"/>
+          </a:p>
+        </p:txBody>
+      </p:sp>
+      <p:sp>
+        <p:nvSpPr>
+          <p:cNvPr id="11" name="Decor Diamond"/>
+          <p:cNvSpPr/>
+          <p:nvPr/>
+        </p:nvSpPr>
+        <p:spPr>
+          <a:xfrm>
+            <a:off x="9906000" y="2743200"/>
+            <a:ext cx="2743200" cy="2743200"/>
+          </a:xfrm>
+          <a:prstGeom prst="diamond">
+            <a:avLst/>
+          </a:prstGeom>
+          <a:noFill/>
+          <a:ln w="19050">
+            <a:solidFill>
+              <a:srgbClr val="FFFFFF">
+                <a:alpha val="7000"/>
+              </a:srgbClr>
+            </a:solidFill>
+          </a:ln>
+        </p:spPr>
+        <p:txBody>
+          <a:bodyPr/>
+          <a:lstStyle/>
+          <a:p>
+            <a:endParaRPr lang="th-TH"/>
+          </a:p>
+        </p:txBody>
+      </p:sp>
+      <p:pic>
+        <p:nvPicPr>
+          <p:cNvPr id="12" name="NCT Logo"/>
+          <p:cNvPicPr>
+            <a:picLocks noChangeAspect="1"/>
+          </p:cNvPicPr>
+          <p:nvPr/>
+        </p:nvPicPr>
+        <p:blipFill>
+          <a:blip r:embed="rId2"/>
+          <a:stretch>
+            <a:fillRect/>
+          </a:stretch>
+        </p:blipFill>
+        <p:spPr>
+          <a:xfrm>
+            <a:off x="914400" y="868680"/>
+            <a:ext cx="2560320" cy="1302864"/>
+          </a:xfrm>
+          <a:prstGeom prst="rect">
+            <a:avLst/>
+          </a:prstGeom>
+        </p:spPr>
+      </p:pic>
+      <p:sp>
+        <p:nvSpPr>
+          <p:cNvPr id="13" name="Title Placeholder"/>
+          <p:cNvSpPr>
+            <a:spLocks noGrp="1"/>
+          </p:cNvSpPr>
+          <p:nvPr>
+            <p:ph type="ctrTitle"/>
+          </p:nvPr>
+        </p:nvSpPr>
+        <p:spPr>
+          <a:xfrm>
+            <a:off x="914400" y="2560320"/>
+            <a:ext cx="8229600" cy="1463040"/>
+          </a:xfrm>
+          <a:prstGeom prst="rect">
+            <a:avLst/>
+          </a:prstGeom>
+        </p:spPr>
+        <p:txBody>
+          <a:bodyPr wrap="square" anchor="b" lIns="0" tIns="0" rIns="0" bIns="0" rtlCol="0"/>
+          <a:lstStyle>
+            <a:lvl1pPr algn="l" marL="0" indent="0">
+              <a:lnSpc>
+                <a:spcPct val="106000"/>
+              </a:lnSpc>
+              <a:buNone/>
+              <a:defRPr lang="th-TH" sz="4400" b="1" dirty="0">
+                <a:solidFill>
+                  <a:srgbClr val="FFFFFF"/>
+                </a:solidFill>
+                <a:latin typeface="+mj-lt"/>
+                <a:ea typeface="+mj-ea"/>
+                <a:cs typeface="+mj-cs"/>
+              </a:defRPr>
+            </a:lvl1pPr>
+          </a:lstStyle>
+          <a:p>
+            <a:pPr algn="l" marL="0" indent="0">
+              <a:lnSpc>
+                <a:spcPct val="106000"/>
+              </a:lnSpc>
+              <a:buNone/>
+            </a:pPr>
+            <a:r>
+              <a:rPr lang="th-TH" sz="4400" b="1" dirty="0">
+                <a:solidFill>
+                  <a:srgbClr val="FFFFFF"/>
+                </a:solidFill>
+                <a:latin typeface="+mj-lt"/>
+                <a:ea typeface="+mj-ea"/>
+                <a:cs typeface="+mj-cs"/>
+              </a:rPr>
+              <a:t>ชื่อเรื่องงานนำเสนอ</a:t>
+            </a:r>
+          </a:p>
+        </p:txBody>
+      </p:sp>
+      <p:sp>
+        <p:nvSpPr>
+          <p:cNvPr id="14" name="Accent Rule"/>
+          <p:cNvSpPr/>
+          <p:nvPr/>
+        </p:nvSpPr>
+        <p:spPr>
+          <a:xfrm>
+            <a:off x="914400" y="4206240"/>
+            <a:ext cx="548640" cy="45720"/>
+          </a:xfrm>
+          <a:prstGeom prst="rect">
+            <a:avLst/>
+          </a:prstGeom>
+          <a:solidFill>
+            <a:srgbClr val="FFFFFF">
+              <a:alpha val="72000"/>
+            </a:srgbClr>
+          </a:solidFill>
+          <a:ln>
+            <a:noFill/>
+          </a:ln>
+        </p:spPr>
+        <p:txBody>
+          <a:bodyPr/>
+          <a:lstStyle/>
+          <a:p>
+            <a:endParaRPr lang="th-TH"/>
+          </a:p>
+        </p:txBody>
+      </p:sp>
+      <p:sp>
+        <p:nvSpPr>
+          <p:cNvPr id="15" name="Subtitle"/>
+          <p:cNvSpPr>
+            <a:spLocks noGrp="1"/>
+          </p:cNvSpPr>
+          <p:nvPr>
+            <p:ph type="subTitle" idx="1"/>
+          </p:nvPr>
+        </p:nvSpPr>
+        <p:spPr>
+          <a:xfrm>
+            <a:off x="914400" y="4480560"/>
+            <a:ext cx="7315200" cy="731520"/>
+          </a:xfrm>
+          <a:prstGeom prst="rect">
+            <a:avLst/>
+          </a:prstGeom>
+        </p:spPr>
+        <p:txBody>
+          <a:bodyPr wrap="square" anchor="t" lIns="0" tIns="0" rIns="0" bIns="0" rtlCol="0"/>
+          <a:lstStyle>
+            <a:lvl1pPr algn="l" marL="0" indent="0">
+              <a:lnSpc>
+                <a:spcPct val="130000"/>
+              </a:lnSpc>
+              <a:buNone/>
+              <a:defRPr lang="th-TH" sz="2000" dirty="0">
+                <a:solidFill>
+                  <a:srgbClr val="FFFFFF">
+                    <a:alpha val="80000"/>
+                  </a:srgbClr>
+                </a:solidFill>
+                <a:latin typeface="+mn-lt"/>
+                <a:ea typeface="+mn-ea"/>
+                <a:cs typeface="+mn-cs"/>
+              </a:defRPr>
+            </a:lvl1pPr>
+          </a:lstStyle>
+          <a:p>
+            <a:pPr algn="l" marL="0" indent="0">
+              <a:lnSpc>
+                <a:spcPct val="130000"/>
+              </a:lnSpc>
+              <a:buNone/>
+            </a:pPr>
+            <a:r>
+              <a:rPr lang="th-TH" sz="2000" dirty="0">
+                <a:solidFill>
+                  <a:srgbClr val="FFFFFF">
+                    <a:alpha val="80000"/>
+                  </a:srgbClr>
+                </a:solidFill>
+                <a:latin typeface="+mn-lt"/>
+                <a:ea typeface="+mn-ea"/>
+                <a:cs typeface="+mn-cs"/>
+              </a:rPr>
+              <a:t>คำโปรย / ชื่อลูกค้า / วันที่</a:t>
+            </a:r>
+          </a:p>
+        </p:txBody>
+      </p:sp>
+      <p:sp>
+        <p:nvSpPr>
+          <p:cNvPr id="16" name="Footer Scrim"/>
+          <p:cNvSpPr/>
+          <p:nvPr/>
+        </p:nvSpPr>
+        <p:spPr>
+          <a:xfrm>
+            <a:off x="0" y="5394960"/>
+            <a:ext cx="12192000" cy="1463040"/>
+          </a:xfrm>
+          <a:prstGeom prst="rect">
+            <a:avLst/>
+          </a:prstGeom>
+          <a:gradFill rotWithShape="1">
+            <a:gsLst>
+              <a:gs pos="0">
+                <a:srgbClr val="16324F">
+                  <a:alpha val="0"/>
+                </a:srgbClr>
+              </a:gs>
+              <a:gs pos="55000">
+                <a:srgbClr val="16324F">
+                  <a:alpha val="60000"/>
+                </a:srgbClr>
+              </a:gs>
+              <a:gs pos="100000">
+                <a:srgbClr val="16324F">
+                  <a:alpha val="90000"/>
+                </a:srgbClr>
+              </a:gs>
+            </a:gsLst>
+            <a:lin ang="5400000" scaled="0"/>
+          </a:gradFill>
+          <a:ln>
+            <a:noFill/>
+          </a:ln>
+        </p:spPr>
+        <p:txBody>
+          <a:bodyPr/>
+          <a:lstStyle/>
+          <a:p>
+            <a:endParaRPr lang="th-TH"/>
+          </a:p>
+        </p:txBody>
+      </p:sp>
+      <p:sp>
+        <p:nvSpPr>
+          <p:cNvPr id="90" name="Footer Rule"/>
+          <p:cNvSpPr/>
+          <p:nvPr/>
+        </p:nvSpPr>
+        <p:spPr>
+          <a:xfrm>
+            <a:off x="914400" y="6172200"/>
+            <a:ext cx="10363200" cy="12700"/>
+          </a:xfrm>
+          <a:prstGeom prst="rect">
+            <a:avLst/>
+          </a:prstGeom>
+          <a:solidFill>
+            <a:srgbClr val="FFFFFF">
+              <a:alpha val="28000"/>
+            </a:srgbClr>
+          </a:solidFill>
+          <a:ln>
+            <a:noFill/>
+          </a:ln>
+        </p:spPr>
+        <p:txBody>
+          <a:bodyPr/>
+          <a:lstStyle/>
+          <a:p>
+            <a:endParaRPr lang="th-TH"/>
+          </a:p>
+        </p:txBody>
+      </p:sp>
+      <p:sp>
+        <p:nvSpPr>
+          <p:cNvPr id="91" name="Date Placeholder"/>
+          <p:cNvSpPr>
+            <a:spLocks noGrp="1"/>
+          </p:cNvSpPr>
+          <p:nvPr>
+            <p:ph type="dt" idx="10"/>
+          </p:nvPr>
+        </p:nvSpPr>
+        <p:spPr>
+          <a:xfrm>
+            <a:off x="914400" y="6309360"/>
+            <a:ext cx="2743200" cy="274320"/>
+          </a:xfrm>
+          <a:prstGeom prst="rect">
+            <a:avLst/>
+          </a:prstGeom>
+        </p:spPr>
+        <p:txBody>
+          <a:bodyPr wrap="square" anchor="ctr" lIns="0" tIns="0" rIns="0" bIns="0" rtlCol="0"/>
+          <a:lstStyle>
+            <a:lvl1pPr algn="l" marL="0" indent="0">
+              <a:lnSpc>
+                <a:spcPct val="100000"/>
+              </a:lnSpc>
+              <a:buNone/>
+              <a:defRPr lang="th-TH" sz="1000" dirty="0">
+                <a:solidFill>
+                  <a:srgbClr val="FFFFFF">
+                    <a:alpha val="72000"/>
+                  </a:srgbClr>
+                </a:solidFill>
+                <a:latin typeface="+mn-lt"/>
+                <a:ea typeface="+mn-ea"/>
+                <a:cs typeface="+mn-cs"/>
+              </a:defRPr>
+            </a:lvl1pPr>
+          </a:lstStyle>
+          <a:p>
+            <a:pPr algn="l" marL="0" indent="0">
+              <a:lnSpc>
+                <a:spcPct val="100000"/>
+              </a:lnSpc>
+              <a:buNone/>
+            </a:pPr>
+            <a:endParaRPr lang="th-TH" sz="1000"/>
+          </a:p>
+        </p:txBody>
+      </p:sp>
+      <p:sp>
+        <p:nvSpPr>
+          <p:cNvPr id="92" name="Footer Placeholder"/>
+          <p:cNvSpPr>
+            <a:spLocks noGrp="1"/>
+          </p:cNvSpPr>
+          <p:nvPr>
+            <p:ph type="ftr" idx="11"/>
+          </p:nvPr>
+        </p:nvSpPr>
+        <p:spPr>
+          <a:xfrm>
+            <a:off x="4572000" y="6309360"/>
+            <a:ext cx="3657600" cy="274320"/>
+          </a:xfrm>
+          <a:prstGeom prst="rect">
+            <a:avLst/>
+          </a:prstGeom>
+        </p:spPr>
+        <p:txBody>
+          <a:bodyPr wrap="square" anchor="ctr" lIns="0" tIns="0" rIns="0" bIns="0" rtlCol="0"/>
+          <a:lstStyle>
+            <a:lvl1pPr algn="ctr" marL="0" indent="0">
+              <a:lnSpc>
+                <a:spcPct val="100000"/>
+              </a:lnSpc>
+              <a:buNone/>
+              <a:defRPr lang="th-TH" sz="1000" dirty="0">
+                <a:solidFill>
+                  <a:srgbClr val="FFFFFF">
+                    <a:alpha val="72000"/>
+                  </a:srgbClr>
+                </a:solidFill>
+                <a:latin typeface="+mn-lt"/>
+                <a:ea typeface="+mn-ea"/>
+                <a:cs typeface="+mn-cs"/>
+              </a:defRPr>
+            </a:lvl1pPr>
+          </a:lstStyle>
+          <a:p>
+            <a:pPr algn="ctr" marL="0" indent="0">
+              <a:lnSpc>
+                <a:spcPct val="100000"/>
+              </a:lnSpc>
+              <a:buNone/>
+            </a:pPr>
+            <a:endParaRPr lang="th-TH" sz="1000"/>
+          </a:p>
+        </p:txBody>
+      </p:sp>
+      <p:sp>
+        <p:nvSpPr>
+          <p:cNvPr id="93" name="Slide Number Placeholder"/>
+          <p:cNvSpPr>
+            <a:spLocks noGrp="1"/>
+          </p:cNvSpPr>
+          <p:nvPr>
+            <p:ph type="sldNum" sz="quarter" idx="12"/>
+          </p:nvPr>
+        </p:nvSpPr>
+        <p:spPr>
+          <a:xfrm>
+            <a:off x="9906000" y="6309360"/>
+            <a:ext cx="1371600" cy="274320"/>
+          </a:xfrm>
+          <a:prstGeom prst="rect">
+            <a:avLst/>
+          </a:prstGeom>
+        </p:spPr>
+        <p:txBody>
+          <a:bodyPr anchor="ctr"/>
+          <a:lstStyle>
+            <a:lvl1pPr algn="r" marL="0" indent="0">
+              <a:lnSpc>
+                <a:spcPct val="100000"/>
+              </a:lnSpc>
+              <a:buNone/>
+              <a:defRPr lang="th-TH" sz="1000" dirty="0">
+                <a:solidFill>
+                  <a:srgbClr val="FFFFFF">
+                    <a:alpha val="72000"/>
+                  </a:srgbClr>
+                </a:solidFill>
+                <a:latin typeface="+mn-lt"/>
+                <a:ea typeface="+mn-ea"/>
+                <a:cs typeface="+mn-cs"/>
+              </a:defRPr>
+            </a:lvl1pPr>
+          </a:lstStyle>
+          <a:p>
+            <a:pPr algn="r" marL="0" indent="0">
+              <a:buNone/>
+            </a:pPr>
+            <a:fld id="{B7E3A1C2-4F5D-4A88-9C1E-6D2F0A93B451}" type="slidenum">
+              <a:rPr lang="th-TH" sz="1000">
+                <a:solidFill>
+                  <a:srgbClr val="FFFFFF">
+                    <a:alpha val="72000"/>
+                  </a:srgbClr>
+                </a:solidFill>
+                <a:latin typeface="+mn-lt"/>
+                <a:cs typeface="+mn-cs"/>
+              </a:rPr>
+              <a:t>2</a:t>
+            </a:fld>
+            <a:endParaRPr lang="th-TH" sz="1000"/>
+          </a:p>
+        </p:txBody>
+      </p:sp>
+      <p:pic>
+        <p:nvPicPr>
+          <p:cNvPr id="94" name="NCT Mark"/>
+          <p:cNvPicPr>
+            <a:picLocks noChangeAspect="1"/>
+          </p:cNvPicPr>
+          <p:nvPr/>
+        </p:nvPicPr>
+        <p:blipFill>
+          <a:blip r:embed="rId3"/>
+          <a:stretch>
+            <a:fillRect/>
+          </a:stretch>
+        </p:blipFill>
+        <p:spPr>
+          <a:xfrm>
+            <a:off x="9494520" y="6289360"/>
+            <a:ext cx="274320" cy="174498"/>
+          </a:xfrm>
+          <a:prstGeom prst="rect">
+            <a:avLst/>
+          </a:prstGeom>
+        </p:spPr>
+      </p:pic>
+    </p:spTree>
+  </p:cSld>
+  <p:clrMapOvr>
+    <a:masterClrMapping/>
+  </p:clrMapOvr>
+</p:sldLayout>
+</file>
+
 <file path=ppt/slideLayouts/slideLayout3.xml><?xml version="1.0" encoding="utf-8"?>
 <p:sldLayout xmlns:a="http://schemas.openxmlformats.org/drawingml/2006/main" xmlns:r="http://schemas.openxmlformats.org/officeDocument/2006/relationships" xmlns:p="http://schemas.openxmlformats.org/presentationml/2006/main" type="obj" showMasterSp="0" preserve="1">
   <p:cSld name="03 Title and Content">
@@ -16009,7 +17235,7 @@
           <p:nvPr/>
         </p:nvPicPr>
         <p:blipFill>
-          <a:blip r:embed="rId21"/>
+          <a:blip r:embed="rId22"/>
           <a:stretch>
             <a:fillRect/>
           </a:stretch>
@@ -16047,6 +17273,7 @@
     <p:sldLayoutId id="2147483665" r:id="rId17"/>
     <p:sldLayoutId id="2147483666" r:id="rId18"/>
     <p:sldLayoutId id="2147483667" r:id="rId19"/>
+    <p:sldLayoutId id="2147483668" r:id="rId20"/>
   </p:sldLayoutIdLst>
   <p:txStyles>
     <p:titleStyle>
@@ -16303,7 +17530,7 @@
             <a:pPr/>
             <a:r>
               <a:rPr lang="th-TH" dirty="0"/>
-              <a:t>ภาพรวมสถาปัตยกรรมระบบ</a:t>
+              <a:t>กระบวนการที่เสนอ</a:t>
             </a:r>
           </a:p>
         </p:txBody>
@@ -16326,19 +17553,19 @@
             <a:pPr/>
             <a:r>
               <a:rPr lang="th-TH" dirty="0"/>
-              <a:t>ใช้ชุดชิ้นส่วนมาตรฐาน — กล่องมุมตรง เส้นหักมุมฉาก ไม่มีเงา</a:t>
-            </a:r>
-          </a:p>
-        </p:txBody>
-      </p:sp>
-      <p:sp>
-        <p:nvSpPr>
-          <p:cNvPr id="4" name="Leg"/>
-          <p:cNvSpPr>
-            <a:spLocks noGrp="1"/>
-          </p:cNvSpPr>
-          <p:nvPr>
-            <p:ph type="body" idx="2"/>
+              <a:t>ห้าขั้นตอน ทำงานต่อเนื่องโดยไม่ต้องคีย์ซ้ำ</a:t>
+            </a:r>
+          </a:p>
+        </p:txBody>
+      </p:sp>
+      <p:sp>
+        <p:nvSpPr>
+          <p:cNvPr id="4" name="C0"/>
+          <p:cNvSpPr>
+            <a:spLocks noGrp="1"/>
+          </p:cNvSpPr>
+          <p:nvPr>
+            <p:ph type="body" idx="20"/>
           </p:nvPr>
         </p:nvSpPr>
         <p:spPr/>
@@ -16349,19 +17576,19 @@
             <a:pPr/>
             <a:r>
               <a:rPr lang="th-TH" dirty="0"/>
-              <a:t>กล่องทึบ = ระบบที่มีอยู่  ·  กล่องมีสีหมวด = ส่วนที่เพิ่ม  ·  เส้นทึบ = ข้อมูลไหลอัตโนมัติ</a:t>
-            </a:r>
-          </a:p>
-        </p:txBody>
-      </p:sp>
-      <p:sp>
-        <p:nvSpPr>
-          <p:cNvPr id="5" name="TL"/>
-          <p:cNvSpPr>
-            <a:spLocks noGrp="1"/>
-          </p:cNvSpPr>
-          <p:nvPr>
-            <p:ph type="body" idx="3"/>
+              <a:t>1</a:t>
+            </a:r>
+          </a:p>
+        </p:txBody>
+      </p:sp>
+      <p:sp>
+        <p:nvSpPr>
+          <p:cNvPr id="5" name="H0"/>
+          <p:cNvSpPr>
+            <a:spLocks noGrp="1"/>
+          </p:cNvSpPr>
+          <p:nvPr>
+            <p:ph type="body" idx="21"/>
           </p:nvPr>
         </p:nvSpPr>
         <p:spPr/>
@@ -16372,19 +17599,19 @@
             <a:pPr/>
             <a:r>
               <a:rPr lang="th-TH" dirty="0"/>
-              <a:t>สรุป</a:t>
-            </a:r>
-          </a:p>
-        </p:txBody>
-      </p:sp>
-      <p:sp>
-        <p:nvSpPr>
-          <p:cNvPr id="6" name="TC"/>
-          <p:cNvSpPr>
-            <a:spLocks noGrp="1"/>
-          </p:cNvSpPr>
-          <p:nvPr>
-            <p:ph type="body" idx="4"/>
+              <a:t>รับเอกสาร</a:t>
+            </a:r>
+          </a:p>
+        </p:txBody>
+      </p:sp>
+      <p:sp>
+        <p:nvSpPr>
+          <p:cNvPr id="6" name="B0"/>
+          <p:cNvSpPr>
+            <a:spLocks noGrp="1"/>
+          </p:cNvSpPr>
+          <p:nvPr>
+            <p:ph type="body" idx="22"/>
           </p:nvPr>
         </p:nvSpPr>
         <p:spPr/>
@@ -16395,457 +17622,329 @@
             <a:pPr/>
             <a:r>
               <a:rPr lang="th-TH" dirty="0"/>
-              <a:t>ระบบเดิมไม่ถูกแก้ ของใหม่แทรกเป็นคิวและตัวตรวจกฎคั่นกลางเท่านั้น</a:t>
-            </a:r>
-          </a:p>
-        </p:txBody>
-      </p:sp>
-      <p:sp>
-        <p:nvSpPr>
-          <p:cNvPr id="10" name="Group Zone"/>
-          <p:cNvSpPr/>
-          <p:nvPr/>
-        </p:nvSpPr>
-        <p:spPr>
-          <a:xfrm>
-            <a:off x="3566160" y="2766060"/>
-            <a:ext cx="5257800" cy="1645920"/>
-          </a:xfrm>
-          <a:prstGeom prst="rect">
-            <a:avLst/>
-          </a:prstGeom>
-          <a:solidFill>
-            <a:srgbClr val="E8F6F5"/>
-          </a:solidFill>
-          <a:ln>
-            <a:noFill/>
-          </a:ln>
-        </p:spPr>
-        <p:txBody>
-          <a:bodyPr/>
-          <a:lstStyle/>
-          <a:p>
-            <a:endParaRPr lang="th-TH"/>
-          </a:p>
-        </p:txBody>
-      </p:sp>
-      <p:sp>
-        <p:nvSpPr>
-          <p:cNvPr id="11" name="Group Label"/>
-          <p:cNvSpPr/>
-          <p:nvPr/>
-        </p:nvSpPr>
-        <p:spPr>
-          <a:xfrm>
-            <a:off x="3840480" y="2926080"/>
-            <a:ext cx="3200400" cy="228600"/>
-          </a:xfrm>
-          <a:prstGeom prst="rect">
-            <a:avLst/>
-          </a:prstGeom>
-          <a:noFill/>
-          <a:ln>
-            <a:noFill/>
-          </a:ln>
-        </p:spPr>
-        <p:txBody>
-          <a:bodyPr wrap="square" anchor="ctr" lIns="0" tIns="0" rIns="0" bIns="0" rtlCol="0"/>
-          <a:lstStyle/>
-          <a:p>
-            <a:pPr algn="l" marL="0" indent="0">
-              <a:lnSpc>
-                <a:spcPct val="100000"/>
-              </a:lnSpc>
-              <a:buNone/>
-            </a:pPr>
-            <a:r>
-              <a:rPr lang="th-TH" sz="1200" b="1" spc="120" dirty="0">
-                <a:solidFill>
-                  <a:srgbClr val="216B7F"/>
-                </a:solidFill>
-                <a:latin typeface="+mn-lt"/>
-                <a:ea typeface="+mn-ea"/>
-                <a:cs typeface="+mn-cs"/>
-              </a:rPr>
-              <a:t>ส่วนที่เพิ่มใหม่</a:t>
-            </a:r>
-          </a:p>
-        </p:txBody>
-      </p:sp>
-      <p:sp>
-        <p:nvSpPr>
-          <p:cNvPr id="12" name="Box 1"/>
-          <p:cNvSpPr/>
-          <p:nvPr/>
-        </p:nvSpPr>
-        <p:spPr>
-          <a:xfrm>
-            <a:off x="1143000" y="3223260"/>
-            <a:ext cx="2011680" cy="731520"/>
-          </a:xfrm>
-          <a:prstGeom prst="rect">
-            <a:avLst/>
-          </a:prstGeom>
-          <a:solidFill>
-            <a:srgbClr val="23436D"/>
-          </a:solidFill>
-          <a:ln>
-            <a:noFill/>
-          </a:ln>
-        </p:spPr>
-        <p:txBody>
-          <a:bodyPr wrap="square" anchor="ctr" lIns="0" tIns="0" rIns="0" bIns="0" rtlCol="0"/>
-          <a:lstStyle/>
-          <a:p>
-            <a:pPr algn="ctr" marL="0" indent="0">
-              <a:lnSpc>
-                <a:spcPct val="110000"/>
-              </a:lnSpc>
-              <a:buNone/>
-            </a:pPr>
-            <a:r>
-              <a:rPr lang="th-TH" sz="1200" dirty="0">
-                <a:solidFill>
-                  <a:srgbClr val="FFFFFF"/>
-                </a:solidFill>
-                <a:latin typeface="+mn-lt"/>
-                <a:ea typeface="+mn-ea"/>
-                <a:cs typeface="+mn-cs"/>
-              </a:rPr>
-              <a:t>ระบบ ERP ปัจจุบัน</a:t>
-            </a:r>
-          </a:p>
-        </p:txBody>
-      </p:sp>
-      <p:sp>
-        <p:nvSpPr>
-          <p:cNvPr id="13" name="Box 2"/>
-          <p:cNvSpPr/>
-          <p:nvPr/>
-        </p:nvSpPr>
-        <p:spPr>
-          <a:xfrm>
-            <a:off x="3840480" y="3223260"/>
-            <a:ext cx="2011680" cy="731520"/>
-          </a:xfrm>
-          <a:prstGeom prst="rect">
-            <a:avLst/>
-          </a:prstGeom>
-          <a:solidFill>
-            <a:srgbClr val="FFFFFF"/>
-          </a:solidFill>
-          <a:ln w="12700">
-            <a:solidFill>
-              <a:srgbClr val="2A5EA0"/>
-            </a:solidFill>
-          </a:ln>
-        </p:spPr>
-        <p:txBody>
-          <a:bodyPr wrap="square" anchor="ctr" lIns="0" tIns="0" rIns="0" bIns="0" rtlCol="0"/>
-          <a:lstStyle/>
-          <a:p>
-            <a:pPr algn="ctr" marL="0" indent="0">
-              <a:lnSpc>
-                <a:spcPct val="110000"/>
-              </a:lnSpc>
-              <a:buNone/>
-            </a:pPr>
-            <a:r>
-              <a:rPr lang="th-TH" sz="1200" dirty="0">
-                <a:solidFill>
-                  <a:srgbClr val="333333"/>
-                </a:solidFill>
-                <a:latin typeface="+mn-lt"/>
-                <a:ea typeface="+mn-ea"/>
-                <a:cs typeface="+mn-cs"/>
-              </a:rPr>
-              <a:t>คิวเอกสารกลาง</a:t>
-            </a:r>
-          </a:p>
-        </p:txBody>
-      </p:sp>
-      <p:sp>
-        <p:nvSpPr>
-          <p:cNvPr id="113" name="Box 2 Tab"/>
-          <p:cNvSpPr/>
-          <p:nvPr/>
-        </p:nvSpPr>
-        <p:spPr>
-          <a:xfrm>
-            <a:off x="3954780" y="3337560"/>
-            <a:ext cx="205740" cy="45720"/>
-          </a:xfrm>
-          <a:prstGeom prst="rect">
-            <a:avLst/>
-          </a:prstGeom>
-          <a:solidFill>
-            <a:srgbClr val="2A5EA0"/>
-          </a:solidFill>
-          <a:ln>
-            <a:noFill/>
-          </a:ln>
-        </p:spPr>
-        <p:txBody>
-          <a:bodyPr/>
-          <a:lstStyle/>
-          <a:p>
-            <a:endParaRPr lang="th-TH"/>
-          </a:p>
-        </p:txBody>
-      </p:sp>
-      <p:sp>
-        <p:nvSpPr>
-          <p:cNvPr id="14" name="Box 3"/>
-          <p:cNvSpPr/>
-          <p:nvPr/>
-        </p:nvSpPr>
-        <p:spPr>
-          <a:xfrm>
-            <a:off x="6537960" y="3223260"/>
-            <a:ext cx="2011680" cy="731520"/>
-          </a:xfrm>
-          <a:prstGeom prst="rect">
-            <a:avLst/>
-          </a:prstGeom>
-          <a:solidFill>
-            <a:srgbClr val="FFFFFF"/>
-          </a:solidFill>
-          <a:ln w="12700">
-            <a:solidFill>
-              <a:srgbClr val="BB731B"/>
-            </a:solidFill>
-          </a:ln>
-        </p:spPr>
-        <p:txBody>
-          <a:bodyPr wrap="square" anchor="ctr" lIns="0" tIns="0" rIns="0" bIns="0" rtlCol="0"/>
-          <a:lstStyle/>
-          <a:p>
-            <a:pPr algn="ctr" marL="0" indent="0">
-              <a:lnSpc>
-                <a:spcPct val="110000"/>
-              </a:lnSpc>
-              <a:buNone/>
-            </a:pPr>
-            <a:r>
-              <a:rPr lang="th-TH" sz="1200" dirty="0">
-                <a:solidFill>
-                  <a:srgbClr val="333333"/>
-                </a:solidFill>
-                <a:latin typeface="+mn-lt"/>
-                <a:ea typeface="+mn-ea"/>
-                <a:cs typeface="+mn-cs"/>
-              </a:rPr>
-              <a:t>ตัวตรวจกฎธุรกิจ</a:t>
-            </a:r>
-          </a:p>
-        </p:txBody>
-      </p:sp>
-      <p:sp>
-        <p:nvSpPr>
-          <p:cNvPr id="114" name="Box 3 Tab"/>
-          <p:cNvSpPr/>
-          <p:nvPr/>
-        </p:nvSpPr>
-        <p:spPr>
-          <a:xfrm>
-            <a:off x="6652260" y="3337560"/>
-            <a:ext cx="205740" cy="45720"/>
-          </a:xfrm>
-          <a:prstGeom prst="rect">
-            <a:avLst/>
-          </a:prstGeom>
-          <a:solidFill>
-            <a:srgbClr val="BB731B"/>
-          </a:solidFill>
-          <a:ln>
-            <a:noFill/>
-          </a:ln>
-        </p:spPr>
-        <p:txBody>
-          <a:bodyPr/>
-          <a:lstStyle/>
-          <a:p>
-            <a:endParaRPr lang="th-TH"/>
-          </a:p>
-        </p:txBody>
-      </p:sp>
-      <p:sp>
-        <p:nvSpPr>
-          <p:cNvPr id="15" name="Box 4"/>
-          <p:cNvSpPr/>
-          <p:nvPr/>
-        </p:nvSpPr>
-        <p:spPr>
-          <a:xfrm>
-            <a:off x="9235440" y="3223260"/>
-            <a:ext cx="2011680" cy="731520"/>
-          </a:xfrm>
-          <a:prstGeom prst="rect">
-            <a:avLst/>
-          </a:prstGeom>
-          <a:solidFill>
-            <a:srgbClr val="23436D"/>
-          </a:solidFill>
-          <a:ln>
-            <a:noFill/>
-          </a:ln>
-        </p:spPr>
-        <p:txBody>
-          <a:bodyPr wrap="square" anchor="ctr" lIns="0" tIns="0" rIns="0" bIns="0" rtlCol="0"/>
-          <a:lstStyle/>
-          <a:p>
-            <a:pPr algn="ctr" marL="0" indent="0">
-              <a:lnSpc>
-                <a:spcPct val="110000"/>
-              </a:lnSpc>
-              <a:buNone/>
-            </a:pPr>
-            <a:r>
-              <a:rPr lang="th-TH" sz="1200" dirty="0">
-                <a:solidFill>
-                  <a:srgbClr val="FFFFFF"/>
-                </a:solidFill>
-                <a:latin typeface="+mn-lt"/>
-                <a:ea typeface="+mn-ea"/>
-                <a:cs typeface="+mn-cs"/>
-              </a:rPr>
-              <a:t>ระบบบัญชี</a:t>
-            </a:r>
-          </a:p>
-        </p:txBody>
-      </p:sp>
-      <p:sp>
-        <p:nvSpPr>
-          <p:cNvPr id="16" name="Link 1"/>
-          <p:cNvSpPr/>
-          <p:nvPr/>
-        </p:nvSpPr>
-        <p:spPr>
-          <a:xfrm>
-            <a:off x="3268980" y="3589020"/>
-            <a:ext cx="457200" cy="0"/>
-          </a:xfrm>
-          <a:prstGeom prst="line">
-            <a:avLst/>
-          </a:prstGeom>
-          <a:noFill/>
-          <a:ln w="15875" cap="flat">
-            <a:solidFill>
-              <a:srgbClr val="216B7F"/>
-            </a:solidFill>
-            <a:prstDash val="solid"/>
-            <a:tailEnd type="triangle" w="med" len="med"/>
-          </a:ln>
-        </p:spPr>
-        <p:txBody>
-          <a:bodyPr/>
-          <a:lstStyle/>
-          <a:p>
-            <a:endParaRPr lang="th-TH"/>
-          </a:p>
-        </p:txBody>
-      </p:sp>
-      <p:sp>
-        <p:nvSpPr>
-          <p:cNvPr id="17" name="Link 2"/>
-          <p:cNvSpPr/>
-          <p:nvPr/>
-        </p:nvSpPr>
-        <p:spPr>
-          <a:xfrm>
-            <a:off x="5966460" y="3589020"/>
-            <a:ext cx="457200" cy="0"/>
-          </a:xfrm>
-          <a:prstGeom prst="line">
-            <a:avLst/>
-          </a:prstGeom>
-          <a:noFill/>
-          <a:ln w="15875" cap="flat">
-            <a:solidFill>
-              <a:srgbClr val="216B7F"/>
-            </a:solidFill>
-            <a:prstDash val="solid"/>
-            <a:tailEnd type="triangle" w="med" len="med"/>
-          </a:ln>
-        </p:spPr>
-        <p:txBody>
-          <a:bodyPr/>
-          <a:lstStyle/>
-          <a:p>
-            <a:endParaRPr lang="th-TH"/>
-          </a:p>
-        </p:txBody>
-      </p:sp>
-      <p:sp>
-        <p:nvSpPr>
-          <p:cNvPr id="18" name="Link 3"/>
-          <p:cNvSpPr/>
-          <p:nvPr/>
-        </p:nvSpPr>
-        <p:spPr>
-          <a:xfrm>
-            <a:off x="8663940" y="3589020"/>
-            <a:ext cx="457200" cy="0"/>
-          </a:xfrm>
-          <a:prstGeom prst="line">
-            <a:avLst/>
-          </a:prstGeom>
-          <a:noFill/>
-          <a:ln w="15875" cap="flat">
-            <a:solidFill>
-              <a:srgbClr val="216B7F"/>
-            </a:solidFill>
-            <a:prstDash val="solid"/>
-            <a:tailEnd type="triangle" w="med" len="med"/>
-          </a:ln>
-        </p:spPr>
-        <p:txBody>
-          <a:bodyPr/>
-          <a:lstStyle/>
-          <a:p>
-            <a:endParaRPr lang="th-TH"/>
-          </a:p>
-        </p:txBody>
-      </p:sp>
-      <p:sp>
-        <p:nvSpPr>
-          <p:cNvPr id="19" name="Edge Label"/>
-          <p:cNvSpPr/>
-          <p:nvPr/>
-        </p:nvSpPr>
-        <p:spPr>
-          <a:xfrm>
-            <a:off x="5806440" y="3268980"/>
-            <a:ext cx="822960" cy="228600"/>
-          </a:xfrm>
-          <a:prstGeom prst="rect">
-            <a:avLst/>
-          </a:prstGeom>
-          <a:noFill/>
-          <a:ln>
-            <a:noFill/>
-          </a:ln>
-        </p:spPr>
-        <p:txBody>
-          <a:bodyPr wrap="square" anchor="ctr" lIns="0" tIns="0" rIns="0" bIns="0" rtlCol="0"/>
-          <a:lstStyle/>
-          <a:p>
-            <a:pPr algn="ctr" marL="0" indent="0">
-              <a:lnSpc>
-                <a:spcPct val="100000"/>
-              </a:lnSpc>
-              <a:buNone/>
-            </a:pPr>
-            <a:r>
-              <a:rPr lang="th-TH" sz="1000" dirty="0">
-                <a:solidFill>
-                  <a:srgbClr val="5F5F5F"/>
-                </a:solidFill>
-                <a:latin typeface="+mn-lt"/>
-                <a:ea typeface="+mn-ea"/>
-                <a:cs typeface="+mn-cs"/>
-              </a:rPr>
-              <a:t>ผ่านกฎ</a:t>
+              <a:t>สแกนหรือรับไฟล์เข้าคิวกลาง</a:t>
+            </a:r>
+          </a:p>
+        </p:txBody>
+      </p:sp>
+      <p:sp>
+        <p:nvSpPr>
+          <p:cNvPr id="7" name="C1"/>
+          <p:cNvSpPr>
+            <a:spLocks noGrp="1"/>
+          </p:cNvSpPr>
+          <p:nvPr>
+            <p:ph type="body" idx="23"/>
+          </p:nvPr>
+        </p:nvSpPr>
+        <p:spPr/>
+        <p:txBody>
+          <a:bodyPr/>
+          <a:lstStyle/>
+          <a:p>
+            <a:pPr/>
+            <a:r>
+              <a:rPr lang="th-TH" dirty="0"/>
+              <a:t>2</a:t>
+            </a:r>
+          </a:p>
+        </p:txBody>
+      </p:sp>
+      <p:sp>
+        <p:nvSpPr>
+          <p:cNvPr id="8" name="H1"/>
+          <p:cNvSpPr>
+            <a:spLocks noGrp="1"/>
+          </p:cNvSpPr>
+          <p:nvPr>
+            <p:ph type="body" idx="24"/>
+          </p:nvPr>
+        </p:nvSpPr>
+        <p:spPr/>
+        <p:txBody>
+          <a:bodyPr/>
+          <a:lstStyle/>
+          <a:p>
+            <a:pPr/>
+            <a:r>
+              <a:rPr lang="th-TH" dirty="0"/>
+              <a:t>อ่านข้อมูล</a:t>
+            </a:r>
+          </a:p>
+        </p:txBody>
+      </p:sp>
+      <p:sp>
+        <p:nvSpPr>
+          <p:cNvPr id="9" name="B1"/>
+          <p:cNvSpPr>
+            <a:spLocks noGrp="1"/>
+          </p:cNvSpPr>
+          <p:nvPr>
+            <p:ph type="body" idx="25"/>
+          </p:nvPr>
+        </p:nvSpPr>
+        <p:spPr/>
+        <p:txBody>
+          <a:bodyPr/>
+          <a:lstStyle/>
+          <a:p>
+            <a:pPr/>
+            <a:r>
+              <a:rPr lang="th-TH" dirty="0"/>
+              <a:t>ดึงฟิลด์สำคัญ ตรวจกับต้นทาง</a:t>
+            </a:r>
+          </a:p>
+        </p:txBody>
+      </p:sp>
+      <p:sp>
+        <p:nvSpPr>
+          <p:cNvPr id="10" name="C2"/>
+          <p:cNvSpPr>
+            <a:spLocks noGrp="1"/>
+          </p:cNvSpPr>
+          <p:nvPr>
+            <p:ph type="body" idx="26"/>
+          </p:nvPr>
+        </p:nvSpPr>
+        <p:spPr/>
+        <p:txBody>
+          <a:bodyPr/>
+          <a:lstStyle/>
+          <a:p>
+            <a:pPr/>
+            <a:r>
+              <a:rPr lang="th-TH" dirty="0"/>
+              <a:t>3</a:t>
+            </a:r>
+          </a:p>
+        </p:txBody>
+      </p:sp>
+      <p:sp>
+        <p:nvSpPr>
+          <p:cNvPr id="11" name="H2"/>
+          <p:cNvSpPr>
+            <a:spLocks noGrp="1"/>
+          </p:cNvSpPr>
+          <p:nvPr>
+            <p:ph type="body" idx="27"/>
+          </p:nvPr>
+        </p:nvSpPr>
+        <p:spPr/>
+        <p:txBody>
+          <a:bodyPr/>
+          <a:lstStyle/>
+          <a:p>
+            <a:pPr/>
+            <a:r>
+              <a:rPr lang="th-TH" dirty="0"/>
+              <a:t>ตรวจสอบ</a:t>
+            </a:r>
+          </a:p>
+        </p:txBody>
+      </p:sp>
+      <p:sp>
+        <p:nvSpPr>
+          <p:cNvPr id="12" name="B2"/>
+          <p:cNvSpPr>
+            <a:spLocks noGrp="1"/>
+          </p:cNvSpPr>
+          <p:nvPr>
+            <p:ph type="body" idx="28"/>
+          </p:nvPr>
+        </p:nvSpPr>
+        <p:spPr/>
+        <p:txBody>
+          <a:bodyPr/>
+          <a:lstStyle/>
+          <a:p>
+            <a:pPr/>
+            <a:r>
+              <a:rPr lang="th-TH" dirty="0"/>
+              <a:t>กฎธุรกิจและวงเงินอนุมัติ</a:t>
+            </a:r>
+          </a:p>
+        </p:txBody>
+      </p:sp>
+      <p:sp>
+        <p:nvSpPr>
+          <p:cNvPr id="13" name="C3"/>
+          <p:cNvSpPr>
+            <a:spLocks noGrp="1"/>
+          </p:cNvSpPr>
+          <p:nvPr>
+            <p:ph type="body" idx="29"/>
+          </p:nvPr>
+        </p:nvSpPr>
+        <p:spPr/>
+        <p:txBody>
+          <a:bodyPr/>
+          <a:lstStyle/>
+          <a:p>
+            <a:pPr/>
+            <a:r>
+              <a:rPr lang="th-TH" dirty="0"/>
+              <a:t>4</a:t>
+            </a:r>
+          </a:p>
+        </p:txBody>
+      </p:sp>
+      <p:sp>
+        <p:nvSpPr>
+          <p:cNvPr id="14" name="H3"/>
+          <p:cNvSpPr>
+            <a:spLocks noGrp="1"/>
+          </p:cNvSpPr>
+          <p:nvPr>
+            <p:ph type="body" idx="30"/>
+          </p:nvPr>
+        </p:nvSpPr>
+        <p:spPr/>
+        <p:txBody>
+          <a:bodyPr/>
+          <a:lstStyle/>
+          <a:p>
+            <a:pPr/>
+            <a:r>
+              <a:rPr lang="th-TH" dirty="0"/>
+              <a:t>บันทึก</a:t>
+            </a:r>
+          </a:p>
+        </p:txBody>
+      </p:sp>
+      <p:sp>
+        <p:nvSpPr>
+          <p:cNvPr id="15" name="B3"/>
+          <p:cNvSpPr>
+            <a:spLocks noGrp="1"/>
+          </p:cNvSpPr>
+          <p:nvPr>
+            <p:ph type="body" idx="31"/>
+          </p:nvPr>
+        </p:nvSpPr>
+        <p:spPr/>
+        <p:txBody>
+          <a:bodyPr/>
+          <a:lstStyle/>
+          <a:p>
+            <a:pPr/>
+            <a:r>
+              <a:rPr lang="th-TH" dirty="0"/>
+              <a:t>ลงระบบบัญชีพร้อม audit trail</a:t>
+            </a:r>
+          </a:p>
+        </p:txBody>
+      </p:sp>
+      <p:sp>
+        <p:nvSpPr>
+          <p:cNvPr id="16" name="C4"/>
+          <p:cNvSpPr>
+            <a:spLocks noGrp="1"/>
+          </p:cNvSpPr>
+          <p:nvPr>
+            <p:ph type="body" idx="32"/>
+          </p:nvPr>
+        </p:nvSpPr>
+        <p:spPr/>
+        <p:txBody>
+          <a:bodyPr/>
+          <a:lstStyle/>
+          <a:p>
+            <a:pPr/>
+            <a:r>
+              <a:rPr lang="th-TH" dirty="0"/>
+              <a:t>5</a:t>
+            </a:r>
+          </a:p>
+        </p:txBody>
+      </p:sp>
+      <p:sp>
+        <p:nvSpPr>
+          <p:cNvPr id="17" name="H4"/>
+          <p:cNvSpPr>
+            <a:spLocks noGrp="1"/>
+          </p:cNvSpPr>
+          <p:nvPr>
+            <p:ph type="body" idx="33"/>
+          </p:nvPr>
+        </p:nvSpPr>
+        <p:spPr/>
+        <p:txBody>
+          <a:bodyPr/>
+          <a:lstStyle/>
+          <a:p>
+            <a:pPr/>
+            <a:r>
+              <a:rPr lang="th-TH" dirty="0"/>
+              <a:t>กระทบยอด</a:t>
+            </a:r>
+          </a:p>
+        </p:txBody>
+      </p:sp>
+      <p:sp>
+        <p:nvSpPr>
+          <p:cNvPr id="18" name="B4"/>
+          <p:cNvSpPr>
+            <a:spLocks noGrp="1"/>
+          </p:cNvSpPr>
+          <p:nvPr>
+            <p:ph type="body" idx="34"/>
+          </p:nvPr>
+        </p:nvSpPr>
+        <p:spPr/>
+        <p:txBody>
+          <a:bodyPr/>
+          <a:lstStyle/>
+          <a:p>
+            <a:pPr/>
+            <a:r>
+              <a:rPr lang="th-TH" dirty="0"/>
+              <a:t>จับคู่อัตโนมัติ ส่งรายงาน</a:t>
+            </a:r>
+          </a:p>
+        </p:txBody>
+      </p:sp>
+      <p:sp>
+        <p:nvSpPr>
+          <p:cNvPr id="19" name="RL"/>
+          <p:cNvSpPr>
+            <a:spLocks noGrp="1"/>
+          </p:cNvSpPr>
+          <p:nvPr>
+            <p:ph type="body" idx="35"/>
+          </p:nvPr>
+        </p:nvSpPr>
+        <p:spPr/>
+        <p:txBody>
+          <a:bodyPr/>
+          <a:lstStyle/>
+          <a:p>
+            <a:pPr/>
+            <a:r>
+              <a:rPr lang="th-TH" dirty="0"/>
+              <a:t>ผลลัพธ์</a:t>
+            </a:r>
+          </a:p>
+        </p:txBody>
+      </p:sp>
+      <p:sp>
+        <p:nvSpPr>
+          <p:cNvPr id="20" name="RC"/>
+          <p:cNvSpPr>
+            <a:spLocks noGrp="1"/>
+          </p:cNvSpPr>
+          <p:nvPr>
+            <p:ph type="body" idx="36"/>
+          </p:nvPr>
+        </p:nvSpPr>
+        <p:spPr/>
+        <p:txBody>
+          <a:bodyPr/>
+          <a:lstStyle/>
+          <a:p>
+            <a:pPr/>
+            <a:r>
+              <a:rPr lang="th-TH" dirty="0"/>
+              <a:t>เอกสารหนึ่งใบผ่านครบห้าขั้นโดยไม่มีการคีย์ซ้ำเลย</a:t>
             </a:r>
           </a:p>
         </p:txBody>
@@ -16859,6 +17958,596 @@
 </file>
 
 <file path=ppt/slides/slide11.xml><?xml version="1.0" encoding="utf-8"?>
+<p:sld xmlns:a="http://schemas.openxmlformats.org/drawingml/2006/main" xmlns:r="http://schemas.openxmlformats.org/officeDocument/2006/relationships" xmlns:p="http://schemas.openxmlformats.org/presentationml/2006/main">
+  <p:cSld name="">
+    <p:spTree>
+      <p:nvGrpSpPr>
+        <p:cNvPr id="1" name=""/>
+        <p:cNvGrpSpPr/>
+        <p:nvPr/>
+      </p:nvGrpSpPr>
+      <p:grpSpPr>
+        <a:xfrm>
+          <a:off x="0" y="0"/>
+          <a:ext cx="0" cy="0"/>
+          <a:chOff x="0" y="0"/>
+          <a:chExt cx="0" cy="0"/>
+        </a:xfrm>
+      </p:grpSpPr>
+      <p:sp>
+        <p:nvSpPr>
+          <p:cNvPr id="2" name="Title"/>
+          <p:cNvSpPr>
+            <a:spLocks noGrp="1"/>
+          </p:cNvSpPr>
+          <p:nvPr>
+            <p:ph type="title"/>
+          </p:nvPr>
+        </p:nvSpPr>
+        <p:spPr/>
+        <p:txBody>
+          <a:bodyPr/>
+          <a:lstStyle/>
+          <a:p>
+            <a:pPr/>
+            <a:r>
+              <a:rPr lang="th-TH" dirty="0"/>
+              <a:t>ภาพรวมสถาปัตยกรรมระบบ</a:t>
+            </a:r>
+          </a:p>
+        </p:txBody>
+      </p:sp>
+      <p:sp>
+        <p:nvSpPr>
+          <p:cNvPr id="3" name="Sub"/>
+          <p:cNvSpPr>
+            <a:spLocks noGrp="1"/>
+          </p:cNvSpPr>
+          <p:nvPr>
+            <p:ph type="body" idx="1"/>
+          </p:nvPr>
+        </p:nvSpPr>
+        <p:spPr/>
+        <p:txBody>
+          <a:bodyPr/>
+          <a:lstStyle/>
+          <a:p>
+            <a:pPr/>
+            <a:r>
+              <a:rPr lang="th-TH" dirty="0"/>
+              <a:t>ใช้ชุดชิ้นส่วนมาตรฐาน — กล่องมุมตรง เส้นหักมุมฉาก ไม่มีเงา</a:t>
+            </a:r>
+          </a:p>
+        </p:txBody>
+      </p:sp>
+      <p:sp>
+        <p:nvSpPr>
+          <p:cNvPr id="4" name="Leg"/>
+          <p:cNvSpPr>
+            <a:spLocks noGrp="1"/>
+          </p:cNvSpPr>
+          <p:nvPr>
+            <p:ph type="body" idx="2"/>
+          </p:nvPr>
+        </p:nvSpPr>
+        <p:spPr/>
+        <p:txBody>
+          <a:bodyPr/>
+          <a:lstStyle/>
+          <a:p>
+            <a:pPr/>
+            <a:r>
+              <a:rPr lang="th-TH" dirty="0"/>
+              <a:t>กล่องทึบ = ระบบที่มีอยู่  ·  กล่องมีสีหมวด = ส่วนที่เพิ่ม  ·  เส้นทึบ = ข้อมูลไหลอัตโนมัติ</a:t>
+            </a:r>
+          </a:p>
+        </p:txBody>
+      </p:sp>
+      <p:sp>
+        <p:nvSpPr>
+          <p:cNvPr id="5" name="TL"/>
+          <p:cNvSpPr>
+            <a:spLocks noGrp="1"/>
+          </p:cNvSpPr>
+          <p:nvPr>
+            <p:ph type="body" idx="3"/>
+          </p:nvPr>
+        </p:nvSpPr>
+        <p:spPr/>
+        <p:txBody>
+          <a:bodyPr/>
+          <a:lstStyle/>
+          <a:p>
+            <a:pPr/>
+            <a:r>
+              <a:rPr lang="th-TH" dirty="0"/>
+              <a:t>สรุป</a:t>
+            </a:r>
+          </a:p>
+        </p:txBody>
+      </p:sp>
+      <p:sp>
+        <p:nvSpPr>
+          <p:cNvPr id="6" name="TC"/>
+          <p:cNvSpPr>
+            <a:spLocks noGrp="1"/>
+          </p:cNvSpPr>
+          <p:nvPr>
+            <p:ph type="body" idx="4"/>
+          </p:nvPr>
+        </p:nvSpPr>
+        <p:spPr/>
+        <p:txBody>
+          <a:bodyPr/>
+          <a:lstStyle/>
+          <a:p>
+            <a:pPr/>
+            <a:r>
+              <a:rPr lang="th-TH" dirty="0"/>
+              <a:t>ระบบเดิมไม่ถูกแก้ ของใหม่แทรกเป็นคิวและตัวตรวจกฎคั่นกลางเท่านั้น</a:t>
+            </a:r>
+          </a:p>
+        </p:txBody>
+      </p:sp>
+      <p:sp>
+        <p:nvSpPr>
+          <p:cNvPr id="10" name="Group Zone"/>
+          <p:cNvSpPr/>
+          <p:nvPr/>
+        </p:nvSpPr>
+        <p:spPr>
+          <a:xfrm>
+            <a:off x="3566160" y="2766060"/>
+            <a:ext cx="5257800" cy="1645920"/>
+          </a:xfrm>
+          <a:prstGeom prst="rect">
+            <a:avLst/>
+          </a:prstGeom>
+          <a:solidFill>
+            <a:srgbClr val="E8F6F5"/>
+          </a:solidFill>
+          <a:ln>
+            <a:noFill/>
+          </a:ln>
+        </p:spPr>
+        <p:txBody>
+          <a:bodyPr/>
+          <a:lstStyle/>
+          <a:p>
+            <a:endParaRPr lang="th-TH"/>
+          </a:p>
+        </p:txBody>
+      </p:sp>
+      <p:sp>
+        <p:nvSpPr>
+          <p:cNvPr id="11" name="Group Label"/>
+          <p:cNvSpPr/>
+          <p:nvPr/>
+        </p:nvSpPr>
+        <p:spPr>
+          <a:xfrm>
+            <a:off x="3840480" y="2926080"/>
+            <a:ext cx="3200400" cy="228600"/>
+          </a:xfrm>
+          <a:prstGeom prst="rect">
+            <a:avLst/>
+          </a:prstGeom>
+          <a:noFill/>
+          <a:ln>
+            <a:noFill/>
+          </a:ln>
+        </p:spPr>
+        <p:txBody>
+          <a:bodyPr wrap="square" anchor="ctr" lIns="0" tIns="0" rIns="0" bIns="0" rtlCol="0"/>
+          <a:lstStyle/>
+          <a:p>
+            <a:pPr algn="l" marL="0" indent="0">
+              <a:lnSpc>
+                <a:spcPct val="100000"/>
+              </a:lnSpc>
+              <a:buNone/>
+            </a:pPr>
+            <a:r>
+              <a:rPr lang="th-TH" sz="1200" b="1" spc="120" dirty="0">
+                <a:solidFill>
+                  <a:srgbClr val="216B7F"/>
+                </a:solidFill>
+                <a:latin typeface="+mn-lt"/>
+                <a:ea typeface="+mn-ea"/>
+                <a:cs typeface="+mn-cs"/>
+              </a:rPr>
+              <a:t>ส่วนที่เพิ่มใหม่</a:t>
+            </a:r>
+          </a:p>
+        </p:txBody>
+      </p:sp>
+      <p:sp>
+        <p:nvSpPr>
+          <p:cNvPr id="12" name="Box 1"/>
+          <p:cNvSpPr/>
+          <p:nvPr/>
+        </p:nvSpPr>
+        <p:spPr>
+          <a:xfrm>
+            <a:off x="1143000" y="3223260"/>
+            <a:ext cx="2011680" cy="731520"/>
+          </a:xfrm>
+          <a:prstGeom prst="rect">
+            <a:avLst/>
+          </a:prstGeom>
+          <a:solidFill>
+            <a:srgbClr val="23436D"/>
+          </a:solidFill>
+          <a:ln>
+            <a:noFill/>
+          </a:ln>
+        </p:spPr>
+        <p:txBody>
+          <a:bodyPr wrap="square" anchor="ctr" lIns="0" tIns="0" rIns="0" bIns="0" rtlCol="0"/>
+          <a:lstStyle/>
+          <a:p>
+            <a:pPr algn="ctr" marL="0" indent="0">
+              <a:lnSpc>
+                <a:spcPct val="110000"/>
+              </a:lnSpc>
+              <a:buNone/>
+            </a:pPr>
+            <a:r>
+              <a:rPr lang="th-TH" sz="1200" dirty="0">
+                <a:solidFill>
+                  <a:srgbClr val="FFFFFF"/>
+                </a:solidFill>
+                <a:latin typeface="+mn-lt"/>
+                <a:ea typeface="+mn-ea"/>
+                <a:cs typeface="+mn-cs"/>
+              </a:rPr>
+              <a:t>ระบบ ERP ปัจจุบัน</a:t>
+            </a:r>
+          </a:p>
+        </p:txBody>
+      </p:sp>
+      <p:sp>
+        <p:nvSpPr>
+          <p:cNvPr id="13" name="Box 2"/>
+          <p:cNvSpPr/>
+          <p:nvPr/>
+        </p:nvSpPr>
+        <p:spPr>
+          <a:xfrm>
+            <a:off x="3840480" y="3223260"/>
+            <a:ext cx="2011680" cy="731520"/>
+          </a:xfrm>
+          <a:prstGeom prst="rect">
+            <a:avLst/>
+          </a:prstGeom>
+          <a:solidFill>
+            <a:srgbClr val="FFFFFF"/>
+          </a:solidFill>
+          <a:ln w="12700">
+            <a:solidFill>
+              <a:srgbClr val="2A5EA0"/>
+            </a:solidFill>
+          </a:ln>
+        </p:spPr>
+        <p:txBody>
+          <a:bodyPr wrap="square" anchor="ctr" lIns="0" tIns="0" rIns="0" bIns="0" rtlCol="0"/>
+          <a:lstStyle/>
+          <a:p>
+            <a:pPr algn="ctr" marL="0" indent="0">
+              <a:lnSpc>
+                <a:spcPct val="110000"/>
+              </a:lnSpc>
+              <a:buNone/>
+            </a:pPr>
+            <a:r>
+              <a:rPr lang="th-TH" sz="1200" dirty="0">
+                <a:solidFill>
+                  <a:srgbClr val="333333"/>
+                </a:solidFill>
+                <a:latin typeface="+mn-lt"/>
+                <a:ea typeface="+mn-ea"/>
+                <a:cs typeface="+mn-cs"/>
+              </a:rPr>
+              <a:t>คิวเอกสารกลาง</a:t>
+            </a:r>
+          </a:p>
+        </p:txBody>
+      </p:sp>
+      <p:sp>
+        <p:nvSpPr>
+          <p:cNvPr id="113" name="Box 2 Tab"/>
+          <p:cNvSpPr/>
+          <p:nvPr/>
+        </p:nvSpPr>
+        <p:spPr>
+          <a:xfrm>
+            <a:off x="3954780" y="3337560"/>
+            <a:ext cx="205740" cy="45720"/>
+          </a:xfrm>
+          <a:prstGeom prst="rect">
+            <a:avLst/>
+          </a:prstGeom>
+          <a:solidFill>
+            <a:srgbClr val="2A5EA0"/>
+          </a:solidFill>
+          <a:ln>
+            <a:noFill/>
+          </a:ln>
+        </p:spPr>
+        <p:txBody>
+          <a:bodyPr/>
+          <a:lstStyle/>
+          <a:p>
+            <a:endParaRPr lang="th-TH"/>
+          </a:p>
+        </p:txBody>
+      </p:sp>
+      <p:sp>
+        <p:nvSpPr>
+          <p:cNvPr id="14" name="Box 3"/>
+          <p:cNvSpPr/>
+          <p:nvPr/>
+        </p:nvSpPr>
+        <p:spPr>
+          <a:xfrm>
+            <a:off x="6537960" y="3223260"/>
+            <a:ext cx="2011680" cy="731520"/>
+          </a:xfrm>
+          <a:prstGeom prst="rect">
+            <a:avLst/>
+          </a:prstGeom>
+          <a:solidFill>
+            <a:srgbClr val="FFFFFF"/>
+          </a:solidFill>
+          <a:ln w="12700">
+            <a:solidFill>
+              <a:srgbClr val="BB731B"/>
+            </a:solidFill>
+          </a:ln>
+        </p:spPr>
+        <p:txBody>
+          <a:bodyPr wrap="square" anchor="ctr" lIns="0" tIns="0" rIns="0" bIns="0" rtlCol="0"/>
+          <a:lstStyle/>
+          <a:p>
+            <a:pPr algn="ctr" marL="0" indent="0">
+              <a:lnSpc>
+                <a:spcPct val="110000"/>
+              </a:lnSpc>
+              <a:buNone/>
+            </a:pPr>
+            <a:r>
+              <a:rPr lang="th-TH" sz="1200" dirty="0">
+                <a:solidFill>
+                  <a:srgbClr val="333333"/>
+                </a:solidFill>
+                <a:latin typeface="+mn-lt"/>
+                <a:ea typeface="+mn-ea"/>
+                <a:cs typeface="+mn-cs"/>
+              </a:rPr>
+              <a:t>ตัวตรวจกฎธุรกิจ</a:t>
+            </a:r>
+          </a:p>
+        </p:txBody>
+      </p:sp>
+      <p:sp>
+        <p:nvSpPr>
+          <p:cNvPr id="114" name="Box 3 Tab"/>
+          <p:cNvSpPr/>
+          <p:nvPr/>
+        </p:nvSpPr>
+        <p:spPr>
+          <a:xfrm>
+            <a:off x="6652260" y="3337560"/>
+            <a:ext cx="205740" cy="45720"/>
+          </a:xfrm>
+          <a:prstGeom prst="rect">
+            <a:avLst/>
+          </a:prstGeom>
+          <a:solidFill>
+            <a:srgbClr val="BB731B"/>
+          </a:solidFill>
+          <a:ln>
+            <a:noFill/>
+          </a:ln>
+        </p:spPr>
+        <p:txBody>
+          <a:bodyPr/>
+          <a:lstStyle/>
+          <a:p>
+            <a:endParaRPr lang="th-TH"/>
+          </a:p>
+        </p:txBody>
+      </p:sp>
+      <p:sp>
+        <p:nvSpPr>
+          <p:cNvPr id="15" name="Box 4"/>
+          <p:cNvSpPr/>
+          <p:nvPr/>
+        </p:nvSpPr>
+        <p:spPr>
+          <a:xfrm>
+            <a:off x="9235440" y="3223260"/>
+            <a:ext cx="2011680" cy="731520"/>
+          </a:xfrm>
+          <a:prstGeom prst="rect">
+            <a:avLst/>
+          </a:prstGeom>
+          <a:solidFill>
+            <a:srgbClr val="23436D"/>
+          </a:solidFill>
+          <a:ln>
+            <a:noFill/>
+          </a:ln>
+        </p:spPr>
+        <p:txBody>
+          <a:bodyPr wrap="square" anchor="ctr" lIns="0" tIns="0" rIns="0" bIns="0" rtlCol="0"/>
+          <a:lstStyle/>
+          <a:p>
+            <a:pPr algn="ctr" marL="0" indent="0">
+              <a:lnSpc>
+                <a:spcPct val="110000"/>
+              </a:lnSpc>
+              <a:buNone/>
+            </a:pPr>
+            <a:r>
+              <a:rPr lang="th-TH" sz="1200" dirty="0">
+                <a:solidFill>
+                  <a:srgbClr val="FFFFFF"/>
+                </a:solidFill>
+                <a:latin typeface="+mn-lt"/>
+                <a:ea typeface="+mn-ea"/>
+                <a:cs typeface="+mn-cs"/>
+              </a:rPr>
+              <a:t>ระบบบัญชี</a:t>
+            </a:r>
+          </a:p>
+        </p:txBody>
+      </p:sp>
+      <p:sp>
+        <p:nvSpPr>
+          <p:cNvPr id="16" name="Link 1"/>
+          <p:cNvSpPr/>
+          <p:nvPr/>
+        </p:nvSpPr>
+        <p:spPr>
+          <a:xfrm>
+            <a:off x="3268980" y="3589020"/>
+            <a:ext cx="457200" cy="0"/>
+          </a:xfrm>
+          <a:prstGeom prst="line">
+            <a:avLst/>
+          </a:prstGeom>
+          <a:noFill/>
+          <a:ln w="15875" cap="flat">
+            <a:solidFill>
+              <a:srgbClr val="216B7F"/>
+            </a:solidFill>
+            <a:prstDash val="solid"/>
+            <a:tailEnd type="triangle" w="med" len="med"/>
+          </a:ln>
+        </p:spPr>
+        <p:txBody>
+          <a:bodyPr/>
+          <a:lstStyle/>
+          <a:p>
+            <a:endParaRPr lang="th-TH"/>
+          </a:p>
+        </p:txBody>
+      </p:sp>
+      <p:sp>
+        <p:nvSpPr>
+          <p:cNvPr id="17" name="Link 2"/>
+          <p:cNvSpPr/>
+          <p:nvPr/>
+        </p:nvSpPr>
+        <p:spPr>
+          <a:xfrm>
+            <a:off x="5966460" y="3589020"/>
+            <a:ext cx="457200" cy="0"/>
+          </a:xfrm>
+          <a:prstGeom prst="line">
+            <a:avLst/>
+          </a:prstGeom>
+          <a:noFill/>
+          <a:ln w="15875" cap="flat">
+            <a:solidFill>
+              <a:srgbClr val="216B7F"/>
+            </a:solidFill>
+            <a:prstDash val="solid"/>
+            <a:tailEnd type="triangle" w="med" len="med"/>
+          </a:ln>
+        </p:spPr>
+        <p:txBody>
+          <a:bodyPr/>
+          <a:lstStyle/>
+          <a:p>
+            <a:endParaRPr lang="th-TH"/>
+          </a:p>
+        </p:txBody>
+      </p:sp>
+      <p:sp>
+        <p:nvSpPr>
+          <p:cNvPr id="18" name="Link 3"/>
+          <p:cNvSpPr/>
+          <p:nvPr/>
+        </p:nvSpPr>
+        <p:spPr>
+          <a:xfrm>
+            <a:off x="8663940" y="3589020"/>
+            <a:ext cx="457200" cy="0"/>
+          </a:xfrm>
+          <a:prstGeom prst="line">
+            <a:avLst/>
+          </a:prstGeom>
+          <a:noFill/>
+          <a:ln w="15875" cap="flat">
+            <a:solidFill>
+              <a:srgbClr val="216B7F"/>
+            </a:solidFill>
+            <a:prstDash val="solid"/>
+            <a:tailEnd type="triangle" w="med" len="med"/>
+          </a:ln>
+        </p:spPr>
+        <p:txBody>
+          <a:bodyPr/>
+          <a:lstStyle/>
+          <a:p>
+            <a:endParaRPr lang="th-TH"/>
+          </a:p>
+        </p:txBody>
+      </p:sp>
+      <p:sp>
+        <p:nvSpPr>
+          <p:cNvPr id="19" name="Edge Label"/>
+          <p:cNvSpPr/>
+          <p:nvPr/>
+        </p:nvSpPr>
+        <p:spPr>
+          <a:xfrm>
+            <a:off x="5806440" y="3268980"/>
+            <a:ext cx="822960" cy="228600"/>
+          </a:xfrm>
+          <a:prstGeom prst="rect">
+            <a:avLst/>
+          </a:prstGeom>
+          <a:noFill/>
+          <a:ln>
+            <a:noFill/>
+          </a:ln>
+        </p:spPr>
+        <p:txBody>
+          <a:bodyPr wrap="square" anchor="ctr" lIns="0" tIns="0" rIns="0" bIns="0" rtlCol="0"/>
+          <a:lstStyle/>
+          <a:p>
+            <a:pPr algn="ctr" marL="0" indent="0">
+              <a:lnSpc>
+                <a:spcPct val="100000"/>
+              </a:lnSpc>
+              <a:buNone/>
+            </a:pPr>
+            <a:r>
+              <a:rPr lang="th-TH" sz="1000" dirty="0">
+                <a:solidFill>
+                  <a:srgbClr val="5F5F5F"/>
+                </a:solidFill>
+                <a:latin typeface="+mn-lt"/>
+                <a:ea typeface="+mn-ea"/>
+                <a:cs typeface="+mn-cs"/>
+              </a:rPr>
+              <a:t>ผ่านกฎ</a:t>
+            </a:r>
+          </a:p>
+        </p:txBody>
+      </p:sp>
+    </p:spTree>
+  </p:cSld>
+  <p:clrMapOvr>
+    <a:masterClrMapping/>
+  </p:clrMapOvr>
+</p:sld>
+</file>
+
+<file path=ppt/slides/slide12.xml><?xml version="1.0" encoding="utf-8"?>
 <p:sld xmlns:a="http://schemas.openxmlformats.org/drawingml/2006/main" xmlns:r="http://schemas.openxmlformats.org/officeDocument/2006/relationships" xmlns:p="http://schemas.openxmlformats.org/presentationml/2006/main">
   <p:cSld name="">
     <p:spTree>
@@ -18395,105 +20084,6 @@
 </p:sld>
 </file>
 
-<file path=ppt/slides/slide12.xml><?xml version="1.0" encoding="utf-8"?>
-<p:sld xmlns:a="http://schemas.openxmlformats.org/drawingml/2006/main" xmlns:r="http://schemas.openxmlformats.org/officeDocument/2006/relationships" xmlns:p="http://schemas.openxmlformats.org/presentationml/2006/main">
-  <p:cSld name="">
-    <p:spTree>
-      <p:nvGrpSpPr>
-        <p:cNvPr id="1" name=""/>
-        <p:cNvGrpSpPr/>
-        <p:nvPr/>
-      </p:nvGrpSpPr>
-      <p:grpSpPr>
-        <a:xfrm>
-          <a:off x="0" y="0"/>
-          <a:ext cx="0" cy="0"/>
-          <a:chOff x="0" y="0"/>
-          <a:chExt cx="0" cy="0"/>
-        </a:xfrm>
-      </p:grpSpPr>
-      <p:sp>
-        <p:nvSpPr>
-          <p:cNvPr id="2" name="Title"/>
-          <p:cNvSpPr>
-            <a:spLocks noGrp="1"/>
-          </p:cNvSpPr>
-          <p:nvPr>
-            <p:ph type="title"/>
-          </p:nvPr>
-        </p:nvSpPr>
-        <p:spPr/>
-        <p:txBody>
-          <a:bodyPr/>
-          <a:lstStyle/>
-          <a:p>
-            <a:pPr/>
-            <a:r>
-              <a:rPr lang="th-TH" dirty="0"/>
-              <a:t>ขอบเขตบริการของ NCT</a:t>
-            </a:r>
-          </a:p>
-        </p:txBody>
-      </p:sp>
-      <p:sp>
-        <p:nvSpPr>
-          <p:cNvPr id="3" name="Body"/>
-          <p:cNvSpPr>
-            <a:spLocks noGrp="1"/>
-          </p:cNvSpPr>
-          <p:nvPr>
-            <p:ph type="body" idx="1"/>
-          </p:nvPr>
-        </p:nvSpPr>
-        <p:spPr/>
-        <p:txBody>
-          <a:bodyPr/>
-          <a:lstStyle/>
-          <a:p>
-            <a:pPr/>
-            <a:r>
-              <a:rPr lang="th-TH" dirty="0"/>
-              <a:t>วางระบบโครงสร้างพื้นฐานไอทีสำหรับองค์กร</a:t>
-            </a:r>
-          </a:p>
-          <a:p>
-            <a:pPr lvl="1"/>
-            <a:r>
-              <a:rPr lang="th-TH" dirty="0"/>
-              <a:t>ออกแบบเครือข่าย ระบบสำรองข้อมูล และความปลอดภัย</a:t>
-            </a:r>
-          </a:p>
-          <a:p>
-            <a:pPr/>
-            <a:r>
-              <a:rPr lang="th-TH" dirty="0"/>
-              <a:t>ดูแลระบบต่อเนื่องแบบ Managed Service</a:t>
-            </a:r>
-          </a:p>
-          <a:p>
-            <a:pPr lvl="1"/>
-            <a:r>
-              <a:rPr lang="th-TH" dirty="0"/>
-              <a:t>มีทีมซัพพอร์ตตอบกลับภายใน SLA ที่ตกลงกัน</a:t>
-            </a:r>
-          </a:p>
-          <a:p>
-            <a:pPr/>
-            <a:r>
-              <a:rPr lang="th-TH" dirty="0"/>
-              <a:t>ให้คำปรึกษาการย้ายระบบขึ้นคลาวด์</a:t>
-            </a:r>
-          </a:p>
-        </p:txBody>
-      </p:sp>
-    </p:spTree>
-  </p:cSld>
-  <p:clrMapOvr>
-    <a:masterClrMapping/>
-  </p:clrMapOvr>
-</p:sld>
-</file>
-
 <file path=ppt/slides/slide13.xml><?xml version="1.0" encoding="utf-8"?>
 <p:sld xmlns:a="http://schemas.openxmlformats.org/drawingml/2006/main" xmlns:r="http://schemas.openxmlformats.org/officeDocument/2006/relationships" xmlns:p="http://schemas.openxmlformats.org/presentationml/2006/main">
   <p:cSld name="">
@@ -18529,14 +20119,14 @@
             <a:pPr/>
             <a:r>
               <a:rPr lang="th-TH" dirty="0"/>
-              <a:t>สามเสาหลักของบริการ</a:t>
-            </a:r>
-          </a:p>
-        </p:txBody>
-      </p:sp>
-      <p:sp>
-        <p:nvSpPr>
-          <p:cNvPr id="3" name="C1H"/>
+              <a:t>ขอบเขตบริการของ NCT</a:t>
+            </a:r>
+          </a:p>
+        </p:txBody>
+      </p:sp>
+      <p:sp>
+        <p:nvSpPr>
+          <p:cNvPr id="3" name="Body"/>
           <p:cNvSpPr>
             <a:spLocks noGrp="1"/>
           </p:cNvSpPr>
@@ -18552,122 +20142,35 @@
             <a:pPr/>
             <a:r>
               <a:rPr lang="th-TH" dirty="0"/>
-              <a:t>Infrastructure</a:t>
-            </a:r>
-          </a:p>
-        </p:txBody>
-      </p:sp>
-      <p:sp>
-        <p:nvSpPr>
-          <p:cNvPr id="4" name="C1B"/>
-          <p:cNvSpPr>
-            <a:spLocks noGrp="1"/>
-          </p:cNvSpPr>
-          <p:nvPr>
-            <p:ph type="body" idx="2"/>
-          </p:nvPr>
-        </p:nvSpPr>
-        <p:spPr/>
-        <p:txBody>
-          <a:bodyPr/>
-          <a:lstStyle/>
+              <a:t>วางระบบโครงสร้างพื้นฐานไอทีสำหรับองค์กร</a:t>
+            </a:r>
+          </a:p>
+          <a:p>
+            <a:pPr lvl="1"/>
+            <a:r>
+              <a:rPr lang="th-TH" dirty="0"/>
+              <a:t>ออกแบบเครือข่าย ระบบสำรองข้อมูล และความปลอดภัย</a:t>
+            </a:r>
+          </a:p>
           <a:p>
             <a:pPr/>
             <a:r>
               <a:rPr lang="th-TH" dirty="0"/>
-              <a:t>ออกแบบและติดตั้งเครือข่าย เซิร์ฟเวอร์ และระบบสำรองข้อมูล</a:t>
-            </a:r>
-          </a:p>
-        </p:txBody>
-      </p:sp>
-      <p:sp>
-        <p:nvSpPr>
-          <p:cNvPr id="5" name="C2H"/>
-          <p:cNvSpPr>
-            <a:spLocks noGrp="1"/>
-          </p:cNvSpPr>
-          <p:nvPr>
-            <p:ph type="body" idx="3"/>
-          </p:nvPr>
-        </p:nvSpPr>
-        <p:spPr/>
-        <p:txBody>
-          <a:bodyPr/>
-          <a:lstStyle/>
+              <a:t>ดูแลระบบต่อเนื่องแบบ Managed Service</a:t>
+            </a:r>
+          </a:p>
+          <a:p>
+            <a:pPr lvl="1"/>
+            <a:r>
+              <a:rPr lang="th-TH" dirty="0"/>
+              <a:t>มีทีมซัพพอร์ตตอบกลับภายใน SLA ที่ตกลงกัน</a:t>
+            </a:r>
+          </a:p>
           <a:p>
             <a:pPr/>
             <a:r>
               <a:rPr lang="th-TH" dirty="0"/>
-              <a:t>Managed Service</a:t>
-            </a:r>
-          </a:p>
-        </p:txBody>
-      </p:sp>
-      <p:sp>
-        <p:nvSpPr>
-          <p:cNvPr id="6" name="C2B"/>
-          <p:cNvSpPr>
-            <a:spLocks noGrp="1"/>
-          </p:cNvSpPr>
-          <p:nvPr>
-            <p:ph type="body" idx="4"/>
-          </p:nvPr>
-        </p:nvSpPr>
-        <p:spPr/>
-        <p:txBody>
-          <a:bodyPr/>
-          <a:lstStyle/>
-          <a:p>
-            <a:pPr/>
-            <a:r>
-              <a:rPr lang="th-TH" dirty="0"/>
-              <a:t>ดูแลระบบรายเดือน พร้อมทีมซัพพอร์ตและรายงานสุขภาพระบบ</a:t>
-            </a:r>
-          </a:p>
-        </p:txBody>
-      </p:sp>
-      <p:sp>
-        <p:nvSpPr>
-          <p:cNvPr id="7" name="C3H"/>
-          <p:cNvSpPr>
-            <a:spLocks noGrp="1"/>
-          </p:cNvSpPr>
-          <p:nvPr>
-            <p:ph type="body" idx="5"/>
-          </p:nvPr>
-        </p:nvSpPr>
-        <p:spPr/>
-        <p:txBody>
-          <a:bodyPr/>
-          <a:lstStyle/>
-          <a:p>
-            <a:pPr/>
-            <a:r>
-              <a:rPr lang="th-TH" dirty="0"/>
-              <a:t>Cloud &amp; Security</a:t>
-            </a:r>
-          </a:p>
-        </p:txBody>
-      </p:sp>
-      <p:sp>
-        <p:nvSpPr>
-          <p:cNvPr id="8" name="C3B"/>
-          <p:cNvSpPr>
-            <a:spLocks noGrp="1"/>
-          </p:cNvSpPr>
-          <p:nvPr>
-            <p:ph type="body" idx="6"/>
-          </p:nvPr>
-        </p:nvSpPr>
-        <p:spPr/>
-        <p:txBody>
-          <a:bodyPr/>
-          <a:lstStyle/>
-          <a:p>
-            <a:pPr/>
-            <a:r>
-              <a:rPr lang="th-TH" dirty="0"/>
-              <a:t>ย้ายระบบขึ้นคลาวด์ และวางมาตรการความปลอดภัยตามมาตรฐาน</a:t>
+              <a:t>ให้คำปรึกษาการย้ายระบบขึ้นคลาวด์</a:t>
             </a:r>
           </a:p>
         </p:txBody>
@@ -18715,14 +20218,14 @@
             <a:pPr/>
             <a:r>
               <a:rPr lang="th-TH" dirty="0"/>
-              <a:t>ตัวเลขที่บอกเรื่องเรา</a:t>
-            </a:r>
-          </a:p>
-        </p:txBody>
-      </p:sp>
-      <p:sp>
-        <p:nvSpPr>
-          <p:cNvPr id="3" name="F1"/>
+              <a:t>สามเสาหลักของบริการ</a:t>
+            </a:r>
+          </a:p>
+        </p:txBody>
+      </p:sp>
+      <p:sp>
+        <p:nvSpPr>
+          <p:cNvPr id="3" name="C1H"/>
           <p:cNvSpPr>
             <a:spLocks noGrp="1"/>
           </p:cNvSpPr>
@@ -18738,14 +20241,14 @@
             <a:pPr/>
             <a:r>
               <a:rPr lang="th-TH" dirty="0"/>
-              <a:t>12</a:t>
-            </a:r>
-          </a:p>
-        </p:txBody>
-      </p:sp>
-      <p:sp>
-        <p:nvSpPr>
-          <p:cNvPr id="4" name="F1L"/>
+              <a:t>Infrastructure</a:t>
+            </a:r>
+          </a:p>
+        </p:txBody>
+      </p:sp>
+      <p:sp>
+        <p:nvSpPr>
+          <p:cNvPr id="4" name="C1B"/>
           <p:cNvSpPr>
             <a:spLocks noGrp="1"/>
           </p:cNvSpPr>
@@ -18761,14 +20264,14 @@
             <a:pPr/>
             <a:r>
               <a:rPr lang="th-TH" dirty="0"/>
-              <a:t>ปีที่ให้บริการองค์กรไทย</a:t>
-            </a:r>
-          </a:p>
-        </p:txBody>
-      </p:sp>
-      <p:sp>
-        <p:nvSpPr>
-          <p:cNvPr id="5" name="F2"/>
+              <a:t>ออกแบบและติดตั้งเครือข่าย เซิร์ฟเวอร์ และระบบสำรองข้อมูล</a:t>
+            </a:r>
+          </a:p>
+        </p:txBody>
+      </p:sp>
+      <p:sp>
+        <p:nvSpPr>
+          <p:cNvPr id="5" name="C2H"/>
           <p:cNvSpPr>
             <a:spLocks noGrp="1"/>
           </p:cNvSpPr>
@@ -18784,14 +20287,14 @@
             <a:pPr/>
             <a:r>
               <a:rPr lang="th-TH" dirty="0"/>
-              <a:t>99.9%</a:t>
-            </a:r>
-          </a:p>
-        </p:txBody>
-      </p:sp>
-      <p:sp>
-        <p:nvSpPr>
-          <p:cNvPr id="6" name="F2L"/>
+              <a:t>Managed Service</a:t>
+            </a:r>
+          </a:p>
+        </p:txBody>
+      </p:sp>
+      <p:sp>
+        <p:nvSpPr>
+          <p:cNvPr id="6" name="C2B"/>
           <p:cNvSpPr>
             <a:spLocks noGrp="1"/>
           </p:cNvSpPr>
@@ -18807,14 +20310,14 @@
             <a:pPr/>
             <a:r>
               <a:rPr lang="th-TH" dirty="0"/>
-              <a:t>Uptime เฉลี่ยของระบบที่ดูแล</a:t>
-            </a:r>
-          </a:p>
-        </p:txBody>
-      </p:sp>
-      <p:sp>
-        <p:nvSpPr>
-          <p:cNvPr id="7" name="F3"/>
+              <a:t>ดูแลระบบรายเดือน พร้อมทีมซัพพอร์ตและรายงานสุขภาพระบบ</a:t>
+            </a:r>
+          </a:p>
+        </p:txBody>
+      </p:sp>
+      <p:sp>
+        <p:nvSpPr>
+          <p:cNvPr id="7" name="C3H"/>
           <p:cNvSpPr>
             <a:spLocks noGrp="1"/>
           </p:cNvSpPr>
@@ -18830,14 +20333,14 @@
             <a:pPr/>
             <a:r>
               <a:rPr lang="th-TH" dirty="0"/>
-              <a:t>24/7</a:t>
-            </a:r>
-          </a:p>
-        </p:txBody>
-      </p:sp>
-      <p:sp>
-        <p:nvSpPr>
-          <p:cNvPr id="8" name="F3L"/>
+              <a:t>Cloud &amp; Security</a:t>
+            </a:r>
+          </a:p>
+        </p:txBody>
+      </p:sp>
+      <p:sp>
+        <p:nvSpPr>
+          <p:cNvPr id="8" name="C3B"/>
           <p:cNvSpPr>
             <a:spLocks noGrp="1"/>
           </p:cNvSpPr>
@@ -18853,30 +20356,7 @@
             <a:pPr/>
             <a:r>
               <a:rPr lang="th-TH" dirty="0"/>
-              <a:t>ทีมเฝ้าระวังและตอบกลับ</a:t>
-            </a:r>
-          </a:p>
-        </p:txBody>
-      </p:sp>
-      <p:sp>
-        <p:nvSpPr>
-          <p:cNvPr id="9" name="FN"/>
-          <p:cNvSpPr>
-            <a:spLocks noGrp="1"/>
-          </p:cNvSpPr>
-          <p:nvPr>
-            <p:ph type="body" idx="7"/>
-          </p:nvPr>
-        </p:nvSpPr>
-        <p:spPr/>
-        <p:txBody>
-          <a:bodyPr/>
-          <a:lstStyle/>
-          <a:p>
-            <a:pPr/>
-            <a:r>
-              <a:rPr lang="th-TH" dirty="0"/>
-              <a:t>ข้อมูล ณ ไตรมาส 1 ปี 2569</a:t>
+              <a:t>ย้ายระบบขึ้นคลาวด์ และวางมาตรการความปลอดภัยตามมาตรฐาน</a:t>
             </a:r>
           </a:p>
         </p:txBody>
@@ -18908,7 +20388,30 @@
       </p:grpSpPr>
       <p:sp>
         <p:nvSpPr>
-          <p:cNvPr id="2" name="Q"/>
+          <p:cNvPr id="2" name="Title"/>
+          <p:cNvSpPr>
+            <a:spLocks noGrp="1"/>
+          </p:cNvSpPr>
+          <p:nvPr>
+            <p:ph type="title"/>
+          </p:nvPr>
+        </p:nvSpPr>
+        <p:spPr/>
+        <p:txBody>
+          <a:bodyPr/>
+          <a:lstStyle/>
+          <a:p>
+            <a:pPr/>
+            <a:r>
+              <a:rPr lang="th-TH" dirty="0"/>
+              <a:t>ตัวเลขที่บอกเรื่องเรา</a:t>
+            </a:r>
+          </a:p>
+        </p:txBody>
+      </p:sp>
+      <p:sp>
+        <p:nvSpPr>
+          <p:cNvPr id="3" name="F1"/>
           <p:cNvSpPr>
             <a:spLocks noGrp="1"/>
           </p:cNvSpPr>
@@ -18924,14 +20427,14 @@
             <a:pPr/>
             <a:r>
               <a:rPr lang="th-TH" dirty="0"/>
-              <a:t>ระบบไม่ล่มอีกเลยตั้งแต่เปลี่ยนมาใช้ทีมนี้ดูแล และเราวางแผนงบประมาณได้ล่วงหน้าจริง ๆ</a:t>
-            </a:r>
-          </a:p>
-        </p:txBody>
-      </p:sp>
-      <p:sp>
-        <p:nvSpPr>
-          <p:cNvPr id="3" name="A"/>
+              <a:t>12</a:t>
+            </a:r>
+          </a:p>
+        </p:txBody>
+      </p:sp>
+      <p:sp>
+        <p:nvSpPr>
+          <p:cNvPr id="4" name="F1L"/>
           <p:cNvSpPr>
             <a:spLocks noGrp="1"/>
           </p:cNvSpPr>
@@ -18947,7 +20450,122 @@
             <a:pPr/>
             <a:r>
               <a:rPr lang="th-TH" dirty="0"/>
-              <a:t>คุณสมชาย ป. — ผู้จัดการฝ่ายไอที, บริษัทตัวอย่าง จำกัด</a:t>
+              <a:t>ปีที่ให้บริการองค์กรไทย</a:t>
+            </a:r>
+          </a:p>
+        </p:txBody>
+      </p:sp>
+      <p:sp>
+        <p:nvSpPr>
+          <p:cNvPr id="5" name="F2"/>
+          <p:cNvSpPr>
+            <a:spLocks noGrp="1"/>
+          </p:cNvSpPr>
+          <p:nvPr>
+            <p:ph type="body" idx="3"/>
+          </p:nvPr>
+        </p:nvSpPr>
+        <p:spPr/>
+        <p:txBody>
+          <a:bodyPr/>
+          <a:lstStyle/>
+          <a:p>
+            <a:pPr/>
+            <a:r>
+              <a:rPr lang="th-TH" dirty="0"/>
+              <a:t>99.9%</a:t>
+            </a:r>
+          </a:p>
+        </p:txBody>
+      </p:sp>
+      <p:sp>
+        <p:nvSpPr>
+          <p:cNvPr id="6" name="F2L"/>
+          <p:cNvSpPr>
+            <a:spLocks noGrp="1"/>
+          </p:cNvSpPr>
+          <p:nvPr>
+            <p:ph type="body" idx="4"/>
+          </p:nvPr>
+        </p:nvSpPr>
+        <p:spPr/>
+        <p:txBody>
+          <a:bodyPr/>
+          <a:lstStyle/>
+          <a:p>
+            <a:pPr/>
+            <a:r>
+              <a:rPr lang="th-TH" dirty="0"/>
+              <a:t>Uptime เฉลี่ยของระบบที่ดูแล</a:t>
+            </a:r>
+          </a:p>
+        </p:txBody>
+      </p:sp>
+      <p:sp>
+        <p:nvSpPr>
+          <p:cNvPr id="7" name="F3"/>
+          <p:cNvSpPr>
+            <a:spLocks noGrp="1"/>
+          </p:cNvSpPr>
+          <p:nvPr>
+            <p:ph type="body" idx="5"/>
+          </p:nvPr>
+        </p:nvSpPr>
+        <p:spPr/>
+        <p:txBody>
+          <a:bodyPr/>
+          <a:lstStyle/>
+          <a:p>
+            <a:pPr/>
+            <a:r>
+              <a:rPr lang="th-TH" dirty="0"/>
+              <a:t>24/7</a:t>
+            </a:r>
+          </a:p>
+        </p:txBody>
+      </p:sp>
+      <p:sp>
+        <p:nvSpPr>
+          <p:cNvPr id="8" name="F3L"/>
+          <p:cNvSpPr>
+            <a:spLocks noGrp="1"/>
+          </p:cNvSpPr>
+          <p:nvPr>
+            <p:ph type="body" idx="6"/>
+          </p:nvPr>
+        </p:nvSpPr>
+        <p:spPr/>
+        <p:txBody>
+          <a:bodyPr/>
+          <a:lstStyle/>
+          <a:p>
+            <a:pPr/>
+            <a:r>
+              <a:rPr lang="th-TH" dirty="0"/>
+              <a:t>ทีมเฝ้าระวังและตอบกลับ</a:t>
+            </a:r>
+          </a:p>
+        </p:txBody>
+      </p:sp>
+      <p:sp>
+        <p:nvSpPr>
+          <p:cNvPr id="9" name="FN"/>
+          <p:cNvSpPr>
+            <a:spLocks noGrp="1"/>
+          </p:cNvSpPr>
+          <p:nvPr>
+            <p:ph type="body" idx="7"/>
+          </p:nvPr>
+        </p:nvSpPr>
+        <p:spPr/>
+        <p:txBody>
+          <a:bodyPr/>
+          <a:lstStyle/>
+          <a:p>
+            <a:pPr/>
+            <a:r>
+              <a:rPr lang="th-TH" dirty="0"/>
+              <a:t>ข้อมูล ณ ไตรมาส 1 ปี 2569</a:t>
             </a:r>
           </a:p>
         </p:txBody>
@@ -18961,6 +20579,77 @@
 </file>
 
 <file path=ppt/slides/slide16.xml><?xml version="1.0" encoding="utf-8"?>
+<p:sld xmlns:a="http://schemas.openxmlformats.org/drawingml/2006/main" xmlns:r="http://schemas.openxmlformats.org/officeDocument/2006/relationships" xmlns:p="http://schemas.openxmlformats.org/presentationml/2006/main">
+  <p:cSld name="">
+    <p:spTree>
+      <p:nvGrpSpPr>
+        <p:cNvPr id="1" name=""/>
+        <p:cNvGrpSpPr/>
+        <p:nvPr/>
+      </p:nvGrpSpPr>
+      <p:grpSpPr>
+        <a:xfrm>
+          <a:off x="0" y="0"/>
+          <a:ext cx="0" cy="0"/>
+          <a:chOff x="0" y="0"/>
+          <a:chExt cx="0" cy="0"/>
+        </a:xfrm>
+      </p:grpSpPr>
+      <p:sp>
+        <p:nvSpPr>
+          <p:cNvPr id="2" name="Q"/>
+          <p:cNvSpPr>
+            <a:spLocks noGrp="1"/>
+          </p:cNvSpPr>
+          <p:nvPr>
+            <p:ph type="body" idx="1"/>
+          </p:nvPr>
+        </p:nvSpPr>
+        <p:spPr/>
+        <p:txBody>
+          <a:bodyPr/>
+          <a:lstStyle/>
+          <a:p>
+            <a:pPr/>
+            <a:r>
+              <a:rPr lang="th-TH" dirty="0"/>
+              <a:t>ระบบไม่ล่มอีกเลยตั้งแต่เปลี่ยนมาใช้ทีมนี้ดูแล และเราวางแผนงบประมาณได้ล่วงหน้าจริง ๆ</a:t>
+            </a:r>
+          </a:p>
+        </p:txBody>
+      </p:sp>
+      <p:sp>
+        <p:nvSpPr>
+          <p:cNvPr id="3" name="A"/>
+          <p:cNvSpPr>
+            <a:spLocks noGrp="1"/>
+          </p:cNvSpPr>
+          <p:nvPr>
+            <p:ph type="body" idx="2"/>
+          </p:nvPr>
+        </p:nvSpPr>
+        <p:spPr/>
+        <p:txBody>
+          <a:bodyPr/>
+          <a:lstStyle/>
+          <a:p>
+            <a:pPr/>
+            <a:r>
+              <a:rPr lang="th-TH" dirty="0"/>
+              <a:t>คุณสมชาย ป. — ผู้จัดการฝ่ายไอที, บริษัทตัวอย่าง จำกัด</a:t>
+            </a:r>
+          </a:p>
+        </p:txBody>
+      </p:sp>
+    </p:spTree>
+  </p:cSld>
+  <p:clrMapOvr>
+    <a:masterClrMapping/>
+  </p:clrMapOvr>
+</p:sld>
+</file>
+
+<file path=ppt/slides/slide17.xml><?xml version="1.0" encoding="utf-8"?>
 <p:sld xmlns:a="http://schemas.openxmlformats.org/drawingml/2006/main" xmlns:r="http://schemas.openxmlformats.org/officeDocument/2006/relationships" xmlns:p="http://schemas.openxmlformats.org/presentationml/2006/main">
   <p:cSld name="">
     <p:spTree>
@@ -19691,7 +21380,7 @@
 </p:sld>
 </file>
 
-<file path=ppt/slides/slide17.xml><?xml version="1.0" encoding="utf-8"?>
+<file path=ppt/slides/slide18.xml><?xml version="1.0" encoding="utf-8"?>
 <p:sld xmlns:a="http://schemas.openxmlformats.org/drawingml/2006/main" xmlns:r="http://schemas.openxmlformats.org/officeDocument/2006/relationships" xmlns:p="http://schemas.openxmlformats.org/presentationml/2006/main">
   <p:cSld name="">
     <p:spTree>
@@ -19944,7 +21633,7 @@
 </p:sld>
 </file>
 
-<file path=ppt/slides/slide18.xml><?xml version="1.0" encoding="utf-8"?>
+<file path=ppt/slides/slide19.xml><?xml version="1.0" encoding="utf-8"?>
 <p:sld xmlns:a="http://schemas.openxmlformats.org/drawingml/2006/main" xmlns:r="http://schemas.openxmlformats.org/officeDocument/2006/relationships" xmlns:p="http://schemas.openxmlformats.org/presentationml/2006/main">
   <p:cSld name="">
     <p:spTree>
@@ -20430,174 +22119,6 @@
 </p:sld>
 </file>
 
-<file path=ppt/slides/slide19.xml><?xml version="1.0" encoding="utf-8"?>
-<p:sld xmlns:a="http://schemas.openxmlformats.org/drawingml/2006/main" xmlns:r="http://schemas.openxmlformats.org/officeDocument/2006/relationships" xmlns:p="http://schemas.openxmlformats.org/presentationml/2006/main">
-  <p:cSld name="">
-    <p:spTree>
-      <p:nvGrpSpPr>
-        <p:cNvPr id="1" name=""/>
-        <p:cNvGrpSpPr/>
-        <p:nvPr/>
-      </p:nvGrpSpPr>
-      <p:grpSpPr>
-        <a:xfrm>
-          <a:off x="0" y="0"/>
-          <a:ext cx="0" cy="0"/>
-          <a:chOff x="0" y="0"/>
-          <a:chExt cx="0" cy="0"/>
-        </a:xfrm>
-      </p:grpSpPr>
-      <p:sp>
-        <p:nvSpPr>
-          <p:cNvPr id="2" name="Title"/>
-          <p:cNvSpPr>
-            <a:spLocks noGrp="1"/>
-          </p:cNvSpPr>
-          <p:nvPr>
-            <p:ph type="title"/>
-          </p:nvPr>
-        </p:nvSpPr>
-        <p:spPr/>
-        <p:txBody>
-          <a:bodyPr/>
-          <a:lstStyle/>
-          <a:p>
-            <a:pPr/>
-            <a:r>
-              <a:rPr lang="th-TH" dirty="0"/>
-              <a:t>ขอบคุณครับ</a:t>
-            </a:r>
-          </a:p>
-        </p:txBody>
-      </p:sp>
-      <p:sp>
-        <p:nvSpPr>
-          <p:cNvPr id="3" name="NSL"/>
-          <p:cNvSpPr>
-            <a:spLocks noGrp="1"/>
-          </p:cNvSpPr>
-          <p:nvPr>
-            <p:ph type="body" idx="1"/>
-          </p:nvPr>
-        </p:nvSpPr>
-        <p:spPr/>
-        <p:txBody>
-          <a:bodyPr/>
-          <a:lstStyle/>
-          <a:p>
-            <a:pPr/>
-            <a:r>
-              <a:rPr lang="th-TH" dirty="0"/>
-              <a:t>ขั้นตอนถัดไป</a:t>
-            </a:r>
-          </a:p>
-        </p:txBody>
-      </p:sp>
-      <p:sp>
-        <p:nvSpPr>
-          <p:cNvPr id="4" name="NS"/>
-          <p:cNvSpPr>
-            <a:spLocks noGrp="1"/>
-          </p:cNvSpPr>
-          <p:nvPr>
-            <p:ph type="body" idx="2"/>
-          </p:nvPr>
-        </p:nvSpPr>
-        <p:spPr/>
-        <p:txBody>
-          <a:bodyPr/>
-          <a:lstStyle/>
-          <a:p>
-            <a:pPr/>
-            <a:r>
-              <a:rPr lang="th-TH" dirty="0"/>
-              <a:t>ยืนยันแพ็กเกจและขอบเขตงานรายกระบวนการ</a:t>
-            </a:r>
-          </a:p>
-          <a:p>
-            <a:pPr/>
-            <a:r>
-              <a:rPr lang="th-TH" dirty="0"/>
-              <a:t>เปิดสิทธิ์เข้าระบบให้ทีมสำรวจ 2 รายการที่ยังติดข้อจำกัด</a:t>
-            </a:r>
-          </a:p>
-          <a:p>
-            <a:pPr/>
-            <a:r>
-              <a:rPr lang="th-TH" dirty="0"/>
-              <a:t>ลงนามสัญญาและเริ่มรอบที่ 1 ภายใน 30 วัน</a:t>
-            </a:r>
-          </a:p>
-        </p:txBody>
-      </p:sp>
-      <p:sp>
-        <p:nvSpPr>
-          <p:cNvPr id="5" name="DB"/>
-          <p:cNvSpPr>
-            <a:spLocks noGrp="1"/>
-          </p:cNvSpPr>
-          <p:nvPr>
-            <p:ph type="body" idx="3"/>
-          </p:nvPr>
-        </p:nvSpPr>
-        <p:spPr/>
-        <p:txBody>
-          <a:bodyPr/>
-          <a:lstStyle/>
-          <a:p>
-            <a:pPr/>
-            <a:r>
-              <a:rPr lang="th-TH" dirty="0"/>
-              <a:t>ต้องการคำตอบภายใน 30 กันยายน 2569 เพื่อเริ่มรอบแรกในไตรมาสนี้</a:t>
-            </a:r>
-          </a:p>
-        </p:txBody>
-      </p:sp>
-      <p:sp>
-        <p:nvSpPr>
-          <p:cNvPr id="6" name="Contact"/>
-          <p:cNvSpPr>
-            <a:spLocks noGrp="1"/>
-          </p:cNvSpPr>
-          <p:nvPr>
-            <p:ph type="body" idx="4"/>
-          </p:nvPr>
-        </p:nvSpPr>
-        <p:spPr/>
-        <p:txBody>
-          <a:bodyPr/>
-          <a:lstStyle/>
-          <a:p>
-            <a:pPr/>
-            <a:r>
-              <a:rPr lang="th-TH" dirty="0"/>
-              <a:t>โทร · 02-XXX-XXXX</a:t>
-            </a:r>
-          </a:p>
-          <a:p>
-            <a:pPr/>
-            <a:r>
-              <a:rPr lang="th-TH" dirty="0"/>
-              <a:t>อีเมล · contact@nctthai.com</a:t>
-            </a:r>
-          </a:p>
-          <a:p>
-            <a:pPr/>
-            <a:r>
-              <a:rPr lang="th-TH" dirty="0"/>
-              <a:t>เว็บไซต์ · nctthai.com</a:t>
-            </a:r>
-          </a:p>
-        </p:txBody>
-      </p:sp>
-    </p:spTree>
-  </p:cSld>
-  <p:clrMapOvr>
-    <a:masterClrMapping/>
-  </p:clrMapOvr>
-</p:sld>
-</file>
-
 <file path=ppt/slides/slide2.xml><?xml version="1.0" encoding="utf-8"?>
 <p:sld xmlns:a="http://schemas.openxmlformats.org/drawingml/2006/main" xmlns:r="http://schemas.openxmlformats.org/officeDocument/2006/relationships" xmlns:p="http://schemas.openxmlformats.org/presentationml/2006/main">
   <p:cSld name="">
@@ -20617,7 +22138,101 @@
       </p:grpSpPr>
       <p:sp>
         <p:nvSpPr>
-          <p:cNvPr id="2" name="Num"/>
+          <p:cNvPr id="2" name="Title"/>
+          <p:cNvSpPr>
+            <a:spLocks noGrp="1"/>
+          </p:cNvSpPr>
+          <p:nvPr>
+            <p:ph type="ctrTitle"/>
+          </p:nvPr>
+        </p:nvSpPr>
+        <p:spPr/>
+        <p:txBody>
+          <a:bodyPr/>
+          <a:lstStyle/>
+          <a:p>
+            <a:pPr/>
+            <a:r>
+              <a:rPr lang="th-TH" dirty="0"/>
+              <a:t>ข้อเสนอโครงการวางระบบบัญชีอัตโนมัติ</a:t>
+            </a:r>
+          </a:p>
+        </p:txBody>
+      </p:sp>
+      <p:sp>
+        <p:nvSpPr>
+          <p:cNvPr id="3" name="Subtitle"/>
+          <p:cNvSpPr>
+            <a:spLocks noGrp="1"/>
+          </p:cNvSpPr>
+          <p:nvPr>
+            <p:ph type="subTitle" idx="1"/>
+          </p:nvPr>
+        </p:nvSpPr>
+        <p:spPr/>
+        <p:txBody>
+          <a:bodyPr/>
+          <a:lstStyle/>
+          <a:p>
+            <a:pPr/>
+            <a:r>
+              <a:rPr lang="th-TH" dirty="0"/>
+              <a:t>New Computer Technology Consulting Co., Ltd. · 2569</a:t>
+            </a:r>
+          </a:p>
+        </p:txBody>
+      </p:sp>
+    </p:spTree>
+  </p:cSld>
+  <p:clrMapOvr>
+    <a:masterClrMapping/>
+  </p:clrMapOvr>
+</p:sld>
+</file>
+
+<file path=ppt/slides/slide20.xml><?xml version="1.0" encoding="utf-8"?>
+<p:sld xmlns:a="http://schemas.openxmlformats.org/drawingml/2006/main" xmlns:r="http://schemas.openxmlformats.org/officeDocument/2006/relationships" xmlns:p="http://schemas.openxmlformats.org/presentationml/2006/main">
+  <p:cSld name="">
+    <p:spTree>
+      <p:nvGrpSpPr>
+        <p:cNvPr id="1" name=""/>
+        <p:cNvGrpSpPr/>
+        <p:nvPr/>
+      </p:nvGrpSpPr>
+      <p:grpSpPr>
+        <a:xfrm>
+          <a:off x="0" y="0"/>
+          <a:ext cx="0" cy="0"/>
+          <a:chOff x="0" y="0"/>
+          <a:chExt cx="0" cy="0"/>
+        </a:xfrm>
+      </p:grpSpPr>
+      <p:sp>
+        <p:nvSpPr>
+          <p:cNvPr id="2" name="Title"/>
+          <p:cNvSpPr>
+            <a:spLocks noGrp="1"/>
+          </p:cNvSpPr>
+          <p:nvPr>
+            <p:ph type="title"/>
+          </p:nvPr>
+        </p:nvSpPr>
+        <p:spPr/>
+        <p:txBody>
+          <a:bodyPr/>
+          <a:lstStyle/>
+          <a:p>
+            <a:pPr/>
+            <a:r>
+              <a:rPr lang="th-TH" dirty="0"/>
+              <a:t>ขอบคุณครับ</a:t>
+            </a:r>
+          </a:p>
+        </p:txBody>
+      </p:sp>
+      <p:sp>
+        <p:nvSpPr>
+          <p:cNvPr id="3" name="NSL"/>
           <p:cNvSpPr>
             <a:spLocks noGrp="1"/>
           </p:cNvSpPr>
@@ -20633,19 +22248,19 @@
             <a:pPr/>
             <a:r>
               <a:rPr lang="th-TH" dirty="0"/>
-              <a:t>00</a:t>
-            </a:r>
-          </a:p>
-        </p:txBody>
-      </p:sp>
-      <p:sp>
-        <p:nvSpPr>
-          <p:cNvPr id="3" name="Title"/>
-          <p:cNvSpPr>
-            <a:spLocks noGrp="1"/>
-          </p:cNvSpPr>
-          <p:nvPr>
-            <p:ph type="title"/>
+              <a:t>ขั้นตอนถัดไป</a:t>
+            </a:r>
+          </a:p>
+        </p:txBody>
+      </p:sp>
+      <p:sp>
+        <p:nvSpPr>
+          <p:cNvPr id="4" name="NS"/>
+          <p:cNvSpPr>
+            <a:spLocks noGrp="1"/>
+          </p:cNvSpPr>
+          <p:nvPr>
+            <p:ph type="body" idx="2"/>
           </p:nvPr>
         </p:nvSpPr>
         <p:spPr/>
@@ -20656,19 +22271,33 @@
             <a:pPr/>
             <a:r>
               <a:rPr lang="th-TH" dirty="0"/>
-              <a:t>หัวข้อนำเสนอ</a:t>
-            </a:r>
-          </a:p>
-        </p:txBody>
-      </p:sp>
-      <p:sp>
-        <p:nvSpPr>
-          <p:cNvPr id="4" name="List"/>
-          <p:cNvSpPr>
-            <a:spLocks noGrp="1"/>
-          </p:cNvSpPr>
-          <p:nvPr>
-            <p:ph type="body" idx="2"/>
+              <a:t>ยืนยันแพ็กเกจและขอบเขตงานรายกระบวนการ</a:t>
+            </a:r>
+          </a:p>
+          <a:p>
+            <a:pPr/>
+            <a:r>
+              <a:rPr lang="th-TH" dirty="0"/>
+              <a:t>เปิดสิทธิ์เข้าระบบให้ทีมสำรวจ 2 รายการที่ยังติดข้อจำกัด</a:t>
+            </a:r>
+          </a:p>
+          <a:p>
+            <a:pPr/>
+            <a:r>
+              <a:rPr lang="th-TH" dirty="0"/>
+              <a:t>ลงนามสัญญาและเริ่มรอบที่ 1 ภายใน 30 วัน</a:t>
+            </a:r>
+          </a:p>
+        </p:txBody>
+      </p:sp>
+      <p:sp>
+        <p:nvSpPr>
+          <p:cNvPr id="5" name="DB"/>
+          <p:cNvSpPr>
+            <a:spLocks noGrp="1"/>
+          </p:cNvSpPr>
+          <p:nvPr>
+            <p:ph type="body" idx="3"/>
           </p:nvPr>
         </p:nvSpPr>
         <p:spPr/>
@@ -20679,42 +22308,44 @@
             <a:pPr/>
             <a:r>
               <a:rPr lang="th-TH" dirty="0"/>
-              <a:t>บริบทและปัญหาที่พบ</a:t>
-            </a:r>
-          </a:p>
+              <a:t>ต้องการคำตอบภายใน 30 กันยายน 2569 เพื่อเริ่มรอบแรกในไตรมาสนี้</a:t>
+            </a:r>
+          </a:p>
+        </p:txBody>
+      </p:sp>
+      <p:sp>
+        <p:nvSpPr>
+          <p:cNvPr id="6" name="Contact"/>
+          <p:cNvSpPr>
+            <a:spLocks noGrp="1"/>
+          </p:cNvSpPr>
+          <p:nvPr>
+            <p:ph type="body" idx="4"/>
+          </p:nvPr>
+        </p:nvSpPr>
+        <p:spPr/>
+        <p:txBody>
+          <a:bodyPr/>
+          <a:lstStyle/>
           <a:p>
             <a:pPr/>
             <a:r>
               <a:rPr lang="th-TH" dirty="0"/>
-              <a:t>ผลลัพธ์ที่ข้อเสนอนี้ให้</a:t>
+              <a:t>โทร · 02-XXX-XXXX</a:t>
             </a:r>
           </a:p>
           <a:p>
             <a:pPr/>
             <a:r>
               <a:rPr lang="th-TH" dirty="0"/>
-              <a:t>วิธีการทำงานและสถาปัตยกรรม</a:t>
+              <a:t>อีเมล · contact@nctthai.com</a:t>
             </a:r>
           </a:p>
           <a:p>
             <a:pPr/>
             <a:r>
               <a:rPr lang="th-TH" dirty="0"/>
-              <a:t>ขอบเขตงานรายกระบวนการ</a:t>
-            </a:r>
-          </a:p>
-          <a:p>
-            <a:pPr/>
-            <a:r>
-              <a:rPr lang="th-TH" dirty="0"/>
-              <a:t>ทีมงานและประสบการณ์</a:t>
-            </a:r>
-          </a:p>
-          <a:p>
-            <a:pPr/>
-            <a:r>
-              <a:rPr lang="th-TH" dirty="0"/>
-              <a:t>แพ็กเกจและงบประมาณ</a:t>
+              <a:t>เว็บไซต์ · nctthai.com</a:t>
             </a:r>
           </a:p>
         </p:txBody>
@@ -20746,7 +22377,7 @@
       </p:grpSpPr>
       <p:sp>
         <p:nvSpPr>
-          <p:cNvPr id="2" name="Number"/>
+          <p:cNvPr id="2" name="Num"/>
           <p:cNvSpPr>
             <a:spLocks noGrp="1"/>
           </p:cNvSpPr>
@@ -20762,7 +22393,7 @@
             <a:pPr/>
             <a:r>
               <a:rPr lang="th-TH" dirty="0"/>
-              <a:t>01</a:t>
+              <a:t>00</a:t>
             </a:r>
           </a:p>
         </p:txBody>
@@ -20785,14 +22416,14 @@
             <a:pPr/>
             <a:r>
               <a:rPr lang="th-TH" dirty="0"/>
-              <a:t>บริบทและปัญหา</a:t>
-            </a:r>
-          </a:p>
-        </p:txBody>
-      </p:sp>
-      <p:sp>
-        <p:nvSpPr>
-          <p:cNvPr id="4" name="Desc"/>
+              <a:t>หัวข้อนำเสนอ</a:t>
+            </a:r>
+          </a:p>
+        </p:txBody>
+      </p:sp>
+      <p:sp>
+        <p:nvSpPr>
+          <p:cNvPr id="4" name="List"/>
           <p:cNvSpPr>
             <a:spLocks noGrp="1"/>
           </p:cNvSpPr>
@@ -20808,7 +22439,42 @@
             <a:pPr/>
             <a:r>
               <a:rPr lang="th-TH" dirty="0"/>
-              <a:t>สิ่งที่เราพบจากการสำรวจงานบัญชีของท่านสองสัปดาห์</a:t>
+              <a:t>บริบทและปัญหาที่พบ</a:t>
+            </a:r>
+          </a:p>
+          <a:p>
+            <a:pPr/>
+            <a:r>
+              <a:rPr lang="th-TH" dirty="0"/>
+              <a:t>ผลลัพธ์ที่ข้อเสนอนี้ให้</a:t>
+            </a:r>
+          </a:p>
+          <a:p>
+            <a:pPr/>
+            <a:r>
+              <a:rPr lang="th-TH" dirty="0"/>
+              <a:t>วิธีการทำงานและสถาปัตยกรรม</a:t>
+            </a:r>
+          </a:p>
+          <a:p>
+            <a:pPr/>
+            <a:r>
+              <a:rPr lang="th-TH" dirty="0"/>
+              <a:t>ขอบเขตงานรายกระบวนการ</a:t>
+            </a:r>
+          </a:p>
+          <a:p>
+            <a:pPr/>
+            <a:r>
+              <a:rPr lang="th-TH" dirty="0"/>
+              <a:t>ทีมงานและประสบการณ์</a:t>
+            </a:r>
+          </a:p>
+          <a:p>
+            <a:pPr/>
+            <a:r>
+              <a:rPr lang="th-TH" dirty="0"/>
+              <a:t>แพ็กเกจและงบประมาณ</a:t>
             </a:r>
           </a:p>
         </p:txBody>
@@ -20840,7 +22506,30 @@
       </p:grpSpPr>
       <p:sp>
         <p:nvSpPr>
-          <p:cNvPr id="2" name="Title"/>
+          <p:cNvPr id="2" name="Number"/>
+          <p:cNvSpPr>
+            <a:spLocks noGrp="1"/>
+          </p:cNvSpPr>
+          <p:nvPr>
+            <p:ph type="body" idx="1"/>
+          </p:nvPr>
+        </p:nvSpPr>
+        <p:spPr/>
+        <p:txBody>
+          <a:bodyPr/>
+          <a:lstStyle/>
+          <a:p>
+            <a:pPr/>
+            <a:r>
+              <a:rPr lang="th-TH" dirty="0"/>
+              <a:t>01</a:t>
+            </a:r>
+          </a:p>
+        </p:txBody>
+      </p:sp>
+      <p:sp>
+        <p:nvSpPr>
+          <p:cNvPr id="3" name="Title"/>
           <p:cNvSpPr>
             <a:spLocks noGrp="1"/>
           </p:cNvSpPr>
@@ -20856,19 +22545,19 @@
             <a:pPr/>
             <a:r>
               <a:rPr lang="th-TH" dirty="0"/>
-              <a:t>สภาพระบบบัญชีปัจจุบัน</a:t>
-            </a:r>
-          </a:p>
-        </p:txBody>
-      </p:sp>
-      <p:sp>
-        <p:nvSpPr>
-          <p:cNvPr id="3" name="CtxK"/>
-          <p:cNvSpPr>
-            <a:spLocks noGrp="1"/>
-          </p:cNvSpPr>
-          <p:nvPr>
-            <p:ph type="body" idx="1"/>
+              <a:t>บริบทและปัญหา</a:t>
+            </a:r>
+          </a:p>
+        </p:txBody>
+      </p:sp>
+      <p:sp>
+        <p:nvSpPr>
+          <p:cNvPr id="4" name="Desc"/>
+          <p:cNvSpPr>
+            <a:spLocks noGrp="1"/>
+          </p:cNvSpPr>
+          <p:nvPr>
+            <p:ph type="body" idx="2"/>
           </p:nvPr>
         </p:nvSpPr>
         <p:spPr/>
@@ -20879,164 +22568,7 @@
             <a:pPr/>
             <a:r>
               <a:rPr lang="th-TH" dirty="0"/>
-              <a:t>สภาพปัจจุบัน</a:t>
-            </a:r>
-          </a:p>
-        </p:txBody>
-      </p:sp>
-      <p:sp>
-        <p:nvSpPr>
-          <p:cNvPr id="4" name="CtxB"/>
-          <p:cNvSpPr>
-            <a:spLocks noGrp="1"/>
-          </p:cNvSpPr>
-          <p:nvPr>
-            <p:ph type="body" idx="2"/>
-          </p:nvPr>
-        </p:nvSpPr>
-        <p:spPr/>
-        <p:txBody>
-          <a:bodyPr/>
-          <a:lstStyle/>
-          <a:p>
-            <a:pPr/>
-            <a:r>
-              <a:rPr lang="th-TH" dirty="0"/>
-              <a:t>คีย์เอกสารซ้ำสามระบบ ไม่มีจุดตรวจกลาง</a:t>
-            </a:r>
-          </a:p>
-          <a:p>
-            <a:pPr lvl="1"/>
-            <a:r>
-              <a:rPr lang="th-TH" dirty="0"/>
-              <a:t>เอกสารเข้าเฉลี่ย 1,200 ใบต่อเดือน</a:t>
-            </a:r>
-          </a:p>
-          <a:p>
-            <a:pPr/>
-            <a:r>
-              <a:rPr lang="th-TH" dirty="0"/>
-              <a:t>ปิดงบล่าช้าเฉลี่ย 6 วันทำการ</a:t>
-            </a:r>
-          </a:p>
-          <a:p>
-            <a:pPr/>
-            <a:r>
-              <a:rPr lang="th-TH" dirty="0"/>
-              <a:t>ไม่มี audit trail ของการแก้ไขรายการ</a:t>
-            </a:r>
-          </a:p>
-        </p:txBody>
-      </p:sp>
-      <p:sp>
-        <p:nvSpPr>
-          <p:cNvPr id="5" name="OutK"/>
-          <p:cNvSpPr>
-            <a:spLocks noGrp="1"/>
-          </p:cNvSpPr>
-          <p:nvPr>
-            <p:ph type="body" idx="3"/>
-          </p:nvPr>
-        </p:nvSpPr>
-        <p:spPr/>
-        <p:txBody>
-          <a:bodyPr/>
-          <a:lstStyle/>
-          <a:p>
-            <a:pPr/>
-            <a:r>
-              <a:rPr lang="th-TH" dirty="0"/>
-              <a:t>สิ่งที่จะเกิดขึ้น</a:t>
-            </a:r>
-          </a:p>
-        </p:txBody>
-      </p:sp>
-      <p:sp>
-        <p:nvSpPr>
-          <p:cNvPr id="6" name="OutB"/>
-          <p:cNvSpPr>
-            <a:spLocks noGrp="1"/>
-          </p:cNvSpPr>
-          <p:nvPr>
-            <p:ph type="body" idx="4"/>
-          </p:nvPr>
-        </p:nvSpPr>
-        <p:spPr/>
-        <p:txBody>
-          <a:bodyPr/>
-          <a:lstStyle/>
-          <a:p>
-            <a:pPr/>
-            <a:r>
-              <a:rPr lang="th-TH" dirty="0"/>
-              <a:t>คีย์จุดเดียว ระบบกระจายต่อให้อัตโนมัติ</a:t>
-            </a:r>
-          </a:p>
-          <a:p>
-            <a:pPr lvl="1"/>
-            <a:r>
-              <a:rPr lang="th-TH" dirty="0"/>
-              <a:t>ลดเวลาคีย์ต่อใบจาก 4 นาที เหลือ 40 วินาที</a:t>
-            </a:r>
-          </a:p>
-          <a:p>
-            <a:pPr/>
-            <a:r>
-              <a:rPr lang="th-TH" dirty="0"/>
-              <a:t>ปิดงบภายใน 2 วันทำการ</a:t>
-            </a:r>
-          </a:p>
-          <a:p>
-            <a:pPr/>
-            <a:r>
-              <a:rPr lang="th-TH" dirty="0"/>
-              <a:t>บันทึกทุกการแก้ไขพร้อมผู้ทำและเวลา</a:t>
-            </a:r>
-          </a:p>
-        </p:txBody>
-      </p:sp>
-      <p:sp>
-        <p:nvSpPr>
-          <p:cNvPr id="7" name="TkL"/>
-          <p:cNvSpPr>
-            <a:spLocks noGrp="1"/>
-          </p:cNvSpPr>
-          <p:nvPr>
-            <p:ph type="body" idx="5"/>
-          </p:nvPr>
-        </p:nvSpPr>
-        <p:spPr/>
-        <p:txBody>
-          <a:bodyPr/>
-          <a:lstStyle/>
-          <a:p>
-            <a:pPr/>
-            <a:r>
-              <a:rPr lang="th-TH" dirty="0"/>
-              <a:t>สรุป</a:t>
-            </a:r>
-          </a:p>
-        </p:txBody>
-      </p:sp>
-      <p:sp>
-        <p:nvSpPr>
-          <p:cNvPr id="8" name="TkC"/>
-          <p:cNvSpPr>
-            <a:spLocks noGrp="1"/>
-          </p:cNvSpPr>
-          <p:nvPr>
-            <p:ph type="body" idx="6"/>
-          </p:nvPr>
-        </p:nvSpPr>
-        <p:spPr/>
-        <p:txBody>
-          <a:bodyPr/>
-          <a:lstStyle/>
-          <a:p>
-            <a:pPr/>
-            <a:r>
-              <a:rPr lang="th-TH" dirty="0"/>
-              <a:t>ปัญหาหลักคือการคีย์ซ้ำ ไม่ใช่จำนวนเอกสาร</a:t>
+              <a:t>สิ่งที่เราพบจากการสำรวจงานบัญชีของท่านสองสัปดาห์</a:t>
             </a:r>
           </a:p>
         </p:txBody>
@@ -21084,34 +22616,37 @@
             <a:pPr/>
             <a:r>
               <a:rPr lang="th-TH" dirty="0"/>
-              <a:t>ปิดงบ พ.ค. ใช้ 9 วัน นานสุดในรอบครึ่งปี</a:t>
-            </a:r>
-          </a:p>
-        </p:txBody>
-      </p:sp>
-      <p:graphicFrame>
-        <p:nvGraphicFramePr>
-          <p:cNvPr id="3" name="Close Days"/>
-          <p:cNvGraphicFramePr>
-            <a:graphicFrameLocks noGrp="1"/>
-          </p:cNvGraphicFramePr>
-          <p:nvPr>
-            <p:ph type="chart" idx="1"/>
-          </p:nvPr>
-        </p:nvGraphicFramePr>
-        <p:xfrm>
-          <a:off x="914400" y="1691640"/>
-          <a:ext cx="6847840" cy="3474720"/>
-        </p:xfrm>
-        <a:graphic>
-          <a:graphicData uri="http://schemas.openxmlformats.org/drawingml/2006/chart">
-            <c:chart xmlns:c="http://schemas.openxmlformats.org/drawingml/2006/chart" r:id="rId2"/>
-          </a:graphicData>
-        </a:graphic>
-      </p:graphicFrame>
-      <p:sp>
-        <p:nvSpPr>
-          <p:cNvPr id="4" name="Fig"/>
+              <a:t>สภาพระบบบัญชีปัจจุบัน</a:t>
+            </a:r>
+          </a:p>
+        </p:txBody>
+      </p:sp>
+      <p:sp>
+        <p:nvSpPr>
+          <p:cNvPr id="3" name="CtxK"/>
+          <p:cNvSpPr>
+            <a:spLocks noGrp="1"/>
+          </p:cNvSpPr>
+          <p:nvPr>
+            <p:ph type="body" idx="1"/>
+          </p:nvPr>
+        </p:nvSpPr>
+        <p:spPr/>
+        <p:txBody>
+          <a:bodyPr/>
+          <a:lstStyle/>
+          <a:p>
+            <a:pPr/>
+            <a:r>
+              <a:rPr lang="th-TH" dirty="0"/>
+              <a:t>สภาพปัจจุบัน</a:t>
+            </a:r>
+          </a:p>
+        </p:txBody>
+      </p:sp>
+      <p:sp>
+        <p:nvSpPr>
+          <p:cNvPr id="4" name="CtxB"/>
           <p:cNvSpPr>
             <a:spLocks noGrp="1"/>
           </p:cNvSpPr>
@@ -21127,14 +22662,35 @@
             <a:pPr/>
             <a:r>
               <a:rPr lang="th-TH" dirty="0"/>
-              <a:t>9 วัน</a:t>
-            </a:r>
-          </a:p>
-        </p:txBody>
-      </p:sp>
-      <p:sp>
-        <p:nvSpPr>
-          <p:cNvPr id="5" name="FigL"/>
+              <a:t>คีย์เอกสารซ้ำสามระบบ ไม่มีจุดตรวจกลาง</a:t>
+            </a:r>
+          </a:p>
+          <a:p>
+            <a:pPr lvl="1"/>
+            <a:r>
+              <a:rPr lang="th-TH" dirty="0"/>
+              <a:t>เอกสารเข้าเฉลี่ย 1,200 ใบต่อเดือน</a:t>
+            </a:r>
+          </a:p>
+          <a:p>
+            <a:pPr/>
+            <a:r>
+              <a:rPr lang="th-TH" dirty="0"/>
+              <a:t>ปิดงบล่าช้าเฉลี่ย 6 วันทำการ</a:t>
+            </a:r>
+          </a:p>
+          <a:p>
+            <a:pPr/>
+            <a:r>
+              <a:rPr lang="th-TH" dirty="0"/>
+              <a:t>ไม่มี audit trail ของการแก้ไขรายการ</a:t>
+            </a:r>
+          </a:p>
+        </p:txBody>
+      </p:sp>
+      <p:sp>
+        <p:nvSpPr>
+          <p:cNvPr id="5" name="OutK"/>
           <p:cNvSpPr>
             <a:spLocks noGrp="1"/>
           </p:cNvSpPr>
@@ -21150,14 +22706,14 @@
             <a:pPr/>
             <a:r>
               <a:rPr lang="th-TH" dirty="0"/>
-              <a:t>เวลาปิดงบ พ.ค. 2569 · เป้าหมาย 2 วัน</a:t>
-            </a:r>
-          </a:p>
-        </p:txBody>
-      </p:sp>
-      <p:sp>
-        <p:nvSpPr>
-          <p:cNvPr id="6" name="Ins"/>
+              <a:t>สิ่งที่จะเกิดขึ้น</a:t>
+            </a:r>
+          </a:p>
+        </p:txBody>
+      </p:sp>
+      <p:sp>
+        <p:nvSpPr>
+          <p:cNvPr id="6" name="OutB"/>
           <p:cNvSpPr>
             <a:spLocks noGrp="1"/>
           </p:cNvSpPr>
@@ -21173,56 +22729,40 @@
             <a:pPr/>
             <a:r>
               <a:rPr lang="th-TH" dirty="0"/>
-              <a:t>เดือนที่เอกสารเข้ามากสุด คือเดือนที่ปิดงบนานสุด</a:t>
+              <a:t>คีย์จุดเดียว ระบบกระจายต่อให้อัตโนมัติ</a:t>
+            </a:r>
+          </a:p>
+          <a:p>
+            <a:pPr lvl="1"/>
+            <a:r>
+              <a:rPr lang="th-TH" dirty="0"/>
+              <a:t>ลดเวลาคีย์ต่อใบจาก 4 นาที เหลือ 40 วินาที</a:t>
             </a:r>
           </a:p>
           <a:p>
             <a:pPr/>
             <a:r>
               <a:rPr lang="th-TH" dirty="0"/>
-              <a:t>ทุกเดือนเกินเป้าอย่างน้อยสามเท่า</a:t>
+              <a:t>ปิดงบภายใน 2 วันทำการ</a:t>
             </a:r>
           </a:p>
           <a:p>
             <a:pPr/>
             <a:r>
               <a:rPr lang="th-TH" dirty="0"/>
-              <a:t>ความล่าช้าเกิดที่ขั้นกระทบยอด ไม่ใช่ขั้นคีย์</a:t>
-            </a:r>
-          </a:p>
-        </p:txBody>
-      </p:sp>
-      <p:sp>
-        <p:nvSpPr>
-          <p:cNvPr id="7" name="Src"/>
+              <a:t>บันทึกทุกการแก้ไขพร้อมผู้ทำและเวลา</a:t>
+            </a:r>
+          </a:p>
+        </p:txBody>
+      </p:sp>
+      <p:sp>
+        <p:nvSpPr>
+          <p:cNvPr id="7" name="TkL"/>
           <p:cNvSpPr>
             <a:spLocks noGrp="1"/>
           </p:cNvSpPr>
           <p:nvPr>
             <p:ph type="body" idx="5"/>
-          </p:nvPr>
-        </p:nvSpPr>
-        <p:spPr/>
-        <p:txBody>
-          <a:bodyPr/>
-          <a:lstStyle/>
-          <a:p>
-            <a:pPr/>
-            <a:r>
-              <a:rPr lang="th-TH" dirty="0"/>
-              <a:t>ระบบบัญชีของลูกค้า · ม.ค.–มิ.ย. 2569 · หน่วย: วันทำการ</a:t>
-            </a:r>
-          </a:p>
-        </p:txBody>
-      </p:sp>
-      <p:sp>
-        <p:nvSpPr>
-          <p:cNvPr id="8" name="TkL"/>
-          <p:cNvSpPr>
-            <a:spLocks noGrp="1"/>
-          </p:cNvSpPr>
-          <p:nvPr>
-            <p:ph type="body" idx="6"/>
           </p:nvPr>
         </p:nvSpPr>
         <p:spPr/>
@@ -21240,12 +22780,12 @@
       </p:sp>
       <p:sp>
         <p:nvSpPr>
-          <p:cNvPr id="9" name="TkC"/>
-          <p:cNvSpPr>
-            <a:spLocks noGrp="1"/>
-          </p:cNvSpPr>
-          <p:nvPr>
-            <p:ph type="body" idx="7"/>
+          <p:cNvPr id="8" name="TkC"/>
+          <p:cNvSpPr>
+            <a:spLocks noGrp="1"/>
+          </p:cNvSpPr>
+          <p:nvPr>
+            <p:ph type="body" idx="6"/>
           </p:nvPr>
         </p:nvSpPr>
         <p:spPr/>
@@ -21256,7 +22796,7 @@
             <a:pPr/>
             <a:r>
               <a:rPr lang="th-TH" dirty="0"/>
-              <a:t>เวลาปิดงบแปรตามปริมาณเอกสาร การลดงานคีย์ซ้ำจึงลดเวลาปิดงบได้จริง</a:t>
+              <a:t>ปัญหาหลักคือการคีย์ซ้ำ ไม่ใช่จำนวนเอกสาร</a:t>
             </a:r>
           </a:p>
         </p:txBody>
@@ -21304,19 +22844,39 @@
             <a:pPr/>
             <a:r>
               <a:rPr lang="th-TH" dirty="0"/>
-              <a:t>ก่อนและหลังใช้บริการ</a:t>
-            </a:r>
-          </a:p>
-        </p:txBody>
-      </p:sp>
-      <p:sp>
-        <p:nvSpPr>
-          <p:cNvPr id="3" name="L"/>
-          <p:cNvSpPr>
-            <a:spLocks noGrp="1"/>
-          </p:cNvSpPr>
-          <p:nvPr>
-            <p:ph type="body" idx="1"/>
+              <a:t>ปิดงบ พ.ค. ใช้ 9 วัน นานสุดในรอบครึ่งปี</a:t>
+            </a:r>
+          </a:p>
+        </p:txBody>
+      </p:sp>
+      <p:graphicFrame>
+        <p:nvGraphicFramePr>
+          <p:cNvPr id="3" name="Close Days"/>
+          <p:cNvGraphicFramePr>
+            <a:graphicFrameLocks noGrp="1"/>
+          </p:cNvGraphicFramePr>
+          <p:nvPr>
+            <p:ph type="chart" idx="1"/>
+          </p:nvPr>
+        </p:nvGraphicFramePr>
+        <p:xfrm>
+          <a:off x="914400" y="1691640"/>
+          <a:ext cx="6847840" cy="3474720"/>
+        </p:xfrm>
+        <a:graphic>
+          <a:graphicData uri="http://schemas.openxmlformats.org/drawingml/2006/chart">
+            <c:chart xmlns:c="http://schemas.openxmlformats.org/drawingml/2006/chart" r:id="rId2"/>
+          </a:graphicData>
+        </a:graphic>
+      </p:graphicFrame>
+      <p:sp>
+        <p:nvSpPr>
+          <p:cNvPr id="4" name="Fig"/>
+          <p:cNvSpPr>
+            <a:spLocks noGrp="1"/>
+          </p:cNvSpPr>
+          <p:nvPr>
+            <p:ph type="body" idx="2"/>
           </p:nvPr>
         </p:nvSpPr>
         <p:spPr/>
@@ -21327,33 +22887,79 @@
             <a:pPr/>
             <a:r>
               <a:rPr lang="th-TH" dirty="0"/>
-              <a:t>ก่อน</a:t>
-            </a:r>
-          </a:p>
-          <a:p>
-            <a:pPr lvl="1"/>
+              <a:t>9 วัน</a:t>
+            </a:r>
+          </a:p>
+        </p:txBody>
+      </p:sp>
+      <p:sp>
+        <p:nvSpPr>
+          <p:cNvPr id="5" name="FigL"/>
+          <p:cNvSpPr>
+            <a:spLocks noGrp="1"/>
+          </p:cNvSpPr>
+          <p:nvPr>
+            <p:ph type="body" idx="3"/>
+          </p:nvPr>
+        </p:nvSpPr>
+        <p:spPr/>
+        <p:txBody>
+          <a:bodyPr/>
+          <a:lstStyle/>
+          <a:p>
+            <a:pPr/>
             <a:r>
               <a:rPr lang="th-TH" dirty="0"/>
-              <a:t>ระบบล่มบ่อย ไม่มีคนดูแลประจำ</a:t>
-            </a:r>
-          </a:p>
-          <a:p>
-            <a:pPr lvl="1"/>
+              <a:t>เวลาปิดงบ พ.ค. 2569 · เป้าหมาย 2 วัน</a:t>
+            </a:r>
+          </a:p>
+        </p:txBody>
+      </p:sp>
+      <p:sp>
+        <p:nvSpPr>
+          <p:cNvPr id="6" name="Ins"/>
+          <p:cNvSpPr>
+            <a:spLocks noGrp="1"/>
+          </p:cNvSpPr>
+          <p:nvPr>
+            <p:ph type="body" idx="4"/>
+          </p:nvPr>
+        </p:nvSpPr>
+        <p:spPr/>
+        <p:txBody>
+          <a:bodyPr/>
+          <a:lstStyle/>
+          <a:p>
+            <a:pPr/>
             <a:r>
               <a:rPr lang="th-TH" dirty="0"/>
-              <a:t>ค่าใช้จ่ายไม่แน่นอน</a:t>
-            </a:r>
-          </a:p>
-        </p:txBody>
-      </p:sp>
-      <p:sp>
-        <p:nvSpPr>
-          <p:cNvPr id="4" name="R"/>
-          <p:cNvSpPr>
-            <a:spLocks noGrp="1"/>
-          </p:cNvSpPr>
-          <p:nvPr>
-            <p:ph type="body" idx="2"/>
+              <a:t>เดือนที่เอกสารเข้ามากสุด คือเดือนที่ปิดงบนานสุด</a:t>
+            </a:r>
+          </a:p>
+          <a:p>
+            <a:pPr/>
+            <a:r>
+              <a:rPr lang="th-TH" dirty="0"/>
+              <a:t>ทุกเดือนเกินเป้าอย่างน้อยสามเท่า</a:t>
+            </a:r>
+          </a:p>
+          <a:p>
+            <a:pPr/>
+            <a:r>
+              <a:rPr lang="th-TH" dirty="0"/>
+              <a:t>ความล่าช้าเกิดที่ขั้นกระทบยอด ไม่ใช่ขั้นคีย์</a:t>
+            </a:r>
+          </a:p>
+        </p:txBody>
+      </p:sp>
+      <p:sp>
+        <p:nvSpPr>
+          <p:cNvPr id="7" name="Src"/>
+          <p:cNvSpPr>
+            <a:spLocks noGrp="1"/>
+          </p:cNvSpPr>
+          <p:nvPr>
+            <p:ph type="body" idx="5"/>
           </p:nvPr>
         </p:nvSpPr>
         <p:spPr/>
@@ -21364,21 +22970,53 @@
             <a:pPr/>
             <a:r>
               <a:rPr lang="th-TH" dirty="0"/>
-              <a:t>หลัง</a:t>
-            </a:r>
-          </a:p>
-          <a:p>
-            <a:pPr lvl="1"/>
+              <a:t>ระบบบัญชีของลูกค้า · ม.ค.–มิ.ย. 2569 · หน่วย: วันทำการ</a:t>
+            </a:r>
+          </a:p>
+        </p:txBody>
+      </p:sp>
+      <p:sp>
+        <p:nvSpPr>
+          <p:cNvPr id="8" name="TkL"/>
+          <p:cNvSpPr>
+            <a:spLocks noGrp="1"/>
+          </p:cNvSpPr>
+          <p:nvPr>
+            <p:ph type="body" idx="6"/>
+          </p:nvPr>
+        </p:nvSpPr>
+        <p:spPr/>
+        <p:txBody>
+          <a:bodyPr/>
+          <a:lstStyle/>
+          <a:p>
+            <a:pPr/>
             <a:r>
               <a:rPr lang="th-TH" dirty="0"/>
-              <a:t>มอนิเตอร์ 24 ชั่วโมง แจ้งเตือนอัตโนมัติ</a:t>
-            </a:r>
-          </a:p>
-          <a:p>
-            <a:pPr lvl="1"/>
+              <a:t>สรุป</a:t>
+            </a:r>
+          </a:p>
+        </p:txBody>
+      </p:sp>
+      <p:sp>
+        <p:nvSpPr>
+          <p:cNvPr id="9" name="TkC"/>
+          <p:cNvSpPr>
+            <a:spLocks noGrp="1"/>
+          </p:cNvSpPr>
+          <p:nvPr>
+            <p:ph type="body" idx="7"/>
+          </p:nvPr>
+        </p:nvSpPr>
+        <p:spPr/>
+        <p:txBody>
+          <a:bodyPr/>
+          <a:lstStyle/>
+          <a:p>
+            <a:pPr/>
             <a:r>
               <a:rPr lang="th-TH" dirty="0"/>
-              <a:t>ค่าใช้จ่ายคงที่ต่อเดือน</a:t>
+              <a:t>เวลาปิดงบแปรตามปริมาณเอกสาร การลดงานคีย์ซ้ำจึงลดเวลาปิดงบได้จริง</a:t>
             </a:r>
           </a:p>
         </p:txBody>
@@ -21426,19 +23064,19 @@
             <a:pPr/>
             <a:r>
               <a:rPr lang="th-TH" dirty="0"/>
-              <a:t>สี่ผลลัพธ์ที่ข้อเสนอนี้ให้</a:t>
-            </a:r>
-          </a:p>
-        </p:txBody>
-      </p:sp>
-      <p:sp>
-        <p:nvSpPr>
-          <p:cNvPr id="3" name="N0"/>
-          <p:cNvSpPr>
-            <a:spLocks noGrp="1"/>
-          </p:cNvSpPr>
-          <p:nvPr>
-            <p:ph type="body" idx="20"/>
+              <a:t>ก่อนและหลังใช้บริการ</a:t>
+            </a:r>
+          </a:p>
+        </p:txBody>
+      </p:sp>
+      <p:sp>
+        <p:nvSpPr>
+          <p:cNvPr id="3" name="L"/>
+          <p:cNvSpPr>
+            <a:spLocks noGrp="1"/>
+          </p:cNvSpPr>
+          <p:nvPr>
+            <p:ph type="body" idx="1"/>
           </p:nvPr>
         </p:nvSpPr>
         <p:spPr/>
@@ -21449,19 +23087,33 @@
             <a:pPr/>
             <a:r>
               <a:rPr lang="th-TH" dirty="0"/>
-              <a:t>01</a:t>
-            </a:r>
-          </a:p>
-        </p:txBody>
-      </p:sp>
-      <p:sp>
-        <p:nvSpPr>
-          <p:cNvPr id="4" name="H0"/>
-          <p:cNvSpPr>
-            <a:spLocks noGrp="1"/>
-          </p:cNvSpPr>
-          <p:nvPr>
-            <p:ph type="body" idx="21"/>
+              <a:t>ก่อน</a:t>
+            </a:r>
+          </a:p>
+          <a:p>
+            <a:pPr lvl="1"/>
+            <a:r>
+              <a:rPr lang="th-TH" dirty="0"/>
+              <a:t>ระบบล่มบ่อย ไม่มีคนดูแลประจำ</a:t>
+            </a:r>
+          </a:p>
+          <a:p>
+            <a:pPr lvl="1"/>
+            <a:r>
+              <a:rPr lang="th-TH" dirty="0"/>
+              <a:t>ค่าใช้จ่ายไม่แน่นอน</a:t>
+            </a:r>
+          </a:p>
+        </p:txBody>
+      </p:sp>
+      <p:sp>
+        <p:nvSpPr>
+          <p:cNvPr id="4" name="R"/>
+          <p:cNvSpPr>
+            <a:spLocks noGrp="1"/>
+          </p:cNvSpPr>
+          <p:nvPr>
+            <p:ph type="body" idx="2"/>
           </p:nvPr>
         </p:nvSpPr>
         <p:spPr/>
@@ -21472,283 +23124,21 @@
             <a:pPr/>
             <a:r>
               <a:rPr lang="th-TH" dirty="0"/>
-              <a:t>ลดงานคีย์ซ้ำ</a:t>
-            </a:r>
-          </a:p>
-        </p:txBody>
-      </p:sp>
-      <p:sp>
-        <p:nvSpPr>
-          <p:cNvPr id="5" name="B0"/>
-          <p:cNvSpPr>
-            <a:spLocks noGrp="1"/>
-          </p:cNvSpPr>
-          <p:nvPr>
-            <p:ph type="body" idx="22"/>
-          </p:nvPr>
-        </p:nvSpPr>
-        <p:spPr/>
-        <p:txBody>
-          <a:bodyPr/>
-          <a:lstStyle/>
-          <a:p>
-            <a:pPr/>
+              <a:t>หลัง</a:t>
+            </a:r>
+          </a:p>
+          <a:p>
+            <a:pPr lvl="1"/>
             <a:r>
               <a:rPr lang="th-TH" dirty="0"/>
-              <a:t>รับเอกสารเข้าระบบเดียว แล้วกระจายต่อให้ทุกปลายทางอัตโนมัติ</a:t>
-            </a:r>
-          </a:p>
-        </p:txBody>
-      </p:sp>
-      <p:sp>
-        <p:nvSpPr>
-          <p:cNvPr id="6" name="N1"/>
-          <p:cNvSpPr>
-            <a:spLocks noGrp="1"/>
-          </p:cNvSpPr>
-          <p:nvPr>
-            <p:ph type="body" idx="23"/>
-          </p:nvPr>
-        </p:nvSpPr>
-        <p:spPr/>
-        <p:txBody>
-          <a:bodyPr/>
-          <a:lstStyle/>
-          <a:p>
-            <a:pPr/>
+              <a:t>มอนิเตอร์ 24 ชั่วโมง แจ้งเตือนอัตโนมัติ</a:t>
+            </a:r>
+          </a:p>
+          <a:p>
+            <a:pPr lvl="1"/>
             <a:r>
               <a:rPr lang="th-TH" dirty="0"/>
-              <a:t>02</a:t>
-            </a:r>
-          </a:p>
-        </p:txBody>
-      </p:sp>
-      <p:sp>
-        <p:nvSpPr>
-          <p:cNvPr id="7" name="H1"/>
-          <p:cNvSpPr>
-            <a:spLocks noGrp="1"/>
-          </p:cNvSpPr>
-          <p:nvPr>
-            <p:ph type="body" idx="24"/>
-          </p:nvPr>
-        </p:nvSpPr>
-        <p:spPr/>
-        <p:txBody>
-          <a:bodyPr/>
-          <a:lstStyle/>
-          <a:p>
-            <a:pPr/>
-            <a:r>
-              <a:rPr lang="th-TH" dirty="0"/>
-              <a:t>ตรวจสอบได้</a:t>
-            </a:r>
-          </a:p>
-        </p:txBody>
-      </p:sp>
-      <p:sp>
-        <p:nvSpPr>
-          <p:cNvPr id="8" name="B1"/>
-          <p:cNvSpPr>
-            <a:spLocks noGrp="1"/>
-          </p:cNvSpPr>
-          <p:nvPr>
-            <p:ph type="body" idx="25"/>
-          </p:nvPr>
-        </p:nvSpPr>
-        <p:spPr/>
-        <p:txBody>
-          <a:bodyPr/>
-          <a:lstStyle/>
-          <a:p>
-            <a:pPr/>
-            <a:r>
-              <a:rPr lang="th-TH" dirty="0"/>
-              <a:t>ทุกรายการมี audit trail ผู้ทำ เวลา และค่าก่อนหลัง</a:t>
-            </a:r>
-          </a:p>
-        </p:txBody>
-      </p:sp>
-      <p:sp>
-        <p:nvSpPr>
-          <p:cNvPr id="9" name="N2"/>
-          <p:cNvSpPr>
-            <a:spLocks noGrp="1"/>
-          </p:cNvSpPr>
-          <p:nvPr>
-            <p:ph type="body" idx="26"/>
-          </p:nvPr>
-        </p:nvSpPr>
-        <p:spPr/>
-        <p:txBody>
-          <a:bodyPr/>
-          <a:lstStyle/>
-          <a:p>
-            <a:pPr/>
-            <a:r>
-              <a:rPr lang="th-TH" dirty="0"/>
-              <a:t>03</a:t>
-            </a:r>
-          </a:p>
-        </p:txBody>
-      </p:sp>
-      <p:sp>
-        <p:nvSpPr>
-          <p:cNvPr id="10" name="H2"/>
-          <p:cNvSpPr>
-            <a:spLocks noGrp="1"/>
-          </p:cNvSpPr>
-          <p:nvPr>
-            <p:ph type="body" idx="27"/>
-          </p:nvPr>
-        </p:nvSpPr>
-        <p:spPr/>
-        <p:txBody>
-          <a:bodyPr/>
-          <a:lstStyle/>
-          <a:p>
-            <a:pPr/>
-            <a:r>
-              <a:rPr lang="th-TH" dirty="0"/>
-              <a:t>ปิดงบเร็วขึ้น</a:t>
-            </a:r>
-          </a:p>
-        </p:txBody>
-      </p:sp>
-      <p:sp>
-        <p:nvSpPr>
-          <p:cNvPr id="11" name="B2"/>
-          <p:cNvSpPr>
-            <a:spLocks noGrp="1"/>
-          </p:cNvSpPr>
-          <p:nvPr>
-            <p:ph type="body" idx="28"/>
-          </p:nvPr>
-        </p:nvSpPr>
-        <p:spPr/>
-        <p:txBody>
-          <a:bodyPr/>
-          <a:lstStyle/>
-          <a:p>
-            <a:pPr/>
-            <a:r>
-              <a:rPr lang="th-TH" dirty="0"/>
-              <a:t>กระทบยอดอัตโนมัติรายวัน ไม่ต้องรอสิ้นเดือน</a:t>
-            </a:r>
-          </a:p>
-        </p:txBody>
-      </p:sp>
-      <p:sp>
-        <p:nvSpPr>
-          <p:cNvPr id="12" name="N3"/>
-          <p:cNvSpPr>
-            <a:spLocks noGrp="1"/>
-          </p:cNvSpPr>
-          <p:nvPr>
-            <p:ph type="body" idx="29"/>
-          </p:nvPr>
-        </p:nvSpPr>
-        <p:spPr/>
-        <p:txBody>
-          <a:bodyPr/>
-          <a:lstStyle/>
-          <a:p>
-            <a:pPr/>
-            <a:r>
-              <a:rPr lang="th-TH" dirty="0"/>
-              <a:t>04</a:t>
-            </a:r>
-          </a:p>
-        </p:txBody>
-      </p:sp>
-      <p:sp>
-        <p:nvSpPr>
-          <p:cNvPr id="13" name="H3"/>
-          <p:cNvSpPr>
-            <a:spLocks noGrp="1"/>
-          </p:cNvSpPr>
-          <p:nvPr>
-            <p:ph type="body" idx="30"/>
-          </p:nvPr>
-        </p:nvSpPr>
-        <p:spPr/>
-        <p:txBody>
-          <a:bodyPr/>
-          <a:lstStyle/>
-          <a:p>
-            <a:pPr/>
-            <a:r>
-              <a:rPr lang="th-TH" dirty="0"/>
-              <a:t>ขยายต่อได้</a:t>
-            </a:r>
-          </a:p>
-        </p:txBody>
-      </p:sp>
-      <p:sp>
-        <p:nvSpPr>
-          <p:cNvPr id="14" name="B3"/>
-          <p:cNvSpPr>
-            <a:spLocks noGrp="1"/>
-          </p:cNvSpPr>
-          <p:nvPr>
-            <p:ph type="body" idx="31"/>
-          </p:nvPr>
-        </p:nvSpPr>
-        <p:spPr/>
-        <p:txBody>
-          <a:bodyPr/>
-          <a:lstStyle/>
-          <a:p>
-            <a:pPr/>
-            <a:r>
-              <a:rPr lang="th-TH" dirty="0"/>
-              <a:t>เพิ่มกระบวนการใหม่โดยไม่แก้ของเดิม</a:t>
-            </a:r>
-          </a:p>
-        </p:txBody>
-      </p:sp>
-      <p:sp>
-        <p:nvSpPr>
-          <p:cNvPr id="15" name="BL"/>
-          <p:cNvSpPr>
-            <a:spLocks noGrp="1"/>
-          </p:cNvSpPr>
-          <p:nvPr>
-            <p:ph type="body" idx="32"/>
-          </p:nvPr>
-        </p:nvSpPr>
-        <p:spPr/>
-        <p:txBody>
-          <a:bodyPr/>
-          <a:lstStyle/>
-          <a:p>
-            <a:pPr/>
-            <a:r>
-              <a:rPr lang="th-TH" dirty="0"/>
-              <a:t>สรุป</a:t>
-            </a:r>
-          </a:p>
-        </p:txBody>
-      </p:sp>
-      <p:sp>
-        <p:nvSpPr>
-          <p:cNvPr id="16" name="BC"/>
-          <p:cNvSpPr>
-            <a:spLocks noGrp="1"/>
-          </p:cNvSpPr>
-          <p:nvPr>
-            <p:ph type="body" idx="33"/>
-          </p:nvPr>
-        </p:nvSpPr>
-        <p:spPr/>
-        <p:txBody>
-          <a:bodyPr/>
-          <a:lstStyle/>
-          <a:p>
-            <a:pPr/>
-            <a:r>
-              <a:rPr lang="th-TH" dirty="0"/>
-              <a:t>ทั้งสี่ข้อมาจากการแก้จุดเดียวกัน คือรวมจุดรับเอกสาร</a:t>
+              <a:t>ค่าใช้จ่ายคงที่ต่อเดือน</a:t>
             </a:r>
           </a:p>
         </p:txBody>
@@ -21796,19 +23186,19 @@
             <a:pPr/>
             <a:r>
               <a:rPr lang="th-TH" dirty="0"/>
-              <a:t>วิธีการทำงาน</a:t>
-            </a:r>
-          </a:p>
-        </p:txBody>
-      </p:sp>
-      <p:sp>
-        <p:nvSpPr>
-          <p:cNvPr id="3" name="Cap"/>
-          <p:cNvSpPr>
-            <a:spLocks noGrp="1"/>
-          </p:cNvSpPr>
-          <p:nvPr>
-            <p:ph type="body" idx="2"/>
+              <a:t>สี่ผลลัพธ์ที่ข้อเสนอนี้ให้</a:t>
+            </a:r>
+          </a:p>
+        </p:txBody>
+      </p:sp>
+      <p:sp>
+        <p:nvSpPr>
+          <p:cNvPr id="3" name="N0"/>
+          <p:cNvSpPr>
+            <a:spLocks noGrp="1"/>
+          </p:cNvSpPr>
+          <p:nvPr>
+            <p:ph type="body" idx="20"/>
           </p:nvPr>
         </p:nvSpPr>
         <p:spPr/>
@@ -21819,7 +23209,306 @@
             <a:pPr/>
             <a:r>
               <a:rPr lang="th-TH" dirty="0"/>
-              <a:t>กระบวนการ สถาปัตยกรรม และขอบเขตที่ตกลงกัน</a:t>
+              <a:t>01</a:t>
+            </a:r>
+          </a:p>
+        </p:txBody>
+      </p:sp>
+      <p:sp>
+        <p:nvSpPr>
+          <p:cNvPr id="4" name="H0"/>
+          <p:cNvSpPr>
+            <a:spLocks noGrp="1"/>
+          </p:cNvSpPr>
+          <p:nvPr>
+            <p:ph type="body" idx="21"/>
+          </p:nvPr>
+        </p:nvSpPr>
+        <p:spPr/>
+        <p:txBody>
+          <a:bodyPr/>
+          <a:lstStyle/>
+          <a:p>
+            <a:pPr/>
+            <a:r>
+              <a:rPr lang="th-TH" dirty="0"/>
+              <a:t>ลดงานคีย์ซ้ำ</a:t>
+            </a:r>
+          </a:p>
+        </p:txBody>
+      </p:sp>
+      <p:sp>
+        <p:nvSpPr>
+          <p:cNvPr id="5" name="B0"/>
+          <p:cNvSpPr>
+            <a:spLocks noGrp="1"/>
+          </p:cNvSpPr>
+          <p:nvPr>
+            <p:ph type="body" idx="22"/>
+          </p:nvPr>
+        </p:nvSpPr>
+        <p:spPr/>
+        <p:txBody>
+          <a:bodyPr/>
+          <a:lstStyle/>
+          <a:p>
+            <a:pPr/>
+            <a:r>
+              <a:rPr lang="th-TH" dirty="0"/>
+              <a:t>รับเอกสารเข้าระบบเดียว แล้วกระจายต่อให้ทุกปลายทางอัตโนมัติ</a:t>
+            </a:r>
+          </a:p>
+        </p:txBody>
+      </p:sp>
+      <p:sp>
+        <p:nvSpPr>
+          <p:cNvPr id="6" name="N1"/>
+          <p:cNvSpPr>
+            <a:spLocks noGrp="1"/>
+          </p:cNvSpPr>
+          <p:nvPr>
+            <p:ph type="body" idx="23"/>
+          </p:nvPr>
+        </p:nvSpPr>
+        <p:spPr/>
+        <p:txBody>
+          <a:bodyPr/>
+          <a:lstStyle/>
+          <a:p>
+            <a:pPr/>
+            <a:r>
+              <a:rPr lang="th-TH" dirty="0"/>
+              <a:t>02</a:t>
+            </a:r>
+          </a:p>
+        </p:txBody>
+      </p:sp>
+      <p:sp>
+        <p:nvSpPr>
+          <p:cNvPr id="7" name="H1"/>
+          <p:cNvSpPr>
+            <a:spLocks noGrp="1"/>
+          </p:cNvSpPr>
+          <p:nvPr>
+            <p:ph type="body" idx="24"/>
+          </p:nvPr>
+        </p:nvSpPr>
+        <p:spPr/>
+        <p:txBody>
+          <a:bodyPr/>
+          <a:lstStyle/>
+          <a:p>
+            <a:pPr/>
+            <a:r>
+              <a:rPr lang="th-TH" dirty="0"/>
+              <a:t>ตรวจสอบได้</a:t>
+            </a:r>
+          </a:p>
+        </p:txBody>
+      </p:sp>
+      <p:sp>
+        <p:nvSpPr>
+          <p:cNvPr id="8" name="B1"/>
+          <p:cNvSpPr>
+            <a:spLocks noGrp="1"/>
+          </p:cNvSpPr>
+          <p:nvPr>
+            <p:ph type="body" idx="25"/>
+          </p:nvPr>
+        </p:nvSpPr>
+        <p:spPr/>
+        <p:txBody>
+          <a:bodyPr/>
+          <a:lstStyle/>
+          <a:p>
+            <a:pPr/>
+            <a:r>
+              <a:rPr lang="th-TH" dirty="0"/>
+              <a:t>ทุกรายการมี audit trail ผู้ทำ เวลา และค่าก่อนหลัง</a:t>
+            </a:r>
+          </a:p>
+        </p:txBody>
+      </p:sp>
+      <p:sp>
+        <p:nvSpPr>
+          <p:cNvPr id="9" name="N2"/>
+          <p:cNvSpPr>
+            <a:spLocks noGrp="1"/>
+          </p:cNvSpPr>
+          <p:nvPr>
+            <p:ph type="body" idx="26"/>
+          </p:nvPr>
+        </p:nvSpPr>
+        <p:spPr/>
+        <p:txBody>
+          <a:bodyPr/>
+          <a:lstStyle/>
+          <a:p>
+            <a:pPr/>
+            <a:r>
+              <a:rPr lang="th-TH" dirty="0"/>
+              <a:t>03</a:t>
+            </a:r>
+          </a:p>
+        </p:txBody>
+      </p:sp>
+      <p:sp>
+        <p:nvSpPr>
+          <p:cNvPr id="10" name="H2"/>
+          <p:cNvSpPr>
+            <a:spLocks noGrp="1"/>
+          </p:cNvSpPr>
+          <p:nvPr>
+            <p:ph type="body" idx="27"/>
+          </p:nvPr>
+        </p:nvSpPr>
+        <p:spPr/>
+        <p:txBody>
+          <a:bodyPr/>
+          <a:lstStyle/>
+          <a:p>
+            <a:pPr/>
+            <a:r>
+              <a:rPr lang="th-TH" dirty="0"/>
+              <a:t>ปิดงบเร็วขึ้น</a:t>
+            </a:r>
+          </a:p>
+        </p:txBody>
+      </p:sp>
+      <p:sp>
+        <p:nvSpPr>
+          <p:cNvPr id="11" name="B2"/>
+          <p:cNvSpPr>
+            <a:spLocks noGrp="1"/>
+          </p:cNvSpPr>
+          <p:nvPr>
+            <p:ph type="body" idx="28"/>
+          </p:nvPr>
+        </p:nvSpPr>
+        <p:spPr/>
+        <p:txBody>
+          <a:bodyPr/>
+          <a:lstStyle/>
+          <a:p>
+            <a:pPr/>
+            <a:r>
+              <a:rPr lang="th-TH" dirty="0"/>
+              <a:t>กระทบยอดอัตโนมัติรายวัน ไม่ต้องรอสิ้นเดือน</a:t>
+            </a:r>
+          </a:p>
+        </p:txBody>
+      </p:sp>
+      <p:sp>
+        <p:nvSpPr>
+          <p:cNvPr id="12" name="N3"/>
+          <p:cNvSpPr>
+            <a:spLocks noGrp="1"/>
+          </p:cNvSpPr>
+          <p:nvPr>
+            <p:ph type="body" idx="29"/>
+          </p:nvPr>
+        </p:nvSpPr>
+        <p:spPr/>
+        <p:txBody>
+          <a:bodyPr/>
+          <a:lstStyle/>
+          <a:p>
+            <a:pPr/>
+            <a:r>
+              <a:rPr lang="th-TH" dirty="0"/>
+              <a:t>04</a:t>
+            </a:r>
+          </a:p>
+        </p:txBody>
+      </p:sp>
+      <p:sp>
+        <p:nvSpPr>
+          <p:cNvPr id="13" name="H3"/>
+          <p:cNvSpPr>
+            <a:spLocks noGrp="1"/>
+          </p:cNvSpPr>
+          <p:nvPr>
+            <p:ph type="body" idx="30"/>
+          </p:nvPr>
+        </p:nvSpPr>
+        <p:spPr/>
+        <p:txBody>
+          <a:bodyPr/>
+          <a:lstStyle/>
+          <a:p>
+            <a:pPr/>
+            <a:r>
+              <a:rPr lang="th-TH" dirty="0"/>
+              <a:t>ขยายต่อได้</a:t>
+            </a:r>
+          </a:p>
+        </p:txBody>
+      </p:sp>
+      <p:sp>
+        <p:nvSpPr>
+          <p:cNvPr id="14" name="B3"/>
+          <p:cNvSpPr>
+            <a:spLocks noGrp="1"/>
+          </p:cNvSpPr>
+          <p:nvPr>
+            <p:ph type="body" idx="31"/>
+          </p:nvPr>
+        </p:nvSpPr>
+        <p:spPr/>
+        <p:txBody>
+          <a:bodyPr/>
+          <a:lstStyle/>
+          <a:p>
+            <a:pPr/>
+            <a:r>
+              <a:rPr lang="th-TH" dirty="0"/>
+              <a:t>เพิ่มกระบวนการใหม่โดยไม่แก้ของเดิม</a:t>
+            </a:r>
+          </a:p>
+        </p:txBody>
+      </p:sp>
+      <p:sp>
+        <p:nvSpPr>
+          <p:cNvPr id="15" name="BL"/>
+          <p:cNvSpPr>
+            <a:spLocks noGrp="1"/>
+          </p:cNvSpPr>
+          <p:nvPr>
+            <p:ph type="body" idx="32"/>
+          </p:nvPr>
+        </p:nvSpPr>
+        <p:spPr/>
+        <p:txBody>
+          <a:bodyPr/>
+          <a:lstStyle/>
+          <a:p>
+            <a:pPr/>
+            <a:r>
+              <a:rPr lang="th-TH" dirty="0"/>
+              <a:t>สรุป</a:t>
+            </a:r>
+          </a:p>
+        </p:txBody>
+      </p:sp>
+      <p:sp>
+        <p:nvSpPr>
+          <p:cNvPr id="16" name="BC"/>
+          <p:cNvSpPr>
+            <a:spLocks noGrp="1"/>
+          </p:cNvSpPr>
+          <p:nvPr>
+            <p:ph type="body" idx="33"/>
+          </p:nvPr>
+        </p:nvSpPr>
+        <p:spPr/>
+        <p:txBody>
+          <a:bodyPr/>
+          <a:lstStyle/>
+          <a:p>
+            <a:pPr/>
+            <a:r>
+              <a:rPr lang="th-TH" dirty="0"/>
+              <a:t>ทั้งสี่ข้อมาจากการแก้จุดเดียวกัน คือรวมจุดรับเอกสาร</a:t>
             </a:r>
           </a:p>
         </p:txBody>
@@ -21867,19 +23556,19 @@
             <a:pPr/>
             <a:r>
               <a:rPr lang="th-TH" dirty="0"/>
-              <a:t>กระบวนการที่เสนอ</a:t>
-            </a:r>
-          </a:p>
-        </p:txBody>
-      </p:sp>
-      <p:sp>
-        <p:nvSpPr>
-          <p:cNvPr id="3" name="Sub"/>
-          <p:cNvSpPr>
-            <a:spLocks noGrp="1"/>
-          </p:cNvSpPr>
-          <p:nvPr>
-            <p:ph type="body" idx="1"/>
+              <a:t>วิธีการทำงาน</a:t>
+            </a:r>
+          </a:p>
+        </p:txBody>
+      </p:sp>
+      <p:sp>
+        <p:nvSpPr>
+          <p:cNvPr id="3" name="Cap"/>
+          <p:cNvSpPr>
+            <a:spLocks noGrp="1"/>
+          </p:cNvSpPr>
+          <p:nvPr>
+            <p:ph type="body" idx="2"/>
           </p:nvPr>
         </p:nvSpPr>
         <p:spPr/>
@@ -21890,398 +23579,7 @@
             <a:pPr/>
             <a:r>
               <a:rPr lang="th-TH" dirty="0"/>
-              <a:t>ห้าขั้นตอน ทำงานต่อเนื่องโดยไม่ต้องคีย์ซ้ำ</a:t>
-            </a:r>
-          </a:p>
-        </p:txBody>
-      </p:sp>
-      <p:sp>
-        <p:nvSpPr>
-          <p:cNvPr id="4" name="C0"/>
-          <p:cNvSpPr>
-            <a:spLocks noGrp="1"/>
-          </p:cNvSpPr>
-          <p:nvPr>
-            <p:ph type="body" idx="20"/>
-          </p:nvPr>
-        </p:nvSpPr>
-        <p:spPr/>
-        <p:txBody>
-          <a:bodyPr/>
-          <a:lstStyle/>
-          <a:p>
-            <a:pPr/>
-            <a:r>
-              <a:rPr lang="th-TH" dirty="0"/>
-              <a:t>1</a:t>
-            </a:r>
-          </a:p>
-        </p:txBody>
-      </p:sp>
-      <p:sp>
-        <p:nvSpPr>
-          <p:cNvPr id="5" name="H0"/>
-          <p:cNvSpPr>
-            <a:spLocks noGrp="1"/>
-          </p:cNvSpPr>
-          <p:nvPr>
-            <p:ph type="body" idx="21"/>
-          </p:nvPr>
-        </p:nvSpPr>
-        <p:spPr/>
-        <p:txBody>
-          <a:bodyPr/>
-          <a:lstStyle/>
-          <a:p>
-            <a:pPr/>
-            <a:r>
-              <a:rPr lang="th-TH" dirty="0"/>
-              <a:t>รับเอกสาร</a:t>
-            </a:r>
-          </a:p>
-        </p:txBody>
-      </p:sp>
-      <p:sp>
-        <p:nvSpPr>
-          <p:cNvPr id="6" name="B0"/>
-          <p:cNvSpPr>
-            <a:spLocks noGrp="1"/>
-          </p:cNvSpPr>
-          <p:nvPr>
-            <p:ph type="body" idx="22"/>
-          </p:nvPr>
-        </p:nvSpPr>
-        <p:spPr/>
-        <p:txBody>
-          <a:bodyPr/>
-          <a:lstStyle/>
-          <a:p>
-            <a:pPr/>
-            <a:r>
-              <a:rPr lang="th-TH" dirty="0"/>
-              <a:t>สแกนหรือรับไฟล์เข้าคิวกลาง</a:t>
-            </a:r>
-          </a:p>
-        </p:txBody>
-      </p:sp>
-      <p:sp>
-        <p:nvSpPr>
-          <p:cNvPr id="7" name="C1"/>
-          <p:cNvSpPr>
-            <a:spLocks noGrp="1"/>
-          </p:cNvSpPr>
-          <p:nvPr>
-            <p:ph type="body" idx="23"/>
-          </p:nvPr>
-        </p:nvSpPr>
-        <p:spPr/>
-        <p:txBody>
-          <a:bodyPr/>
-          <a:lstStyle/>
-          <a:p>
-            <a:pPr/>
-            <a:r>
-              <a:rPr lang="th-TH" dirty="0"/>
-              <a:t>2</a:t>
-            </a:r>
-          </a:p>
-        </p:txBody>
-      </p:sp>
-      <p:sp>
-        <p:nvSpPr>
-          <p:cNvPr id="8" name="H1"/>
-          <p:cNvSpPr>
-            <a:spLocks noGrp="1"/>
-          </p:cNvSpPr>
-          <p:nvPr>
-            <p:ph type="body" idx="24"/>
-          </p:nvPr>
-        </p:nvSpPr>
-        <p:spPr/>
-        <p:txBody>
-          <a:bodyPr/>
-          <a:lstStyle/>
-          <a:p>
-            <a:pPr/>
-            <a:r>
-              <a:rPr lang="th-TH" dirty="0"/>
-              <a:t>อ่านข้อมูล</a:t>
-            </a:r>
-          </a:p>
-        </p:txBody>
-      </p:sp>
-      <p:sp>
-        <p:nvSpPr>
-          <p:cNvPr id="9" name="B1"/>
-          <p:cNvSpPr>
-            <a:spLocks noGrp="1"/>
-          </p:cNvSpPr>
-          <p:nvPr>
-            <p:ph type="body" idx="25"/>
-          </p:nvPr>
-        </p:nvSpPr>
-        <p:spPr/>
-        <p:txBody>
-          <a:bodyPr/>
-          <a:lstStyle/>
-          <a:p>
-            <a:pPr/>
-            <a:r>
-              <a:rPr lang="th-TH" dirty="0"/>
-              <a:t>ดึงฟิลด์สำคัญ ตรวจกับต้นทาง</a:t>
-            </a:r>
-          </a:p>
-        </p:txBody>
-      </p:sp>
-      <p:sp>
-        <p:nvSpPr>
-          <p:cNvPr id="10" name="C2"/>
-          <p:cNvSpPr>
-            <a:spLocks noGrp="1"/>
-          </p:cNvSpPr>
-          <p:nvPr>
-            <p:ph type="body" idx="26"/>
-          </p:nvPr>
-        </p:nvSpPr>
-        <p:spPr/>
-        <p:txBody>
-          <a:bodyPr/>
-          <a:lstStyle/>
-          <a:p>
-            <a:pPr/>
-            <a:r>
-              <a:rPr lang="th-TH" dirty="0"/>
-              <a:t>3</a:t>
-            </a:r>
-          </a:p>
-        </p:txBody>
-      </p:sp>
-      <p:sp>
-        <p:nvSpPr>
-          <p:cNvPr id="11" name="H2"/>
-          <p:cNvSpPr>
-            <a:spLocks noGrp="1"/>
-          </p:cNvSpPr>
-          <p:nvPr>
-            <p:ph type="body" idx="27"/>
-          </p:nvPr>
-        </p:nvSpPr>
-        <p:spPr/>
-        <p:txBody>
-          <a:bodyPr/>
-          <a:lstStyle/>
-          <a:p>
-            <a:pPr/>
-            <a:r>
-              <a:rPr lang="th-TH" dirty="0"/>
-              <a:t>ตรวจสอบ</a:t>
-            </a:r>
-          </a:p>
-        </p:txBody>
-      </p:sp>
-      <p:sp>
-        <p:nvSpPr>
-          <p:cNvPr id="12" name="B2"/>
-          <p:cNvSpPr>
-            <a:spLocks noGrp="1"/>
-          </p:cNvSpPr>
-          <p:nvPr>
-            <p:ph type="body" idx="28"/>
-          </p:nvPr>
-        </p:nvSpPr>
-        <p:spPr/>
-        <p:txBody>
-          <a:bodyPr/>
-          <a:lstStyle/>
-          <a:p>
-            <a:pPr/>
-            <a:r>
-              <a:rPr lang="th-TH" dirty="0"/>
-              <a:t>กฎธุรกิจและวงเงินอนุมัติ</a:t>
-            </a:r>
-          </a:p>
-        </p:txBody>
-      </p:sp>
-      <p:sp>
-        <p:nvSpPr>
-          <p:cNvPr id="13" name="C3"/>
-          <p:cNvSpPr>
-            <a:spLocks noGrp="1"/>
-          </p:cNvSpPr>
-          <p:nvPr>
-            <p:ph type="body" idx="29"/>
-          </p:nvPr>
-        </p:nvSpPr>
-        <p:spPr/>
-        <p:txBody>
-          <a:bodyPr/>
-          <a:lstStyle/>
-          <a:p>
-            <a:pPr/>
-            <a:r>
-              <a:rPr lang="th-TH" dirty="0"/>
-              <a:t>4</a:t>
-            </a:r>
-          </a:p>
-        </p:txBody>
-      </p:sp>
-      <p:sp>
-        <p:nvSpPr>
-          <p:cNvPr id="14" name="H3"/>
-          <p:cNvSpPr>
-            <a:spLocks noGrp="1"/>
-          </p:cNvSpPr>
-          <p:nvPr>
-            <p:ph type="body" idx="30"/>
-          </p:nvPr>
-        </p:nvSpPr>
-        <p:spPr/>
-        <p:txBody>
-          <a:bodyPr/>
-          <a:lstStyle/>
-          <a:p>
-            <a:pPr/>
-            <a:r>
-              <a:rPr lang="th-TH" dirty="0"/>
-              <a:t>บันทึก</a:t>
-            </a:r>
-          </a:p>
-        </p:txBody>
-      </p:sp>
-      <p:sp>
-        <p:nvSpPr>
-          <p:cNvPr id="15" name="B3"/>
-          <p:cNvSpPr>
-            <a:spLocks noGrp="1"/>
-          </p:cNvSpPr>
-          <p:nvPr>
-            <p:ph type="body" idx="31"/>
-          </p:nvPr>
-        </p:nvSpPr>
-        <p:spPr/>
-        <p:txBody>
-          <a:bodyPr/>
-          <a:lstStyle/>
-          <a:p>
-            <a:pPr/>
-            <a:r>
-              <a:rPr lang="th-TH" dirty="0"/>
-              <a:t>ลงระบบบัญชีพร้อม audit trail</a:t>
-            </a:r>
-          </a:p>
-        </p:txBody>
-      </p:sp>
-      <p:sp>
-        <p:nvSpPr>
-          <p:cNvPr id="16" name="C4"/>
-          <p:cNvSpPr>
-            <a:spLocks noGrp="1"/>
-          </p:cNvSpPr>
-          <p:nvPr>
-            <p:ph type="body" idx="32"/>
-          </p:nvPr>
-        </p:nvSpPr>
-        <p:spPr/>
-        <p:txBody>
-          <a:bodyPr/>
-          <a:lstStyle/>
-          <a:p>
-            <a:pPr/>
-            <a:r>
-              <a:rPr lang="th-TH" dirty="0"/>
-              <a:t>5</a:t>
-            </a:r>
-          </a:p>
-        </p:txBody>
-      </p:sp>
-      <p:sp>
-        <p:nvSpPr>
-          <p:cNvPr id="17" name="H4"/>
-          <p:cNvSpPr>
-            <a:spLocks noGrp="1"/>
-          </p:cNvSpPr>
-          <p:nvPr>
-            <p:ph type="body" idx="33"/>
-          </p:nvPr>
-        </p:nvSpPr>
-        <p:spPr/>
-        <p:txBody>
-          <a:bodyPr/>
-          <a:lstStyle/>
-          <a:p>
-            <a:pPr/>
-            <a:r>
-              <a:rPr lang="th-TH" dirty="0"/>
-              <a:t>กระทบยอด</a:t>
-            </a:r>
-          </a:p>
-        </p:txBody>
-      </p:sp>
-      <p:sp>
-        <p:nvSpPr>
-          <p:cNvPr id="18" name="B4"/>
-          <p:cNvSpPr>
-            <a:spLocks noGrp="1"/>
-          </p:cNvSpPr>
-          <p:nvPr>
-            <p:ph type="body" idx="34"/>
-          </p:nvPr>
-        </p:nvSpPr>
-        <p:spPr/>
-        <p:txBody>
-          <a:bodyPr/>
-          <a:lstStyle/>
-          <a:p>
-            <a:pPr/>
-            <a:r>
-              <a:rPr lang="th-TH" dirty="0"/>
-              <a:t>จับคู่อัตโนมัติ ส่งรายงาน</a:t>
-            </a:r>
-          </a:p>
-        </p:txBody>
-      </p:sp>
-      <p:sp>
-        <p:nvSpPr>
-          <p:cNvPr id="19" name="RL"/>
-          <p:cNvSpPr>
-            <a:spLocks noGrp="1"/>
-          </p:cNvSpPr>
-          <p:nvPr>
-            <p:ph type="body" idx="35"/>
-          </p:nvPr>
-        </p:nvSpPr>
-        <p:spPr/>
-        <p:txBody>
-          <a:bodyPr/>
-          <a:lstStyle/>
-          <a:p>
-            <a:pPr/>
-            <a:r>
-              <a:rPr lang="th-TH" dirty="0"/>
-              <a:t>ผลลัพธ์</a:t>
-            </a:r>
-          </a:p>
-        </p:txBody>
-      </p:sp>
-      <p:sp>
-        <p:nvSpPr>
-          <p:cNvPr id="20" name="RC"/>
-          <p:cNvSpPr>
-            <a:spLocks noGrp="1"/>
-          </p:cNvSpPr>
-          <p:nvPr>
-            <p:ph type="body" idx="36"/>
-          </p:nvPr>
-        </p:nvSpPr>
-        <p:spPr/>
-        <p:txBody>
-          <a:bodyPr/>
-          <a:lstStyle/>
-          <a:p>
-            <a:pPr/>
-            <a:r>
-              <a:rPr lang="th-TH" dirty="0"/>
-              <a:t>เอกสารหนึ่งใบผ่านครบห้าขั้นโดยไม่มีการคีย์ซ้ำเลย</a:t>
+              <a:t>กระบวนการ สถาปัตยกรรม และขอบเขตที่ตกลงกัน</a:t>
             </a:r>
           </a:p>
         </p:txBody>

--- a/NCT-Slide-Template-Demo.pptx
+++ b/NCT-Slide-Template-Demo.pptx
@@ -22154,7 +22154,7 @@
             <a:pPr/>
             <a:r>
               <a:rPr lang="th-TH" dirty="0"/>
-              <a:t>ข้อเสนอโครงการวางระบบบัญชีอัตโนมัติ</a:t>
+              <a:t>เปลี่ยนงานบัญชีให้ระบบทำแทน</a:t>
             </a:r>
           </a:p>
         </p:txBody>
@@ -22177,7 +22177,7 @@
             <a:pPr/>
             <a:r>
               <a:rPr lang="th-TH" dirty="0"/>
-              <a:t>New Computer Technology Consulting Co., Ltd. · 2569</a:t>
+              <a:t>NCT · สัมมนาลูกค้า 2569</a:t>
             </a:r>
           </a:p>
         </p:txBody>

--- a/NCT-Slide-Template-Demo.pptx
+++ b/NCT-Slide-Template-Demo.pptx
@@ -419,66 +419,54 @@
           <a:chExt cx="0" cy="0"/>
         </a:xfrm>
       </p:grpSpPr>
-      <p:pic>
-        <p:nvPicPr>
-          <p:cNvPr id="10" name="Watermark A"/>
-          <p:cNvPicPr>
-            <a:picLocks noChangeAspect="1"/>
-          </p:cNvPicPr>
-          <p:nvPr/>
-        </p:nvPicPr>
-        <p:blipFill>
-          <a:blip r:embed="rId3">
-            <a:alphaModFix amt="3500"/>
-          </a:blip>
-          <a:stretch>
-            <a:fillRect/>
-          </a:stretch>
-        </p:blipFill>
-        <p:spPr>
-          <a:xfrm>
-            <a:off x="1371600" y="-2103120"/>
-            <a:ext cx="7315200" cy="4653280"/>
-          </a:xfrm>
-          <a:prstGeom prst="rect">
-            <a:avLst/>
-          </a:prstGeom>
-        </p:spPr>
-      </p:pic>
-      <p:pic>
-        <p:nvPicPr>
-          <p:cNvPr id="11" name="Watermark B"/>
-          <p:cNvPicPr>
-            <a:picLocks noChangeAspect="1"/>
-          </p:cNvPicPr>
-          <p:nvPr/>
-        </p:nvPicPr>
-        <p:blipFill>
-          <a:blip r:embed="rId3">
-            <a:alphaModFix amt="3500"/>
-          </a:blip>
-          <a:stretch>
-            <a:fillRect/>
-          </a:stretch>
-        </p:blipFill>
-        <p:spPr>
-          <a:xfrm>
-            <a:off x="4114800" y="2286000"/>
-            <a:ext cx="7315200" cy="4653280"/>
-          </a:xfrm>
-          <a:prstGeom prst="rect">
-            <a:avLst/>
-          </a:prstGeom>
-        </p:spPr>
-      </p:pic>
-      <p:sp>
-        <p:nvSpPr>
-          <p:cNvPr id="12" name="Scatter 1"/>
+      <p:sp>
+        <p:nvSpPr>
+          <p:cNvPr id="10" name="Cover Panel"/>
           <p:cNvSpPr/>
           <p:nvPr/>
         </p:nvSpPr>
         <p:spPr>
           <a:xfrm>
+            <a:off x="7315200" y="0"/>
+            <a:ext cx="4876800" cy="6858000"/>
+          </a:xfrm>
+          <a:prstGeom prst="rect">
+            <a:avLst/>
+          </a:prstGeom>
+          <a:gradFill rotWithShape="1">
+            <a:gsLst>
+              <a:gs pos="0">
+                <a:srgbClr val="23436D"/>
+              </a:gs>
+              <a:gs pos="55000">
+                <a:srgbClr val="1E5473"/>
+              </a:gs>
+              <a:gs pos="100000">
+                <a:srgbClr val="1A8D92"/>
+              </a:gs>
+            </a:gsLst>
+            <a:lin ang="2700000" scaled="0"/>
+          </a:gradFill>
+          <a:ln>
+            <a:noFill/>
+          </a:ln>
+        </p:spPr>
+        <p:txBody>
+          <a:bodyPr/>
+          <a:lstStyle/>
+          <a:p>
+            <a:endParaRPr lang="th-TH"/>
+          </a:p>
+        </p:txBody>
+      </p:sp>
+      <p:sp>
+        <p:nvSpPr>
+          <p:cNvPr id="11" name="Scatter 1"/>
+          <p:cNvSpPr/>
+          <p:nvPr/>
+        </p:nvSpPr>
+        <p:spPr>
+          <a:xfrm>
             <a:off x="10290552" y="298450"/>
             <a:ext cx="491103" cy="431800"/>
           </a:xfrm>
@@ -486,7 +474,7 @@
             <a:avLst/>
           </a:prstGeom>
           <a:solidFill>
-            <a:srgbClr val="216B7F">
+            <a:srgbClr val="FFFFFF">
               <a:alpha val="10000"/>
             </a:srgbClr>
           </a:solidFill>
@@ -504,7 +492,7 @@
       </p:sp>
       <p:sp>
         <p:nvSpPr>
-          <p:cNvPr id="13" name="Scatter 2"/>
+          <p:cNvPr id="12" name="Scatter 2"/>
           <p:cNvSpPr/>
           <p:nvPr/>
         </p:nvSpPr>
@@ -517,7 +505,7 @@
             <a:avLst/>
           </a:prstGeom>
           <a:solidFill>
-            <a:srgbClr val="216B7F">
+            <a:srgbClr val="FFFFFF">
               <a:alpha val="33000"/>
             </a:srgbClr>
           </a:solidFill>
@@ -535,7 +523,7 @@
       </p:sp>
       <p:sp>
         <p:nvSpPr>
-          <p:cNvPr id="14" name="Scatter 3"/>
+          <p:cNvPr id="13" name="Scatter 3"/>
           <p:cNvSpPr/>
           <p:nvPr/>
         </p:nvSpPr>
@@ -548,7 +536,7 @@
             <a:avLst/>
           </a:prstGeom>
           <a:solidFill>
-            <a:srgbClr val="216B7F">
+            <a:srgbClr val="FFFFFF">
               <a:alpha val="75000"/>
             </a:srgbClr>
           </a:solidFill>
@@ -566,7 +554,7 @@
       </p:sp>
       <p:sp>
         <p:nvSpPr>
-          <p:cNvPr id="15" name="Scatter 4"/>
+          <p:cNvPr id="14" name="Scatter 4"/>
           <p:cNvSpPr/>
           <p:nvPr/>
         </p:nvSpPr>
@@ -579,7 +567,7 @@
             <a:avLst/>
           </a:prstGeom>
           <a:solidFill>
-            <a:srgbClr val="216B7F">
+            <a:srgbClr val="FFFFFF">
               <a:alpha val="15000"/>
             </a:srgbClr>
           </a:solidFill>
@@ -597,7 +585,7 @@
       </p:sp>
       <p:sp>
         <p:nvSpPr>
-          <p:cNvPr id="16" name="Scatter 5"/>
+          <p:cNvPr id="15" name="Scatter 5"/>
           <p:cNvSpPr/>
           <p:nvPr/>
         </p:nvSpPr>
@@ -610,7 +598,7 @@
             <a:avLst/>
           </a:prstGeom>
           <a:solidFill>
-            <a:srgbClr val="216B7F">
+            <a:srgbClr val="FFFFFF">
               <a:alpha val="5000"/>
             </a:srgbClr>
           </a:solidFill>
@@ -628,7 +616,7 @@
       </p:sp>
       <p:sp>
         <p:nvSpPr>
-          <p:cNvPr id="17" name="Scatter 6"/>
+          <p:cNvPr id="16" name="Scatter 6"/>
           <p:cNvSpPr/>
           <p:nvPr/>
         </p:nvSpPr>
@@ -641,7 +629,7 @@
             <a:avLst/>
           </a:prstGeom>
           <a:solidFill>
-            <a:srgbClr val="216B7F">
+            <a:srgbClr val="FFFFFF">
               <a:alpha val="5000"/>
             </a:srgbClr>
           </a:solidFill>
@@ -659,7 +647,7 @@
       </p:sp>
       <p:sp>
         <p:nvSpPr>
-          <p:cNvPr id="18" name="Scatter 7"/>
+          <p:cNvPr id="17" name="Scatter 7"/>
           <p:cNvSpPr/>
           <p:nvPr/>
         </p:nvSpPr>
@@ -672,7 +660,7 @@
             <a:avLst/>
           </a:prstGeom>
           <a:solidFill>
-            <a:srgbClr val="216B7F">
+            <a:srgbClr val="FFFFFF">
               <a:alpha val="60000"/>
             </a:srgbClr>
           </a:solidFill>
@@ -690,7 +678,7 @@
       </p:sp>
       <p:sp>
         <p:nvSpPr>
-          <p:cNvPr id="19" name="Scatter 8"/>
+          <p:cNvPr id="18" name="Scatter 8"/>
           <p:cNvSpPr/>
           <p:nvPr/>
         </p:nvSpPr>
@@ -703,7 +691,7 @@
             <a:avLst/>
           </a:prstGeom>
           <a:solidFill>
-            <a:srgbClr val="216B7F">
+            <a:srgbClr val="FFFFFF">
               <a:alpha val="50000"/>
             </a:srgbClr>
           </a:solidFill>
@@ -721,7 +709,7 @@
       </p:sp>
       <p:sp>
         <p:nvSpPr>
-          <p:cNvPr id="20" name="Scatter 9"/>
+          <p:cNvPr id="19" name="Scatter 9"/>
           <p:cNvSpPr/>
           <p:nvPr/>
         </p:nvSpPr>
@@ -734,7 +722,7 @@
             <a:avLst/>
           </a:prstGeom>
           <a:solidFill>
-            <a:srgbClr val="216B7F">
+            <a:srgbClr val="FFFFFF">
               <a:alpha val="60000"/>
             </a:srgbClr>
           </a:solidFill>
@@ -752,7 +740,7 @@
       </p:sp>
       <p:sp>
         <p:nvSpPr>
-          <p:cNvPr id="21" name="Scatter 10"/>
+          <p:cNvPr id="20" name="Scatter 10"/>
           <p:cNvSpPr/>
           <p:nvPr/>
         </p:nvSpPr>
@@ -765,7 +753,7 @@
             <a:avLst/>
           </a:prstGeom>
           <a:solidFill>
-            <a:srgbClr val="216B7F">
+            <a:srgbClr val="FFFFFF">
               <a:alpha val="5000"/>
             </a:srgbClr>
           </a:solidFill>
@@ -783,7 +771,7 @@
       </p:sp>
       <p:sp>
         <p:nvSpPr>
-          <p:cNvPr id="22" name="Scatter 11"/>
+          <p:cNvPr id="21" name="Scatter 11"/>
           <p:cNvSpPr/>
           <p:nvPr/>
         </p:nvSpPr>
@@ -796,7 +784,7 @@
             <a:avLst/>
           </a:prstGeom>
           <a:solidFill>
-            <a:srgbClr val="216B7F">
+            <a:srgbClr val="FFFFFF">
               <a:alpha val="5000"/>
             </a:srgbClr>
           </a:solidFill>
@@ -814,7 +802,7 @@
       </p:sp>
       <p:sp>
         <p:nvSpPr>
-          <p:cNvPr id="23" name="Scatter 12"/>
+          <p:cNvPr id="22" name="Scatter 12"/>
           <p:cNvSpPr/>
           <p:nvPr/>
         </p:nvSpPr>
@@ -827,7 +815,7 @@
             <a:avLst/>
           </a:prstGeom>
           <a:solidFill>
-            <a:srgbClr val="216B7F">
+            <a:srgbClr val="FFFFFF">
               <a:alpha val="20000"/>
             </a:srgbClr>
           </a:solidFill>
@@ -845,7 +833,7 @@
       </p:sp>
       <p:sp>
         <p:nvSpPr>
-          <p:cNvPr id="24" name="Scatter 13"/>
+          <p:cNvPr id="23" name="Scatter 13"/>
           <p:cNvSpPr/>
           <p:nvPr/>
         </p:nvSpPr>
@@ -858,7 +846,7 @@
             <a:avLst/>
           </a:prstGeom>
           <a:solidFill>
-            <a:srgbClr val="216B7F">
+            <a:srgbClr val="FFFFFF">
               <a:alpha val="10000"/>
             </a:srgbClr>
           </a:solidFill>
@@ -876,7 +864,7 @@
       </p:sp>
       <p:sp>
         <p:nvSpPr>
-          <p:cNvPr id="25" name="Scatter 14"/>
+          <p:cNvPr id="24" name="Scatter 14"/>
           <p:cNvSpPr/>
           <p:nvPr/>
         </p:nvSpPr>
@@ -889,7 +877,7 @@
             <a:avLst/>
           </a:prstGeom>
           <a:solidFill>
-            <a:srgbClr val="216B7F">
+            <a:srgbClr val="FFFFFF">
               <a:alpha val="50000"/>
             </a:srgbClr>
           </a:solidFill>
@@ -907,7 +895,7 @@
       </p:sp>
       <p:sp>
         <p:nvSpPr>
-          <p:cNvPr id="26" name="Scatter 15"/>
+          <p:cNvPr id="25" name="Scatter 15"/>
           <p:cNvSpPr/>
           <p:nvPr/>
         </p:nvSpPr>
@@ -920,7 +908,7 @@
             <a:avLst/>
           </a:prstGeom>
           <a:solidFill>
-            <a:srgbClr val="216B7F">
+            <a:srgbClr val="FFFFFF">
               <a:alpha val="5000"/>
             </a:srgbClr>
           </a:solidFill>
@@ -938,7 +926,7 @@
       </p:sp>
       <p:sp>
         <p:nvSpPr>
-          <p:cNvPr id="27" name="Scatter 16"/>
+          <p:cNvPr id="26" name="Scatter 16"/>
           <p:cNvSpPr/>
           <p:nvPr/>
         </p:nvSpPr>
@@ -951,7 +939,7 @@
             <a:avLst/>
           </a:prstGeom>
           <a:solidFill>
-            <a:srgbClr val="216B7F">
+            <a:srgbClr val="FFFFFF">
               <a:alpha val="20000"/>
             </a:srgbClr>
           </a:solidFill>
@@ -969,7 +957,7 @@
       </p:sp>
       <p:sp>
         <p:nvSpPr>
-          <p:cNvPr id="28" name="Scatter 17"/>
+          <p:cNvPr id="27" name="Scatter 17"/>
           <p:cNvSpPr/>
           <p:nvPr/>
         </p:nvSpPr>
@@ -982,7 +970,7 @@
             <a:avLst/>
           </a:prstGeom>
           <a:solidFill>
-            <a:srgbClr val="216B7F">
+            <a:srgbClr val="FFFFFF">
               <a:alpha val="50000"/>
             </a:srgbClr>
           </a:solidFill>
@@ -1000,7 +988,7 @@
       </p:sp>
       <p:sp>
         <p:nvSpPr>
-          <p:cNvPr id="29" name="Scatter 18"/>
+          <p:cNvPr id="28" name="Scatter 18"/>
           <p:cNvSpPr/>
           <p:nvPr/>
         </p:nvSpPr>
@@ -1013,7 +1001,7 @@
             <a:avLst/>
           </a:prstGeom>
           <a:solidFill>
-            <a:srgbClr val="216B7F">
+            <a:srgbClr val="FFFFFF">
               <a:alpha val="5000"/>
             </a:srgbClr>
           </a:solidFill>
@@ -1031,7 +1019,7 @@
       </p:sp>
       <p:sp>
         <p:nvSpPr>
-          <p:cNvPr id="30" name="Scatter 19"/>
+          <p:cNvPr id="29" name="Scatter 19"/>
           <p:cNvSpPr/>
           <p:nvPr/>
         </p:nvSpPr>
@@ -1044,7 +1032,7 @@
             <a:avLst/>
           </a:prstGeom>
           <a:solidFill>
-            <a:srgbClr val="216B7F">
+            <a:srgbClr val="FFFFFF">
               <a:alpha val="40000"/>
             </a:srgbClr>
           </a:solidFill>
@@ -1062,7 +1050,7 @@
       </p:sp>
       <p:sp>
         <p:nvSpPr>
-          <p:cNvPr id="31" name="Scatter 20"/>
+          <p:cNvPr id="30" name="Scatter 20"/>
           <p:cNvSpPr/>
           <p:nvPr/>
         </p:nvSpPr>
@@ -1075,7 +1063,7 @@
             <a:avLst/>
           </a:prstGeom>
           <a:solidFill>
-            <a:srgbClr val="216B7F">
+            <a:srgbClr val="FFFFFF">
               <a:alpha val="5000"/>
             </a:srgbClr>
           </a:solidFill>
@@ -1093,7 +1081,7 @@
       </p:sp>
       <p:sp>
         <p:nvSpPr>
-          <p:cNvPr id="32" name="Scatter 21"/>
+          <p:cNvPr id="31" name="Scatter 21"/>
           <p:cNvSpPr/>
           <p:nvPr/>
         </p:nvSpPr>
@@ -1106,7 +1094,7 @@
             <a:avLst/>
           </a:prstGeom>
           <a:solidFill>
-            <a:srgbClr val="216B7F">
+            <a:srgbClr val="FFFFFF">
               <a:alpha val="5000"/>
             </a:srgbClr>
           </a:solidFill>
@@ -1124,7 +1112,7 @@
       </p:sp>
       <p:sp>
         <p:nvSpPr>
-          <p:cNvPr id="33" name="Scatter 22"/>
+          <p:cNvPr id="32" name="Scatter 22"/>
           <p:cNvSpPr/>
           <p:nvPr/>
         </p:nvSpPr>
@@ -1137,7 +1125,7 @@
             <a:avLst/>
           </a:prstGeom>
           <a:solidFill>
-            <a:srgbClr val="216B7F">
+            <a:srgbClr val="FFFFFF">
               <a:alpha val="10000"/>
             </a:srgbClr>
           </a:solidFill>
@@ -1155,7 +1143,7 @@
       </p:sp>
       <p:sp>
         <p:nvSpPr>
-          <p:cNvPr id="34" name="Scatter 23"/>
+          <p:cNvPr id="33" name="Scatter 23"/>
           <p:cNvSpPr/>
           <p:nvPr/>
         </p:nvSpPr>
@@ -1168,7 +1156,7 @@
             <a:avLst/>
           </a:prstGeom>
           <a:solidFill>
-            <a:srgbClr val="216B7F">
+            <a:srgbClr val="FFFFFF">
               <a:alpha val="50000"/>
             </a:srgbClr>
           </a:solidFill>
@@ -1186,7 +1174,7 @@
       </p:sp>
       <p:sp>
         <p:nvSpPr>
-          <p:cNvPr id="35" name="Scatter 24"/>
+          <p:cNvPr id="34" name="Scatter 24"/>
           <p:cNvSpPr/>
           <p:nvPr/>
         </p:nvSpPr>
@@ -1199,7 +1187,7 @@
             <a:avLst/>
           </a:prstGeom>
           <a:solidFill>
-            <a:srgbClr val="216B7F">
+            <a:srgbClr val="FFFFFF">
               <a:alpha val="40000"/>
             </a:srgbClr>
           </a:solidFill>
@@ -1217,7 +1205,7 @@
       </p:sp>
       <p:sp>
         <p:nvSpPr>
-          <p:cNvPr id="36" name="Scatter 25"/>
+          <p:cNvPr id="35" name="Scatter 25"/>
           <p:cNvSpPr/>
           <p:nvPr/>
         </p:nvSpPr>
@@ -1230,7 +1218,7 @@
             <a:avLst/>
           </a:prstGeom>
           <a:solidFill>
-            <a:srgbClr val="216B7F">
+            <a:srgbClr val="FFFFFF">
               <a:alpha val="20000"/>
             </a:srgbClr>
           </a:solidFill>
@@ -1248,7 +1236,7 @@
       </p:sp>
       <p:sp>
         <p:nvSpPr>
-          <p:cNvPr id="37" name="Scatter 26"/>
+          <p:cNvPr id="36" name="Scatter 26"/>
           <p:cNvSpPr/>
           <p:nvPr/>
         </p:nvSpPr>
@@ -1261,7 +1249,7 @@
             <a:avLst/>
           </a:prstGeom>
           <a:solidFill>
-            <a:srgbClr val="216B7F">
+            <a:srgbClr val="FFFFFF">
               <a:alpha val="60000"/>
             </a:srgbClr>
           </a:solidFill>
@@ -1279,7 +1267,7 @@
       </p:sp>
       <p:sp>
         <p:nvSpPr>
-          <p:cNvPr id="38" name="Scatter 27"/>
+          <p:cNvPr id="37" name="Scatter 27"/>
           <p:cNvSpPr/>
           <p:nvPr/>
         </p:nvSpPr>
@@ -1292,7 +1280,7 @@
             <a:avLst/>
           </a:prstGeom>
           <a:solidFill>
-            <a:srgbClr val="216B7F">
+            <a:srgbClr val="FFFFFF">
               <a:alpha val="20000"/>
             </a:srgbClr>
           </a:solidFill>
@@ -1310,7 +1298,7 @@
       </p:sp>
       <p:sp>
         <p:nvSpPr>
-          <p:cNvPr id="39" name="Scatter 28"/>
+          <p:cNvPr id="38" name="Scatter 28"/>
           <p:cNvSpPr/>
           <p:nvPr/>
         </p:nvSpPr>
@@ -1323,7 +1311,7 @@
             <a:avLst/>
           </a:prstGeom>
           <a:solidFill>
-            <a:srgbClr val="216B7F">
+            <a:srgbClr val="FFFFFF">
               <a:alpha val="75000"/>
             </a:srgbClr>
           </a:solidFill>
@@ -1341,7 +1329,7 @@
       </p:sp>
       <p:pic>
         <p:nvPicPr>
-          <p:cNvPr id="40" name="NCT Logo"/>
+          <p:cNvPr id="39" name="NCT Logo"/>
           <p:cNvPicPr>
             <a:picLocks noChangeAspect="1"/>
           </p:cNvPicPr>
@@ -1355,14 +1343,72 @@
         </p:blipFill>
         <p:spPr>
           <a:xfrm>
-            <a:off x="4095750" y="685800"/>
-            <a:ext cx="4000500" cy="2035725"/>
+            <a:off x="914400" y="731520"/>
+            <a:ext cx="2286000" cy="1163271"/>
           </a:xfrm>
           <a:prstGeom prst="rect">
             <a:avLst/>
           </a:prstGeom>
         </p:spPr>
       </p:pic>
+      <p:sp>
+        <p:nvSpPr>
+          <p:cNvPr id="40" name="Title Placeholder"/>
+          <p:cNvSpPr>
+            <a:spLocks noGrp="1"/>
+          </p:cNvSpPr>
+          <p:nvPr>
+            <p:ph type="ctrTitle"/>
+          </p:nvPr>
+        </p:nvSpPr>
+        <p:spPr>
+          <a:xfrm>
+            <a:off x="914400" y="2377440"/>
+            <a:ext cx="6035040" cy="2011680"/>
+          </a:xfrm>
+          <a:prstGeom prst="rect">
+            <a:avLst/>
+          </a:prstGeom>
+        </p:spPr>
+        <p:txBody>
+          <a:bodyPr wrap="square" anchor="b" lIns="0" tIns="0" rIns="0" bIns="0" rtlCol="0"/>
+          <a:lstStyle>
+            <a:lvl1pPr algn="l" marL="0" indent="0">
+              <a:lnSpc>
+                <a:spcPct val="106000"/>
+              </a:lnSpc>
+              <a:buNone/>
+              <a:defRPr lang="th-TH" sz="4400" b="1" dirty="0">
+                <a:solidFill>
+                  <a:srgbClr val="23436D"/>
+                </a:solidFill>
+                <a:latin typeface="+mj-lt"/>
+                <a:ea typeface="+mj-ea"/>
+                <a:cs typeface="+mj-cs"/>
+              </a:defRPr>
+            </a:lvl1pPr>
+          </a:lstStyle>
+          <a:p>
+            <a:pPr algn="l" marL="0" indent="0">
+              <a:lnSpc>
+                <a:spcPct val="106000"/>
+              </a:lnSpc>
+              <a:buNone/>
+            </a:pPr>
+            <a:r>
+              <a:rPr lang="th-TH" sz="4400" b="1" dirty="0">
+                <a:solidFill>
+                  <a:srgbClr val="23436D"/>
+                </a:solidFill>
+                <a:latin typeface="+mj-lt"/>
+                <a:ea typeface="+mj-ea"/>
+                <a:cs typeface="+mj-cs"/>
+              </a:rPr>
+              <a:t>ชื่อเรื่องงานนำเสนอ</a:t>
+            </a:r>
+          </a:p>
+        </p:txBody>
+      </p:sp>
       <p:sp>
         <p:nvSpPr>
           <p:cNvPr id="41" name="Accent Rule"/>
@@ -1371,8 +1417,8 @@
         </p:nvSpPr>
         <p:spPr>
           <a:xfrm>
-            <a:off x="2941320" y="3429000"/>
-            <a:ext cx="6309360" cy="28575"/>
+            <a:off x="914400" y="4572000"/>
+            <a:ext cx="548640" cy="45720"/>
           </a:xfrm>
           <a:prstGeom prst="rect">
             <a:avLst/>
@@ -1394,90 +1440,90 @@
       </p:sp>
       <p:sp>
         <p:nvSpPr>
-          <p:cNvPr id="42" name="Title Placeholder"/>
-          <p:cNvSpPr>
-            <a:spLocks noGrp="1"/>
-          </p:cNvSpPr>
-          <p:nvPr>
-            <p:ph type="ctrTitle"/>
-          </p:nvPr>
-        </p:nvSpPr>
-        <p:spPr>
-          <a:xfrm>
-            <a:off x="914400" y="3715200"/>
-            <a:ext cx="10363200" cy="2057400"/>
-          </a:xfrm>
-          <a:prstGeom prst="rect">
-            <a:avLst/>
-          </a:prstGeom>
-        </p:spPr>
-        <p:txBody>
-          <a:bodyPr wrap="square" anchor="ctr" lIns="0" tIns="0" rIns="0" bIns="0" rtlCol="0"/>
+          <p:cNvPr id="42" name="Subtitle"/>
+          <p:cNvSpPr>
+            <a:spLocks noGrp="1"/>
+          </p:cNvSpPr>
+          <p:nvPr>
+            <p:ph type="subTitle" idx="1"/>
+          </p:nvPr>
+        </p:nvSpPr>
+        <p:spPr>
+          <a:xfrm>
+            <a:off x="914400" y="4754880"/>
+            <a:ext cx="6035040" cy="731520"/>
+          </a:xfrm>
+          <a:prstGeom prst="rect">
+            <a:avLst/>
+          </a:prstGeom>
+        </p:spPr>
+        <p:txBody>
+          <a:bodyPr wrap="square" anchor="t" lIns="0" tIns="0" rIns="0" bIns="0" rtlCol="0"/>
           <a:lstStyle>
-            <a:lvl1pPr algn="ctr" marL="0" indent="0">
-              <a:lnSpc>
-                <a:spcPct val="115000"/>
-              </a:lnSpc>
-              <a:buNone/>
-              <a:defRPr lang="th-TH" sz="4400" b="1" dirty="0">
-                <a:solidFill>
-                  <a:srgbClr val="333333"/>
-                </a:solidFill>
-                <a:latin typeface="+mj-lt"/>
-                <a:ea typeface="+mj-ea"/>
-                <a:cs typeface="+mj-cs"/>
+            <a:lvl1pPr algn="l" marL="0" indent="0">
+              <a:lnSpc>
+                <a:spcPct val="130000"/>
+              </a:lnSpc>
+              <a:buNone/>
+              <a:defRPr lang="th-TH" sz="2000" dirty="0">
+                <a:solidFill>
+                  <a:srgbClr val="5F5F5F"/>
+                </a:solidFill>
+                <a:latin typeface="+mn-lt"/>
+                <a:ea typeface="+mn-ea"/>
+                <a:cs typeface="+mn-cs"/>
               </a:defRPr>
             </a:lvl1pPr>
           </a:lstStyle>
           <a:p>
-            <a:pPr algn="ctr" marL="0" indent="0">
-              <a:lnSpc>
-                <a:spcPct val="115000"/>
+            <a:pPr algn="l" marL="0" indent="0">
+              <a:lnSpc>
+                <a:spcPct val="130000"/>
               </a:lnSpc>
               <a:buNone/>
             </a:pPr>
             <a:r>
-              <a:rPr lang="th-TH" sz="4400" b="1" dirty="0">
-                <a:solidFill>
-                  <a:srgbClr val="333333"/>
-                </a:solidFill>
-                <a:latin typeface="+mj-lt"/>
-                <a:ea typeface="+mj-ea"/>
-                <a:cs typeface="+mj-cs"/>
+              <a:rPr lang="th-TH" sz="2000" dirty="0">
+                <a:solidFill>
+                  <a:srgbClr val="5F5F5F"/>
+                </a:solidFill>
+                <a:latin typeface="+mn-lt"/>
+                <a:ea typeface="+mn-ea"/>
+                <a:cs typeface="+mn-cs"/>
               </a:rPr>
-              <a:t>PROPOSAL</a:t>
-            </a:r>
-          </a:p>
-        </p:txBody>
-      </p:sp>
-      <p:sp>
-        <p:nvSpPr>
-          <p:cNvPr id="43" name="Subtitle"/>
-          <p:cNvSpPr>
-            <a:spLocks noGrp="1"/>
-          </p:cNvSpPr>
-          <p:nvPr>
-            <p:ph type="subTitle" idx="1"/>
-          </p:nvPr>
-        </p:nvSpPr>
-        <p:spPr>
-          <a:xfrm>
-            <a:off x="914400" y="5909760"/>
-            <a:ext cx="10363200" cy="457200"/>
-          </a:xfrm>
-          <a:prstGeom prst="rect">
-            <a:avLst/>
-          </a:prstGeom>
-        </p:spPr>
-        <p:txBody>
-          <a:bodyPr wrap="square" anchor="t" lIns="0" tIns="0" rIns="0" bIns="0" rtlCol="0"/>
+              <a:t>คำโปรย / ชื่อลูกค้า</a:t>
+            </a:r>
+          </a:p>
+        </p:txBody>
+      </p:sp>
+      <p:sp>
+        <p:nvSpPr>
+          <p:cNvPr id="43" name="Date Placeholder"/>
+          <p:cNvSpPr>
+            <a:spLocks noGrp="1"/>
+          </p:cNvSpPr>
+          <p:nvPr>
+            <p:ph type="dt" idx="10"/>
+          </p:nvPr>
+        </p:nvSpPr>
+        <p:spPr>
+          <a:xfrm>
+            <a:off x="914400" y="6309360"/>
+            <a:ext cx="6035040" cy="274320"/>
+          </a:xfrm>
+          <a:prstGeom prst="rect">
+            <a:avLst/>
+          </a:prstGeom>
+        </p:spPr>
+        <p:txBody>
+          <a:bodyPr wrap="square" anchor="ctr" lIns="0" tIns="0" rIns="0" bIns="0" rtlCol="0"/>
           <a:lstStyle>
-            <a:lvl1pPr algn="ctr" marL="0" indent="0">
-              <a:lnSpc>
-                <a:spcPct val="130000"/>
-              </a:lnSpc>
-              <a:buNone/>
-              <a:defRPr lang="th-TH" sz="2000" dirty="0">
+            <a:lvl1pPr algn="l" marL="0" indent="0">
+              <a:lnSpc>
+                <a:spcPct val="100000"/>
+              </a:lnSpc>
+              <a:buNone/>
+              <a:defRPr lang="th-TH" sz="1000" dirty="0">
                 <a:solidFill>
                   <a:srgbClr val="5F5F5F"/>
                 </a:solidFill>
@@ -1488,125 +1534,12 @@
             </a:lvl1pPr>
           </a:lstStyle>
           <a:p>
-            <a:pPr algn="ctr" marL="0" indent="0">
-              <a:lnSpc>
-                <a:spcPct val="130000"/>
+            <a:pPr algn="l" marL="0" indent="0">
+              <a:lnSpc>
+                <a:spcPct val="100000"/>
               </a:lnSpc>
               <a:buNone/>
             </a:pPr>
-            <a:r>
-              <a:rPr lang="th-TH" sz="2000" dirty="0">
-                <a:solidFill>
-                  <a:srgbClr val="5F5F5F"/>
-                </a:solidFill>
-                <a:latin typeface="+mn-lt"/>
-                <a:ea typeface="+mn-ea"/>
-                <a:cs typeface="+mn-cs"/>
-              </a:rPr>
-              <a:t>คำโปรย / ชื่อลูกค้า</a:t>
-            </a:r>
-          </a:p>
-        </p:txBody>
-      </p:sp>
-      <p:sp>
-        <p:nvSpPr>
-          <p:cNvPr id="44" name="Date Placeholder"/>
-          <p:cNvSpPr>
-            <a:spLocks noGrp="1"/>
-          </p:cNvSpPr>
-          <p:nvPr>
-            <p:ph type="dt" idx="10"/>
-          </p:nvPr>
-        </p:nvSpPr>
-        <p:spPr>
-          <a:xfrm>
-            <a:off x="228600" y="6400800"/>
-            <a:ext cx="4572000" cy="274320"/>
-          </a:xfrm>
-          <a:prstGeom prst="rect">
-            <a:avLst/>
-          </a:prstGeom>
-        </p:spPr>
-        <p:txBody>
-          <a:bodyPr wrap="square" anchor="ctr" lIns="0" tIns="0" rIns="0" bIns="0" rtlCol="0"/>
-          <a:lstStyle>
-            <a:lvl1pPr algn="l" marL="0" indent="0">
-              <a:lnSpc>
-                <a:spcPct val="100000"/>
-              </a:lnSpc>
-              <a:buNone/>
-              <a:defRPr lang="th-TH" sz="1000" dirty="0">
-                <a:solidFill>
-                  <a:srgbClr val="5F5F5F"/>
-                </a:solidFill>
-                <a:latin typeface="+mn-lt"/>
-                <a:ea typeface="+mn-ea"/>
-                <a:cs typeface="+mn-cs"/>
-              </a:defRPr>
-            </a:lvl1pPr>
-          </a:lstStyle>
-          <a:p>
-            <a:pPr algn="l" marL="0" indent="0">
-              <a:lnSpc>
-                <a:spcPct val="100000"/>
-              </a:lnSpc>
-              <a:buNone/>
-            </a:pPr>
-            <a:endParaRPr lang="th-TH" sz="1000"/>
-          </a:p>
-        </p:txBody>
-      </p:sp>
-      <p:sp>
-        <p:nvSpPr>
-          <p:cNvPr id="45" name="Slide Number Placeholder"/>
-          <p:cNvSpPr>
-            <a:spLocks noGrp="1"/>
-          </p:cNvSpPr>
-          <p:nvPr>
-            <p:ph type="sldNum" sz="quarter" idx="12"/>
-          </p:nvPr>
-        </p:nvSpPr>
-        <p:spPr>
-          <a:xfrm>
-            <a:off x="10591800" y="6400800"/>
-            <a:ext cx="1371600" cy="274320"/>
-          </a:xfrm>
-          <a:prstGeom prst="rect">
-            <a:avLst/>
-          </a:prstGeom>
-        </p:spPr>
-        <p:txBody>
-          <a:bodyPr anchor="ctr"/>
-          <a:lstStyle>
-            <a:lvl1pPr algn="r" marL="0" indent="0">
-              <a:lnSpc>
-                <a:spcPct val="100000"/>
-              </a:lnSpc>
-              <a:buNone/>
-              <a:defRPr lang="th-TH" sz="1000" dirty="0">
-                <a:solidFill>
-                  <a:srgbClr val="5F5F5F"/>
-                </a:solidFill>
-                <a:latin typeface="+mn-lt"/>
-                <a:ea typeface="+mn-ea"/>
-                <a:cs typeface="+mn-cs"/>
-              </a:defRPr>
-            </a:lvl1pPr>
-          </a:lstStyle>
-          <a:p>
-            <a:pPr algn="r" marL="0" indent="0">
-              <a:buNone/>
-            </a:pPr>
-            <a:fld id="{B7E3A1C2-4F5D-4A88-9C1E-6D2F0A93B451}" type="slidenum">
-              <a:rPr lang="th-TH" sz="1000">
-                <a:solidFill>
-                  <a:srgbClr val="5F5F5F"/>
-                </a:solidFill>
-                <a:latin typeface="+mn-lt"/>
-                <a:cs typeface="+mn-cs"/>
-              </a:rPr>
-              <a:t>2</a:t>
-            </a:fld>
             <a:endParaRPr lang="th-TH" sz="1000"/>
           </a:p>
         </p:txBody>
@@ -1624,20 +1557,9 @@
   <p:cSld name="10 Closing / Contact">
     <p:bg>
       <p:bgPr>
-        <a:gradFill rotWithShape="1">
-          <a:gsLst>
-            <a:gs pos="0">
-              <a:srgbClr val="1A8D92"/>
-            </a:gs>
-            <a:gs pos="55000">
-              <a:srgbClr val="1E5473"/>
-            </a:gs>
-            <a:gs pos="100000">
-              <a:srgbClr val="23436D"/>
-            </a:gs>
-          </a:gsLst>
-          <a:lin ang="2700000" scaled="0"/>
-        </a:gradFill>
+        <a:solidFill>
+          <a:srgbClr val="23436D"/>
+        </a:solidFill>
         <a:effectLst/>
       </p:bgPr>
     </p:bg>
@@ -1686,9 +1608,502 @@
           </a:p>
         </p:txBody>
       </p:sp>
+      <p:sp>
+        <p:nvSpPr>
+          <p:cNvPr id="11" name="Title Placeholder"/>
+          <p:cNvSpPr>
+            <a:spLocks noGrp="1"/>
+          </p:cNvSpPr>
+          <p:nvPr>
+            <p:ph type="title"/>
+          </p:nvPr>
+        </p:nvSpPr>
+        <p:spPr>
+          <a:xfrm>
+            <a:off x="914400" y="1737360"/>
+            <a:ext cx="6248400" cy="1005840"/>
+          </a:xfrm>
+          <a:prstGeom prst="rect">
+            <a:avLst/>
+          </a:prstGeom>
+        </p:spPr>
+        <p:txBody>
+          <a:bodyPr wrap="square" anchor="b" lIns="0" tIns="0" rIns="0" bIns="0" rtlCol="0"/>
+          <a:lstStyle>
+            <a:lvl1pPr algn="l" marL="0" indent="0">
+              <a:lnSpc>
+                <a:spcPct val="108000"/>
+              </a:lnSpc>
+              <a:buNone/>
+              <a:defRPr lang="th-TH" sz="4000" b="1" dirty="0">
+                <a:solidFill>
+                  <a:srgbClr val="FFFFFF"/>
+                </a:solidFill>
+                <a:latin typeface="+mj-lt"/>
+                <a:ea typeface="+mj-ea"/>
+                <a:cs typeface="+mj-cs"/>
+              </a:defRPr>
+            </a:lvl1pPr>
+          </a:lstStyle>
+          <a:p>
+            <a:pPr algn="l" marL="0" indent="0">
+              <a:lnSpc>
+                <a:spcPct val="108000"/>
+              </a:lnSpc>
+              <a:buNone/>
+            </a:pPr>
+            <a:r>
+              <a:rPr lang="th-TH" sz="4000" b="1" dirty="0">
+                <a:solidFill>
+                  <a:srgbClr val="FFFFFF"/>
+                </a:solidFill>
+                <a:latin typeface="+mj-lt"/>
+                <a:ea typeface="+mj-ea"/>
+                <a:cs typeface="+mj-cs"/>
+              </a:rPr>
+              <a:t>ขอบคุณครับ</a:t>
+            </a:r>
+          </a:p>
+        </p:txBody>
+      </p:sp>
+      <p:sp>
+        <p:nvSpPr>
+          <p:cNvPr id="12" name="Accent Rule"/>
+          <p:cNvSpPr/>
+          <p:nvPr/>
+        </p:nvSpPr>
+        <p:spPr>
+          <a:xfrm>
+            <a:off x="914400" y="2926080"/>
+            <a:ext cx="548640" cy="45720"/>
+          </a:xfrm>
+          <a:prstGeom prst="rect">
+            <a:avLst/>
+          </a:prstGeom>
+          <a:solidFill>
+            <a:srgbClr val="8FBACE"/>
+          </a:solidFill>
+          <a:ln>
+            <a:noFill/>
+          </a:ln>
+        </p:spPr>
+        <p:txBody>
+          <a:bodyPr/>
+          <a:lstStyle/>
+          <a:p>
+            <a:endParaRPr lang="th-TH"/>
+          </a:p>
+        </p:txBody>
+      </p:sp>
+      <p:sp>
+        <p:nvSpPr>
+          <p:cNvPr id="13" name="Next Steps Label"/>
+          <p:cNvSpPr>
+            <a:spLocks noGrp="1"/>
+          </p:cNvSpPr>
+          <p:nvPr>
+            <p:ph type="body" idx="1"/>
+          </p:nvPr>
+        </p:nvSpPr>
+        <p:spPr>
+          <a:xfrm>
+            <a:off x="914400" y="3291840"/>
+            <a:ext cx="2743200" cy="228600"/>
+          </a:xfrm>
+          <a:prstGeom prst="rect">
+            <a:avLst/>
+          </a:prstGeom>
+        </p:spPr>
+        <p:txBody>
+          <a:bodyPr wrap="square" anchor="ctr" lIns="0" tIns="0" rIns="0" bIns="0" rtlCol="0"/>
+          <a:lstStyle>
+            <a:lvl1pPr algn="l" marL="0" indent="0">
+              <a:lnSpc>
+                <a:spcPct val="100000"/>
+              </a:lnSpc>
+              <a:buNone/>
+              <a:defRPr lang="th-TH" sz="1200" b="1" spc="120" dirty="0">
+                <a:solidFill>
+                  <a:srgbClr val="8FBACE"/>
+                </a:solidFill>
+                <a:latin typeface="+mn-lt"/>
+                <a:ea typeface="+mn-ea"/>
+                <a:cs typeface="+mn-cs"/>
+              </a:defRPr>
+            </a:lvl1pPr>
+          </a:lstStyle>
+          <a:p>
+            <a:pPr algn="l" marL="0" indent="0">
+              <a:lnSpc>
+                <a:spcPct val="100000"/>
+              </a:lnSpc>
+              <a:buNone/>
+            </a:pPr>
+            <a:r>
+              <a:rPr lang="th-TH" sz="1200" b="1" spc="120" dirty="0">
+                <a:solidFill>
+                  <a:srgbClr val="8FBACE"/>
+                </a:solidFill>
+                <a:latin typeface="+mn-lt"/>
+                <a:ea typeface="+mn-ea"/>
+                <a:cs typeface="+mn-cs"/>
+              </a:rPr>
+              <a:t>ขั้นตอนถัดไป</a:t>
+            </a:r>
+          </a:p>
+        </p:txBody>
+      </p:sp>
+      <p:sp>
+        <p:nvSpPr>
+          <p:cNvPr id="14" name="Next Steps"/>
+          <p:cNvSpPr>
+            <a:spLocks noGrp="1"/>
+          </p:cNvSpPr>
+          <p:nvPr>
+            <p:ph type="body" idx="2"/>
+          </p:nvPr>
+        </p:nvSpPr>
+        <p:spPr>
+          <a:xfrm>
+            <a:off x="914400" y="3611880"/>
+            <a:ext cx="6248400" cy="1234440"/>
+          </a:xfrm>
+          <a:prstGeom prst="rect">
+            <a:avLst/>
+          </a:prstGeom>
+        </p:spPr>
+        <p:txBody>
+          <a:bodyPr wrap="square" anchor="t" lIns="0" tIns="0" rIns="0" bIns="0" rtlCol="0"/>
+          <a:lstStyle>
+            <a:lvl1pPr algn="l" marL="320040" indent="-320040">
+              <a:lnSpc>
+                <a:spcPct val="93000"/>
+              </a:lnSpc>
+              <a:spcBef>
+                <a:spcPts val="400"/>
+              </a:spcBef>
+              <a:buClr>
+                <a:srgbClr val="8FBACE"/>
+              </a:buClr>
+              <a:buSzPct val="90000"/>
+              <a:buFont typeface="Arial"/>
+              <a:buAutoNum type="arabicPeriod"/>
+              <a:defRPr lang="th-TH" sz="1600" dirty="0">
+                <a:solidFill>
+                  <a:srgbClr val="FFFFFF">
+                    <a:alpha val="92000"/>
+                  </a:srgbClr>
+                </a:solidFill>
+                <a:latin typeface="+mn-lt"/>
+                <a:ea typeface="+mn-ea"/>
+                <a:cs typeface="+mn-cs"/>
+              </a:defRPr>
+            </a:lvl1pPr>
+          </a:lstStyle>
+          <a:p>
+            <a:pPr algn="l" marL="320040" indent="-320040">
+              <a:lnSpc>
+                <a:spcPct val="93000"/>
+              </a:lnSpc>
+              <a:spcBef>
+                <a:spcPts val="400"/>
+              </a:spcBef>
+              <a:buClr>
+                <a:srgbClr val="8FBACE"/>
+              </a:buClr>
+              <a:buSzPct val="90000"/>
+              <a:buFont typeface="Arial"/>
+              <a:buAutoNum type="arabicPeriod"/>
+            </a:pPr>
+            <a:r>
+              <a:rPr lang="th-TH" sz="1600" dirty="0">
+                <a:solidFill>
+                  <a:srgbClr val="FFFFFF">
+                    <a:alpha val="92000"/>
+                  </a:srgbClr>
+                </a:solidFill>
+                <a:latin typeface="+mn-lt"/>
+                <a:ea typeface="+mn-ea"/>
+                <a:cs typeface="+mn-cs"/>
+              </a:rPr>
+              <a:t>สิ่งที่ต้องเกิดขึ้นต่อ พร้อมผู้รับผิดชอบ</a:t>
+            </a:r>
+          </a:p>
+        </p:txBody>
+      </p:sp>
+      <p:sp>
+        <p:nvSpPr>
+          <p:cNvPr id="15" name="Decision Callout"/>
+          <p:cNvSpPr/>
+          <p:nvPr/>
+        </p:nvSpPr>
+        <p:spPr>
+          <a:xfrm>
+            <a:off x="914400" y="4983480"/>
+            <a:ext cx="6248400" cy="1005840"/>
+          </a:xfrm>
+          <a:prstGeom prst="rect">
+            <a:avLst/>
+          </a:prstGeom>
+          <a:solidFill>
+            <a:srgbClr val="16324F"/>
+          </a:solidFill>
+          <a:ln>
+            <a:noFill/>
+          </a:ln>
+        </p:spPr>
+        <p:txBody>
+          <a:bodyPr/>
+          <a:lstStyle/>
+          <a:p>
+            <a:endParaRPr lang="th-TH"/>
+          </a:p>
+        </p:txBody>
+      </p:sp>
+      <p:sp>
+        <p:nvSpPr>
+          <p:cNvPr id="16" name="Decision Bar"/>
+          <p:cNvSpPr/>
+          <p:nvPr/>
+        </p:nvSpPr>
+        <p:spPr>
+          <a:xfrm>
+            <a:off x="914400" y="4983480"/>
+            <a:ext cx="54864" cy="1005840"/>
+          </a:xfrm>
+          <a:prstGeom prst="rect">
+            <a:avLst/>
+          </a:prstGeom>
+          <a:solidFill>
+            <a:srgbClr val="8FBACE"/>
+          </a:solidFill>
+          <a:ln>
+            <a:noFill/>
+          </a:ln>
+        </p:spPr>
+        <p:txBody>
+          <a:bodyPr/>
+          <a:lstStyle/>
+          <a:p>
+            <a:endParaRPr lang="th-TH"/>
+          </a:p>
+        </p:txBody>
+      </p:sp>
+      <p:sp>
+        <p:nvSpPr>
+          <p:cNvPr id="17" name="Decision By"/>
+          <p:cNvSpPr>
+            <a:spLocks noGrp="1"/>
+          </p:cNvSpPr>
+          <p:nvPr>
+            <p:ph type="body" idx="3"/>
+          </p:nvPr>
+        </p:nvSpPr>
+        <p:spPr>
+          <a:xfrm>
+            <a:off x="1234440" y="4983480"/>
+            <a:ext cx="5608320" cy="1005840"/>
+          </a:xfrm>
+          <a:prstGeom prst="rect">
+            <a:avLst/>
+          </a:prstGeom>
+        </p:spPr>
+        <p:txBody>
+          <a:bodyPr wrap="square" anchor="ctr" lIns="0" tIns="0" rIns="0" bIns="0" rtlCol="0"/>
+          <a:lstStyle>
+            <a:lvl1pPr algn="l" marL="0" indent="0">
+              <a:lnSpc>
+                <a:spcPct val="115000"/>
+              </a:lnSpc>
+              <a:buNone/>
+              <a:defRPr lang="th-TH" sz="2000" b="1" dirty="0">
+                <a:solidFill>
+                  <a:srgbClr val="FFFFFF"/>
+                </a:solidFill>
+                <a:latin typeface="+mj-lt"/>
+                <a:ea typeface="+mj-ea"/>
+                <a:cs typeface="+mj-cs"/>
+              </a:defRPr>
+            </a:lvl1pPr>
+          </a:lstStyle>
+          <a:p>
+            <a:pPr algn="l" marL="0" indent="0">
+              <a:lnSpc>
+                <a:spcPct val="115000"/>
+              </a:lnSpc>
+              <a:buNone/>
+            </a:pPr>
+            <a:r>
+              <a:rPr lang="th-TH" sz="2000" b="1" dirty="0">
+                <a:solidFill>
+                  <a:srgbClr val="FFFFFF"/>
+                </a:solidFill>
+                <a:latin typeface="+mj-lt"/>
+                <a:ea typeface="+mj-ea"/>
+                <a:cs typeface="+mj-cs"/>
+              </a:rPr>
+              <a:t>ต้องการคำตอบภายในวันที่ ...</a:t>
+            </a:r>
+          </a:p>
+        </p:txBody>
+      </p:sp>
+      <p:sp>
+        <p:nvSpPr>
+          <p:cNvPr id="18" name="Contact Card"/>
+          <p:cNvSpPr/>
+          <p:nvPr/>
+        </p:nvSpPr>
+        <p:spPr>
+          <a:xfrm>
+            <a:off x="7620000" y="914400"/>
+            <a:ext cx="3657600" cy="5074920"/>
+          </a:xfrm>
+          <a:prstGeom prst="rect">
+            <a:avLst/>
+          </a:prstGeom>
+          <a:solidFill>
+            <a:srgbClr val="FFFFFF"/>
+          </a:solidFill>
+          <a:ln>
+            <a:noFill/>
+          </a:ln>
+        </p:spPr>
+        <p:txBody>
+          <a:bodyPr/>
+          <a:lstStyle/>
+          <a:p>
+            <a:endParaRPr lang="th-TH"/>
+          </a:p>
+        </p:txBody>
+      </p:sp>
       <p:pic>
         <p:nvPicPr>
-          <p:cNvPr id="11" name="Section Photo"/>
+          <p:cNvPr id="19" name="Card Photo"/>
+          <p:cNvPicPr>
+            <a:picLocks noChangeAspect="1"/>
+          </p:cNvPicPr>
+          <p:nvPr/>
+        </p:nvPicPr>
+        <p:blipFill>
+          <a:blip r:embed="rId4"/>
+          <a:stretch>
+            <a:fillRect/>
+          </a:stretch>
+        </p:blipFill>
+        <p:spPr>
+          <a:xfrm>
+            <a:off x="7620000" y="914400"/>
+            <a:ext cx="3657600" cy="2057400"/>
+          </a:xfrm>
+          <a:prstGeom prst="rect">
+            <a:avLst/>
+          </a:prstGeom>
+        </p:spPr>
+      </p:pic>
+      <p:sp>
+        <p:nvSpPr>
+          <p:cNvPr id="20" name="Contact Label"/>
+          <p:cNvSpPr/>
+          <p:nvPr/>
+        </p:nvSpPr>
+        <p:spPr>
+          <a:xfrm>
+            <a:off x="7940040" y="3291840"/>
+            <a:ext cx="3017520" cy="228600"/>
+          </a:xfrm>
+          <a:prstGeom prst="rect">
+            <a:avLst/>
+          </a:prstGeom>
+          <a:noFill/>
+          <a:ln>
+            <a:noFill/>
+          </a:ln>
+        </p:spPr>
+        <p:txBody>
+          <a:bodyPr wrap="square" anchor="ctr" lIns="0" tIns="0" rIns="0" bIns="0" rtlCol="0"/>
+          <a:lstStyle/>
+          <a:p>
+            <a:pPr algn="l" marL="0" indent="0">
+              <a:lnSpc>
+                <a:spcPct val="100000"/>
+              </a:lnSpc>
+              <a:buNone/>
+            </a:pPr>
+            <a:r>
+              <a:rPr lang="th-TH" sz="1200" b="1" spc="120" dirty="0">
+                <a:solidFill>
+                  <a:srgbClr val="216B7F"/>
+                </a:solidFill>
+                <a:latin typeface="+mn-lt"/>
+                <a:ea typeface="+mn-ea"/>
+                <a:cs typeface="+mn-cs"/>
+              </a:rPr>
+              <a:t>ติดต่อ</a:t>
+            </a:r>
+          </a:p>
+        </p:txBody>
+      </p:sp>
+      <p:sp>
+        <p:nvSpPr>
+          <p:cNvPr id="21" name="Contact"/>
+          <p:cNvSpPr>
+            <a:spLocks noGrp="1"/>
+          </p:cNvSpPr>
+          <p:nvPr>
+            <p:ph type="body" idx="4"/>
+          </p:nvPr>
+        </p:nvSpPr>
+        <p:spPr>
+          <a:xfrm>
+            <a:off x="7940040" y="3611880"/>
+            <a:ext cx="3017520" cy="914400"/>
+          </a:xfrm>
+          <a:prstGeom prst="rect">
+            <a:avLst/>
+          </a:prstGeom>
+        </p:spPr>
+        <p:txBody>
+          <a:bodyPr wrap="square" anchor="t" lIns="0" tIns="0" rIns="0" bIns="0" rtlCol="0"/>
+          <a:lstStyle>
+            <a:lvl1pPr algn="l" marL="0" indent="0">
+              <a:lnSpc>
+                <a:spcPct val="99000"/>
+              </a:lnSpc>
+              <a:buNone/>
+              <a:defRPr lang="th-TH" sz="1400" dirty="0">
+                <a:solidFill>
+                  <a:srgbClr val="333333"/>
+                </a:solidFill>
+                <a:latin typeface="+mn-lt"/>
+                <a:ea typeface="+mn-ea"/>
+                <a:cs typeface="+mn-cs"/>
+              </a:defRPr>
+            </a:lvl1pPr>
+          </a:lstStyle>
+          <a:p>
+            <a:pPr algn="l" marL="0" indent="0">
+              <a:lnSpc>
+                <a:spcPct val="99000"/>
+              </a:lnSpc>
+              <a:buNone/>
+            </a:pPr>
+            <a:r>
+              <a:rPr lang="th-TH" sz="1400" dirty="0">
+                <a:solidFill>
+                  <a:srgbClr val="333333"/>
+                </a:solidFill>
+                <a:latin typeface="+mn-lt"/>
+                <a:ea typeface="+mn-ea"/>
+                <a:cs typeface="+mn-cs"/>
+              </a:rPr>
+              <a:t>โทร · 0X-XXX-XXXX</a:t>
+            </a:r>
+          </a:p>
+        </p:txBody>
+      </p:sp>
+      <p:pic>
+        <p:nvPicPr>
+          <p:cNvPr id="22" name="NCT Logo"/>
           <p:cNvPicPr>
             <a:picLocks noChangeAspect="1"/>
           </p:cNvPicPr>
@@ -1702,537 +2117,14 @@
         </p:blipFill>
         <p:spPr>
           <a:xfrm>
-            <a:off x="7315200" y="0"/>
-            <a:ext cx="4876800" cy="6858000"/>
+            <a:off x="7940040" y="4785194"/>
+            <a:ext cx="1737360" cy="884086"/>
           </a:xfrm>
           <a:prstGeom prst="rect">
             <a:avLst/>
           </a:prstGeom>
         </p:spPr>
       </p:pic>
-      <p:sp>
-        <p:nvSpPr>
-          <p:cNvPr id="16" name="Photo Fade"/>
-          <p:cNvSpPr/>
-          <p:nvPr/>
-        </p:nvSpPr>
-        <p:spPr>
-          <a:xfrm>
-            <a:off x="7315200" y="0"/>
-            <a:ext cx="4876800" cy="6858000"/>
-          </a:xfrm>
-          <a:prstGeom prst="rect">
-            <a:avLst/>
-          </a:prstGeom>
-          <a:gradFill rotWithShape="1">
-            <a:gsLst>
-              <a:gs pos="0">
-                <a:srgbClr val="23436D">
-                  <a:alpha val="100000"/>
-                </a:srgbClr>
-              </a:gs>
-              <a:gs pos="26000">
-                <a:srgbClr val="23436D">
-                  <a:alpha val="84000"/>
-                </a:srgbClr>
-              </a:gs>
-              <a:gs pos="62000">
-                <a:srgbClr val="23436D">
-                  <a:alpha val="30000"/>
-                </a:srgbClr>
-              </a:gs>
-              <a:gs pos="100000">
-                <a:srgbClr val="23436D">
-                  <a:alpha val="12000"/>
-                </a:srgbClr>
-              </a:gs>
-            </a:gsLst>
-            <a:lin ang="0" scaled="0"/>
-          </a:gradFill>
-          <a:ln>
-            <a:noFill/>
-          </a:ln>
-        </p:spPr>
-        <p:txBody>
-          <a:bodyPr/>
-          <a:lstStyle/>
-          <a:p>
-            <a:endParaRPr lang="th-TH"/>
-          </a:p>
-        </p:txBody>
-      </p:sp>
-      <p:sp>
-        <p:nvSpPr>
-          <p:cNvPr id="17" name="Photo Foot Scrim"/>
-          <p:cNvSpPr/>
-          <p:nvPr/>
-        </p:nvSpPr>
-        <p:spPr>
-          <a:xfrm>
-            <a:off x="7315200" y="4800600"/>
-            <a:ext cx="4876800" cy="2057400"/>
-          </a:xfrm>
-          <a:prstGeom prst="rect">
-            <a:avLst/>
-          </a:prstGeom>
-          <a:gradFill rotWithShape="1">
-            <a:gsLst>
-              <a:gs pos="0">
-                <a:srgbClr val="23436D">
-                  <a:alpha val="0"/>
-                </a:srgbClr>
-              </a:gs>
-              <a:gs pos="55000">
-                <a:srgbClr val="23436D">
-                  <a:alpha val="60000"/>
-                </a:srgbClr>
-              </a:gs>
-              <a:gs pos="100000">
-                <a:srgbClr val="23436D">
-                  <a:alpha val="90000"/>
-                </a:srgbClr>
-              </a:gs>
-            </a:gsLst>
-            <a:lin ang="5400000" scaled="0"/>
-          </a:gradFill>
-          <a:ln>
-            <a:noFill/>
-          </a:ln>
-        </p:spPr>
-        <p:txBody>
-          <a:bodyPr/>
-          <a:lstStyle/>
-          <a:p>
-            <a:endParaRPr lang="th-TH"/>
-          </a:p>
-        </p:txBody>
-      </p:sp>
-      <p:sp>
-        <p:nvSpPr>
-          <p:cNvPr id="20" name="Ask Veil"/>
-          <p:cNvSpPr/>
-          <p:nvPr/>
-        </p:nvSpPr>
-        <p:spPr>
-          <a:xfrm>
-            <a:off x="0" y="0"/>
-            <a:ext cx="7315200" cy="6858000"/>
-          </a:xfrm>
-          <a:prstGeom prst="rect">
-            <a:avLst/>
-          </a:prstGeom>
-          <a:solidFill>
-            <a:srgbClr val="16324F">
-              <a:alpha val="55000"/>
-            </a:srgbClr>
-          </a:solidFill>
-          <a:ln>
-            <a:noFill/>
-          </a:ln>
-        </p:spPr>
-        <p:txBody>
-          <a:bodyPr/>
-          <a:lstStyle/>
-          <a:p>
-            <a:endParaRPr lang="th-TH"/>
-          </a:p>
-        </p:txBody>
-      </p:sp>
-      <p:sp>
-        <p:nvSpPr>
-          <p:cNvPr id="12" name="Title Placeholder"/>
-          <p:cNvSpPr>
-            <a:spLocks noGrp="1"/>
-          </p:cNvSpPr>
-          <p:nvPr>
-            <p:ph type="title"/>
-          </p:nvPr>
-        </p:nvSpPr>
-        <p:spPr>
-          <a:xfrm>
-            <a:off x="914400" y="1554480"/>
-            <a:ext cx="6217920" cy="1188720"/>
-          </a:xfrm>
-          <a:prstGeom prst="rect">
-            <a:avLst/>
-          </a:prstGeom>
-        </p:spPr>
-        <p:txBody>
-          <a:bodyPr wrap="square" anchor="b" lIns="0" tIns="0" rIns="0" bIns="0" rtlCol="0"/>
-          <a:lstStyle>
-            <a:lvl1pPr algn="l" marL="0" indent="0">
-              <a:lnSpc>
-                <a:spcPct val="108000"/>
-              </a:lnSpc>
-              <a:buNone/>
-              <a:defRPr lang="th-TH" sz="4000" b="1" dirty="0">
-                <a:solidFill>
-                  <a:srgbClr val="FFFFFF"/>
-                </a:solidFill>
-                <a:latin typeface="+mj-lt"/>
-                <a:ea typeface="+mj-ea"/>
-                <a:cs typeface="+mj-cs"/>
-              </a:defRPr>
-            </a:lvl1pPr>
-          </a:lstStyle>
-          <a:p>
-            <a:pPr algn="l" marL="0" indent="0">
-              <a:lnSpc>
-                <a:spcPct val="108000"/>
-              </a:lnSpc>
-              <a:buNone/>
-            </a:pPr>
-            <a:r>
-              <a:rPr lang="th-TH" sz="4000" b="1" dirty="0">
-                <a:solidFill>
-                  <a:srgbClr val="FFFFFF"/>
-                </a:solidFill>
-                <a:latin typeface="+mj-lt"/>
-                <a:ea typeface="+mj-ea"/>
-                <a:cs typeface="+mj-cs"/>
-              </a:rPr>
-              <a:t>ขอบคุณครับ</a:t>
-            </a:r>
-          </a:p>
-        </p:txBody>
-      </p:sp>
-      <p:sp>
-        <p:nvSpPr>
-          <p:cNvPr id="13" name="Accent Rule"/>
-          <p:cNvSpPr/>
-          <p:nvPr/>
-        </p:nvSpPr>
-        <p:spPr>
-          <a:xfrm>
-            <a:off x="914400" y="2926080"/>
-            <a:ext cx="548640" cy="45720"/>
-          </a:xfrm>
-          <a:prstGeom prst="rect">
-            <a:avLst/>
-          </a:prstGeom>
-          <a:solidFill>
-            <a:srgbClr val="FFFFFF">
-              <a:alpha val="72000"/>
-            </a:srgbClr>
-          </a:solidFill>
-          <a:ln>
-            <a:noFill/>
-          </a:ln>
-        </p:spPr>
-        <p:txBody>
-          <a:bodyPr/>
-          <a:lstStyle/>
-          <a:p>
-            <a:endParaRPr lang="th-TH"/>
-          </a:p>
-        </p:txBody>
-      </p:sp>
-      <p:sp>
-        <p:nvSpPr>
-          <p:cNvPr id="14" name="Next Steps Label"/>
-          <p:cNvSpPr>
-            <a:spLocks noGrp="1"/>
-          </p:cNvSpPr>
-          <p:nvPr>
-            <p:ph type="body" idx="1"/>
-          </p:nvPr>
-        </p:nvSpPr>
-        <p:spPr>
-          <a:xfrm>
-            <a:off x="914400" y="3200400"/>
-            <a:ext cx="2743200" cy="228600"/>
-          </a:xfrm>
-          <a:prstGeom prst="rect">
-            <a:avLst/>
-          </a:prstGeom>
-        </p:spPr>
-        <p:txBody>
-          <a:bodyPr wrap="square" anchor="ctr" lIns="0" tIns="0" rIns="0" bIns="0" rtlCol="0"/>
-          <a:lstStyle>
-            <a:lvl1pPr algn="l" marL="0" indent="0">
-              <a:lnSpc>
-                <a:spcPct val="100000"/>
-              </a:lnSpc>
-              <a:buNone/>
-              <a:defRPr lang="th-TH" sz="1200" b="1" spc="120" dirty="0">
-                <a:solidFill>
-                  <a:srgbClr val="FFFFFF">
-                    <a:alpha val="80000"/>
-                  </a:srgbClr>
-                </a:solidFill>
-                <a:latin typeface="+mn-lt"/>
-                <a:ea typeface="+mn-ea"/>
-                <a:cs typeface="+mn-cs"/>
-              </a:defRPr>
-            </a:lvl1pPr>
-          </a:lstStyle>
-          <a:p>
-            <a:pPr algn="l" marL="0" indent="0">
-              <a:lnSpc>
-                <a:spcPct val="100000"/>
-              </a:lnSpc>
-              <a:buNone/>
-            </a:pPr>
-            <a:r>
-              <a:rPr lang="th-TH" sz="1200" b="1" spc="120" dirty="0">
-                <a:solidFill>
-                  <a:srgbClr val="FFFFFF">
-                    <a:alpha val="80000"/>
-                  </a:srgbClr>
-                </a:solidFill>
-                <a:latin typeface="+mn-lt"/>
-                <a:ea typeface="+mn-ea"/>
-                <a:cs typeface="+mn-cs"/>
-              </a:rPr>
-              <a:t>ขั้นตอนถัดไป</a:t>
-            </a:r>
-          </a:p>
-        </p:txBody>
-      </p:sp>
-      <p:sp>
-        <p:nvSpPr>
-          <p:cNvPr id="15" name="Next Steps"/>
-          <p:cNvSpPr>
-            <a:spLocks noGrp="1"/>
-          </p:cNvSpPr>
-          <p:nvPr>
-            <p:ph type="body" idx="2"/>
-          </p:nvPr>
-        </p:nvSpPr>
-        <p:spPr>
-          <a:xfrm>
-            <a:off x="914400" y="3474720"/>
-            <a:ext cx="5486400" cy="1188720"/>
-          </a:xfrm>
-          <a:prstGeom prst="rect">
-            <a:avLst/>
-          </a:prstGeom>
-        </p:spPr>
-        <p:txBody>
-          <a:bodyPr wrap="square" anchor="t" lIns="0" tIns="0" rIns="0" bIns="0" rtlCol="0"/>
-          <a:lstStyle>
-            <a:lvl1pPr algn="l" marL="320040" indent="-320040">
-              <a:lnSpc>
-                <a:spcPct val="93000"/>
-              </a:lnSpc>
-              <a:spcBef>
-                <a:spcPts val="400"/>
-              </a:spcBef>
-              <a:buClr>
-                <a:srgbClr val="FFFFFF"/>
-              </a:buClr>
-              <a:buSzPct val="90000"/>
-              <a:buFont typeface="Arial"/>
-              <a:buAutoNum type="arabicPeriod"/>
-              <a:defRPr lang="th-TH" sz="1600" dirty="0">
-                <a:solidFill>
-                  <a:srgbClr val="FFFFFF">
-                    <a:alpha val="92000"/>
-                  </a:srgbClr>
-                </a:solidFill>
-                <a:latin typeface="+mn-lt"/>
-                <a:ea typeface="+mn-ea"/>
-                <a:cs typeface="+mn-cs"/>
-              </a:defRPr>
-            </a:lvl1pPr>
-          </a:lstStyle>
-          <a:p>
-            <a:pPr algn="l" marL="320040" indent="-320040">
-              <a:lnSpc>
-                <a:spcPct val="93000"/>
-              </a:lnSpc>
-              <a:spcBef>
-                <a:spcPts val="400"/>
-              </a:spcBef>
-              <a:buClr>
-                <a:srgbClr val="FFFFFF"/>
-              </a:buClr>
-              <a:buSzPct val="90000"/>
-              <a:buFont typeface="Arial"/>
-              <a:buAutoNum type="arabicPeriod"/>
-            </a:pPr>
-            <a:r>
-              <a:rPr lang="th-TH" sz="1600" dirty="0">
-                <a:solidFill>
-                  <a:srgbClr val="FFFFFF">
-                    <a:alpha val="92000"/>
-                  </a:srgbClr>
-                </a:solidFill>
-                <a:latin typeface="+mn-lt"/>
-                <a:ea typeface="+mn-ea"/>
-                <a:cs typeface="+mn-cs"/>
-              </a:rPr>
-              <a:t>สิ่งที่ต้องเกิดขึ้นต่อ พร้อมผู้รับผิดชอบ</a:t>
-            </a:r>
-          </a:p>
-        </p:txBody>
-      </p:sp>
-      <p:sp>
-        <p:nvSpPr>
-          <p:cNvPr id="18" name="Decision By"/>
-          <p:cNvSpPr>
-            <a:spLocks noGrp="1"/>
-          </p:cNvSpPr>
-          <p:nvPr>
-            <p:ph type="body" idx="3"/>
-          </p:nvPr>
-        </p:nvSpPr>
-        <p:spPr>
-          <a:xfrm>
-            <a:off x="914400" y="4709160"/>
-            <a:ext cx="5486400" cy="457200"/>
-          </a:xfrm>
-          <a:prstGeom prst="rect">
-            <a:avLst/>
-          </a:prstGeom>
-        </p:spPr>
-        <p:txBody>
-          <a:bodyPr wrap="square" anchor="ctr" lIns="0" tIns="0" rIns="0" bIns="0" rtlCol="0"/>
-          <a:lstStyle>
-            <a:lvl1pPr algn="l" marL="0" indent="0">
-              <a:lnSpc>
-                <a:spcPct val="115000"/>
-              </a:lnSpc>
-              <a:buNone/>
-              <a:defRPr lang="th-TH" sz="2000" b="1" dirty="0">
-                <a:solidFill>
-                  <a:srgbClr val="FFFFFF"/>
-                </a:solidFill>
-                <a:latin typeface="+mj-lt"/>
-                <a:ea typeface="+mj-ea"/>
-                <a:cs typeface="+mj-cs"/>
-              </a:defRPr>
-            </a:lvl1pPr>
-          </a:lstStyle>
-          <a:p>
-            <a:pPr algn="l" marL="0" indent="0">
-              <a:lnSpc>
-                <a:spcPct val="115000"/>
-              </a:lnSpc>
-              <a:buNone/>
-            </a:pPr>
-            <a:r>
-              <a:rPr lang="th-TH" sz="2000" b="1" dirty="0">
-                <a:solidFill>
-                  <a:srgbClr val="FFFFFF"/>
-                </a:solidFill>
-                <a:latin typeface="+mj-lt"/>
-                <a:ea typeface="+mj-ea"/>
-                <a:cs typeface="+mj-cs"/>
-              </a:rPr>
-              <a:t>ต้องการคำตอบภายในวันที่ ...</a:t>
-            </a:r>
-          </a:p>
-        </p:txBody>
-      </p:sp>
-      <p:sp>
-        <p:nvSpPr>
-          <p:cNvPr id="19" name="Contact"/>
-          <p:cNvSpPr>
-            <a:spLocks noGrp="1"/>
-          </p:cNvSpPr>
-          <p:nvPr>
-            <p:ph type="body" idx="4"/>
-          </p:nvPr>
-        </p:nvSpPr>
-        <p:spPr>
-          <a:xfrm>
-            <a:off x="914400" y="5303520"/>
-            <a:ext cx="5486400" cy="731520"/>
-          </a:xfrm>
-          <a:prstGeom prst="rect">
-            <a:avLst/>
-          </a:prstGeom>
-        </p:spPr>
-        <p:txBody>
-          <a:bodyPr wrap="square" anchor="t" lIns="0" tIns="0" rIns="0" bIns="0" rtlCol="0"/>
-          <a:lstStyle>
-            <a:lvl1pPr algn="l" marL="0" indent="0">
-              <a:lnSpc>
-                <a:spcPct val="89000"/>
-              </a:lnSpc>
-              <a:buNone/>
-              <a:defRPr lang="th-TH" sz="1400" dirty="0">
-                <a:solidFill>
-                  <a:srgbClr val="FFFFFF">
-                    <a:alpha val="92000"/>
-                  </a:srgbClr>
-                </a:solidFill>
-                <a:latin typeface="+mn-lt"/>
-                <a:ea typeface="+mn-ea"/>
-                <a:cs typeface="+mn-cs"/>
-              </a:defRPr>
-            </a:lvl1pPr>
-          </a:lstStyle>
-          <a:p>
-            <a:pPr algn="l" marL="0" indent="0">
-              <a:lnSpc>
-                <a:spcPct val="89000"/>
-              </a:lnSpc>
-              <a:buNone/>
-            </a:pPr>
-            <a:r>
-              <a:rPr lang="th-TH" sz="1400" dirty="0">
-                <a:solidFill>
-                  <a:srgbClr val="FFFFFF">
-                    <a:alpha val="92000"/>
-                  </a:srgbClr>
-                </a:solidFill>
-                <a:latin typeface="+mn-lt"/>
-                <a:ea typeface="+mn-ea"/>
-                <a:cs typeface="+mn-cs"/>
-              </a:rPr>
-              <a:t>โทร · 0X-XXX-XXXX</a:t>
-            </a:r>
-          </a:p>
-        </p:txBody>
-      </p:sp>
-      <p:sp>
-        <p:nvSpPr>
-          <p:cNvPr id="21" name="Footer Scrim"/>
-          <p:cNvSpPr/>
-          <p:nvPr/>
-        </p:nvSpPr>
-        <p:spPr>
-          <a:xfrm>
-            <a:off x="0" y="5394960"/>
-            <a:ext cx="12192000" cy="1463040"/>
-          </a:xfrm>
-          <a:prstGeom prst="rect">
-            <a:avLst/>
-          </a:prstGeom>
-          <a:gradFill rotWithShape="1">
-            <a:gsLst>
-              <a:gs pos="0">
-                <a:srgbClr val="16324F">
-                  <a:alpha val="0"/>
-                </a:srgbClr>
-              </a:gs>
-              <a:gs pos="55000">
-                <a:srgbClr val="16324F">
-                  <a:alpha val="60000"/>
-                </a:srgbClr>
-              </a:gs>
-              <a:gs pos="100000">
-                <a:srgbClr val="16324F">
-                  <a:alpha val="90000"/>
-                </a:srgbClr>
-              </a:gs>
-            </a:gsLst>
-            <a:lin ang="5400000" scaled="0"/>
-          </a:gradFill>
-          <a:ln>
-            <a:noFill/>
-          </a:ln>
-        </p:spPr>
-        <p:txBody>
-          <a:bodyPr/>
-          <a:lstStyle/>
-          <a:p>
-            <a:endParaRPr lang="th-TH"/>
-          </a:p>
-        </p:txBody>
-      </p:sp>
       <p:sp>
         <p:nvSpPr>
           <p:cNvPr id="90" name="Footer Rule"/>

--- a/NCT-Slide-Template-Demo.pptx
+++ b/NCT-Slide-Template-Demo.pptx
@@ -12942,7 +12942,65 @@
       </p:sp>
       <p:sp>
         <p:nvSpPr>
-          <p:cNvPr id="12" name="Left Content"/>
+          <p:cNvPr id="12" name="Left Heading"/>
+          <p:cNvSpPr>
+            <a:spLocks noGrp="1"/>
+          </p:cNvSpPr>
+          <p:nvPr>
+            <p:ph type="body" idx="3"/>
+          </p:nvPr>
+        </p:nvSpPr>
+        <p:spPr>
+          <a:xfrm>
+            <a:off x="914400" y="1691640"/>
+            <a:ext cx="5090160" cy="365760"/>
+          </a:xfrm>
+          <a:prstGeom prst="rect">
+            <a:avLst/>
+          </a:prstGeom>
+        </p:spPr>
+        <p:txBody>
+          <a:bodyPr wrap="square" anchor="t" lIns="0" tIns="0" rIns="0" bIns="0" rtlCol="0"/>
+          <a:lstStyle>
+            <a:lvl1pPr algn="l" marL="0" indent="0">
+              <a:lnSpc>
+                <a:spcPct val="115000"/>
+              </a:lnSpc>
+              <a:buNone/>
+              <a:defRPr lang="th-TH" sz="2000" b="1" dirty="0">
+                <a:solidFill>
+                  <a:srgbClr val="23436D"/>
+                </a:solidFill>
+                <a:latin typeface="+mj-lt"/>
+                <a:ea typeface="+mj-ea"/>
+                <a:cs typeface="+mj-cs"/>
+              </a:defRPr>
+            </a:lvl1pPr>
+          </a:lstStyle>
+          <a:p>
+            <a:pPr algn="l" marL="0" indent="0">
+              <a:lnSpc>
+                <a:spcPct val="115000"/>
+              </a:lnSpc>
+              <a:buNone/>
+            </a:pPr>
+            <a:r>
+              <a:rPr lang="th-TH" sz="2000" b="1" dirty="0">
+                <a:solidFill>
+                  <a:srgbClr val="23436D"/>
+                </a:solidFill>
+                <a:latin typeface="+mj-lt"/>
+                <a:ea typeface="+mj-ea"/>
+                <a:cs typeface="+mj-cs"/>
+              </a:rPr>
+              <a:t>หัวคอลัมน์ซ้าย</a:t>
+            </a:r>
+          </a:p>
+        </p:txBody>
+      </p:sp>
+      <p:sp>
+        <p:nvSpPr>
+          <p:cNvPr id="13" name="Left Content"/>
           <p:cNvSpPr>
             <a:spLocks noGrp="1"/>
           </p:cNvSpPr>
@@ -12952,8 +13010,8 @@
         </p:nvSpPr>
         <p:spPr>
           <a:xfrm>
-            <a:off x="914400" y="1691640"/>
-            <a:ext cx="5090160" cy="4343400"/>
+            <a:off x="914400" y="2240280"/>
+            <a:ext cx="5090160" cy="3794760"/>
           </a:xfrm>
           <a:prstGeom prst="rect">
             <a:avLst/>
@@ -13114,7 +13172,65 @@
       </p:sp>
       <p:sp>
         <p:nvSpPr>
-          <p:cNvPr id="13" name="Right Content"/>
+          <p:cNvPr id="14" name="Right Heading"/>
+          <p:cNvSpPr>
+            <a:spLocks noGrp="1"/>
+          </p:cNvSpPr>
+          <p:nvPr>
+            <p:ph type="body" idx="4"/>
+          </p:nvPr>
+        </p:nvSpPr>
+        <p:spPr>
+          <a:xfrm>
+            <a:off x="6187440" y="1691640"/>
+            <a:ext cx="5090160" cy="365760"/>
+          </a:xfrm>
+          <a:prstGeom prst="rect">
+            <a:avLst/>
+          </a:prstGeom>
+        </p:spPr>
+        <p:txBody>
+          <a:bodyPr wrap="square" anchor="t" lIns="0" tIns="0" rIns="0" bIns="0" rtlCol="0"/>
+          <a:lstStyle>
+            <a:lvl1pPr algn="l" marL="0" indent="0">
+              <a:lnSpc>
+                <a:spcPct val="115000"/>
+              </a:lnSpc>
+              <a:buNone/>
+              <a:defRPr lang="th-TH" sz="2000" b="1" dirty="0">
+                <a:solidFill>
+                  <a:srgbClr val="23436D"/>
+                </a:solidFill>
+                <a:latin typeface="+mj-lt"/>
+                <a:ea typeface="+mj-ea"/>
+                <a:cs typeface="+mj-cs"/>
+              </a:defRPr>
+            </a:lvl1pPr>
+          </a:lstStyle>
+          <a:p>
+            <a:pPr algn="l" marL="0" indent="0">
+              <a:lnSpc>
+                <a:spcPct val="115000"/>
+              </a:lnSpc>
+              <a:buNone/>
+            </a:pPr>
+            <a:r>
+              <a:rPr lang="th-TH" sz="2000" b="1" dirty="0">
+                <a:solidFill>
+                  <a:srgbClr val="23436D"/>
+                </a:solidFill>
+                <a:latin typeface="+mj-lt"/>
+                <a:ea typeface="+mj-ea"/>
+                <a:cs typeface="+mj-cs"/>
+              </a:rPr>
+              <a:t>หัวคอลัมน์ขวา</a:t>
+            </a:r>
+          </a:p>
+        </p:txBody>
+      </p:sp>
+      <p:sp>
+        <p:nvSpPr>
+          <p:cNvPr id="15" name="Right Content"/>
           <p:cNvSpPr>
             <a:spLocks noGrp="1"/>
           </p:cNvSpPr>
@@ -13124,8 +13240,8 @@
         </p:nvSpPr>
         <p:spPr>
           <a:xfrm>
-            <a:off x="6187440" y="1691640"/>
-            <a:ext cx="5090160" cy="4343400"/>
+            <a:off x="6187440" y="2240280"/>
+            <a:ext cx="5090160" cy="3794760"/>
           </a:xfrm>
           <a:prstGeom prst="rect">
             <a:avLst/>
@@ -22963,12 +23079,12 @@
       </p:sp>
       <p:sp>
         <p:nvSpPr>
-          <p:cNvPr id="3" name="L"/>
-          <p:cNvSpPr>
-            <a:spLocks noGrp="1"/>
-          </p:cNvSpPr>
-          <p:nvPr>
-            <p:ph type="body" idx="1"/>
+          <p:cNvPr id="3" name="LH"/>
+          <p:cNvSpPr>
+            <a:spLocks noGrp="1"/>
+          </p:cNvSpPr>
+          <p:nvPr>
+            <p:ph type="body" idx="3"/>
           </p:nvPr>
         </p:nvSpPr>
         <p:spPr/>
@@ -22982,15 +23098,31 @@
               <a:t>ก่อน</a:t>
             </a:r>
           </a:p>
-          <a:p>
-            <a:pPr lvl="1"/>
+        </p:txBody>
+      </p:sp>
+      <p:sp>
+        <p:nvSpPr>
+          <p:cNvPr id="4" name="L"/>
+          <p:cNvSpPr>
+            <a:spLocks noGrp="1"/>
+          </p:cNvSpPr>
+          <p:nvPr>
+            <p:ph type="body" idx="1"/>
+          </p:nvPr>
+        </p:nvSpPr>
+        <p:spPr/>
+        <p:txBody>
+          <a:bodyPr/>
+          <a:lstStyle/>
+          <a:p>
+            <a:pPr/>
             <a:r>
               <a:rPr lang="th-TH" dirty="0"/>
               <a:t>ระบบล่มบ่อย ไม่มีคนดูแลประจำ</a:t>
             </a:r>
           </a:p>
           <a:p>
-            <a:pPr lvl="1"/>
+            <a:pPr/>
             <a:r>
               <a:rPr lang="th-TH" dirty="0"/>
               <a:t>ค่าใช้จ่ายไม่แน่นอน</a:t>
@@ -23000,12 +23132,12 @@
       </p:sp>
       <p:sp>
         <p:nvSpPr>
-          <p:cNvPr id="4" name="R"/>
-          <p:cNvSpPr>
-            <a:spLocks noGrp="1"/>
-          </p:cNvSpPr>
-          <p:nvPr>
-            <p:ph type="body" idx="2"/>
+          <p:cNvPr id="5" name="RH"/>
+          <p:cNvSpPr>
+            <a:spLocks noGrp="1"/>
+          </p:cNvSpPr>
+          <p:nvPr>
+            <p:ph type="body" idx="4"/>
           </p:nvPr>
         </p:nvSpPr>
         <p:spPr/>
@@ -23019,15 +23151,31 @@
               <a:t>หลัง</a:t>
             </a:r>
           </a:p>
-          <a:p>
-            <a:pPr lvl="1"/>
+        </p:txBody>
+      </p:sp>
+      <p:sp>
+        <p:nvSpPr>
+          <p:cNvPr id="6" name="R"/>
+          <p:cNvSpPr>
+            <a:spLocks noGrp="1"/>
+          </p:cNvSpPr>
+          <p:nvPr>
+            <p:ph type="body" idx="2"/>
+          </p:nvPr>
+        </p:nvSpPr>
+        <p:spPr/>
+        <p:txBody>
+          <a:bodyPr/>
+          <a:lstStyle/>
+          <a:p>
+            <a:pPr/>
             <a:r>
               <a:rPr lang="th-TH" dirty="0"/>
               <a:t>มอนิเตอร์ 24 ชั่วโมง แจ้งเตือนอัตโนมัติ</a:t>
             </a:r>
           </a:p>
           <a:p>
-            <a:pPr lvl="1"/>
+            <a:pPr/>
             <a:r>
               <a:rPr lang="th-TH" dirty="0"/>
               <a:t>ค่าใช้จ่ายคงที่ต่อเดือน</a:t>

--- a/NCT-Slide-Template-Demo.pptx
+++ b/NCT-Slide-Template-Demo.pptx
@@ -25,6 +25,7 @@
     <p:sldId id="273" r:id="rId19"/>
     <p:sldId id="274" r:id="rId20"/>
     <p:sldId id="275" r:id="rId21"/>
+    <p:sldId id="276" r:id="rId22"/>
   </p:sldIdLst>
   <p:sldSz cx="12192000" cy="6858000"/>
   <p:notesSz cx="6858000" cy="9144000"/>
@@ -394,6 +395,292 @@
 </c:chartSpace>
 </file>
 
+<file path=ppt/charts/chart2.xml><?xml version="1.0" encoding="utf-8"?>
+<c:chartSpace xmlns:c="http://schemas.openxmlformats.org/drawingml/2006/chart" xmlns:a="http://schemas.openxmlformats.org/drawingml/2006/main" xmlns:r="http://schemas.openxmlformats.org/officeDocument/2006/relationships">
+  <c:roundedCorners val="0"/>
+  <c:chart>
+    <c:autoTitleDeleted val="1"/>
+    <c:plotArea>
+      <c:layout>
+        <c:manualLayout>
+          <c:layoutTarget val="inner"/>
+          <c:xMode val="edge"/>
+          <c:yMode val="edge"/>
+          <c:x val="0"/>
+          <c:y val="0"/>
+          <c:w val="1"/>
+          <c:h val="1"/>
+        </c:manualLayout>
+      </c:layout>
+      <c:barChart>
+        <c:barDir val="bar"/>
+        <c:grouping val="stacked"/>
+        <c:varyColors val="0"/>
+        <c:ser>
+          <c:idx val="0"/>
+          <c:order val="0"/>
+          <c:tx>
+            <c:strRef>
+              <c:f>Sheet1!$B$1</c:f>
+              <c:strCache>
+                <c:ptCount val="1"/>
+                <c:pt idx="0">
+                  <c:v>เริ่ม</c:v>
+                </c:pt>
+              </c:strCache>
+            </c:strRef>
+          </c:tx>
+          <c:spPr>
+            <a:noFill/>
+            <a:ln>
+              <a:noFill/>
+            </a:ln>
+          </c:spPr>
+          <c:invertIfNegative val="0"/>
+          <c:cat>
+            <c:strRef>
+              <c:f>Sheet1!$A$2:$A$9</c:f>
+              <c:strCache>
+                <c:ptCount val="8"/>
+                <c:pt idx="0">
+                  <c:v>1. เตรียมระบบ</c:v>
+                </c:pt>
+                <c:pt idx="1">
+                  <c:v>2. วิเคราะห์และออกแบบ</c:v>
+                </c:pt>
+                <c:pt idx="2">
+                  <c:v>3. พัฒนาและตั้งค่าระบบ</c:v>
+                </c:pt>
+                <c:pt idx="3">
+                  <c:v>4. ทดสอบ UAT</c:v>
+                </c:pt>
+                <c:pt idx="4">
+                  <c:v>5. อบรมผู้ใช้</c:v>
+                </c:pt>
+                <c:pt idx="5">
+                  <c:v>6. ขึ้นระบบ</c:v>
+                </c:pt>
+                <c:pt idx="6">
+                  <c:v>7. ดูแลหลังขึ้นระบบ</c:v>
+                </c:pt>
+                <c:pt idx="7">
+                  <c:v>8. รับประกันระบบ</c:v>
+                </c:pt>
+              </c:strCache>
+            </c:strRef>
+          </c:cat>
+          <c:val>
+            <c:numRef>
+              <c:f>Sheet1!$B$2:$B$9</c:f>
+              <c:numCache>
+                <c:formatCode>General</c:formatCode>
+                <c:ptCount val="8"/>
+                <c:pt idx="0">
+                  <c:v>0</c:v>
+                </c:pt>
+                <c:pt idx="1">
+                  <c:v>1</c:v>
+                </c:pt>
+                <c:pt idx="2">
+                  <c:v>2.5</c:v>
+                </c:pt>
+                <c:pt idx="3">
+                  <c:v>5</c:v>
+                </c:pt>
+                <c:pt idx="4">
+                  <c:v>5.75</c:v>
+                </c:pt>
+                <c:pt idx="5">
+                  <c:v>6</c:v>
+                </c:pt>
+                <c:pt idx="6">
+                  <c:v>6.5</c:v>
+                </c:pt>
+                <c:pt idx="7">
+                  <c:v>9.5</c:v>
+                </c:pt>
+              </c:numCache>
+            </c:numRef>
+          </c:val>
+        </c:ser>
+        <c:ser>
+          <c:idx val="1"/>
+          <c:order val="1"/>
+          <c:tx>
+            <c:strRef>
+              <c:f>Sheet1!$C$1</c:f>
+              <c:strCache>
+                <c:ptCount val="1"/>
+                <c:pt idx="0">
+                  <c:v>ระยะเวลา</c:v>
+                </c:pt>
+              </c:strCache>
+            </c:strRef>
+          </c:tx>
+          <c:spPr>
+            <a:solidFill>
+              <a:srgbClr val="90B4E4"/>
+            </a:solidFill>
+            <a:ln>
+              <a:noFill/>
+            </a:ln>
+          </c:spPr>
+          <c:invertIfNegative val="0"/>
+          <c:dPt>
+            <c:idx val="5"/>
+            <c:invertIfNegative val="0"/>
+            <c:bubble3D val="0"/>
+            <c:spPr>
+              <a:solidFill>
+                <a:srgbClr val="2A5EA0"/>
+              </a:solidFill>
+              <a:ln>
+                <a:noFill/>
+              </a:ln>
+            </c:spPr>
+          </c:dPt>
+          <c:cat>
+            <c:strRef>
+              <c:f>Sheet1!$A$2:$A$9</c:f>
+              <c:strCache>
+                <c:ptCount val="8"/>
+                <c:pt idx="0">
+                  <c:v>1. เตรียมระบบ</c:v>
+                </c:pt>
+                <c:pt idx="1">
+                  <c:v>2. วิเคราะห์และออกแบบ</c:v>
+                </c:pt>
+                <c:pt idx="2">
+                  <c:v>3. พัฒนาและตั้งค่าระบบ</c:v>
+                </c:pt>
+                <c:pt idx="3">
+                  <c:v>4. ทดสอบ UAT</c:v>
+                </c:pt>
+                <c:pt idx="4">
+                  <c:v>5. อบรมผู้ใช้</c:v>
+                </c:pt>
+                <c:pt idx="5">
+                  <c:v>6. ขึ้นระบบ</c:v>
+                </c:pt>
+                <c:pt idx="6">
+                  <c:v>7. ดูแลหลังขึ้นระบบ</c:v>
+                </c:pt>
+                <c:pt idx="7">
+                  <c:v>8. รับประกันระบบ</c:v>
+                </c:pt>
+              </c:strCache>
+            </c:strRef>
+          </c:cat>
+          <c:val>
+            <c:numRef>
+              <c:f>Sheet1!$C$2:$C$9</c:f>
+              <c:numCache>
+                <c:formatCode>General</c:formatCode>
+                <c:ptCount val="8"/>
+                <c:pt idx="0">
+                  <c:v>1</c:v>
+                </c:pt>
+                <c:pt idx="1">
+                  <c:v>1.5</c:v>
+                </c:pt>
+                <c:pt idx="2">
+                  <c:v>2.5</c:v>
+                </c:pt>
+                <c:pt idx="3">
+                  <c:v>1</c:v>
+                </c:pt>
+                <c:pt idx="4">
+                  <c:v>0.25</c:v>
+                </c:pt>
+                <c:pt idx="5">
+                  <c:v>0.5</c:v>
+                </c:pt>
+                <c:pt idx="6">
+                  <c:v>3</c:v>
+                </c:pt>
+                <c:pt idx="7">
+                  <c:v>2.5</c:v>
+                </c:pt>
+              </c:numCache>
+            </c:numRef>
+          </c:val>
+        </c:ser>
+        <c:gapWidth val="113"/>
+        <c:overlap val="100"/>
+        <c:axId val="21001"/>
+        <c:axId val="21002"/>
+      </c:barChart>
+      <c:catAx>
+        <c:axId val="21001"/>
+        <c:scaling>
+          <c:orientation val="maxMin"/>
+        </c:scaling>
+        <c:delete val="1"/>
+        <c:axPos val="l"/>
+        <c:majorTickMark val="none"/>
+        <c:minorTickMark val="none"/>
+        <c:tickLblPos val="none"/>
+        <c:crossAx val="21002"/>
+        <c:crosses val="autoZero"/>
+        <c:auto val="1"/>
+        <c:lblAlgn val="ctr"/>
+        <c:lblOffset val="100"/>
+        <c:noMultiLvlLbl val="0"/>
+      </c:catAx>
+      <c:valAx>
+        <c:axId val="21002"/>
+        <c:scaling>
+          <c:orientation val="minMax"/>
+          <c:max val="12"/>
+          <c:min val="0"/>
+        </c:scaling>
+        <c:delete val="0"/>
+        <c:axPos val="b"/>
+        <c:majorGridlines>
+          <c:spPr>
+            <a:ln w="9525">
+              <a:solidFill>
+                <a:srgbClr val="E5E5E5"/>
+              </a:solidFill>
+            </a:ln>
+          </c:spPr>
+        </c:majorGridlines>
+        <c:numFmt formatCode="General" sourceLinked="0"/>
+        <c:majorTickMark val="none"/>
+        <c:minorTickMark val="none"/>
+        <c:tickLblPos val="none"/>
+        <c:spPr>
+          <a:ln>
+            <a:noFill/>
+          </a:ln>
+        </c:spPr>
+        <c:crossAx val="21001"/>
+        <c:crosses val="max"/>
+        <c:crossBetween val="between"/>
+        <c:majorUnit val="1"/>
+      </c:valAx>
+      <c:spPr>
+        <a:noFill/>
+        <a:ln>
+          <a:noFill/>
+        </a:ln>
+      </c:spPr>
+    </c:plotArea>
+    <c:plotVisOnly val="1"/>
+    <c:dispBlanksAs val="gap"/>
+  </c:chart>
+  <c:spPr>
+    <a:noFill/>
+    <a:ln>
+      <a:noFill/>
+    </a:ln>
+  </c:spPr>
+  <c:externalData r:id="rId1">
+    <c:autoUpdate val="0"/>
+  </c:externalData>
+</c:chartSpace>
+</file>
+
 <file path=ppt/slideLayouts/slideLayout1.xml><?xml version="1.0" encoding="utf-8"?>
 <p:sldLayout xmlns:a="http://schemas.openxmlformats.org/drawingml/2006/main" xmlns:r="http://schemas.openxmlformats.org/officeDocument/2006/relationships" xmlns:p="http://schemas.openxmlformats.org/presentationml/2006/main" type="title" showMasterSp="0" preserve="1">
   <p:cSld name="01 Title Slide">
@@ -12332,6 +12619,2263 @@
 </p:sldLayout>
 </file>
 
+<file path=ppt/slideLayouts/slideLayout21.xml><?xml version="1.0" encoding="utf-8"?>
+<p:sldLayout xmlns:a="http://schemas.openxmlformats.org/drawingml/2006/main" xmlns:r="http://schemas.openxmlformats.org/officeDocument/2006/relationships" xmlns:p="http://schemas.openxmlformats.org/presentationml/2006/main" type="chart" showMasterSp="0" preserve="1">
+  <p:cSld name="21 Plan Timeline">
+    <p:bg>
+      <p:bgPr>
+        <a:solidFill>
+          <a:srgbClr val="FFFFFF"/>
+        </a:solidFill>
+        <a:effectLst/>
+      </p:bgPr>
+    </p:bg>
+    <p:spTree>
+      <p:nvGrpSpPr>
+        <p:cNvPr id="1" name=""/>
+        <p:cNvGrpSpPr/>
+        <p:nvPr/>
+      </p:nvGrpSpPr>
+      <p:grpSpPr>
+        <a:xfrm>
+          <a:off x="0" y="0"/>
+          <a:ext cx="0" cy="0"/>
+          <a:chOff x="0" y="0"/>
+          <a:chExt cx="0" cy="0"/>
+        </a:xfrm>
+      </p:grpSpPr>
+      <p:sp>
+        <p:nvSpPr>
+          <p:cNvPr id="10" name="Title Placeholder"/>
+          <p:cNvSpPr>
+            <a:spLocks noGrp="1"/>
+          </p:cNvSpPr>
+          <p:nvPr>
+            <p:ph type="title"/>
+          </p:nvPr>
+        </p:nvSpPr>
+        <p:spPr>
+          <a:xfrm>
+            <a:off x="914400" y="548640"/>
+            <a:ext cx="10363200" cy="731520"/>
+          </a:xfrm>
+          <a:prstGeom prst="rect">
+            <a:avLst/>
+          </a:prstGeom>
+        </p:spPr>
+        <p:txBody>
+          <a:bodyPr wrap="square" anchor="b" lIns="0" tIns="0" rIns="0" bIns="0" rtlCol="0"/>
+          <a:lstStyle>
+            <a:lvl1pPr algn="l" marL="0" indent="0">
+              <a:lnSpc>
+                <a:spcPct val="108000"/>
+              </a:lnSpc>
+              <a:buNone/>
+              <a:defRPr lang="th-TH" sz="3200" b="1" dirty="0">
+                <a:solidFill>
+                  <a:srgbClr val="23436D"/>
+                </a:solidFill>
+                <a:latin typeface="+mj-lt"/>
+                <a:ea typeface="+mj-ea"/>
+                <a:cs typeface="+mj-cs"/>
+              </a:defRPr>
+            </a:lvl1pPr>
+          </a:lstStyle>
+          <a:p>
+            <a:pPr algn="l" marL="0" indent="0">
+              <a:lnSpc>
+                <a:spcPct val="108000"/>
+              </a:lnSpc>
+              <a:buNone/>
+            </a:pPr>
+            <a:r>
+              <a:rPr lang="th-TH" sz="3200" b="1" dirty="0">
+                <a:solidFill>
+                  <a:srgbClr val="23436D"/>
+                </a:solidFill>
+                <a:latin typeface="+mj-lt"/>
+                <a:ea typeface="+mj-ea"/>
+                <a:cs typeface="+mj-cs"/>
+              </a:rPr>
+              <a:t>ชื่อสไลด์</a:t>
+            </a:r>
+          </a:p>
+        </p:txBody>
+      </p:sp>
+      <p:sp>
+        <p:nvSpPr>
+          <p:cNvPr id="11" name="Accent Rule"/>
+          <p:cNvSpPr/>
+          <p:nvPr/>
+        </p:nvSpPr>
+        <p:spPr>
+          <a:xfrm>
+            <a:off x="914400" y="1371600"/>
+            <a:ext cx="548640" cy="45720"/>
+          </a:xfrm>
+          <a:prstGeom prst="rect">
+            <a:avLst/>
+          </a:prstGeom>
+          <a:solidFill>
+            <a:srgbClr val="216B7F"/>
+          </a:solidFill>
+          <a:ln>
+            <a:noFill/>
+          </a:ln>
+        </p:spPr>
+        <p:txBody>
+          <a:bodyPr/>
+          <a:lstStyle/>
+          <a:p>
+            <a:endParaRPr lang="th-TH"/>
+          </a:p>
+        </p:txBody>
+      </p:sp>
+      <p:sp>
+        <p:nvSpPr>
+          <p:cNvPr id="12" name="Chart Placeholder"/>
+          <p:cNvSpPr>
+            <a:spLocks noGrp="1"/>
+          </p:cNvSpPr>
+          <p:nvPr>
+            <p:ph type="chart" idx="1"/>
+          </p:nvPr>
+        </p:nvSpPr>
+        <p:spPr>
+          <a:xfrm>
+            <a:off x="3566160" y="2057400"/>
+            <a:ext cx="7711440" cy="3108960"/>
+          </a:xfrm>
+          <a:prstGeom prst="rect">
+            <a:avLst/>
+          </a:prstGeom>
+        </p:spPr>
+        <p:txBody>
+          <a:bodyPr wrap="square" anchor="ctr" lIns="0" tIns="0" rIns="0" bIns="0" rtlCol="0"/>
+          <a:lstStyle>
+            <a:lvl1pPr algn="l" marL="0" indent="0">
+              <a:lnSpc>
+                <a:spcPct val="100000"/>
+              </a:lnSpc>
+              <a:buNone/>
+              <a:defRPr lang="th-TH" sz="1200" dirty="0">
+                <a:solidFill>
+                  <a:srgbClr val="5F5F5F"/>
+                </a:solidFill>
+                <a:latin typeface="+mn-lt"/>
+                <a:ea typeface="+mn-ea"/>
+                <a:cs typeface="+mn-cs"/>
+              </a:defRPr>
+            </a:lvl1pPr>
+          </a:lstStyle>
+          <a:p>
+            <a:pPr algn="l" marL="0" indent="0">
+              <a:lnSpc>
+                <a:spcPct val="100000"/>
+              </a:lnSpc>
+              <a:buNone/>
+            </a:pPr>
+            <a:endParaRPr lang="th-TH" sz="1200"/>
+          </a:p>
+        </p:txBody>
+      </p:sp>
+      <p:sp>
+        <p:nvSpPr>
+          <p:cNvPr id="13" name="Period 1"/>
+          <p:cNvSpPr>
+            <a:spLocks noGrp="1"/>
+          </p:cNvSpPr>
+          <p:nvPr>
+            <p:ph type="body" idx="20"/>
+          </p:nvPr>
+        </p:nvSpPr>
+        <p:spPr>
+          <a:xfrm>
+            <a:off x="3566160" y="1691640"/>
+            <a:ext cx="642620" cy="274320"/>
+          </a:xfrm>
+          <a:prstGeom prst="rect">
+            <a:avLst/>
+          </a:prstGeom>
+        </p:spPr>
+        <p:txBody>
+          <a:bodyPr wrap="square" anchor="b" lIns="0" tIns="0" rIns="0" bIns="0" rtlCol="0"/>
+          <a:lstStyle>
+            <a:lvl1pPr algn="ctr" marL="0" indent="0">
+              <a:lnSpc>
+                <a:spcPct val="100000"/>
+              </a:lnSpc>
+              <a:buNone/>
+              <a:defRPr lang="th-TH" sz="1200" b="1" dirty="0">
+                <a:solidFill>
+                  <a:srgbClr val="5F5F5F"/>
+                </a:solidFill>
+                <a:latin typeface="+mn-lt"/>
+                <a:ea typeface="+mn-ea"/>
+                <a:cs typeface="+mn-cs"/>
+              </a:defRPr>
+            </a:lvl1pPr>
+          </a:lstStyle>
+          <a:p>
+            <a:pPr algn="ctr" marL="0" indent="0">
+              <a:lnSpc>
+                <a:spcPct val="100000"/>
+              </a:lnSpc>
+              <a:buNone/>
+            </a:pPr>
+            <a:r>
+              <a:rPr lang="th-TH" sz="1200" b="1" dirty="0">
+                <a:solidFill>
+                  <a:srgbClr val="5F5F5F"/>
+                </a:solidFill>
+                <a:latin typeface="+mn-lt"/>
+                <a:ea typeface="+mn-ea"/>
+                <a:cs typeface="+mn-cs"/>
+              </a:rPr>
+              <a:t>ด.1</a:t>
+            </a:r>
+          </a:p>
+        </p:txBody>
+      </p:sp>
+      <p:sp>
+        <p:nvSpPr>
+          <p:cNvPr id="14" name="Period 2"/>
+          <p:cNvSpPr>
+            <a:spLocks noGrp="1"/>
+          </p:cNvSpPr>
+          <p:nvPr>
+            <p:ph type="body" idx="21"/>
+          </p:nvPr>
+        </p:nvSpPr>
+        <p:spPr>
+          <a:xfrm>
+            <a:off x="4208780" y="1691640"/>
+            <a:ext cx="642620" cy="274320"/>
+          </a:xfrm>
+          <a:prstGeom prst="rect">
+            <a:avLst/>
+          </a:prstGeom>
+        </p:spPr>
+        <p:txBody>
+          <a:bodyPr wrap="square" anchor="b" lIns="0" tIns="0" rIns="0" bIns="0" rtlCol="0"/>
+          <a:lstStyle>
+            <a:lvl1pPr algn="ctr" marL="0" indent="0">
+              <a:lnSpc>
+                <a:spcPct val="100000"/>
+              </a:lnSpc>
+              <a:buNone/>
+              <a:defRPr lang="th-TH" sz="1200" b="1" dirty="0">
+                <a:solidFill>
+                  <a:srgbClr val="5F5F5F"/>
+                </a:solidFill>
+                <a:latin typeface="+mn-lt"/>
+                <a:ea typeface="+mn-ea"/>
+                <a:cs typeface="+mn-cs"/>
+              </a:defRPr>
+            </a:lvl1pPr>
+          </a:lstStyle>
+          <a:p>
+            <a:pPr algn="ctr" marL="0" indent="0">
+              <a:lnSpc>
+                <a:spcPct val="100000"/>
+              </a:lnSpc>
+              <a:buNone/>
+            </a:pPr>
+            <a:r>
+              <a:rPr lang="th-TH" sz="1200" b="1" dirty="0">
+                <a:solidFill>
+                  <a:srgbClr val="5F5F5F"/>
+                </a:solidFill>
+                <a:latin typeface="+mn-lt"/>
+                <a:ea typeface="+mn-ea"/>
+                <a:cs typeface="+mn-cs"/>
+              </a:rPr>
+              <a:t>ด.2</a:t>
+            </a:r>
+          </a:p>
+        </p:txBody>
+      </p:sp>
+      <p:sp>
+        <p:nvSpPr>
+          <p:cNvPr id="15" name="Period 3"/>
+          <p:cNvSpPr>
+            <a:spLocks noGrp="1"/>
+          </p:cNvSpPr>
+          <p:nvPr>
+            <p:ph type="body" idx="22"/>
+          </p:nvPr>
+        </p:nvSpPr>
+        <p:spPr>
+          <a:xfrm>
+            <a:off x="4851400" y="1691640"/>
+            <a:ext cx="642620" cy="274320"/>
+          </a:xfrm>
+          <a:prstGeom prst="rect">
+            <a:avLst/>
+          </a:prstGeom>
+        </p:spPr>
+        <p:txBody>
+          <a:bodyPr wrap="square" anchor="b" lIns="0" tIns="0" rIns="0" bIns="0" rtlCol="0"/>
+          <a:lstStyle>
+            <a:lvl1pPr algn="ctr" marL="0" indent="0">
+              <a:lnSpc>
+                <a:spcPct val="100000"/>
+              </a:lnSpc>
+              <a:buNone/>
+              <a:defRPr lang="th-TH" sz="1200" b="1" dirty="0">
+                <a:solidFill>
+                  <a:srgbClr val="5F5F5F"/>
+                </a:solidFill>
+                <a:latin typeface="+mn-lt"/>
+                <a:ea typeface="+mn-ea"/>
+                <a:cs typeface="+mn-cs"/>
+              </a:defRPr>
+            </a:lvl1pPr>
+          </a:lstStyle>
+          <a:p>
+            <a:pPr algn="ctr" marL="0" indent="0">
+              <a:lnSpc>
+                <a:spcPct val="100000"/>
+              </a:lnSpc>
+              <a:buNone/>
+            </a:pPr>
+            <a:r>
+              <a:rPr lang="th-TH" sz="1200" b="1" dirty="0">
+                <a:solidFill>
+                  <a:srgbClr val="5F5F5F"/>
+                </a:solidFill>
+                <a:latin typeface="+mn-lt"/>
+                <a:ea typeface="+mn-ea"/>
+                <a:cs typeface="+mn-cs"/>
+              </a:rPr>
+              <a:t>ด.3</a:t>
+            </a:r>
+          </a:p>
+        </p:txBody>
+      </p:sp>
+      <p:sp>
+        <p:nvSpPr>
+          <p:cNvPr id="16" name="Period 4"/>
+          <p:cNvSpPr>
+            <a:spLocks noGrp="1"/>
+          </p:cNvSpPr>
+          <p:nvPr>
+            <p:ph type="body" idx="23"/>
+          </p:nvPr>
+        </p:nvSpPr>
+        <p:spPr>
+          <a:xfrm>
+            <a:off x="5494020" y="1691640"/>
+            <a:ext cx="642620" cy="274320"/>
+          </a:xfrm>
+          <a:prstGeom prst="rect">
+            <a:avLst/>
+          </a:prstGeom>
+        </p:spPr>
+        <p:txBody>
+          <a:bodyPr wrap="square" anchor="b" lIns="0" tIns="0" rIns="0" bIns="0" rtlCol="0"/>
+          <a:lstStyle>
+            <a:lvl1pPr algn="ctr" marL="0" indent="0">
+              <a:lnSpc>
+                <a:spcPct val="100000"/>
+              </a:lnSpc>
+              <a:buNone/>
+              <a:defRPr lang="th-TH" sz="1200" b="1" dirty="0">
+                <a:solidFill>
+                  <a:srgbClr val="5F5F5F"/>
+                </a:solidFill>
+                <a:latin typeface="+mn-lt"/>
+                <a:ea typeface="+mn-ea"/>
+                <a:cs typeface="+mn-cs"/>
+              </a:defRPr>
+            </a:lvl1pPr>
+          </a:lstStyle>
+          <a:p>
+            <a:pPr algn="ctr" marL="0" indent="0">
+              <a:lnSpc>
+                <a:spcPct val="100000"/>
+              </a:lnSpc>
+              <a:buNone/>
+            </a:pPr>
+            <a:r>
+              <a:rPr lang="th-TH" sz="1200" b="1" dirty="0">
+                <a:solidFill>
+                  <a:srgbClr val="5F5F5F"/>
+                </a:solidFill>
+                <a:latin typeface="+mn-lt"/>
+                <a:ea typeface="+mn-ea"/>
+                <a:cs typeface="+mn-cs"/>
+              </a:rPr>
+              <a:t>ด.4</a:t>
+            </a:r>
+          </a:p>
+        </p:txBody>
+      </p:sp>
+      <p:sp>
+        <p:nvSpPr>
+          <p:cNvPr id="17" name="Period 5"/>
+          <p:cNvSpPr>
+            <a:spLocks noGrp="1"/>
+          </p:cNvSpPr>
+          <p:nvPr>
+            <p:ph type="body" idx="24"/>
+          </p:nvPr>
+        </p:nvSpPr>
+        <p:spPr>
+          <a:xfrm>
+            <a:off x="6136640" y="1691640"/>
+            <a:ext cx="642620" cy="274320"/>
+          </a:xfrm>
+          <a:prstGeom prst="rect">
+            <a:avLst/>
+          </a:prstGeom>
+        </p:spPr>
+        <p:txBody>
+          <a:bodyPr wrap="square" anchor="b" lIns="0" tIns="0" rIns="0" bIns="0" rtlCol="0"/>
+          <a:lstStyle>
+            <a:lvl1pPr algn="ctr" marL="0" indent="0">
+              <a:lnSpc>
+                <a:spcPct val="100000"/>
+              </a:lnSpc>
+              <a:buNone/>
+              <a:defRPr lang="th-TH" sz="1200" b="1" dirty="0">
+                <a:solidFill>
+                  <a:srgbClr val="5F5F5F"/>
+                </a:solidFill>
+                <a:latin typeface="+mn-lt"/>
+                <a:ea typeface="+mn-ea"/>
+                <a:cs typeface="+mn-cs"/>
+              </a:defRPr>
+            </a:lvl1pPr>
+          </a:lstStyle>
+          <a:p>
+            <a:pPr algn="ctr" marL="0" indent="0">
+              <a:lnSpc>
+                <a:spcPct val="100000"/>
+              </a:lnSpc>
+              <a:buNone/>
+            </a:pPr>
+            <a:r>
+              <a:rPr lang="th-TH" sz="1200" b="1" dirty="0">
+                <a:solidFill>
+                  <a:srgbClr val="5F5F5F"/>
+                </a:solidFill>
+                <a:latin typeface="+mn-lt"/>
+                <a:ea typeface="+mn-ea"/>
+                <a:cs typeface="+mn-cs"/>
+              </a:rPr>
+              <a:t>ด.5</a:t>
+            </a:r>
+          </a:p>
+        </p:txBody>
+      </p:sp>
+      <p:sp>
+        <p:nvSpPr>
+          <p:cNvPr id="18" name="Period 6"/>
+          <p:cNvSpPr>
+            <a:spLocks noGrp="1"/>
+          </p:cNvSpPr>
+          <p:nvPr>
+            <p:ph type="body" idx="25"/>
+          </p:nvPr>
+        </p:nvSpPr>
+        <p:spPr>
+          <a:xfrm>
+            <a:off x="6779260" y="1691640"/>
+            <a:ext cx="642620" cy="274320"/>
+          </a:xfrm>
+          <a:prstGeom prst="rect">
+            <a:avLst/>
+          </a:prstGeom>
+        </p:spPr>
+        <p:txBody>
+          <a:bodyPr wrap="square" anchor="b" lIns="0" tIns="0" rIns="0" bIns="0" rtlCol="0"/>
+          <a:lstStyle>
+            <a:lvl1pPr algn="ctr" marL="0" indent="0">
+              <a:lnSpc>
+                <a:spcPct val="100000"/>
+              </a:lnSpc>
+              <a:buNone/>
+              <a:defRPr lang="th-TH" sz="1200" b="1" dirty="0">
+                <a:solidFill>
+                  <a:srgbClr val="5F5F5F"/>
+                </a:solidFill>
+                <a:latin typeface="+mn-lt"/>
+                <a:ea typeface="+mn-ea"/>
+                <a:cs typeface="+mn-cs"/>
+              </a:defRPr>
+            </a:lvl1pPr>
+          </a:lstStyle>
+          <a:p>
+            <a:pPr algn="ctr" marL="0" indent="0">
+              <a:lnSpc>
+                <a:spcPct val="100000"/>
+              </a:lnSpc>
+              <a:buNone/>
+            </a:pPr>
+            <a:r>
+              <a:rPr lang="th-TH" sz="1200" b="1" dirty="0">
+                <a:solidFill>
+                  <a:srgbClr val="5F5F5F"/>
+                </a:solidFill>
+                <a:latin typeface="+mn-lt"/>
+                <a:ea typeface="+mn-ea"/>
+                <a:cs typeface="+mn-cs"/>
+              </a:rPr>
+              <a:t>ด.6</a:t>
+            </a:r>
+          </a:p>
+        </p:txBody>
+      </p:sp>
+      <p:sp>
+        <p:nvSpPr>
+          <p:cNvPr id="19" name="Period 7"/>
+          <p:cNvSpPr>
+            <a:spLocks noGrp="1"/>
+          </p:cNvSpPr>
+          <p:nvPr>
+            <p:ph type="body" idx="26"/>
+          </p:nvPr>
+        </p:nvSpPr>
+        <p:spPr>
+          <a:xfrm>
+            <a:off x="7421880" y="1691640"/>
+            <a:ext cx="642620" cy="274320"/>
+          </a:xfrm>
+          <a:prstGeom prst="rect">
+            <a:avLst/>
+          </a:prstGeom>
+        </p:spPr>
+        <p:txBody>
+          <a:bodyPr wrap="square" anchor="b" lIns="0" tIns="0" rIns="0" bIns="0" rtlCol="0"/>
+          <a:lstStyle>
+            <a:lvl1pPr algn="ctr" marL="0" indent="0">
+              <a:lnSpc>
+                <a:spcPct val="100000"/>
+              </a:lnSpc>
+              <a:buNone/>
+              <a:defRPr lang="th-TH" sz="1200" b="1" dirty="0">
+                <a:solidFill>
+                  <a:srgbClr val="5F5F5F"/>
+                </a:solidFill>
+                <a:latin typeface="+mn-lt"/>
+                <a:ea typeface="+mn-ea"/>
+                <a:cs typeface="+mn-cs"/>
+              </a:defRPr>
+            </a:lvl1pPr>
+          </a:lstStyle>
+          <a:p>
+            <a:pPr algn="ctr" marL="0" indent="0">
+              <a:lnSpc>
+                <a:spcPct val="100000"/>
+              </a:lnSpc>
+              <a:buNone/>
+            </a:pPr>
+            <a:r>
+              <a:rPr lang="th-TH" sz="1200" b="1" dirty="0">
+                <a:solidFill>
+                  <a:srgbClr val="5F5F5F"/>
+                </a:solidFill>
+                <a:latin typeface="+mn-lt"/>
+                <a:ea typeface="+mn-ea"/>
+                <a:cs typeface="+mn-cs"/>
+              </a:rPr>
+              <a:t>ด.7</a:t>
+            </a:r>
+          </a:p>
+        </p:txBody>
+      </p:sp>
+      <p:sp>
+        <p:nvSpPr>
+          <p:cNvPr id="20" name="Period 8"/>
+          <p:cNvSpPr>
+            <a:spLocks noGrp="1"/>
+          </p:cNvSpPr>
+          <p:nvPr>
+            <p:ph type="body" idx="27"/>
+          </p:nvPr>
+        </p:nvSpPr>
+        <p:spPr>
+          <a:xfrm>
+            <a:off x="8064500" y="1691640"/>
+            <a:ext cx="642620" cy="274320"/>
+          </a:xfrm>
+          <a:prstGeom prst="rect">
+            <a:avLst/>
+          </a:prstGeom>
+        </p:spPr>
+        <p:txBody>
+          <a:bodyPr wrap="square" anchor="b" lIns="0" tIns="0" rIns="0" bIns="0" rtlCol="0"/>
+          <a:lstStyle>
+            <a:lvl1pPr algn="ctr" marL="0" indent="0">
+              <a:lnSpc>
+                <a:spcPct val="100000"/>
+              </a:lnSpc>
+              <a:buNone/>
+              <a:defRPr lang="th-TH" sz="1200" b="1" dirty="0">
+                <a:solidFill>
+                  <a:srgbClr val="5F5F5F"/>
+                </a:solidFill>
+                <a:latin typeface="+mn-lt"/>
+                <a:ea typeface="+mn-ea"/>
+                <a:cs typeface="+mn-cs"/>
+              </a:defRPr>
+            </a:lvl1pPr>
+          </a:lstStyle>
+          <a:p>
+            <a:pPr algn="ctr" marL="0" indent="0">
+              <a:lnSpc>
+                <a:spcPct val="100000"/>
+              </a:lnSpc>
+              <a:buNone/>
+            </a:pPr>
+            <a:r>
+              <a:rPr lang="th-TH" sz="1200" b="1" dirty="0">
+                <a:solidFill>
+                  <a:srgbClr val="5F5F5F"/>
+                </a:solidFill>
+                <a:latin typeface="+mn-lt"/>
+                <a:ea typeface="+mn-ea"/>
+                <a:cs typeface="+mn-cs"/>
+              </a:rPr>
+              <a:t>ด.8</a:t>
+            </a:r>
+          </a:p>
+        </p:txBody>
+      </p:sp>
+      <p:sp>
+        <p:nvSpPr>
+          <p:cNvPr id="21" name="Period 9"/>
+          <p:cNvSpPr>
+            <a:spLocks noGrp="1"/>
+          </p:cNvSpPr>
+          <p:nvPr>
+            <p:ph type="body" idx="28"/>
+          </p:nvPr>
+        </p:nvSpPr>
+        <p:spPr>
+          <a:xfrm>
+            <a:off x="8707120" y="1691640"/>
+            <a:ext cx="642620" cy="274320"/>
+          </a:xfrm>
+          <a:prstGeom prst="rect">
+            <a:avLst/>
+          </a:prstGeom>
+        </p:spPr>
+        <p:txBody>
+          <a:bodyPr wrap="square" anchor="b" lIns="0" tIns="0" rIns="0" bIns="0" rtlCol="0"/>
+          <a:lstStyle>
+            <a:lvl1pPr algn="ctr" marL="0" indent="0">
+              <a:lnSpc>
+                <a:spcPct val="100000"/>
+              </a:lnSpc>
+              <a:buNone/>
+              <a:defRPr lang="th-TH" sz="1200" b="1" dirty="0">
+                <a:solidFill>
+                  <a:srgbClr val="5F5F5F"/>
+                </a:solidFill>
+                <a:latin typeface="+mn-lt"/>
+                <a:ea typeface="+mn-ea"/>
+                <a:cs typeface="+mn-cs"/>
+              </a:defRPr>
+            </a:lvl1pPr>
+          </a:lstStyle>
+          <a:p>
+            <a:pPr algn="ctr" marL="0" indent="0">
+              <a:lnSpc>
+                <a:spcPct val="100000"/>
+              </a:lnSpc>
+              <a:buNone/>
+            </a:pPr>
+            <a:r>
+              <a:rPr lang="th-TH" sz="1200" b="1" dirty="0">
+                <a:solidFill>
+                  <a:srgbClr val="5F5F5F"/>
+                </a:solidFill>
+                <a:latin typeface="+mn-lt"/>
+                <a:ea typeface="+mn-ea"/>
+                <a:cs typeface="+mn-cs"/>
+              </a:rPr>
+              <a:t>ด.9</a:t>
+            </a:r>
+          </a:p>
+        </p:txBody>
+      </p:sp>
+      <p:sp>
+        <p:nvSpPr>
+          <p:cNvPr id="22" name="Period 10"/>
+          <p:cNvSpPr>
+            <a:spLocks noGrp="1"/>
+          </p:cNvSpPr>
+          <p:nvPr>
+            <p:ph type="body" idx="29"/>
+          </p:nvPr>
+        </p:nvSpPr>
+        <p:spPr>
+          <a:xfrm>
+            <a:off x="9349740" y="1691640"/>
+            <a:ext cx="642620" cy="274320"/>
+          </a:xfrm>
+          <a:prstGeom prst="rect">
+            <a:avLst/>
+          </a:prstGeom>
+        </p:spPr>
+        <p:txBody>
+          <a:bodyPr wrap="square" anchor="b" lIns="0" tIns="0" rIns="0" bIns="0" rtlCol="0"/>
+          <a:lstStyle>
+            <a:lvl1pPr algn="ctr" marL="0" indent="0">
+              <a:lnSpc>
+                <a:spcPct val="100000"/>
+              </a:lnSpc>
+              <a:buNone/>
+              <a:defRPr lang="th-TH" sz="1200" b="1" dirty="0">
+                <a:solidFill>
+                  <a:srgbClr val="5F5F5F"/>
+                </a:solidFill>
+                <a:latin typeface="+mn-lt"/>
+                <a:ea typeface="+mn-ea"/>
+                <a:cs typeface="+mn-cs"/>
+              </a:defRPr>
+            </a:lvl1pPr>
+          </a:lstStyle>
+          <a:p>
+            <a:pPr algn="ctr" marL="0" indent="0">
+              <a:lnSpc>
+                <a:spcPct val="100000"/>
+              </a:lnSpc>
+              <a:buNone/>
+            </a:pPr>
+            <a:r>
+              <a:rPr lang="th-TH" sz="1200" b="1" dirty="0">
+                <a:solidFill>
+                  <a:srgbClr val="5F5F5F"/>
+                </a:solidFill>
+                <a:latin typeface="+mn-lt"/>
+                <a:ea typeface="+mn-ea"/>
+                <a:cs typeface="+mn-cs"/>
+              </a:rPr>
+              <a:t>ด.10</a:t>
+            </a:r>
+          </a:p>
+        </p:txBody>
+      </p:sp>
+      <p:sp>
+        <p:nvSpPr>
+          <p:cNvPr id="23" name="Period 11"/>
+          <p:cNvSpPr>
+            <a:spLocks noGrp="1"/>
+          </p:cNvSpPr>
+          <p:nvPr>
+            <p:ph type="body" idx="30"/>
+          </p:nvPr>
+        </p:nvSpPr>
+        <p:spPr>
+          <a:xfrm>
+            <a:off x="9992360" y="1691640"/>
+            <a:ext cx="642620" cy="274320"/>
+          </a:xfrm>
+          <a:prstGeom prst="rect">
+            <a:avLst/>
+          </a:prstGeom>
+        </p:spPr>
+        <p:txBody>
+          <a:bodyPr wrap="square" anchor="b" lIns="0" tIns="0" rIns="0" bIns="0" rtlCol="0"/>
+          <a:lstStyle>
+            <a:lvl1pPr algn="ctr" marL="0" indent="0">
+              <a:lnSpc>
+                <a:spcPct val="100000"/>
+              </a:lnSpc>
+              <a:buNone/>
+              <a:defRPr lang="th-TH" sz="1200" b="1" dirty="0">
+                <a:solidFill>
+                  <a:srgbClr val="5F5F5F"/>
+                </a:solidFill>
+                <a:latin typeface="+mn-lt"/>
+                <a:ea typeface="+mn-ea"/>
+                <a:cs typeface="+mn-cs"/>
+              </a:defRPr>
+            </a:lvl1pPr>
+          </a:lstStyle>
+          <a:p>
+            <a:pPr algn="ctr" marL="0" indent="0">
+              <a:lnSpc>
+                <a:spcPct val="100000"/>
+              </a:lnSpc>
+              <a:buNone/>
+            </a:pPr>
+            <a:r>
+              <a:rPr lang="th-TH" sz="1200" b="1" dirty="0">
+                <a:solidFill>
+                  <a:srgbClr val="5F5F5F"/>
+                </a:solidFill>
+                <a:latin typeface="+mn-lt"/>
+                <a:ea typeface="+mn-ea"/>
+                <a:cs typeface="+mn-cs"/>
+              </a:rPr>
+              <a:t>ด.11</a:t>
+            </a:r>
+          </a:p>
+        </p:txBody>
+      </p:sp>
+      <p:sp>
+        <p:nvSpPr>
+          <p:cNvPr id="24" name="Period 12"/>
+          <p:cNvSpPr>
+            <a:spLocks noGrp="1"/>
+          </p:cNvSpPr>
+          <p:nvPr>
+            <p:ph type="body" idx="31"/>
+          </p:nvPr>
+        </p:nvSpPr>
+        <p:spPr>
+          <a:xfrm>
+            <a:off x="10634980" y="1691640"/>
+            <a:ext cx="642620" cy="274320"/>
+          </a:xfrm>
+          <a:prstGeom prst="rect">
+            <a:avLst/>
+          </a:prstGeom>
+        </p:spPr>
+        <p:txBody>
+          <a:bodyPr wrap="square" anchor="b" lIns="0" tIns="0" rIns="0" bIns="0" rtlCol="0"/>
+          <a:lstStyle>
+            <a:lvl1pPr algn="ctr" marL="0" indent="0">
+              <a:lnSpc>
+                <a:spcPct val="100000"/>
+              </a:lnSpc>
+              <a:buNone/>
+              <a:defRPr lang="th-TH" sz="1200" b="1" dirty="0">
+                <a:solidFill>
+                  <a:srgbClr val="5F5F5F"/>
+                </a:solidFill>
+                <a:latin typeface="+mn-lt"/>
+                <a:ea typeface="+mn-ea"/>
+                <a:cs typeface="+mn-cs"/>
+              </a:defRPr>
+            </a:lvl1pPr>
+          </a:lstStyle>
+          <a:p>
+            <a:pPr algn="ctr" marL="0" indent="0">
+              <a:lnSpc>
+                <a:spcPct val="100000"/>
+              </a:lnSpc>
+              <a:buNone/>
+            </a:pPr>
+            <a:r>
+              <a:rPr lang="th-TH" sz="1200" b="1" dirty="0">
+                <a:solidFill>
+                  <a:srgbClr val="5F5F5F"/>
+                </a:solidFill>
+                <a:latin typeface="+mn-lt"/>
+                <a:ea typeface="+mn-ea"/>
+                <a:cs typeface="+mn-cs"/>
+              </a:rPr>
+              <a:t>ด.12</a:t>
+            </a:r>
+          </a:p>
+        </p:txBody>
+      </p:sp>
+      <p:sp>
+        <p:nvSpPr>
+          <p:cNvPr id="25" name="Row 1 Label"/>
+          <p:cNvSpPr>
+            <a:spLocks noGrp="1"/>
+          </p:cNvSpPr>
+          <p:nvPr>
+            <p:ph type="body" idx="32"/>
+          </p:nvPr>
+        </p:nvSpPr>
+        <p:spPr>
+          <a:xfrm>
+            <a:off x="914400" y="2057400"/>
+            <a:ext cx="1737360" cy="388620"/>
+          </a:xfrm>
+          <a:prstGeom prst="rect">
+            <a:avLst/>
+          </a:prstGeom>
+        </p:spPr>
+        <p:txBody>
+          <a:bodyPr wrap="square" anchor="ctr" lIns="0" tIns="0" rIns="0" bIns="0" rtlCol="0"/>
+          <a:lstStyle>
+            <a:lvl1pPr algn="l" marL="0" indent="0">
+              <a:lnSpc>
+                <a:spcPct val="100000"/>
+              </a:lnSpc>
+              <a:buNone/>
+              <a:defRPr lang="th-TH" sz="1400" dirty="0">
+                <a:solidFill>
+                  <a:srgbClr val="333333"/>
+                </a:solidFill>
+                <a:latin typeface="+mn-lt"/>
+                <a:ea typeface="+mn-ea"/>
+                <a:cs typeface="+mn-cs"/>
+              </a:defRPr>
+            </a:lvl1pPr>
+          </a:lstStyle>
+          <a:p>
+            <a:pPr algn="l" marL="0" indent="0">
+              <a:lnSpc>
+                <a:spcPct val="100000"/>
+              </a:lnSpc>
+              <a:buNone/>
+            </a:pPr>
+            <a:r>
+              <a:rPr lang="th-TH" sz="1400" dirty="0">
+                <a:solidFill>
+                  <a:srgbClr val="333333"/>
+                </a:solidFill>
+                <a:latin typeface="+mn-lt"/>
+                <a:ea typeface="+mn-ea"/>
+                <a:cs typeface="+mn-cs"/>
+              </a:rPr>
+              <a:t>1. ชื่อเฟส</a:t>
+            </a:r>
+          </a:p>
+        </p:txBody>
+      </p:sp>
+      <p:sp>
+        <p:nvSpPr>
+          <p:cNvPr id="26" name="Row 1 Duration"/>
+          <p:cNvSpPr>
+            <a:spLocks noGrp="1"/>
+          </p:cNvSpPr>
+          <p:nvPr>
+            <p:ph type="body" idx="33"/>
+          </p:nvPr>
+        </p:nvSpPr>
+        <p:spPr>
+          <a:xfrm>
+            <a:off x="2651760" y="2057400"/>
+            <a:ext cx="731520" cy="388620"/>
+          </a:xfrm>
+          <a:prstGeom prst="rect">
+            <a:avLst/>
+          </a:prstGeom>
+        </p:spPr>
+        <p:txBody>
+          <a:bodyPr wrap="square" anchor="ctr" lIns="0" tIns="0" rIns="0" bIns="0" rtlCol="0"/>
+          <a:lstStyle>
+            <a:lvl1pPr algn="r" marL="0" indent="0">
+              <a:lnSpc>
+                <a:spcPct val="100000"/>
+              </a:lnSpc>
+              <a:buNone/>
+              <a:defRPr lang="th-TH" sz="1200" dirty="0">
+                <a:solidFill>
+                  <a:srgbClr val="5F5F5F"/>
+                </a:solidFill>
+                <a:latin typeface="+mn-lt"/>
+                <a:ea typeface="+mn-ea"/>
+                <a:cs typeface="+mn-cs"/>
+              </a:defRPr>
+            </a:lvl1pPr>
+          </a:lstStyle>
+          <a:p>
+            <a:pPr algn="r" marL="0" indent="0">
+              <a:lnSpc>
+                <a:spcPct val="100000"/>
+              </a:lnSpc>
+              <a:buNone/>
+            </a:pPr>
+            <a:r>
+              <a:rPr lang="th-TH" sz="1200" dirty="0">
+                <a:solidFill>
+                  <a:srgbClr val="5F5F5F"/>
+                </a:solidFill>
+                <a:latin typeface="+mn-lt"/>
+                <a:ea typeface="+mn-ea"/>
+                <a:cs typeface="+mn-cs"/>
+              </a:rPr>
+              <a:t>0 สัปดาห์</a:t>
+            </a:r>
+          </a:p>
+        </p:txBody>
+      </p:sp>
+      <p:sp>
+        <p:nvSpPr>
+          <p:cNvPr id="27" name="Row 2 Label"/>
+          <p:cNvSpPr>
+            <a:spLocks noGrp="1"/>
+          </p:cNvSpPr>
+          <p:nvPr>
+            <p:ph type="body" idx="34"/>
+          </p:nvPr>
+        </p:nvSpPr>
+        <p:spPr>
+          <a:xfrm>
+            <a:off x="914400" y="2446020"/>
+            <a:ext cx="1737360" cy="388620"/>
+          </a:xfrm>
+          <a:prstGeom prst="rect">
+            <a:avLst/>
+          </a:prstGeom>
+        </p:spPr>
+        <p:txBody>
+          <a:bodyPr wrap="square" anchor="ctr" lIns="0" tIns="0" rIns="0" bIns="0" rtlCol="0"/>
+          <a:lstStyle>
+            <a:lvl1pPr algn="l" marL="0" indent="0">
+              <a:lnSpc>
+                <a:spcPct val="100000"/>
+              </a:lnSpc>
+              <a:buNone/>
+              <a:defRPr lang="th-TH" sz="1400" dirty="0">
+                <a:solidFill>
+                  <a:srgbClr val="333333"/>
+                </a:solidFill>
+                <a:latin typeface="+mn-lt"/>
+                <a:ea typeface="+mn-ea"/>
+                <a:cs typeface="+mn-cs"/>
+              </a:defRPr>
+            </a:lvl1pPr>
+          </a:lstStyle>
+          <a:p>
+            <a:pPr algn="l" marL="0" indent="0">
+              <a:lnSpc>
+                <a:spcPct val="100000"/>
+              </a:lnSpc>
+              <a:buNone/>
+            </a:pPr>
+            <a:r>
+              <a:rPr lang="th-TH" sz="1400" dirty="0">
+                <a:solidFill>
+                  <a:srgbClr val="333333"/>
+                </a:solidFill>
+                <a:latin typeface="+mn-lt"/>
+                <a:ea typeface="+mn-ea"/>
+                <a:cs typeface="+mn-cs"/>
+              </a:rPr>
+              <a:t>2. ชื่อเฟส</a:t>
+            </a:r>
+          </a:p>
+        </p:txBody>
+      </p:sp>
+      <p:sp>
+        <p:nvSpPr>
+          <p:cNvPr id="28" name="Row 2 Duration"/>
+          <p:cNvSpPr>
+            <a:spLocks noGrp="1"/>
+          </p:cNvSpPr>
+          <p:nvPr>
+            <p:ph type="body" idx="35"/>
+          </p:nvPr>
+        </p:nvSpPr>
+        <p:spPr>
+          <a:xfrm>
+            <a:off x="2651760" y="2446020"/>
+            <a:ext cx="731520" cy="388620"/>
+          </a:xfrm>
+          <a:prstGeom prst="rect">
+            <a:avLst/>
+          </a:prstGeom>
+        </p:spPr>
+        <p:txBody>
+          <a:bodyPr wrap="square" anchor="ctr" lIns="0" tIns="0" rIns="0" bIns="0" rtlCol="0"/>
+          <a:lstStyle>
+            <a:lvl1pPr algn="r" marL="0" indent="0">
+              <a:lnSpc>
+                <a:spcPct val="100000"/>
+              </a:lnSpc>
+              <a:buNone/>
+              <a:defRPr lang="th-TH" sz="1200" dirty="0">
+                <a:solidFill>
+                  <a:srgbClr val="5F5F5F"/>
+                </a:solidFill>
+                <a:latin typeface="+mn-lt"/>
+                <a:ea typeface="+mn-ea"/>
+                <a:cs typeface="+mn-cs"/>
+              </a:defRPr>
+            </a:lvl1pPr>
+          </a:lstStyle>
+          <a:p>
+            <a:pPr algn="r" marL="0" indent="0">
+              <a:lnSpc>
+                <a:spcPct val="100000"/>
+              </a:lnSpc>
+              <a:buNone/>
+            </a:pPr>
+            <a:r>
+              <a:rPr lang="th-TH" sz="1200" dirty="0">
+                <a:solidFill>
+                  <a:srgbClr val="5F5F5F"/>
+                </a:solidFill>
+                <a:latin typeface="+mn-lt"/>
+                <a:ea typeface="+mn-ea"/>
+                <a:cs typeface="+mn-cs"/>
+              </a:rPr>
+              <a:t>0 สัปดาห์</a:t>
+            </a:r>
+          </a:p>
+        </p:txBody>
+      </p:sp>
+      <p:sp>
+        <p:nvSpPr>
+          <p:cNvPr id="29" name="Row 3 Label"/>
+          <p:cNvSpPr>
+            <a:spLocks noGrp="1"/>
+          </p:cNvSpPr>
+          <p:nvPr>
+            <p:ph type="body" idx="36"/>
+          </p:nvPr>
+        </p:nvSpPr>
+        <p:spPr>
+          <a:xfrm>
+            <a:off x="914400" y="2834640"/>
+            <a:ext cx="1737360" cy="388620"/>
+          </a:xfrm>
+          <a:prstGeom prst="rect">
+            <a:avLst/>
+          </a:prstGeom>
+        </p:spPr>
+        <p:txBody>
+          <a:bodyPr wrap="square" anchor="ctr" lIns="0" tIns="0" rIns="0" bIns="0" rtlCol="0"/>
+          <a:lstStyle>
+            <a:lvl1pPr algn="l" marL="0" indent="0">
+              <a:lnSpc>
+                <a:spcPct val="100000"/>
+              </a:lnSpc>
+              <a:buNone/>
+              <a:defRPr lang="th-TH" sz="1400" dirty="0">
+                <a:solidFill>
+                  <a:srgbClr val="333333"/>
+                </a:solidFill>
+                <a:latin typeface="+mn-lt"/>
+                <a:ea typeface="+mn-ea"/>
+                <a:cs typeface="+mn-cs"/>
+              </a:defRPr>
+            </a:lvl1pPr>
+          </a:lstStyle>
+          <a:p>
+            <a:pPr algn="l" marL="0" indent="0">
+              <a:lnSpc>
+                <a:spcPct val="100000"/>
+              </a:lnSpc>
+              <a:buNone/>
+            </a:pPr>
+            <a:r>
+              <a:rPr lang="th-TH" sz="1400" dirty="0">
+                <a:solidFill>
+                  <a:srgbClr val="333333"/>
+                </a:solidFill>
+                <a:latin typeface="+mn-lt"/>
+                <a:ea typeface="+mn-ea"/>
+                <a:cs typeface="+mn-cs"/>
+              </a:rPr>
+              <a:t>3. ชื่อเฟส</a:t>
+            </a:r>
+          </a:p>
+        </p:txBody>
+      </p:sp>
+      <p:sp>
+        <p:nvSpPr>
+          <p:cNvPr id="30" name="Row 3 Duration"/>
+          <p:cNvSpPr>
+            <a:spLocks noGrp="1"/>
+          </p:cNvSpPr>
+          <p:nvPr>
+            <p:ph type="body" idx="37"/>
+          </p:nvPr>
+        </p:nvSpPr>
+        <p:spPr>
+          <a:xfrm>
+            <a:off x="2651760" y="2834640"/>
+            <a:ext cx="731520" cy="388620"/>
+          </a:xfrm>
+          <a:prstGeom prst="rect">
+            <a:avLst/>
+          </a:prstGeom>
+        </p:spPr>
+        <p:txBody>
+          <a:bodyPr wrap="square" anchor="ctr" lIns="0" tIns="0" rIns="0" bIns="0" rtlCol="0"/>
+          <a:lstStyle>
+            <a:lvl1pPr algn="r" marL="0" indent="0">
+              <a:lnSpc>
+                <a:spcPct val="100000"/>
+              </a:lnSpc>
+              <a:buNone/>
+              <a:defRPr lang="th-TH" sz="1200" dirty="0">
+                <a:solidFill>
+                  <a:srgbClr val="5F5F5F"/>
+                </a:solidFill>
+                <a:latin typeface="+mn-lt"/>
+                <a:ea typeface="+mn-ea"/>
+                <a:cs typeface="+mn-cs"/>
+              </a:defRPr>
+            </a:lvl1pPr>
+          </a:lstStyle>
+          <a:p>
+            <a:pPr algn="r" marL="0" indent="0">
+              <a:lnSpc>
+                <a:spcPct val="100000"/>
+              </a:lnSpc>
+              <a:buNone/>
+            </a:pPr>
+            <a:r>
+              <a:rPr lang="th-TH" sz="1200" dirty="0">
+                <a:solidFill>
+                  <a:srgbClr val="5F5F5F"/>
+                </a:solidFill>
+                <a:latin typeface="+mn-lt"/>
+                <a:ea typeface="+mn-ea"/>
+                <a:cs typeface="+mn-cs"/>
+              </a:rPr>
+              <a:t>0 สัปดาห์</a:t>
+            </a:r>
+          </a:p>
+        </p:txBody>
+      </p:sp>
+      <p:sp>
+        <p:nvSpPr>
+          <p:cNvPr id="31" name="Row 4 Label"/>
+          <p:cNvSpPr>
+            <a:spLocks noGrp="1"/>
+          </p:cNvSpPr>
+          <p:nvPr>
+            <p:ph type="body" idx="38"/>
+          </p:nvPr>
+        </p:nvSpPr>
+        <p:spPr>
+          <a:xfrm>
+            <a:off x="914400" y="3223260"/>
+            <a:ext cx="1737360" cy="388620"/>
+          </a:xfrm>
+          <a:prstGeom prst="rect">
+            <a:avLst/>
+          </a:prstGeom>
+        </p:spPr>
+        <p:txBody>
+          <a:bodyPr wrap="square" anchor="ctr" lIns="0" tIns="0" rIns="0" bIns="0" rtlCol="0"/>
+          <a:lstStyle>
+            <a:lvl1pPr algn="l" marL="0" indent="0">
+              <a:lnSpc>
+                <a:spcPct val="100000"/>
+              </a:lnSpc>
+              <a:buNone/>
+              <a:defRPr lang="th-TH" sz="1400" dirty="0">
+                <a:solidFill>
+                  <a:srgbClr val="333333"/>
+                </a:solidFill>
+                <a:latin typeface="+mn-lt"/>
+                <a:ea typeface="+mn-ea"/>
+                <a:cs typeface="+mn-cs"/>
+              </a:defRPr>
+            </a:lvl1pPr>
+          </a:lstStyle>
+          <a:p>
+            <a:pPr algn="l" marL="0" indent="0">
+              <a:lnSpc>
+                <a:spcPct val="100000"/>
+              </a:lnSpc>
+              <a:buNone/>
+            </a:pPr>
+            <a:r>
+              <a:rPr lang="th-TH" sz="1400" dirty="0">
+                <a:solidFill>
+                  <a:srgbClr val="333333"/>
+                </a:solidFill>
+                <a:latin typeface="+mn-lt"/>
+                <a:ea typeface="+mn-ea"/>
+                <a:cs typeface="+mn-cs"/>
+              </a:rPr>
+              <a:t>4. ชื่อเฟส</a:t>
+            </a:r>
+          </a:p>
+        </p:txBody>
+      </p:sp>
+      <p:sp>
+        <p:nvSpPr>
+          <p:cNvPr id="32" name="Row 4 Duration"/>
+          <p:cNvSpPr>
+            <a:spLocks noGrp="1"/>
+          </p:cNvSpPr>
+          <p:nvPr>
+            <p:ph type="body" idx="39"/>
+          </p:nvPr>
+        </p:nvSpPr>
+        <p:spPr>
+          <a:xfrm>
+            <a:off x="2651760" y="3223260"/>
+            <a:ext cx="731520" cy="388620"/>
+          </a:xfrm>
+          <a:prstGeom prst="rect">
+            <a:avLst/>
+          </a:prstGeom>
+        </p:spPr>
+        <p:txBody>
+          <a:bodyPr wrap="square" anchor="ctr" lIns="0" tIns="0" rIns="0" bIns="0" rtlCol="0"/>
+          <a:lstStyle>
+            <a:lvl1pPr algn="r" marL="0" indent="0">
+              <a:lnSpc>
+                <a:spcPct val="100000"/>
+              </a:lnSpc>
+              <a:buNone/>
+              <a:defRPr lang="th-TH" sz="1200" dirty="0">
+                <a:solidFill>
+                  <a:srgbClr val="5F5F5F"/>
+                </a:solidFill>
+                <a:latin typeface="+mn-lt"/>
+                <a:ea typeface="+mn-ea"/>
+                <a:cs typeface="+mn-cs"/>
+              </a:defRPr>
+            </a:lvl1pPr>
+          </a:lstStyle>
+          <a:p>
+            <a:pPr algn="r" marL="0" indent="0">
+              <a:lnSpc>
+                <a:spcPct val="100000"/>
+              </a:lnSpc>
+              <a:buNone/>
+            </a:pPr>
+            <a:r>
+              <a:rPr lang="th-TH" sz="1200" dirty="0">
+                <a:solidFill>
+                  <a:srgbClr val="5F5F5F"/>
+                </a:solidFill>
+                <a:latin typeface="+mn-lt"/>
+                <a:ea typeface="+mn-ea"/>
+                <a:cs typeface="+mn-cs"/>
+              </a:rPr>
+              <a:t>0 สัปดาห์</a:t>
+            </a:r>
+          </a:p>
+        </p:txBody>
+      </p:sp>
+      <p:sp>
+        <p:nvSpPr>
+          <p:cNvPr id="33" name="Row 5 Label"/>
+          <p:cNvSpPr>
+            <a:spLocks noGrp="1"/>
+          </p:cNvSpPr>
+          <p:nvPr>
+            <p:ph type="body" idx="40"/>
+          </p:nvPr>
+        </p:nvSpPr>
+        <p:spPr>
+          <a:xfrm>
+            <a:off x="914400" y="3611880"/>
+            <a:ext cx="1737360" cy="388620"/>
+          </a:xfrm>
+          <a:prstGeom prst="rect">
+            <a:avLst/>
+          </a:prstGeom>
+        </p:spPr>
+        <p:txBody>
+          <a:bodyPr wrap="square" anchor="ctr" lIns="0" tIns="0" rIns="0" bIns="0" rtlCol="0"/>
+          <a:lstStyle>
+            <a:lvl1pPr algn="l" marL="0" indent="0">
+              <a:lnSpc>
+                <a:spcPct val="100000"/>
+              </a:lnSpc>
+              <a:buNone/>
+              <a:defRPr lang="th-TH" sz="1400" dirty="0">
+                <a:solidFill>
+                  <a:srgbClr val="333333"/>
+                </a:solidFill>
+                <a:latin typeface="+mn-lt"/>
+                <a:ea typeface="+mn-ea"/>
+                <a:cs typeface="+mn-cs"/>
+              </a:defRPr>
+            </a:lvl1pPr>
+          </a:lstStyle>
+          <a:p>
+            <a:pPr algn="l" marL="0" indent="0">
+              <a:lnSpc>
+                <a:spcPct val="100000"/>
+              </a:lnSpc>
+              <a:buNone/>
+            </a:pPr>
+            <a:r>
+              <a:rPr lang="th-TH" sz="1400" dirty="0">
+                <a:solidFill>
+                  <a:srgbClr val="333333"/>
+                </a:solidFill>
+                <a:latin typeface="+mn-lt"/>
+                <a:ea typeface="+mn-ea"/>
+                <a:cs typeface="+mn-cs"/>
+              </a:rPr>
+              <a:t>5. ชื่อเฟส</a:t>
+            </a:r>
+          </a:p>
+        </p:txBody>
+      </p:sp>
+      <p:sp>
+        <p:nvSpPr>
+          <p:cNvPr id="34" name="Row 5 Duration"/>
+          <p:cNvSpPr>
+            <a:spLocks noGrp="1"/>
+          </p:cNvSpPr>
+          <p:nvPr>
+            <p:ph type="body" idx="41"/>
+          </p:nvPr>
+        </p:nvSpPr>
+        <p:spPr>
+          <a:xfrm>
+            <a:off x="2651760" y="3611880"/>
+            <a:ext cx="731520" cy="388620"/>
+          </a:xfrm>
+          <a:prstGeom prst="rect">
+            <a:avLst/>
+          </a:prstGeom>
+        </p:spPr>
+        <p:txBody>
+          <a:bodyPr wrap="square" anchor="ctr" lIns="0" tIns="0" rIns="0" bIns="0" rtlCol="0"/>
+          <a:lstStyle>
+            <a:lvl1pPr algn="r" marL="0" indent="0">
+              <a:lnSpc>
+                <a:spcPct val="100000"/>
+              </a:lnSpc>
+              <a:buNone/>
+              <a:defRPr lang="th-TH" sz="1200" dirty="0">
+                <a:solidFill>
+                  <a:srgbClr val="5F5F5F"/>
+                </a:solidFill>
+                <a:latin typeface="+mn-lt"/>
+                <a:ea typeface="+mn-ea"/>
+                <a:cs typeface="+mn-cs"/>
+              </a:defRPr>
+            </a:lvl1pPr>
+          </a:lstStyle>
+          <a:p>
+            <a:pPr algn="r" marL="0" indent="0">
+              <a:lnSpc>
+                <a:spcPct val="100000"/>
+              </a:lnSpc>
+              <a:buNone/>
+            </a:pPr>
+            <a:r>
+              <a:rPr lang="th-TH" sz="1200" dirty="0">
+                <a:solidFill>
+                  <a:srgbClr val="5F5F5F"/>
+                </a:solidFill>
+                <a:latin typeface="+mn-lt"/>
+                <a:ea typeface="+mn-ea"/>
+                <a:cs typeface="+mn-cs"/>
+              </a:rPr>
+              <a:t>0 สัปดาห์</a:t>
+            </a:r>
+          </a:p>
+        </p:txBody>
+      </p:sp>
+      <p:sp>
+        <p:nvSpPr>
+          <p:cNvPr id="35" name="Row 6 Label"/>
+          <p:cNvSpPr>
+            <a:spLocks noGrp="1"/>
+          </p:cNvSpPr>
+          <p:nvPr>
+            <p:ph type="body" idx="42"/>
+          </p:nvPr>
+        </p:nvSpPr>
+        <p:spPr>
+          <a:xfrm>
+            <a:off x="914400" y="4000500"/>
+            <a:ext cx="1737360" cy="388620"/>
+          </a:xfrm>
+          <a:prstGeom prst="rect">
+            <a:avLst/>
+          </a:prstGeom>
+        </p:spPr>
+        <p:txBody>
+          <a:bodyPr wrap="square" anchor="ctr" lIns="0" tIns="0" rIns="0" bIns="0" rtlCol="0"/>
+          <a:lstStyle>
+            <a:lvl1pPr algn="l" marL="0" indent="0">
+              <a:lnSpc>
+                <a:spcPct val="100000"/>
+              </a:lnSpc>
+              <a:buNone/>
+              <a:defRPr lang="th-TH" sz="1400" dirty="0">
+                <a:solidFill>
+                  <a:srgbClr val="333333"/>
+                </a:solidFill>
+                <a:latin typeface="+mn-lt"/>
+                <a:ea typeface="+mn-ea"/>
+                <a:cs typeface="+mn-cs"/>
+              </a:defRPr>
+            </a:lvl1pPr>
+          </a:lstStyle>
+          <a:p>
+            <a:pPr algn="l" marL="0" indent="0">
+              <a:lnSpc>
+                <a:spcPct val="100000"/>
+              </a:lnSpc>
+              <a:buNone/>
+            </a:pPr>
+            <a:r>
+              <a:rPr lang="th-TH" sz="1400" dirty="0">
+                <a:solidFill>
+                  <a:srgbClr val="333333"/>
+                </a:solidFill>
+                <a:latin typeface="+mn-lt"/>
+                <a:ea typeface="+mn-ea"/>
+                <a:cs typeface="+mn-cs"/>
+              </a:rPr>
+              <a:t>6. ชื่อเฟส</a:t>
+            </a:r>
+          </a:p>
+        </p:txBody>
+      </p:sp>
+      <p:sp>
+        <p:nvSpPr>
+          <p:cNvPr id="36" name="Row 6 Duration"/>
+          <p:cNvSpPr>
+            <a:spLocks noGrp="1"/>
+          </p:cNvSpPr>
+          <p:nvPr>
+            <p:ph type="body" idx="43"/>
+          </p:nvPr>
+        </p:nvSpPr>
+        <p:spPr>
+          <a:xfrm>
+            <a:off x="2651760" y="4000500"/>
+            <a:ext cx="731520" cy="388620"/>
+          </a:xfrm>
+          <a:prstGeom prst="rect">
+            <a:avLst/>
+          </a:prstGeom>
+        </p:spPr>
+        <p:txBody>
+          <a:bodyPr wrap="square" anchor="ctr" lIns="0" tIns="0" rIns="0" bIns="0" rtlCol="0"/>
+          <a:lstStyle>
+            <a:lvl1pPr algn="r" marL="0" indent="0">
+              <a:lnSpc>
+                <a:spcPct val="100000"/>
+              </a:lnSpc>
+              <a:buNone/>
+              <a:defRPr lang="th-TH" sz="1200" dirty="0">
+                <a:solidFill>
+                  <a:srgbClr val="5F5F5F"/>
+                </a:solidFill>
+                <a:latin typeface="+mn-lt"/>
+                <a:ea typeface="+mn-ea"/>
+                <a:cs typeface="+mn-cs"/>
+              </a:defRPr>
+            </a:lvl1pPr>
+          </a:lstStyle>
+          <a:p>
+            <a:pPr algn="r" marL="0" indent="0">
+              <a:lnSpc>
+                <a:spcPct val="100000"/>
+              </a:lnSpc>
+              <a:buNone/>
+            </a:pPr>
+            <a:r>
+              <a:rPr lang="th-TH" sz="1200" dirty="0">
+                <a:solidFill>
+                  <a:srgbClr val="5F5F5F"/>
+                </a:solidFill>
+                <a:latin typeface="+mn-lt"/>
+                <a:ea typeface="+mn-ea"/>
+                <a:cs typeface="+mn-cs"/>
+              </a:rPr>
+              <a:t>0 สัปดาห์</a:t>
+            </a:r>
+          </a:p>
+        </p:txBody>
+      </p:sp>
+      <p:sp>
+        <p:nvSpPr>
+          <p:cNvPr id="37" name="Row 7 Label"/>
+          <p:cNvSpPr>
+            <a:spLocks noGrp="1"/>
+          </p:cNvSpPr>
+          <p:nvPr>
+            <p:ph type="body" idx="44"/>
+          </p:nvPr>
+        </p:nvSpPr>
+        <p:spPr>
+          <a:xfrm>
+            <a:off x="914400" y="4389120"/>
+            <a:ext cx="1737360" cy="388620"/>
+          </a:xfrm>
+          <a:prstGeom prst="rect">
+            <a:avLst/>
+          </a:prstGeom>
+        </p:spPr>
+        <p:txBody>
+          <a:bodyPr wrap="square" anchor="ctr" lIns="0" tIns="0" rIns="0" bIns="0" rtlCol="0"/>
+          <a:lstStyle>
+            <a:lvl1pPr algn="l" marL="0" indent="0">
+              <a:lnSpc>
+                <a:spcPct val="100000"/>
+              </a:lnSpc>
+              <a:buNone/>
+              <a:defRPr lang="th-TH" sz="1400" dirty="0">
+                <a:solidFill>
+                  <a:srgbClr val="333333"/>
+                </a:solidFill>
+                <a:latin typeface="+mn-lt"/>
+                <a:ea typeface="+mn-ea"/>
+                <a:cs typeface="+mn-cs"/>
+              </a:defRPr>
+            </a:lvl1pPr>
+          </a:lstStyle>
+          <a:p>
+            <a:pPr algn="l" marL="0" indent="0">
+              <a:lnSpc>
+                <a:spcPct val="100000"/>
+              </a:lnSpc>
+              <a:buNone/>
+            </a:pPr>
+            <a:r>
+              <a:rPr lang="th-TH" sz="1400" dirty="0">
+                <a:solidFill>
+                  <a:srgbClr val="333333"/>
+                </a:solidFill>
+                <a:latin typeface="+mn-lt"/>
+                <a:ea typeface="+mn-ea"/>
+                <a:cs typeface="+mn-cs"/>
+              </a:rPr>
+              <a:t>7. ชื่อเฟส</a:t>
+            </a:r>
+          </a:p>
+        </p:txBody>
+      </p:sp>
+      <p:sp>
+        <p:nvSpPr>
+          <p:cNvPr id="38" name="Row 7 Duration"/>
+          <p:cNvSpPr>
+            <a:spLocks noGrp="1"/>
+          </p:cNvSpPr>
+          <p:nvPr>
+            <p:ph type="body" idx="45"/>
+          </p:nvPr>
+        </p:nvSpPr>
+        <p:spPr>
+          <a:xfrm>
+            <a:off x="2651760" y="4389120"/>
+            <a:ext cx="731520" cy="388620"/>
+          </a:xfrm>
+          <a:prstGeom prst="rect">
+            <a:avLst/>
+          </a:prstGeom>
+        </p:spPr>
+        <p:txBody>
+          <a:bodyPr wrap="square" anchor="ctr" lIns="0" tIns="0" rIns="0" bIns="0" rtlCol="0"/>
+          <a:lstStyle>
+            <a:lvl1pPr algn="r" marL="0" indent="0">
+              <a:lnSpc>
+                <a:spcPct val="100000"/>
+              </a:lnSpc>
+              <a:buNone/>
+              <a:defRPr lang="th-TH" sz="1200" dirty="0">
+                <a:solidFill>
+                  <a:srgbClr val="5F5F5F"/>
+                </a:solidFill>
+                <a:latin typeface="+mn-lt"/>
+                <a:ea typeface="+mn-ea"/>
+                <a:cs typeface="+mn-cs"/>
+              </a:defRPr>
+            </a:lvl1pPr>
+          </a:lstStyle>
+          <a:p>
+            <a:pPr algn="r" marL="0" indent="0">
+              <a:lnSpc>
+                <a:spcPct val="100000"/>
+              </a:lnSpc>
+              <a:buNone/>
+            </a:pPr>
+            <a:r>
+              <a:rPr lang="th-TH" sz="1200" dirty="0">
+                <a:solidFill>
+                  <a:srgbClr val="5F5F5F"/>
+                </a:solidFill>
+                <a:latin typeface="+mn-lt"/>
+                <a:ea typeface="+mn-ea"/>
+                <a:cs typeface="+mn-cs"/>
+              </a:rPr>
+              <a:t>0 สัปดาห์</a:t>
+            </a:r>
+          </a:p>
+        </p:txBody>
+      </p:sp>
+      <p:sp>
+        <p:nvSpPr>
+          <p:cNvPr id="39" name="Row 8 Label"/>
+          <p:cNvSpPr>
+            <a:spLocks noGrp="1"/>
+          </p:cNvSpPr>
+          <p:nvPr>
+            <p:ph type="body" idx="46"/>
+          </p:nvPr>
+        </p:nvSpPr>
+        <p:spPr>
+          <a:xfrm>
+            <a:off x="914400" y="4777740"/>
+            <a:ext cx="1737360" cy="388620"/>
+          </a:xfrm>
+          <a:prstGeom prst="rect">
+            <a:avLst/>
+          </a:prstGeom>
+        </p:spPr>
+        <p:txBody>
+          <a:bodyPr wrap="square" anchor="ctr" lIns="0" tIns="0" rIns="0" bIns="0" rtlCol="0"/>
+          <a:lstStyle>
+            <a:lvl1pPr algn="l" marL="0" indent="0">
+              <a:lnSpc>
+                <a:spcPct val="100000"/>
+              </a:lnSpc>
+              <a:buNone/>
+              <a:defRPr lang="th-TH" sz="1400" dirty="0">
+                <a:solidFill>
+                  <a:srgbClr val="333333"/>
+                </a:solidFill>
+                <a:latin typeface="+mn-lt"/>
+                <a:ea typeface="+mn-ea"/>
+                <a:cs typeface="+mn-cs"/>
+              </a:defRPr>
+            </a:lvl1pPr>
+          </a:lstStyle>
+          <a:p>
+            <a:pPr algn="l" marL="0" indent="0">
+              <a:lnSpc>
+                <a:spcPct val="100000"/>
+              </a:lnSpc>
+              <a:buNone/>
+            </a:pPr>
+            <a:r>
+              <a:rPr lang="th-TH" sz="1400" dirty="0">
+                <a:solidFill>
+                  <a:srgbClr val="333333"/>
+                </a:solidFill>
+                <a:latin typeface="+mn-lt"/>
+                <a:ea typeface="+mn-ea"/>
+                <a:cs typeface="+mn-cs"/>
+              </a:rPr>
+              <a:t>8. ชื่อเฟส</a:t>
+            </a:r>
+          </a:p>
+        </p:txBody>
+      </p:sp>
+      <p:sp>
+        <p:nvSpPr>
+          <p:cNvPr id="40" name="Row 8 Duration"/>
+          <p:cNvSpPr>
+            <a:spLocks noGrp="1"/>
+          </p:cNvSpPr>
+          <p:nvPr>
+            <p:ph type="body" idx="47"/>
+          </p:nvPr>
+        </p:nvSpPr>
+        <p:spPr>
+          <a:xfrm>
+            <a:off x="2651760" y="4777740"/>
+            <a:ext cx="731520" cy="388620"/>
+          </a:xfrm>
+          <a:prstGeom prst="rect">
+            <a:avLst/>
+          </a:prstGeom>
+        </p:spPr>
+        <p:txBody>
+          <a:bodyPr wrap="square" anchor="ctr" lIns="0" tIns="0" rIns="0" bIns="0" rtlCol="0"/>
+          <a:lstStyle>
+            <a:lvl1pPr algn="r" marL="0" indent="0">
+              <a:lnSpc>
+                <a:spcPct val="100000"/>
+              </a:lnSpc>
+              <a:buNone/>
+              <a:defRPr lang="th-TH" sz="1200" dirty="0">
+                <a:solidFill>
+                  <a:srgbClr val="5F5F5F"/>
+                </a:solidFill>
+                <a:latin typeface="+mn-lt"/>
+                <a:ea typeface="+mn-ea"/>
+                <a:cs typeface="+mn-cs"/>
+              </a:defRPr>
+            </a:lvl1pPr>
+          </a:lstStyle>
+          <a:p>
+            <a:pPr algn="r" marL="0" indent="0">
+              <a:lnSpc>
+                <a:spcPct val="100000"/>
+              </a:lnSpc>
+              <a:buNone/>
+            </a:pPr>
+            <a:r>
+              <a:rPr lang="th-TH" sz="1200" dirty="0">
+                <a:solidFill>
+                  <a:srgbClr val="5F5F5F"/>
+                </a:solidFill>
+                <a:latin typeface="+mn-lt"/>
+                <a:ea typeface="+mn-ea"/>
+                <a:cs typeface="+mn-cs"/>
+              </a:rPr>
+              <a:t>0 สัปดาห์</a:t>
+            </a:r>
+          </a:p>
+        </p:txBody>
+      </p:sp>
+      <p:sp>
+        <p:nvSpPr>
+          <p:cNvPr id="41" name="Key"/>
+          <p:cNvSpPr>
+            <a:spLocks noGrp="1"/>
+          </p:cNvSpPr>
+          <p:nvPr>
+            <p:ph type="body" idx="2"/>
+          </p:nvPr>
+        </p:nvSpPr>
+        <p:spPr>
+          <a:xfrm>
+            <a:off x="914400" y="5257800"/>
+            <a:ext cx="5181600" cy="274320"/>
+          </a:xfrm>
+          <a:prstGeom prst="rect">
+            <a:avLst/>
+          </a:prstGeom>
+        </p:spPr>
+        <p:txBody>
+          <a:bodyPr wrap="square" anchor="t" lIns="0" tIns="0" rIns="0" bIns="0" rtlCol="0"/>
+          <a:lstStyle>
+            <a:lvl1pPr algn="l" marL="0" indent="0">
+              <a:lnSpc>
+                <a:spcPct val="130000"/>
+              </a:lnSpc>
+              <a:buNone/>
+              <a:defRPr lang="th-TH" sz="1000" dirty="0">
+                <a:solidFill>
+                  <a:srgbClr val="5F5F5F"/>
+                </a:solidFill>
+                <a:latin typeface="+mn-lt"/>
+                <a:ea typeface="+mn-ea"/>
+                <a:cs typeface="+mn-cs"/>
+              </a:defRPr>
+            </a:lvl1pPr>
+          </a:lstStyle>
+          <a:p>
+            <a:pPr algn="l" marL="0" indent="0">
+              <a:lnSpc>
+                <a:spcPct val="130000"/>
+              </a:lnSpc>
+              <a:buNone/>
+            </a:pPr>
+            <a:r>
+              <a:rPr lang="th-TH" sz="1000" dirty="0">
+                <a:solidFill>
+                  <a:srgbClr val="5F5F5F"/>
+                </a:solidFill>
+                <a:latin typeface="+mn-lt"/>
+                <a:ea typeface="+mn-ea"/>
+                <a:cs typeface="+mn-cs"/>
+              </a:rPr>
+              <a:t>■ ช่วงงาน   ◆ ส่งมอบ / ตรวจรับ</a:t>
+            </a:r>
+          </a:p>
+        </p:txBody>
+      </p:sp>
+      <p:sp>
+        <p:nvSpPr>
+          <p:cNvPr id="42" name="Assumption"/>
+          <p:cNvSpPr>
+            <a:spLocks noGrp="1"/>
+          </p:cNvSpPr>
+          <p:nvPr>
+            <p:ph type="body" idx="3"/>
+          </p:nvPr>
+        </p:nvSpPr>
+        <p:spPr>
+          <a:xfrm>
+            <a:off x="6096000" y="5257800"/>
+            <a:ext cx="5181600" cy="274320"/>
+          </a:xfrm>
+          <a:prstGeom prst="rect">
+            <a:avLst/>
+          </a:prstGeom>
+        </p:spPr>
+        <p:txBody>
+          <a:bodyPr wrap="square" anchor="t" lIns="0" tIns="0" rIns="0" bIns="0" rtlCol="0"/>
+          <a:lstStyle>
+            <a:lvl1pPr algn="r" marL="0" indent="0">
+              <a:lnSpc>
+                <a:spcPct val="130000"/>
+              </a:lnSpc>
+              <a:buNone/>
+              <a:defRPr lang="th-TH" sz="1000" dirty="0">
+                <a:solidFill>
+                  <a:srgbClr val="5F5F5F"/>
+                </a:solidFill>
+                <a:latin typeface="+mn-lt"/>
+                <a:ea typeface="+mn-ea"/>
+                <a:cs typeface="+mn-cs"/>
+              </a:defRPr>
+            </a:lvl1pPr>
+          </a:lstStyle>
+          <a:p>
+            <a:pPr algn="r" marL="0" indent="0">
+              <a:lnSpc>
+                <a:spcPct val="130000"/>
+              </a:lnSpc>
+              <a:buNone/>
+            </a:pPr>
+            <a:r>
+              <a:rPr lang="th-TH" sz="1000" dirty="0">
+                <a:solidFill>
+                  <a:srgbClr val="5F5F5F"/>
+                </a:solidFill>
+                <a:latin typeface="+mn-lt"/>
+                <a:ea typeface="+mn-ea"/>
+                <a:cs typeface="+mn-cs"/>
+              </a:rPr>
+              <a:t>นับจากวันลงนามสัญญา</a:t>
+            </a:r>
+          </a:p>
+        </p:txBody>
+      </p:sp>
+      <p:sp>
+        <p:nvSpPr>
+          <p:cNvPr id="43" name="Takeaway Band"/>
+          <p:cNvSpPr/>
+          <p:nvPr/>
+        </p:nvSpPr>
+        <p:spPr>
+          <a:xfrm>
+            <a:off x="914400" y="5623560"/>
+            <a:ext cx="10363200" cy="411480"/>
+          </a:xfrm>
+          <a:prstGeom prst="rect">
+            <a:avLst/>
+          </a:prstGeom>
+          <a:solidFill>
+            <a:srgbClr val="E8F6F5"/>
+          </a:solidFill>
+          <a:ln>
+            <a:noFill/>
+          </a:ln>
+        </p:spPr>
+        <p:txBody>
+          <a:bodyPr/>
+          <a:lstStyle/>
+          <a:p>
+            <a:endParaRPr lang="th-TH"/>
+          </a:p>
+        </p:txBody>
+      </p:sp>
+      <p:sp>
+        <p:nvSpPr>
+          <p:cNvPr id="44" name="Takeaway Label"/>
+          <p:cNvSpPr>
+            <a:spLocks noGrp="1"/>
+          </p:cNvSpPr>
+          <p:nvPr>
+            <p:ph type="body" idx="4"/>
+          </p:nvPr>
+        </p:nvSpPr>
+        <p:spPr>
+          <a:xfrm>
+            <a:off x="1097280" y="5684520"/>
+            <a:ext cx="1828800" cy="289560"/>
+          </a:xfrm>
+          <a:prstGeom prst="rect">
+            <a:avLst/>
+          </a:prstGeom>
+        </p:spPr>
+        <p:txBody>
+          <a:bodyPr wrap="square" anchor="ctr" lIns="0" tIns="0" rIns="0" bIns="0" rtlCol="0"/>
+          <a:lstStyle>
+            <a:lvl1pPr algn="l" marL="0" indent="0">
+              <a:lnSpc>
+                <a:spcPct val="100000"/>
+              </a:lnSpc>
+              <a:buNone/>
+              <a:defRPr lang="th-TH" sz="1200" b="1" spc="120" dirty="0">
+                <a:solidFill>
+                  <a:srgbClr val="216B7F"/>
+                </a:solidFill>
+                <a:latin typeface="+mn-lt"/>
+                <a:ea typeface="+mn-ea"/>
+                <a:cs typeface="+mn-cs"/>
+              </a:defRPr>
+            </a:lvl1pPr>
+          </a:lstStyle>
+          <a:p>
+            <a:pPr algn="l" marL="0" indent="0">
+              <a:lnSpc>
+                <a:spcPct val="100000"/>
+              </a:lnSpc>
+              <a:buNone/>
+            </a:pPr>
+            <a:r>
+              <a:rPr lang="th-TH" sz="1200" b="1" spc="120" dirty="0">
+                <a:solidFill>
+                  <a:srgbClr val="216B7F"/>
+                </a:solidFill>
+                <a:latin typeface="+mn-lt"/>
+                <a:ea typeface="+mn-ea"/>
+                <a:cs typeface="+mn-cs"/>
+              </a:rPr>
+              <a:t>สรุป</a:t>
+            </a:r>
+          </a:p>
+        </p:txBody>
+      </p:sp>
+      <p:sp>
+        <p:nvSpPr>
+          <p:cNvPr id="45" name="Takeaway Copy"/>
+          <p:cNvSpPr>
+            <a:spLocks noGrp="1"/>
+          </p:cNvSpPr>
+          <p:nvPr>
+            <p:ph type="body" idx="5"/>
+          </p:nvPr>
+        </p:nvSpPr>
+        <p:spPr>
+          <a:xfrm>
+            <a:off x="2926080" y="5684520"/>
+            <a:ext cx="8168640" cy="289560"/>
+          </a:xfrm>
+          <a:prstGeom prst="rect">
+            <a:avLst/>
+          </a:prstGeom>
+        </p:spPr>
+        <p:txBody>
+          <a:bodyPr wrap="square" anchor="ctr" lIns="0" tIns="0" rIns="0" bIns="0" rtlCol="0"/>
+          <a:lstStyle>
+            <a:lvl1pPr algn="l" marL="0" indent="0">
+              <a:lnSpc>
+                <a:spcPct val="100000"/>
+              </a:lnSpc>
+              <a:buNone/>
+              <a:defRPr lang="th-TH" sz="1400" dirty="0">
+                <a:solidFill>
+                  <a:srgbClr val="333333"/>
+                </a:solidFill>
+                <a:latin typeface="+mn-lt"/>
+                <a:ea typeface="+mn-ea"/>
+                <a:cs typeface="+mn-cs"/>
+              </a:defRPr>
+            </a:lvl1pPr>
+          </a:lstStyle>
+          <a:p>
+            <a:pPr algn="l" marL="0" indent="0">
+              <a:lnSpc>
+                <a:spcPct val="100000"/>
+              </a:lnSpc>
+              <a:buNone/>
+            </a:pPr>
+            <a:r>
+              <a:rPr lang="th-TH" sz="1400" dirty="0">
+                <a:solidFill>
+                  <a:srgbClr val="333333"/>
+                </a:solidFill>
+                <a:latin typeface="+mn-lt"/>
+                <a:ea typeface="+mn-ea"/>
+                <a:cs typeface="+mn-cs"/>
+              </a:rPr>
+              <a:t>ประเด็นสรุปหนึ่งบรรทัด</a:t>
+            </a:r>
+          </a:p>
+        </p:txBody>
+      </p:sp>
+      <p:sp>
+        <p:nvSpPr>
+          <p:cNvPr id="90" name="Footer Rule"/>
+          <p:cNvSpPr/>
+          <p:nvPr/>
+        </p:nvSpPr>
+        <p:spPr>
+          <a:xfrm>
+            <a:off x="914400" y="6172200"/>
+            <a:ext cx="10363200" cy="12700"/>
+          </a:xfrm>
+          <a:prstGeom prst="rect">
+            <a:avLst/>
+          </a:prstGeom>
+          <a:solidFill>
+            <a:srgbClr val="E5E5E5"/>
+          </a:solidFill>
+          <a:ln>
+            <a:noFill/>
+          </a:ln>
+        </p:spPr>
+        <p:txBody>
+          <a:bodyPr/>
+          <a:lstStyle/>
+          <a:p>
+            <a:endParaRPr lang="th-TH"/>
+          </a:p>
+        </p:txBody>
+      </p:sp>
+      <p:sp>
+        <p:nvSpPr>
+          <p:cNvPr id="91" name="Date Placeholder"/>
+          <p:cNvSpPr>
+            <a:spLocks noGrp="1"/>
+          </p:cNvSpPr>
+          <p:nvPr>
+            <p:ph type="dt" idx="10"/>
+          </p:nvPr>
+        </p:nvSpPr>
+        <p:spPr>
+          <a:xfrm>
+            <a:off x="914400" y="6309360"/>
+            <a:ext cx="2743200" cy="274320"/>
+          </a:xfrm>
+          <a:prstGeom prst="rect">
+            <a:avLst/>
+          </a:prstGeom>
+        </p:spPr>
+        <p:txBody>
+          <a:bodyPr wrap="square" anchor="ctr" lIns="0" tIns="0" rIns="0" bIns="0" rtlCol="0"/>
+          <a:lstStyle>
+            <a:lvl1pPr algn="l" marL="0" indent="0">
+              <a:lnSpc>
+                <a:spcPct val="100000"/>
+              </a:lnSpc>
+              <a:buNone/>
+              <a:defRPr lang="th-TH" sz="1000" dirty="0">
+                <a:solidFill>
+                  <a:srgbClr val="5F5F5F"/>
+                </a:solidFill>
+                <a:latin typeface="+mn-lt"/>
+                <a:ea typeface="+mn-ea"/>
+                <a:cs typeface="+mn-cs"/>
+              </a:defRPr>
+            </a:lvl1pPr>
+          </a:lstStyle>
+          <a:p>
+            <a:pPr algn="l" marL="0" indent="0">
+              <a:lnSpc>
+                <a:spcPct val="100000"/>
+              </a:lnSpc>
+              <a:buNone/>
+            </a:pPr>
+            <a:endParaRPr lang="th-TH" sz="1000"/>
+          </a:p>
+        </p:txBody>
+      </p:sp>
+      <p:sp>
+        <p:nvSpPr>
+          <p:cNvPr id="92" name="Footer Placeholder"/>
+          <p:cNvSpPr>
+            <a:spLocks noGrp="1"/>
+          </p:cNvSpPr>
+          <p:nvPr>
+            <p:ph type="ftr" idx="11"/>
+          </p:nvPr>
+        </p:nvSpPr>
+        <p:spPr>
+          <a:xfrm>
+            <a:off x="4572000" y="6309360"/>
+            <a:ext cx="3657600" cy="274320"/>
+          </a:xfrm>
+          <a:prstGeom prst="rect">
+            <a:avLst/>
+          </a:prstGeom>
+        </p:spPr>
+        <p:txBody>
+          <a:bodyPr wrap="square" anchor="ctr" lIns="0" tIns="0" rIns="0" bIns="0" rtlCol="0"/>
+          <a:lstStyle>
+            <a:lvl1pPr algn="ctr" marL="0" indent="0">
+              <a:lnSpc>
+                <a:spcPct val="100000"/>
+              </a:lnSpc>
+              <a:buNone/>
+              <a:defRPr lang="th-TH" sz="1000" dirty="0">
+                <a:solidFill>
+                  <a:srgbClr val="5F5F5F"/>
+                </a:solidFill>
+                <a:latin typeface="+mn-lt"/>
+                <a:ea typeface="+mn-ea"/>
+                <a:cs typeface="+mn-cs"/>
+              </a:defRPr>
+            </a:lvl1pPr>
+          </a:lstStyle>
+          <a:p>
+            <a:pPr algn="ctr" marL="0" indent="0">
+              <a:lnSpc>
+                <a:spcPct val="100000"/>
+              </a:lnSpc>
+              <a:buNone/>
+            </a:pPr>
+            <a:endParaRPr lang="th-TH" sz="1000"/>
+          </a:p>
+        </p:txBody>
+      </p:sp>
+      <p:sp>
+        <p:nvSpPr>
+          <p:cNvPr id="93" name="Slide Number Placeholder"/>
+          <p:cNvSpPr>
+            <a:spLocks noGrp="1"/>
+          </p:cNvSpPr>
+          <p:nvPr>
+            <p:ph type="sldNum" sz="quarter" idx="12"/>
+          </p:nvPr>
+        </p:nvSpPr>
+        <p:spPr>
+          <a:xfrm>
+            <a:off x="9906000" y="6309360"/>
+            <a:ext cx="1371600" cy="274320"/>
+          </a:xfrm>
+          <a:prstGeom prst="rect">
+            <a:avLst/>
+          </a:prstGeom>
+        </p:spPr>
+        <p:txBody>
+          <a:bodyPr anchor="ctr"/>
+          <a:lstStyle>
+            <a:lvl1pPr algn="r" marL="0" indent="0">
+              <a:lnSpc>
+                <a:spcPct val="100000"/>
+              </a:lnSpc>
+              <a:buNone/>
+              <a:defRPr lang="th-TH" sz="1000" dirty="0">
+                <a:solidFill>
+                  <a:srgbClr val="5F5F5F"/>
+                </a:solidFill>
+                <a:latin typeface="+mn-lt"/>
+                <a:ea typeface="+mn-ea"/>
+                <a:cs typeface="+mn-cs"/>
+              </a:defRPr>
+            </a:lvl1pPr>
+          </a:lstStyle>
+          <a:p>
+            <a:pPr algn="r" marL="0" indent="0">
+              <a:buNone/>
+            </a:pPr>
+            <a:fld id="{B7E3A1C2-4F5D-4A88-9C1E-6D2F0A93B451}" type="slidenum">
+              <a:rPr lang="th-TH" sz="1000">
+                <a:solidFill>
+                  <a:srgbClr val="5F5F5F"/>
+                </a:solidFill>
+                <a:latin typeface="+mn-lt"/>
+                <a:cs typeface="+mn-cs"/>
+              </a:rPr>
+              <a:t>2</a:t>
+            </a:fld>
+            <a:endParaRPr lang="th-TH" sz="1000"/>
+          </a:p>
+        </p:txBody>
+      </p:sp>
+      <p:pic>
+        <p:nvPicPr>
+          <p:cNvPr id="94" name="NCT Mark"/>
+          <p:cNvPicPr>
+            <a:picLocks noChangeAspect="1"/>
+          </p:cNvPicPr>
+          <p:nvPr/>
+        </p:nvPicPr>
+        <p:blipFill>
+          <a:blip r:embed="rId2"/>
+          <a:stretch>
+            <a:fillRect/>
+          </a:stretch>
+        </p:blipFill>
+        <p:spPr>
+          <a:xfrm>
+            <a:off x="9494520" y="6289360"/>
+            <a:ext cx="274320" cy="174498"/>
+          </a:xfrm>
+          <a:prstGeom prst="rect">
+            <a:avLst/>
+          </a:prstGeom>
+        </p:spPr>
+      </p:pic>
+    </p:spTree>
+  </p:cSld>
+  <p:clrMapOvr>
+    <a:masterClrMapping/>
+  </p:clrMapOvr>
+</p:sldLayout>
+</file>
+
 <file path=ppt/slideLayouts/slideLayout3.xml><?xml version="1.0" encoding="utf-8"?>
 <p:sldLayout xmlns:a="http://schemas.openxmlformats.org/drawingml/2006/main" xmlns:r="http://schemas.openxmlformats.org/officeDocument/2006/relationships" xmlns:p="http://schemas.openxmlformats.org/presentationml/2006/main" type="obj" showMasterSp="0" preserve="1">
   <p:cSld name="03 Title and Content">
@@ -17243,7 +19787,7 @@
           <p:nvPr/>
         </p:nvPicPr>
         <p:blipFill>
-          <a:blip r:embed="rId22"/>
+          <a:blip r:embed="rId23"/>
           <a:stretch>
             <a:fillRect/>
           </a:stretch>
@@ -17282,6 +19826,7 @@
     <p:sldLayoutId id="2147483666" r:id="rId18"/>
     <p:sldLayoutId id="2147483667" r:id="rId19"/>
     <p:sldLayoutId id="2147483668" r:id="rId20"/>
+    <p:sldLayoutId id="2147483669" r:id="rId21"/>
   </p:sldLayoutIdLst>
   <p:txStyles>
     <p:titleStyle>
@@ -21423,19 +23968,39 @@
             <a:pPr/>
             <a:r>
               <a:rPr lang="th-TH" dirty="0"/>
-              <a:t>5. Implementation Stage</a:t>
-            </a:r>
-          </a:p>
-        </p:txBody>
-      </p:sp>
-      <p:sp>
-        <p:nvSpPr>
-          <p:cNvPr id="3" name="KAL"/>
-          <p:cNvSpPr>
-            <a:spLocks noGrp="1"/>
-          </p:cNvSpPr>
-          <p:nvPr>
-            <p:ph type="body" idx="1"/>
+              <a:t>แผนงาน 12 เดือน ขึ้นระบบต้นเดือนที่ 7</a:t>
+            </a:r>
+          </a:p>
+        </p:txBody>
+      </p:sp>
+      <p:graphicFrame>
+        <p:nvGraphicFramePr>
+          <p:cNvPr id="3" name="Plan"/>
+          <p:cNvGraphicFramePr>
+            <a:graphicFrameLocks noGrp="1"/>
+          </p:cNvGraphicFramePr>
+          <p:nvPr>
+            <p:ph type="chart" idx="1"/>
+          </p:nvPr>
+        </p:nvGraphicFramePr>
+        <p:xfrm>
+          <a:off x="3566160" y="2057400"/>
+          <a:ext cx="7711440" cy="3108960"/>
+        </p:xfrm>
+        <a:graphic>
+          <a:graphicData uri="http://schemas.openxmlformats.org/drawingml/2006/chart">
+            <c:chart xmlns:c="http://schemas.openxmlformats.org/drawingml/2006/chart" r:id="rId2"/>
+          </a:graphicData>
+        </a:graphic>
+      </p:graphicFrame>
+      <p:sp>
+        <p:nvSpPr>
+          <p:cNvPr id="4" name="P1"/>
+          <p:cNvSpPr>
+            <a:spLocks noGrp="1"/>
+          </p:cNvSpPr>
+          <p:nvPr>
+            <p:ph type="body" idx="20"/>
           </p:nvPr>
         </p:nvSpPr>
         <p:spPr/>
@@ -21446,14 +24011,635 @@
             <a:pPr/>
             <a:r>
               <a:rPr lang="th-TH" dirty="0"/>
-              <a:t>Key Activity :</a:t>
-            </a:r>
-          </a:p>
-        </p:txBody>
-      </p:sp>
-      <p:sp>
-        <p:nvSpPr>
-          <p:cNvPr id="4" name="KAV"/>
+              <a:t>ด.1</a:t>
+            </a:r>
+          </a:p>
+        </p:txBody>
+      </p:sp>
+      <p:sp>
+        <p:nvSpPr>
+          <p:cNvPr id="5" name="P2"/>
+          <p:cNvSpPr>
+            <a:spLocks noGrp="1"/>
+          </p:cNvSpPr>
+          <p:nvPr>
+            <p:ph type="body" idx="21"/>
+          </p:nvPr>
+        </p:nvSpPr>
+        <p:spPr/>
+        <p:txBody>
+          <a:bodyPr/>
+          <a:lstStyle/>
+          <a:p>
+            <a:pPr/>
+            <a:r>
+              <a:rPr lang="th-TH" dirty="0"/>
+              <a:t>ด.2</a:t>
+            </a:r>
+          </a:p>
+        </p:txBody>
+      </p:sp>
+      <p:sp>
+        <p:nvSpPr>
+          <p:cNvPr id="6" name="P3"/>
+          <p:cNvSpPr>
+            <a:spLocks noGrp="1"/>
+          </p:cNvSpPr>
+          <p:nvPr>
+            <p:ph type="body" idx="22"/>
+          </p:nvPr>
+        </p:nvSpPr>
+        <p:spPr/>
+        <p:txBody>
+          <a:bodyPr/>
+          <a:lstStyle/>
+          <a:p>
+            <a:pPr/>
+            <a:r>
+              <a:rPr lang="th-TH" dirty="0"/>
+              <a:t>ด.3</a:t>
+            </a:r>
+          </a:p>
+        </p:txBody>
+      </p:sp>
+      <p:sp>
+        <p:nvSpPr>
+          <p:cNvPr id="7" name="P4"/>
+          <p:cNvSpPr>
+            <a:spLocks noGrp="1"/>
+          </p:cNvSpPr>
+          <p:nvPr>
+            <p:ph type="body" idx="23"/>
+          </p:nvPr>
+        </p:nvSpPr>
+        <p:spPr/>
+        <p:txBody>
+          <a:bodyPr/>
+          <a:lstStyle/>
+          <a:p>
+            <a:pPr/>
+            <a:r>
+              <a:rPr lang="th-TH" dirty="0"/>
+              <a:t>ด.4</a:t>
+            </a:r>
+          </a:p>
+        </p:txBody>
+      </p:sp>
+      <p:sp>
+        <p:nvSpPr>
+          <p:cNvPr id="8" name="P5"/>
+          <p:cNvSpPr>
+            <a:spLocks noGrp="1"/>
+          </p:cNvSpPr>
+          <p:nvPr>
+            <p:ph type="body" idx="24"/>
+          </p:nvPr>
+        </p:nvSpPr>
+        <p:spPr/>
+        <p:txBody>
+          <a:bodyPr/>
+          <a:lstStyle/>
+          <a:p>
+            <a:pPr/>
+            <a:r>
+              <a:rPr lang="th-TH" dirty="0"/>
+              <a:t>ด.5</a:t>
+            </a:r>
+          </a:p>
+        </p:txBody>
+      </p:sp>
+      <p:sp>
+        <p:nvSpPr>
+          <p:cNvPr id="9" name="P6"/>
+          <p:cNvSpPr>
+            <a:spLocks noGrp="1"/>
+          </p:cNvSpPr>
+          <p:nvPr>
+            <p:ph type="body" idx="25"/>
+          </p:nvPr>
+        </p:nvSpPr>
+        <p:spPr/>
+        <p:txBody>
+          <a:bodyPr/>
+          <a:lstStyle/>
+          <a:p>
+            <a:pPr/>
+            <a:r>
+              <a:rPr lang="th-TH" dirty="0"/>
+              <a:t>ด.6</a:t>
+            </a:r>
+          </a:p>
+        </p:txBody>
+      </p:sp>
+      <p:sp>
+        <p:nvSpPr>
+          <p:cNvPr id="10" name="P7"/>
+          <p:cNvSpPr>
+            <a:spLocks noGrp="1"/>
+          </p:cNvSpPr>
+          <p:nvPr>
+            <p:ph type="body" idx="26"/>
+          </p:nvPr>
+        </p:nvSpPr>
+        <p:spPr/>
+        <p:txBody>
+          <a:bodyPr/>
+          <a:lstStyle/>
+          <a:p>
+            <a:pPr/>
+            <a:r>
+              <a:rPr lang="th-TH" dirty="0"/>
+              <a:t>ด.7</a:t>
+            </a:r>
+          </a:p>
+        </p:txBody>
+      </p:sp>
+      <p:sp>
+        <p:nvSpPr>
+          <p:cNvPr id="11" name="P8"/>
+          <p:cNvSpPr>
+            <a:spLocks noGrp="1"/>
+          </p:cNvSpPr>
+          <p:nvPr>
+            <p:ph type="body" idx="27"/>
+          </p:nvPr>
+        </p:nvSpPr>
+        <p:spPr/>
+        <p:txBody>
+          <a:bodyPr/>
+          <a:lstStyle/>
+          <a:p>
+            <a:pPr/>
+            <a:r>
+              <a:rPr lang="th-TH" dirty="0"/>
+              <a:t>ด.8</a:t>
+            </a:r>
+          </a:p>
+        </p:txBody>
+      </p:sp>
+      <p:sp>
+        <p:nvSpPr>
+          <p:cNvPr id="12" name="P9"/>
+          <p:cNvSpPr>
+            <a:spLocks noGrp="1"/>
+          </p:cNvSpPr>
+          <p:nvPr>
+            <p:ph type="body" idx="28"/>
+          </p:nvPr>
+        </p:nvSpPr>
+        <p:spPr/>
+        <p:txBody>
+          <a:bodyPr/>
+          <a:lstStyle/>
+          <a:p>
+            <a:pPr/>
+            <a:r>
+              <a:rPr lang="th-TH" dirty="0"/>
+              <a:t>ด.9</a:t>
+            </a:r>
+          </a:p>
+        </p:txBody>
+      </p:sp>
+      <p:sp>
+        <p:nvSpPr>
+          <p:cNvPr id="13" name="P10"/>
+          <p:cNvSpPr>
+            <a:spLocks noGrp="1"/>
+          </p:cNvSpPr>
+          <p:nvPr>
+            <p:ph type="body" idx="29"/>
+          </p:nvPr>
+        </p:nvSpPr>
+        <p:spPr/>
+        <p:txBody>
+          <a:bodyPr/>
+          <a:lstStyle/>
+          <a:p>
+            <a:pPr/>
+            <a:r>
+              <a:rPr lang="th-TH" dirty="0"/>
+              <a:t>ด.10</a:t>
+            </a:r>
+          </a:p>
+        </p:txBody>
+      </p:sp>
+      <p:sp>
+        <p:nvSpPr>
+          <p:cNvPr id="14" name="P11"/>
+          <p:cNvSpPr>
+            <a:spLocks noGrp="1"/>
+          </p:cNvSpPr>
+          <p:nvPr>
+            <p:ph type="body" idx="30"/>
+          </p:nvPr>
+        </p:nvSpPr>
+        <p:spPr/>
+        <p:txBody>
+          <a:bodyPr/>
+          <a:lstStyle/>
+          <a:p>
+            <a:pPr/>
+            <a:r>
+              <a:rPr lang="th-TH" dirty="0"/>
+              <a:t>ด.11</a:t>
+            </a:r>
+          </a:p>
+        </p:txBody>
+      </p:sp>
+      <p:sp>
+        <p:nvSpPr>
+          <p:cNvPr id="15" name="P12"/>
+          <p:cNvSpPr>
+            <a:spLocks noGrp="1"/>
+          </p:cNvSpPr>
+          <p:nvPr>
+            <p:ph type="body" idx="31"/>
+          </p:nvPr>
+        </p:nvSpPr>
+        <p:spPr/>
+        <p:txBody>
+          <a:bodyPr/>
+          <a:lstStyle/>
+          <a:p>
+            <a:pPr/>
+            <a:r>
+              <a:rPr lang="th-TH" dirty="0"/>
+              <a:t>ด.12</a:t>
+            </a:r>
+          </a:p>
+        </p:txBody>
+      </p:sp>
+      <p:sp>
+        <p:nvSpPr>
+          <p:cNvPr id="16" name="R1"/>
+          <p:cNvSpPr>
+            <a:spLocks noGrp="1"/>
+          </p:cNvSpPr>
+          <p:nvPr>
+            <p:ph type="body" idx="32"/>
+          </p:nvPr>
+        </p:nvSpPr>
+        <p:spPr/>
+        <p:txBody>
+          <a:bodyPr/>
+          <a:lstStyle/>
+          <a:p>
+            <a:pPr/>
+            <a:r>
+              <a:rPr lang="th-TH" dirty="0"/>
+              <a:t>1. เตรียมระบบ</a:t>
+            </a:r>
+          </a:p>
+        </p:txBody>
+      </p:sp>
+      <p:sp>
+        <p:nvSpPr>
+          <p:cNvPr id="17" name="D1"/>
+          <p:cNvSpPr>
+            <a:spLocks noGrp="1"/>
+          </p:cNvSpPr>
+          <p:nvPr>
+            <p:ph type="body" idx="33"/>
+          </p:nvPr>
+        </p:nvSpPr>
+        <p:spPr/>
+        <p:txBody>
+          <a:bodyPr/>
+          <a:lstStyle/>
+          <a:p>
+            <a:pPr/>
+            <a:r>
+              <a:rPr lang="th-TH" dirty="0"/>
+              <a:t>4 สัปดาห์</a:t>
+            </a:r>
+          </a:p>
+        </p:txBody>
+      </p:sp>
+      <p:sp>
+        <p:nvSpPr>
+          <p:cNvPr id="18" name="R2"/>
+          <p:cNvSpPr>
+            <a:spLocks noGrp="1"/>
+          </p:cNvSpPr>
+          <p:nvPr>
+            <p:ph type="body" idx="34"/>
+          </p:nvPr>
+        </p:nvSpPr>
+        <p:spPr/>
+        <p:txBody>
+          <a:bodyPr/>
+          <a:lstStyle/>
+          <a:p>
+            <a:pPr/>
+            <a:r>
+              <a:rPr lang="th-TH" dirty="0"/>
+              <a:t>2. วิเคราะห์และออกแบบ</a:t>
+            </a:r>
+          </a:p>
+        </p:txBody>
+      </p:sp>
+      <p:sp>
+        <p:nvSpPr>
+          <p:cNvPr id="19" name="D2"/>
+          <p:cNvSpPr>
+            <a:spLocks noGrp="1"/>
+          </p:cNvSpPr>
+          <p:nvPr>
+            <p:ph type="body" idx="35"/>
+          </p:nvPr>
+        </p:nvSpPr>
+        <p:spPr/>
+        <p:txBody>
+          <a:bodyPr/>
+          <a:lstStyle/>
+          <a:p>
+            <a:pPr/>
+            <a:r>
+              <a:rPr lang="th-TH" dirty="0"/>
+              <a:t>6 สัปดาห์</a:t>
+            </a:r>
+          </a:p>
+        </p:txBody>
+      </p:sp>
+      <p:sp>
+        <p:nvSpPr>
+          <p:cNvPr id="20" name="R3"/>
+          <p:cNvSpPr>
+            <a:spLocks noGrp="1"/>
+          </p:cNvSpPr>
+          <p:nvPr>
+            <p:ph type="body" idx="36"/>
+          </p:nvPr>
+        </p:nvSpPr>
+        <p:spPr/>
+        <p:txBody>
+          <a:bodyPr/>
+          <a:lstStyle/>
+          <a:p>
+            <a:pPr/>
+            <a:r>
+              <a:rPr lang="th-TH" dirty="0"/>
+              <a:t>3. พัฒนาและตั้งค่าระบบ</a:t>
+            </a:r>
+          </a:p>
+        </p:txBody>
+      </p:sp>
+      <p:sp>
+        <p:nvSpPr>
+          <p:cNvPr id="21" name="D3"/>
+          <p:cNvSpPr>
+            <a:spLocks noGrp="1"/>
+          </p:cNvSpPr>
+          <p:nvPr>
+            <p:ph type="body" idx="37"/>
+          </p:nvPr>
+        </p:nvSpPr>
+        <p:spPr/>
+        <p:txBody>
+          <a:bodyPr/>
+          <a:lstStyle/>
+          <a:p>
+            <a:pPr/>
+            <a:r>
+              <a:rPr lang="th-TH" dirty="0"/>
+              <a:t>10 สัปดาห์</a:t>
+            </a:r>
+          </a:p>
+        </p:txBody>
+      </p:sp>
+      <p:sp>
+        <p:nvSpPr>
+          <p:cNvPr id="22" name="R4"/>
+          <p:cNvSpPr>
+            <a:spLocks noGrp="1"/>
+          </p:cNvSpPr>
+          <p:nvPr>
+            <p:ph type="body" idx="38"/>
+          </p:nvPr>
+        </p:nvSpPr>
+        <p:spPr/>
+        <p:txBody>
+          <a:bodyPr/>
+          <a:lstStyle/>
+          <a:p>
+            <a:pPr/>
+            <a:r>
+              <a:rPr lang="th-TH" dirty="0"/>
+              <a:t>4. ทดสอบ UAT</a:t>
+            </a:r>
+          </a:p>
+        </p:txBody>
+      </p:sp>
+      <p:sp>
+        <p:nvSpPr>
+          <p:cNvPr id="23" name="D4"/>
+          <p:cNvSpPr>
+            <a:spLocks noGrp="1"/>
+          </p:cNvSpPr>
+          <p:nvPr>
+            <p:ph type="body" idx="39"/>
+          </p:nvPr>
+        </p:nvSpPr>
+        <p:spPr/>
+        <p:txBody>
+          <a:bodyPr/>
+          <a:lstStyle/>
+          <a:p>
+            <a:pPr/>
+            <a:r>
+              <a:rPr lang="th-TH" dirty="0"/>
+              <a:t>4 สัปดาห์</a:t>
+            </a:r>
+          </a:p>
+        </p:txBody>
+      </p:sp>
+      <p:sp>
+        <p:nvSpPr>
+          <p:cNvPr id="24" name="R5"/>
+          <p:cNvSpPr>
+            <a:spLocks noGrp="1"/>
+          </p:cNvSpPr>
+          <p:nvPr>
+            <p:ph type="body" idx="40"/>
+          </p:nvPr>
+        </p:nvSpPr>
+        <p:spPr/>
+        <p:txBody>
+          <a:bodyPr/>
+          <a:lstStyle/>
+          <a:p>
+            <a:pPr/>
+            <a:r>
+              <a:rPr lang="th-TH" dirty="0"/>
+              <a:t>5. อบรมผู้ใช้</a:t>
+            </a:r>
+          </a:p>
+        </p:txBody>
+      </p:sp>
+      <p:sp>
+        <p:nvSpPr>
+          <p:cNvPr id="25" name="D5"/>
+          <p:cNvSpPr>
+            <a:spLocks noGrp="1"/>
+          </p:cNvSpPr>
+          <p:nvPr>
+            <p:ph type="body" idx="41"/>
+          </p:nvPr>
+        </p:nvSpPr>
+        <p:spPr/>
+        <p:txBody>
+          <a:bodyPr/>
+          <a:lstStyle/>
+          <a:p>
+            <a:pPr/>
+            <a:r>
+              <a:rPr lang="th-TH" dirty="0"/>
+              <a:t>1 สัปดาห์</a:t>
+            </a:r>
+          </a:p>
+        </p:txBody>
+      </p:sp>
+      <p:sp>
+        <p:nvSpPr>
+          <p:cNvPr id="26" name="R6"/>
+          <p:cNvSpPr>
+            <a:spLocks noGrp="1"/>
+          </p:cNvSpPr>
+          <p:nvPr>
+            <p:ph type="body" idx="42"/>
+          </p:nvPr>
+        </p:nvSpPr>
+        <p:spPr/>
+        <p:txBody>
+          <a:bodyPr/>
+          <a:lstStyle/>
+          <a:p>
+            <a:pPr/>
+            <a:r>
+              <a:rPr lang="th-TH" dirty="0"/>
+              <a:t>6. ขึ้นระบบ</a:t>
+            </a:r>
+          </a:p>
+        </p:txBody>
+      </p:sp>
+      <p:sp>
+        <p:nvSpPr>
+          <p:cNvPr id="27" name="D6"/>
+          <p:cNvSpPr>
+            <a:spLocks noGrp="1"/>
+          </p:cNvSpPr>
+          <p:nvPr>
+            <p:ph type="body" idx="43"/>
+          </p:nvPr>
+        </p:nvSpPr>
+        <p:spPr/>
+        <p:txBody>
+          <a:bodyPr/>
+          <a:lstStyle/>
+          <a:p>
+            <a:pPr/>
+            <a:r>
+              <a:rPr lang="th-TH" dirty="0"/>
+              <a:t>2 สัปดาห์</a:t>
+            </a:r>
+          </a:p>
+        </p:txBody>
+      </p:sp>
+      <p:sp>
+        <p:nvSpPr>
+          <p:cNvPr id="28" name="R7"/>
+          <p:cNvSpPr>
+            <a:spLocks noGrp="1"/>
+          </p:cNvSpPr>
+          <p:nvPr>
+            <p:ph type="body" idx="44"/>
+          </p:nvPr>
+        </p:nvSpPr>
+        <p:spPr/>
+        <p:txBody>
+          <a:bodyPr/>
+          <a:lstStyle/>
+          <a:p>
+            <a:pPr/>
+            <a:r>
+              <a:rPr lang="th-TH" dirty="0"/>
+              <a:t>7. ดูแลหลังขึ้นระบบ</a:t>
+            </a:r>
+          </a:p>
+        </p:txBody>
+      </p:sp>
+      <p:sp>
+        <p:nvSpPr>
+          <p:cNvPr id="29" name="D7"/>
+          <p:cNvSpPr>
+            <a:spLocks noGrp="1"/>
+          </p:cNvSpPr>
+          <p:nvPr>
+            <p:ph type="body" idx="45"/>
+          </p:nvPr>
+        </p:nvSpPr>
+        <p:spPr/>
+        <p:txBody>
+          <a:bodyPr/>
+          <a:lstStyle/>
+          <a:p>
+            <a:pPr/>
+            <a:r>
+              <a:rPr lang="th-TH" dirty="0"/>
+              <a:t>3 เดือน</a:t>
+            </a:r>
+          </a:p>
+        </p:txBody>
+      </p:sp>
+      <p:sp>
+        <p:nvSpPr>
+          <p:cNvPr id="30" name="R8"/>
+          <p:cNvSpPr>
+            <a:spLocks noGrp="1"/>
+          </p:cNvSpPr>
+          <p:nvPr>
+            <p:ph type="body" idx="46"/>
+          </p:nvPr>
+        </p:nvSpPr>
+        <p:spPr/>
+        <p:txBody>
+          <a:bodyPr/>
+          <a:lstStyle/>
+          <a:p>
+            <a:pPr/>
+            <a:r>
+              <a:rPr lang="th-TH" dirty="0"/>
+              <a:t>8. รับประกันระบบ</a:t>
+            </a:r>
+          </a:p>
+        </p:txBody>
+      </p:sp>
+      <p:sp>
+        <p:nvSpPr>
+          <p:cNvPr id="31" name="D8"/>
+          <p:cNvSpPr>
+            <a:spLocks noGrp="1"/>
+          </p:cNvSpPr>
+          <p:nvPr>
+            <p:ph type="body" idx="47"/>
+          </p:nvPr>
+        </p:nvSpPr>
+        <p:spPr/>
+        <p:txBody>
+          <a:bodyPr/>
+          <a:lstStyle/>
+          <a:p>
+            <a:pPr/>
+            <a:r>
+              <a:rPr lang="th-TH" dirty="0"/>
+              <a:t>2.5 เดือน</a:t>
+            </a:r>
+          </a:p>
+        </p:txBody>
+      </p:sp>
+      <p:sp>
+        <p:nvSpPr>
+          <p:cNvPr id="32" name="Key"/>
           <p:cNvSpPr>
             <a:spLocks noGrp="1"/>
           </p:cNvSpPr>
@@ -21469,14 +24655,14 @@
             <a:pPr/>
             <a:r>
               <a:rPr lang="th-TH" dirty="0"/>
-              <a:t>ตั้งค่าสภาพแวดล้อม ติดตั้งฮาร์ดแวร์และซอฟต์แวร์</a:t>
-            </a:r>
-          </a:p>
-        </p:txBody>
-      </p:sp>
-      <p:sp>
-        <p:nvSpPr>
-          <p:cNvPr id="5" name="PL"/>
+              <a:t>■ ช่วงงาน   ◆ ส่งมอบ / ตรวจรับ</a:t>
+            </a:r>
+          </a:p>
+        </p:txBody>
+      </p:sp>
+      <p:sp>
+        <p:nvSpPr>
+          <p:cNvPr id="33" name="Asm"/>
           <p:cNvSpPr>
             <a:spLocks noGrp="1"/>
           </p:cNvSpPr>
@@ -21492,14 +24678,14 @@
             <a:pPr/>
             <a:r>
               <a:rPr lang="th-TH" dirty="0"/>
-              <a:t>Participant :</a:t>
-            </a:r>
-          </a:p>
-        </p:txBody>
-      </p:sp>
-      <p:sp>
-        <p:nvSpPr>
-          <p:cNvPr id="6" name="PV"/>
+              <a:t>นับจากวันลงนามสัญญา · หน่วย: เดือน</a:t>
+            </a:r>
+          </a:p>
+        </p:txBody>
+      </p:sp>
+      <p:sp>
+        <p:nvSpPr>
+          <p:cNvPr id="34" name="TL"/>
           <p:cNvSpPr>
             <a:spLocks noGrp="1"/>
           </p:cNvSpPr>
@@ -21515,14 +24701,14 @@
             <a:pPr/>
             <a:r>
               <a:rPr lang="th-TH" dirty="0"/>
-              <a:t>NCT Infra Engineer, ทีมไอทีลูกค้า, Business Analyst</a:t>
-            </a:r>
-          </a:p>
-        </p:txBody>
-      </p:sp>
-      <p:sp>
-        <p:nvSpPr>
-          <p:cNvPr id="7" name="PN"/>
+              <a:t>สรุป</a:t>
+            </a:r>
+          </a:p>
+        </p:txBody>
+      </p:sp>
+      <p:sp>
+        <p:nvSpPr>
+          <p:cNvPr id="35" name="TC"/>
           <p:cNvSpPr>
             <a:spLocks noGrp="1"/>
           </p:cNvSpPr>
@@ -21538,97 +24724,229 @@
             <a:pPr/>
             <a:r>
               <a:rPr lang="th-TH" dirty="0"/>
-              <a:t>01</a:t>
-            </a:r>
-          </a:p>
-        </p:txBody>
-      </p:sp>
-      <p:sp>
-        <p:nvSpPr>
-          <p:cNvPr id="8" name="PP"/>
-          <p:cNvSpPr>
-            <a:spLocks noGrp="1"/>
-          </p:cNvSpPr>
-          <p:nvPr>
-            <p:ph type="body" idx="6"/>
-          </p:nvPr>
-        </p:nvSpPr>
-        <p:spPr/>
-        <p:txBody>
-          <a:bodyPr/>
-          <a:lstStyle/>
-          <a:p>
-            <a:pPr/>
-            <a:r>
-              <a:rPr lang="th-TH" dirty="0"/>
-              <a:t>Preparation Phase</a:t>
-            </a:r>
-          </a:p>
-        </p:txBody>
-      </p:sp>
-      <p:sp>
-        <p:nvSpPr>
-          <p:cNvPr id="9" name="PI"/>
-          <p:cNvSpPr>
-            <a:spLocks noGrp="1"/>
-          </p:cNvSpPr>
-          <p:nvPr>
-            <p:ph type="body" idx="7"/>
-          </p:nvPr>
-        </p:nvSpPr>
-        <p:spPr/>
-        <p:txBody>
-          <a:bodyPr/>
-          <a:lstStyle/>
-          <a:p>
-            <a:pPr/>
-            <a:r>
-              <a:rPr lang="th-TH" dirty="0"/>
-              <a:t>สรุปสเปกเครื่องและบริการคลาวด์ที่ต้องเตรียมให้พร้อมก่อนเริ่มงานพัฒนา</a:t>
-            </a:r>
-          </a:p>
-        </p:txBody>
-      </p:sp>
-      <p:sp>
-        <p:nvSpPr>
-          <p:cNvPr id="10" name="PB"/>
-          <p:cNvSpPr>
-            <a:spLocks noGrp="1"/>
-          </p:cNvSpPr>
-          <p:nvPr>
-            <p:ph type="body" idx="8"/>
-          </p:nvPr>
-        </p:nvSpPr>
-        <p:spPr/>
-        <p:txBody>
-          <a:bodyPr/>
-          <a:lstStyle/>
-          <a:p>
-            <a:pPr/>
-            <a:r>
-              <a:rPr lang="th-TH" dirty="0"/>
-              <a:t>PRD · 4 คอร์ / 16GB / SSD 300GB</a:t>
-            </a:r>
-          </a:p>
-          <a:p>
-            <a:pPr/>
-            <a:r>
-              <a:rPr lang="th-TH" dirty="0"/>
-              <a:t>QA · 4 คอร์ / 16GB / SSD 150GB</a:t>
-            </a:r>
-          </a:p>
-          <a:p>
-            <a:pPr/>
-            <a:r>
-              <a:rPr lang="th-TH" dirty="0"/>
-              <a:t>Windows Server 2022 ทั้งสองเครื่อง</a:t>
-            </a:r>
-          </a:p>
-          <a:p>
-            <a:pPr/>
-            <a:r>
-              <a:rPr lang="th-TH" dirty="0"/>
-              <a:t>Lambda, EC2 และ Cognito เปิดทั้งสองสภาพแวดล้อม</a:t>
+              <a:t>ขึ้นระบบต้นเดือนที่ 7 ตรวจรับ 3 งวดตามจุดส่งมอบ</a:t>
+            </a:r>
+          </a:p>
+        </p:txBody>
+      </p:sp>
+      <p:sp>
+        <p:nvSpPr>
+          <p:cNvPr id="36" name="Milestone 2"/>
+          <p:cNvSpPr/>
+          <p:nvPr/>
+        </p:nvSpPr>
+        <p:spPr>
+          <a:xfrm>
+            <a:off x="5099558" y="2567178"/>
+            <a:ext cx="146304" cy="146304"/>
+          </a:xfrm>
+          <a:prstGeom prst="diamond">
+            <a:avLst/>
+          </a:prstGeom>
+          <a:solidFill>
+            <a:srgbClr val="BB731B"/>
+          </a:solidFill>
+          <a:ln w="19050">
+            <a:solidFill>
+              <a:srgbClr val="FFFFFF"/>
+            </a:solidFill>
+          </a:ln>
+        </p:spPr>
+        <p:txBody>
+          <a:bodyPr/>
+          <a:lstStyle/>
+          <a:p>
+            <a:endParaRPr lang="th-TH"/>
+          </a:p>
+        </p:txBody>
+      </p:sp>
+      <p:sp>
+        <p:nvSpPr>
+          <p:cNvPr id="37" name="Milestone 2 Label"/>
+          <p:cNvSpPr/>
+          <p:nvPr/>
+        </p:nvSpPr>
+        <p:spPr>
+          <a:xfrm>
+            <a:off x="5291582" y="2446020"/>
+            <a:ext cx="1463040" cy="388620"/>
+          </a:xfrm>
+          <a:prstGeom prst="rect">
+            <a:avLst/>
+          </a:prstGeom>
+          <a:noFill/>
+          <a:ln>
+            <a:noFill/>
+          </a:ln>
+        </p:spPr>
+        <p:txBody>
+          <a:bodyPr wrap="square" anchor="ctr" lIns="0" tIns="0" rIns="0" bIns="0" rtlCol="0"/>
+          <a:lstStyle/>
+          <a:p>
+            <a:pPr algn="l" marL="0" indent="0">
+              <a:lnSpc>
+                <a:spcPct val="100000"/>
+              </a:lnSpc>
+              <a:buNone/>
+            </a:pPr>
+            <a:r>
+              <a:rPr lang="th-TH" sz="1000" dirty="0">
+                <a:solidFill>
+                  <a:srgbClr val="5F5F5F"/>
+                </a:solidFill>
+                <a:latin typeface="+mn-lt"/>
+                <a:ea typeface="+mn-ea"/>
+                <a:cs typeface="+mn-cs"/>
+              </a:rPr>
+              <a:t>ตรวจรับงวด 1</a:t>
+            </a:r>
+          </a:p>
+        </p:txBody>
+      </p:sp>
+      <p:sp>
+        <p:nvSpPr>
+          <p:cNvPr id="38" name="Milestone 4"/>
+          <p:cNvSpPr/>
+          <p:nvPr/>
+        </p:nvSpPr>
+        <p:spPr>
+          <a:xfrm>
+            <a:off x="7348728" y="3344418"/>
+            <a:ext cx="146304" cy="146304"/>
+          </a:xfrm>
+          <a:prstGeom prst="diamond">
+            <a:avLst/>
+          </a:prstGeom>
+          <a:solidFill>
+            <a:srgbClr val="BB731B"/>
+          </a:solidFill>
+          <a:ln w="19050">
+            <a:solidFill>
+              <a:srgbClr val="FFFFFF"/>
+            </a:solidFill>
+          </a:ln>
+        </p:spPr>
+        <p:txBody>
+          <a:bodyPr/>
+          <a:lstStyle/>
+          <a:p>
+            <a:endParaRPr lang="th-TH"/>
+          </a:p>
+        </p:txBody>
+      </p:sp>
+      <p:sp>
+        <p:nvSpPr>
+          <p:cNvPr id="39" name="Milestone 4 Label"/>
+          <p:cNvSpPr/>
+          <p:nvPr/>
+        </p:nvSpPr>
+        <p:spPr>
+          <a:xfrm>
+            <a:off x="7540752" y="3223260"/>
+            <a:ext cx="1463040" cy="388620"/>
+          </a:xfrm>
+          <a:prstGeom prst="rect">
+            <a:avLst/>
+          </a:prstGeom>
+          <a:noFill/>
+          <a:ln>
+            <a:noFill/>
+          </a:ln>
+        </p:spPr>
+        <p:txBody>
+          <a:bodyPr wrap="square" anchor="ctr" lIns="0" tIns="0" rIns="0" bIns="0" rtlCol="0"/>
+          <a:lstStyle/>
+          <a:p>
+            <a:pPr algn="l" marL="0" indent="0">
+              <a:lnSpc>
+                <a:spcPct val="100000"/>
+              </a:lnSpc>
+              <a:buNone/>
+            </a:pPr>
+            <a:r>
+              <a:rPr lang="th-TH" sz="1000" dirty="0">
+                <a:solidFill>
+                  <a:srgbClr val="5F5F5F"/>
+                </a:solidFill>
+                <a:latin typeface="+mn-lt"/>
+                <a:ea typeface="+mn-ea"/>
+                <a:cs typeface="+mn-cs"/>
+              </a:rPr>
+              <a:t>ตรวจรับงวด 2</a:t>
+            </a:r>
+          </a:p>
+        </p:txBody>
+      </p:sp>
+      <p:sp>
+        <p:nvSpPr>
+          <p:cNvPr id="40" name="Milestone 7"/>
+          <p:cNvSpPr/>
+          <p:nvPr/>
+        </p:nvSpPr>
+        <p:spPr>
+          <a:xfrm>
+            <a:off x="9597898" y="4510278"/>
+            <a:ext cx="146304" cy="146304"/>
+          </a:xfrm>
+          <a:prstGeom prst="diamond">
+            <a:avLst/>
+          </a:prstGeom>
+          <a:solidFill>
+            <a:srgbClr val="BB731B"/>
+          </a:solidFill>
+          <a:ln w="19050">
+            <a:solidFill>
+              <a:srgbClr val="FFFFFF"/>
+            </a:solidFill>
+          </a:ln>
+        </p:spPr>
+        <p:txBody>
+          <a:bodyPr/>
+          <a:lstStyle/>
+          <a:p>
+            <a:endParaRPr lang="th-TH"/>
+          </a:p>
+        </p:txBody>
+      </p:sp>
+      <p:sp>
+        <p:nvSpPr>
+          <p:cNvPr id="41" name="Milestone 7 Label"/>
+          <p:cNvSpPr/>
+          <p:nvPr/>
+        </p:nvSpPr>
+        <p:spPr>
+          <a:xfrm>
+            <a:off x="9789922" y="4389120"/>
+            <a:ext cx="1463040" cy="388620"/>
+          </a:xfrm>
+          <a:prstGeom prst="rect">
+            <a:avLst/>
+          </a:prstGeom>
+          <a:noFill/>
+          <a:ln>
+            <a:noFill/>
+          </a:ln>
+        </p:spPr>
+        <p:txBody>
+          <a:bodyPr wrap="square" anchor="ctr" lIns="0" tIns="0" rIns="0" bIns="0" rtlCol="0"/>
+          <a:lstStyle/>
+          <a:p>
+            <a:pPr algn="l" marL="0" indent="0">
+              <a:lnSpc>
+                <a:spcPct val="100000"/>
+              </a:lnSpc>
+              <a:buNone/>
+            </a:pPr>
+            <a:r>
+              <a:rPr lang="th-TH" sz="1000" dirty="0">
+                <a:solidFill>
+                  <a:srgbClr val="5F5F5F"/>
+                </a:solidFill>
+                <a:latin typeface="+mn-lt"/>
+                <a:ea typeface="+mn-ea"/>
+                <a:cs typeface="+mn-cs"/>
+              </a:rPr>
+              <a:t>ตรวจรับงวด 3</a:t>
             </a:r>
           </a:p>
         </p:txBody>
@@ -21642,6 +24960,330 @@
 </file>
 
 <file path=ppt/slides/slide19.xml><?xml version="1.0" encoding="utf-8"?>
+<p:sld xmlns:a="http://schemas.openxmlformats.org/drawingml/2006/main" xmlns:r="http://schemas.openxmlformats.org/officeDocument/2006/relationships" xmlns:p="http://schemas.openxmlformats.org/presentationml/2006/main">
+  <p:cSld name="">
+    <p:spTree>
+      <p:nvGrpSpPr>
+        <p:cNvPr id="1" name=""/>
+        <p:cNvGrpSpPr/>
+        <p:nvPr/>
+      </p:nvGrpSpPr>
+      <p:grpSpPr>
+        <a:xfrm>
+          <a:off x="0" y="0"/>
+          <a:ext cx="0" cy="0"/>
+          <a:chOff x="0" y="0"/>
+          <a:chExt cx="0" cy="0"/>
+        </a:xfrm>
+      </p:grpSpPr>
+      <p:sp>
+        <p:nvSpPr>
+          <p:cNvPr id="2" name="Title"/>
+          <p:cNvSpPr>
+            <a:spLocks noGrp="1"/>
+          </p:cNvSpPr>
+          <p:nvPr>
+            <p:ph type="title"/>
+          </p:nvPr>
+        </p:nvSpPr>
+        <p:spPr/>
+        <p:txBody>
+          <a:bodyPr/>
+          <a:lstStyle/>
+          <a:p>
+            <a:pPr/>
+            <a:r>
+              <a:rPr lang="th-TH" dirty="0"/>
+              <a:t>5. Implementation Stage</a:t>
+            </a:r>
+          </a:p>
+        </p:txBody>
+      </p:sp>
+      <p:sp>
+        <p:nvSpPr>
+          <p:cNvPr id="3" name="KAL"/>
+          <p:cNvSpPr>
+            <a:spLocks noGrp="1"/>
+          </p:cNvSpPr>
+          <p:nvPr>
+            <p:ph type="body" idx="1"/>
+          </p:nvPr>
+        </p:nvSpPr>
+        <p:spPr/>
+        <p:txBody>
+          <a:bodyPr/>
+          <a:lstStyle/>
+          <a:p>
+            <a:pPr/>
+            <a:r>
+              <a:rPr lang="th-TH" dirty="0"/>
+              <a:t>Key Activity :</a:t>
+            </a:r>
+          </a:p>
+        </p:txBody>
+      </p:sp>
+      <p:sp>
+        <p:nvSpPr>
+          <p:cNvPr id="4" name="KAV"/>
+          <p:cNvSpPr>
+            <a:spLocks noGrp="1"/>
+          </p:cNvSpPr>
+          <p:nvPr>
+            <p:ph type="body" idx="2"/>
+          </p:nvPr>
+        </p:nvSpPr>
+        <p:spPr/>
+        <p:txBody>
+          <a:bodyPr/>
+          <a:lstStyle/>
+          <a:p>
+            <a:pPr/>
+            <a:r>
+              <a:rPr lang="th-TH" dirty="0"/>
+              <a:t>ตั้งค่าสภาพแวดล้อม ติดตั้งฮาร์ดแวร์และซอฟต์แวร์</a:t>
+            </a:r>
+          </a:p>
+        </p:txBody>
+      </p:sp>
+      <p:sp>
+        <p:nvSpPr>
+          <p:cNvPr id="5" name="PL"/>
+          <p:cNvSpPr>
+            <a:spLocks noGrp="1"/>
+          </p:cNvSpPr>
+          <p:nvPr>
+            <p:ph type="body" idx="3"/>
+          </p:nvPr>
+        </p:nvSpPr>
+        <p:spPr/>
+        <p:txBody>
+          <a:bodyPr/>
+          <a:lstStyle/>
+          <a:p>
+            <a:pPr/>
+            <a:r>
+              <a:rPr lang="th-TH" dirty="0"/>
+              <a:t>Participant :</a:t>
+            </a:r>
+          </a:p>
+        </p:txBody>
+      </p:sp>
+      <p:sp>
+        <p:nvSpPr>
+          <p:cNvPr id="6" name="PV"/>
+          <p:cNvSpPr>
+            <a:spLocks noGrp="1"/>
+          </p:cNvSpPr>
+          <p:nvPr>
+            <p:ph type="body" idx="4"/>
+          </p:nvPr>
+        </p:nvSpPr>
+        <p:spPr/>
+        <p:txBody>
+          <a:bodyPr/>
+          <a:lstStyle/>
+          <a:p>
+            <a:pPr/>
+            <a:r>
+              <a:rPr lang="th-TH" dirty="0"/>
+              <a:t>NCT Infra Engineer, ทีมไอทีลูกค้า, Business Analyst</a:t>
+            </a:r>
+          </a:p>
+        </p:txBody>
+      </p:sp>
+      <p:sp>
+        <p:nvSpPr>
+          <p:cNvPr id="7" name="PN"/>
+          <p:cNvSpPr>
+            <a:spLocks noGrp="1"/>
+          </p:cNvSpPr>
+          <p:nvPr>
+            <p:ph type="body" idx="5"/>
+          </p:nvPr>
+        </p:nvSpPr>
+        <p:spPr/>
+        <p:txBody>
+          <a:bodyPr/>
+          <a:lstStyle/>
+          <a:p>
+            <a:pPr/>
+            <a:r>
+              <a:rPr lang="th-TH" dirty="0"/>
+              <a:t>01</a:t>
+            </a:r>
+          </a:p>
+        </p:txBody>
+      </p:sp>
+      <p:sp>
+        <p:nvSpPr>
+          <p:cNvPr id="8" name="PP"/>
+          <p:cNvSpPr>
+            <a:spLocks noGrp="1"/>
+          </p:cNvSpPr>
+          <p:nvPr>
+            <p:ph type="body" idx="6"/>
+          </p:nvPr>
+        </p:nvSpPr>
+        <p:spPr/>
+        <p:txBody>
+          <a:bodyPr/>
+          <a:lstStyle/>
+          <a:p>
+            <a:pPr/>
+            <a:r>
+              <a:rPr lang="th-TH" dirty="0"/>
+              <a:t>Preparation Phase</a:t>
+            </a:r>
+          </a:p>
+        </p:txBody>
+      </p:sp>
+      <p:sp>
+        <p:nvSpPr>
+          <p:cNvPr id="9" name="PI"/>
+          <p:cNvSpPr>
+            <a:spLocks noGrp="1"/>
+          </p:cNvSpPr>
+          <p:nvPr>
+            <p:ph type="body" idx="7"/>
+          </p:nvPr>
+        </p:nvSpPr>
+        <p:spPr/>
+        <p:txBody>
+          <a:bodyPr/>
+          <a:lstStyle/>
+          <a:p>
+            <a:pPr/>
+            <a:r>
+              <a:rPr lang="th-TH" dirty="0"/>
+              <a:t>สรุปสเปกเครื่องและบริการคลาวด์ที่ต้องเตรียมให้พร้อมก่อนเริ่มงานพัฒนา</a:t>
+            </a:r>
+          </a:p>
+        </p:txBody>
+      </p:sp>
+      <p:sp>
+        <p:nvSpPr>
+          <p:cNvPr id="10" name="PB"/>
+          <p:cNvSpPr>
+            <a:spLocks noGrp="1"/>
+          </p:cNvSpPr>
+          <p:nvPr>
+            <p:ph type="body" idx="8"/>
+          </p:nvPr>
+        </p:nvSpPr>
+        <p:spPr/>
+        <p:txBody>
+          <a:bodyPr/>
+          <a:lstStyle/>
+          <a:p>
+            <a:pPr/>
+            <a:r>
+              <a:rPr lang="th-TH" dirty="0"/>
+              <a:t>PRD · 4 คอร์ / 16GB / SSD 300GB</a:t>
+            </a:r>
+          </a:p>
+          <a:p>
+            <a:pPr/>
+            <a:r>
+              <a:rPr lang="th-TH" dirty="0"/>
+              <a:t>QA · 4 คอร์ / 16GB / SSD 150GB</a:t>
+            </a:r>
+          </a:p>
+          <a:p>
+            <a:pPr/>
+            <a:r>
+              <a:rPr lang="th-TH" dirty="0"/>
+              <a:t>Windows Server 2022 ทั้งสองเครื่อง</a:t>
+            </a:r>
+          </a:p>
+          <a:p>
+            <a:pPr/>
+            <a:r>
+              <a:rPr lang="th-TH" dirty="0"/>
+              <a:t>Lambda, EC2 และ Cognito เปิดทั้งสองสภาพแวดล้อม</a:t>
+            </a:r>
+          </a:p>
+        </p:txBody>
+      </p:sp>
+    </p:spTree>
+  </p:cSld>
+  <p:clrMapOvr>
+    <a:masterClrMapping/>
+  </p:clrMapOvr>
+</p:sld>
+</file>
+
+<file path=ppt/slides/slide2.xml><?xml version="1.0" encoding="utf-8"?>
+<p:sld xmlns:a="http://schemas.openxmlformats.org/drawingml/2006/main" xmlns:r="http://schemas.openxmlformats.org/officeDocument/2006/relationships" xmlns:p="http://schemas.openxmlformats.org/presentationml/2006/main">
+  <p:cSld name="">
+    <p:spTree>
+      <p:nvGrpSpPr>
+        <p:cNvPr id="1" name=""/>
+        <p:cNvGrpSpPr/>
+        <p:nvPr/>
+      </p:nvGrpSpPr>
+      <p:grpSpPr>
+        <a:xfrm>
+          <a:off x="0" y="0"/>
+          <a:ext cx="0" cy="0"/>
+          <a:chOff x="0" y="0"/>
+          <a:chExt cx="0" cy="0"/>
+        </a:xfrm>
+      </p:grpSpPr>
+      <p:sp>
+        <p:nvSpPr>
+          <p:cNvPr id="2" name="Title"/>
+          <p:cNvSpPr>
+            <a:spLocks noGrp="1"/>
+          </p:cNvSpPr>
+          <p:nvPr>
+            <p:ph type="ctrTitle"/>
+          </p:nvPr>
+        </p:nvSpPr>
+        <p:spPr/>
+        <p:txBody>
+          <a:bodyPr/>
+          <a:lstStyle/>
+          <a:p>
+            <a:pPr/>
+            <a:r>
+              <a:rPr lang="th-TH" dirty="0"/>
+              <a:t>เปลี่ยนงานบัญชีให้ระบบทำแทน</a:t>
+            </a:r>
+          </a:p>
+        </p:txBody>
+      </p:sp>
+      <p:sp>
+        <p:nvSpPr>
+          <p:cNvPr id="3" name="Subtitle"/>
+          <p:cNvSpPr>
+            <a:spLocks noGrp="1"/>
+          </p:cNvSpPr>
+          <p:nvPr>
+            <p:ph type="subTitle" idx="1"/>
+          </p:nvPr>
+        </p:nvSpPr>
+        <p:spPr/>
+        <p:txBody>
+          <a:bodyPr/>
+          <a:lstStyle/>
+          <a:p>
+            <a:pPr/>
+            <a:r>
+              <a:rPr lang="th-TH" dirty="0"/>
+              <a:t>NCT · สัมมนาลูกค้า 2569</a:t>
+            </a:r>
+          </a:p>
+        </p:txBody>
+      </p:sp>
+    </p:spTree>
+  </p:cSld>
+  <p:clrMapOvr>
+    <a:masterClrMapping/>
+  </p:clrMapOvr>
+</p:sld>
+</file>
+
+<file path=ppt/slides/slide20.xml><?xml version="1.0" encoding="utf-8"?>
 <p:sld xmlns:a="http://schemas.openxmlformats.org/drawingml/2006/main" xmlns:r="http://schemas.openxmlformats.org/officeDocument/2006/relationships" xmlns:p="http://schemas.openxmlformats.org/presentationml/2006/main">
   <p:cSld name="">
     <p:spTree>
@@ -22127,78 +25769,7 @@
 </p:sld>
 </file>
 
-<file path=ppt/slides/slide2.xml><?xml version="1.0" encoding="utf-8"?>
-<p:sld xmlns:a="http://schemas.openxmlformats.org/drawingml/2006/main" xmlns:r="http://schemas.openxmlformats.org/officeDocument/2006/relationships" xmlns:p="http://schemas.openxmlformats.org/presentationml/2006/main">
-  <p:cSld name="">
-    <p:spTree>
-      <p:nvGrpSpPr>
-        <p:cNvPr id="1" name=""/>
-        <p:cNvGrpSpPr/>
-        <p:nvPr/>
-      </p:nvGrpSpPr>
-      <p:grpSpPr>
-        <a:xfrm>
-          <a:off x="0" y="0"/>
-          <a:ext cx="0" cy="0"/>
-          <a:chOff x="0" y="0"/>
-          <a:chExt cx="0" cy="0"/>
-        </a:xfrm>
-      </p:grpSpPr>
-      <p:sp>
-        <p:nvSpPr>
-          <p:cNvPr id="2" name="Title"/>
-          <p:cNvSpPr>
-            <a:spLocks noGrp="1"/>
-          </p:cNvSpPr>
-          <p:nvPr>
-            <p:ph type="ctrTitle"/>
-          </p:nvPr>
-        </p:nvSpPr>
-        <p:spPr/>
-        <p:txBody>
-          <a:bodyPr/>
-          <a:lstStyle/>
-          <a:p>
-            <a:pPr/>
-            <a:r>
-              <a:rPr lang="th-TH" dirty="0"/>
-              <a:t>เปลี่ยนงานบัญชีให้ระบบทำแทน</a:t>
-            </a:r>
-          </a:p>
-        </p:txBody>
-      </p:sp>
-      <p:sp>
-        <p:nvSpPr>
-          <p:cNvPr id="3" name="Subtitle"/>
-          <p:cNvSpPr>
-            <a:spLocks noGrp="1"/>
-          </p:cNvSpPr>
-          <p:nvPr>
-            <p:ph type="subTitle" idx="1"/>
-          </p:nvPr>
-        </p:nvSpPr>
-        <p:spPr/>
-        <p:txBody>
-          <a:bodyPr/>
-          <a:lstStyle/>
-          <a:p>
-            <a:pPr/>
-            <a:r>
-              <a:rPr lang="th-TH" dirty="0"/>
-              <a:t>NCT · สัมมนาลูกค้า 2569</a:t>
-            </a:r>
-          </a:p>
-        </p:txBody>
-      </p:sp>
-    </p:spTree>
-  </p:cSld>
-  <p:clrMapOvr>
-    <a:masterClrMapping/>
-  </p:clrMapOvr>
-</p:sld>
-</file>
-
-<file path=ppt/slides/slide20.xml><?xml version="1.0" encoding="utf-8"?>
+<file path=ppt/slides/slide21.xml><?xml version="1.0" encoding="utf-8"?>
 <p:sld xmlns:a="http://schemas.openxmlformats.org/drawingml/2006/main" xmlns:r="http://schemas.openxmlformats.org/officeDocument/2006/relationships" xmlns:p="http://schemas.openxmlformats.org/presentationml/2006/main">
   <p:cSld name="">
     <p:spTree>

--- a/NCT-Slide-Template-Demo.pptx
+++ b/NCT-Slide-Template-Demo.pptx
@@ -26,6 +26,7 @@
     <p:sldId id="274" r:id="rId20"/>
     <p:sldId id="275" r:id="rId21"/>
     <p:sldId id="276" r:id="rId22"/>
+    <p:sldId id="277" r:id="rId23"/>
   </p:sldIdLst>
   <p:sldSz cx="12192000" cy="6858000"/>
   <p:notesSz cx="6858000" cy="9144000"/>
@@ -681,6 +682,290 @@
 </c:chartSpace>
 </file>
 
+<file path=ppt/charts/chart3.xml><?xml version="1.0" encoding="utf-8"?>
+<c:chartSpace xmlns:c="http://schemas.openxmlformats.org/drawingml/2006/chart" xmlns:a="http://schemas.openxmlformats.org/drawingml/2006/main" xmlns:r="http://schemas.openxmlformats.org/officeDocument/2006/relationships">
+  <c:roundedCorners val="0"/>
+  <c:chart>
+    <c:autoTitleDeleted val="1"/>
+    <c:plotArea>
+      <c:layout>
+        <c:manualLayout>
+          <c:layoutTarget val="inner"/>
+          <c:xMode val="edge"/>
+          <c:yMode val="edge"/>
+          <c:x val="0"/>
+          <c:y val="0"/>
+          <c:w val="1"/>
+          <c:h val="1"/>
+        </c:manualLayout>
+      </c:layout>
+      <c:barChart>
+        <c:barDir val="bar"/>
+        <c:grouping val="percentStacked"/>
+        <c:varyColors val="0"/>
+        <c:ser>
+          <c:idx val="0"/>
+          <c:order val="0"/>
+          <c:tx>
+            <c:strRef>
+              <c:f>Sheet1!$B$1</c:f>
+              <c:strCache>
+                <c:ptCount val="1"/>
+                <c:pt idx="0">
+                  <c:v>พัฒนาและตั้งค่าระบบ</c:v>
+                </c:pt>
+              </c:strCache>
+            </c:strRef>
+          </c:tx>
+          <c:spPr>
+            <a:solidFill>
+              <a:srgbClr val="2A5EA0"/>
+            </a:solidFill>
+            <a:ln w="19050">
+              <a:solidFill>
+                <a:srgbClr val="FFFFFF"/>
+              </a:solidFill>
+            </a:ln>
+          </c:spPr>
+          <c:invertIfNegative val="0"/>
+          <c:cat>
+            <c:strRef>
+              <c:f>Sheet1!$A$2:$A$4</c:f>
+              <c:strCache>
+                <c:ptCount val="3"/>
+                <c:pt idx="0">
+                  <c:v>งบโครงการ</c:v>
+                </c:pt>
+              </c:strCache>
+            </c:strRef>
+          </c:cat>
+          <c:val>
+            <c:numRef>
+              <c:f>Sheet1!$B$2:$B$4</c:f>
+              <c:numCache>
+                <c:formatCode>General</c:formatCode>
+                <c:ptCount val="3"/>
+                <c:pt idx="0">
+                  <c:v>2.4</c:v>
+                </c:pt>
+              </c:numCache>
+            </c:numRef>
+          </c:val>
+        </c:ser>
+        <c:ser>
+          <c:idx val="1"/>
+          <c:order val="1"/>
+          <c:tx>
+            <c:strRef>
+              <c:f>Sheet1!$C$1</c:f>
+              <c:strCache>
+                <c:ptCount val="1"/>
+                <c:pt idx="0">
+                  <c:v>ไลเซนส์ซอฟต์แวร์</c:v>
+                </c:pt>
+              </c:strCache>
+            </c:strRef>
+          </c:tx>
+          <c:spPr>
+            <a:solidFill>
+              <a:srgbClr val="BB731B"/>
+            </a:solidFill>
+            <a:ln w="19050">
+              <a:solidFill>
+                <a:srgbClr val="FFFFFF"/>
+              </a:solidFill>
+            </a:ln>
+          </c:spPr>
+          <c:invertIfNegative val="0"/>
+          <c:cat>
+            <c:strRef>
+              <c:f>Sheet1!$A$2:$A$4</c:f>
+              <c:strCache>
+                <c:ptCount val="3"/>
+                <c:pt idx="0">
+                  <c:v>งบโครงการ</c:v>
+                </c:pt>
+              </c:strCache>
+            </c:strRef>
+          </c:cat>
+          <c:val>
+            <c:numRef>
+              <c:f>Sheet1!$C$2:$C$4</c:f>
+              <c:numCache>
+                <c:formatCode>General</c:formatCode>
+                <c:ptCount val="3"/>
+                <c:pt idx="0">
+                  <c:v>1.2</c:v>
+                </c:pt>
+              </c:numCache>
+            </c:numRef>
+          </c:val>
+        </c:ser>
+        <c:ser>
+          <c:idx val="2"/>
+          <c:order val="2"/>
+          <c:tx>
+            <c:strRef>
+              <c:f>Sheet1!$D$1</c:f>
+              <c:strCache>
+                <c:ptCount val="1"/>
+                <c:pt idx="0">
+                  <c:v>คลาวด์ปีแรก</c:v>
+                </c:pt>
+              </c:strCache>
+            </c:strRef>
+          </c:tx>
+          <c:spPr>
+            <a:solidFill>
+              <a:srgbClr val="0D9298"/>
+            </a:solidFill>
+            <a:ln w="19050">
+              <a:solidFill>
+                <a:srgbClr val="FFFFFF"/>
+              </a:solidFill>
+            </a:ln>
+          </c:spPr>
+          <c:invertIfNegative val="0"/>
+          <c:cat>
+            <c:strRef>
+              <c:f>Sheet1!$A$2:$A$4</c:f>
+              <c:strCache>
+                <c:ptCount val="3"/>
+                <c:pt idx="0">
+                  <c:v>งบโครงการ</c:v>
+                </c:pt>
+              </c:strCache>
+            </c:strRef>
+          </c:cat>
+          <c:val>
+            <c:numRef>
+              <c:f>Sheet1!$D$2:$D$4</c:f>
+              <c:numCache>
+                <c:formatCode>General</c:formatCode>
+                <c:ptCount val="3"/>
+                <c:pt idx="0">
+                  <c:v>0.7</c:v>
+                </c:pt>
+              </c:numCache>
+            </c:numRef>
+          </c:val>
+        </c:ser>
+        <c:ser>
+          <c:idx val="3"/>
+          <c:order val="3"/>
+          <c:tx>
+            <c:strRef>
+              <c:f>Sheet1!$E$1</c:f>
+              <c:strCache>
+                <c:ptCount val="1"/>
+                <c:pt idx="0">
+                  <c:v>อื่น ๆ</c:v>
+                </c:pt>
+              </c:strCache>
+            </c:strRef>
+          </c:tx>
+          <c:spPr>
+            <a:solidFill>
+              <a:srgbClr val="A4A4A4"/>
+            </a:solidFill>
+            <a:ln w="19050">
+              <a:solidFill>
+                <a:srgbClr val="FFFFFF"/>
+              </a:solidFill>
+            </a:ln>
+          </c:spPr>
+          <c:invertIfNegative val="0"/>
+          <c:cat>
+            <c:strRef>
+              <c:f>Sheet1!$A$2:$A$4</c:f>
+              <c:strCache>
+                <c:ptCount val="3"/>
+                <c:pt idx="0">
+                  <c:v>งบโครงการ</c:v>
+                </c:pt>
+              </c:strCache>
+            </c:strRef>
+          </c:cat>
+          <c:val>
+            <c:numRef>
+              <c:f>Sheet1!$E$2:$E$4</c:f>
+              <c:numCache>
+                <c:formatCode>General</c:formatCode>
+                <c:ptCount val="3"/>
+                <c:pt idx="0">
+                  <c:v>0.5</c:v>
+                </c:pt>
+              </c:numCache>
+            </c:numRef>
+          </c:val>
+        </c:ser>
+        <c:gapWidth val="100"/>
+        <c:overlap val="100"/>
+        <c:axId val="21001"/>
+        <c:axId val="21002"/>
+      </c:barChart>
+      <c:catAx>
+        <c:axId val="21001"/>
+        <c:scaling>
+          <c:orientation val="maxMin"/>
+        </c:scaling>
+        <c:delete val="1"/>
+        <c:axPos val="l"/>
+        <c:majorTickMark val="none"/>
+        <c:minorTickMark val="none"/>
+        <c:tickLblPos val="none"/>
+        <c:crossAx val="21002"/>
+        <c:crosses val="autoZero"/>
+        <c:auto val="1"/>
+        <c:lblAlgn val="ctr"/>
+        <c:lblOffset val="100"/>
+        <c:noMultiLvlLbl val="0"/>
+      </c:catAx>
+      <c:valAx>
+        <c:axId val="21002"/>
+        <c:scaling>
+          <c:orientation val="minMax"/>
+          <c:max val="1"/>
+          <c:min val="0"/>
+        </c:scaling>
+        <c:delete val="0"/>
+        <c:axPos val="b"/>
+        <c:numFmt formatCode="General" sourceLinked="0"/>
+        <c:majorTickMark val="none"/>
+        <c:minorTickMark val="none"/>
+        <c:tickLblPos val="none"/>
+        <c:spPr>
+          <a:ln>
+            <a:noFill/>
+          </a:ln>
+        </c:spPr>
+        <c:crossAx val="21001"/>
+        <c:crosses val="max"/>
+        <c:crossBetween val="between"/>
+        <c:majorUnit val="1"/>
+      </c:valAx>
+      <c:spPr>
+        <a:noFill/>
+        <a:ln>
+          <a:noFill/>
+        </a:ln>
+      </c:spPr>
+    </c:plotArea>
+    <c:plotVisOnly val="1"/>
+    <c:dispBlanksAs val="gap"/>
+  </c:chart>
+  <c:spPr>
+    <a:noFill/>
+    <a:ln>
+      <a:noFill/>
+    </a:ln>
+  </c:spPr>
+  <c:externalData r:id="rId1">
+    <c:autoUpdate val="0"/>
+  </c:externalData>
+</c:chartSpace>
+</file>
+
 <file path=ppt/slideLayouts/slideLayout1.xml><?xml version="1.0" encoding="utf-8"?>
 <p:sldLayout xmlns:a="http://schemas.openxmlformats.org/drawingml/2006/main" xmlns:r="http://schemas.openxmlformats.org/officeDocument/2006/relationships" xmlns:p="http://schemas.openxmlformats.org/presentationml/2006/main" type="title" showMasterSp="0" preserve="1">
   <p:cSld name="01 Title Slide">
@@ -14876,6 +15161,1915 @@
 </p:sldLayout>
 </file>
 
+<file path=ppt/slideLayouts/slideLayout22.xml><?xml version="1.0" encoding="utf-8"?>
+<p:sldLayout xmlns:a="http://schemas.openxmlformats.org/drawingml/2006/main" xmlns:r="http://schemas.openxmlformats.org/officeDocument/2006/relationships" xmlns:p="http://schemas.openxmlformats.org/presentationml/2006/main" type="chart" showMasterSp="0" preserve="1">
+  <p:cSld name="22 Composition">
+    <p:bg>
+      <p:bgPr>
+        <a:solidFill>
+          <a:srgbClr val="FFFFFF"/>
+        </a:solidFill>
+        <a:effectLst/>
+      </p:bgPr>
+    </p:bg>
+    <p:spTree>
+      <p:nvGrpSpPr>
+        <p:cNvPr id="1" name=""/>
+        <p:cNvGrpSpPr/>
+        <p:nvPr/>
+      </p:nvGrpSpPr>
+      <p:grpSpPr>
+        <a:xfrm>
+          <a:off x="0" y="0"/>
+          <a:ext cx="0" cy="0"/>
+          <a:chOff x="0" y="0"/>
+          <a:chExt cx="0" cy="0"/>
+        </a:xfrm>
+      </p:grpSpPr>
+      <p:sp>
+        <p:nvSpPr>
+          <p:cNvPr id="10" name="Title Placeholder"/>
+          <p:cNvSpPr>
+            <a:spLocks noGrp="1"/>
+          </p:cNvSpPr>
+          <p:nvPr>
+            <p:ph type="title"/>
+          </p:nvPr>
+        </p:nvSpPr>
+        <p:spPr>
+          <a:xfrm>
+            <a:off x="914400" y="548640"/>
+            <a:ext cx="10363200" cy="731520"/>
+          </a:xfrm>
+          <a:prstGeom prst="rect">
+            <a:avLst/>
+          </a:prstGeom>
+        </p:spPr>
+        <p:txBody>
+          <a:bodyPr wrap="square" anchor="b" lIns="0" tIns="0" rIns="0" bIns="0" rtlCol="0"/>
+          <a:lstStyle>
+            <a:lvl1pPr algn="l" marL="0" indent="0">
+              <a:lnSpc>
+                <a:spcPct val="108000"/>
+              </a:lnSpc>
+              <a:buNone/>
+              <a:defRPr lang="th-TH" sz="3200" b="1" dirty="0">
+                <a:solidFill>
+                  <a:srgbClr val="23436D"/>
+                </a:solidFill>
+                <a:latin typeface="+mj-lt"/>
+                <a:ea typeface="+mj-ea"/>
+                <a:cs typeface="+mj-cs"/>
+              </a:defRPr>
+            </a:lvl1pPr>
+          </a:lstStyle>
+          <a:p>
+            <a:pPr algn="l" marL="0" indent="0">
+              <a:lnSpc>
+                <a:spcPct val="108000"/>
+              </a:lnSpc>
+              <a:buNone/>
+            </a:pPr>
+            <a:r>
+              <a:rPr lang="th-TH" sz="3200" b="1" dirty="0">
+                <a:solidFill>
+                  <a:srgbClr val="23436D"/>
+                </a:solidFill>
+                <a:latin typeface="+mj-lt"/>
+                <a:ea typeface="+mj-ea"/>
+                <a:cs typeface="+mj-cs"/>
+              </a:rPr>
+              <a:t>ชื่อสไลด์</a:t>
+            </a:r>
+          </a:p>
+        </p:txBody>
+      </p:sp>
+      <p:sp>
+        <p:nvSpPr>
+          <p:cNvPr id="11" name="Accent Rule"/>
+          <p:cNvSpPr/>
+          <p:nvPr/>
+        </p:nvSpPr>
+        <p:spPr>
+          <a:xfrm>
+            <a:off x="914400" y="1371600"/>
+            <a:ext cx="548640" cy="45720"/>
+          </a:xfrm>
+          <a:prstGeom prst="rect">
+            <a:avLst/>
+          </a:prstGeom>
+          <a:solidFill>
+            <a:srgbClr val="216B7F"/>
+          </a:solidFill>
+          <a:ln>
+            <a:noFill/>
+          </a:ln>
+        </p:spPr>
+        <p:txBody>
+          <a:bodyPr/>
+          <a:lstStyle/>
+          <a:p>
+            <a:endParaRPr lang="th-TH"/>
+          </a:p>
+        </p:txBody>
+      </p:sp>
+      <p:sp>
+        <p:nvSpPr>
+          <p:cNvPr id="12" name="Total"/>
+          <p:cNvSpPr>
+            <a:spLocks noGrp="1"/>
+          </p:cNvSpPr>
+          <p:nvPr>
+            <p:ph type="body" idx="2"/>
+          </p:nvPr>
+        </p:nvSpPr>
+        <p:spPr>
+          <a:xfrm>
+            <a:off x="914400" y="1691640"/>
+            <a:ext cx="5090160" cy="731520"/>
+          </a:xfrm>
+          <a:prstGeom prst="rect">
+            <a:avLst/>
+          </a:prstGeom>
+        </p:spPr>
+        <p:txBody>
+          <a:bodyPr wrap="square" anchor="b" lIns="0" tIns="0" rIns="0" bIns="0" rtlCol="0"/>
+          <a:lstStyle>
+            <a:lvl1pPr algn="l" marL="0" indent="0">
+              <a:lnSpc>
+                <a:spcPct val="100000"/>
+              </a:lnSpc>
+              <a:buNone/>
+              <a:defRPr lang="th-TH" sz="4000" b="1" dirty="0">
+                <a:solidFill>
+                  <a:srgbClr val="23436D"/>
+                </a:solidFill>
+                <a:latin typeface="+mj-lt"/>
+                <a:ea typeface="+mj-ea"/>
+                <a:cs typeface="+mj-cs"/>
+              </a:defRPr>
+            </a:lvl1pPr>
+          </a:lstStyle>
+          <a:p>
+            <a:pPr algn="l" marL="0" indent="0">
+              <a:lnSpc>
+                <a:spcPct val="100000"/>
+              </a:lnSpc>
+              <a:buNone/>
+            </a:pPr>
+            <a:r>
+              <a:rPr lang="th-TH" sz="4000" b="1" dirty="0">
+                <a:solidFill>
+                  <a:srgbClr val="23436D"/>
+                </a:solidFill>
+                <a:latin typeface="+mj-lt"/>
+                <a:ea typeface="+mj-ea"/>
+                <a:cs typeface="+mj-cs"/>
+              </a:rPr>
+              <a:t>0.0 ล้านบาท</a:t>
+            </a:r>
+          </a:p>
+        </p:txBody>
+      </p:sp>
+      <p:sp>
+        <p:nvSpPr>
+          <p:cNvPr id="13" name="Total Label"/>
+          <p:cNvSpPr>
+            <a:spLocks noGrp="1"/>
+          </p:cNvSpPr>
+          <p:nvPr>
+            <p:ph type="body" idx="3"/>
+          </p:nvPr>
+        </p:nvSpPr>
+        <p:spPr>
+          <a:xfrm>
+            <a:off x="914400" y="2423160"/>
+            <a:ext cx="5090160" cy="274320"/>
+          </a:xfrm>
+          <a:prstGeom prst="rect">
+            <a:avLst/>
+          </a:prstGeom>
+        </p:spPr>
+        <p:txBody>
+          <a:bodyPr wrap="square" anchor="t" lIns="0" tIns="0" rIns="0" bIns="0" rtlCol="0"/>
+          <a:lstStyle>
+            <a:lvl1pPr algn="l" marL="0" indent="0">
+              <a:lnSpc>
+                <a:spcPct val="130000"/>
+              </a:lnSpc>
+              <a:buNone/>
+              <a:defRPr lang="th-TH" sz="1200" b="1" spc="120" dirty="0">
+                <a:solidFill>
+                  <a:srgbClr val="5F5F5F"/>
+                </a:solidFill>
+                <a:latin typeface="+mn-lt"/>
+                <a:ea typeface="+mn-ea"/>
+                <a:cs typeface="+mn-cs"/>
+              </a:defRPr>
+            </a:lvl1pPr>
+          </a:lstStyle>
+          <a:p>
+            <a:pPr algn="l" marL="0" indent="0">
+              <a:lnSpc>
+                <a:spcPct val="130000"/>
+              </a:lnSpc>
+              <a:buNone/>
+            </a:pPr>
+            <a:r>
+              <a:rPr lang="th-TH" sz="1200" b="1" spc="120" dirty="0">
+                <a:solidFill>
+                  <a:srgbClr val="5F5F5F"/>
+                </a:solidFill>
+                <a:latin typeface="+mn-lt"/>
+                <a:ea typeface="+mn-ea"/>
+                <a:cs typeface="+mn-cs"/>
+              </a:rPr>
+              <a:t>ยอดรวมนี้คืออะไร</a:t>
+            </a:r>
+          </a:p>
+        </p:txBody>
+      </p:sp>
+      <p:sp>
+        <p:nvSpPr>
+          <p:cNvPr id="14" name="Intro"/>
+          <p:cNvSpPr>
+            <a:spLocks noGrp="1"/>
+          </p:cNvSpPr>
+          <p:nvPr>
+            <p:ph type="body" idx="4"/>
+          </p:nvPr>
+        </p:nvSpPr>
+        <p:spPr>
+          <a:xfrm>
+            <a:off x="6187440" y="1691640"/>
+            <a:ext cx="5090160" cy="1005840"/>
+          </a:xfrm>
+          <a:prstGeom prst="rect">
+            <a:avLst/>
+          </a:prstGeom>
+        </p:spPr>
+        <p:txBody>
+          <a:bodyPr wrap="square" anchor="t" lIns="0" tIns="0" rIns="0" bIns="0" rtlCol="0"/>
+          <a:lstStyle>
+            <a:lvl1pPr algn="l" marL="0" indent="0">
+              <a:lnSpc>
+                <a:spcPct val="130000"/>
+              </a:lnSpc>
+              <a:buNone/>
+              <a:defRPr lang="th-TH" sz="1400" dirty="0">
+                <a:solidFill>
+                  <a:srgbClr val="5F5F5F"/>
+                </a:solidFill>
+                <a:latin typeface="+mn-lt"/>
+                <a:ea typeface="+mn-ea"/>
+                <a:cs typeface="+mn-cs"/>
+              </a:defRPr>
+            </a:lvl1pPr>
+          </a:lstStyle>
+          <a:p>
+            <a:pPr algn="l" marL="0" indent="0">
+              <a:lnSpc>
+                <a:spcPct val="130000"/>
+              </a:lnSpc>
+              <a:buNone/>
+            </a:pPr>
+            <a:r>
+              <a:rPr lang="th-TH" sz="1400" dirty="0">
+                <a:solidFill>
+                  <a:srgbClr val="5F5F5F"/>
+                </a:solidFill>
+                <a:latin typeface="+mn-lt"/>
+                <a:ea typeface="+mn-ea"/>
+                <a:cs typeface="+mn-cs"/>
+              </a:rPr>
+              <a:t>เงื่อนไขของตัวเลข: รวม VAT หรือไม่ ระยะสัญญา</a:t>
+            </a:r>
+          </a:p>
+        </p:txBody>
+      </p:sp>
+      <p:sp>
+        <p:nvSpPr>
+          <p:cNvPr id="15" name="Chart Placeholder"/>
+          <p:cNvSpPr>
+            <a:spLocks noGrp="1"/>
+          </p:cNvSpPr>
+          <p:nvPr>
+            <p:ph type="chart" idx="1"/>
+          </p:nvPr>
+        </p:nvSpPr>
+        <p:spPr>
+          <a:xfrm>
+            <a:off x="2697480" y="3703320"/>
+            <a:ext cx="7299960" cy="1371600"/>
+          </a:xfrm>
+          <a:prstGeom prst="rect">
+            <a:avLst/>
+          </a:prstGeom>
+        </p:spPr>
+        <p:txBody>
+          <a:bodyPr wrap="square" anchor="ctr" lIns="0" tIns="0" rIns="0" bIns="0" rtlCol="0"/>
+          <a:lstStyle>
+            <a:lvl1pPr algn="l" marL="0" indent="0">
+              <a:lnSpc>
+                <a:spcPct val="100000"/>
+              </a:lnSpc>
+              <a:buNone/>
+              <a:defRPr lang="th-TH" sz="1200" dirty="0">
+                <a:solidFill>
+                  <a:srgbClr val="5F5F5F"/>
+                </a:solidFill>
+                <a:latin typeface="+mn-lt"/>
+                <a:ea typeface="+mn-ea"/>
+                <a:cs typeface="+mn-cs"/>
+              </a:defRPr>
+            </a:lvl1pPr>
+          </a:lstStyle>
+          <a:p>
+            <a:pPr algn="l" marL="0" indent="0">
+              <a:lnSpc>
+                <a:spcPct val="100000"/>
+              </a:lnSpc>
+              <a:buNone/>
+            </a:pPr>
+            <a:endParaRPr lang="th-TH" sz="1200"/>
+          </a:p>
+        </p:txBody>
+      </p:sp>
+      <p:sp>
+        <p:nvSpPr>
+          <p:cNvPr id="16" name="Bar 1 Label"/>
+          <p:cNvSpPr>
+            <a:spLocks noGrp="1"/>
+          </p:cNvSpPr>
+          <p:nvPr>
+            <p:ph type="body" idx="20"/>
+          </p:nvPr>
+        </p:nvSpPr>
+        <p:spPr>
+          <a:xfrm>
+            <a:off x="914400" y="3703320"/>
+            <a:ext cx="1645920" cy="457200"/>
+          </a:xfrm>
+          <a:prstGeom prst="rect">
+            <a:avLst/>
+          </a:prstGeom>
+        </p:spPr>
+        <p:txBody>
+          <a:bodyPr wrap="square" anchor="ctr" lIns="0" tIns="0" rIns="0" bIns="0" rtlCol="0"/>
+          <a:lstStyle>
+            <a:lvl1pPr algn="l" marL="0" indent="0">
+              <a:lnSpc>
+                <a:spcPct val="100000"/>
+              </a:lnSpc>
+              <a:buNone/>
+              <a:defRPr lang="th-TH" sz="1400" b="1" dirty="0">
+                <a:solidFill>
+                  <a:srgbClr val="333333"/>
+                </a:solidFill>
+                <a:latin typeface="+mn-lt"/>
+                <a:ea typeface="+mn-ea"/>
+                <a:cs typeface="+mn-cs"/>
+              </a:defRPr>
+            </a:lvl1pPr>
+          </a:lstStyle>
+          <a:p>
+            <a:pPr algn="l" marL="0" indent="0">
+              <a:lnSpc>
+                <a:spcPct val="100000"/>
+              </a:lnSpc>
+              <a:buNone/>
+            </a:pPr>
+            <a:r>
+              <a:rPr lang="th-TH" sz="1400" b="1" dirty="0">
+                <a:solidFill>
+                  <a:srgbClr val="333333"/>
+                </a:solidFill>
+                <a:latin typeface="+mn-lt"/>
+                <a:ea typeface="+mn-ea"/>
+                <a:cs typeface="+mn-cs"/>
+              </a:rPr>
+              <a:t>ชื่อแท่ง</a:t>
+            </a:r>
+          </a:p>
+        </p:txBody>
+      </p:sp>
+      <p:sp>
+        <p:nvSpPr>
+          <p:cNvPr id="17" name="Bar 1 Total"/>
+          <p:cNvSpPr>
+            <a:spLocks noGrp="1"/>
+          </p:cNvSpPr>
+          <p:nvPr>
+            <p:ph type="body" idx="21"/>
+          </p:nvPr>
+        </p:nvSpPr>
+        <p:spPr>
+          <a:xfrm>
+            <a:off x="10180320" y="3703320"/>
+            <a:ext cx="1097280" cy="457200"/>
+          </a:xfrm>
+          <a:prstGeom prst="rect">
+            <a:avLst/>
+          </a:prstGeom>
+        </p:spPr>
+        <p:txBody>
+          <a:bodyPr wrap="square" anchor="ctr" lIns="0" tIns="0" rIns="0" bIns="0" rtlCol="0"/>
+          <a:lstStyle>
+            <a:lvl1pPr algn="l" marL="0" indent="0">
+              <a:lnSpc>
+                <a:spcPct val="100000"/>
+              </a:lnSpc>
+              <a:buNone/>
+              <a:defRPr lang="th-TH" sz="1400" b="1" dirty="0">
+                <a:solidFill>
+                  <a:srgbClr val="333333"/>
+                </a:solidFill>
+                <a:latin typeface="+mn-lt"/>
+                <a:ea typeface="+mn-ea"/>
+                <a:cs typeface="+mn-cs"/>
+              </a:defRPr>
+            </a:lvl1pPr>
+          </a:lstStyle>
+          <a:p>
+            <a:pPr algn="l" marL="0" indent="0">
+              <a:lnSpc>
+                <a:spcPct val="100000"/>
+              </a:lnSpc>
+              <a:buNone/>
+            </a:pPr>
+            <a:r>
+              <a:rPr lang="th-TH" sz="1400" b="1" dirty="0">
+                <a:solidFill>
+                  <a:srgbClr val="333333"/>
+                </a:solidFill>
+                <a:latin typeface="+mn-lt"/>
+                <a:ea typeface="+mn-ea"/>
+                <a:cs typeface="+mn-cs"/>
+              </a:rPr>
+              <a:t>ยอดรวม</a:t>
+            </a:r>
+          </a:p>
+        </p:txBody>
+      </p:sp>
+      <p:sp>
+        <p:nvSpPr>
+          <p:cNvPr id="18" name="Bar 2 Label"/>
+          <p:cNvSpPr>
+            <a:spLocks noGrp="1"/>
+          </p:cNvSpPr>
+          <p:nvPr>
+            <p:ph type="body" idx="22"/>
+          </p:nvPr>
+        </p:nvSpPr>
+        <p:spPr>
+          <a:xfrm>
+            <a:off x="914400" y="4160520"/>
+            <a:ext cx="1645920" cy="457200"/>
+          </a:xfrm>
+          <a:prstGeom prst="rect">
+            <a:avLst/>
+          </a:prstGeom>
+        </p:spPr>
+        <p:txBody>
+          <a:bodyPr wrap="square" anchor="ctr" lIns="0" tIns="0" rIns="0" bIns="0" rtlCol="0"/>
+          <a:lstStyle>
+            <a:lvl1pPr algn="l" marL="0" indent="0">
+              <a:lnSpc>
+                <a:spcPct val="100000"/>
+              </a:lnSpc>
+              <a:buNone/>
+              <a:defRPr lang="th-TH" sz="1400" b="1" dirty="0">
+                <a:solidFill>
+                  <a:srgbClr val="333333"/>
+                </a:solidFill>
+                <a:latin typeface="+mn-lt"/>
+                <a:ea typeface="+mn-ea"/>
+                <a:cs typeface="+mn-cs"/>
+              </a:defRPr>
+            </a:lvl1pPr>
+          </a:lstStyle>
+          <a:p>
+            <a:pPr algn="l" marL="0" indent="0">
+              <a:lnSpc>
+                <a:spcPct val="100000"/>
+              </a:lnSpc>
+              <a:buNone/>
+            </a:pPr>
+            <a:r>
+              <a:rPr lang="th-TH" sz="1400" b="1" dirty="0">
+                <a:solidFill>
+                  <a:srgbClr val="333333"/>
+                </a:solidFill>
+                <a:latin typeface="+mn-lt"/>
+                <a:ea typeface="+mn-ea"/>
+                <a:cs typeface="+mn-cs"/>
+              </a:rPr>
+              <a:t>ชื่อแท่ง</a:t>
+            </a:r>
+          </a:p>
+        </p:txBody>
+      </p:sp>
+      <p:sp>
+        <p:nvSpPr>
+          <p:cNvPr id="19" name="Bar 2 Total"/>
+          <p:cNvSpPr>
+            <a:spLocks noGrp="1"/>
+          </p:cNvSpPr>
+          <p:nvPr>
+            <p:ph type="body" idx="23"/>
+          </p:nvPr>
+        </p:nvSpPr>
+        <p:spPr>
+          <a:xfrm>
+            <a:off x="10180320" y="4160520"/>
+            <a:ext cx="1097280" cy="457200"/>
+          </a:xfrm>
+          <a:prstGeom prst="rect">
+            <a:avLst/>
+          </a:prstGeom>
+        </p:spPr>
+        <p:txBody>
+          <a:bodyPr wrap="square" anchor="ctr" lIns="0" tIns="0" rIns="0" bIns="0" rtlCol="0"/>
+          <a:lstStyle>
+            <a:lvl1pPr algn="l" marL="0" indent="0">
+              <a:lnSpc>
+                <a:spcPct val="100000"/>
+              </a:lnSpc>
+              <a:buNone/>
+              <a:defRPr lang="th-TH" sz="1400" b="1" dirty="0">
+                <a:solidFill>
+                  <a:srgbClr val="333333"/>
+                </a:solidFill>
+                <a:latin typeface="+mn-lt"/>
+                <a:ea typeface="+mn-ea"/>
+                <a:cs typeface="+mn-cs"/>
+              </a:defRPr>
+            </a:lvl1pPr>
+          </a:lstStyle>
+          <a:p>
+            <a:pPr algn="l" marL="0" indent="0">
+              <a:lnSpc>
+                <a:spcPct val="100000"/>
+              </a:lnSpc>
+              <a:buNone/>
+            </a:pPr>
+            <a:r>
+              <a:rPr lang="th-TH" sz="1400" b="1" dirty="0">
+                <a:solidFill>
+                  <a:srgbClr val="333333"/>
+                </a:solidFill>
+                <a:latin typeface="+mn-lt"/>
+                <a:ea typeface="+mn-ea"/>
+                <a:cs typeface="+mn-cs"/>
+              </a:rPr>
+              <a:t>ยอดรวม</a:t>
+            </a:r>
+          </a:p>
+        </p:txBody>
+      </p:sp>
+      <p:sp>
+        <p:nvSpPr>
+          <p:cNvPr id="20" name="Bar 3 Label"/>
+          <p:cNvSpPr>
+            <a:spLocks noGrp="1"/>
+          </p:cNvSpPr>
+          <p:nvPr>
+            <p:ph type="body" idx="24"/>
+          </p:nvPr>
+        </p:nvSpPr>
+        <p:spPr>
+          <a:xfrm>
+            <a:off x="914400" y="4617720"/>
+            <a:ext cx="1645920" cy="457200"/>
+          </a:xfrm>
+          <a:prstGeom prst="rect">
+            <a:avLst/>
+          </a:prstGeom>
+        </p:spPr>
+        <p:txBody>
+          <a:bodyPr wrap="square" anchor="ctr" lIns="0" tIns="0" rIns="0" bIns="0" rtlCol="0"/>
+          <a:lstStyle>
+            <a:lvl1pPr algn="l" marL="0" indent="0">
+              <a:lnSpc>
+                <a:spcPct val="100000"/>
+              </a:lnSpc>
+              <a:buNone/>
+              <a:defRPr lang="th-TH" sz="1400" b="1" dirty="0">
+                <a:solidFill>
+                  <a:srgbClr val="333333"/>
+                </a:solidFill>
+                <a:latin typeface="+mn-lt"/>
+                <a:ea typeface="+mn-ea"/>
+                <a:cs typeface="+mn-cs"/>
+              </a:defRPr>
+            </a:lvl1pPr>
+          </a:lstStyle>
+          <a:p>
+            <a:pPr algn="l" marL="0" indent="0">
+              <a:lnSpc>
+                <a:spcPct val="100000"/>
+              </a:lnSpc>
+              <a:buNone/>
+            </a:pPr>
+            <a:r>
+              <a:rPr lang="th-TH" sz="1400" b="1" dirty="0">
+                <a:solidFill>
+                  <a:srgbClr val="333333"/>
+                </a:solidFill>
+                <a:latin typeface="+mn-lt"/>
+                <a:ea typeface="+mn-ea"/>
+                <a:cs typeface="+mn-cs"/>
+              </a:rPr>
+              <a:t>ชื่อแท่ง</a:t>
+            </a:r>
+          </a:p>
+        </p:txBody>
+      </p:sp>
+      <p:sp>
+        <p:nvSpPr>
+          <p:cNvPr id="21" name="Bar 3 Total"/>
+          <p:cNvSpPr>
+            <a:spLocks noGrp="1"/>
+          </p:cNvSpPr>
+          <p:nvPr>
+            <p:ph type="body" idx="25"/>
+          </p:nvPr>
+        </p:nvSpPr>
+        <p:spPr>
+          <a:xfrm>
+            <a:off x="10180320" y="4617720"/>
+            <a:ext cx="1097280" cy="457200"/>
+          </a:xfrm>
+          <a:prstGeom prst="rect">
+            <a:avLst/>
+          </a:prstGeom>
+        </p:spPr>
+        <p:txBody>
+          <a:bodyPr wrap="square" anchor="ctr" lIns="0" tIns="0" rIns="0" bIns="0" rtlCol="0"/>
+          <a:lstStyle>
+            <a:lvl1pPr algn="l" marL="0" indent="0">
+              <a:lnSpc>
+                <a:spcPct val="100000"/>
+              </a:lnSpc>
+              <a:buNone/>
+              <a:defRPr lang="th-TH" sz="1400" b="1" dirty="0">
+                <a:solidFill>
+                  <a:srgbClr val="333333"/>
+                </a:solidFill>
+                <a:latin typeface="+mn-lt"/>
+                <a:ea typeface="+mn-ea"/>
+                <a:cs typeface="+mn-cs"/>
+              </a:defRPr>
+            </a:lvl1pPr>
+          </a:lstStyle>
+          <a:p>
+            <a:pPr algn="l" marL="0" indent="0">
+              <a:lnSpc>
+                <a:spcPct val="100000"/>
+              </a:lnSpc>
+              <a:buNone/>
+            </a:pPr>
+            <a:r>
+              <a:rPr lang="th-TH" sz="1400" b="1" dirty="0">
+                <a:solidFill>
+                  <a:srgbClr val="333333"/>
+                </a:solidFill>
+                <a:latin typeface="+mn-lt"/>
+                <a:ea typeface="+mn-ea"/>
+                <a:cs typeface="+mn-cs"/>
+              </a:rPr>
+              <a:t>ยอดรวม</a:t>
+            </a:r>
+          </a:p>
+        </p:txBody>
+      </p:sp>
+      <p:sp>
+        <p:nvSpPr>
+          <p:cNvPr id="22" name="Swatch 1"/>
+          <p:cNvSpPr/>
+          <p:nvPr/>
+        </p:nvSpPr>
+        <p:spPr>
+          <a:xfrm>
+            <a:off x="914400" y="2999740"/>
+            <a:ext cx="127000" cy="127000"/>
+          </a:xfrm>
+          <a:prstGeom prst="rect">
+            <a:avLst/>
+          </a:prstGeom>
+          <a:solidFill>
+            <a:srgbClr val="2A5EA0"/>
+          </a:solidFill>
+          <a:ln>
+            <a:noFill/>
+          </a:ln>
+        </p:spPr>
+        <p:txBody>
+          <a:bodyPr/>
+          <a:lstStyle/>
+          <a:p>
+            <a:endParaRPr lang="th-TH"/>
+          </a:p>
+        </p:txBody>
+      </p:sp>
+      <p:sp>
+        <p:nvSpPr>
+          <p:cNvPr id="23" name="Segment 1 Name"/>
+          <p:cNvSpPr>
+            <a:spLocks noGrp="1"/>
+          </p:cNvSpPr>
+          <p:nvPr>
+            <p:ph type="body" idx="26"/>
+          </p:nvPr>
+        </p:nvSpPr>
+        <p:spPr>
+          <a:xfrm>
+            <a:off x="1132840" y="2926080"/>
+            <a:ext cx="2235200" cy="274320"/>
+          </a:xfrm>
+          <a:prstGeom prst="rect">
+            <a:avLst/>
+          </a:prstGeom>
+        </p:spPr>
+        <p:txBody>
+          <a:bodyPr wrap="square" anchor="ctr" lIns="0" tIns="0" rIns="0" bIns="0" rtlCol="0"/>
+          <a:lstStyle>
+            <a:lvl1pPr algn="l" marL="0" indent="0">
+              <a:lnSpc>
+                <a:spcPct val="100000"/>
+              </a:lnSpc>
+              <a:buNone/>
+              <a:defRPr lang="th-TH" sz="1200" dirty="0">
+                <a:solidFill>
+                  <a:srgbClr val="333333"/>
+                </a:solidFill>
+                <a:latin typeface="+mn-lt"/>
+                <a:ea typeface="+mn-ea"/>
+                <a:cs typeface="+mn-cs"/>
+              </a:defRPr>
+            </a:lvl1pPr>
+          </a:lstStyle>
+          <a:p>
+            <a:pPr algn="l" marL="0" indent="0">
+              <a:lnSpc>
+                <a:spcPct val="100000"/>
+              </a:lnSpc>
+              <a:buNone/>
+            </a:pPr>
+            <a:r>
+              <a:rPr lang="th-TH" sz="1200" dirty="0">
+                <a:solidFill>
+                  <a:srgbClr val="333333"/>
+                </a:solidFill>
+                <a:latin typeface="+mn-lt"/>
+                <a:ea typeface="+mn-ea"/>
+                <a:cs typeface="+mn-cs"/>
+              </a:rPr>
+              <a:t>หมวด 1</a:t>
+            </a:r>
+          </a:p>
+        </p:txBody>
+      </p:sp>
+      <p:sp>
+        <p:nvSpPr>
+          <p:cNvPr id="24" name="Segment 1 Value"/>
+          <p:cNvSpPr>
+            <a:spLocks noGrp="1"/>
+          </p:cNvSpPr>
+          <p:nvPr>
+            <p:ph type="body" idx="27"/>
+          </p:nvPr>
+        </p:nvSpPr>
+        <p:spPr>
+          <a:xfrm>
+            <a:off x="914400" y="3200400"/>
+            <a:ext cx="1325880" cy="365760"/>
+          </a:xfrm>
+          <a:prstGeom prst="rect">
+            <a:avLst/>
+          </a:prstGeom>
+        </p:spPr>
+        <p:txBody>
+          <a:bodyPr wrap="square" anchor="ctr" lIns="0" tIns="0" rIns="0" bIns="0" rtlCol="0"/>
+          <a:lstStyle>
+            <a:lvl1pPr algn="l" marL="0" indent="0">
+              <a:lnSpc>
+                <a:spcPct val="100000"/>
+              </a:lnSpc>
+              <a:buNone/>
+              <a:defRPr lang="th-TH" sz="1600" b="1" dirty="0">
+                <a:solidFill>
+                  <a:srgbClr val="333333"/>
+                </a:solidFill>
+                <a:latin typeface="+mn-lt"/>
+                <a:ea typeface="+mn-ea"/>
+                <a:cs typeface="+mn-cs"/>
+              </a:defRPr>
+            </a:lvl1pPr>
+          </a:lstStyle>
+          <a:p>
+            <a:pPr algn="l" marL="0" indent="0">
+              <a:lnSpc>
+                <a:spcPct val="100000"/>
+              </a:lnSpc>
+              <a:buNone/>
+            </a:pPr>
+            <a:r>
+              <a:rPr lang="th-TH" sz="1600" b="1" dirty="0">
+                <a:solidFill>
+                  <a:srgbClr val="333333"/>
+                </a:solidFill>
+                <a:latin typeface="+mn-lt"/>
+                <a:ea typeface="+mn-ea"/>
+                <a:cs typeface="+mn-cs"/>
+              </a:rPr>
+              <a:t>0.0</a:t>
+            </a:r>
+          </a:p>
+        </p:txBody>
+      </p:sp>
+      <p:sp>
+        <p:nvSpPr>
+          <p:cNvPr id="25" name="Segment 1 Share"/>
+          <p:cNvSpPr>
+            <a:spLocks noGrp="1"/>
+          </p:cNvSpPr>
+          <p:nvPr>
+            <p:ph type="body" idx="28"/>
+          </p:nvPr>
+        </p:nvSpPr>
+        <p:spPr>
+          <a:xfrm>
+            <a:off x="2240280" y="3200400"/>
+            <a:ext cx="1127760" cy="365760"/>
+          </a:xfrm>
+          <a:prstGeom prst="rect">
+            <a:avLst/>
+          </a:prstGeom>
+        </p:spPr>
+        <p:txBody>
+          <a:bodyPr wrap="square" anchor="ctr" lIns="0" tIns="0" rIns="0" bIns="0" rtlCol="0"/>
+          <a:lstStyle>
+            <a:lvl1pPr algn="l" marL="0" indent="0">
+              <a:lnSpc>
+                <a:spcPct val="100000"/>
+              </a:lnSpc>
+              <a:buNone/>
+              <a:defRPr lang="th-TH" sz="1200" dirty="0">
+                <a:solidFill>
+                  <a:srgbClr val="5F5F5F"/>
+                </a:solidFill>
+                <a:latin typeface="+mn-lt"/>
+                <a:ea typeface="+mn-ea"/>
+                <a:cs typeface="+mn-cs"/>
+              </a:defRPr>
+            </a:lvl1pPr>
+          </a:lstStyle>
+          <a:p>
+            <a:pPr algn="l" marL="0" indent="0">
+              <a:lnSpc>
+                <a:spcPct val="100000"/>
+              </a:lnSpc>
+              <a:buNone/>
+            </a:pPr>
+            <a:r>
+              <a:rPr lang="th-TH" sz="1200" dirty="0">
+                <a:solidFill>
+                  <a:srgbClr val="5F5F5F"/>
+                </a:solidFill>
+                <a:latin typeface="+mn-lt"/>
+                <a:ea typeface="+mn-ea"/>
+                <a:cs typeface="+mn-cs"/>
+              </a:rPr>
+              <a:t>0%</a:t>
+            </a:r>
+          </a:p>
+        </p:txBody>
+      </p:sp>
+      <p:sp>
+        <p:nvSpPr>
+          <p:cNvPr id="26" name="Swatch 2"/>
+          <p:cNvSpPr/>
+          <p:nvPr/>
+        </p:nvSpPr>
+        <p:spPr>
+          <a:xfrm>
+            <a:off x="3550920" y="2999740"/>
+            <a:ext cx="127000" cy="127000"/>
+          </a:xfrm>
+          <a:prstGeom prst="rect">
+            <a:avLst/>
+          </a:prstGeom>
+          <a:solidFill>
+            <a:srgbClr val="BB731B"/>
+          </a:solidFill>
+          <a:ln>
+            <a:noFill/>
+          </a:ln>
+        </p:spPr>
+        <p:txBody>
+          <a:bodyPr/>
+          <a:lstStyle/>
+          <a:p>
+            <a:endParaRPr lang="th-TH"/>
+          </a:p>
+        </p:txBody>
+      </p:sp>
+      <p:sp>
+        <p:nvSpPr>
+          <p:cNvPr id="27" name="Segment 2 Name"/>
+          <p:cNvSpPr>
+            <a:spLocks noGrp="1"/>
+          </p:cNvSpPr>
+          <p:nvPr>
+            <p:ph type="body" idx="29"/>
+          </p:nvPr>
+        </p:nvSpPr>
+        <p:spPr>
+          <a:xfrm>
+            <a:off x="3769360" y="2926080"/>
+            <a:ext cx="2235200" cy="274320"/>
+          </a:xfrm>
+          <a:prstGeom prst="rect">
+            <a:avLst/>
+          </a:prstGeom>
+        </p:spPr>
+        <p:txBody>
+          <a:bodyPr wrap="square" anchor="ctr" lIns="0" tIns="0" rIns="0" bIns="0" rtlCol="0"/>
+          <a:lstStyle>
+            <a:lvl1pPr algn="l" marL="0" indent="0">
+              <a:lnSpc>
+                <a:spcPct val="100000"/>
+              </a:lnSpc>
+              <a:buNone/>
+              <a:defRPr lang="th-TH" sz="1200" dirty="0">
+                <a:solidFill>
+                  <a:srgbClr val="333333"/>
+                </a:solidFill>
+                <a:latin typeface="+mn-lt"/>
+                <a:ea typeface="+mn-ea"/>
+                <a:cs typeface="+mn-cs"/>
+              </a:defRPr>
+            </a:lvl1pPr>
+          </a:lstStyle>
+          <a:p>
+            <a:pPr algn="l" marL="0" indent="0">
+              <a:lnSpc>
+                <a:spcPct val="100000"/>
+              </a:lnSpc>
+              <a:buNone/>
+            </a:pPr>
+            <a:r>
+              <a:rPr lang="th-TH" sz="1200" dirty="0">
+                <a:solidFill>
+                  <a:srgbClr val="333333"/>
+                </a:solidFill>
+                <a:latin typeface="+mn-lt"/>
+                <a:ea typeface="+mn-ea"/>
+                <a:cs typeface="+mn-cs"/>
+              </a:rPr>
+              <a:t>หมวด 2</a:t>
+            </a:r>
+          </a:p>
+        </p:txBody>
+      </p:sp>
+      <p:sp>
+        <p:nvSpPr>
+          <p:cNvPr id="28" name="Segment 2 Value"/>
+          <p:cNvSpPr>
+            <a:spLocks noGrp="1"/>
+          </p:cNvSpPr>
+          <p:nvPr>
+            <p:ph type="body" idx="30"/>
+          </p:nvPr>
+        </p:nvSpPr>
+        <p:spPr>
+          <a:xfrm>
+            <a:off x="3550920" y="3200400"/>
+            <a:ext cx="1325880" cy="365760"/>
+          </a:xfrm>
+          <a:prstGeom prst="rect">
+            <a:avLst/>
+          </a:prstGeom>
+        </p:spPr>
+        <p:txBody>
+          <a:bodyPr wrap="square" anchor="ctr" lIns="0" tIns="0" rIns="0" bIns="0" rtlCol="0"/>
+          <a:lstStyle>
+            <a:lvl1pPr algn="l" marL="0" indent="0">
+              <a:lnSpc>
+                <a:spcPct val="100000"/>
+              </a:lnSpc>
+              <a:buNone/>
+              <a:defRPr lang="th-TH" sz="1600" b="1" dirty="0">
+                <a:solidFill>
+                  <a:srgbClr val="333333"/>
+                </a:solidFill>
+                <a:latin typeface="+mn-lt"/>
+                <a:ea typeface="+mn-ea"/>
+                <a:cs typeface="+mn-cs"/>
+              </a:defRPr>
+            </a:lvl1pPr>
+          </a:lstStyle>
+          <a:p>
+            <a:pPr algn="l" marL="0" indent="0">
+              <a:lnSpc>
+                <a:spcPct val="100000"/>
+              </a:lnSpc>
+              <a:buNone/>
+            </a:pPr>
+            <a:r>
+              <a:rPr lang="th-TH" sz="1600" b="1" dirty="0">
+                <a:solidFill>
+                  <a:srgbClr val="333333"/>
+                </a:solidFill>
+                <a:latin typeface="+mn-lt"/>
+                <a:ea typeface="+mn-ea"/>
+                <a:cs typeface="+mn-cs"/>
+              </a:rPr>
+              <a:t>0.0</a:t>
+            </a:r>
+          </a:p>
+        </p:txBody>
+      </p:sp>
+      <p:sp>
+        <p:nvSpPr>
+          <p:cNvPr id="29" name="Segment 2 Share"/>
+          <p:cNvSpPr>
+            <a:spLocks noGrp="1"/>
+          </p:cNvSpPr>
+          <p:nvPr>
+            <p:ph type="body" idx="31"/>
+          </p:nvPr>
+        </p:nvSpPr>
+        <p:spPr>
+          <a:xfrm>
+            <a:off x="4876800" y="3200400"/>
+            <a:ext cx="1127760" cy="365760"/>
+          </a:xfrm>
+          <a:prstGeom prst="rect">
+            <a:avLst/>
+          </a:prstGeom>
+        </p:spPr>
+        <p:txBody>
+          <a:bodyPr wrap="square" anchor="ctr" lIns="0" tIns="0" rIns="0" bIns="0" rtlCol="0"/>
+          <a:lstStyle>
+            <a:lvl1pPr algn="l" marL="0" indent="0">
+              <a:lnSpc>
+                <a:spcPct val="100000"/>
+              </a:lnSpc>
+              <a:buNone/>
+              <a:defRPr lang="th-TH" sz="1200" dirty="0">
+                <a:solidFill>
+                  <a:srgbClr val="5F5F5F"/>
+                </a:solidFill>
+                <a:latin typeface="+mn-lt"/>
+                <a:ea typeface="+mn-ea"/>
+                <a:cs typeface="+mn-cs"/>
+              </a:defRPr>
+            </a:lvl1pPr>
+          </a:lstStyle>
+          <a:p>
+            <a:pPr algn="l" marL="0" indent="0">
+              <a:lnSpc>
+                <a:spcPct val="100000"/>
+              </a:lnSpc>
+              <a:buNone/>
+            </a:pPr>
+            <a:r>
+              <a:rPr lang="th-TH" sz="1200" dirty="0">
+                <a:solidFill>
+                  <a:srgbClr val="5F5F5F"/>
+                </a:solidFill>
+                <a:latin typeface="+mn-lt"/>
+                <a:ea typeface="+mn-ea"/>
+                <a:cs typeface="+mn-cs"/>
+              </a:rPr>
+              <a:t>0%</a:t>
+            </a:r>
+          </a:p>
+        </p:txBody>
+      </p:sp>
+      <p:sp>
+        <p:nvSpPr>
+          <p:cNvPr id="30" name="Swatch 3"/>
+          <p:cNvSpPr/>
+          <p:nvPr/>
+        </p:nvSpPr>
+        <p:spPr>
+          <a:xfrm>
+            <a:off x="6187440" y="2999740"/>
+            <a:ext cx="127000" cy="127000"/>
+          </a:xfrm>
+          <a:prstGeom prst="rect">
+            <a:avLst/>
+          </a:prstGeom>
+          <a:solidFill>
+            <a:srgbClr val="0D9298"/>
+          </a:solidFill>
+          <a:ln>
+            <a:noFill/>
+          </a:ln>
+        </p:spPr>
+        <p:txBody>
+          <a:bodyPr/>
+          <a:lstStyle/>
+          <a:p>
+            <a:endParaRPr lang="th-TH"/>
+          </a:p>
+        </p:txBody>
+      </p:sp>
+      <p:sp>
+        <p:nvSpPr>
+          <p:cNvPr id="31" name="Segment 3 Name"/>
+          <p:cNvSpPr>
+            <a:spLocks noGrp="1"/>
+          </p:cNvSpPr>
+          <p:nvPr>
+            <p:ph type="body" idx="32"/>
+          </p:nvPr>
+        </p:nvSpPr>
+        <p:spPr>
+          <a:xfrm>
+            <a:off x="6405880" y="2926080"/>
+            <a:ext cx="2235200" cy="274320"/>
+          </a:xfrm>
+          <a:prstGeom prst="rect">
+            <a:avLst/>
+          </a:prstGeom>
+        </p:spPr>
+        <p:txBody>
+          <a:bodyPr wrap="square" anchor="ctr" lIns="0" tIns="0" rIns="0" bIns="0" rtlCol="0"/>
+          <a:lstStyle>
+            <a:lvl1pPr algn="l" marL="0" indent="0">
+              <a:lnSpc>
+                <a:spcPct val="100000"/>
+              </a:lnSpc>
+              <a:buNone/>
+              <a:defRPr lang="th-TH" sz="1200" dirty="0">
+                <a:solidFill>
+                  <a:srgbClr val="333333"/>
+                </a:solidFill>
+                <a:latin typeface="+mn-lt"/>
+                <a:ea typeface="+mn-ea"/>
+                <a:cs typeface="+mn-cs"/>
+              </a:defRPr>
+            </a:lvl1pPr>
+          </a:lstStyle>
+          <a:p>
+            <a:pPr algn="l" marL="0" indent="0">
+              <a:lnSpc>
+                <a:spcPct val="100000"/>
+              </a:lnSpc>
+              <a:buNone/>
+            </a:pPr>
+            <a:r>
+              <a:rPr lang="th-TH" sz="1200" dirty="0">
+                <a:solidFill>
+                  <a:srgbClr val="333333"/>
+                </a:solidFill>
+                <a:latin typeface="+mn-lt"/>
+                <a:ea typeface="+mn-ea"/>
+                <a:cs typeface="+mn-cs"/>
+              </a:rPr>
+              <a:t>หมวด 3</a:t>
+            </a:r>
+          </a:p>
+        </p:txBody>
+      </p:sp>
+      <p:sp>
+        <p:nvSpPr>
+          <p:cNvPr id="32" name="Segment 3 Value"/>
+          <p:cNvSpPr>
+            <a:spLocks noGrp="1"/>
+          </p:cNvSpPr>
+          <p:nvPr>
+            <p:ph type="body" idx="33"/>
+          </p:nvPr>
+        </p:nvSpPr>
+        <p:spPr>
+          <a:xfrm>
+            <a:off x="6187440" y="3200400"/>
+            <a:ext cx="1325880" cy="365760"/>
+          </a:xfrm>
+          <a:prstGeom prst="rect">
+            <a:avLst/>
+          </a:prstGeom>
+        </p:spPr>
+        <p:txBody>
+          <a:bodyPr wrap="square" anchor="ctr" lIns="0" tIns="0" rIns="0" bIns="0" rtlCol="0"/>
+          <a:lstStyle>
+            <a:lvl1pPr algn="l" marL="0" indent="0">
+              <a:lnSpc>
+                <a:spcPct val="100000"/>
+              </a:lnSpc>
+              <a:buNone/>
+              <a:defRPr lang="th-TH" sz="1600" b="1" dirty="0">
+                <a:solidFill>
+                  <a:srgbClr val="333333"/>
+                </a:solidFill>
+                <a:latin typeface="+mn-lt"/>
+                <a:ea typeface="+mn-ea"/>
+                <a:cs typeface="+mn-cs"/>
+              </a:defRPr>
+            </a:lvl1pPr>
+          </a:lstStyle>
+          <a:p>
+            <a:pPr algn="l" marL="0" indent="0">
+              <a:lnSpc>
+                <a:spcPct val="100000"/>
+              </a:lnSpc>
+              <a:buNone/>
+            </a:pPr>
+            <a:r>
+              <a:rPr lang="th-TH" sz="1600" b="1" dirty="0">
+                <a:solidFill>
+                  <a:srgbClr val="333333"/>
+                </a:solidFill>
+                <a:latin typeface="+mn-lt"/>
+                <a:ea typeface="+mn-ea"/>
+                <a:cs typeface="+mn-cs"/>
+              </a:rPr>
+              <a:t>0.0</a:t>
+            </a:r>
+          </a:p>
+        </p:txBody>
+      </p:sp>
+      <p:sp>
+        <p:nvSpPr>
+          <p:cNvPr id="33" name="Segment 3 Share"/>
+          <p:cNvSpPr>
+            <a:spLocks noGrp="1"/>
+          </p:cNvSpPr>
+          <p:nvPr>
+            <p:ph type="body" idx="34"/>
+          </p:nvPr>
+        </p:nvSpPr>
+        <p:spPr>
+          <a:xfrm>
+            <a:off x="7513320" y="3200400"/>
+            <a:ext cx="1127760" cy="365760"/>
+          </a:xfrm>
+          <a:prstGeom prst="rect">
+            <a:avLst/>
+          </a:prstGeom>
+        </p:spPr>
+        <p:txBody>
+          <a:bodyPr wrap="square" anchor="ctr" lIns="0" tIns="0" rIns="0" bIns="0" rtlCol="0"/>
+          <a:lstStyle>
+            <a:lvl1pPr algn="l" marL="0" indent="0">
+              <a:lnSpc>
+                <a:spcPct val="100000"/>
+              </a:lnSpc>
+              <a:buNone/>
+              <a:defRPr lang="th-TH" sz="1200" dirty="0">
+                <a:solidFill>
+                  <a:srgbClr val="5F5F5F"/>
+                </a:solidFill>
+                <a:latin typeface="+mn-lt"/>
+                <a:ea typeface="+mn-ea"/>
+                <a:cs typeface="+mn-cs"/>
+              </a:defRPr>
+            </a:lvl1pPr>
+          </a:lstStyle>
+          <a:p>
+            <a:pPr algn="l" marL="0" indent="0">
+              <a:lnSpc>
+                <a:spcPct val="100000"/>
+              </a:lnSpc>
+              <a:buNone/>
+            </a:pPr>
+            <a:r>
+              <a:rPr lang="th-TH" sz="1200" dirty="0">
+                <a:solidFill>
+                  <a:srgbClr val="5F5F5F"/>
+                </a:solidFill>
+                <a:latin typeface="+mn-lt"/>
+                <a:ea typeface="+mn-ea"/>
+                <a:cs typeface="+mn-cs"/>
+              </a:rPr>
+              <a:t>0%</a:t>
+            </a:r>
+          </a:p>
+        </p:txBody>
+      </p:sp>
+      <p:sp>
+        <p:nvSpPr>
+          <p:cNvPr id="34" name="Swatch 4"/>
+          <p:cNvSpPr/>
+          <p:nvPr/>
+        </p:nvSpPr>
+        <p:spPr>
+          <a:xfrm>
+            <a:off x="8823960" y="2999740"/>
+            <a:ext cx="127000" cy="127000"/>
+          </a:xfrm>
+          <a:prstGeom prst="rect">
+            <a:avLst/>
+          </a:prstGeom>
+          <a:solidFill>
+            <a:srgbClr val="A4A4A4"/>
+          </a:solidFill>
+          <a:ln>
+            <a:noFill/>
+          </a:ln>
+        </p:spPr>
+        <p:txBody>
+          <a:bodyPr/>
+          <a:lstStyle/>
+          <a:p>
+            <a:endParaRPr lang="th-TH"/>
+          </a:p>
+        </p:txBody>
+      </p:sp>
+      <p:sp>
+        <p:nvSpPr>
+          <p:cNvPr id="35" name="Segment 4 Name"/>
+          <p:cNvSpPr>
+            <a:spLocks noGrp="1"/>
+          </p:cNvSpPr>
+          <p:nvPr>
+            <p:ph type="body" idx="35"/>
+          </p:nvPr>
+        </p:nvSpPr>
+        <p:spPr>
+          <a:xfrm>
+            <a:off x="9042400" y="2926080"/>
+            <a:ext cx="2235200" cy="274320"/>
+          </a:xfrm>
+          <a:prstGeom prst="rect">
+            <a:avLst/>
+          </a:prstGeom>
+        </p:spPr>
+        <p:txBody>
+          <a:bodyPr wrap="square" anchor="ctr" lIns="0" tIns="0" rIns="0" bIns="0" rtlCol="0"/>
+          <a:lstStyle>
+            <a:lvl1pPr algn="l" marL="0" indent="0">
+              <a:lnSpc>
+                <a:spcPct val="100000"/>
+              </a:lnSpc>
+              <a:buNone/>
+              <a:defRPr lang="th-TH" sz="1200" dirty="0">
+                <a:solidFill>
+                  <a:srgbClr val="333333"/>
+                </a:solidFill>
+                <a:latin typeface="+mn-lt"/>
+                <a:ea typeface="+mn-ea"/>
+                <a:cs typeface="+mn-cs"/>
+              </a:defRPr>
+            </a:lvl1pPr>
+          </a:lstStyle>
+          <a:p>
+            <a:pPr algn="l" marL="0" indent="0">
+              <a:lnSpc>
+                <a:spcPct val="100000"/>
+              </a:lnSpc>
+              <a:buNone/>
+            </a:pPr>
+            <a:r>
+              <a:rPr lang="th-TH" sz="1200" dirty="0">
+                <a:solidFill>
+                  <a:srgbClr val="333333"/>
+                </a:solidFill>
+                <a:latin typeface="+mn-lt"/>
+                <a:ea typeface="+mn-ea"/>
+                <a:cs typeface="+mn-cs"/>
+              </a:rPr>
+              <a:t>หมวด 4</a:t>
+            </a:r>
+          </a:p>
+        </p:txBody>
+      </p:sp>
+      <p:sp>
+        <p:nvSpPr>
+          <p:cNvPr id="36" name="Segment 4 Value"/>
+          <p:cNvSpPr>
+            <a:spLocks noGrp="1"/>
+          </p:cNvSpPr>
+          <p:nvPr>
+            <p:ph type="body" idx="36"/>
+          </p:nvPr>
+        </p:nvSpPr>
+        <p:spPr>
+          <a:xfrm>
+            <a:off x="8823960" y="3200400"/>
+            <a:ext cx="1325880" cy="365760"/>
+          </a:xfrm>
+          <a:prstGeom prst="rect">
+            <a:avLst/>
+          </a:prstGeom>
+        </p:spPr>
+        <p:txBody>
+          <a:bodyPr wrap="square" anchor="ctr" lIns="0" tIns="0" rIns="0" bIns="0" rtlCol="0"/>
+          <a:lstStyle>
+            <a:lvl1pPr algn="l" marL="0" indent="0">
+              <a:lnSpc>
+                <a:spcPct val="100000"/>
+              </a:lnSpc>
+              <a:buNone/>
+              <a:defRPr lang="th-TH" sz="1600" b="1" dirty="0">
+                <a:solidFill>
+                  <a:srgbClr val="333333"/>
+                </a:solidFill>
+                <a:latin typeface="+mn-lt"/>
+                <a:ea typeface="+mn-ea"/>
+                <a:cs typeface="+mn-cs"/>
+              </a:defRPr>
+            </a:lvl1pPr>
+          </a:lstStyle>
+          <a:p>
+            <a:pPr algn="l" marL="0" indent="0">
+              <a:lnSpc>
+                <a:spcPct val="100000"/>
+              </a:lnSpc>
+              <a:buNone/>
+            </a:pPr>
+            <a:r>
+              <a:rPr lang="th-TH" sz="1600" b="1" dirty="0">
+                <a:solidFill>
+                  <a:srgbClr val="333333"/>
+                </a:solidFill>
+                <a:latin typeface="+mn-lt"/>
+                <a:ea typeface="+mn-ea"/>
+                <a:cs typeface="+mn-cs"/>
+              </a:rPr>
+              <a:t>0.0</a:t>
+            </a:r>
+          </a:p>
+        </p:txBody>
+      </p:sp>
+      <p:sp>
+        <p:nvSpPr>
+          <p:cNvPr id="37" name="Segment 4 Share"/>
+          <p:cNvSpPr>
+            <a:spLocks noGrp="1"/>
+          </p:cNvSpPr>
+          <p:nvPr>
+            <p:ph type="body" idx="37"/>
+          </p:nvPr>
+        </p:nvSpPr>
+        <p:spPr>
+          <a:xfrm>
+            <a:off x="10149840" y="3200400"/>
+            <a:ext cx="1127760" cy="365760"/>
+          </a:xfrm>
+          <a:prstGeom prst="rect">
+            <a:avLst/>
+          </a:prstGeom>
+        </p:spPr>
+        <p:txBody>
+          <a:bodyPr wrap="square" anchor="ctr" lIns="0" tIns="0" rIns="0" bIns="0" rtlCol="0"/>
+          <a:lstStyle>
+            <a:lvl1pPr algn="l" marL="0" indent="0">
+              <a:lnSpc>
+                <a:spcPct val="100000"/>
+              </a:lnSpc>
+              <a:buNone/>
+              <a:defRPr lang="th-TH" sz="1200" dirty="0">
+                <a:solidFill>
+                  <a:srgbClr val="5F5F5F"/>
+                </a:solidFill>
+                <a:latin typeface="+mn-lt"/>
+                <a:ea typeface="+mn-ea"/>
+                <a:cs typeface="+mn-cs"/>
+              </a:defRPr>
+            </a:lvl1pPr>
+          </a:lstStyle>
+          <a:p>
+            <a:pPr algn="l" marL="0" indent="0">
+              <a:lnSpc>
+                <a:spcPct val="100000"/>
+              </a:lnSpc>
+              <a:buNone/>
+            </a:pPr>
+            <a:r>
+              <a:rPr lang="th-TH" sz="1200" dirty="0">
+                <a:solidFill>
+                  <a:srgbClr val="5F5F5F"/>
+                </a:solidFill>
+                <a:latin typeface="+mn-lt"/>
+                <a:ea typeface="+mn-ea"/>
+                <a:cs typeface="+mn-cs"/>
+              </a:rPr>
+              <a:t>0%</a:t>
+            </a:r>
+          </a:p>
+        </p:txBody>
+      </p:sp>
+      <p:sp>
+        <p:nvSpPr>
+          <p:cNvPr id="38" name="Source"/>
+          <p:cNvSpPr>
+            <a:spLocks noGrp="1"/>
+          </p:cNvSpPr>
+          <p:nvPr>
+            <p:ph type="body" idx="5"/>
+          </p:nvPr>
+        </p:nvSpPr>
+        <p:spPr>
+          <a:xfrm>
+            <a:off x="914400" y="5257800"/>
+            <a:ext cx="10363200" cy="274320"/>
+          </a:xfrm>
+          <a:prstGeom prst="rect">
+            <a:avLst/>
+          </a:prstGeom>
+        </p:spPr>
+        <p:txBody>
+          <a:bodyPr wrap="square" anchor="t" lIns="0" tIns="0" rIns="0" bIns="0" rtlCol="0"/>
+          <a:lstStyle>
+            <a:lvl1pPr algn="l" marL="0" indent="0">
+              <a:lnSpc>
+                <a:spcPct val="130000"/>
+              </a:lnSpc>
+              <a:buNone/>
+              <a:defRPr lang="th-TH" sz="1000" dirty="0">
+                <a:solidFill>
+                  <a:srgbClr val="5F5F5F"/>
+                </a:solidFill>
+                <a:latin typeface="+mn-lt"/>
+                <a:ea typeface="+mn-ea"/>
+                <a:cs typeface="+mn-cs"/>
+              </a:defRPr>
+            </a:lvl1pPr>
+          </a:lstStyle>
+          <a:p>
+            <a:pPr algn="l" marL="0" indent="0">
+              <a:lnSpc>
+                <a:spcPct val="130000"/>
+              </a:lnSpc>
+              <a:buNone/>
+            </a:pPr>
+            <a:r>
+              <a:rPr lang="th-TH" sz="1000" dirty="0">
+                <a:solidFill>
+                  <a:srgbClr val="5F5F5F"/>
+                </a:solidFill>
+                <a:latin typeface="+mn-lt"/>
+                <a:ea typeface="+mn-ea"/>
+                <a:cs typeface="+mn-cs"/>
+              </a:rPr>
+              <a:t>ที่มาของตัวเลข · ปัดเศษ</a:t>
+            </a:r>
+          </a:p>
+        </p:txBody>
+      </p:sp>
+      <p:sp>
+        <p:nvSpPr>
+          <p:cNvPr id="39" name="Takeaway Band"/>
+          <p:cNvSpPr/>
+          <p:nvPr/>
+        </p:nvSpPr>
+        <p:spPr>
+          <a:xfrm>
+            <a:off x="914400" y="5623560"/>
+            <a:ext cx="10363200" cy="411480"/>
+          </a:xfrm>
+          <a:prstGeom prst="rect">
+            <a:avLst/>
+          </a:prstGeom>
+          <a:solidFill>
+            <a:srgbClr val="E8F6F5"/>
+          </a:solidFill>
+          <a:ln>
+            <a:noFill/>
+          </a:ln>
+        </p:spPr>
+        <p:txBody>
+          <a:bodyPr/>
+          <a:lstStyle/>
+          <a:p>
+            <a:endParaRPr lang="th-TH"/>
+          </a:p>
+        </p:txBody>
+      </p:sp>
+      <p:sp>
+        <p:nvSpPr>
+          <p:cNvPr id="40" name="Takeaway Label"/>
+          <p:cNvSpPr>
+            <a:spLocks noGrp="1"/>
+          </p:cNvSpPr>
+          <p:nvPr>
+            <p:ph type="body" idx="6"/>
+          </p:nvPr>
+        </p:nvSpPr>
+        <p:spPr>
+          <a:xfrm>
+            <a:off x="1097280" y="5684520"/>
+            <a:ext cx="1828800" cy="289560"/>
+          </a:xfrm>
+          <a:prstGeom prst="rect">
+            <a:avLst/>
+          </a:prstGeom>
+        </p:spPr>
+        <p:txBody>
+          <a:bodyPr wrap="square" anchor="ctr" lIns="0" tIns="0" rIns="0" bIns="0" rtlCol="0"/>
+          <a:lstStyle>
+            <a:lvl1pPr algn="l" marL="0" indent="0">
+              <a:lnSpc>
+                <a:spcPct val="100000"/>
+              </a:lnSpc>
+              <a:buNone/>
+              <a:defRPr lang="th-TH" sz="1200" b="1" spc="120" dirty="0">
+                <a:solidFill>
+                  <a:srgbClr val="216B7F"/>
+                </a:solidFill>
+                <a:latin typeface="+mn-lt"/>
+                <a:ea typeface="+mn-ea"/>
+                <a:cs typeface="+mn-cs"/>
+              </a:defRPr>
+            </a:lvl1pPr>
+          </a:lstStyle>
+          <a:p>
+            <a:pPr algn="l" marL="0" indent="0">
+              <a:lnSpc>
+                <a:spcPct val="100000"/>
+              </a:lnSpc>
+              <a:buNone/>
+            </a:pPr>
+            <a:r>
+              <a:rPr lang="th-TH" sz="1200" b="1" spc="120" dirty="0">
+                <a:solidFill>
+                  <a:srgbClr val="216B7F"/>
+                </a:solidFill>
+                <a:latin typeface="+mn-lt"/>
+                <a:ea typeface="+mn-ea"/>
+                <a:cs typeface="+mn-cs"/>
+              </a:rPr>
+              <a:t>สรุป</a:t>
+            </a:r>
+          </a:p>
+        </p:txBody>
+      </p:sp>
+      <p:sp>
+        <p:nvSpPr>
+          <p:cNvPr id="41" name="Takeaway Copy"/>
+          <p:cNvSpPr>
+            <a:spLocks noGrp="1"/>
+          </p:cNvSpPr>
+          <p:nvPr>
+            <p:ph type="body" idx="7"/>
+          </p:nvPr>
+        </p:nvSpPr>
+        <p:spPr>
+          <a:xfrm>
+            <a:off x="2926080" y="5684520"/>
+            <a:ext cx="8168640" cy="289560"/>
+          </a:xfrm>
+          <a:prstGeom prst="rect">
+            <a:avLst/>
+          </a:prstGeom>
+        </p:spPr>
+        <p:txBody>
+          <a:bodyPr wrap="square" anchor="ctr" lIns="0" tIns="0" rIns="0" bIns="0" rtlCol="0"/>
+          <a:lstStyle>
+            <a:lvl1pPr algn="l" marL="0" indent="0">
+              <a:lnSpc>
+                <a:spcPct val="100000"/>
+              </a:lnSpc>
+              <a:buNone/>
+              <a:defRPr lang="th-TH" sz="1400" dirty="0">
+                <a:solidFill>
+                  <a:srgbClr val="333333"/>
+                </a:solidFill>
+                <a:latin typeface="+mn-lt"/>
+                <a:ea typeface="+mn-ea"/>
+                <a:cs typeface="+mn-cs"/>
+              </a:defRPr>
+            </a:lvl1pPr>
+          </a:lstStyle>
+          <a:p>
+            <a:pPr algn="l" marL="0" indent="0">
+              <a:lnSpc>
+                <a:spcPct val="100000"/>
+              </a:lnSpc>
+              <a:buNone/>
+            </a:pPr>
+            <a:r>
+              <a:rPr lang="th-TH" sz="1400" dirty="0">
+                <a:solidFill>
+                  <a:srgbClr val="333333"/>
+                </a:solidFill>
+                <a:latin typeface="+mn-lt"/>
+                <a:ea typeface="+mn-ea"/>
+                <a:cs typeface="+mn-cs"/>
+              </a:rPr>
+              <a:t>ประเด็นสรุปหนึ่งบรรทัด</a:t>
+            </a:r>
+          </a:p>
+        </p:txBody>
+      </p:sp>
+      <p:sp>
+        <p:nvSpPr>
+          <p:cNvPr id="90" name="Footer Rule"/>
+          <p:cNvSpPr/>
+          <p:nvPr/>
+        </p:nvSpPr>
+        <p:spPr>
+          <a:xfrm>
+            <a:off x="914400" y="6172200"/>
+            <a:ext cx="10363200" cy="12700"/>
+          </a:xfrm>
+          <a:prstGeom prst="rect">
+            <a:avLst/>
+          </a:prstGeom>
+          <a:solidFill>
+            <a:srgbClr val="E5E5E5"/>
+          </a:solidFill>
+          <a:ln>
+            <a:noFill/>
+          </a:ln>
+        </p:spPr>
+        <p:txBody>
+          <a:bodyPr/>
+          <a:lstStyle/>
+          <a:p>
+            <a:endParaRPr lang="th-TH"/>
+          </a:p>
+        </p:txBody>
+      </p:sp>
+      <p:sp>
+        <p:nvSpPr>
+          <p:cNvPr id="91" name="Date Placeholder"/>
+          <p:cNvSpPr>
+            <a:spLocks noGrp="1"/>
+          </p:cNvSpPr>
+          <p:nvPr>
+            <p:ph type="dt" idx="10"/>
+          </p:nvPr>
+        </p:nvSpPr>
+        <p:spPr>
+          <a:xfrm>
+            <a:off x="914400" y="6309360"/>
+            <a:ext cx="2743200" cy="274320"/>
+          </a:xfrm>
+          <a:prstGeom prst="rect">
+            <a:avLst/>
+          </a:prstGeom>
+        </p:spPr>
+        <p:txBody>
+          <a:bodyPr wrap="square" anchor="ctr" lIns="0" tIns="0" rIns="0" bIns="0" rtlCol="0"/>
+          <a:lstStyle>
+            <a:lvl1pPr algn="l" marL="0" indent="0">
+              <a:lnSpc>
+                <a:spcPct val="100000"/>
+              </a:lnSpc>
+              <a:buNone/>
+              <a:defRPr lang="th-TH" sz="1000" dirty="0">
+                <a:solidFill>
+                  <a:srgbClr val="5F5F5F"/>
+                </a:solidFill>
+                <a:latin typeface="+mn-lt"/>
+                <a:ea typeface="+mn-ea"/>
+                <a:cs typeface="+mn-cs"/>
+              </a:defRPr>
+            </a:lvl1pPr>
+          </a:lstStyle>
+          <a:p>
+            <a:pPr algn="l" marL="0" indent="0">
+              <a:lnSpc>
+                <a:spcPct val="100000"/>
+              </a:lnSpc>
+              <a:buNone/>
+            </a:pPr>
+            <a:endParaRPr lang="th-TH" sz="1000"/>
+          </a:p>
+        </p:txBody>
+      </p:sp>
+      <p:sp>
+        <p:nvSpPr>
+          <p:cNvPr id="92" name="Footer Placeholder"/>
+          <p:cNvSpPr>
+            <a:spLocks noGrp="1"/>
+          </p:cNvSpPr>
+          <p:nvPr>
+            <p:ph type="ftr" idx="11"/>
+          </p:nvPr>
+        </p:nvSpPr>
+        <p:spPr>
+          <a:xfrm>
+            <a:off x="4572000" y="6309360"/>
+            <a:ext cx="3657600" cy="274320"/>
+          </a:xfrm>
+          <a:prstGeom prst="rect">
+            <a:avLst/>
+          </a:prstGeom>
+        </p:spPr>
+        <p:txBody>
+          <a:bodyPr wrap="square" anchor="ctr" lIns="0" tIns="0" rIns="0" bIns="0" rtlCol="0"/>
+          <a:lstStyle>
+            <a:lvl1pPr algn="ctr" marL="0" indent="0">
+              <a:lnSpc>
+                <a:spcPct val="100000"/>
+              </a:lnSpc>
+              <a:buNone/>
+              <a:defRPr lang="th-TH" sz="1000" dirty="0">
+                <a:solidFill>
+                  <a:srgbClr val="5F5F5F"/>
+                </a:solidFill>
+                <a:latin typeface="+mn-lt"/>
+                <a:ea typeface="+mn-ea"/>
+                <a:cs typeface="+mn-cs"/>
+              </a:defRPr>
+            </a:lvl1pPr>
+          </a:lstStyle>
+          <a:p>
+            <a:pPr algn="ctr" marL="0" indent="0">
+              <a:lnSpc>
+                <a:spcPct val="100000"/>
+              </a:lnSpc>
+              <a:buNone/>
+            </a:pPr>
+            <a:endParaRPr lang="th-TH" sz="1000"/>
+          </a:p>
+        </p:txBody>
+      </p:sp>
+      <p:sp>
+        <p:nvSpPr>
+          <p:cNvPr id="93" name="Slide Number Placeholder"/>
+          <p:cNvSpPr>
+            <a:spLocks noGrp="1"/>
+          </p:cNvSpPr>
+          <p:nvPr>
+            <p:ph type="sldNum" sz="quarter" idx="12"/>
+          </p:nvPr>
+        </p:nvSpPr>
+        <p:spPr>
+          <a:xfrm>
+            <a:off x="9906000" y="6309360"/>
+            <a:ext cx="1371600" cy="274320"/>
+          </a:xfrm>
+          <a:prstGeom prst="rect">
+            <a:avLst/>
+          </a:prstGeom>
+        </p:spPr>
+        <p:txBody>
+          <a:bodyPr anchor="ctr"/>
+          <a:lstStyle>
+            <a:lvl1pPr algn="r" marL="0" indent="0">
+              <a:lnSpc>
+                <a:spcPct val="100000"/>
+              </a:lnSpc>
+              <a:buNone/>
+              <a:defRPr lang="th-TH" sz="1000" dirty="0">
+                <a:solidFill>
+                  <a:srgbClr val="5F5F5F"/>
+                </a:solidFill>
+                <a:latin typeface="+mn-lt"/>
+                <a:ea typeface="+mn-ea"/>
+                <a:cs typeface="+mn-cs"/>
+              </a:defRPr>
+            </a:lvl1pPr>
+          </a:lstStyle>
+          <a:p>
+            <a:pPr algn="r" marL="0" indent="0">
+              <a:buNone/>
+            </a:pPr>
+            <a:fld id="{B7E3A1C2-4F5D-4A88-9C1E-6D2F0A93B451}" type="slidenum">
+              <a:rPr lang="th-TH" sz="1000">
+                <a:solidFill>
+                  <a:srgbClr val="5F5F5F"/>
+                </a:solidFill>
+                <a:latin typeface="+mn-lt"/>
+                <a:cs typeface="+mn-cs"/>
+              </a:rPr>
+              <a:t>2</a:t>
+            </a:fld>
+            <a:endParaRPr lang="th-TH" sz="1000"/>
+          </a:p>
+        </p:txBody>
+      </p:sp>
+      <p:pic>
+        <p:nvPicPr>
+          <p:cNvPr id="94" name="NCT Mark"/>
+          <p:cNvPicPr>
+            <a:picLocks noChangeAspect="1"/>
+          </p:cNvPicPr>
+          <p:nvPr/>
+        </p:nvPicPr>
+        <p:blipFill>
+          <a:blip r:embed="rId2"/>
+          <a:stretch>
+            <a:fillRect/>
+          </a:stretch>
+        </p:blipFill>
+        <p:spPr>
+          <a:xfrm>
+            <a:off x="9494520" y="6289360"/>
+            <a:ext cx="274320" cy="174498"/>
+          </a:xfrm>
+          <a:prstGeom prst="rect">
+            <a:avLst/>
+          </a:prstGeom>
+        </p:spPr>
+      </p:pic>
+    </p:spTree>
+  </p:cSld>
+  <p:clrMapOvr>
+    <a:masterClrMapping/>
+  </p:clrMapOvr>
+</p:sldLayout>
+</file>
+
 <file path=ppt/slideLayouts/slideLayout3.xml><?xml version="1.0" encoding="utf-8"?>
 <p:sldLayout xmlns:a="http://schemas.openxmlformats.org/drawingml/2006/main" xmlns:r="http://schemas.openxmlformats.org/officeDocument/2006/relationships" xmlns:p="http://schemas.openxmlformats.org/presentationml/2006/main" type="obj" showMasterSp="0" preserve="1">
   <p:cSld name="03 Title and Content">
@@ -19787,7 +21981,7 @@
           <p:nvPr/>
         </p:nvPicPr>
         <p:blipFill>
-          <a:blip r:embed="rId23"/>
+          <a:blip r:embed="rId24"/>
           <a:stretch>
             <a:fillRect/>
           </a:stretch>
@@ -19827,6 +22021,7 @@
     <p:sldLayoutId id="2147483667" r:id="rId19"/>
     <p:sldLayoutId id="2147483668" r:id="rId20"/>
     <p:sldLayoutId id="2147483669" r:id="rId21"/>
+    <p:sldLayoutId id="2147483670" r:id="rId22"/>
   </p:sldLayoutIdLst>
   <p:txStyles>
     <p:titleStyle>
@@ -24994,19 +27189,19 @@
             <a:pPr/>
             <a:r>
               <a:rPr lang="th-TH" dirty="0"/>
-              <a:t>5. Implementation Stage</a:t>
-            </a:r>
-          </a:p>
-        </p:txBody>
-      </p:sp>
-      <p:sp>
-        <p:nvSpPr>
-          <p:cNvPr id="3" name="KAL"/>
-          <p:cNvSpPr>
-            <a:spLocks noGrp="1"/>
-          </p:cNvSpPr>
-          <p:nvPr>
-            <p:ph type="body" idx="1"/>
+              <a:t>ครึ่งหนึ่งของงบ 4.8 ล้านบาท คือค่าพัฒนาระบบ</a:t>
+            </a:r>
+          </a:p>
+        </p:txBody>
+      </p:sp>
+      <p:sp>
+        <p:nvSpPr>
+          <p:cNvPr id="3" name="Total"/>
+          <p:cNvSpPr>
+            <a:spLocks noGrp="1"/>
+          </p:cNvSpPr>
+          <p:nvPr>
+            <p:ph type="body" idx="2"/>
           </p:nvPr>
         </p:nvSpPr>
         <p:spPr/>
@@ -25017,19 +27212,19 @@
             <a:pPr/>
             <a:r>
               <a:rPr lang="th-TH" dirty="0"/>
-              <a:t>Key Activity :</a:t>
-            </a:r>
-          </a:p>
-        </p:txBody>
-      </p:sp>
-      <p:sp>
-        <p:nvSpPr>
-          <p:cNvPr id="4" name="KAV"/>
-          <p:cNvSpPr>
-            <a:spLocks noGrp="1"/>
-          </p:cNvSpPr>
-          <p:nvPr>
-            <p:ph type="body" idx="2"/>
+              <a:t>4.8 ล้านบาท</a:t>
+            </a:r>
+          </a:p>
+        </p:txBody>
+      </p:sp>
+      <p:sp>
+        <p:nvSpPr>
+          <p:cNvPr id="4" name="TotalL"/>
+          <p:cNvSpPr>
+            <a:spLocks noGrp="1"/>
+          </p:cNvSpPr>
+          <p:nvPr>
+            <p:ph type="body" idx="3"/>
           </p:nvPr>
         </p:nvSpPr>
         <p:spPr/>
@@ -25040,19 +27235,19 @@
             <a:pPr/>
             <a:r>
               <a:rPr lang="th-TH" dirty="0"/>
-              <a:t>ตั้งค่าสภาพแวดล้อม ติดตั้งฮาร์ดแวร์และซอฟต์แวร์</a:t>
-            </a:r>
-          </a:p>
-        </p:txBody>
-      </p:sp>
-      <p:sp>
-        <p:nvSpPr>
-          <p:cNvPr id="5" name="PL"/>
-          <p:cNvSpPr>
-            <a:spLocks noGrp="1"/>
-          </p:cNvSpPr>
-          <p:nvPr>
-            <p:ph type="body" idx="3"/>
+              <a:t>งบโครงการรวมทั้งสิ้น</a:t>
+            </a:r>
+          </a:p>
+        </p:txBody>
+      </p:sp>
+      <p:sp>
+        <p:nvSpPr>
+          <p:cNvPr id="5" name="Intro"/>
+          <p:cNvSpPr>
+            <a:spLocks noGrp="1"/>
+          </p:cNvSpPr>
+          <p:nvPr>
+            <p:ph type="body" idx="4"/>
           </p:nvPr>
         </p:nvSpPr>
         <p:spPr/>
@@ -25063,19 +27258,39 @@
             <a:pPr/>
             <a:r>
               <a:rPr lang="th-TH" dirty="0"/>
-              <a:t>Participant :</a:t>
-            </a:r>
-          </a:p>
-        </p:txBody>
-      </p:sp>
-      <p:sp>
-        <p:nvSpPr>
-          <p:cNvPr id="6" name="PV"/>
-          <p:cNvSpPr>
-            <a:spLocks noGrp="1"/>
-          </p:cNvSpPr>
-          <p:nvPr>
-            <p:ph type="body" idx="4"/>
+              <a:t>รวมภาษีมูลค่าเพิ่ม · สัญญา 12 เดือน ไม่รวมค่าบริการรายเดือนหลังปีแรก</a:t>
+            </a:r>
+          </a:p>
+        </p:txBody>
+      </p:sp>
+      <p:graphicFrame>
+        <p:nvGraphicFramePr>
+          <p:cNvPr id="6" name="Composition"/>
+          <p:cNvGraphicFramePr>
+            <a:graphicFrameLocks noGrp="1"/>
+          </p:cNvGraphicFramePr>
+          <p:nvPr>
+            <p:ph type="chart" idx="1"/>
+          </p:nvPr>
+        </p:nvGraphicFramePr>
+        <p:xfrm>
+          <a:off x="2697480" y="3703320"/>
+          <a:ext cx="7299960" cy="1371600"/>
+        </p:xfrm>
+        <a:graphic>
+          <a:graphicData uri="http://schemas.openxmlformats.org/drawingml/2006/chart">
+            <c:chart xmlns:c="http://schemas.openxmlformats.org/drawingml/2006/chart" r:id="rId2"/>
+          </a:graphicData>
+        </a:graphic>
+      </p:graphicFrame>
+      <p:sp>
+        <p:nvSpPr>
+          <p:cNvPr id="7" name="B1"/>
+          <p:cNvSpPr>
+            <a:spLocks noGrp="1"/>
+          </p:cNvSpPr>
+          <p:nvPr>
+            <p:ph type="body" idx="20"/>
           </p:nvPr>
         </p:nvSpPr>
         <p:spPr/>
@@ -25086,14 +27301,290 @@
             <a:pPr/>
             <a:r>
               <a:rPr lang="th-TH" dirty="0"/>
-              <a:t>NCT Infra Engineer, ทีมไอทีลูกค้า, Business Analyst</a:t>
-            </a:r>
-          </a:p>
-        </p:txBody>
-      </p:sp>
-      <p:sp>
-        <p:nvSpPr>
-          <p:cNvPr id="7" name="PN"/>
+              <a:t>งบโครงการ</a:t>
+            </a:r>
+          </a:p>
+        </p:txBody>
+      </p:sp>
+      <p:sp>
+        <p:nvSpPr>
+          <p:cNvPr id="8" name="SN"/>
+          <p:cNvSpPr>
+            <a:spLocks noGrp="1"/>
+          </p:cNvSpPr>
+          <p:nvPr>
+            <p:ph type="body" idx="26"/>
+          </p:nvPr>
+        </p:nvSpPr>
+        <p:spPr/>
+        <p:txBody>
+          <a:bodyPr/>
+          <a:lstStyle/>
+          <a:p>
+            <a:pPr/>
+            <a:r>
+              <a:rPr lang="th-TH" dirty="0"/>
+              <a:t>พัฒนาและตั้งค่าระบบ</a:t>
+            </a:r>
+          </a:p>
+        </p:txBody>
+      </p:sp>
+      <p:sp>
+        <p:nvSpPr>
+          <p:cNvPr id="9" name="SV"/>
+          <p:cNvSpPr>
+            <a:spLocks noGrp="1"/>
+          </p:cNvSpPr>
+          <p:nvPr>
+            <p:ph type="body" idx="27"/>
+          </p:nvPr>
+        </p:nvSpPr>
+        <p:spPr/>
+        <p:txBody>
+          <a:bodyPr/>
+          <a:lstStyle/>
+          <a:p>
+            <a:pPr/>
+            <a:r>
+              <a:rPr lang="th-TH" dirty="0"/>
+              <a:t>2.4 ล้านบาท</a:t>
+            </a:r>
+          </a:p>
+        </p:txBody>
+      </p:sp>
+      <p:sp>
+        <p:nvSpPr>
+          <p:cNvPr id="10" name="SP"/>
+          <p:cNvSpPr>
+            <a:spLocks noGrp="1"/>
+          </p:cNvSpPr>
+          <p:nvPr>
+            <p:ph type="body" idx="28"/>
+          </p:nvPr>
+        </p:nvSpPr>
+        <p:spPr/>
+        <p:txBody>
+          <a:bodyPr/>
+          <a:lstStyle/>
+          <a:p>
+            <a:pPr/>
+            <a:r>
+              <a:rPr lang="th-TH" dirty="0"/>
+              <a:t>50%</a:t>
+            </a:r>
+          </a:p>
+        </p:txBody>
+      </p:sp>
+      <p:sp>
+        <p:nvSpPr>
+          <p:cNvPr id="11" name="SN"/>
+          <p:cNvSpPr>
+            <a:spLocks noGrp="1"/>
+          </p:cNvSpPr>
+          <p:nvPr>
+            <p:ph type="body" idx="29"/>
+          </p:nvPr>
+        </p:nvSpPr>
+        <p:spPr/>
+        <p:txBody>
+          <a:bodyPr/>
+          <a:lstStyle/>
+          <a:p>
+            <a:pPr/>
+            <a:r>
+              <a:rPr lang="th-TH" dirty="0"/>
+              <a:t>ไลเซนส์ซอฟต์แวร์</a:t>
+            </a:r>
+          </a:p>
+        </p:txBody>
+      </p:sp>
+      <p:sp>
+        <p:nvSpPr>
+          <p:cNvPr id="12" name="SV"/>
+          <p:cNvSpPr>
+            <a:spLocks noGrp="1"/>
+          </p:cNvSpPr>
+          <p:nvPr>
+            <p:ph type="body" idx="30"/>
+          </p:nvPr>
+        </p:nvSpPr>
+        <p:spPr/>
+        <p:txBody>
+          <a:bodyPr/>
+          <a:lstStyle/>
+          <a:p>
+            <a:pPr/>
+            <a:r>
+              <a:rPr lang="th-TH" dirty="0"/>
+              <a:t>1.2 ล้านบาท</a:t>
+            </a:r>
+          </a:p>
+        </p:txBody>
+      </p:sp>
+      <p:sp>
+        <p:nvSpPr>
+          <p:cNvPr id="13" name="SP"/>
+          <p:cNvSpPr>
+            <a:spLocks noGrp="1"/>
+          </p:cNvSpPr>
+          <p:nvPr>
+            <p:ph type="body" idx="31"/>
+          </p:nvPr>
+        </p:nvSpPr>
+        <p:spPr/>
+        <p:txBody>
+          <a:bodyPr/>
+          <a:lstStyle/>
+          <a:p>
+            <a:pPr/>
+            <a:r>
+              <a:rPr lang="th-TH" dirty="0"/>
+              <a:t>25%</a:t>
+            </a:r>
+          </a:p>
+        </p:txBody>
+      </p:sp>
+      <p:sp>
+        <p:nvSpPr>
+          <p:cNvPr id="14" name="SN"/>
+          <p:cNvSpPr>
+            <a:spLocks noGrp="1"/>
+          </p:cNvSpPr>
+          <p:nvPr>
+            <p:ph type="body" idx="32"/>
+          </p:nvPr>
+        </p:nvSpPr>
+        <p:spPr/>
+        <p:txBody>
+          <a:bodyPr/>
+          <a:lstStyle/>
+          <a:p>
+            <a:pPr/>
+            <a:r>
+              <a:rPr lang="th-TH" dirty="0"/>
+              <a:t>คลาวด์ปีแรก</a:t>
+            </a:r>
+          </a:p>
+        </p:txBody>
+      </p:sp>
+      <p:sp>
+        <p:nvSpPr>
+          <p:cNvPr id="15" name="SV"/>
+          <p:cNvSpPr>
+            <a:spLocks noGrp="1"/>
+          </p:cNvSpPr>
+          <p:nvPr>
+            <p:ph type="body" idx="33"/>
+          </p:nvPr>
+        </p:nvSpPr>
+        <p:spPr/>
+        <p:txBody>
+          <a:bodyPr/>
+          <a:lstStyle/>
+          <a:p>
+            <a:pPr/>
+            <a:r>
+              <a:rPr lang="th-TH" dirty="0"/>
+              <a:t>0.7 ล้านบาท</a:t>
+            </a:r>
+          </a:p>
+        </p:txBody>
+      </p:sp>
+      <p:sp>
+        <p:nvSpPr>
+          <p:cNvPr id="16" name="SP"/>
+          <p:cNvSpPr>
+            <a:spLocks noGrp="1"/>
+          </p:cNvSpPr>
+          <p:nvPr>
+            <p:ph type="body" idx="34"/>
+          </p:nvPr>
+        </p:nvSpPr>
+        <p:spPr/>
+        <p:txBody>
+          <a:bodyPr/>
+          <a:lstStyle/>
+          <a:p>
+            <a:pPr/>
+            <a:r>
+              <a:rPr lang="th-TH" dirty="0"/>
+              <a:t>15%</a:t>
+            </a:r>
+          </a:p>
+        </p:txBody>
+      </p:sp>
+      <p:sp>
+        <p:nvSpPr>
+          <p:cNvPr id="17" name="SN"/>
+          <p:cNvSpPr>
+            <a:spLocks noGrp="1"/>
+          </p:cNvSpPr>
+          <p:nvPr>
+            <p:ph type="body" idx="35"/>
+          </p:nvPr>
+        </p:nvSpPr>
+        <p:spPr/>
+        <p:txBody>
+          <a:bodyPr/>
+          <a:lstStyle/>
+          <a:p>
+            <a:pPr/>
+            <a:r>
+              <a:rPr lang="th-TH" dirty="0"/>
+              <a:t>อื่น ๆ</a:t>
+            </a:r>
+          </a:p>
+        </p:txBody>
+      </p:sp>
+      <p:sp>
+        <p:nvSpPr>
+          <p:cNvPr id="18" name="SV"/>
+          <p:cNvSpPr>
+            <a:spLocks noGrp="1"/>
+          </p:cNvSpPr>
+          <p:nvPr>
+            <p:ph type="body" idx="36"/>
+          </p:nvPr>
+        </p:nvSpPr>
+        <p:spPr/>
+        <p:txBody>
+          <a:bodyPr/>
+          <a:lstStyle/>
+          <a:p>
+            <a:pPr/>
+            <a:r>
+              <a:rPr lang="th-TH" dirty="0"/>
+              <a:t>0.5 ล้านบาท</a:t>
+            </a:r>
+          </a:p>
+        </p:txBody>
+      </p:sp>
+      <p:sp>
+        <p:nvSpPr>
+          <p:cNvPr id="19" name="SP"/>
+          <p:cNvSpPr>
+            <a:spLocks noGrp="1"/>
+          </p:cNvSpPr>
+          <p:nvPr>
+            <p:ph type="body" idx="37"/>
+          </p:nvPr>
+        </p:nvSpPr>
+        <p:spPr/>
+        <p:txBody>
+          <a:bodyPr/>
+          <a:lstStyle/>
+          <a:p>
+            <a:pPr/>
+            <a:r>
+              <a:rPr lang="th-TH" dirty="0"/>
+              <a:t>10%</a:t>
+            </a:r>
+          </a:p>
+        </p:txBody>
+      </p:sp>
+      <p:sp>
+        <p:nvSpPr>
+          <p:cNvPr id="20" name="Src"/>
           <p:cNvSpPr>
             <a:spLocks noGrp="1"/>
           </p:cNvSpPr>
@@ -25109,14 +27600,14 @@
             <a:pPr/>
             <a:r>
               <a:rPr lang="th-TH" dirty="0"/>
-              <a:t>01</a:t>
-            </a:r>
-          </a:p>
-        </p:txBody>
-      </p:sp>
-      <p:sp>
-        <p:nvSpPr>
-          <p:cNvPr id="8" name="PP"/>
+              <a:t>ใบเสนอราคา NCT-2569-041 · ปัดเป็นแสนบาท</a:t>
+            </a:r>
+          </a:p>
+        </p:txBody>
+      </p:sp>
+      <p:sp>
+        <p:nvSpPr>
+          <p:cNvPr id="21" name="TL"/>
           <p:cNvSpPr>
             <a:spLocks noGrp="1"/>
           </p:cNvSpPr>
@@ -25132,14 +27623,14 @@
             <a:pPr/>
             <a:r>
               <a:rPr lang="th-TH" dirty="0"/>
-              <a:t>Preparation Phase</a:t>
-            </a:r>
-          </a:p>
-        </p:txBody>
-      </p:sp>
-      <p:sp>
-        <p:nvSpPr>
-          <p:cNvPr id="9" name="PI"/>
+              <a:t>สรุป</a:t>
+            </a:r>
+          </a:p>
+        </p:txBody>
+      </p:sp>
+      <p:sp>
+        <p:nvSpPr>
+          <p:cNvPr id="22" name="TC"/>
           <p:cNvSpPr>
             <a:spLocks noGrp="1"/>
           </p:cNvSpPr>
@@ -25155,51 +27646,7 @@
             <a:pPr/>
             <a:r>
               <a:rPr lang="th-TH" dirty="0"/>
-              <a:t>สรุปสเปกเครื่องและบริการคลาวด์ที่ต้องเตรียมให้พร้อมก่อนเริ่มงานพัฒนา</a:t>
-            </a:r>
-          </a:p>
-        </p:txBody>
-      </p:sp>
-      <p:sp>
-        <p:nvSpPr>
-          <p:cNvPr id="10" name="PB"/>
-          <p:cNvSpPr>
-            <a:spLocks noGrp="1"/>
-          </p:cNvSpPr>
-          <p:nvPr>
-            <p:ph type="body" idx="8"/>
-          </p:nvPr>
-        </p:nvSpPr>
-        <p:spPr/>
-        <p:txBody>
-          <a:bodyPr/>
-          <a:lstStyle/>
-          <a:p>
-            <a:pPr/>
-            <a:r>
-              <a:rPr lang="th-TH" dirty="0"/>
-              <a:t>PRD · 4 คอร์ / 16GB / SSD 300GB</a:t>
-            </a:r>
-          </a:p>
-          <a:p>
-            <a:pPr/>
-            <a:r>
-              <a:rPr lang="th-TH" dirty="0"/>
-              <a:t>QA · 4 คอร์ / 16GB / SSD 150GB</a:t>
-            </a:r>
-          </a:p>
-          <a:p>
-            <a:pPr/>
-            <a:r>
-              <a:rPr lang="th-TH" dirty="0"/>
-              <a:t>Windows Server 2022 ทั้งสองเครื่อง</a:t>
-            </a:r>
-          </a:p>
-          <a:p>
-            <a:pPr/>
-            <a:r>
-              <a:rPr lang="th-TH" dirty="0"/>
-              <a:t>Lambda, EC2 และ Cognito เปิดทั้งสองสภาพแวดล้อม</a:t>
+              <a:t>ไลเซนส์กับคลาวด์รวมกันไม่ถึง 40% งบส่วนใหญ่จ่ายให้งานที่ทำครั้งเดียว</a:t>
             </a:r>
           </a:p>
         </p:txBody>
@@ -25284,6 +27731,259 @@
 </file>
 
 <file path=ppt/slides/slide20.xml><?xml version="1.0" encoding="utf-8"?>
+<p:sld xmlns:a="http://schemas.openxmlformats.org/drawingml/2006/main" xmlns:r="http://schemas.openxmlformats.org/officeDocument/2006/relationships" xmlns:p="http://schemas.openxmlformats.org/presentationml/2006/main">
+  <p:cSld name="">
+    <p:spTree>
+      <p:nvGrpSpPr>
+        <p:cNvPr id="1" name=""/>
+        <p:cNvGrpSpPr/>
+        <p:nvPr/>
+      </p:nvGrpSpPr>
+      <p:grpSpPr>
+        <a:xfrm>
+          <a:off x="0" y="0"/>
+          <a:ext cx="0" cy="0"/>
+          <a:chOff x="0" y="0"/>
+          <a:chExt cx="0" cy="0"/>
+        </a:xfrm>
+      </p:grpSpPr>
+      <p:sp>
+        <p:nvSpPr>
+          <p:cNvPr id="2" name="Title"/>
+          <p:cNvSpPr>
+            <a:spLocks noGrp="1"/>
+          </p:cNvSpPr>
+          <p:nvPr>
+            <p:ph type="title"/>
+          </p:nvPr>
+        </p:nvSpPr>
+        <p:spPr/>
+        <p:txBody>
+          <a:bodyPr/>
+          <a:lstStyle/>
+          <a:p>
+            <a:pPr/>
+            <a:r>
+              <a:rPr lang="th-TH" dirty="0"/>
+              <a:t>5. Implementation Stage</a:t>
+            </a:r>
+          </a:p>
+        </p:txBody>
+      </p:sp>
+      <p:sp>
+        <p:nvSpPr>
+          <p:cNvPr id="3" name="KAL"/>
+          <p:cNvSpPr>
+            <a:spLocks noGrp="1"/>
+          </p:cNvSpPr>
+          <p:nvPr>
+            <p:ph type="body" idx="1"/>
+          </p:nvPr>
+        </p:nvSpPr>
+        <p:spPr/>
+        <p:txBody>
+          <a:bodyPr/>
+          <a:lstStyle/>
+          <a:p>
+            <a:pPr/>
+            <a:r>
+              <a:rPr lang="th-TH" dirty="0"/>
+              <a:t>Key Activity :</a:t>
+            </a:r>
+          </a:p>
+        </p:txBody>
+      </p:sp>
+      <p:sp>
+        <p:nvSpPr>
+          <p:cNvPr id="4" name="KAV"/>
+          <p:cNvSpPr>
+            <a:spLocks noGrp="1"/>
+          </p:cNvSpPr>
+          <p:nvPr>
+            <p:ph type="body" idx="2"/>
+          </p:nvPr>
+        </p:nvSpPr>
+        <p:spPr/>
+        <p:txBody>
+          <a:bodyPr/>
+          <a:lstStyle/>
+          <a:p>
+            <a:pPr/>
+            <a:r>
+              <a:rPr lang="th-TH" dirty="0"/>
+              <a:t>ตั้งค่าสภาพแวดล้อม ติดตั้งฮาร์ดแวร์และซอฟต์แวร์</a:t>
+            </a:r>
+          </a:p>
+        </p:txBody>
+      </p:sp>
+      <p:sp>
+        <p:nvSpPr>
+          <p:cNvPr id="5" name="PL"/>
+          <p:cNvSpPr>
+            <a:spLocks noGrp="1"/>
+          </p:cNvSpPr>
+          <p:nvPr>
+            <p:ph type="body" idx="3"/>
+          </p:nvPr>
+        </p:nvSpPr>
+        <p:spPr/>
+        <p:txBody>
+          <a:bodyPr/>
+          <a:lstStyle/>
+          <a:p>
+            <a:pPr/>
+            <a:r>
+              <a:rPr lang="th-TH" dirty="0"/>
+              <a:t>Participant :</a:t>
+            </a:r>
+          </a:p>
+        </p:txBody>
+      </p:sp>
+      <p:sp>
+        <p:nvSpPr>
+          <p:cNvPr id="6" name="PV"/>
+          <p:cNvSpPr>
+            <a:spLocks noGrp="1"/>
+          </p:cNvSpPr>
+          <p:nvPr>
+            <p:ph type="body" idx="4"/>
+          </p:nvPr>
+        </p:nvSpPr>
+        <p:spPr/>
+        <p:txBody>
+          <a:bodyPr/>
+          <a:lstStyle/>
+          <a:p>
+            <a:pPr/>
+            <a:r>
+              <a:rPr lang="th-TH" dirty="0"/>
+              <a:t>NCT Infra Engineer, ทีมไอทีลูกค้า, Business Analyst</a:t>
+            </a:r>
+          </a:p>
+        </p:txBody>
+      </p:sp>
+      <p:sp>
+        <p:nvSpPr>
+          <p:cNvPr id="7" name="PN"/>
+          <p:cNvSpPr>
+            <a:spLocks noGrp="1"/>
+          </p:cNvSpPr>
+          <p:nvPr>
+            <p:ph type="body" idx="5"/>
+          </p:nvPr>
+        </p:nvSpPr>
+        <p:spPr/>
+        <p:txBody>
+          <a:bodyPr/>
+          <a:lstStyle/>
+          <a:p>
+            <a:pPr/>
+            <a:r>
+              <a:rPr lang="th-TH" dirty="0"/>
+              <a:t>01</a:t>
+            </a:r>
+          </a:p>
+        </p:txBody>
+      </p:sp>
+      <p:sp>
+        <p:nvSpPr>
+          <p:cNvPr id="8" name="PP"/>
+          <p:cNvSpPr>
+            <a:spLocks noGrp="1"/>
+          </p:cNvSpPr>
+          <p:nvPr>
+            <p:ph type="body" idx="6"/>
+          </p:nvPr>
+        </p:nvSpPr>
+        <p:spPr/>
+        <p:txBody>
+          <a:bodyPr/>
+          <a:lstStyle/>
+          <a:p>
+            <a:pPr/>
+            <a:r>
+              <a:rPr lang="th-TH" dirty="0"/>
+              <a:t>Preparation Phase</a:t>
+            </a:r>
+          </a:p>
+        </p:txBody>
+      </p:sp>
+      <p:sp>
+        <p:nvSpPr>
+          <p:cNvPr id="9" name="PI"/>
+          <p:cNvSpPr>
+            <a:spLocks noGrp="1"/>
+          </p:cNvSpPr>
+          <p:nvPr>
+            <p:ph type="body" idx="7"/>
+          </p:nvPr>
+        </p:nvSpPr>
+        <p:spPr/>
+        <p:txBody>
+          <a:bodyPr/>
+          <a:lstStyle/>
+          <a:p>
+            <a:pPr/>
+            <a:r>
+              <a:rPr lang="th-TH" dirty="0"/>
+              <a:t>สรุปสเปกเครื่องและบริการคลาวด์ที่ต้องเตรียมให้พร้อมก่อนเริ่มงานพัฒนา</a:t>
+            </a:r>
+          </a:p>
+        </p:txBody>
+      </p:sp>
+      <p:sp>
+        <p:nvSpPr>
+          <p:cNvPr id="10" name="PB"/>
+          <p:cNvSpPr>
+            <a:spLocks noGrp="1"/>
+          </p:cNvSpPr>
+          <p:nvPr>
+            <p:ph type="body" idx="8"/>
+          </p:nvPr>
+        </p:nvSpPr>
+        <p:spPr/>
+        <p:txBody>
+          <a:bodyPr/>
+          <a:lstStyle/>
+          <a:p>
+            <a:pPr/>
+            <a:r>
+              <a:rPr lang="th-TH" dirty="0"/>
+              <a:t>PRD · 4 คอร์ / 16GB / SSD 300GB</a:t>
+            </a:r>
+          </a:p>
+          <a:p>
+            <a:pPr/>
+            <a:r>
+              <a:rPr lang="th-TH" dirty="0"/>
+              <a:t>QA · 4 คอร์ / 16GB / SSD 150GB</a:t>
+            </a:r>
+          </a:p>
+          <a:p>
+            <a:pPr/>
+            <a:r>
+              <a:rPr lang="th-TH" dirty="0"/>
+              <a:t>Windows Server 2022 ทั้งสองเครื่อง</a:t>
+            </a:r>
+          </a:p>
+          <a:p>
+            <a:pPr/>
+            <a:r>
+              <a:rPr lang="th-TH" dirty="0"/>
+              <a:t>Lambda, EC2 และ Cognito เปิดทั้งสองสภาพแวดล้อม</a:t>
+            </a:r>
+          </a:p>
+        </p:txBody>
+      </p:sp>
+    </p:spTree>
+  </p:cSld>
+  <p:clrMapOvr>
+    <a:masterClrMapping/>
+  </p:clrMapOvr>
+</p:sld>
+</file>
+
+<file path=ppt/slides/slide21.xml><?xml version="1.0" encoding="utf-8"?>
 <p:sld xmlns:a="http://schemas.openxmlformats.org/drawingml/2006/main" xmlns:r="http://schemas.openxmlformats.org/officeDocument/2006/relationships" xmlns:p="http://schemas.openxmlformats.org/presentationml/2006/main">
   <p:cSld name="">
     <p:spTree>
@@ -25769,7 +28469,7 @@
 </p:sld>
 </file>
 
-<file path=ppt/slides/slide21.xml><?xml version="1.0" encoding="utf-8"?>
+<file path=ppt/slides/slide22.xml><?xml version="1.0" encoding="utf-8"?>
 <p:sld xmlns:a="http://schemas.openxmlformats.org/drawingml/2006/main" xmlns:r="http://schemas.openxmlformats.org/officeDocument/2006/relationships" xmlns:p="http://schemas.openxmlformats.org/presentationml/2006/main">
   <p:cSld name="">
     <p:spTree>

--- a/NCT-Slide-Template-Demo.pptx
+++ b/NCT-Slide-Template-Demo.pptx
@@ -27,6 +27,7 @@
     <p:sldId id="275" r:id="rId21"/>
     <p:sldId id="276" r:id="rId22"/>
     <p:sldId id="277" r:id="rId23"/>
+    <p:sldId id="278" r:id="rId24"/>
   </p:sldIdLst>
   <p:sldSz cx="12192000" cy="6858000"/>
   <p:notesSz cx="6858000" cy="9144000"/>
@@ -397,6 +398,394 @@
 </file>
 
 <file path=ppt/charts/chart2.xml><?xml version="1.0" encoding="utf-8"?>
+<c:chartSpace xmlns:c="http://schemas.openxmlformats.org/drawingml/2006/chart" xmlns:a="http://schemas.openxmlformats.org/drawingml/2006/main" xmlns:r="http://schemas.openxmlformats.org/officeDocument/2006/relationships">
+  <c:roundedCorners val="0"/>
+  <c:chart>
+    <c:autoTitleDeleted val="1"/>
+    <c:plotArea>
+      <c:layout/>
+      <c:lineChart>
+        <c:grouping val="standard"/>
+        <c:varyColors val="0"/>
+        <c:ser>
+          <c:idx val="0"/>
+          <c:order val="0"/>
+          <c:tx>
+            <c:strRef>
+              <c:f>Sheet1!$B$1</c:f>
+              <c:strCache>
+                <c:ptCount val="1"/>
+                <c:pt idx="0">
+                  <c:v>เอกสารเข้า</c:v>
+                </c:pt>
+              </c:strCache>
+            </c:strRef>
+          </c:tx>
+          <c:spPr>
+            <a:ln w="19050" cap="rnd">
+              <a:solidFill>
+                <a:srgbClr val="2A5EA0"/>
+              </a:solidFill>
+              <a:round/>
+            </a:ln>
+          </c:spPr>
+          <c:marker>
+            <c:symbol val="none"/>
+          </c:marker>
+          <c:dPt>
+            <c:idx val="5"/>
+            <c:marker>
+              <c:symbol val="circle"/>
+              <c:size val="7"/>
+              <c:spPr>
+                <a:solidFill>
+                  <a:srgbClr val="2A5EA0"/>
+                </a:solidFill>
+                <a:ln w="19050">
+                  <a:solidFill>
+                    <a:srgbClr val="FFFFFF"/>
+                  </a:solidFill>
+                </a:ln>
+              </c:spPr>
+            </c:marker>
+            <c:bubble3D val="0"/>
+          </c:dPt>
+          <c:dLbls>
+            <c:dLbl>
+              <c:idx val="5"/>
+              <c:numFmt formatCode="#,##0" sourceLinked="0"/>
+              <c:spPr>
+                <a:noFill/>
+                <a:ln>
+                  <a:noFill/>
+                </a:ln>
+              </c:spPr>
+              <c:txPr>
+                <a:bodyPr/>
+                <a:lstStyle/>
+                <a:p>
+                  <a:pPr>
+                    <a:defRPr sz="1400" b="1">
+                      <a:solidFill>
+                        <a:srgbClr val="333333"/>
+                      </a:solidFill>
+                      <a:latin typeface="+mn-lt"/>
+                      <a:ea typeface="+mn-ea"/>
+                      <a:cs typeface="+mn-cs"/>
+                    </a:defRPr>
+                  </a:pPr>
+                  <a:endParaRPr lang="th-TH"/>
+                </a:p>
+              </c:txPr>
+              <c:dLblPos val="r"/>
+              <c:showLegendKey val="0"/>
+              <c:showVal val="1"/>
+              <c:showCatName val="0"/>
+              <c:showSerName val="0"/>
+              <c:showPercent val="0"/>
+              <c:showBubbleSize val="0"/>
+            </c:dLbl>
+            <c:showLegendKey val="0"/>
+            <c:showVal val="0"/>
+            <c:showCatName val="0"/>
+            <c:showSerName val="0"/>
+            <c:showPercent val="0"/>
+            <c:showBubbleSize val="0"/>
+          </c:dLbls>
+          <c:cat>
+            <c:strRef>
+              <c:f>Sheet1!$A$2:$A$7</c:f>
+              <c:strCache>
+                <c:ptCount val="6"/>
+                <c:pt idx="0">
+                  <c:v>ม.ค.</c:v>
+                </c:pt>
+                <c:pt idx="1">
+                  <c:v>ก.พ.</c:v>
+                </c:pt>
+                <c:pt idx="2">
+                  <c:v>มี.ค.</c:v>
+                </c:pt>
+                <c:pt idx="3">
+                  <c:v>เม.ย.</c:v>
+                </c:pt>
+                <c:pt idx="4">
+                  <c:v>พ.ค.</c:v>
+                </c:pt>
+                <c:pt idx="5">
+                  <c:v>มิ.ย.</c:v>
+                </c:pt>
+              </c:strCache>
+            </c:strRef>
+          </c:cat>
+          <c:val>
+            <c:numRef>
+              <c:f>Sheet1!$B$2:$B$7</c:f>
+              <c:numCache>
+                <c:formatCode>General</c:formatCode>
+                <c:ptCount val="6"/>
+                <c:pt idx="0">
+                  <c:v>1000</c:v>
+                </c:pt>
+                <c:pt idx="1">
+                  <c:v>1100</c:v>
+                </c:pt>
+                <c:pt idx="2">
+                  <c:v>1000</c:v>
+                </c:pt>
+                <c:pt idx="3">
+                  <c:v>1200</c:v>
+                </c:pt>
+                <c:pt idx="4">
+                  <c:v>1350</c:v>
+                </c:pt>
+                <c:pt idx="5">
+                  <c:v>1150</c:v>
+                </c:pt>
+              </c:numCache>
+            </c:numRef>
+          </c:val>
+          <c:smooth val="0"/>
+        </c:ser>
+        <c:ser>
+          <c:idx val="1"/>
+          <c:order val="1"/>
+          <c:tx>
+            <c:strRef>
+              <c:f>Sheet1!$C$1</c:f>
+              <c:strCache>
+                <c:ptCount val="1"/>
+                <c:pt idx="0">
+                  <c:v>กำลังคีย์ 1,200 ใบ</c:v>
+                </c:pt>
+              </c:strCache>
+            </c:strRef>
+          </c:tx>
+          <c:spPr>
+            <a:ln w="9525">
+              <a:solidFill>
+                <a:srgbClr val="A4A4A4"/>
+              </a:solidFill>
+            </a:ln>
+          </c:spPr>
+          <c:marker>
+            <c:symbol val="none"/>
+          </c:marker>
+          <c:dLbls>
+            <c:dLbl>
+              <c:idx val="0"/>
+              <c:numFmt formatCode="#,##0" sourceLinked="0"/>
+              <c:spPr>
+                <a:noFill/>
+                <a:ln>
+                  <a:noFill/>
+                </a:ln>
+              </c:spPr>
+              <c:txPr>
+                <a:bodyPr/>
+                <a:lstStyle/>
+                <a:p>
+                  <a:pPr>
+                    <a:defRPr sz="1200">
+                      <a:solidFill>
+                        <a:srgbClr val="5F5F5F"/>
+                      </a:solidFill>
+                      <a:latin typeface="+mn-lt"/>
+                      <a:ea typeface="+mn-ea"/>
+                      <a:cs typeface="+mn-cs"/>
+                    </a:defRPr>
+                  </a:pPr>
+                  <a:endParaRPr lang="th-TH"/>
+                </a:p>
+              </c:txPr>
+              <c:dLblPos val="t"/>
+              <c:showLegendKey val="0"/>
+              <c:showVal val="0"/>
+              <c:showCatName val="0"/>
+              <c:showSerName val="1"/>
+              <c:showPercent val="0"/>
+              <c:showBubbleSize val="0"/>
+            </c:dLbl>
+            <c:showLegendKey val="0"/>
+            <c:showVal val="0"/>
+            <c:showCatName val="0"/>
+            <c:showSerName val="0"/>
+            <c:showPercent val="0"/>
+            <c:showBubbleSize val="0"/>
+          </c:dLbls>
+          <c:cat>
+            <c:strRef>
+              <c:f>Sheet1!$A$2:$A$7</c:f>
+              <c:strCache>
+                <c:ptCount val="6"/>
+                <c:pt idx="0">
+                  <c:v>ม.ค.</c:v>
+                </c:pt>
+                <c:pt idx="1">
+                  <c:v>ก.พ.</c:v>
+                </c:pt>
+                <c:pt idx="2">
+                  <c:v>มี.ค.</c:v>
+                </c:pt>
+                <c:pt idx="3">
+                  <c:v>เม.ย.</c:v>
+                </c:pt>
+                <c:pt idx="4">
+                  <c:v>พ.ค.</c:v>
+                </c:pt>
+                <c:pt idx="5">
+                  <c:v>มิ.ย.</c:v>
+                </c:pt>
+              </c:strCache>
+            </c:strRef>
+          </c:cat>
+          <c:val>
+            <c:numRef>
+              <c:f>Sheet1!$C$2:$C$7</c:f>
+              <c:numCache>
+                <c:formatCode>General</c:formatCode>
+                <c:ptCount val="6"/>
+                <c:pt idx="0">
+                  <c:v>1200</c:v>
+                </c:pt>
+                <c:pt idx="1">
+                  <c:v>1200</c:v>
+                </c:pt>
+                <c:pt idx="2">
+                  <c:v>1200</c:v>
+                </c:pt>
+                <c:pt idx="3">
+                  <c:v>1200</c:v>
+                </c:pt>
+                <c:pt idx="4">
+                  <c:v>1200</c:v>
+                </c:pt>
+                <c:pt idx="5">
+                  <c:v>1200</c:v>
+                </c:pt>
+              </c:numCache>
+            </c:numRef>
+          </c:val>
+          <c:smooth val="0"/>
+        </c:ser>
+        <c:marker val="1"/>
+        <c:axId val="23001"/>
+        <c:axId val="23002"/>
+      </c:lineChart>
+      <c:catAx>
+        <c:axId val="23001"/>
+        <c:scaling>
+          <c:orientation val="minMax"/>
+        </c:scaling>
+        <c:delete val="0"/>
+        <c:axPos val="b"/>
+        <c:numFmt formatCode="General" sourceLinked="0"/>
+        <c:majorTickMark val="none"/>
+        <c:minorTickMark val="none"/>
+        <c:tickLblPos val="nextTo"/>
+        <c:spPr>
+          <a:ln w="9525">
+            <a:solidFill>
+              <a:srgbClr val="A4A4A4"/>
+            </a:solidFill>
+          </a:ln>
+        </c:spPr>
+        <c:txPr>
+          <a:bodyPr/>
+          <a:lstStyle/>
+          <a:p>
+            <a:pPr>
+              <a:defRPr sz="1200">
+                <a:solidFill>
+                  <a:srgbClr val="5F5F5F"/>
+                </a:solidFill>
+                <a:latin typeface="+mn-lt"/>
+                <a:ea typeface="+mn-ea"/>
+                <a:cs typeface="+mn-cs"/>
+              </a:defRPr>
+            </a:pPr>
+            <a:endParaRPr lang="th-TH"/>
+          </a:p>
+        </c:txPr>
+        <c:crossAx val="23002"/>
+        <c:crosses val="autoZero"/>
+        <c:auto val="1"/>
+        <c:lblAlgn val="ctr"/>
+        <c:lblOffset val="100"/>
+        <c:noMultiLvlLbl val="0"/>
+      </c:catAx>
+      <c:valAx>
+        <c:axId val="23002"/>
+        <c:scaling>
+          <c:orientation val="minMax"/>
+          <c:max val="1500"/>
+          <c:min val="0"/>
+        </c:scaling>
+        <c:delete val="0"/>
+        <c:axPos val="l"/>
+        <c:majorGridlines>
+          <c:spPr>
+            <a:ln w="9525">
+              <a:solidFill>
+                <a:srgbClr val="E5E5E5"/>
+              </a:solidFill>
+            </a:ln>
+          </c:spPr>
+        </c:majorGridlines>
+        <c:numFmt formatCode="#,##0" sourceLinked="0"/>
+        <c:majorTickMark val="none"/>
+        <c:minorTickMark val="none"/>
+        <c:tickLblPos val="nextTo"/>
+        <c:spPr>
+          <a:ln>
+            <a:noFill/>
+          </a:ln>
+        </c:spPr>
+        <c:txPr>
+          <a:bodyPr/>
+          <a:lstStyle/>
+          <a:p>
+            <a:pPr>
+              <a:defRPr sz="1200">
+                <a:solidFill>
+                  <a:srgbClr val="5F5F5F"/>
+                </a:solidFill>
+                <a:latin typeface="+mn-lt"/>
+                <a:ea typeface="+mn-ea"/>
+                <a:cs typeface="+mn-cs"/>
+              </a:defRPr>
+            </a:pPr>
+            <a:endParaRPr lang="th-TH"/>
+          </a:p>
+        </c:txPr>
+        <c:crossAx val="23001"/>
+        <c:crosses val="autoZero"/>
+        <c:crossBetween val="between"/>
+        <c:majorUnit val="500"/>
+      </c:valAx>
+      <c:spPr>
+        <a:noFill/>
+        <a:ln>
+          <a:noFill/>
+        </a:ln>
+      </c:spPr>
+    </c:plotArea>
+    <c:plotVisOnly val="1"/>
+    <c:dispBlanksAs val="gap"/>
+  </c:chart>
+  <c:spPr>
+    <a:noFill/>
+    <a:ln>
+      <a:noFill/>
+    </a:ln>
+  </c:spPr>
+  <c:externalData r:id="rId1">
+    <c:autoUpdate val="0"/>
+  </c:externalData>
+</c:chartSpace>
+</file>
+
+<file path=ppt/charts/chart3.xml><?xml version="1.0" encoding="utf-8"?>
 <c:chartSpace xmlns:c="http://schemas.openxmlformats.org/drawingml/2006/chart" xmlns:a="http://schemas.openxmlformats.org/drawingml/2006/main" xmlns:r="http://schemas.openxmlformats.org/officeDocument/2006/relationships">
   <c:roundedCorners val="0"/>
   <c:chart>
@@ -682,7 +1071,7 @@
 </c:chartSpace>
 </file>
 
-<file path=ppt/charts/chart3.xml><?xml version="1.0" encoding="utf-8"?>
+<file path=ppt/charts/chart4.xml><?xml version="1.0" encoding="utf-8"?>
 <c:chartSpace xmlns:c="http://schemas.openxmlformats.org/drawingml/2006/chart" xmlns:a="http://schemas.openxmlformats.org/drawingml/2006/main" xmlns:r="http://schemas.openxmlformats.org/officeDocument/2006/relationships">
   <c:roundedCorners val="0"/>
   <c:chart>
@@ -17070,6 +17459,1190 @@
 </p:sldLayout>
 </file>
 
+<file path=ppt/slideLayouts/slideLayout23.xml><?xml version="1.0" encoding="utf-8"?>
+<p:sldLayout xmlns:a="http://schemas.openxmlformats.org/drawingml/2006/main" xmlns:r="http://schemas.openxmlformats.org/officeDocument/2006/relationships" xmlns:p="http://schemas.openxmlformats.org/presentationml/2006/main" type="chart" showMasterSp="0" preserve="1">
+  <p:cSld name="23 KPI + Trend">
+    <p:bg>
+      <p:bgPr>
+        <a:solidFill>
+          <a:srgbClr val="FFFFFF"/>
+        </a:solidFill>
+        <a:effectLst/>
+      </p:bgPr>
+    </p:bg>
+    <p:spTree>
+      <p:nvGrpSpPr>
+        <p:cNvPr id="1" name=""/>
+        <p:cNvGrpSpPr/>
+        <p:nvPr/>
+      </p:nvGrpSpPr>
+      <p:grpSpPr>
+        <a:xfrm>
+          <a:off x="0" y="0"/>
+          <a:ext cx="0" cy="0"/>
+          <a:chOff x="0" y="0"/>
+          <a:chExt cx="0" cy="0"/>
+        </a:xfrm>
+      </p:grpSpPr>
+      <p:sp>
+        <p:nvSpPr>
+          <p:cNvPr id="10" name="Title Placeholder"/>
+          <p:cNvSpPr>
+            <a:spLocks noGrp="1"/>
+          </p:cNvSpPr>
+          <p:nvPr>
+            <p:ph type="title"/>
+          </p:nvPr>
+        </p:nvSpPr>
+        <p:spPr>
+          <a:xfrm>
+            <a:off x="914400" y="548640"/>
+            <a:ext cx="10363200" cy="731520"/>
+          </a:xfrm>
+          <a:prstGeom prst="rect">
+            <a:avLst/>
+          </a:prstGeom>
+        </p:spPr>
+        <p:txBody>
+          <a:bodyPr wrap="square" anchor="b" lIns="0" tIns="0" rIns="0" bIns="0" rtlCol="0"/>
+          <a:lstStyle>
+            <a:lvl1pPr algn="l" marL="0" indent="0">
+              <a:lnSpc>
+                <a:spcPct val="108000"/>
+              </a:lnSpc>
+              <a:buNone/>
+              <a:defRPr lang="th-TH" sz="3200" b="1" dirty="0">
+                <a:solidFill>
+                  <a:srgbClr val="23436D"/>
+                </a:solidFill>
+                <a:latin typeface="+mj-lt"/>
+                <a:ea typeface="+mj-ea"/>
+                <a:cs typeface="+mj-cs"/>
+              </a:defRPr>
+            </a:lvl1pPr>
+          </a:lstStyle>
+          <a:p>
+            <a:pPr algn="l" marL="0" indent="0">
+              <a:lnSpc>
+                <a:spcPct val="108000"/>
+              </a:lnSpc>
+              <a:buNone/>
+            </a:pPr>
+            <a:r>
+              <a:rPr lang="th-TH" sz="3200" b="1" dirty="0">
+                <a:solidFill>
+                  <a:srgbClr val="23436D"/>
+                </a:solidFill>
+                <a:latin typeface="+mj-lt"/>
+                <a:ea typeface="+mj-ea"/>
+                <a:cs typeface="+mj-cs"/>
+              </a:rPr>
+              <a:t>ชื่อสไลด์</a:t>
+            </a:r>
+          </a:p>
+        </p:txBody>
+      </p:sp>
+      <p:sp>
+        <p:nvSpPr>
+          <p:cNvPr id="11" name="Accent Rule"/>
+          <p:cNvSpPr/>
+          <p:nvPr/>
+        </p:nvSpPr>
+        <p:spPr>
+          <a:xfrm>
+            <a:off x="914400" y="1371600"/>
+            <a:ext cx="548640" cy="45720"/>
+          </a:xfrm>
+          <a:prstGeom prst="rect">
+            <a:avLst/>
+          </a:prstGeom>
+          <a:solidFill>
+            <a:srgbClr val="216B7F"/>
+          </a:solidFill>
+          <a:ln>
+            <a:noFill/>
+          </a:ln>
+        </p:spPr>
+        <p:txBody>
+          <a:bodyPr/>
+          <a:lstStyle/>
+          <a:p>
+            <a:endParaRPr lang="th-TH"/>
+          </a:p>
+        </p:txBody>
+      </p:sp>
+      <p:sp>
+        <p:nvSpPr>
+          <p:cNvPr id="12" name="Tile 1 Rule"/>
+          <p:cNvSpPr/>
+          <p:nvPr/>
+        </p:nvSpPr>
+        <p:spPr>
+          <a:xfrm>
+            <a:off x="914400" y="1691640"/>
+            <a:ext cx="3332480" cy="45720"/>
+          </a:xfrm>
+          <a:prstGeom prst="rect">
+            <a:avLst/>
+          </a:prstGeom>
+          <a:solidFill>
+            <a:srgbClr val="2A5EA0"/>
+          </a:solidFill>
+          <a:ln>
+            <a:noFill/>
+          </a:ln>
+        </p:spPr>
+        <p:txBody>
+          <a:bodyPr/>
+          <a:lstStyle/>
+          <a:p>
+            <a:endParaRPr lang="th-TH"/>
+          </a:p>
+        </p:txBody>
+      </p:sp>
+      <p:sp>
+        <p:nvSpPr>
+          <p:cNvPr id="13" name="Tile 1 Label"/>
+          <p:cNvSpPr>
+            <a:spLocks noGrp="1"/>
+          </p:cNvSpPr>
+          <p:nvPr>
+            <p:ph type="body" idx="20"/>
+          </p:nvPr>
+        </p:nvSpPr>
+        <p:spPr>
+          <a:xfrm>
+            <a:off x="914400" y="1810512"/>
+            <a:ext cx="3332480" cy="274320"/>
+          </a:xfrm>
+          <a:prstGeom prst="rect">
+            <a:avLst/>
+          </a:prstGeom>
+        </p:spPr>
+        <p:txBody>
+          <a:bodyPr wrap="square" anchor="t" lIns="0" tIns="0" rIns="0" bIns="0" rtlCol="0"/>
+          <a:lstStyle>
+            <a:lvl1pPr algn="l" marL="0" indent="0">
+              <a:lnSpc>
+                <a:spcPct val="130000"/>
+              </a:lnSpc>
+              <a:buNone/>
+              <a:defRPr lang="th-TH" sz="1200" b="1" spc="120" dirty="0">
+                <a:solidFill>
+                  <a:srgbClr val="5F5F5F"/>
+                </a:solidFill>
+                <a:latin typeface="+mn-lt"/>
+                <a:ea typeface="+mn-ea"/>
+                <a:cs typeface="+mn-cs"/>
+              </a:defRPr>
+            </a:lvl1pPr>
+          </a:lstStyle>
+          <a:p>
+            <a:pPr algn="l" marL="0" indent="0">
+              <a:lnSpc>
+                <a:spcPct val="130000"/>
+              </a:lnSpc>
+              <a:buNone/>
+            </a:pPr>
+            <a:r>
+              <a:rPr lang="th-TH" sz="1200" b="1" spc="120" dirty="0">
+                <a:solidFill>
+                  <a:srgbClr val="5F5F5F"/>
+                </a:solidFill>
+                <a:latin typeface="+mn-lt"/>
+                <a:ea typeface="+mn-ea"/>
+                <a:cs typeface="+mn-cs"/>
+              </a:rPr>
+              <a:t>ตัวเลขนี้วัดอะไร</a:t>
+            </a:r>
+          </a:p>
+        </p:txBody>
+      </p:sp>
+      <p:sp>
+        <p:nvSpPr>
+          <p:cNvPr id="14" name="Tile 1 Value"/>
+          <p:cNvSpPr>
+            <a:spLocks noGrp="1"/>
+          </p:cNvSpPr>
+          <p:nvPr>
+            <p:ph type="body" idx="21"/>
+          </p:nvPr>
+        </p:nvSpPr>
+        <p:spPr>
+          <a:xfrm>
+            <a:off x="914400" y="2084832"/>
+            <a:ext cx="3332480" cy="640080"/>
+          </a:xfrm>
+          <a:prstGeom prst="rect">
+            <a:avLst/>
+          </a:prstGeom>
+        </p:spPr>
+        <p:txBody>
+          <a:bodyPr wrap="square" anchor="b" lIns="0" tIns="0" rIns="0" bIns="0" rtlCol="0"/>
+          <a:lstStyle>
+            <a:lvl1pPr algn="l" marL="0" indent="0">
+              <a:lnSpc>
+                <a:spcPct val="100000"/>
+              </a:lnSpc>
+              <a:buNone/>
+              <a:defRPr lang="th-TH" sz="4000" b="1" dirty="0">
+                <a:solidFill>
+                  <a:srgbClr val="23436D"/>
+                </a:solidFill>
+                <a:latin typeface="+mj-lt"/>
+                <a:ea typeface="+mj-ea"/>
+                <a:cs typeface="+mj-cs"/>
+              </a:defRPr>
+            </a:lvl1pPr>
+          </a:lstStyle>
+          <a:p>
+            <a:pPr algn="l" marL="0" indent="0">
+              <a:lnSpc>
+                <a:spcPct val="100000"/>
+              </a:lnSpc>
+              <a:buNone/>
+            </a:pPr>
+            <a:r>
+              <a:rPr lang="th-TH" sz="4000" b="1" dirty="0">
+                <a:solidFill>
+                  <a:srgbClr val="23436D"/>
+                </a:solidFill>
+                <a:latin typeface="+mj-lt"/>
+                <a:ea typeface="+mj-ea"/>
+                <a:cs typeface="+mj-cs"/>
+              </a:rPr>
+              <a:t>0</a:t>
+            </a:r>
+          </a:p>
+        </p:txBody>
+      </p:sp>
+      <p:sp>
+        <p:nvSpPr>
+          <p:cNvPr id="15" name="Tile 1 Delta"/>
+          <p:cNvSpPr>
+            <a:spLocks noGrp="1"/>
+          </p:cNvSpPr>
+          <p:nvPr>
+            <p:ph type="body" idx="22"/>
+          </p:nvPr>
+        </p:nvSpPr>
+        <p:spPr>
+          <a:xfrm>
+            <a:off x="914400" y="2743200"/>
+            <a:ext cx="1666240" cy="274320"/>
+          </a:xfrm>
+          <a:prstGeom prst="rect">
+            <a:avLst/>
+          </a:prstGeom>
+        </p:spPr>
+        <p:txBody>
+          <a:bodyPr wrap="square" anchor="ctr" lIns="0" tIns="0" rIns="0" bIns="0" rtlCol="0"/>
+          <a:lstStyle>
+            <a:lvl1pPr algn="l" marL="0" indent="0">
+              <a:lnSpc>
+                <a:spcPct val="100000"/>
+              </a:lnSpc>
+              <a:buNone/>
+              <a:defRPr lang="th-TH" sz="1200" dirty="0">
+                <a:solidFill>
+                  <a:srgbClr val="333333"/>
+                </a:solidFill>
+                <a:latin typeface="+mn-lt"/>
+                <a:ea typeface="+mn-ea"/>
+                <a:cs typeface="+mn-cs"/>
+              </a:defRPr>
+            </a:lvl1pPr>
+          </a:lstStyle>
+          <a:p>
+            <a:pPr algn="l" marL="0" indent="0">
+              <a:lnSpc>
+                <a:spcPct val="100000"/>
+              </a:lnSpc>
+              <a:buNone/>
+            </a:pPr>
+            <a:r>
+              <a:rPr lang="th-TH" sz="1200" dirty="0">
+                <a:solidFill>
+                  <a:srgbClr val="333333"/>
+                </a:solidFill>
+                <a:latin typeface="+mn-lt"/>
+                <a:ea typeface="+mn-ea"/>
+                <a:cs typeface="+mn-cs"/>
+              </a:rPr>
+              <a:t>▲ 0% จาก …</a:t>
+            </a:r>
+          </a:p>
+        </p:txBody>
+      </p:sp>
+      <p:sp>
+        <p:nvSpPr>
+          <p:cNvPr id="16" name="Tile 2 Rule"/>
+          <p:cNvSpPr/>
+          <p:nvPr/>
+        </p:nvSpPr>
+        <p:spPr>
+          <a:xfrm>
+            <a:off x="4429760" y="1691640"/>
+            <a:ext cx="3332480" cy="12700"/>
+          </a:xfrm>
+          <a:prstGeom prst="rect">
+            <a:avLst/>
+          </a:prstGeom>
+          <a:solidFill>
+            <a:srgbClr val="E5E5E5"/>
+          </a:solidFill>
+          <a:ln>
+            <a:noFill/>
+          </a:ln>
+        </p:spPr>
+        <p:txBody>
+          <a:bodyPr/>
+          <a:lstStyle/>
+          <a:p>
+            <a:endParaRPr lang="th-TH"/>
+          </a:p>
+        </p:txBody>
+      </p:sp>
+      <p:sp>
+        <p:nvSpPr>
+          <p:cNvPr id="17" name="Tile 2 Label"/>
+          <p:cNvSpPr>
+            <a:spLocks noGrp="1"/>
+          </p:cNvSpPr>
+          <p:nvPr>
+            <p:ph type="body" idx="23"/>
+          </p:nvPr>
+        </p:nvSpPr>
+        <p:spPr>
+          <a:xfrm>
+            <a:off x="4429760" y="1810512"/>
+            <a:ext cx="3332480" cy="274320"/>
+          </a:xfrm>
+          <a:prstGeom prst="rect">
+            <a:avLst/>
+          </a:prstGeom>
+        </p:spPr>
+        <p:txBody>
+          <a:bodyPr wrap="square" anchor="t" lIns="0" tIns="0" rIns="0" bIns="0" rtlCol="0"/>
+          <a:lstStyle>
+            <a:lvl1pPr algn="l" marL="0" indent="0">
+              <a:lnSpc>
+                <a:spcPct val="130000"/>
+              </a:lnSpc>
+              <a:buNone/>
+              <a:defRPr lang="th-TH" sz="1200" b="1" spc="120" dirty="0">
+                <a:solidFill>
+                  <a:srgbClr val="5F5F5F"/>
+                </a:solidFill>
+                <a:latin typeface="+mn-lt"/>
+                <a:ea typeface="+mn-ea"/>
+                <a:cs typeface="+mn-cs"/>
+              </a:defRPr>
+            </a:lvl1pPr>
+          </a:lstStyle>
+          <a:p>
+            <a:pPr algn="l" marL="0" indent="0">
+              <a:lnSpc>
+                <a:spcPct val="130000"/>
+              </a:lnSpc>
+              <a:buNone/>
+            </a:pPr>
+            <a:r>
+              <a:rPr lang="th-TH" sz="1200" b="1" spc="120" dirty="0">
+                <a:solidFill>
+                  <a:srgbClr val="5F5F5F"/>
+                </a:solidFill>
+                <a:latin typeface="+mn-lt"/>
+                <a:ea typeface="+mn-ea"/>
+                <a:cs typeface="+mn-cs"/>
+              </a:rPr>
+              <a:t>ตัวเลขนี้วัดอะไร</a:t>
+            </a:r>
+          </a:p>
+        </p:txBody>
+      </p:sp>
+      <p:sp>
+        <p:nvSpPr>
+          <p:cNvPr id="18" name="Tile 2 Value"/>
+          <p:cNvSpPr>
+            <a:spLocks noGrp="1"/>
+          </p:cNvSpPr>
+          <p:nvPr>
+            <p:ph type="body" idx="24"/>
+          </p:nvPr>
+        </p:nvSpPr>
+        <p:spPr>
+          <a:xfrm>
+            <a:off x="4429760" y="2084832"/>
+            <a:ext cx="3332480" cy="640080"/>
+          </a:xfrm>
+          <a:prstGeom prst="rect">
+            <a:avLst/>
+          </a:prstGeom>
+        </p:spPr>
+        <p:txBody>
+          <a:bodyPr wrap="square" anchor="b" lIns="0" tIns="0" rIns="0" bIns="0" rtlCol="0"/>
+          <a:lstStyle>
+            <a:lvl1pPr algn="l" marL="0" indent="0">
+              <a:lnSpc>
+                <a:spcPct val="100000"/>
+              </a:lnSpc>
+              <a:buNone/>
+              <a:defRPr lang="th-TH" sz="4000" b="1" dirty="0">
+                <a:solidFill>
+                  <a:srgbClr val="23436D"/>
+                </a:solidFill>
+                <a:latin typeface="+mj-lt"/>
+                <a:ea typeface="+mj-ea"/>
+                <a:cs typeface="+mj-cs"/>
+              </a:defRPr>
+            </a:lvl1pPr>
+          </a:lstStyle>
+          <a:p>
+            <a:pPr algn="l" marL="0" indent="0">
+              <a:lnSpc>
+                <a:spcPct val="100000"/>
+              </a:lnSpc>
+              <a:buNone/>
+            </a:pPr>
+            <a:r>
+              <a:rPr lang="th-TH" sz="4000" b="1" dirty="0">
+                <a:solidFill>
+                  <a:srgbClr val="23436D"/>
+                </a:solidFill>
+                <a:latin typeface="+mj-lt"/>
+                <a:ea typeface="+mj-ea"/>
+                <a:cs typeface="+mj-cs"/>
+              </a:rPr>
+              <a:t>0</a:t>
+            </a:r>
+          </a:p>
+        </p:txBody>
+      </p:sp>
+      <p:sp>
+        <p:nvSpPr>
+          <p:cNvPr id="19" name="Tile 2 Delta"/>
+          <p:cNvSpPr>
+            <a:spLocks noGrp="1"/>
+          </p:cNvSpPr>
+          <p:nvPr>
+            <p:ph type="body" idx="25"/>
+          </p:nvPr>
+        </p:nvSpPr>
+        <p:spPr>
+          <a:xfrm>
+            <a:off x="4429760" y="2743200"/>
+            <a:ext cx="1666240" cy="274320"/>
+          </a:xfrm>
+          <a:prstGeom prst="rect">
+            <a:avLst/>
+          </a:prstGeom>
+        </p:spPr>
+        <p:txBody>
+          <a:bodyPr wrap="square" anchor="ctr" lIns="0" tIns="0" rIns="0" bIns="0" rtlCol="0"/>
+          <a:lstStyle>
+            <a:lvl1pPr algn="l" marL="0" indent="0">
+              <a:lnSpc>
+                <a:spcPct val="100000"/>
+              </a:lnSpc>
+              <a:buNone/>
+              <a:defRPr lang="th-TH" sz="1200" dirty="0">
+                <a:solidFill>
+                  <a:srgbClr val="333333"/>
+                </a:solidFill>
+                <a:latin typeface="+mn-lt"/>
+                <a:ea typeface="+mn-ea"/>
+                <a:cs typeface="+mn-cs"/>
+              </a:defRPr>
+            </a:lvl1pPr>
+          </a:lstStyle>
+          <a:p>
+            <a:pPr algn="l" marL="0" indent="0">
+              <a:lnSpc>
+                <a:spcPct val="100000"/>
+              </a:lnSpc>
+              <a:buNone/>
+            </a:pPr>
+            <a:r>
+              <a:rPr lang="th-TH" sz="1200" dirty="0">
+                <a:solidFill>
+                  <a:srgbClr val="333333"/>
+                </a:solidFill>
+                <a:latin typeface="+mn-lt"/>
+                <a:ea typeface="+mn-ea"/>
+                <a:cs typeface="+mn-cs"/>
+              </a:rPr>
+              <a:t>▲ 0% จาก …</a:t>
+            </a:r>
+          </a:p>
+        </p:txBody>
+      </p:sp>
+      <p:sp>
+        <p:nvSpPr>
+          <p:cNvPr id="20" name="Tile 3 Rule"/>
+          <p:cNvSpPr/>
+          <p:nvPr/>
+        </p:nvSpPr>
+        <p:spPr>
+          <a:xfrm>
+            <a:off x="7945120" y="1691640"/>
+            <a:ext cx="3332480" cy="12700"/>
+          </a:xfrm>
+          <a:prstGeom prst="rect">
+            <a:avLst/>
+          </a:prstGeom>
+          <a:solidFill>
+            <a:srgbClr val="E5E5E5"/>
+          </a:solidFill>
+          <a:ln>
+            <a:noFill/>
+          </a:ln>
+        </p:spPr>
+        <p:txBody>
+          <a:bodyPr/>
+          <a:lstStyle/>
+          <a:p>
+            <a:endParaRPr lang="th-TH"/>
+          </a:p>
+        </p:txBody>
+      </p:sp>
+      <p:sp>
+        <p:nvSpPr>
+          <p:cNvPr id="21" name="Tile 3 Label"/>
+          <p:cNvSpPr>
+            <a:spLocks noGrp="1"/>
+          </p:cNvSpPr>
+          <p:nvPr>
+            <p:ph type="body" idx="26"/>
+          </p:nvPr>
+        </p:nvSpPr>
+        <p:spPr>
+          <a:xfrm>
+            <a:off x="7945120" y="1810512"/>
+            <a:ext cx="3332480" cy="274320"/>
+          </a:xfrm>
+          <a:prstGeom prst="rect">
+            <a:avLst/>
+          </a:prstGeom>
+        </p:spPr>
+        <p:txBody>
+          <a:bodyPr wrap="square" anchor="t" lIns="0" tIns="0" rIns="0" bIns="0" rtlCol="0"/>
+          <a:lstStyle>
+            <a:lvl1pPr algn="l" marL="0" indent="0">
+              <a:lnSpc>
+                <a:spcPct val="130000"/>
+              </a:lnSpc>
+              <a:buNone/>
+              <a:defRPr lang="th-TH" sz="1200" b="1" spc="120" dirty="0">
+                <a:solidFill>
+                  <a:srgbClr val="5F5F5F"/>
+                </a:solidFill>
+                <a:latin typeface="+mn-lt"/>
+                <a:ea typeface="+mn-ea"/>
+                <a:cs typeface="+mn-cs"/>
+              </a:defRPr>
+            </a:lvl1pPr>
+          </a:lstStyle>
+          <a:p>
+            <a:pPr algn="l" marL="0" indent="0">
+              <a:lnSpc>
+                <a:spcPct val="130000"/>
+              </a:lnSpc>
+              <a:buNone/>
+            </a:pPr>
+            <a:r>
+              <a:rPr lang="th-TH" sz="1200" b="1" spc="120" dirty="0">
+                <a:solidFill>
+                  <a:srgbClr val="5F5F5F"/>
+                </a:solidFill>
+                <a:latin typeface="+mn-lt"/>
+                <a:ea typeface="+mn-ea"/>
+                <a:cs typeface="+mn-cs"/>
+              </a:rPr>
+              <a:t>ตัวเลขนี้วัดอะไร</a:t>
+            </a:r>
+          </a:p>
+        </p:txBody>
+      </p:sp>
+      <p:sp>
+        <p:nvSpPr>
+          <p:cNvPr id="22" name="Tile 3 Value"/>
+          <p:cNvSpPr>
+            <a:spLocks noGrp="1"/>
+          </p:cNvSpPr>
+          <p:nvPr>
+            <p:ph type="body" idx="27"/>
+          </p:nvPr>
+        </p:nvSpPr>
+        <p:spPr>
+          <a:xfrm>
+            <a:off x="7945120" y="2084832"/>
+            <a:ext cx="3332480" cy="640080"/>
+          </a:xfrm>
+          <a:prstGeom prst="rect">
+            <a:avLst/>
+          </a:prstGeom>
+        </p:spPr>
+        <p:txBody>
+          <a:bodyPr wrap="square" anchor="b" lIns="0" tIns="0" rIns="0" bIns="0" rtlCol="0"/>
+          <a:lstStyle>
+            <a:lvl1pPr algn="l" marL="0" indent="0">
+              <a:lnSpc>
+                <a:spcPct val="100000"/>
+              </a:lnSpc>
+              <a:buNone/>
+              <a:defRPr lang="th-TH" sz="4000" b="1" dirty="0">
+                <a:solidFill>
+                  <a:srgbClr val="23436D"/>
+                </a:solidFill>
+                <a:latin typeface="+mj-lt"/>
+                <a:ea typeface="+mj-ea"/>
+                <a:cs typeface="+mj-cs"/>
+              </a:defRPr>
+            </a:lvl1pPr>
+          </a:lstStyle>
+          <a:p>
+            <a:pPr algn="l" marL="0" indent="0">
+              <a:lnSpc>
+                <a:spcPct val="100000"/>
+              </a:lnSpc>
+              <a:buNone/>
+            </a:pPr>
+            <a:r>
+              <a:rPr lang="th-TH" sz="4000" b="1" dirty="0">
+                <a:solidFill>
+                  <a:srgbClr val="23436D"/>
+                </a:solidFill>
+                <a:latin typeface="+mj-lt"/>
+                <a:ea typeface="+mj-ea"/>
+                <a:cs typeface="+mj-cs"/>
+              </a:rPr>
+              <a:t>0</a:t>
+            </a:r>
+          </a:p>
+        </p:txBody>
+      </p:sp>
+      <p:sp>
+        <p:nvSpPr>
+          <p:cNvPr id="23" name="Tile 3 Delta"/>
+          <p:cNvSpPr>
+            <a:spLocks noGrp="1"/>
+          </p:cNvSpPr>
+          <p:nvPr>
+            <p:ph type="body" idx="28"/>
+          </p:nvPr>
+        </p:nvSpPr>
+        <p:spPr>
+          <a:xfrm>
+            <a:off x="7945120" y="2743200"/>
+            <a:ext cx="1666240" cy="274320"/>
+          </a:xfrm>
+          <a:prstGeom prst="rect">
+            <a:avLst/>
+          </a:prstGeom>
+        </p:spPr>
+        <p:txBody>
+          <a:bodyPr wrap="square" anchor="ctr" lIns="0" tIns="0" rIns="0" bIns="0" rtlCol="0"/>
+          <a:lstStyle>
+            <a:lvl1pPr algn="l" marL="0" indent="0">
+              <a:lnSpc>
+                <a:spcPct val="100000"/>
+              </a:lnSpc>
+              <a:buNone/>
+              <a:defRPr lang="th-TH" sz="1200" dirty="0">
+                <a:solidFill>
+                  <a:srgbClr val="333333"/>
+                </a:solidFill>
+                <a:latin typeface="+mn-lt"/>
+                <a:ea typeface="+mn-ea"/>
+                <a:cs typeface="+mn-cs"/>
+              </a:defRPr>
+            </a:lvl1pPr>
+          </a:lstStyle>
+          <a:p>
+            <a:pPr algn="l" marL="0" indent="0">
+              <a:lnSpc>
+                <a:spcPct val="100000"/>
+              </a:lnSpc>
+              <a:buNone/>
+            </a:pPr>
+            <a:r>
+              <a:rPr lang="th-TH" sz="1200" dirty="0">
+                <a:solidFill>
+                  <a:srgbClr val="333333"/>
+                </a:solidFill>
+                <a:latin typeface="+mn-lt"/>
+                <a:ea typeface="+mn-ea"/>
+                <a:cs typeface="+mn-cs"/>
+              </a:rPr>
+              <a:t>▲ 0% จาก …</a:t>
+            </a:r>
+          </a:p>
+        </p:txBody>
+      </p:sp>
+      <p:sp>
+        <p:nvSpPr>
+          <p:cNvPr id="24" name="Chart Placeholder"/>
+          <p:cNvSpPr>
+            <a:spLocks noGrp="1"/>
+          </p:cNvSpPr>
+          <p:nvPr>
+            <p:ph type="chart" idx="1"/>
+          </p:nvPr>
+        </p:nvSpPr>
+        <p:spPr>
+          <a:xfrm>
+            <a:off x="914400" y="3291840"/>
+            <a:ext cx="10363200" cy="1874520"/>
+          </a:xfrm>
+          <a:prstGeom prst="rect">
+            <a:avLst/>
+          </a:prstGeom>
+        </p:spPr>
+        <p:txBody>
+          <a:bodyPr wrap="square" anchor="ctr" lIns="0" tIns="0" rIns="0" bIns="0" rtlCol="0"/>
+          <a:lstStyle>
+            <a:lvl1pPr algn="l" marL="0" indent="0">
+              <a:lnSpc>
+                <a:spcPct val="100000"/>
+              </a:lnSpc>
+              <a:buNone/>
+              <a:defRPr lang="th-TH" sz="1200" dirty="0">
+                <a:solidFill>
+                  <a:srgbClr val="5F5F5F"/>
+                </a:solidFill>
+                <a:latin typeface="+mn-lt"/>
+                <a:ea typeface="+mn-ea"/>
+                <a:cs typeface="+mn-cs"/>
+              </a:defRPr>
+            </a:lvl1pPr>
+          </a:lstStyle>
+          <a:p>
+            <a:pPr algn="l" marL="0" indent="0">
+              <a:lnSpc>
+                <a:spcPct val="100000"/>
+              </a:lnSpc>
+              <a:buNone/>
+            </a:pPr>
+            <a:endParaRPr lang="th-TH" sz="1200"/>
+          </a:p>
+        </p:txBody>
+      </p:sp>
+      <p:sp>
+        <p:nvSpPr>
+          <p:cNvPr id="25" name="Source"/>
+          <p:cNvSpPr>
+            <a:spLocks noGrp="1"/>
+          </p:cNvSpPr>
+          <p:nvPr>
+            <p:ph type="body" idx="2"/>
+          </p:nvPr>
+        </p:nvSpPr>
+        <p:spPr>
+          <a:xfrm>
+            <a:off x="914400" y="5257800"/>
+            <a:ext cx="10363200" cy="274320"/>
+          </a:xfrm>
+          <a:prstGeom prst="rect">
+            <a:avLst/>
+          </a:prstGeom>
+        </p:spPr>
+        <p:txBody>
+          <a:bodyPr wrap="square" anchor="t" lIns="0" tIns="0" rIns="0" bIns="0" rtlCol="0"/>
+          <a:lstStyle>
+            <a:lvl1pPr algn="l" marL="0" indent="0">
+              <a:lnSpc>
+                <a:spcPct val="130000"/>
+              </a:lnSpc>
+              <a:buNone/>
+              <a:defRPr lang="th-TH" sz="1000" dirty="0">
+                <a:solidFill>
+                  <a:srgbClr val="5F5F5F"/>
+                </a:solidFill>
+                <a:latin typeface="+mn-lt"/>
+                <a:ea typeface="+mn-ea"/>
+                <a:cs typeface="+mn-cs"/>
+              </a:defRPr>
+            </a:lvl1pPr>
+          </a:lstStyle>
+          <a:p>
+            <a:pPr algn="l" marL="0" indent="0">
+              <a:lnSpc>
+                <a:spcPct val="130000"/>
+              </a:lnSpc>
+              <a:buNone/>
+            </a:pPr>
+            <a:r>
+              <a:rPr lang="th-TH" sz="1000" dirty="0">
+                <a:solidFill>
+                  <a:srgbClr val="5F5F5F"/>
+                </a:solidFill>
+                <a:latin typeface="+mn-lt"/>
+                <a:ea typeface="+mn-ea"/>
+                <a:cs typeface="+mn-cs"/>
+              </a:rPr>
+              <a:t>ที่มาของข้อมูล</a:t>
+            </a:r>
+          </a:p>
+        </p:txBody>
+      </p:sp>
+      <p:sp>
+        <p:nvSpPr>
+          <p:cNvPr id="26" name="Takeaway Band"/>
+          <p:cNvSpPr/>
+          <p:nvPr/>
+        </p:nvSpPr>
+        <p:spPr>
+          <a:xfrm>
+            <a:off x="914400" y="5623560"/>
+            <a:ext cx="10363200" cy="411480"/>
+          </a:xfrm>
+          <a:prstGeom prst="rect">
+            <a:avLst/>
+          </a:prstGeom>
+          <a:solidFill>
+            <a:srgbClr val="E8F6F5"/>
+          </a:solidFill>
+          <a:ln>
+            <a:noFill/>
+          </a:ln>
+        </p:spPr>
+        <p:txBody>
+          <a:bodyPr/>
+          <a:lstStyle/>
+          <a:p>
+            <a:endParaRPr lang="th-TH"/>
+          </a:p>
+        </p:txBody>
+      </p:sp>
+      <p:sp>
+        <p:nvSpPr>
+          <p:cNvPr id="27" name="Takeaway Label"/>
+          <p:cNvSpPr>
+            <a:spLocks noGrp="1"/>
+          </p:cNvSpPr>
+          <p:nvPr>
+            <p:ph type="body" idx="3"/>
+          </p:nvPr>
+        </p:nvSpPr>
+        <p:spPr>
+          <a:xfrm>
+            <a:off x="1097280" y="5684520"/>
+            <a:ext cx="1828800" cy="289560"/>
+          </a:xfrm>
+          <a:prstGeom prst="rect">
+            <a:avLst/>
+          </a:prstGeom>
+        </p:spPr>
+        <p:txBody>
+          <a:bodyPr wrap="square" anchor="ctr" lIns="0" tIns="0" rIns="0" bIns="0" rtlCol="0"/>
+          <a:lstStyle>
+            <a:lvl1pPr algn="l" marL="0" indent="0">
+              <a:lnSpc>
+                <a:spcPct val="100000"/>
+              </a:lnSpc>
+              <a:buNone/>
+              <a:defRPr lang="th-TH" sz="1200" b="1" spc="120" dirty="0">
+                <a:solidFill>
+                  <a:srgbClr val="216B7F"/>
+                </a:solidFill>
+                <a:latin typeface="+mn-lt"/>
+                <a:ea typeface="+mn-ea"/>
+                <a:cs typeface="+mn-cs"/>
+              </a:defRPr>
+            </a:lvl1pPr>
+          </a:lstStyle>
+          <a:p>
+            <a:pPr algn="l" marL="0" indent="0">
+              <a:lnSpc>
+                <a:spcPct val="100000"/>
+              </a:lnSpc>
+              <a:buNone/>
+            </a:pPr>
+            <a:r>
+              <a:rPr lang="th-TH" sz="1200" b="1" spc="120" dirty="0">
+                <a:solidFill>
+                  <a:srgbClr val="216B7F"/>
+                </a:solidFill>
+                <a:latin typeface="+mn-lt"/>
+                <a:ea typeface="+mn-ea"/>
+                <a:cs typeface="+mn-cs"/>
+              </a:rPr>
+              <a:t>สรุป</a:t>
+            </a:r>
+          </a:p>
+        </p:txBody>
+      </p:sp>
+      <p:sp>
+        <p:nvSpPr>
+          <p:cNvPr id="28" name="Takeaway Copy"/>
+          <p:cNvSpPr>
+            <a:spLocks noGrp="1"/>
+          </p:cNvSpPr>
+          <p:nvPr>
+            <p:ph type="body" idx="4"/>
+          </p:nvPr>
+        </p:nvSpPr>
+        <p:spPr>
+          <a:xfrm>
+            <a:off x="2926080" y="5684520"/>
+            <a:ext cx="8168640" cy="289560"/>
+          </a:xfrm>
+          <a:prstGeom prst="rect">
+            <a:avLst/>
+          </a:prstGeom>
+        </p:spPr>
+        <p:txBody>
+          <a:bodyPr wrap="square" anchor="ctr" lIns="0" tIns="0" rIns="0" bIns="0" rtlCol="0"/>
+          <a:lstStyle>
+            <a:lvl1pPr algn="l" marL="0" indent="0">
+              <a:lnSpc>
+                <a:spcPct val="100000"/>
+              </a:lnSpc>
+              <a:buNone/>
+              <a:defRPr lang="th-TH" sz="1400" dirty="0">
+                <a:solidFill>
+                  <a:srgbClr val="333333"/>
+                </a:solidFill>
+                <a:latin typeface="+mn-lt"/>
+                <a:ea typeface="+mn-ea"/>
+                <a:cs typeface="+mn-cs"/>
+              </a:defRPr>
+            </a:lvl1pPr>
+          </a:lstStyle>
+          <a:p>
+            <a:pPr algn="l" marL="0" indent="0">
+              <a:lnSpc>
+                <a:spcPct val="100000"/>
+              </a:lnSpc>
+              <a:buNone/>
+            </a:pPr>
+            <a:r>
+              <a:rPr lang="th-TH" sz="1400" dirty="0">
+                <a:solidFill>
+                  <a:srgbClr val="333333"/>
+                </a:solidFill>
+                <a:latin typeface="+mn-lt"/>
+                <a:ea typeface="+mn-ea"/>
+                <a:cs typeface="+mn-cs"/>
+              </a:rPr>
+              <a:t>ประเด็นสรุปหนึ่งบรรทัด</a:t>
+            </a:r>
+          </a:p>
+        </p:txBody>
+      </p:sp>
+      <p:sp>
+        <p:nvSpPr>
+          <p:cNvPr id="90" name="Footer Rule"/>
+          <p:cNvSpPr/>
+          <p:nvPr/>
+        </p:nvSpPr>
+        <p:spPr>
+          <a:xfrm>
+            <a:off x="914400" y="6172200"/>
+            <a:ext cx="10363200" cy="12700"/>
+          </a:xfrm>
+          <a:prstGeom prst="rect">
+            <a:avLst/>
+          </a:prstGeom>
+          <a:solidFill>
+            <a:srgbClr val="E5E5E5"/>
+          </a:solidFill>
+          <a:ln>
+            <a:noFill/>
+          </a:ln>
+        </p:spPr>
+        <p:txBody>
+          <a:bodyPr/>
+          <a:lstStyle/>
+          <a:p>
+            <a:endParaRPr lang="th-TH"/>
+          </a:p>
+        </p:txBody>
+      </p:sp>
+      <p:sp>
+        <p:nvSpPr>
+          <p:cNvPr id="91" name="Date Placeholder"/>
+          <p:cNvSpPr>
+            <a:spLocks noGrp="1"/>
+          </p:cNvSpPr>
+          <p:nvPr>
+            <p:ph type="dt" idx="10"/>
+          </p:nvPr>
+        </p:nvSpPr>
+        <p:spPr>
+          <a:xfrm>
+            <a:off x="914400" y="6309360"/>
+            <a:ext cx="2743200" cy="274320"/>
+          </a:xfrm>
+          <a:prstGeom prst="rect">
+            <a:avLst/>
+          </a:prstGeom>
+        </p:spPr>
+        <p:txBody>
+          <a:bodyPr wrap="square" anchor="ctr" lIns="0" tIns="0" rIns="0" bIns="0" rtlCol="0"/>
+          <a:lstStyle>
+            <a:lvl1pPr algn="l" marL="0" indent="0">
+              <a:lnSpc>
+                <a:spcPct val="100000"/>
+              </a:lnSpc>
+              <a:buNone/>
+              <a:defRPr lang="th-TH" sz="1000" dirty="0">
+                <a:solidFill>
+                  <a:srgbClr val="5F5F5F"/>
+                </a:solidFill>
+                <a:latin typeface="+mn-lt"/>
+                <a:ea typeface="+mn-ea"/>
+                <a:cs typeface="+mn-cs"/>
+              </a:defRPr>
+            </a:lvl1pPr>
+          </a:lstStyle>
+          <a:p>
+            <a:pPr algn="l" marL="0" indent="0">
+              <a:lnSpc>
+                <a:spcPct val="100000"/>
+              </a:lnSpc>
+              <a:buNone/>
+            </a:pPr>
+            <a:endParaRPr lang="th-TH" sz="1000"/>
+          </a:p>
+        </p:txBody>
+      </p:sp>
+      <p:sp>
+        <p:nvSpPr>
+          <p:cNvPr id="92" name="Footer Placeholder"/>
+          <p:cNvSpPr>
+            <a:spLocks noGrp="1"/>
+          </p:cNvSpPr>
+          <p:nvPr>
+            <p:ph type="ftr" idx="11"/>
+          </p:nvPr>
+        </p:nvSpPr>
+        <p:spPr>
+          <a:xfrm>
+            <a:off x="4572000" y="6309360"/>
+            <a:ext cx="3657600" cy="274320"/>
+          </a:xfrm>
+          <a:prstGeom prst="rect">
+            <a:avLst/>
+          </a:prstGeom>
+        </p:spPr>
+        <p:txBody>
+          <a:bodyPr wrap="square" anchor="ctr" lIns="0" tIns="0" rIns="0" bIns="0" rtlCol="0"/>
+          <a:lstStyle>
+            <a:lvl1pPr algn="ctr" marL="0" indent="0">
+              <a:lnSpc>
+                <a:spcPct val="100000"/>
+              </a:lnSpc>
+              <a:buNone/>
+              <a:defRPr lang="th-TH" sz="1000" dirty="0">
+                <a:solidFill>
+                  <a:srgbClr val="5F5F5F"/>
+                </a:solidFill>
+                <a:latin typeface="+mn-lt"/>
+                <a:ea typeface="+mn-ea"/>
+                <a:cs typeface="+mn-cs"/>
+              </a:defRPr>
+            </a:lvl1pPr>
+          </a:lstStyle>
+          <a:p>
+            <a:pPr algn="ctr" marL="0" indent="0">
+              <a:lnSpc>
+                <a:spcPct val="100000"/>
+              </a:lnSpc>
+              <a:buNone/>
+            </a:pPr>
+            <a:endParaRPr lang="th-TH" sz="1000"/>
+          </a:p>
+        </p:txBody>
+      </p:sp>
+      <p:sp>
+        <p:nvSpPr>
+          <p:cNvPr id="93" name="Slide Number Placeholder"/>
+          <p:cNvSpPr>
+            <a:spLocks noGrp="1"/>
+          </p:cNvSpPr>
+          <p:nvPr>
+            <p:ph type="sldNum" sz="quarter" idx="12"/>
+          </p:nvPr>
+        </p:nvSpPr>
+        <p:spPr>
+          <a:xfrm>
+            <a:off x="9906000" y="6309360"/>
+            <a:ext cx="1371600" cy="274320"/>
+          </a:xfrm>
+          <a:prstGeom prst="rect">
+            <a:avLst/>
+          </a:prstGeom>
+        </p:spPr>
+        <p:txBody>
+          <a:bodyPr anchor="ctr"/>
+          <a:lstStyle>
+            <a:lvl1pPr algn="r" marL="0" indent="0">
+              <a:lnSpc>
+                <a:spcPct val="100000"/>
+              </a:lnSpc>
+              <a:buNone/>
+              <a:defRPr lang="th-TH" sz="1000" dirty="0">
+                <a:solidFill>
+                  <a:srgbClr val="5F5F5F"/>
+                </a:solidFill>
+                <a:latin typeface="+mn-lt"/>
+                <a:ea typeface="+mn-ea"/>
+                <a:cs typeface="+mn-cs"/>
+              </a:defRPr>
+            </a:lvl1pPr>
+          </a:lstStyle>
+          <a:p>
+            <a:pPr algn="r" marL="0" indent="0">
+              <a:buNone/>
+            </a:pPr>
+            <a:fld id="{B7E3A1C2-4F5D-4A88-9C1E-6D2F0A93B451}" type="slidenum">
+              <a:rPr lang="th-TH" sz="1000">
+                <a:solidFill>
+                  <a:srgbClr val="5F5F5F"/>
+                </a:solidFill>
+                <a:latin typeface="+mn-lt"/>
+                <a:cs typeface="+mn-cs"/>
+              </a:rPr>
+              <a:t>2</a:t>
+            </a:fld>
+            <a:endParaRPr lang="th-TH" sz="1000"/>
+          </a:p>
+        </p:txBody>
+      </p:sp>
+      <p:pic>
+        <p:nvPicPr>
+          <p:cNvPr id="94" name="NCT Mark"/>
+          <p:cNvPicPr>
+            <a:picLocks noChangeAspect="1"/>
+          </p:cNvPicPr>
+          <p:nvPr/>
+        </p:nvPicPr>
+        <p:blipFill>
+          <a:blip r:embed="rId2"/>
+          <a:stretch>
+            <a:fillRect/>
+          </a:stretch>
+        </p:blipFill>
+        <p:spPr>
+          <a:xfrm>
+            <a:off x="9494520" y="6289360"/>
+            <a:ext cx="274320" cy="174498"/>
+          </a:xfrm>
+          <a:prstGeom prst="rect">
+            <a:avLst/>
+          </a:prstGeom>
+        </p:spPr>
+      </p:pic>
+    </p:spTree>
+  </p:cSld>
+  <p:clrMapOvr>
+    <a:masterClrMapping/>
+  </p:clrMapOvr>
+</p:sldLayout>
+</file>
+
 <file path=ppt/slideLayouts/slideLayout3.xml><?xml version="1.0" encoding="utf-8"?>
 <p:sldLayout xmlns:a="http://schemas.openxmlformats.org/drawingml/2006/main" xmlns:r="http://schemas.openxmlformats.org/officeDocument/2006/relationships" xmlns:p="http://schemas.openxmlformats.org/presentationml/2006/main" type="obj" showMasterSp="0" preserve="1">
   <p:cSld name="03 Title and Content">
@@ -21981,7 +23554,7 @@
           <p:nvPr/>
         </p:nvPicPr>
         <p:blipFill>
-          <a:blip r:embed="rId24"/>
+          <a:blip r:embed="rId25"/>
           <a:stretch>
             <a:fillRect/>
           </a:stretch>
@@ -22022,6 +23595,7 @@
     <p:sldLayoutId id="2147483668" r:id="rId20"/>
     <p:sldLayoutId id="2147483669" r:id="rId21"/>
     <p:sldLayoutId id="2147483670" r:id="rId22"/>
+    <p:sldLayoutId id="2147483671" r:id="rId23"/>
   </p:sldLayoutIdLst>
   <p:txStyles>
     <p:titleStyle>
@@ -22278,19 +23852,19 @@
             <a:pPr/>
             <a:r>
               <a:rPr lang="th-TH" dirty="0"/>
-              <a:t>กระบวนการที่เสนอ</a:t>
-            </a:r>
-          </a:p>
-        </p:txBody>
-      </p:sp>
-      <p:sp>
-        <p:nvSpPr>
-          <p:cNvPr id="3" name="Sub"/>
-          <p:cNvSpPr>
-            <a:spLocks noGrp="1"/>
-          </p:cNvSpPr>
-          <p:nvPr>
-            <p:ph type="body" idx="1"/>
+              <a:t>วิธีการทำงาน</a:t>
+            </a:r>
+          </a:p>
+        </p:txBody>
+      </p:sp>
+      <p:sp>
+        <p:nvSpPr>
+          <p:cNvPr id="3" name="Cap"/>
+          <p:cNvSpPr>
+            <a:spLocks noGrp="1"/>
+          </p:cNvSpPr>
+          <p:nvPr>
+            <p:ph type="body" idx="2"/>
           </p:nvPr>
         </p:nvSpPr>
         <p:spPr/>
@@ -22301,398 +23875,7 @@
             <a:pPr/>
             <a:r>
               <a:rPr lang="th-TH" dirty="0"/>
-              <a:t>ห้าขั้นตอน ทำงานต่อเนื่องโดยไม่ต้องคีย์ซ้ำ</a:t>
-            </a:r>
-          </a:p>
-        </p:txBody>
-      </p:sp>
-      <p:sp>
-        <p:nvSpPr>
-          <p:cNvPr id="4" name="C0"/>
-          <p:cNvSpPr>
-            <a:spLocks noGrp="1"/>
-          </p:cNvSpPr>
-          <p:nvPr>
-            <p:ph type="body" idx="20"/>
-          </p:nvPr>
-        </p:nvSpPr>
-        <p:spPr/>
-        <p:txBody>
-          <a:bodyPr/>
-          <a:lstStyle/>
-          <a:p>
-            <a:pPr/>
-            <a:r>
-              <a:rPr lang="th-TH" dirty="0"/>
-              <a:t>1</a:t>
-            </a:r>
-          </a:p>
-        </p:txBody>
-      </p:sp>
-      <p:sp>
-        <p:nvSpPr>
-          <p:cNvPr id="5" name="H0"/>
-          <p:cNvSpPr>
-            <a:spLocks noGrp="1"/>
-          </p:cNvSpPr>
-          <p:nvPr>
-            <p:ph type="body" idx="21"/>
-          </p:nvPr>
-        </p:nvSpPr>
-        <p:spPr/>
-        <p:txBody>
-          <a:bodyPr/>
-          <a:lstStyle/>
-          <a:p>
-            <a:pPr/>
-            <a:r>
-              <a:rPr lang="th-TH" dirty="0"/>
-              <a:t>รับเอกสาร</a:t>
-            </a:r>
-          </a:p>
-        </p:txBody>
-      </p:sp>
-      <p:sp>
-        <p:nvSpPr>
-          <p:cNvPr id="6" name="B0"/>
-          <p:cNvSpPr>
-            <a:spLocks noGrp="1"/>
-          </p:cNvSpPr>
-          <p:nvPr>
-            <p:ph type="body" idx="22"/>
-          </p:nvPr>
-        </p:nvSpPr>
-        <p:spPr/>
-        <p:txBody>
-          <a:bodyPr/>
-          <a:lstStyle/>
-          <a:p>
-            <a:pPr/>
-            <a:r>
-              <a:rPr lang="th-TH" dirty="0"/>
-              <a:t>สแกนหรือรับไฟล์เข้าคิวกลาง</a:t>
-            </a:r>
-          </a:p>
-        </p:txBody>
-      </p:sp>
-      <p:sp>
-        <p:nvSpPr>
-          <p:cNvPr id="7" name="C1"/>
-          <p:cNvSpPr>
-            <a:spLocks noGrp="1"/>
-          </p:cNvSpPr>
-          <p:nvPr>
-            <p:ph type="body" idx="23"/>
-          </p:nvPr>
-        </p:nvSpPr>
-        <p:spPr/>
-        <p:txBody>
-          <a:bodyPr/>
-          <a:lstStyle/>
-          <a:p>
-            <a:pPr/>
-            <a:r>
-              <a:rPr lang="th-TH" dirty="0"/>
-              <a:t>2</a:t>
-            </a:r>
-          </a:p>
-        </p:txBody>
-      </p:sp>
-      <p:sp>
-        <p:nvSpPr>
-          <p:cNvPr id="8" name="H1"/>
-          <p:cNvSpPr>
-            <a:spLocks noGrp="1"/>
-          </p:cNvSpPr>
-          <p:nvPr>
-            <p:ph type="body" idx="24"/>
-          </p:nvPr>
-        </p:nvSpPr>
-        <p:spPr/>
-        <p:txBody>
-          <a:bodyPr/>
-          <a:lstStyle/>
-          <a:p>
-            <a:pPr/>
-            <a:r>
-              <a:rPr lang="th-TH" dirty="0"/>
-              <a:t>อ่านข้อมูล</a:t>
-            </a:r>
-          </a:p>
-        </p:txBody>
-      </p:sp>
-      <p:sp>
-        <p:nvSpPr>
-          <p:cNvPr id="9" name="B1"/>
-          <p:cNvSpPr>
-            <a:spLocks noGrp="1"/>
-          </p:cNvSpPr>
-          <p:nvPr>
-            <p:ph type="body" idx="25"/>
-          </p:nvPr>
-        </p:nvSpPr>
-        <p:spPr/>
-        <p:txBody>
-          <a:bodyPr/>
-          <a:lstStyle/>
-          <a:p>
-            <a:pPr/>
-            <a:r>
-              <a:rPr lang="th-TH" dirty="0"/>
-              <a:t>ดึงฟิลด์สำคัญ ตรวจกับต้นทาง</a:t>
-            </a:r>
-          </a:p>
-        </p:txBody>
-      </p:sp>
-      <p:sp>
-        <p:nvSpPr>
-          <p:cNvPr id="10" name="C2"/>
-          <p:cNvSpPr>
-            <a:spLocks noGrp="1"/>
-          </p:cNvSpPr>
-          <p:nvPr>
-            <p:ph type="body" idx="26"/>
-          </p:nvPr>
-        </p:nvSpPr>
-        <p:spPr/>
-        <p:txBody>
-          <a:bodyPr/>
-          <a:lstStyle/>
-          <a:p>
-            <a:pPr/>
-            <a:r>
-              <a:rPr lang="th-TH" dirty="0"/>
-              <a:t>3</a:t>
-            </a:r>
-          </a:p>
-        </p:txBody>
-      </p:sp>
-      <p:sp>
-        <p:nvSpPr>
-          <p:cNvPr id="11" name="H2"/>
-          <p:cNvSpPr>
-            <a:spLocks noGrp="1"/>
-          </p:cNvSpPr>
-          <p:nvPr>
-            <p:ph type="body" idx="27"/>
-          </p:nvPr>
-        </p:nvSpPr>
-        <p:spPr/>
-        <p:txBody>
-          <a:bodyPr/>
-          <a:lstStyle/>
-          <a:p>
-            <a:pPr/>
-            <a:r>
-              <a:rPr lang="th-TH" dirty="0"/>
-              <a:t>ตรวจสอบ</a:t>
-            </a:r>
-          </a:p>
-        </p:txBody>
-      </p:sp>
-      <p:sp>
-        <p:nvSpPr>
-          <p:cNvPr id="12" name="B2"/>
-          <p:cNvSpPr>
-            <a:spLocks noGrp="1"/>
-          </p:cNvSpPr>
-          <p:nvPr>
-            <p:ph type="body" idx="28"/>
-          </p:nvPr>
-        </p:nvSpPr>
-        <p:spPr/>
-        <p:txBody>
-          <a:bodyPr/>
-          <a:lstStyle/>
-          <a:p>
-            <a:pPr/>
-            <a:r>
-              <a:rPr lang="th-TH" dirty="0"/>
-              <a:t>กฎธุรกิจและวงเงินอนุมัติ</a:t>
-            </a:r>
-          </a:p>
-        </p:txBody>
-      </p:sp>
-      <p:sp>
-        <p:nvSpPr>
-          <p:cNvPr id="13" name="C3"/>
-          <p:cNvSpPr>
-            <a:spLocks noGrp="1"/>
-          </p:cNvSpPr>
-          <p:nvPr>
-            <p:ph type="body" idx="29"/>
-          </p:nvPr>
-        </p:nvSpPr>
-        <p:spPr/>
-        <p:txBody>
-          <a:bodyPr/>
-          <a:lstStyle/>
-          <a:p>
-            <a:pPr/>
-            <a:r>
-              <a:rPr lang="th-TH" dirty="0"/>
-              <a:t>4</a:t>
-            </a:r>
-          </a:p>
-        </p:txBody>
-      </p:sp>
-      <p:sp>
-        <p:nvSpPr>
-          <p:cNvPr id="14" name="H3"/>
-          <p:cNvSpPr>
-            <a:spLocks noGrp="1"/>
-          </p:cNvSpPr>
-          <p:nvPr>
-            <p:ph type="body" idx="30"/>
-          </p:nvPr>
-        </p:nvSpPr>
-        <p:spPr/>
-        <p:txBody>
-          <a:bodyPr/>
-          <a:lstStyle/>
-          <a:p>
-            <a:pPr/>
-            <a:r>
-              <a:rPr lang="th-TH" dirty="0"/>
-              <a:t>บันทึก</a:t>
-            </a:r>
-          </a:p>
-        </p:txBody>
-      </p:sp>
-      <p:sp>
-        <p:nvSpPr>
-          <p:cNvPr id="15" name="B3"/>
-          <p:cNvSpPr>
-            <a:spLocks noGrp="1"/>
-          </p:cNvSpPr>
-          <p:nvPr>
-            <p:ph type="body" idx="31"/>
-          </p:nvPr>
-        </p:nvSpPr>
-        <p:spPr/>
-        <p:txBody>
-          <a:bodyPr/>
-          <a:lstStyle/>
-          <a:p>
-            <a:pPr/>
-            <a:r>
-              <a:rPr lang="th-TH" dirty="0"/>
-              <a:t>ลงระบบบัญชีพร้อม audit trail</a:t>
-            </a:r>
-          </a:p>
-        </p:txBody>
-      </p:sp>
-      <p:sp>
-        <p:nvSpPr>
-          <p:cNvPr id="16" name="C4"/>
-          <p:cNvSpPr>
-            <a:spLocks noGrp="1"/>
-          </p:cNvSpPr>
-          <p:nvPr>
-            <p:ph type="body" idx="32"/>
-          </p:nvPr>
-        </p:nvSpPr>
-        <p:spPr/>
-        <p:txBody>
-          <a:bodyPr/>
-          <a:lstStyle/>
-          <a:p>
-            <a:pPr/>
-            <a:r>
-              <a:rPr lang="th-TH" dirty="0"/>
-              <a:t>5</a:t>
-            </a:r>
-          </a:p>
-        </p:txBody>
-      </p:sp>
-      <p:sp>
-        <p:nvSpPr>
-          <p:cNvPr id="17" name="H4"/>
-          <p:cNvSpPr>
-            <a:spLocks noGrp="1"/>
-          </p:cNvSpPr>
-          <p:nvPr>
-            <p:ph type="body" idx="33"/>
-          </p:nvPr>
-        </p:nvSpPr>
-        <p:spPr/>
-        <p:txBody>
-          <a:bodyPr/>
-          <a:lstStyle/>
-          <a:p>
-            <a:pPr/>
-            <a:r>
-              <a:rPr lang="th-TH" dirty="0"/>
-              <a:t>กระทบยอด</a:t>
-            </a:r>
-          </a:p>
-        </p:txBody>
-      </p:sp>
-      <p:sp>
-        <p:nvSpPr>
-          <p:cNvPr id="18" name="B4"/>
-          <p:cNvSpPr>
-            <a:spLocks noGrp="1"/>
-          </p:cNvSpPr>
-          <p:nvPr>
-            <p:ph type="body" idx="34"/>
-          </p:nvPr>
-        </p:nvSpPr>
-        <p:spPr/>
-        <p:txBody>
-          <a:bodyPr/>
-          <a:lstStyle/>
-          <a:p>
-            <a:pPr/>
-            <a:r>
-              <a:rPr lang="th-TH" dirty="0"/>
-              <a:t>จับคู่อัตโนมัติ ส่งรายงาน</a:t>
-            </a:r>
-          </a:p>
-        </p:txBody>
-      </p:sp>
-      <p:sp>
-        <p:nvSpPr>
-          <p:cNvPr id="19" name="RL"/>
-          <p:cNvSpPr>
-            <a:spLocks noGrp="1"/>
-          </p:cNvSpPr>
-          <p:nvPr>
-            <p:ph type="body" idx="35"/>
-          </p:nvPr>
-        </p:nvSpPr>
-        <p:spPr/>
-        <p:txBody>
-          <a:bodyPr/>
-          <a:lstStyle/>
-          <a:p>
-            <a:pPr/>
-            <a:r>
-              <a:rPr lang="th-TH" dirty="0"/>
-              <a:t>ผลลัพธ์</a:t>
-            </a:r>
-          </a:p>
-        </p:txBody>
-      </p:sp>
-      <p:sp>
-        <p:nvSpPr>
-          <p:cNvPr id="20" name="RC"/>
-          <p:cNvSpPr>
-            <a:spLocks noGrp="1"/>
-          </p:cNvSpPr>
-          <p:nvPr>
-            <p:ph type="body" idx="36"/>
-          </p:nvPr>
-        </p:nvSpPr>
-        <p:spPr/>
-        <p:txBody>
-          <a:bodyPr/>
-          <a:lstStyle/>
-          <a:p>
-            <a:pPr/>
-            <a:r>
-              <a:rPr lang="th-TH" dirty="0"/>
-              <a:t>เอกสารหนึ่งใบผ่านครบห้าขั้นโดยไม่มีการคีย์ซ้ำเลย</a:t>
+              <a:t>กระบวนการ สถาปัตยกรรม และขอบเขตที่ตกลงกัน</a:t>
             </a:r>
           </a:p>
         </p:txBody>
@@ -22740,7 +23923,7 @@
             <a:pPr/>
             <a:r>
               <a:rPr lang="th-TH" dirty="0"/>
-              <a:t>ภาพรวมสถาปัตยกรรมระบบ</a:t>
+              <a:t>กระบวนการที่เสนอ</a:t>
             </a:r>
           </a:p>
         </p:txBody>
@@ -22763,19 +23946,19 @@
             <a:pPr/>
             <a:r>
               <a:rPr lang="th-TH" dirty="0"/>
-              <a:t>ใช้ชุดชิ้นส่วนมาตรฐาน — กล่องมุมตรง เส้นหักมุมฉาก ไม่มีเงา</a:t>
-            </a:r>
-          </a:p>
-        </p:txBody>
-      </p:sp>
-      <p:sp>
-        <p:nvSpPr>
-          <p:cNvPr id="4" name="Leg"/>
-          <p:cNvSpPr>
-            <a:spLocks noGrp="1"/>
-          </p:cNvSpPr>
-          <p:nvPr>
-            <p:ph type="body" idx="2"/>
+              <a:t>ห้าขั้นตอน ทำงานต่อเนื่องโดยไม่ต้องคีย์ซ้ำ</a:t>
+            </a:r>
+          </a:p>
+        </p:txBody>
+      </p:sp>
+      <p:sp>
+        <p:nvSpPr>
+          <p:cNvPr id="4" name="C0"/>
+          <p:cNvSpPr>
+            <a:spLocks noGrp="1"/>
+          </p:cNvSpPr>
+          <p:nvPr>
+            <p:ph type="body" idx="20"/>
           </p:nvPr>
         </p:nvSpPr>
         <p:spPr/>
@@ -22786,19 +23969,19 @@
             <a:pPr/>
             <a:r>
               <a:rPr lang="th-TH" dirty="0"/>
-              <a:t>กล่องทึบ = ระบบที่มีอยู่  ·  กล่องมีสีหมวด = ส่วนที่เพิ่ม  ·  เส้นทึบ = ข้อมูลไหลอัตโนมัติ</a:t>
-            </a:r>
-          </a:p>
-        </p:txBody>
-      </p:sp>
-      <p:sp>
-        <p:nvSpPr>
-          <p:cNvPr id="5" name="TL"/>
-          <p:cNvSpPr>
-            <a:spLocks noGrp="1"/>
-          </p:cNvSpPr>
-          <p:nvPr>
-            <p:ph type="body" idx="3"/>
+              <a:t>1</a:t>
+            </a:r>
+          </a:p>
+        </p:txBody>
+      </p:sp>
+      <p:sp>
+        <p:nvSpPr>
+          <p:cNvPr id="5" name="H0"/>
+          <p:cNvSpPr>
+            <a:spLocks noGrp="1"/>
+          </p:cNvSpPr>
+          <p:nvPr>
+            <p:ph type="body" idx="21"/>
           </p:nvPr>
         </p:nvSpPr>
         <p:spPr/>
@@ -22809,19 +23992,19 @@
             <a:pPr/>
             <a:r>
               <a:rPr lang="th-TH" dirty="0"/>
-              <a:t>สรุป</a:t>
-            </a:r>
-          </a:p>
-        </p:txBody>
-      </p:sp>
-      <p:sp>
-        <p:nvSpPr>
-          <p:cNvPr id="6" name="TC"/>
-          <p:cNvSpPr>
-            <a:spLocks noGrp="1"/>
-          </p:cNvSpPr>
-          <p:nvPr>
-            <p:ph type="body" idx="4"/>
+              <a:t>รับเอกสาร</a:t>
+            </a:r>
+          </a:p>
+        </p:txBody>
+      </p:sp>
+      <p:sp>
+        <p:nvSpPr>
+          <p:cNvPr id="6" name="B0"/>
+          <p:cNvSpPr>
+            <a:spLocks noGrp="1"/>
+          </p:cNvSpPr>
+          <p:nvPr>
+            <p:ph type="body" idx="22"/>
           </p:nvPr>
         </p:nvSpPr>
         <p:spPr/>
@@ -22832,457 +24015,329 @@
             <a:pPr/>
             <a:r>
               <a:rPr lang="th-TH" dirty="0"/>
-              <a:t>ระบบเดิมไม่ถูกแก้ ของใหม่แทรกเป็นคิวและตัวตรวจกฎคั่นกลางเท่านั้น</a:t>
-            </a:r>
-          </a:p>
-        </p:txBody>
-      </p:sp>
-      <p:sp>
-        <p:nvSpPr>
-          <p:cNvPr id="10" name="Group Zone"/>
-          <p:cNvSpPr/>
-          <p:nvPr/>
-        </p:nvSpPr>
-        <p:spPr>
-          <a:xfrm>
-            <a:off x="3566160" y="2766060"/>
-            <a:ext cx="5257800" cy="1645920"/>
-          </a:xfrm>
-          <a:prstGeom prst="rect">
-            <a:avLst/>
-          </a:prstGeom>
-          <a:solidFill>
-            <a:srgbClr val="E8F6F5"/>
-          </a:solidFill>
-          <a:ln>
-            <a:noFill/>
-          </a:ln>
-        </p:spPr>
-        <p:txBody>
-          <a:bodyPr/>
-          <a:lstStyle/>
-          <a:p>
-            <a:endParaRPr lang="th-TH"/>
-          </a:p>
-        </p:txBody>
-      </p:sp>
-      <p:sp>
-        <p:nvSpPr>
-          <p:cNvPr id="11" name="Group Label"/>
-          <p:cNvSpPr/>
-          <p:nvPr/>
-        </p:nvSpPr>
-        <p:spPr>
-          <a:xfrm>
-            <a:off x="3840480" y="2926080"/>
-            <a:ext cx="3200400" cy="228600"/>
-          </a:xfrm>
-          <a:prstGeom prst="rect">
-            <a:avLst/>
-          </a:prstGeom>
-          <a:noFill/>
-          <a:ln>
-            <a:noFill/>
-          </a:ln>
-        </p:spPr>
-        <p:txBody>
-          <a:bodyPr wrap="square" anchor="ctr" lIns="0" tIns="0" rIns="0" bIns="0" rtlCol="0"/>
-          <a:lstStyle/>
-          <a:p>
-            <a:pPr algn="l" marL="0" indent="0">
-              <a:lnSpc>
-                <a:spcPct val="100000"/>
-              </a:lnSpc>
-              <a:buNone/>
-            </a:pPr>
-            <a:r>
-              <a:rPr lang="th-TH" sz="1200" b="1" spc="120" dirty="0">
-                <a:solidFill>
-                  <a:srgbClr val="216B7F"/>
-                </a:solidFill>
-                <a:latin typeface="+mn-lt"/>
-                <a:ea typeface="+mn-ea"/>
-                <a:cs typeface="+mn-cs"/>
-              </a:rPr>
-              <a:t>ส่วนที่เพิ่มใหม่</a:t>
-            </a:r>
-          </a:p>
-        </p:txBody>
-      </p:sp>
-      <p:sp>
-        <p:nvSpPr>
-          <p:cNvPr id="12" name="Box 1"/>
-          <p:cNvSpPr/>
-          <p:nvPr/>
-        </p:nvSpPr>
-        <p:spPr>
-          <a:xfrm>
-            <a:off x="1143000" y="3223260"/>
-            <a:ext cx="2011680" cy="731520"/>
-          </a:xfrm>
-          <a:prstGeom prst="rect">
-            <a:avLst/>
-          </a:prstGeom>
-          <a:solidFill>
-            <a:srgbClr val="23436D"/>
-          </a:solidFill>
-          <a:ln>
-            <a:noFill/>
-          </a:ln>
-        </p:spPr>
-        <p:txBody>
-          <a:bodyPr wrap="square" anchor="ctr" lIns="0" tIns="0" rIns="0" bIns="0" rtlCol="0"/>
-          <a:lstStyle/>
-          <a:p>
-            <a:pPr algn="ctr" marL="0" indent="0">
-              <a:lnSpc>
-                <a:spcPct val="110000"/>
-              </a:lnSpc>
-              <a:buNone/>
-            </a:pPr>
-            <a:r>
-              <a:rPr lang="th-TH" sz="1200" dirty="0">
-                <a:solidFill>
-                  <a:srgbClr val="FFFFFF"/>
-                </a:solidFill>
-                <a:latin typeface="+mn-lt"/>
-                <a:ea typeface="+mn-ea"/>
-                <a:cs typeface="+mn-cs"/>
-              </a:rPr>
-              <a:t>ระบบ ERP ปัจจุบัน</a:t>
-            </a:r>
-          </a:p>
-        </p:txBody>
-      </p:sp>
-      <p:sp>
-        <p:nvSpPr>
-          <p:cNvPr id="13" name="Box 2"/>
-          <p:cNvSpPr/>
-          <p:nvPr/>
-        </p:nvSpPr>
-        <p:spPr>
-          <a:xfrm>
-            <a:off x="3840480" y="3223260"/>
-            <a:ext cx="2011680" cy="731520"/>
-          </a:xfrm>
-          <a:prstGeom prst="rect">
-            <a:avLst/>
-          </a:prstGeom>
-          <a:solidFill>
-            <a:srgbClr val="FFFFFF"/>
-          </a:solidFill>
-          <a:ln w="12700">
-            <a:solidFill>
-              <a:srgbClr val="2A5EA0"/>
-            </a:solidFill>
-          </a:ln>
-        </p:spPr>
-        <p:txBody>
-          <a:bodyPr wrap="square" anchor="ctr" lIns="0" tIns="0" rIns="0" bIns="0" rtlCol="0"/>
-          <a:lstStyle/>
-          <a:p>
-            <a:pPr algn="ctr" marL="0" indent="0">
-              <a:lnSpc>
-                <a:spcPct val="110000"/>
-              </a:lnSpc>
-              <a:buNone/>
-            </a:pPr>
-            <a:r>
-              <a:rPr lang="th-TH" sz="1200" dirty="0">
-                <a:solidFill>
-                  <a:srgbClr val="333333"/>
-                </a:solidFill>
-                <a:latin typeface="+mn-lt"/>
-                <a:ea typeface="+mn-ea"/>
-                <a:cs typeface="+mn-cs"/>
-              </a:rPr>
-              <a:t>คิวเอกสารกลาง</a:t>
-            </a:r>
-          </a:p>
-        </p:txBody>
-      </p:sp>
-      <p:sp>
-        <p:nvSpPr>
-          <p:cNvPr id="113" name="Box 2 Tab"/>
-          <p:cNvSpPr/>
-          <p:nvPr/>
-        </p:nvSpPr>
-        <p:spPr>
-          <a:xfrm>
-            <a:off x="3954780" y="3337560"/>
-            <a:ext cx="205740" cy="45720"/>
-          </a:xfrm>
-          <a:prstGeom prst="rect">
-            <a:avLst/>
-          </a:prstGeom>
-          <a:solidFill>
-            <a:srgbClr val="2A5EA0"/>
-          </a:solidFill>
-          <a:ln>
-            <a:noFill/>
-          </a:ln>
-        </p:spPr>
-        <p:txBody>
-          <a:bodyPr/>
-          <a:lstStyle/>
-          <a:p>
-            <a:endParaRPr lang="th-TH"/>
-          </a:p>
-        </p:txBody>
-      </p:sp>
-      <p:sp>
-        <p:nvSpPr>
-          <p:cNvPr id="14" name="Box 3"/>
-          <p:cNvSpPr/>
-          <p:nvPr/>
-        </p:nvSpPr>
-        <p:spPr>
-          <a:xfrm>
-            <a:off x="6537960" y="3223260"/>
-            <a:ext cx="2011680" cy="731520"/>
-          </a:xfrm>
-          <a:prstGeom prst="rect">
-            <a:avLst/>
-          </a:prstGeom>
-          <a:solidFill>
-            <a:srgbClr val="FFFFFF"/>
-          </a:solidFill>
-          <a:ln w="12700">
-            <a:solidFill>
-              <a:srgbClr val="BB731B"/>
-            </a:solidFill>
-          </a:ln>
-        </p:spPr>
-        <p:txBody>
-          <a:bodyPr wrap="square" anchor="ctr" lIns="0" tIns="0" rIns="0" bIns="0" rtlCol="0"/>
-          <a:lstStyle/>
-          <a:p>
-            <a:pPr algn="ctr" marL="0" indent="0">
-              <a:lnSpc>
-                <a:spcPct val="110000"/>
-              </a:lnSpc>
-              <a:buNone/>
-            </a:pPr>
-            <a:r>
-              <a:rPr lang="th-TH" sz="1200" dirty="0">
-                <a:solidFill>
-                  <a:srgbClr val="333333"/>
-                </a:solidFill>
-                <a:latin typeface="+mn-lt"/>
-                <a:ea typeface="+mn-ea"/>
-                <a:cs typeface="+mn-cs"/>
-              </a:rPr>
-              <a:t>ตัวตรวจกฎธุรกิจ</a:t>
-            </a:r>
-          </a:p>
-        </p:txBody>
-      </p:sp>
-      <p:sp>
-        <p:nvSpPr>
-          <p:cNvPr id="114" name="Box 3 Tab"/>
-          <p:cNvSpPr/>
-          <p:nvPr/>
-        </p:nvSpPr>
-        <p:spPr>
-          <a:xfrm>
-            <a:off x="6652260" y="3337560"/>
-            <a:ext cx="205740" cy="45720"/>
-          </a:xfrm>
-          <a:prstGeom prst="rect">
-            <a:avLst/>
-          </a:prstGeom>
-          <a:solidFill>
-            <a:srgbClr val="BB731B"/>
-          </a:solidFill>
-          <a:ln>
-            <a:noFill/>
-          </a:ln>
-        </p:spPr>
-        <p:txBody>
-          <a:bodyPr/>
-          <a:lstStyle/>
-          <a:p>
-            <a:endParaRPr lang="th-TH"/>
-          </a:p>
-        </p:txBody>
-      </p:sp>
-      <p:sp>
-        <p:nvSpPr>
-          <p:cNvPr id="15" name="Box 4"/>
-          <p:cNvSpPr/>
-          <p:nvPr/>
-        </p:nvSpPr>
-        <p:spPr>
-          <a:xfrm>
-            <a:off x="9235440" y="3223260"/>
-            <a:ext cx="2011680" cy="731520"/>
-          </a:xfrm>
-          <a:prstGeom prst="rect">
-            <a:avLst/>
-          </a:prstGeom>
-          <a:solidFill>
-            <a:srgbClr val="23436D"/>
-          </a:solidFill>
-          <a:ln>
-            <a:noFill/>
-          </a:ln>
-        </p:spPr>
-        <p:txBody>
-          <a:bodyPr wrap="square" anchor="ctr" lIns="0" tIns="0" rIns="0" bIns="0" rtlCol="0"/>
-          <a:lstStyle/>
-          <a:p>
-            <a:pPr algn="ctr" marL="0" indent="0">
-              <a:lnSpc>
-                <a:spcPct val="110000"/>
-              </a:lnSpc>
-              <a:buNone/>
-            </a:pPr>
-            <a:r>
-              <a:rPr lang="th-TH" sz="1200" dirty="0">
-                <a:solidFill>
-                  <a:srgbClr val="FFFFFF"/>
-                </a:solidFill>
-                <a:latin typeface="+mn-lt"/>
-                <a:ea typeface="+mn-ea"/>
-                <a:cs typeface="+mn-cs"/>
-              </a:rPr>
-              <a:t>ระบบบัญชี</a:t>
-            </a:r>
-          </a:p>
-        </p:txBody>
-      </p:sp>
-      <p:sp>
-        <p:nvSpPr>
-          <p:cNvPr id="16" name="Link 1"/>
-          <p:cNvSpPr/>
-          <p:nvPr/>
-        </p:nvSpPr>
-        <p:spPr>
-          <a:xfrm>
-            <a:off x="3268980" y="3589020"/>
-            <a:ext cx="457200" cy="0"/>
-          </a:xfrm>
-          <a:prstGeom prst="line">
-            <a:avLst/>
-          </a:prstGeom>
-          <a:noFill/>
-          <a:ln w="15875" cap="flat">
-            <a:solidFill>
-              <a:srgbClr val="216B7F"/>
-            </a:solidFill>
-            <a:prstDash val="solid"/>
-            <a:tailEnd type="triangle" w="med" len="med"/>
-          </a:ln>
-        </p:spPr>
-        <p:txBody>
-          <a:bodyPr/>
-          <a:lstStyle/>
-          <a:p>
-            <a:endParaRPr lang="th-TH"/>
-          </a:p>
-        </p:txBody>
-      </p:sp>
-      <p:sp>
-        <p:nvSpPr>
-          <p:cNvPr id="17" name="Link 2"/>
-          <p:cNvSpPr/>
-          <p:nvPr/>
-        </p:nvSpPr>
-        <p:spPr>
-          <a:xfrm>
-            <a:off x="5966460" y="3589020"/>
-            <a:ext cx="457200" cy="0"/>
-          </a:xfrm>
-          <a:prstGeom prst="line">
-            <a:avLst/>
-          </a:prstGeom>
-          <a:noFill/>
-          <a:ln w="15875" cap="flat">
-            <a:solidFill>
-              <a:srgbClr val="216B7F"/>
-            </a:solidFill>
-            <a:prstDash val="solid"/>
-            <a:tailEnd type="triangle" w="med" len="med"/>
-          </a:ln>
-        </p:spPr>
-        <p:txBody>
-          <a:bodyPr/>
-          <a:lstStyle/>
-          <a:p>
-            <a:endParaRPr lang="th-TH"/>
-          </a:p>
-        </p:txBody>
-      </p:sp>
-      <p:sp>
-        <p:nvSpPr>
-          <p:cNvPr id="18" name="Link 3"/>
-          <p:cNvSpPr/>
-          <p:nvPr/>
-        </p:nvSpPr>
-        <p:spPr>
-          <a:xfrm>
-            <a:off x="8663940" y="3589020"/>
-            <a:ext cx="457200" cy="0"/>
-          </a:xfrm>
-          <a:prstGeom prst="line">
-            <a:avLst/>
-          </a:prstGeom>
-          <a:noFill/>
-          <a:ln w="15875" cap="flat">
-            <a:solidFill>
-              <a:srgbClr val="216B7F"/>
-            </a:solidFill>
-            <a:prstDash val="solid"/>
-            <a:tailEnd type="triangle" w="med" len="med"/>
-          </a:ln>
-        </p:spPr>
-        <p:txBody>
-          <a:bodyPr/>
-          <a:lstStyle/>
-          <a:p>
-            <a:endParaRPr lang="th-TH"/>
-          </a:p>
-        </p:txBody>
-      </p:sp>
-      <p:sp>
-        <p:nvSpPr>
-          <p:cNvPr id="19" name="Edge Label"/>
-          <p:cNvSpPr/>
-          <p:nvPr/>
-        </p:nvSpPr>
-        <p:spPr>
-          <a:xfrm>
-            <a:off x="5806440" y="3268980"/>
-            <a:ext cx="822960" cy="228600"/>
-          </a:xfrm>
-          <a:prstGeom prst="rect">
-            <a:avLst/>
-          </a:prstGeom>
-          <a:noFill/>
-          <a:ln>
-            <a:noFill/>
-          </a:ln>
-        </p:spPr>
-        <p:txBody>
-          <a:bodyPr wrap="square" anchor="ctr" lIns="0" tIns="0" rIns="0" bIns="0" rtlCol="0"/>
-          <a:lstStyle/>
-          <a:p>
-            <a:pPr algn="ctr" marL="0" indent="0">
-              <a:lnSpc>
-                <a:spcPct val="100000"/>
-              </a:lnSpc>
-              <a:buNone/>
-            </a:pPr>
-            <a:r>
-              <a:rPr lang="th-TH" sz="1000" dirty="0">
-                <a:solidFill>
-                  <a:srgbClr val="5F5F5F"/>
-                </a:solidFill>
-                <a:latin typeface="+mn-lt"/>
-                <a:ea typeface="+mn-ea"/>
-                <a:cs typeface="+mn-cs"/>
-              </a:rPr>
-              <a:t>ผ่านกฎ</a:t>
+              <a:t>สแกนหรือรับไฟล์เข้าคิวกลาง</a:t>
+            </a:r>
+          </a:p>
+        </p:txBody>
+      </p:sp>
+      <p:sp>
+        <p:nvSpPr>
+          <p:cNvPr id="7" name="C1"/>
+          <p:cNvSpPr>
+            <a:spLocks noGrp="1"/>
+          </p:cNvSpPr>
+          <p:nvPr>
+            <p:ph type="body" idx="23"/>
+          </p:nvPr>
+        </p:nvSpPr>
+        <p:spPr/>
+        <p:txBody>
+          <a:bodyPr/>
+          <a:lstStyle/>
+          <a:p>
+            <a:pPr/>
+            <a:r>
+              <a:rPr lang="th-TH" dirty="0"/>
+              <a:t>2</a:t>
+            </a:r>
+          </a:p>
+        </p:txBody>
+      </p:sp>
+      <p:sp>
+        <p:nvSpPr>
+          <p:cNvPr id="8" name="H1"/>
+          <p:cNvSpPr>
+            <a:spLocks noGrp="1"/>
+          </p:cNvSpPr>
+          <p:nvPr>
+            <p:ph type="body" idx="24"/>
+          </p:nvPr>
+        </p:nvSpPr>
+        <p:spPr/>
+        <p:txBody>
+          <a:bodyPr/>
+          <a:lstStyle/>
+          <a:p>
+            <a:pPr/>
+            <a:r>
+              <a:rPr lang="th-TH" dirty="0"/>
+              <a:t>อ่านข้อมูล</a:t>
+            </a:r>
+          </a:p>
+        </p:txBody>
+      </p:sp>
+      <p:sp>
+        <p:nvSpPr>
+          <p:cNvPr id="9" name="B1"/>
+          <p:cNvSpPr>
+            <a:spLocks noGrp="1"/>
+          </p:cNvSpPr>
+          <p:nvPr>
+            <p:ph type="body" idx="25"/>
+          </p:nvPr>
+        </p:nvSpPr>
+        <p:spPr/>
+        <p:txBody>
+          <a:bodyPr/>
+          <a:lstStyle/>
+          <a:p>
+            <a:pPr/>
+            <a:r>
+              <a:rPr lang="th-TH" dirty="0"/>
+              <a:t>ดึงฟิลด์สำคัญ ตรวจกับต้นทาง</a:t>
+            </a:r>
+          </a:p>
+        </p:txBody>
+      </p:sp>
+      <p:sp>
+        <p:nvSpPr>
+          <p:cNvPr id="10" name="C2"/>
+          <p:cNvSpPr>
+            <a:spLocks noGrp="1"/>
+          </p:cNvSpPr>
+          <p:nvPr>
+            <p:ph type="body" idx="26"/>
+          </p:nvPr>
+        </p:nvSpPr>
+        <p:spPr/>
+        <p:txBody>
+          <a:bodyPr/>
+          <a:lstStyle/>
+          <a:p>
+            <a:pPr/>
+            <a:r>
+              <a:rPr lang="th-TH" dirty="0"/>
+              <a:t>3</a:t>
+            </a:r>
+          </a:p>
+        </p:txBody>
+      </p:sp>
+      <p:sp>
+        <p:nvSpPr>
+          <p:cNvPr id="11" name="H2"/>
+          <p:cNvSpPr>
+            <a:spLocks noGrp="1"/>
+          </p:cNvSpPr>
+          <p:nvPr>
+            <p:ph type="body" idx="27"/>
+          </p:nvPr>
+        </p:nvSpPr>
+        <p:spPr/>
+        <p:txBody>
+          <a:bodyPr/>
+          <a:lstStyle/>
+          <a:p>
+            <a:pPr/>
+            <a:r>
+              <a:rPr lang="th-TH" dirty="0"/>
+              <a:t>ตรวจสอบ</a:t>
+            </a:r>
+          </a:p>
+        </p:txBody>
+      </p:sp>
+      <p:sp>
+        <p:nvSpPr>
+          <p:cNvPr id="12" name="B2"/>
+          <p:cNvSpPr>
+            <a:spLocks noGrp="1"/>
+          </p:cNvSpPr>
+          <p:nvPr>
+            <p:ph type="body" idx="28"/>
+          </p:nvPr>
+        </p:nvSpPr>
+        <p:spPr/>
+        <p:txBody>
+          <a:bodyPr/>
+          <a:lstStyle/>
+          <a:p>
+            <a:pPr/>
+            <a:r>
+              <a:rPr lang="th-TH" dirty="0"/>
+              <a:t>กฎธุรกิจและวงเงินอนุมัติ</a:t>
+            </a:r>
+          </a:p>
+        </p:txBody>
+      </p:sp>
+      <p:sp>
+        <p:nvSpPr>
+          <p:cNvPr id="13" name="C3"/>
+          <p:cNvSpPr>
+            <a:spLocks noGrp="1"/>
+          </p:cNvSpPr>
+          <p:nvPr>
+            <p:ph type="body" idx="29"/>
+          </p:nvPr>
+        </p:nvSpPr>
+        <p:spPr/>
+        <p:txBody>
+          <a:bodyPr/>
+          <a:lstStyle/>
+          <a:p>
+            <a:pPr/>
+            <a:r>
+              <a:rPr lang="th-TH" dirty="0"/>
+              <a:t>4</a:t>
+            </a:r>
+          </a:p>
+        </p:txBody>
+      </p:sp>
+      <p:sp>
+        <p:nvSpPr>
+          <p:cNvPr id="14" name="H3"/>
+          <p:cNvSpPr>
+            <a:spLocks noGrp="1"/>
+          </p:cNvSpPr>
+          <p:nvPr>
+            <p:ph type="body" idx="30"/>
+          </p:nvPr>
+        </p:nvSpPr>
+        <p:spPr/>
+        <p:txBody>
+          <a:bodyPr/>
+          <a:lstStyle/>
+          <a:p>
+            <a:pPr/>
+            <a:r>
+              <a:rPr lang="th-TH" dirty="0"/>
+              <a:t>บันทึก</a:t>
+            </a:r>
+          </a:p>
+        </p:txBody>
+      </p:sp>
+      <p:sp>
+        <p:nvSpPr>
+          <p:cNvPr id="15" name="B3"/>
+          <p:cNvSpPr>
+            <a:spLocks noGrp="1"/>
+          </p:cNvSpPr>
+          <p:nvPr>
+            <p:ph type="body" idx="31"/>
+          </p:nvPr>
+        </p:nvSpPr>
+        <p:spPr/>
+        <p:txBody>
+          <a:bodyPr/>
+          <a:lstStyle/>
+          <a:p>
+            <a:pPr/>
+            <a:r>
+              <a:rPr lang="th-TH" dirty="0"/>
+              <a:t>ลงระบบบัญชีพร้อม audit trail</a:t>
+            </a:r>
+          </a:p>
+        </p:txBody>
+      </p:sp>
+      <p:sp>
+        <p:nvSpPr>
+          <p:cNvPr id="16" name="C4"/>
+          <p:cNvSpPr>
+            <a:spLocks noGrp="1"/>
+          </p:cNvSpPr>
+          <p:nvPr>
+            <p:ph type="body" idx="32"/>
+          </p:nvPr>
+        </p:nvSpPr>
+        <p:spPr/>
+        <p:txBody>
+          <a:bodyPr/>
+          <a:lstStyle/>
+          <a:p>
+            <a:pPr/>
+            <a:r>
+              <a:rPr lang="th-TH" dirty="0"/>
+              <a:t>5</a:t>
+            </a:r>
+          </a:p>
+        </p:txBody>
+      </p:sp>
+      <p:sp>
+        <p:nvSpPr>
+          <p:cNvPr id="17" name="H4"/>
+          <p:cNvSpPr>
+            <a:spLocks noGrp="1"/>
+          </p:cNvSpPr>
+          <p:nvPr>
+            <p:ph type="body" idx="33"/>
+          </p:nvPr>
+        </p:nvSpPr>
+        <p:spPr/>
+        <p:txBody>
+          <a:bodyPr/>
+          <a:lstStyle/>
+          <a:p>
+            <a:pPr/>
+            <a:r>
+              <a:rPr lang="th-TH" dirty="0"/>
+              <a:t>กระทบยอด</a:t>
+            </a:r>
+          </a:p>
+        </p:txBody>
+      </p:sp>
+      <p:sp>
+        <p:nvSpPr>
+          <p:cNvPr id="18" name="B4"/>
+          <p:cNvSpPr>
+            <a:spLocks noGrp="1"/>
+          </p:cNvSpPr>
+          <p:nvPr>
+            <p:ph type="body" idx="34"/>
+          </p:nvPr>
+        </p:nvSpPr>
+        <p:spPr/>
+        <p:txBody>
+          <a:bodyPr/>
+          <a:lstStyle/>
+          <a:p>
+            <a:pPr/>
+            <a:r>
+              <a:rPr lang="th-TH" dirty="0"/>
+              <a:t>จับคู่อัตโนมัติ ส่งรายงาน</a:t>
+            </a:r>
+          </a:p>
+        </p:txBody>
+      </p:sp>
+      <p:sp>
+        <p:nvSpPr>
+          <p:cNvPr id="19" name="RL"/>
+          <p:cNvSpPr>
+            <a:spLocks noGrp="1"/>
+          </p:cNvSpPr>
+          <p:nvPr>
+            <p:ph type="body" idx="35"/>
+          </p:nvPr>
+        </p:nvSpPr>
+        <p:spPr/>
+        <p:txBody>
+          <a:bodyPr/>
+          <a:lstStyle/>
+          <a:p>
+            <a:pPr/>
+            <a:r>
+              <a:rPr lang="th-TH" dirty="0"/>
+              <a:t>ผลลัพธ์</a:t>
+            </a:r>
+          </a:p>
+        </p:txBody>
+      </p:sp>
+      <p:sp>
+        <p:nvSpPr>
+          <p:cNvPr id="20" name="RC"/>
+          <p:cNvSpPr>
+            <a:spLocks noGrp="1"/>
+          </p:cNvSpPr>
+          <p:nvPr>
+            <p:ph type="body" idx="36"/>
+          </p:nvPr>
+        </p:nvSpPr>
+        <p:spPr/>
+        <p:txBody>
+          <a:bodyPr/>
+          <a:lstStyle/>
+          <a:p>
+            <a:pPr/>
+            <a:r>
+              <a:rPr lang="th-TH" dirty="0"/>
+              <a:t>เอกสารหนึ่งใบผ่านครบห้าขั้นโดยไม่มีการคีย์ซ้ำเลย</a:t>
             </a:r>
           </a:p>
         </p:txBody>
@@ -23296,6 +24351,596 @@
 </file>
 
 <file path=ppt/slides/slide12.xml><?xml version="1.0" encoding="utf-8"?>
+<p:sld xmlns:a="http://schemas.openxmlformats.org/drawingml/2006/main" xmlns:r="http://schemas.openxmlformats.org/officeDocument/2006/relationships" xmlns:p="http://schemas.openxmlformats.org/presentationml/2006/main">
+  <p:cSld name="">
+    <p:spTree>
+      <p:nvGrpSpPr>
+        <p:cNvPr id="1" name=""/>
+        <p:cNvGrpSpPr/>
+        <p:nvPr/>
+      </p:nvGrpSpPr>
+      <p:grpSpPr>
+        <a:xfrm>
+          <a:off x="0" y="0"/>
+          <a:ext cx="0" cy="0"/>
+          <a:chOff x="0" y="0"/>
+          <a:chExt cx="0" cy="0"/>
+        </a:xfrm>
+      </p:grpSpPr>
+      <p:sp>
+        <p:nvSpPr>
+          <p:cNvPr id="2" name="Title"/>
+          <p:cNvSpPr>
+            <a:spLocks noGrp="1"/>
+          </p:cNvSpPr>
+          <p:nvPr>
+            <p:ph type="title"/>
+          </p:nvPr>
+        </p:nvSpPr>
+        <p:spPr/>
+        <p:txBody>
+          <a:bodyPr/>
+          <a:lstStyle/>
+          <a:p>
+            <a:pPr/>
+            <a:r>
+              <a:rPr lang="th-TH" dirty="0"/>
+              <a:t>ภาพรวมสถาปัตยกรรมระบบ</a:t>
+            </a:r>
+          </a:p>
+        </p:txBody>
+      </p:sp>
+      <p:sp>
+        <p:nvSpPr>
+          <p:cNvPr id="3" name="Sub"/>
+          <p:cNvSpPr>
+            <a:spLocks noGrp="1"/>
+          </p:cNvSpPr>
+          <p:nvPr>
+            <p:ph type="body" idx="1"/>
+          </p:nvPr>
+        </p:nvSpPr>
+        <p:spPr/>
+        <p:txBody>
+          <a:bodyPr/>
+          <a:lstStyle/>
+          <a:p>
+            <a:pPr/>
+            <a:r>
+              <a:rPr lang="th-TH" dirty="0"/>
+              <a:t>ใช้ชุดชิ้นส่วนมาตรฐาน — กล่องมุมตรง เส้นหักมุมฉาก ไม่มีเงา</a:t>
+            </a:r>
+          </a:p>
+        </p:txBody>
+      </p:sp>
+      <p:sp>
+        <p:nvSpPr>
+          <p:cNvPr id="4" name="Leg"/>
+          <p:cNvSpPr>
+            <a:spLocks noGrp="1"/>
+          </p:cNvSpPr>
+          <p:nvPr>
+            <p:ph type="body" idx="2"/>
+          </p:nvPr>
+        </p:nvSpPr>
+        <p:spPr/>
+        <p:txBody>
+          <a:bodyPr/>
+          <a:lstStyle/>
+          <a:p>
+            <a:pPr/>
+            <a:r>
+              <a:rPr lang="th-TH" dirty="0"/>
+              <a:t>กล่องทึบ = ระบบที่มีอยู่  ·  กล่องมีสีหมวด = ส่วนที่เพิ่ม  ·  เส้นทึบ = ข้อมูลไหลอัตโนมัติ</a:t>
+            </a:r>
+          </a:p>
+        </p:txBody>
+      </p:sp>
+      <p:sp>
+        <p:nvSpPr>
+          <p:cNvPr id="5" name="TL"/>
+          <p:cNvSpPr>
+            <a:spLocks noGrp="1"/>
+          </p:cNvSpPr>
+          <p:nvPr>
+            <p:ph type="body" idx="3"/>
+          </p:nvPr>
+        </p:nvSpPr>
+        <p:spPr/>
+        <p:txBody>
+          <a:bodyPr/>
+          <a:lstStyle/>
+          <a:p>
+            <a:pPr/>
+            <a:r>
+              <a:rPr lang="th-TH" dirty="0"/>
+              <a:t>สรุป</a:t>
+            </a:r>
+          </a:p>
+        </p:txBody>
+      </p:sp>
+      <p:sp>
+        <p:nvSpPr>
+          <p:cNvPr id="6" name="TC"/>
+          <p:cNvSpPr>
+            <a:spLocks noGrp="1"/>
+          </p:cNvSpPr>
+          <p:nvPr>
+            <p:ph type="body" idx="4"/>
+          </p:nvPr>
+        </p:nvSpPr>
+        <p:spPr/>
+        <p:txBody>
+          <a:bodyPr/>
+          <a:lstStyle/>
+          <a:p>
+            <a:pPr/>
+            <a:r>
+              <a:rPr lang="th-TH" dirty="0"/>
+              <a:t>ระบบเดิมไม่ถูกแก้ ของใหม่แทรกเป็นคิวและตัวตรวจกฎคั่นกลางเท่านั้น</a:t>
+            </a:r>
+          </a:p>
+        </p:txBody>
+      </p:sp>
+      <p:sp>
+        <p:nvSpPr>
+          <p:cNvPr id="10" name="Group Zone"/>
+          <p:cNvSpPr/>
+          <p:nvPr/>
+        </p:nvSpPr>
+        <p:spPr>
+          <a:xfrm>
+            <a:off x="3566160" y="2766060"/>
+            <a:ext cx="5257800" cy="1645920"/>
+          </a:xfrm>
+          <a:prstGeom prst="rect">
+            <a:avLst/>
+          </a:prstGeom>
+          <a:solidFill>
+            <a:srgbClr val="E8F6F5"/>
+          </a:solidFill>
+          <a:ln>
+            <a:noFill/>
+          </a:ln>
+        </p:spPr>
+        <p:txBody>
+          <a:bodyPr/>
+          <a:lstStyle/>
+          <a:p>
+            <a:endParaRPr lang="th-TH"/>
+          </a:p>
+        </p:txBody>
+      </p:sp>
+      <p:sp>
+        <p:nvSpPr>
+          <p:cNvPr id="11" name="Group Label"/>
+          <p:cNvSpPr/>
+          <p:nvPr/>
+        </p:nvSpPr>
+        <p:spPr>
+          <a:xfrm>
+            <a:off x="3840480" y="2926080"/>
+            <a:ext cx="3200400" cy="228600"/>
+          </a:xfrm>
+          <a:prstGeom prst="rect">
+            <a:avLst/>
+          </a:prstGeom>
+          <a:noFill/>
+          <a:ln>
+            <a:noFill/>
+          </a:ln>
+        </p:spPr>
+        <p:txBody>
+          <a:bodyPr wrap="square" anchor="ctr" lIns="0" tIns="0" rIns="0" bIns="0" rtlCol="0"/>
+          <a:lstStyle/>
+          <a:p>
+            <a:pPr algn="l" marL="0" indent="0">
+              <a:lnSpc>
+                <a:spcPct val="100000"/>
+              </a:lnSpc>
+              <a:buNone/>
+            </a:pPr>
+            <a:r>
+              <a:rPr lang="th-TH" sz="1200" b="1" spc="120" dirty="0">
+                <a:solidFill>
+                  <a:srgbClr val="216B7F"/>
+                </a:solidFill>
+                <a:latin typeface="+mn-lt"/>
+                <a:ea typeface="+mn-ea"/>
+                <a:cs typeface="+mn-cs"/>
+              </a:rPr>
+              <a:t>ส่วนที่เพิ่มใหม่</a:t>
+            </a:r>
+          </a:p>
+        </p:txBody>
+      </p:sp>
+      <p:sp>
+        <p:nvSpPr>
+          <p:cNvPr id="12" name="Box 1"/>
+          <p:cNvSpPr/>
+          <p:nvPr/>
+        </p:nvSpPr>
+        <p:spPr>
+          <a:xfrm>
+            <a:off x="1143000" y="3223260"/>
+            <a:ext cx="2011680" cy="731520"/>
+          </a:xfrm>
+          <a:prstGeom prst="rect">
+            <a:avLst/>
+          </a:prstGeom>
+          <a:solidFill>
+            <a:srgbClr val="23436D"/>
+          </a:solidFill>
+          <a:ln>
+            <a:noFill/>
+          </a:ln>
+        </p:spPr>
+        <p:txBody>
+          <a:bodyPr wrap="square" anchor="ctr" lIns="0" tIns="0" rIns="0" bIns="0" rtlCol="0"/>
+          <a:lstStyle/>
+          <a:p>
+            <a:pPr algn="ctr" marL="0" indent="0">
+              <a:lnSpc>
+                <a:spcPct val="110000"/>
+              </a:lnSpc>
+              <a:buNone/>
+            </a:pPr>
+            <a:r>
+              <a:rPr lang="th-TH" sz="1200" dirty="0">
+                <a:solidFill>
+                  <a:srgbClr val="FFFFFF"/>
+                </a:solidFill>
+                <a:latin typeface="+mn-lt"/>
+                <a:ea typeface="+mn-ea"/>
+                <a:cs typeface="+mn-cs"/>
+              </a:rPr>
+              <a:t>ระบบ ERP ปัจจุบัน</a:t>
+            </a:r>
+          </a:p>
+        </p:txBody>
+      </p:sp>
+      <p:sp>
+        <p:nvSpPr>
+          <p:cNvPr id="13" name="Box 2"/>
+          <p:cNvSpPr/>
+          <p:nvPr/>
+        </p:nvSpPr>
+        <p:spPr>
+          <a:xfrm>
+            <a:off x="3840480" y="3223260"/>
+            <a:ext cx="2011680" cy="731520"/>
+          </a:xfrm>
+          <a:prstGeom prst="rect">
+            <a:avLst/>
+          </a:prstGeom>
+          <a:solidFill>
+            <a:srgbClr val="FFFFFF"/>
+          </a:solidFill>
+          <a:ln w="12700">
+            <a:solidFill>
+              <a:srgbClr val="2A5EA0"/>
+            </a:solidFill>
+          </a:ln>
+        </p:spPr>
+        <p:txBody>
+          <a:bodyPr wrap="square" anchor="ctr" lIns="0" tIns="0" rIns="0" bIns="0" rtlCol="0"/>
+          <a:lstStyle/>
+          <a:p>
+            <a:pPr algn="ctr" marL="0" indent="0">
+              <a:lnSpc>
+                <a:spcPct val="110000"/>
+              </a:lnSpc>
+              <a:buNone/>
+            </a:pPr>
+            <a:r>
+              <a:rPr lang="th-TH" sz="1200" dirty="0">
+                <a:solidFill>
+                  <a:srgbClr val="333333"/>
+                </a:solidFill>
+                <a:latin typeface="+mn-lt"/>
+                <a:ea typeface="+mn-ea"/>
+                <a:cs typeface="+mn-cs"/>
+              </a:rPr>
+              <a:t>คิวเอกสารกลาง</a:t>
+            </a:r>
+          </a:p>
+        </p:txBody>
+      </p:sp>
+      <p:sp>
+        <p:nvSpPr>
+          <p:cNvPr id="113" name="Box 2 Tab"/>
+          <p:cNvSpPr/>
+          <p:nvPr/>
+        </p:nvSpPr>
+        <p:spPr>
+          <a:xfrm>
+            <a:off x="3954780" y="3337560"/>
+            <a:ext cx="205740" cy="45720"/>
+          </a:xfrm>
+          <a:prstGeom prst="rect">
+            <a:avLst/>
+          </a:prstGeom>
+          <a:solidFill>
+            <a:srgbClr val="2A5EA0"/>
+          </a:solidFill>
+          <a:ln>
+            <a:noFill/>
+          </a:ln>
+        </p:spPr>
+        <p:txBody>
+          <a:bodyPr/>
+          <a:lstStyle/>
+          <a:p>
+            <a:endParaRPr lang="th-TH"/>
+          </a:p>
+        </p:txBody>
+      </p:sp>
+      <p:sp>
+        <p:nvSpPr>
+          <p:cNvPr id="14" name="Box 3"/>
+          <p:cNvSpPr/>
+          <p:nvPr/>
+        </p:nvSpPr>
+        <p:spPr>
+          <a:xfrm>
+            <a:off x="6537960" y="3223260"/>
+            <a:ext cx="2011680" cy="731520"/>
+          </a:xfrm>
+          <a:prstGeom prst="rect">
+            <a:avLst/>
+          </a:prstGeom>
+          <a:solidFill>
+            <a:srgbClr val="FFFFFF"/>
+          </a:solidFill>
+          <a:ln w="12700">
+            <a:solidFill>
+              <a:srgbClr val="BB731B"/>
+            </a:solidFill>
+          </a:ln>
+        </p:spPr>
+        <p:txBody>
+          <a:bodyPr wrap="square" anchor="ctr" lIns="0" tIns="0" rIns="0" bIns="0" rtlCol="0"/>
+          <a:lstStyle/>
+          <a:p>
+            <a:pPr algn="ctr" marL="0" indent="0">
+              <a:lnSpc>
+                <a:spcPct val="110000"/>
+              </a:lnSpc>
+              <a:buNone/>
+            </a:pPr>
+            <a:r>
+              <a:rPr lang="th-TH" sz="1200" dirty="0">
+                <a:solidFill>
+                  <a:srgbClr val="333333"/>
+                </a:solidFill>
+                <a:latin typeface="+mn-lt"/>
+                <a:ea typeface="+mn-ea"/>
+                <a:cs typeface="+mn-cs"/>
+              </a:rPr>
+              <a:t>ตัวตรวจกฎธุรกิจ</a:t>
+            </a:r>
+          </a:p>
+        </p:txBody>
+      </p:sp>
+      <p:sp>
+        <p:nvSpPr>
+          <p:cNvPr id="114" name="Box 3 Tab"/>
+          <p:cNvSpPr/>
+          <p:nvPr/>
+        </p:nvSpPr>
+        <p:spPr>
+          <a:xfrm>
+            <a:off x="6652260" y="3337560"/>
+            <a:ext cx="205740" cy="45720"/>
+          </a:xfrm>
+          <a:prstGeom prst="rect">
+            <a:avLst/>
+          </a:prstGeom>
+          <a:solidFill>
+            <a:srgbClr val="BB731B"/>
+          </a:solidFill>
+          <a:ln>
+            <a:noFill/>
+          </a:ln>
+        </p:spPr>
+        <p:txBody>
+          <a:bodyPr/>
+          <a:lstStyle/>
+          <a:p>
+            <a:endParaRPr lang="th-TH"/>
+          </a:p>
+        </p:txBody>
+      </p:sp>
+      <p:sp>
+        <p:nvSpPr>
+          <p:cNvPr id="15" name="Box 4"/>
+          <p:cNvSpPr/>
+          <p:nvPr/>
+        </p:nvSpPr>
+        <p:spPr>
+          <a:xfrm>
+            <a:off x="9235440" y="3223260"/>
+            <a:ext cx="2011680" cy="731520"/>
+          </a:xfrm>
+          <a:prstGeom prst="rect">
+            <a:avLst/>
+          </a:prstGeom>
+          <a:solidFill>
+            <a:srgbClr val="23436D"/>
+          </a:solidFill>
+          <a:ln>
+            <a:noFill/>
+          </a:ln>
+        </p:spPr>
+        <p:txBody>
+          <a:bodyPr wrap="square" anchor="ctr" lIns="0" tIns="0" rIns="0" bIns="0" rtlCol="0"/>
+          <a:lstStyle/>
+          <a:p>
+            <a:pPr algn="ctr" marL="0" indent="0">
+              <a:lnSpc>
+                <a:spcPct val="110000"/>
+              </a:lnSpc>
+              <a:buNone/>
+            </a:pPr>
+            <a:r>
+              <a:rPr lang="th-TH" sz="1200" dirty="0">
+                <a:solidFill>
+                  <a:srgbClr val="FFFFFF"/>
+                </a:solidFill>
+                <a:latin typeface="+mn-lt"/>
+                <a:ea typeface="+mn-ea"/>
+                <a:cs typeface="+mn-cs"/>
+              </a:rPr>
+              <a:t>ระบบบัญชี</a:t>
+            </a:r>
+          </a:p>
+        </p:txBody>
+      </p:sp>
+      <p:sp>
+        <p:nvSpPr>
+          <p:cNvPr id="16" name="Link 1"/>
+          <p:cNvSpPr/>
+          <p:nvPr/>
+        </p:nvSpPr>
+        <p:spPr>
+          <a:xfrm>
+            <a:off x="3268980" y="3589020"/>
+            <a:ext cx="457200" cy="0"/>
+          </a:xfrm>
+          <a:prstGeom prst="line">
+            <a:avLst/>
+          </a:prstGeom>
+          <a:noFill/>
+          <a:ln w="15875" cap="flat">
+            <a:solidFill>
+              <a:srgbClr val="216B7F"/>
+            </a:solidFill>
+            <a:prstDash val="solid"/>
+            <a:tailEnd type="triangle" w="med" len="med"/>
+          </a:ln>
+        </p:spPr>
+        <p:txBody>
+          <a:bodyPr/>
+          <a:lstStyle/>
+          <a:p>
+            <a:endParaRPr lang="th-TH"/>
+          </a:p>
+        </p:txBody>
+      </p:sp>
+      <p:sp>
+        <p:nvSpPr>
+          <p:cNvPr id="17" name="Link 2"/>
+          <p:cNvSpPr/>
+          <p:nvPr/>
+        </p:nvSpPr>
+        <p:spPr>
+          <a:xfrm>
+            <a:off x="5966460" y="3589020"/>
+            <a:ext cx="457200" cy="0"/>
+          </a:xfrm>
+          <a:prstGeom prst="line">
+            <a:avLst/>
+          </a:prstGeom>
+          <a:noFill/>
+          <a:ln w="15875" cap="flat">
+            <a:solidFill>
+              <a:srgbClr val="216B7F"/>
+            </a:solidFill>
+            <a:prstDash val="solid"/>
+            <a:tailEnd type="triangle" w="med" len="med"/>
+          </a:ln>
+        </p:spPr>
+        <p:txBody>
+          <a:bodyPr/>
+          <a:lstStyle/>
+          <a:p>
+            <a:endParaRPr lang="th-TH"/>
+          </a:p>
+        </p:txBody>
+      </p:sp>
+      <p:sp>
+        <p:nvSpPr>
+          <p:cNvPr id="18" name="Link 3"/>
+          <p:cNvSpPr/>
+          <p:nvPr/>
+        </p:nvSpPr>
+        <p:spPr>
+          <a:xfrm>
+            <a:off x="8663940" y="3589020"/>
+            <a:ext cx="457200" cy="0"/>
+          </a:xfrm>
+          <a:prstGeom prst="line">
+            <a:avLst/>
+          </a:prstGeom>
+          <a:noFill/>
+          <a:ln w="15875" cap="flat">
+            <a:solidFill>
+              <a:srgbClr val="216B7F"/>
+            </a:solidFill>
+            <a:prstDash val="solid"/>
+            <a:tailEnd type="triangle" w="med" len="med"/>
+          </a:ln>
+        </p:spPr>
+        <p:txBody>
+          <a:bodyPr/>
+          <a:lstStyle/>
+          <a:p>
+            <a:endParaRPr lang="th-TH"/>
+          </a:p>
+        </p:txBody>
+      </p:sp>
+      <p:sp>
+        <p:nvSpPr>
+          <p:cNvPr id="19" name="Edge Label"/>
+          <p:cNvSpPr/>
+          <p:nvPr/>
+        </p:nvSpPr>
+        <p:spPr>
+          <a:xfrm>
+            <a:off x="5806440" y="3268980"/>
+            <a:ext cx="822960" cy="228600"/>
+          </a:xfrm>
+          <a:prstGeom prst="rect">
+            <a:avLst/>
+          </a:prstGeom>
+          <a:noFill/>
+          <a:ln>
+            <a:noFill/>
+          </a:ln>
+        </p:spPr>
+        <p:txBody>
+          <a:bodyPr wrap="square" anchor="ctr" lIns="0" tIns="0" rIns="0" bIns="0" rtlCol="0"/>
+          <a:lstStyle/>
+          <a:p>
+            <a:pPr algn="ctr" marL="0" indent="0">
+              <a:lnSpc>
+                <a:spcPct val="100000"/>
+              </a:lnSpc>
+              <a:buNone/>
+            </a:pPr>
+            <a:r>
+              <a:rPr lang="th-TH" sz="1000" dirty="0">
+                <a:solidFill>
+                  <a:srgbClr val="5F5F5F"/>
+                </a:solidFill>
+                <a:latin typeface="+mn-lt"/>
+                <a:ea typeface="+mn-ea"/>
+                <a:cs typeface="+mn-cs"/>
+              </a:rPr>
+              <a:t>ผ่านกฎ</a:t>
+            </a:r>
+          </a:p>
+        </p:txBody>
+      </p:sp>
+    </p:spTree>
+  </p:cSld>
+  <p:clrMapOvr>
+    <a:masterClrMapping/>
+  </p:clrMapOvr>
+</p:sld>
+</file>
+
+<file path=ppt/slides/slide13.xml><?xml version="1.0" encoding="utf-8"?>
 <p:sld xmlns:a="http://schemas.openxmlformats.org/drawingml/2006/main" xmlns:r="http://schemas.openxmlformats.org/officeDocument/2006/relationships" xmlns:p="http://schemas.openxmlformats.org/presentationml/2006/main">
   <p:cSld name="">
     <p:spTree>
@@ -24832,105 +26477,6 @@
 </p:sld>
 </file>
 
-<file path=ppt/slides/slide13.xml><?xml version="1.0" encoding="utf-8"?>
-<p:sld xmlns:a="http://schemas.openxmlformats.org/drawingml/2006/main" xmlns:r="http://schemas.openxmlformats.org/officeDocument/2006/relationships" xmlns:p="http://schemas.openxmlformats.org/presentationml/2006/main">
-  <p:cSld name="">
-    <p:spTree>
-      <p:nvGrpSpPr>
-        <p:cNvPr id="1" name=""/>
-        <p:cNvGrpSpPr/>
-        <p:nvPr/>
-      </p:nvGrpSpPr>
-      <p:grpSpPr>
-        <a:xfrm>
-          <a:off x="0" y="0"/>
-          <a:ext cx="0" cy="0"/>
-          <a:chOff x="0" y="0"/>
-          <a:chExt cx="0" cy="0"/>
-        </a:xfrm>
-      </p:grpSpPr>
-      <p:sp>
-        <p:nvSpPr>
-          <p:cNvPr id="2" name="Title"/>
-          <p:cNvSpPr>
-            <a:spLocks noGrp="1"/>
-          </p:cNvSpPr>
-          <p:nvPr>
-            <p:ph type="title"/>
-          </p:nvPr>
-        </p:nvSpPr>
-        <p:spPr/>
-        <p:txBody>
-          <a:bodyPr/>
-          <a:lstStyle/>
-          <a:p>
-            <a:pPr/>
-            <a:r>
-              <a:rPr lang="th-TH" dirty="0"/>
-              <a:t>ขอบเขตบริการของ NCT</a:t>
-            </a:r>
-          </a:p>
-        </p:txBody>
-      </p:sp>
-      <p:sp>
-        <p:nvSpPr>
-          <p:cNvPr id="3" name="Body"/>
-          <p:cNvSpPr>
-            <a:spLocks noGrp="1"/>
-          </p:cNvSpPr>
-          <p:nvPr>
-            <p:ph type="body" idx="1"/>
-          </p:nvPr>
-        </p:nvSpPr>
-        <p:spPr/>
-        <p:txBody>
-          <a:bodyPr/>
-          <a:lstStyle/>
-          <a:p>
-            <a:pPr/>
-            <a:r>
-              <a:rPr lang="th-TH" dirty="0"/>
-              <a:t>วางระบบโครงสร้างพื้นฐานไอทีสำหรับองค์กร</a:t>
-            </a:r>
-          </a:p>
-          <a:p>
-            <a:pPr lvl="1"/>
-            <a:r>
-              <a:rPr lang="th-TH" dirty="0"/>
-              <a:t>ออกแบบเครือข่าย ระบบสำรองข้อมูล และความปลอดภัย</a:t>
-            </a:r>
-          </a:p>
-          <a:p>
-            <a:pPr/>
-            <a:r>
-              <a:rPr lang="th-TH" dirty="0"/>
-              <a:t>ดูแลระบบต่อเนื่องแบบ Managed Service</a:t>
-            </a:r>
-          </a:p>
-          <a:p>
-            <a:pPr lvl="1"/>
-            <a:r>
-              <a:rPr lang="th-TH" dirty="0"/>
-              <a:t>มีทีมซัพพอร์ตตอบกลับภายใน SLA ที่ตกลงกัน</a:t>
-            </a:r>
-          </a:p>
-          <a:p>
-            <a:pPr/>
-            <a:r>
-              <a:rPr lang="th-TH" dirty="0"/>
-              <a:t>ให้คำปรึกษาการย้ายระบบขึ้นคลาวด์</a:t>
-            </a:r>
-          </a:p>
-        </p:txBody>
-      </p:sp>
-    </p:spTree>
-  </p:cSld>
-  <p:clrMapOvr>
-    <a:masterClrMapping/>
-  </p:clrMapOvr>
-</p:sld>
-</file>
-
 <file path=ppt/slides/slide14.xml><?xml version="1.0" encoding="utf-8"?>
 <p:sld xmlns:a="http://schemas.openxmlformats.org/drawingml/2006/main" xmlns:r="http://schemas.openxmlformats.org/officeDocument/2006/relationships" xmlns:p="http://schemas.openxmlformats.org/presentationml/2006/main">
   <p:cSld name="">
@@ -24966,14 +26512,14 @@
             <a:pPr/>
             <a:r>
               <a:rPr lang="th-TH" dirty="0"/>
-              <a:t>สามเสาหลักของบริการ</a:t>
-            </a:r>
-          </a:p>
-        </p:txBody>
-      </p:sp>
-      <p:sp>
-        <p:nvSpPr>
-          <p:cNvPr id="3" name="C1H"/>
+              <a:t>ขอบเขตบริการของ NCT</a:t>
+            </a:r>
+          </a:p>
+        </p:txBody>
+      </p:sp>
+      <p:sp>
+        <p:nvSpPr>
+          <p:cNvPr id="3" name="Body"/>
           <p:cNvSpPr>
             <a:spLocks noGrp="1"/>
           </p:cNvSpPr>
@@ -24989,122 +26535,35 @@
             <a:pPr/>
             <a:r>
               <a:rPr lang="th-TH" dirty="0"/>
-              <a:t>Infrastructure</a:t>
-            </a:r>
-          </a:p>
-        </p:txBody>
-      </p:sp>
-      <p:sp>
-        <p:nvSpPr>
-          <p:cNvPr id="4" name="C1B"/>
-          <p:cNvSpPr>
-            <a:spLocks noGrp="1"/>
-          </p:cNvSpPr>
-          <p:nvPr>
-            <p:ph type="body" idx="2"/>
-          </p:nvPr>
-        </p:nvSpPr>
-        <p:spPr/>
-        <p:txBody>
-          <a:bodyPr/>
-          <a:lstStyle/>
+              <a:t>วางระบบโครงสร้างพื้นฐานไอทีสำหรับองค์กร</a:t>
+            </a:r>
+          </a:p>
+          <a:p>
+            <a:pPr lvl="1"/>
+            <a:r>
+              <a:rPr lang="th-TH" dirty="0"/>
+              <a:t>ออกแบบเครือข่าย ระบบสำรองข้อมูล และความปลอดภัย</a:t>
+            </a:r>
+          </a:p>
           <a:p>
             <a:pPr/>
             <a:r>
               <a:rPr lang="th-TH" dirty="0"/>
-              <a:t>ออกแบบและติดตั้งเครือข่าย เซิร์ฟเวอร์ และระบบสำรองข้อมูล</a:t>
-            </a:r>
-          </a:p>
-        </p:txBody>
-      </p:sp>
-      <p:sp>
-        <p:nvSpPr>
-          <p:cNvPr id="5" name="C2H"/>
-          <p:cNvSpPr>
-            <a:spLocks noGrp="1"/>
-          </p:cNvSpPr>
-          <p:nvPr>
-            <p:ph type="body" idx="3"/>
-          </p:nvPr>
-        </p:nvSpPr>
-        <p:spPr/>
-        <p:txBody>
-          <a:bodyPr/>
-          <a:lstStyle/>
+              <a:t>ดูแลระบบต่อเนื่องแบบ Managed Service</a:t>
+            </a:r>
+          </a:p>
+          <a:p>
+            <a:pPr lvl="1"/>
+            <a:r>
+              <a:rPr lang="th-TH" dirty="0"/>
+              <a:t>มีทีมซัพพอร์ตตอบกลับภายใน SLA ที่ตกลงกัน</a:t>
+            </a:r>
+          </a:p>
           <a:p>
             <a:pPr/>
             <a:r>
               <a:rPr lang="th-TH" dirty="0"/>
-              <a:t>Managed Service</a:t>
-            </a:r>
-          </a:p>
-        </p:txBody>
-      </p:sp>
-      <p:sp>
-        <p:nvSpPr>
-          <p:cNvPr id="6" name="C2B"/>
-          <p:cNvSpPr>
-            <a:spLocks noGrp="1"/>
-          </p:cNvSpPr>
-          <p:nvPr>
-            <p:ph type="body" idx="4"/>
-          </p:nvPr>
-        </p:nvSpPr>
-        <p:spPr/>
-        <p:txBody>
-          <a:bodyPr/>
-          <a:lstStyle/>
-          <a:p>
-            <a:pPr/>
-            <a:r>
-              <a:rPr lang="th-TH" dirty="0"/>
-              <a:t>ดูแลระบบรายเดือน พร้อมทีมซัพพอร์ตและรายงานสุขภาพระบบ</a:t>
-            </a:r>
-          </a:p>
-        </p:txBody>
-      </p:sp>
-      <p:sp>
-        <p:nvSpPr>
-          <p:cNvPr id="7" name="C3H"/>
-          <p:cNvSpPr>
-            <a:spLocks noGrp="1"/>
-          </p:cNvSpPr>
-          <p:nvPr>
-            <p:ph type="body" idx="5"/>
-          </p:nvPr>
-        </p:nvSpPr>
-        <p:spPr/>
-        <p:txBody>
-          <a:bodyPr/>
-          <a:lstStyle/>
-          <a:p>
-            <a:pPr/>
-            <a:r>
-              <a:rPr lang="th-TH" dirty="0"/>
-              <a:t>Cloud &amp; Security</a:t>
-            </a:r>
-          </a:p>
-        </p:txBody>
-      </p:sp>
-      <p:sp>
-        <p:nvSpPr>
-          <p:cNvPr id="8" name="C3B"/>
-          <p:cNvSpPr>
-            <a:spLocks noGrp="1"/>
-          </p:cNvSpPr>
-          <p:nvPr>
-            <p:ph type="body" idx="6"/>
-          </p:nvPr>
-        </p:nvSpPr>
-        <p:spPr/>
-        <p:txBody>
-          <a:bodyPr/>
-          <a:lstStyle/>
-          <a:p>
-            <a:pPr/>
-            <a:r>
-              <a:rPr lang="th-TH" dirty="0"/>
-              <a:t>ย้ายระบบขึ้นคลาวด์ และวางมาตรการความปลอดภัยตามมาตรฐาน</a:t>
+              <a:t>ให้คำปรึกษาการย้ายระบบขึ้นคลาวด์</a:t>
             </a:r>
           </a:p>
         </p:txBody>
@@ -25152,14 +26611,14 @@
             <a:pPr/>
             <a:r>
               <a:rPr lang="th-TH" dirty="0"/>
-              <a:t>ตัวเลขที่บอกเรื่องเรา</a:t>
-            </a:r>
-          </a:p>
-        </p:txBody>
-      </p:sp>
-      <p:sp>
-        <p:nvSpPr>
-          <p:cNvPr id="3" name="F1"/>
+              <a:t>สามเสาหลักของบริการ</a:t>
+            </a:r>
+          </a:p>
+        </p:txBody>
+      </p:sp>
+      <p:sp>
+        <p:nvSpPr>
+          <p:cNvPr id="3" name="C1H"/>
           <p:cNvSpPr>
             <a:spLocks noGrp="1"/>
           </p:cNvSpPr>
@@ -25175,14 +26634,14 @@
             <a:pPr/>
             <a:r>
               <a:rPr lang="th-TH" dirty="0"/>
-              <a:t>12</a:t>
-            </a:r>
-          </a:p>
-        </p:txBody>
-      </p:sp>
-      <p:sp>
-        <p:nvSpPr>
-          <p:cNvPr id="4" name="F1L"/>
+              <a:t>Infrastructure</a:t>
+            </a:r>
+          </a:p>
+        </p:txBody>
+      </p:sp>
+      <p:sp>
+        <p:nvSpPr>
+          <p:cNvPr id="4" name="C1B"/>
           <p:cNvSpPr>
             <a:spLocks noGrp="1"/>
           </p:cNvSpPr>
@@ -25198,14 +26657,14 @@
             <a:pPr/>
             <a:r>
               <a:rPr lang="th-TH" dirty="0"/>
-              <a:t>ปีที่ให้บริการองค์กรไทย</a:t>
-            </a:r>
-          </a:p>
-        </p:txBody>
-      </p:sp>
-      <p:sp>
-        <p:nvSpPr>
-          <p:cNvPr id="5" name="F2"/>
+              <a:t>ออกแบบและติดตั้งเครือข่าย เซิร์ฟเวอร์ และระบบสำรองข้อมูล</a:t>
+            </a:r>
+          </a:p>
+        </p:txBody>
+      </p:sp>
+      <p:sp>
+        <p:nvSpPr>
+          <p:cNvPr id="5" name="C2H"/>
           <p:cNvSpPr>
             <a:spLocks noGrp="1"/>
           </p:cNvSpPr>
@@ -25221,14 +26680,14 @@
             <a:pPr/>
             <a:r>
               <a:rPr lang="th-TH" dirty="0"/>
-              <a:t>99.9%</a:t>
-            </a:r>
-          </a:p>
-        </p:txBody>
-      </p:sp>
-      <p:sp>
-        <p:nvSpPr>
-          <p:cNvPr id="6" name="F2L"/>
+              <a:t>Managed Service</a:t>
+            </a:r>
+          </a:p>
+        </p:txBody>
+      </p:sp>
+      <p:sp>
+        <p:nvSpPr>
+          <p:cNvPr id="6" name="C2B"/>
           <p:cNvSpPr>
             <a:spLocks noGrp="1"/>
           </p:cNvSpPr>
@@ -25244,14 +26703,14 @@
             <a:pPr/>
             <a:r>
               <a:rPr lang="th-TH" dirty="0"/>
-              <a:t>Uptime เฉลี่ยของระบบที่ดูแล</a:t>
-            </a:r>
-          </a:p>
-        </p:txBody>
-      </p:sp>
-      <p:sp>
-        <p:nvSpPr>
-          <p:cNvPr id="7" name="F3"/>
+              <a:t>ดูแลระบบรายเดือน พร้อมทีมซัพพอร์ตและรายงานสุขภาพระบบ</a:t>
+            </a:r>
+          </a:p>
+        </p:txBody>
+      </p:sp>
+      <p:sp>
+        <p:nvSpPr>
+          <p:cNvPr id="7" name="C3H"/>
           <p:cNvSpPr>
             <a:spLocks noGrp="1"/>
           </p:cNvSpPr>
@@ -25267,14 +26726,14 @@
             <a:pPr/>
             <a:r>
               <a:rPr lang="th-TH" dirty="0"/>
-              <a:t>24/7</a:t>
-            </a:r>
-          </a:p>
-        </p:txBody>
-      </p:sp>
-      <p:sp>
-        <p:nvSpPr>
-          <p:cNvPr id="8" name="F3L"/>
+              <a:t>Cloud &amp; Security</a:t>
+            </a:r>
+          </a:p>
+        </p:txBody>
+      </p:sp>
+      <p:sp>
+        <p:nvSpPr>
+          <p:cNvPr id="8" name="C3B"/>
           <p:cNvSpPr>
             <a:spLocks noGrp="1"/>
           </p:cNvSpPr>
@@ -25290,30 +26749,7 @@
             <a:pPr/>
             <a:r>
               <a:rPr lang="th-TH" dirty="0"/>
-              <a:t>ทีมเฝ้าระวังและตอบกลับ</a:t>
-            </a:r>
-          </a:p>
-        </p:txBody>
-      </p:sp>
-      <p:sp>
-        <p:nvSpPr>
-          <p:cNvPr id="9" name="FN"/>
-          <p:cNvSpPr>
-            <a:spLocks noGrp="1"/>
-          </p:cNvSpPr>
-          <p:nvPr>
-            <p:ph type="body" idx="7"/>
-          </p:nvPr>
-        </p:nvSpPr>
-        <p:spPr/>
-        <p:txBody>
-          <a:bodyPr/>
-          <a:lstStyle/>
-          <a:p>
-            <a:pPr/>
-            <a:r>
-              <a:rPr lang="th-TH" dirty="0"/>
-              <a:t>ข้อมูล ณ ไตรมาส 1 ปี 2569</a:t>
+              <a:t>ย้ายระบบขึ้นคลาวด์ และวางมาตรการความปลอดภัยตามมาตรฐาน</a:t>
             </a:r>
           </a:p>
         </p:txBody>
@@ -25345,7 +26781,30 @@
       </p:grpSpPr>
       <p:sp>
         <p:nvSpPr>
-          <p:cNvPr id="2" name="Q"/>
+          <p:cNvPr id="2" name="Title"/>
+          <p:cNvSpPr>
+            <a:spLocks noGrp="1"/>
+          </p:cNvSpPr>
+          <p:nvPr>
+            <p:ph type="title"/>
+          </p:nvPr>
+        </p:nvSpPr>
+        <p:spPr/>
+        <p:txBody>
+          <a:bodyPr/>
+          <a:lstStyle/>
+          <a:p>
+            <a:pPr/>
+            <a:r>
+              <a:rPr lang="th-TH" dirty="0"/>
+              <a:t>ตัวเลขที่บอกเรื่องเรา</a:t>
+            </a:r>
+          </a:p>
+        </p:txBody>
+      </p:sp>
+      <p:sp>
+        <p:nvSpPr>
+          <p:cNvPr id="3" name="F1"/>
           <p:cNvSpPr>
             <a:spLocks noGrp="1"/>
           </p:cNvSpPr>
@@ -25361,14 +26820,14 @@
             <a:pPr/>
             <a:r>
               <a:rPr lang="th-TH" dirty="0"/>
-              <a:t>ระบบไม่ล่มอีกเลยตั้งแต่เปลี่ยนมาใช้ทีมนี้ดูแล และเราวางแผนงบประมาณได้ล่วงหน้าจริง ๆ</a:t>
-            </a:r>
-          </a:p>
-        </p:txBody>
-      </p:sp>
-      <p:sp>
-        <p:nvSpPr>
-          <p:cNvPr id="3" name="A"/>
+              <a:t>12</a:t>
+            </a:r>
+          </a:p>
+        </p:txBody>
+      </p:sp>
+      <p:sp>
+        <p:nvSpPr>
+          <p:cNvPr id="4" name="F1L"/>
           <p:cNvSpPr>
             <a:spLocks noGrp="1"/>
           </p:cNvSpPr>
@@ -25384,7 +26843,122 @@
             <a:pPr/>
             <a:r>
               <a:rPr lang="th-TH" dirty="0"/>
-              <a:t>คุณสมชาย ป. — ผู้จัดการฝ่ายไอที, บริษัทตัวอย่าง จำกัด</a:t>
+              <a:t>ปีที่ให้บริการองค์กรไทย</a:t>
+            </a:r>
+          </a:p>
+        </p:txBody>
+      </p:sp>
+      <p:sp>
+        <p:nvSpPr>
+          <p:cNvPr id="5" name="F2"/>
+          <p:cNvSpPr>
+            <a:spLocks noGrp="1"/>
+          </p:cNvSpPr>
+          <p:nvPr>
+            <p:ph type="body" idx="3"/>
+          </p:nvPr>
+        </p:nvSpPr>
+        <p:spPr/>
+        <p:txBody>
+          <a:bodyPr/>
+          <a:lstStyle/>
+          <a:p>
+            <a:pPr/>
+            <a:r>
+              <a:rPr lang="th-TH" dirty="0"/>
+              <a:t>99.9%</a:t>
+            </a:r>
+          </a:p>
+        </p:txBody>
+      </p:sp>
+      <p:sp>
+        <p:nvSpPr>
+          <p:cNvPr id="6" name="F2L"/>
+          <p:cNvSpPr>
+            <a:spLocks noGrp="1"/>
+          </p:cNvSpPr>
+          <p:nvPr>
+            <p:ph type="body" idx="4"/>
+          </p:nvPr>
+        </p:nvSpPr>
+        <p:spPr/>
+        <p:txBody>
+          <a:bodyPr/>
+          <a:lstStyle/>
+          <a:p>
+            <a:pPr/>
+            <a:r>
+              <a:rPr lang="th-TH" dirty="0"/>
+              <a:t>Uptime เฉลี่ยของระบบที่ดูแล</a:t>
+            </a:r>
+          </a:p>
+        </p:txBody>
+      </p:sp>
+      <p:sp>
+        <p:nvSpPr>
+          <p:cNvPr id="7" name="F3"/>
+          <p:cNvSpPr>
+            <a:spLocks noGrp="1"/>
+          </p:cNvSpPr>
+          <p:nvPr>
+            <p:ph type="body" idx="5"/>
+          </p:nvPr>
+        </p:nvSpPr>
+        <p:spPr/>
+        <p:txBody>
+          <a:bodyPr/>
+          <a:lstStyle/>
+          <a:p>
+            <a:pPr/>
+            <a:r>
+              <a:rPr lang="th-TH" dirty="0"/>
+              <a:t>24/7</a:t>
+            </a:r>
+          </a:p>
+        </p:txBody>
+      </p:sp>
+      <p:sp>
+        <p:nvSpPr>
+          <p:cNvPr id="8" name="F3L"/>
+          <p:cNvSpPr>
+            <a:spLocks noGrp="1"/>
+          </p:cNvSpPr>
+          <p:nvPr>
+            <p:ph type="body" idx="6"/>
+          </p:nvPr>
+        </p:nvSpPr>
+        <p:spPr/>
+        <p:txBody>
+          <a:bodyPr/>
+          <a:lstStyle/>
+          <a:p>
+            <a:pPr/>
+            <a:r>
+              <a:rPr lang="th-TH" dirty="0"/>
+              <a:t>ทีมเฝ้าระวังและตอบกลับ</a:t>
+            </a:r>
+          </a:p>
+        </p:txBody>
+      </p:sp>
+      <p:sp>
+        <p:nvSpPr>
+          <p:cNvPr id="9" name="FN"/>
+          <p:cNvSpPr>
+            <a:spLocks noGrp="1"/>
+          </p:cNvSpPr>
+          <p:nvPr>
+            <p:ph type="body" idx="7"/>
+          </p:nvPr>
+        </p:nvSpPr>
+        <p:spPr/>
+        <p:txBody>
+          <a:bodyPr/>
+          <a:lstStyle/>
+          <a:p>
+            <a:pPr/>
+            <a:r>
+              <a:rPr lang="th-TH" dirty="0"/>
+              <a:t>ข้อมูล ณ ไตรมาส 1 ปี 2569</a:t>
             </a:r>
           </a:p>
         </p:txBody>
@@ -25398,6 +26972,77 @@
 </file>
 
 <file path=ppt/slides/slide17.xml><?xml version="1.0" encoding="utf-8"?>
+<p:sld xmlns:a="http://schemas.openxmlformats.org/drawingml/2006/main" xmlns:r="http://schemas.openxmlformats.org/officeDocument/2006/relationships" xmlns:p="http://schemas.openxmlformats.org/presentationml/2006/main">
+  <p:cSld name="">
+    <p:spTree>
+      <p:nvGrpSpPr>
+        <p:cNvPr id="1" name=""/>
+        <p:cNvGrpSpPr/>
+        <p:nvPr/>
+      </p:nvGrpSpPr>
+      <p:grpSpPr>
+        <a:xfrm>
+          <a:off x="0" y="0"/>
+          <a:ext cx="0" cy="0"/>
+          <a:chOff x="0" y="0"/>
+          <a:chExt cx="0" cy="0"/>
+        </a:xfrm>
+      </p:grpSpPr>
+      <p:sp>
+        <p:nvSpPr>
+          <p:cNvPr id="2" name="Q"/>
+          <p:cNvSpPr>
+            <a:spLocks noGrp="1"/>
+          </p:cNvSpPr>
+          <p:nvPr>
+            <p:ph type="body" idx="1"/>
+          </p:nvPr>
+        </p:nvSpPr>
+        <p:spPr/>
+        <p:txBody>
+          <a:bodyPr/>
+          <a:lstStyle/>
+          <a:p>
+            <a:pPr/>
+            <a:r>
+              <a:rPr lang="th-TH" dirty="0"/>
+              <a:t>ระบบไม่ล่มอีกเลยตั้งแต่เปลี่ยนมาใช้ทีมนี้ดูแล และเราวางแผนงบประมาณได้ล่วงหน้าจริง ๆ</a:t>
+            </a:r>
+          </a:p>
+        </p:txBody>
+      </p:sp>
+      <p:sp>
+        <p:nvSpPr>
+          <p:cNvPr id="3" name="A"/>
+          <p:cNvSpPr>
+            <a:spLocks noGrp="1"/>
+          </p:cNvSpPr>
+          <p:nvPr>
+            <p:ph type="body" idx="2"/>
+          </p:nvPr>
+        </p:nvSpPr>
+        <p:spPr/>
+        <p:txBody>
+          <a:bodyPr/>
+          <a:lstStyle/>
+          <a:p>
+            <a:pPr/>
+            <a:r>
+              <a:rPr lang="th-TH" dirty="0"/>
+              <a:t>คุณสมชาย ป. — ผู้จัดการฝ่ายไอที, บริษัทตัวอย่าง จำกัด</a:t>
+            </a:r>
+          </a:p>
+        </p:txBody>
+      </p:sp>
+    </p:spTree>
+  </p:cSld>
+  <p:clrMapOvr>
+    <a:masterClrMapping/>
+  </p:clrMapOvr>
+</p:sld>
+</file>
+
+<file path=ppt/slides/slide18.xml><?xml version="1.0" encoding="utf-8"?>
 <p:sld xmlns:a="http://schemas.openxmlformats.org/drawingml/2006/main" xmlns:r="http://schemas.openxmlformats.org/officeDocument/2006/relationships" xmlns:p="http://schemas.openxmlformats.org/presentationml/2006/main">
   <p:cSld name="">
     <p:spTree>
@@ -26128,1032 +27773,6 @@
 </p:sld>
 </file>
 
-<file path=ppt/slides/slide18.xml><?xml version="1.0" encoding="utf-8"?>
-<p:sld xmlns:a="http://schemas.openxmlformats.org/drawingml/2006/main" xmlns:r="http://schemas.openxmlformats.org/officeDocument/2006/relationships" xmlns:p="http://schemas.openxmlformats.org/presentationml/2006/main">
-  <p:cSld name="">
-    <p:spTree>
-      <p:nvGrpSpPr>
-        <p:cNvPr id="1" name=""/>
-        <p:cNvGrpSpPr/>
-        <p:nvPr/>
-      </p:nvGrpSpPr>
-      <p:grpSpPr>
-        <a:xfrm>
-          <a:off x="0" y="0"/>
-          <a:ext cx="0" cy="0"/>
-          <a:chOff x="0" y="0"/>
-          <a:chExt cx="0" cy="0"/>
-        </a:xfrm>
-      </p:grpSpPr>
-      <p:sp>
-        <p:nvSpPr>
-          <p:cNvPr id="2" name="Title"/>
-          <p:cNvSpPr>
-            <a:spLocks noGrp="1"/>
-          </p:cNvSpPr>
-          <p:nvPr>
-            <p:ph type="title"/>
-          </p:nvPr>
-        </p:nvSpPr>
-        <p:spPr/>
-        <p:txBody>
-          <a:bodyPr/>
-          <a:lstStyle/>
-          <a:p>
-            <a:pPr/>
-            <a:r>
-              <a:rPr lang="th-TH" dirty="0"/>
-              <a:t>แผนงาน 12 เดือน ขึ้นระบบต้นเดือนที่ 7</a:t>
-            </a:r>
-          </a:p>
-        </p:txBody>
-      </p:sp>
-      <p:graphicFrame>
-        <p:nvGraphicFramePr>
-          <p:cNvPr id="3" name="Plan"/>
-          <p:cNvGraphicFramePr>
-            <a:graphicFrameLocks noGrp="1"/>
-          </p:cNvGraphicFramePr>
-          <p:nvPr>
-            <p:ph type="chart" idx="1"/>
-          </p:nvPr>
-        </p:nvGraphicFramePr>
-        <p:xfrm>
-          <a:off x="3566160" y="2057400"/>
-          <a:ext cx="7711440" cy="3108960"/>
-        </p:xfrm>
-        <a:graphic>
-          <a:graphicData uri="http://schemas.openxmlformats.org/drawingml/2006/chart">
-            <c:chart xmlns:c="http://schemas.openxmlformats.org/drawingml/2006/chart" r:id="rId2"/>
-          </a:graphicData>
-        </a:graphic>
-      </p:graphicFrame>
-      <p:sp>
-        <p:nvSpPr>
-          <p:cNvPr id="4" name="P1"/>
-          <p:cNvSpPr>
-            <a:spLocks noGrp="1"/>
-          </p:cNvSpPr>
-          <p:nvPr>
-            <p:ph type="body" idx="20"/>
-          </p:nvPr>
-        </p:nvSpPr>
-        <p:spPr/>
-        <p:txBody>
-          <a:bodyPr/>
-          <a:lstStyle/>
-          <a:p>
-            <a:pPr/>
-            <a:r>
-              <a:rPr lang="th-TH" dirty="0"/>
-              <a:t>ด.1</a:t>
-            </a:r>
-          </a:p>
-        </p:txBody>
-      </p:sp>
-      <p:sp>
-        <p:nvSpPr>
-          <p:cNvPr id="5" name="P2"/>
-          <p:cNvSpPr>
-            <a:spLocks noGrp="1"/>
-          </p:cNvSpPr>
-          <p:nvPr>
-            <p:ph type="body" idx="21"/>
-          </p:nvPr>
-        </p:nvSpPr>
-        <p:spPr/>
-        <p:txBody>
-          <a:bodyPr/>
-          <a:lstStyle/>
-          <a:p>
-            <a:pPr/>
-            <a:r>
-              <a:rPr lang="th-TH" dirty="0"/>
-              <a:t>ด.2</a:t>
-            </a:r>
-          </a:p>
-        </p:txBody>
-      </p:sp>
-      <p:sp>
-        <p:nvSpPr>
-          <p:cNvPr id="6" name="P3"/>
-          <p:cNvSpPr>
-            <a:spLocks noGrp="1"/>
-          </p:cNvSpPr>
-          <p:nvPr>
-            <p:ph type="body" idx="22"/>
-          </p:nvPr>
-        </p:nvSpPr>
-        <p:spPr/>
-        <p:txBody>
-          <a:bodyPr/>
-          <a:lstStyle/>
-          <a:p>
-            <a:pPr/>
-            <a:r>
-              <a:rPr lang="th-TH" dirty="0"/>
-              <a:t>ด.3</a:t>
-            </a:r>
-          </a:p>
-        </p:txBody>
-      </p:sp>
-      <p:sp>
-        <p:nvSpPr>
-          <p:cNvPr id="7" name="P4"/>
-          <p:cNvSpPr>
-            <a:spLocks noGrp="1"/>
-          </p:cNvSpPr>
-          <p:nvPr>
-            <p:ph type="body" idx="23"/>
-          </p:nvPr>
-        </p:nvSpPr>
-        <p:spPr/>
-        <p:txBody>
-          <a:bodyPr/>
-          <a:lstStyle/>
-          <a:p>
-            <a:pPr/>
-            <a:r>
-              <a:rPr lang="th-TH" dirty="0"/>
-              <a:t>ด.4</a:t>
-            </a:r>
-          </a:p>
-        </p:txBody>
-      </p:sp>
-      <p:sp>
-        <p:nvSpPr>
-          <p:cNvPr id="8" name="P5"/>
-          <p:cNvSpPr>
-            <a:spLocks noGrp="1"/>
-          </p:cNvSpPr>
-          <p:nvPr>
-            <p:ph type="body" idx="24"/>
-          </p:nvPr>
-        </p:nvSpPr>
-        <p:spPr/>
-        <p:txBody>
-          <a:bodyPr/>
-          <a:lstStyle/>
-          <a:p>
-            <a:pPr/>
-            <a:r>
-              <a:rPr lang="th-TH" dirty="0"/>
-              <a:t>ด.5</a:t>
-            </a:r>
-          </a:p>
-        </p:txBody>
-      </p:sp>
-      <p:sp>
-        <p:nvSpPr>
-          <p:cNvPr id="9" name="P6"/>
-          <p:cNvSpPr>
-            <a:spLocks noGrp="1"/>
-          </p:cNvSpPr>
-          <p:nvPr>
-            <p:ph type="body" idx="25"/>
-          </p:nvPr>
-        </p:nvSpPr>
-        <p:spPr/>
-        <p:txBody>
-          <a:bodyPr/>
-          <a:lstStyle/>
-          <a:p>
-            <a:pPr/>
-            <a:r>
-              <a:rPr lang="th-TH" dirty="0"/>
-              <a:t>ด.6</a:t>
-            </a:r>
-          </a:p>
-        </p:txBody>
-      </p:sp>
-      <p:sp>
-        <p:nvSpPr>
-          <p:cNvPr id="10" name="P7"/>
-          <p:cNvSpPr>
-            <a:spLocks noGrp="1"/>
-          </p:cNvSpPr>
-          <p:nvPr>
-            <p:ph type="body" idx="26"/>
-          </p:nvPr>
-        </p:nvSpPr>
-        <p:spPr/>
-        <p:txBody>
-          <a:bodyPr/>
-          <a:lstStyle/>
-          <a:p>
-            <a:pPr/>
-            <a:r>
-              <a:rPr lang="th-TH" dirty="0"/>
-              <a:t>ด.7</a:t>
-            </a:r>
-          </a:p>
-        </p:txBody>
-      </p:sp>
-      <p:sp>
-        <p:nvSpPr>
-          <p:cNvPr id="11" name="P8"/>
-          <p:cNvSpPr>
-            <a:spLocks noGrp="1"/>
-          </p:cNvSpPr>
-          <p:nvPr>
-            <p:ph type="body" idx="27"/>
-          </p:nvPr>
-        </p:nvSpPr>
-        <p:spPr/>
-        <p:txBody>
-          <a:bodyPr/>
-          <a:lstStyle/>
-          <a:p>
-            <a:pPr/>
-            <a:r>
-              <a:rPr lang="th-TH" dirty="0"/>
-              <a:t>ด.8</a:t>
-            </a:r>
-          </a:p>
-        </p:txBody>
-      </p:sp>
-      <p:sp>
-        <p:nvSpPr>
-          <p:cNvPr id="12" name="P9"/>
-          <p:cNvSpPr>
-            <a:spLocks noGrp="1"/>
-          </p:cNvSpPr>
-          <p:nvPr>
-            <p:ph type="body" idx="28"/>
-          </p:nvPr>
-        </p:nvSpPr>
-        <p:spPr/>
-        <p:txBody>
-          <a:bodyPr/>
-          <a:lstStyle/>
-          <a:p>
-            <a:pPr/>
-            <a:r>
-              <a:rPr lang="th-TH" dirty="0"/>
-              <a:t>ด.9</a:t>
-            </a:r>
-          </a:p>
-        </p:txBody>
-      </p:sp>
-      <p:sp>
-        <p:nvSpPr>
-          <p:cNvPr id="13" name="P10"/>
-          <p:cNvSpPr>
-            <a:spLocks noGrp="1"/>
-          </p:cNvSpPr>
-          <p:nvPr>
-            <p:ph type="body" idx="29"/>
-          </p:nvPr>
-        </p:nvSpPr>
-        <p:spPr/>
-        <p:txBody>
-          <a:bodyPr/>
-          <a:lstStyle/>
-          <a:p>
-            <a:pPr/>
-            <a:r>
-              <a:rPr lang="th-TH" dirty="0"/>
-              <a:t>ด.10</a:t>
-            </a:r>
-          </a:p>
-        </p:txBody>
-      </p:sp>
-      <p:sp>
-        <p:nvSpPr>
-          <p:cNvPr id="14" name="P11"/>
-          <p:cNvSpPr>
-            <a:spLocks noGrp="1"/>
-          </p:cNvSpPr>
-          <p:nvPr>
-            <p:ph type="body" idx="30"/>
-          </p:nvPr>
-        </p:nvSpPr>
-        <p:spPr/>
-        <p:txBody>
-          <a:bodyPr/>
-          <a:lstStyle/>
-          <a:p>
-            <a:pPr/>
-            <a:r>
-              <a:rPr lang="th-TH" dirty="0"/>
-              <a:t>ด.11</a:t>
-            </a:r>
-          </a:p>
-        </p:txBody>
-      </p:sp>
-      <p:sp>
-        <p:nvSpPr>
-          <p:cNvPr id="15" name="P12"/>
-          <p:cNvSpPr>
-            <a:spLocks noGrp="1"/>
-          </p:cNvSpPr>
-          <p:nvPr>
-            <p:ph type="body" idx="31"/>
-          </p:nvPr>
-        </p:nvSpPr>
-        <p:spPr/>
-        <p:txBody>
-          <a:bodyPr/>
-          <a:lstStyle/>
-          <a:p>
-            <a:pPr/>
-            <a:r>
-              <a:rPr lang="th-TH" dirty="0"/>
-              <a:t>ด.12</a:t>
-            </a:r>
-          </a:p>
-        </p:txBody>
-      </p:sp>
-      <p:sp>
-        <p:nvSpPr>
-          <p:cNvPr id="16" name="R1"/>
-          <p:cNvSpPr>
-            <a:spLocks noGrp="1"/>
-          </p:cNvSpPr>
-          <p:nvPr>
-            <p:ph type="body" idx="32"/>
-          </p:nvPr>
-        </p:nvSpPr>
-        <p:spPr/>
-        <p:txBody>
-          <a:bodyPr/>
-          <a:lstStyle/>
-          <a:p>
-            <a:pPr/>
-            <a:r>
-              <a:rPr lang="th-TH" dirty="0"/>
-              <a:t>1. เตรียมระบบ</a:t>
-            </a:r>
-          </a:p>
-        </p:txBody>
-      </p:sp>
-      <p:sp>
-        <p:nvSpPr>
-          <p:cNvPr id="17" name="D1"/>
-          <p:cNvSpPr>
-            <a:spLocks noGrp="1"/>
-          </p:cNvSpPr>
-          <p:nvPr>
-            <p:ph type="body" idx="33"/>
-          </p:nvPr>
-        </p:nvSpPr>
-        <p:spPr/>
-        <p:txBody>
-          <a:bodyPr/>
-          <a:lstStyle/>
-          <a:p>
-            <a:pPr/>
-            <a:r>
-              <a:rPr lang="th-TH" dirty="0"/>
-              <a:t>4 สัปดาห์</a:t>
-            </a:r>
-          </a:p>
-        </p:txBody>
-      </p:sp>
-      <p:sp>
-        <p:nvSpPr>
-          <p:cNvPr id="18" name="R2"/>
-          <p:cNvSpPr>
-            <a:spLocks noGrp="1"/>
-          </p:cNvSpPr>
-          <p:nvPr>
-            <p:ph type="body" idx="34"/>
-          </p:nvPr>
-        </p:nvSpPr>
-        <p:spPr/>
-        <p:txBody>
-          <a:bodyPr/>
-          <a:lstStyle/>
-          <a:p>
-            <a:pPr/>
-            <a:r>
-              <a:rPr lang="th-TH" dirty="0"/>
-              <a:t>2. วิเคราะห์และออกแบบ</a:t>
-            </a:r>
-          </a:p>
-        </p:txBody>
-      </p:sp>
-      <p:sp>
-        <p:nvSpPr>
-          <p:cNvPr id="19" name="D2"/>
-          <p:cNvSpPr>
-            <a:spLocks noGrp="1"/>
-          </p:cNvSpPr>
-          <p:nvPr>
-            <p:ph type="body" idx="35"/>
-          </p:nvPr>
-        </p:nvSpPr>
-        <p:spPr/>
-        <p:txBody>
-          <a:bodyPr/>
-          <a:lstStyle/>
-          <a:p>
-            <a:pPr/>
-            <a:r>
-              <a:rPr lang="th-TH" dirty="0"/>
-              <a:t>6 สัปดาห์</a:t>
-            </a:r>
-          </a:p>
-        </p:txBody>
-      </p:sp>
-      <p:sp>
-        <p:nvSpPr>
-          <p:cNvPr id="20" name="R3"/>
-          <p:cNvSpPr>
-            <a:spLocks noGrp="1"/>
-          </p:cNvSpPr>
-          <p:nvPr>
-            <p:ph type="body" idx="36"/>
-          </p:nvPr>
-        </p:nvSpPr>
-        <p:spPr/>
-        <p:txBody>
-          <a:bodyPr/>
-          <a:lstStyle/>
-          <a:p>
-            <a:pPr/>
-            <a:r>
-              <a:rPr lang="th-TH" dirty="0"/>
-              <a:t>3. พัฒนาและตั้งค่าระบบ</a:t>
-            </a:r>
-          </a:p>
-        </p:txBody>
-      </p:sp>
-      <p:sp>
-        <p:nvSpPr>
-          <p:cNvPr id="21" name="D3"/>
-          <p:cNvSpPr>
-            <a:spLocks noGrp="1"/>
-          </p:cNvSpPr>
-          <p:nvPr>
-            <p:ph type="body" idx="37"/>
-          </p:nvPr>
-        </p:nvSpPr>
-        <p:spPr/>
-        <p:txBody>
-          <a:bodyPr/>
-          <a:lstStyle/>
-          <a:p>
-            <a:pPr/>
-            <a:r>
-              <a:rPr lang="th-TH" dirty="0"/>
-              <a:t>10 สัปดาห์</a:t>
-            </a:r>
-          </a:p>
-        </p:txBody>
-      </p:sp>
-      <p:sp>
-        <p:nvSpPr>
-          <p:cNvPr id="22" name="R4"/>
-          <p:cNvSpPr>
-            <a:spLocks noGrp="1"/>
-          </p:cNvSpPr>
-          <p:nvPr>
-            <p:ph type="body" idx="38"/>
-          </p:nvPr>
-        </p:nvSpPr>
-        <p:spPr/>
-        <p:txBody>
-          <a:bodyPr/>
-          <a:lstStyle/>
-          <a:p>
-            <a:pPr/>
-            <a:r>
-              <a:rPr lang="th-TH" dirty="0"/>
-              <a:t>4. ทดสอบ UAT</a:t>
-            </a:r>
-          </a:p>
-        </p:txBody>
-      </p:sp>
-      <p:sp>
-        <p:nvSpPr>
-          <p:cNvPr id="23" name="D4"/>
-          <p:cNvSpPr>
-            <a:spLocks noGrp="1"/>
-          </p:cNvSpPr>
-          <p:nvPr>
-            <p:ph type="body" idx="39"/>
-          </p:nvPr>
-        </p:nvSpPr>
-        <p:spPr/>
-        <p:txBody>
-          <a:bodyPr/>
-          <a:lstStyle/>
-          <a:p>
-            <a:pPr/>
-            <a:r>
-              <a:rPr lang="th-TH" dirty="0"/>
-              <a:t>4 สัปดาห์</a:t>
-            </a:r>
-          </a:p>
-        </p:txBody>
-      </p:sp>
-      <p:sp>
-        <p:nvSpPr>
-          <p:cNvPr id="24" name="R5"/>
-          <p:cNvSpPr>
-            <a:spLocks noGrp="1"/>
-          </p:cNvSpPr>
-          <p:nvPr>
-            <p:ph type="body" idx="40"/>
-          </p:nvPr>
-        </p:nvSpPr>
-        <p:spPr/>
-        <p:txBody>
-          <a:bodyPr/>
-          <a:lstStyle/>
-          <a:p>
-            <a:pPr/>
-            <a:r>
-              <a:rPr lang="th-TH" dirty="0"/>
-              <a:t>5. อบรมผู้ใช้</a:t>
-            </a:r>
-          </a:p>
-        </p:txBody>
-      </p:sp>
-      <p:sp>
-        <p:nvSpPr>
-          <p:cNvPr id="25" name="D5"/>
-          <p:cNvSpPr>
-            <a:spLocks noGrp="1"/>
-          </p:cNvSpPr>
-          <p:nvPr>
-            <p:ph type="body" idx="41"/>
-          </p:nvPr>
-        </p:nvSpPr>
-        <p:spPr/>
-        <p:txBody>
-          <a:bodyPr/>
-          <a:lstStyle/>
-          <a:p>
-            <a:pPr/>
-            <a:r>
-              <a:rPr lang="th-TH" dirty="0"/>
-              <a:t>1 สัปดาห์</a:t>
-            </a:r>
-          </a:p>
-        </p:txBody>
-      </p:sp>
-      <p:sp>
-        <p:nvSpPr>
-          <p:cNvPr id="26" name="R6"/>
-          <p:cNvSpPr>
-            <a:spLocks noGrp="1"/>
-          </p:cNvSpPr>
-          <p:nvPr>
-            <p:ph type="body" idx="42"/>
-          </p:nvPr>
-        </p:nvSpPr>
-        <p:spPr/>
-        <p:txBody>
-          <a:bodyPr/>
-          <a:lstStyle/>
-          <a:p>
-            <a:pPr/>
-            <a:r>
-              <a:rPr lang="th-TH" dirty="0"/>
-              <a:t>6. ขึ้นระบบ</a:t>
-            </a:r>
-          </a:p>
-        </p:txBody>
-      </p:sp>
-      <p:sp>
-        <p:nvSpPr>
-          <p:cNvPr id="27" name="D6"/>
-          <p:cNvSpPr>
-            <a:spLocks noGrp="1"/>
-          </p:cNvSpPr>
-          <p:nvPr>
-            <p:ph type="body" idx="43"/>
-          </p:nvPr>
-        </p:nvSpPr>
-        <p:spPr/>
-        <p:txBody>
-          <a:bodyPr/>
-          <a:lstStyle/>
-          <a:p>
-            <a:pPr/>
-            <a:r>
-              <a:rPr lang="th-TH" dirty="0"/>
-              <a:t>2 สัปดาห์</a:t>
-            </a:r>
-          </a:p>
-        </p:txBody>
-      </p:sp>
-      <p:sp>
-        <p:nvSpPr>
-          <p:cNvPr id="28" name="R7"/>
-          <p:cNvSpPr>
-            <a:spLocks noGrp="1"/>
-          </p:cNvSpPr>
-          <p:nvPr>
-            <p:ph type="body" idx="44"/>
-          </p:nvPr>
-        </p:nvSpPr>
-        <p:spPr/>
-        <p:txBody>
-          <a:bodyPr/>
-          <a:lstStyle/>
-          <a:p>
-            <a:pPr/>
-            <a:r>
-              <a:rPr lang="th-TH" dirty="0"/>
-              <a:t>7. ดูแลหลังขึ้นระบบ</a:t>
-            </a:r>
-          </a:p>
-        </p:txBody>
-      </p:sp>
-      <p:sp>
-        <p:nvSpPr>
-          <p:cNvPr id="29" name="D7"/>
-          <p:cNvSpPr>
-            <a:spLocks noGrp="1"/>
-          </p:cNvSpPr>
-          <p:nvPr>
-            <p:ph type="body" idx="45"/>
-          </p:nvPr>
-        </p:nvSpPr>
-        <p:spPr/>
-        <p:txBody>
-          <a:bodyPr/>
-          <a:lstStyle/>
-          <a:p>
-            <a:pPr/>
-            <a:r>
-              <a:rPr lang="th-TH" dirty="0"/>
-              <a:t>3 เดือน</a:t>
-            </a:r>
-          </a:p>
-        </p:txBody>
-      </p:sp>
-      <p:sp>
-        <p:nvSpPr>
-          <p:cNvPr id="30" name="R8"/>
-          <p:cNvSpPr>
-            <a:spLocks noGrp="1"/>
-          </p:cNvSpPr>
-          <p:nvPr>
-            <p:ph type="body" idx="46"/>
-          </p:nvPr>
-        </p:nvSpPr>
-        <p:spPr/>
-        <p:txBody>
-          <a:bodyPr/>
-          <a:lstStyle/>
-          <a:p>
-            <a:pPr/>
-            <a:r>
-              <a:rPr lang="th-TH" dirty="0"/>
-              <a:t>8. รับประกันระบบ</a:t>
-            </a:r>
-          </a:p>
-        </p:txBody>
-      </p:sp>
-      <p:sp>
-        <p:nvSpPr>
-          <p:cNvPr id="31" name="D8"/>
-          <p:cNvSpPr>
-            <a:spLocks noGrp="1"/>
-          </p:cNvSpPr>
-          <p:nvPr>
-            <p:ph type="body" idx="47"/>
-          </p:nvPr>
-        </p:nvSpPr>
-        <p:spPr/>
-        <p:txBody>
-          <a:bodyPr/>
-          <a:lstStyle/>
-          <a:p>
-            <a:pPr/>
-            <a:r>
-              <a:rPr lang="th-TH" dirty="0"/>
-              <a:t>2.5 เดือน</a:t>
-            </a:r>
-          </a:p>
-        </p:txBody>
-      </p:sp>
-      <p:sp>
-        <p:nvSpPr>
-          <p:cNvPr id="32" name="Key"/>
-          <p:cNvSpPr>
-            <a:spLocks noGrp="1"/>
-          </p:cNvSpPr>
-          <p:nvPr>
-            <p:ph type="body" idx="2"/>
-          </p:nvPr>
-        </p:nvSpPr>
-        <p:spPr/>
-        <p:txBody>
-          <a:bodyPr/>
-          <a:lstStyle/>
-          <a:p>
-            <a:pPr/>
-            <a:r>
-              <a:rPr lang="th-TH" dirty="0"/>
-              <a:t>■ ช่วงงาน   ◆ ส่งมอบ / ตรวจรับ</a:t>
-            </a:r>
-          </a:p>
-        </p:txBody>
-      </p:sp>
-      <p:sp>
-        <p:nvSpPr>
-          <p:cNvPr id="33" name="Asm"/>
-          <p:cNvSpPr>
-            <a:spLocks noGrp="1"/>
-          </p:cNvSpPr>
-          <p:nvPr>
-            <p:ph type="body" idx="3"/>
-          </p:nvPr>
-        </p:nvSpPr>
-        <p:spPr/>
-        <p:txBody>
-          <a:bodyPr/>
-          <a:lstStyle/>
-          <a:p>
-            <a:pPr/>
-            <a:r>
-              <a:rPr lang="th-TH" dirty="0"/>
-              <a:t>นับจากวันลงนามสัญญา · หน่วย: เดือน</a:t>
-            </a:r>
-          </a:p>
-        </p:txBody>
-      </p:sp>
-      <p:sp>
-        <p:nvSpPr>
-          <p:cNvPr id="34" name="TL"/>
-          <p:cNvSpPr>
-            <a:spLocks noGrp="1"/>
-          </p:cNvSpPr>
-          <p:nvPr>
-            <p:ph type="body" idx="4"/>
-          </p:nvPr>
-        </p:nvSpPr>
-        <p:spPr/>
-        <p:txBody>
-          <a:bodyPr/>
-          <a:lstStyle/>
-          <a:p>
-            <a:pPr/>
-            <a:r>
-              <a:rPr lang="th-TH" dirty="0"/>
-              <a:t>สรุป</a:t>
-            </a:r>
-          </a:p>
-        </p:txBody>
-      </p:sp>
-      <p:sp>
-        <p:nvSpPr>
-          <p:cNvPr id="35" name="TC"/>
-          <p:cNvSpPr>
-            <a:spLocks noGrp="1"/>
-          </p:cNvSpPr>
-          <p:nvPr>
-            <p:ph type="body" idx="5"/>
-          </p:nvPr>
-        </p:nvSpPr>
-        <p:spPr/>
-        <p:txBody>
-          <a:bodyPr/>
-          <a:lstStyle/>
-          <a:p>
-            <a:pPr/>
-            <a:r>
-              <a:rPr lang="th-TH" dirty="0"/>
-              <a:t>ขึ้นระบบต้นเดือนที่ 7 ตรวจรับ 3 งวดตามจุดส่งมอบ</a:t>
-            </a:r>
-          </a:p>
-        </p:txBody>
-      </p:sp>
-      <p:sp>
-        <p:nvSpPr>
-          <p:cNvPr id="36" name="Milestone 2"/>
-          <p:cNvSpPr/>
-          <p:nvPr/>
-        </p:nvSpPr>
-        <p:spPr>
-          <a:xfrm>
-            <a:off x="5099558" y="2567178"/>
-            <a:ext cx="146304" cy="146304"/>
-          </a:xfrm>
-          <a:prstGeom prst="diamond">
-            <a:avLst/>
-          </a:prstGeom>
-          <a:solidFill>
-            <a:srgbClr val="BB731B"/>
-          </a:solidFill>
-          <a:ln w="19050">
-            <a:solidFill>
-              <a:srgbClr val="FFFFFF"/>
-            </a:solidFill>
-          </a:ln>
-        </p:spPr>
-        <p:txBody>
-          <a:bodyPr/>
-          <a:lstStyle/>
-          <a:p>
-            <a:endParaRPr lang="th-TH"/>
-          </a:p>
-        </p:txBody>
-      </p:sp>
-      <p:sp>
-        <p:nvSpPr>
-          <p:cNvPr id="37" name="Milestone 2 Label"/>
-          <p:cNvSpPr/>
-          <p:nvPr/>
-        </p:nvSpPr>
-        <p:spPr>
-          <a:xfrm>
-            <a:off x="5291582" y="2446020"/>
-            <a:ext cx="1463040" cy="388620"/>
-          </a:xfrm>
-          <a:prstGeom prst="rect">
-            <a:avLst/>
-          </a:prstGeom>
-          <a:noFill/>
-          <a:ln>
-            <a:noFill/>
-          </a:ln>
-        </p:spPr>
-        <p:txBody>
-          <a:bodyPr wrap="square" anchor="ctr" lIns="0" tIns="0" rIns="0" bIns="0" rtlCol="0"/>
-          <a:lstStyle/>
-          <a:p>
-            <a:pPr algn="l" marL="0" indent="0">
-              <a:lnSpc>
-                <a:spcPct val="100000"/>
-              </a:lnSpc>
-              <a:buNone/>
-            </a:pPr>
-            <a:r>
-              <a:rPr lang="th-TH" sz="1000" dirty="0">
-                <a:solidFill>
-                  <a:srgbClr val="5F5F5F"/>
-                </a:solidFill>
-                <a:latin typeface="+mn-lt"/>
-                <a:ea typeface="+mn-ea"/>
-                <a:cs typeface="+mn-cs"/>
-              </a:rPr>
-              <a:t>ตรวจรับงวด 1</a:t>
-            </a:r>
-          </a:p>
-        </p:txBody>
-      </p:sp>
-      <p:sp>
-        <p:nvSpPr>
-          <p:cNvPr id="38" name="Milestone 4"/>
-          <p:cNvSpPr/>
-          <p:nvPr/>
-        </p:nvSpPr>
-        <p:spPr>
-          <a:xfrm>
-            <a:off x="7348728" y="3344418"/>
-            <a:ext cx="146304" cy="146304"/>
-          </a:xfrm>
-          <a:prstGeom prst="diamond">
-            <a:avLst/>
-          </a:prstGeom>
-          <a:solidFill>
-            <a:srgbClr val="BB731B"/>
-          </a:solidFill>
-          <a:ln w="19050">
-            <a:solidFill>
-              <a:srgbClr val="FFFFFF"/>
-            </a:solidFill>
-          </a:ln>
-        </p:spPr>
-        <p:txBody>
-          <a:bodyPr/>
-          <a:lstStyle/>
-          <a:p>
-            <a:endParaRPr lang="th-TH"/>
-          </a:p>
-        </p:txBody>
-      </p:sp>
-      <p:sp>
-        <p:nvSpPr>
-          <p:cNvPr id="39" name="Milestone 4 Label"/>
-          <p:cNvSpPr/>
-          <p:nvPr/>
-        </p:nvSpPr>
-        <p:spPr>
-          <a:xfrm>
-            <a:off x="7540752" y="3223260"/>
-            <a:ext cx="1463040" cy="388620"/>
-          </a:xfrm>
-          <a:prstGeom prst="rect">
-            <a:avLst/>
-          </a:prstGeom>
-          <a:noFill/>
-          <a:ln>
-            <a:noFill/>
-          </a:ln>
-        </p:spPr>
-        <p:txBody>
-          <a:bodyPr wrap="square" anchor="ctr" lIns="0" tIns="0" rIns="0" bIns="0" rtlCol="0"/>
-          <a:lstStyle/>
-          <a:p>
-            <a:pPr algn="l" marL="0" indent="0">
-              <a:lnSpc>
-                <a:spcPct val="100000"/>
-              </a:lnSpc>
-              <a:buNone/>
-            </a:pPr>
-            <a:r>
-              <a:rPr lang="th-TH" sz="1000" dirty="0">
-                <a:solidFill>
-                  <a:srgbClr val="5F5F5F"/>
-                </a:solidFill>
-                <a:latin typeface="+mn-lt"/>
-                <a:ea typeface="+mn-ea"/>
-                <a:cs typeface="+mn-cs"/>
-              </a:rPr>
-              <a:t>ตรวจรับงวด 2</a:t>
-            </a:r>
-          </a:p>
-        </p:txBody>
-      </p:sp>
-      <p:sp>
-        <p:nvSpPr>
-          <p:cNvPr id="40" name="Milestone 7"/>
-          <p:cNvSpPr/>
-          <p:nvPr/>
-        </p:nvSpPr>
-        <p:spPr>
-          <a:xfrm>
-            <a:off x="9597898" y="4510278"/>
-            <a:ext cx="146304" cy="146304"/>
-          </a:xfrm>
-          <a:prstGeom prst="diamond">
-            <a:avLst/>
-          </a:prstGeom>
-          <a:solidFill>
-            <a:srgbClr val="BB731B"/>
-          </a:solidFill>
-          <a:ln w="19050">
-            <a:solidFill>
-              <a:srgbClr val="FFFFFF"/>
-            </a:solidFill>
-          </a:ln>
-        </p:spPr>
-        <p:txBody>
-          <a:bodyPr/>
-          <a:lstStyle/>
-          <a:p>
-            <a:endParaRPr lang="th-TH"/>
-          </a:p>
-        </p:txBody>
-      </p:sp>
-      <p:sp>
-        <p:nvSpPr>
-          <p:cNvPr id="41" name="Milestone 7 Label"/>
-          <p:cNvSpPr/>
-          <p:nvPr/>
-        </p:nvSpPr>
-        <p:spPr>
-          <a:xfrm>
-            <a:off x="9789922" y="4389120"/>
-            <a:ext cx="1463040" cy="388620"/>
-          </a:xfrm>
-          <a:prstGeom prst="rect">
-            <a:avLst/>
-          </a:prstGeom>
-          <a:noFill/>
-          <a:ln>
-            <a:noFill/>
-          </a:ln>
-        </p:spPr>
-        <p:txBody>
-          <a:bodyPr wrap="square" anchor="ctr" lIns="0" tIns="0" rIns="0" bIns="0" rtlCol="0"/>
-          <a:lstStyle/>
-          <a:p>
-            <a:pPr algn="l" marL="0" indent="0">
-              <a:lnSpc>
-                <a:spcPct val="100000"/>
-              </a:lnSpc>
-              <a:buNone/>
-            </a:pPr>
-            <a:r>
-              <a:rPr lang="th-TH" sz="1000" dirty="0">
-                <a:solidFill>
-                  <a:srgbClr val="5F5F5F"/>
-                </a:solidFill>
-                <a:latin typeface="+mn-lt"/>
-                <a:ea typeface="+mn-ea"/>
-                <a:cs typeface="+mn-cs"/>
-              </a:rPr>
-              <a:t>ตรวจรับงวด 3</a:t>
-            </a:r>
-          </a:p>
-        </p:txBody>
-      </p:sp>
-    </p:spTree>
-  </p:cSld>
-  <p:clrMapOvr>
-    <a:masterClrMapping/>
-  </p:clrMapOvr>
-</p:sld>
-</file>
-
 <file path=ppt/slides/slide19.xml><?xml version="1.0" encoding="utf-8"?>
 <p:sld xmlns:a="http://schemas.openxmlformats.org/drawingml/2006/main" xmlns:r="http://schemas.openxmlformats.org/officeDocument/2006/relationships" xmlns:p="http://schemas.openxmlformats.org/presentationml/2006/main">
   <p:cSld name="">
@@ -27189,83 +27808,14 @@
             <a:pPr/>
             <a:r>
               <a:rPr lang="th-TH" dirty="0"/>
-              <a:t>ครึ่งหนึ่งของงบ 4.8 ล้านบาท คือค่าพัฒนาระบบ</a:t>
-            </a:r>
-          </a:p>
-        </p:txBody>
-      </p:sp>
-      <p:sp>
-        <p:nvSpPr>
-          <p:cNvPr id="3" name="Total"/>
-          <p:cNvSpPr>
-            <a:spLocks noGrp="1"/>
-          </p:cNvSpPr>
-          <p:nvPr>
-            <p:ph type="body" idx="2"/>
-          </p:nvPr>
-        </p:nvSpPr>
-        <p:spPr/>
-        <p:txBody>
-          <a:bodyPr/>
-          <a:lstStyle/>
-          <a:p>
-            <a:pPr/>
-            <a:r>
-              <a:rPr lang="th-TH" dirty="0"/>
-              <a:t>4.8 ล้านบาท</a:t>
-            </a:r>
-          </a:p>
-        </p:txBody>
-      </p:sp>
-      <p:sp>
-        <p:nvSpPr>
-          <p:cNvPr id="4" name="TotalL"/>
-          <p:cNvSpPr>
-            <a:spLocks noGrp="1"/>
-          </p:cNvSpPr>
-          <p:nvPr>
-            <p:ph type="body" idx="3"/>
-          </p:nvPr>
-        </p:nvSpPr>
-        <p:spPr/>
-        <p:txBody>
-          <a:bodyPr/>
-          <a:lstStyle/>
-          <a:p>
-            <a:pPr/>
-            <a:r>
-              <a:rPr lang="th-TH" dirty="0"/>
-              <a:t>งบโครงการรวมทั้งสิ้น</a:t>
-            </a:r>
-          </a:p>
-        </p:txBody>
-      </p:sp>
-      <p:sp>
-        <p:nvSpPr>
-          <p:cNvPr id="5" name="Intro"/>
-          <p:cNvSpPr>
-            <a:spLocks noGrp="1"/>
-          </p:cNvSpPr>
-          <p:nvPr>
-            <p:ph type="body" idx="4"/>
-          </p:nvPr>
-        </p:nvSpPr>
-        <p:spPr/>
-        <p:txBody>
-          <a:bodyPr/>
-          <a:lstStyle/>
-          <a:p>
-            <a:pPr/>
-            <a:r>
-              <a:rPr lang="th-TH" dirty="0"/>
-              <a:t>รวมภาษีมูลค่าเพิ่ม · สัญญา 12 เดือน ไม่รวมค่าบริการรายเดือนหลังปีแรก</a:t>
+              <a:t>แผนงาน 12 เดือน ขึ้นระบบต้นเดือนที่ 7</a:t>
             </a:r>
           </a:p>
         </p:txBody>
       </p:sp>
       <p:graphicFrame>
         <p:nvGraphicFramePr>
-          <p:cNvPr id="6" name="Composition"/>
+          <p:cNvPr id="3" name="Plan"/>
           <p:cNvGraphicFramePr>
             <a:graphicFrameLocks noGrp="1"/>
           </p:cNvGraphicFramePr>
@@ -27274,8 +27824,8 @@
           </p:nvPr>
         </p:nvGraphicFramePr>
         <p:xfrm>
-          <a:off x="2697480" y="3703320"/>
-          <a:ext cx="7299960" cy="1371600"/>
+          <a:off x="3566160" y="2057400"/>
+          <a:ext cx="7711440" cy="3108960"/>
         </p:xfrm>
         <a:graphic>
           <a:graphicData uri="http://schemas.openxmlformats.org/drawingml/2006/chart">
@@ -27285,7 +27835,7 @@
       </p:graphicFrame>
       <p:sp>
         <p:nvSpPr>
-          <p:cNvPr id="7" name="B1"/>
+          <p:cNvPr id="4" name="P1"/>
           <p:cNvSpPr>
             <a:spLocks noGrp="1"/>
           </p:cNvSpPr>
@@ -27301,14 +27851,129 @@
             <a:pPr/>
             <a:r>
               <a:rPr lang="th-TH" dirty="0"/>
-              <a:t>งบโครงการ</a:t>
-            </a:r>
-          </a:p>
-        </p:txBody>
-      </p:sp>
-      <p:sp>
-        <p:nvSpPr>
-          <p:cNvPr id="8" name="SN"/>
+              <a:t>ด.1</a:t>
+            </a:r>
+          </a:p>
+        </p:txBody>
+      </p:sp>
+      <p:sp>
+        <p:nvSpPr>
+          <p:cNvPr id="5" name="P2"/>
+          <p:cNvSpPr>
+            <a:spLocks noGrp="1"/>
+          </p:cNvSpPr>
+          <p:nvPr>
+            <p:ph type="body" idx="21"/>
+          </p:nvPr>
+        </p:nvSpPr>
+        <p:spPr/>
+        <p:txBody>
+          <a:bodyPr/>
+          <a:lstStyle/>
+          <a:p>
+            <a:pPr/>
+            <a:r>
+              <a:rPr lang="th-TH" dirty="0"/>
+              <a:t>ด.2</a:t>
+            </a:r>
+          </a:p>
+        </p:txBody>
+      </p:sp>
+      <p:sp>
+        <p:nvSpPr>
+          <p:cNvPr id="6" name="P3"/>
+          <p:cNvSpPr>
+            <a:spLocks noGrp="1"/>
+          </p:cNvSpPr>
+          <p:nvPr>
+            <p:ph type="body" idx="22"/>
+          </p:nvPr>
+        </p:nvSpPr>
+        <p:spPr/>
+        <p:txBody>
+          <a:bodyPr/>
+          <a:lstStyle/>
+          <a:p>
+            <a:pPr/>
+            <a:r>
+              <a:rPr lang="th-TH" dirty="0"/>
+              <a:t>ด.3</a:t>
+            </a:r>
+          </a:p>
+        </p:txBody>
+      </p:sp>
+      <p:sp>
+        <p:nvSpPr>
+          <p:cNvPr id="7" name="P4"/>
+          <p:cNvSpPr>
+            <a:spLocks noGrp="1"/>
+          </p:cNvSpPr>
+          <p:nvPr>
+            <p:ph type="body" idx="23"/>
+          </p:nvPr>
+        </p:nvSpPr>
+        <p:spPr/>
+        <p:txBody>
+          <a:bodyPr/>
+          <a:lstStyle/>
+          <a:p>
+            <a:pPr/>
+            <a:r>
+              <a:rPr lang="th-TH" dirty="0"/>
+              <a:t>ด.4</a:t>
+            </a:r>
+          </a:p>
+        </p:txBody>
+      </p:sp>
+      <p:sp>
+        <p:nvSpPr>
+          <p:cNvPr id="8" name="P5"/>
+          <p:cNvSpPr>
+            <a:spLocks noGrp="1"/>
+          </p:cNvSpPr>
+          <p:nvPr>
+            <p:ph type="body" idx="24"/>
+          </p:nvPr>
+        </p:nvSpPr>
+        <p:spPr/>
+        <p:txBody>
+          <a:bodyPr/>
+          <a:lstStyle/>
+          <a:p>
+            <a:pPr/>
+            <a:r>
+              <a:rPr lang="th-TH" dirty="0"/>
+              <a:t>ด.5</a:t>
+            </a:r>
+          </a:p>
+        </p:txBody>
+      </p:sp>
+      <p:sp>
+        <p:nvSpPr>
+          <p:cNvPr id="9" name="P6"/>
+          <p:cNvSpPr>
+            <a:spLocks noGrp="1"/>
+          </p:cNvSpPr>
+          <p:nvPr>
+            <p:ph type="body" idx="25"/>
+          </p:nvPr>
+        </p:nvSpPr>
+        <p:spPr/>
+        <p:txBody>
+          <a:bodyPr/>
+          <a:lstStyle/>
+          <a:p>
+            <a:pPr/>
+            <a:r>
+              <a:rPr lang="th-TH" dirty="0"/>
+              <a:t>ด.6</a:t>
+            </a:r>
+          </a:p>
+        </p:txBody>
+      </p:sp>
+      <p:sp>
+        <p:nvSpPr>
+          <p:cNvPr id="10" name="P7"/>
           <p:cNvSpPr>
             <a:spLocks noGrp="1"/>
           </p:cNvSpPr>
@@ -27324,14 +27989,14 @@
             <a:pPr/>
             <a:r>
               <a:rPr lang="th-TH" dirty="0"/>
-              <a:t>พัฒนาและตั้งค่าระบบ</a:t>
-            </a:r>
-          </a:p>
-        </p:txBody>
-      </p:sp>
-      <p:sp>
-        <p:nvSpPr>
-          <p:cNvPr id="9" name="SV"/>
+              <a:t>ด.7</a:t>
+            </a:r>
+          </a:p>
+        </p:txBody>
+      </p:sp>
+      <p:sp>
+        <p:nvSpPr>
+          <p:cNvPr id="11" name="P8"/>
           <p:cNvSpPr>
             <a:spLocks noGrp="1"/>
           </p:cNvSpPr>
@@ -27347,14 +28012,14 @@
             <a:pPr/>
             <a:r>
               <a:rPr lang="th-TH" dirty="0"/>
-              <a:t>2.4 ล้านบาท</a:t>
-            </a:r>
-          </a:p>
-        </p:txBody>
-      </p:sp>
-      <p:sp>
-        <p:nvSpPr>
-          <p:cNvPr id="10" name="SP"/>
+              <a:t>ด.8</a:t>
+            </a:r>
+          </a:p>
+        </p:txBody>
+      </p:sp>
+      <p:sp>
+        <p:nvSpPr>
+          <p:cNvPr id="12" name="P9"/>
           <p:cNvSpPr>
             <a:spLocks noGrp="1"/>
           </p:cNvSpPr>
@@ -27370,14 +28035,14 @@
             <a:pPr/>
             <a:r>
               <a:rPr lang="th-TH" dirty="0"/>
-              <a:t>50%</a:t>
-            </a:r>
-          </a:p>
-        </p:txBody>
-      </p:sp>
-      <p:sp>
-        <p:nvSpPr>
-          <p:cNvPr id="11" name="SN"/>
+              <a:t>ด.9</a:t>
+            </a:r>
+          </a:p>
+        </p:txBody>
+      </p:sp>
+      <p:sp>
+        <p:nvSpPr>
+          <p:cNvPr id="13" name="P10"/>
           <p:cNvSpPr>
             <a:spLocks noGrp="1"/>
           </p:cNvSpPr>
@@ -27393,14 +28058,14 @@
             <a:pPr/>
             <a:r>
               <a:rPr lang="th-TH" dirty="0"/>
-              <a:t>ไลเซนส์ซอฟต์แวร์</a:t>
-            </a:r>
-          </a:p>
-        </p:txBody>
-      </p:sp>
-      <p:sp>
-        <p:nvSpPr>
-          <p:cNvPr id="12" name="SV"/>
+              <a:t>ด.10</a:t>
+            </a:r>
+          </a:p>
+        </p:txBody>
+      </p:sp>
+      <p:sp>
+        <p:nvSpPr>
+          <p:cNvPr id="14" name="P11"/>
           <p:cNvSpPr>
             <a:spLocks noGrp="1"/>
           </p:cNvSpPr>
@@ -27416,14 +28081,14 @@
             <a:pPr/>
             <a:r>
               <a:rPr lang="th-TH" dirty="0"/>
-              <a:t>1.2 ล้านบาท</a:t>
-            </a:r>
-          </a:p>
-        </p:txBody>
-      </p:sp>
-      <p:sp>
-        <p:nvSpPr>
-          <p:cNvPr id="13" name="SP"/>
+              <a:t>ด.11</a:t>
+            </a:r>
+          </a:p>
+        </p:txBody>
+      </p:sp>
+      <p:sp>
+        <p:nvSpPr>
+          <p:cNvPr id="15" name="P12"/>
           <p:cNvSpPr>
             <a:spLocks noGrp="1"/>
           </p:cNvSpPr>
@@ -27439,14 +28104,14 @@
             <a:pPr/>
             <a:r>
               <a:rPr lang="th-TH" dirty="0"/>
-              <a:t>25%</a:t>
-            </a:r>
-          </a:p>
-        </p:txBody>
-      </p:sp>
-      <p:sp>
-        <p:nvSpPr>
-          <p:cNvPr id="14" name="SN"/>
+              <a:t>ด.12</a:t>
+            </a:r>
+          </a:p>
+        </p:txBody>
+      </p:sp>
+      <p:sp>
+        <p:nvSpPr>
+          <p:cNvPr id="16" name="R1"/>
           <p:cNvSpPr>
             <a:spLocks noGrp="1"/>
           </p:cNvSpPr>
@@ -27462,14 +28127,14 @@
             <a:pPr/>
             <a:r>
               <a:rPr lang="th-TH" dirty="0"/>
-              <a:t>คลาวด์ปีแรก</a:t>
-            </a:r>
-          </a:p>
-        </p:txBody>
-      </p:sp>
-      <p:sp>
-        <p:nvSpPr>
-          <p:cNvPr id="15" name="SV"/>
+              <a:t>1. เตรียมระบบ</a:t>
+            </a:r>
+          </a:p>
+        </p:txBody>
+      </p:sp>
+      <p:sp>
+        <p:nvSpPr>
+          <p:cNvPr id="17" name="D1"/>
           <p:cNvSpPr>
             <a:spLocks noGrp="1"/>
           </p:cNvSpPr>
@@ -27485,14 +28150,14 @@
             <a:pPr/>
             <a:r>
               <a:rPr lang="th-TH" dirty="0"/>
-              <a:t>0.7 ล้านบาท</a:t>
-            </a:r>
-          </a:p>
-        </p:txBody>
-      </p:sp>
-      <p:sp>
-        <p:nvSpPr>
-          <p:cNvPr id="16" name="SP"/>
+              <a:t>4 สัปดาห์</a:t>
+            </a:r>
+          </a:p>
+        </p:txBody>
+      </p:sp>
+      <p:sp>
+        <p:nvSpPr>
+          <p:cNvPr id="18" name="R2"/>
           <p:cNvSpPr>
             <a:spLocks noGrp="1"/>
           </p:cNvSpPr>
@@ -27508,14 +28173,14 @@
             <a:pPr/>
             <a:r>
               <a:rPr lang="th-TH" dirty="0"/>
-              <a:t>15%</a:t>
-            </a:r>
-          </a:p>
-        </p:txBody>
-      </p:sp>
-      <p:sp>
-        <p:nvSpPr>
-          <p:cNvPr id="17" name="SN"/>
+              <a:t>2. วิเคราะห์และออกแบบ</a:t>
+            </a:r>
+          </a:p>
+        </p:txBody>
+      </p:sp>
+      <p:sp>
+        <p:nvSpPr>
+          <p:cNvPr id="19" name="D2"/>
           <p:cNvSpPr>
             <a:spLocks noGrp="1"/>
           </p:cNvSpPr>
@@ -27531,14 +28196,14 @@
             <a:pPr/>
             <a:r>
               <a:rPr lang="th-TH" dirty="0"/>
-              <a:t>อื่น ๆ</a:t>
-            </a:r>
-          </a:p>
-        </p:txBody>
-      </p:sp>
-      <p:sp>
-        <p:nvSpPr>
-          <p:cNvPr id="18" name="SV"/>
+              <a:t>6 สัปดาห์</a:t>
+            </a:r>
+          </a:p>
+        </p:txBody>
+      </p:sp>
+      <p:sp>
+        <p:nvSpPr>
+          <p:cNvPr id="20" name="R3"/>
           <p:cNvSpPr>
             <a:spLocks noGrp="1"/>
           </p:cNvSpPr>
@@ -27554,14 +28219,14 @@
             <a:pPr/>
             <a:r>
               <a:rPr lang="th-TH" dirty="0"/>
-              <a:t>0.5 ล้านบาท</a:t>
-            </a:r>
-          </a:p>
-        </p:txBody>
-      </p:sp>
-      <p:sp>
-        <p:nvSpPr>
-          <p:cNvPr id="19" name="SP"/>
+              <a:t>3. พัฒนาและตั้งค่าระบบ</a:t>
+            </a:r>
+          </a:p>
+        </p:txBody>
+      </p:sp>
+      <p:sp>
+        <p:nvSpPr>
+          <p:cNvPr id="21" name="D3"/>
           <p:cNvSpPr>
             <a:spLocks noGrp="1"/>
           </p:cNvSpPr>
@@ -27577,19 +28242,19 @@
             <a:pPr/>
             <a:r>
               <a:rPr lang="th-TH" dirty="0"/>
-              <a:t>10%</a:t>
-            </a:r>
-          </a:p>
-        </p:txBody>
-      </p:sp>
-      <p:sp>
-        <p:nvSpPr>
-          <p:cNvPr id="20" name="Src"/>
-          <p:cNvSpPr>
-            <a:spLocks noGrp="1"/>
-          </p:cNvSpPr>
-          <p:nvPr>
-            <p:ph type="body" idx="5"/>
+              <a:t>10 สัปดาห์</a:t>
+            </a:r>
+          </a:p>
+        </p:txBody>
+      </p:sp>
+      <p:sp>
+        <p:nvSpPr>
+          <p:cNvPr id="22" name="R4"/>
+          <p:cNvSpPr>
+            <a:spLocks noGrp="1"/>
+          </p:cNvSpPr>
+          <p:nvPr>
+            <p:ph type="body" idx="38"/>
           </p:nvPr>
         </p:nvSpPr>
         <p:spPr/>
@@ -27600,19 +28265,272 @@
             <a:pPr/>
             <a:r>
               <a:rPr lang="th-TH" dirty="0"/>
-              <a:t>ใบเสนอราคา NCT-2569-041 · ปัดเป็นแสนบาท</a:t>
-            </a:r>
-          </a:p>
-        </p:txBody>
-      </p:sp>
-      <p:sp>
-        <p:nvSpPr>
-          <p:cNvPr id="21" name="TL"/>
-          <p:cNvSpPr>
-            <a:spLocks noGrp="1"/>
-          </p:cNvSpPr>
-          <p:nvPr>
-            <p:ph type="body" idx="6"/>
+              <a:t>4. ทดสอบ UAT</a:t>
+            </a:r>
+          </a:p>
+        </p:txBody>
+      </p:sp>
+      <p:sp>
+        <p:nvSpPr>
+          <p:cNvPr id="23" name="D4"/>
+          <p:cNvSpPr>
+            <a:spLocks noGrp="1"/>
+          </p:cNvSpPr>
+          <p:nvPr>
+            <p:ph type="body" idx="39"/>
+          </p:nvPr>
+        </p:nvSpPr>
+        <p:spPr/>
+        <p:txBody>
+          <a:bodyPr/>
+          <a:lstStyle/>
+          <a:p>
+            <a:pPr/>
+            <a:r>
+              <a:rPr lang="th-TH" dirty="0"/>
+              <a:t>4 สัปดาห์</a:t>
+            </a:r>
+          </a:p>
+        </p:txBody>
+      </p:sp>
+      <p:sp>
+        <p:nvSpPr>
+          <p:cNvPr id="24" name="R5"/>
+          <p:cNvSpPr>
+            <a:spLocks noGrp="1"/>
+          </p:cNvSpPr>
+          <p:nvPr>
+            <p:ph type="body" idx="40"/>
+          </p:nvPr>
+        </p:nvSpPr>
+        <p:spPr/>
+        <p:txBody>
+          <a:bodyPr/>
+          <a:lstStyle/>
+          <a:p>
+            <a:pPr/>
+            <a:r>
+              <a:rPr lang="th-TH" dirty="0"/>
+              <a:t>5. อบรมผู้ใช้</a:t>
+            </a:r>
+          </a:p>
+        </p:txBody>
+      </p:sp>
+      <p:sp>
+        <p:nvSpPr>
+          <p:cNvPr id="25" name="D5"/>
+          <p:cNvSpPr>
+            <a:spLocks noGrp="1"/>
+          </p:cNvSpPr>
+          <p:nvPr>
+            <p:ph type="body" idx="41"/>
+          </p:nvPr>
+        </p:nvSpPr>
+        <p:spPr/>
+        <p:txBody>
+          <a:bodyPr/>
+          <a:lstStyle/>
+          <a:p>
+            <a:pPr/>
+            <a:r>
+              <a:rPr lang="th-TH" dirty="0"/>
+              <a:t>1 สัปดาห์</a:t>
+            </a:r>
+          </a:p>
+        </p:txBody>
+      </p:sp>
+      <p:sp>
+        <p:nvSpPr>
+          <p:cNvPr id="26" name="R6"/>
+          <p:cNvSpPr>
+            <a:spLocks noGrp="1"/>
+          </p:cNvSpPr>
+          <p:nvPr>
+            <p:ph type="body" idx="42"/>
+          </p:nvPr>
+        </p:nvSpPr>
+        <p:spPr/>
+        <p:txBody>
+          <a:bodyPr/>
+          <a:lstStyle/>
+          <a:p>
+            <a:pPr/>
+            <a:r>
+              <a:rPr lang="th-TH" dirty="0"/>
+              <a:t>6. ขึ้นระบบ</a:t>
+            </a:r>
+          </a:p>
+        </p:txBody>
+      </p:sp>
+      <p:sp>
+        <p:nvSpPr>
+          <p:cNvPr id="27" name="D6"/>
+          <p:cNvSpPr>
+            <a:spLocks noGrp="1"/>
+          </p:cNvSpPr>
+          <p:nvPr>
+            <p:ph type="body" idx="43"/>
+          </p:nvPr>
+        </p:nvSpPr>
+        <p:spPr/>
+        <p:txBody>
+          <a:bodyPr/>
+          <a:lstStyle/>
+          <a:p>
+            <a:pPr/>
+            <a:r>
+              <a:rPr lang="th-TH" dirty="0"/>
+              <a:t>2 สัปดาห์</a:t>
+            </a:r>
+          </a:p>
+        </p:txBody>
+      </p:sp>
+      <p:sp>
+        <p:nvSpPr>
+          <p:cNvPr id="28" name="R7"/>
+          <p:cNvSpPr>
+            <a:spLocks noGrp="1"/>
+          </p:cNvSpPr>
+          <p:nvPr>
+            <p:ph type="body" idx="44"/>
+          </p:nvPr>
+        </p:nvSpPr>
+        <p:spPr/>
+        <p:txBody>
+          <a:bodyPr/>
+          <a:lstStyle/>
+          <a:p>
+            <a:pPr/>
+            <a:r>
+              <a:rPr lang="th-TH" dirty="0"/>
+              <a:t>7. ดูแลหลังขึ้นระบบ</a:t>
+            </a:r>
+          </a:p>
+        </p:txBody>
+      </p:sp>
+      <p:sp>
+        <p:nvSpPr>
+          <p:cNvPr id="29" name="D7"/>
+          <p:cNvSpPr>
+            <a:spLocks noGrp="1"/>
+          </p:cNvSpPr>
+          <p:nvPr>
+            <p:ph type="body" idx="45"/>
+          </p:nvPr>
+        </p:nvSpPr>
+        <p:spPr/>
+        <p:txBody>
+          <a:bodyPr/>
+          <a:lstStyle/>
+          <a:p>
+            <a:pPr/>
+            <a:r>
+              <a:rPr lang="th-TH" dirty="0"/>
+              <a:t>3 เดือน</a:t>
+            </a:r>
+          </a:p>
+        </p:txBody>
+      </p:sp>
+      <p:sp>
+        <p:nvSpPr>
+          <p:cNvPr id="30" name="R8"/>
+          <p:cNvSpPr>
+            <a:spLocks noGrp="1"/>
+          </p:cNvSpPr>
+          <p:nvPr>
+            <p:ph type="body" idx="46"/>
+          </p:nvPr>
+        </p:nvSpPr>
+        <p:spPr/>
+        <p:txBody>
+          <a:bodyPr/>
+          <a:lstStyle/>
+          <a:p>
+            <a:pPr/>
+            <a:r>
+              <a:rPr lang="th-TH" dirty="0"/>
+              <a:t>8. รับประกันระบบ</a:t>
+            </a:r>
+          </a:p>
+        </p:txBody>
+      </p:sp>
+      <p:sp>
+        <p:nvSpPr>
+          <p:cNvPr id="31" name="D8"/>
+          <p:cNvSpPr>
+            <a:spLocks noGrp="1"/>
+          </p:cNvSpPr>
+          <p:nvPr>
+            <p:ph type="body" idx="47"/>
+          </p:nvPr>
+        </p:nvSpPr>
+        <p:spPr/>
+        <p:txBody>
+          <a:bodyPr/>
+          <a:lstStyle/>
+          <a:p>
+            <a:pPr/>
+            <a:r>
+              <a:rPr lang="th-TH" dirty="0"/>
+              <a:t>2.5 เดือน</a:t>
+            </a:r>
+          </a:p>
+        </p:txBody>
+      </p:sp>
+      <p:sp>
+        <p:nvSpPr>
+          <p:cNvPr id="32" name="Key"/>
+          <p:cNvSpPr>
+            <a:spLocks noGrp="1"/>
+          </p:cNvSpPr>
+          <p:nvPr>
+            <p:ph type="body" idx="2"/>
+          </p:nvPr>
+        </p:nvSpPr>
+        <p:spPr/>
+        <p:txBody>
+          <a:bodyPr/>
+          <a:lstStyle/>
+          <a:p>
+            <a:pPr/>
+            <a:r>
+              <a:rPr lang="th-TH" dirty="0"/>
+              <a:t>■ ช่วงงาน   ◆ ส่งมอบ / ตรวจรับ</a:t>
+            </a:r>
+          </a:p>
+        </p:txBody>
+      </p:sp>
+      <p:sp>
+        <p:nvSpPr>
+          <p:cNvPr id="33" name="Asm"/>
+          <p:cNvSpPr>
+            <a:spLocks noGrp="1"/>
+          </p:cNvSpPr>
+          <p:nvPr>
+            <p:ph type="body" idx="3"/>
+          </p:nvPr>
+        </p:nvSpPr>
+        <p:spPr/>
+        <p:txBody>
+          <a:bodyPr/>
+          <a:lstStyle/>
+          <a:p>
+            <a:pPr/>
+            <a:r>
+              <a:rPr lang="th-TH" dirty="0"/>
+              <a:t>นับจากวันลงนามสัญญา · หน่วย: เดือน</a:t>
+            </a:r>
+          </a:p>
+        </p:txBody>
+      </p:sp>
+      <p:sp>
+        <p:nvSpPr>
+          <p:cNvPr id="34" name="TL"/>
+          <p:cNvSpPr>
+            <a:spLocks noGrp="1"/>
+          </p:cNvSpPr>
+          <p:nvPr>
+            <p:ph type="body" idx="4"/>
           </p:nvPr>
         </p:nvSpPr>
         <p:spPr/>
@@ -27630,12 +28548,12 @@
       </p:sp>
       <p:sp>
         <p:nvSpPr>
-          <p:cNvPr id="22" name="TC"/>
-          <p:cNvSpPr>
-            <a:spLocks noGrp="1"/>
-          </p:cNvSpPr>
-          <p:nvPr>
-            <p:ph type="body" idx="7"/>
+          <p:cNvPr id="35" name="TC"/>
+          <p:cNvSpPr>
+            <a:spLocks noGrp="1"/>
+          </p:cNvSpPr>
+          <p:nvPr>
+            <p:ph type="body" idx="5"/>
           </p:nvPr>
         </p:nvSpPr>
         <p:spPr/>
@@ -27646,7 +28564,229 @@
             <a:pPr/>
             <a:r>
               <a:rPr lang="th-TH" dirty="0"/>
-              <a:t>ไลเซนส์กับคลาวด์รวมกันไม่ถึง 40% งบส่วนใหญ่จ่ายให้งานที่ทำครั้งเดียว</a:t>
+              <a:t>ขึ้นระบบต้นเดือนที่ 7 ตรวจรับ 3 งวดตามจุดส่งมอบ</a:t>
+            </a:r>
+          </a:p>
+        </p:txBody>
+      </p:sp>
+      <p:sp>
+        <p:nvSpPr>
+          <p:cNvPr id="36" name="Milestone 2"/>
+          <p:cNvSpPr/>
+          <p:nvPr/>
+        </p:nvSpPr>
+        <p:spPr>
+          <a:xfrm>
+            <a:off x="5099558" y="2567178"/>
+            <a:ext cx="146304" cy="146304"/>
+          </a:xfrm>
+          <a:prstGeom prst="diamond">
+            <a:avLst/>
+          </a:prstGeom>
+          <a:solidFill>
+            <a:srgbClr val="BB731B"/>
+          </a:solidFill>
+          <a:ln w="19050">
+            <a:solidFill>
+              <a:srgbClr val="FFFFFF"/>
+            </a:solidFill>
+          </a:ln>
+        </p:spPr>
+        <p:txBody>
+          <a:bodyPr/>
+          <a:lstStyle/>
+          <a:p>
+            <a:endParaRPr lang="th-TH"/>
+          </a:p>
+        </p:txBody>
+      </p:sp>
+      <p:sp>
+        <p:nvSpPr>
+          <p:cNvPr id="37" name="Milestone 2 Label"/>
+          <p:cNvSpPr/>
+          <p:nvPr/>
+        </p:nvSpPr>
+        <p:spPr>
+          <a:xfrm>
+            <a:off x="5291582" y="2446020"/>
+            <a:ext cx="1463040" cy="388620"/>
+          </a:xfrm>
+          <a:prstGeom prst="rect">
+            <a:avLst/>
+          </a:prstGeom>
+          <a:noFill/>
+          <a:ln>
+            <a:noFill/>
+          </a:ln>
+        </p:spPr>
+        <p:txBody>
+          <a:bodyPr wrap="square" anchor="ctr" lIns="0" tIns="0" rIns="0" bIns="0" rtlCol="0"/>
+          <a:lstStyle/>
+          <a:p>
+            <a:pPr algn="l" marL="0" indent="0">
+              <a:lnSpc>
+                <a:spcPct val="100000"/>
+              </a:lnSpc>
+              <a:buNone/>
+            </a:pPr>
+            <a:r>
+              <a:rPr lang="th-TH" sz="1000" dirty="0">
+                <a:solidFill>
+                  <a:srgbClr val="5F5F5F"/>
+                </a:solidFill>
+                <a:latin typeface="+mn-lt"/>
+                <a:ea typeface="+mn-ea"/>
+                <a:cs typeface="+mn-cs"/>
+              </a:rPr>
+              <a:t>ตรวจรับงวด 1</a:t>
+            </a:r>
+          </a:p>
+        </p:txBody>
+      </p:sp>
+      <p:sp>
+        <p:nvSpPr>
+          <p:cNvPr id="38" name="Milestone 4"/>
+          <p:cNvSpPr/>
+          <p:nvPr/>
+        </p:nvSpPr>
+        <p:spPr>
+          <a:xfrm>
+            <a:off x="7348728" y="3344418"/>
+            <a:ext cx="146304" cy="146304"/>
+          </a:xfrm>
+          <a:prstGeom prst="diamond">
+            <a:avLst/>
+          </a:prstGeom>
+          <a:solidFill>
+            <a:srgbClr val="BB731B"/>
+          </a:solidFill>
+          <a:ln w="19050">
+            <a:solidFill>
+              <a:srgbClr val="FFFFFF"/>
+            </a:solidFill>
+          </a:ln>
+        </p:spPr>
+        <p:txBody>
+          <a:bodyPr/>
+          <a:lstStyle/>
+          <a:p>
+            <a:endParaRPr lang="th-TH"/>
+          </a:p>
+        </p:txBody>
+      </p:sp>
+      <p:sp>
+        <p:nvSpPr>
+          <p:cNvPr id="39" name="Milestone 4 Label"/>
+          <p:cNvSpPr/>
+          <p:nvPr/>
+        </p:nvSpPr>
+        <p:spPr>
+          <a:xfrm>
+            <a:off x="7540752" y="3223260"/>
+            <a:ext cx="1463040" cy="388620"/>
+          </a:xfrm>
+          <a:prstGeom prst="rect">
+            <a:avLst/>
+          </a:prstGeom>
+          <a:noFill/>
+          <a:ln>
+            <a:noFill/>
+          </a:ln>
+        </p:spPr>
+        <p:txBody>
+          <a:bodyPr wrap="square" anchor="ctr" lIns="0" tIns="0" rIns="0" bIns="0" rtlCol="0"/>
+          <a:lstStyle/>
+          <a:p>
+            <a:pPr algn="l" marL="0" indent="0">
+              <a:lnSpc>
+                <a:spcPct val="100000"/>
+              </a:lnSpc>
+              <a:buNone/>
+            </a:pPr>
+            <a:r>
+              <a:rPr lang="th-TH" sz="1000" dirty="0">
+                <a:solidFill>
+                  <a:srgbClr val="5F5F5F"/>
+                </a:solidFill>
+                <a:latin typeface="+mn-lt"/>
+                <a:ea typeface="+mn-ea"/>
+                <a:cs typeface="+mn-cs"/>
+              </a:rPr>
+              <a:t>ตรวจรับงวด 2</a:t>
+            </a:r>
+          </a:p>
+        </p:txBody>
+      </p:sp>
+      <p:sp>
+        <p:nvSpPr>
+          <p:cNvPr id="40" name="Milestone 7"/>
+          <p:cNvSpPr/>
+          <p:nvPr/>
+        </p:nvSpPr>
+        <p:spPr>
+          <a:xfrm>
+            <a:off x="9597898" y="4510278"/>
+            <a:ext cx="146304" cy="146304"/>
+          </a:xfrm>
+          <a:prstGeom prst="diamond">
+            <a:avLst/>
+          </a:prstGeom>
+          <a:solidFill>
+            <a:srgbClr val="BB731B"/>
+          </a:solidFill>
+          <a:ln w="19050">
+            <a:solidFill>
+              <a:srgbClr val="FFFFFF"/>
+            </a:solidFill>
+          </a:ln>
+        </p:spPr>
+        <p:txBody>
+          <a:bodyPr/>
+          <a:lstStyle/>
+          <a:p>
+            <a:endParaRPr lang="th-TH"/>
+          </a:p>
+        </p:txBody>
+      </p:sp>
+      <p:sp>
+        <p:nvSpPr>
+          <p:cNvPr id="41" name="Milestone 7 Label"/>
+          <p:cNvSpPr/>
+          <p:nvPr/>
+        </p:nvSpPr>
+        <p:spPr>
+          <a:xfrm>
+            <a:off x="9789922" y="4389120"/>
+            <a:ext cx="1463040" cy="388620"/>
+          </a:xfrm>
+          <a:prstGeom prst="rect">
+            <a:avLst/>
+          </a:prstGeom>
+          <a:noFill/>
+          <a:ln>
+            <a:noFill/>
+          </a:ln>
+        </p:spPr>
+        <p:txBody>
+          <a:bodyPr wrap="square" anchor="ctr" lIns="0" tIns="0" rIns="0" bIns="0" rtlCol="0"/>
+          <a:lstStyle/>
+          <a:p>
+            <a:pPr algn="l" marL="0" indent="0">
+              <a:lnSpc>
+                <a:spcPct val="100000"/>
+              </a:lnSpc>
+              <a:buNone/>
+            </a:pPr>
+            <a:r>
+              <a:rPr lang="th-TH" sz="1000" dirty="0">
+                <a:solidFill>
+                  <a:srgbClr val="5F5F5F"/>
+                </a:solidFill>
+                <a:latin typeface="+mn-lt"/>
+                <a:ea typeface="+mn-ea"/>
+                <a:cs typeface="+mn-cs"/>
+              </a:rPr>
+              <a:t>ตรวจรับงวด 3</a:t>
             </a:r>
           </a:p>
         </p:txBody>
@@ -27765,19 +28905,19 @@
             <a:pPr/>
             <a:r>
               <a:rPr lang="th-TH" dirty="0"/>
-              <a:t>5. Implementation Stage</a:t>
-            </a:r>
-          </a:p>
-        </p:txBody>
-      </p:sp>
-      <p:sp>
-        <p:nvSpPr>
-          <p:cNvPr id="3" name="KAL"/>
-          <p:cNvSpPr>
-            <a:spLocks noGrp="1"/>
-          </p:cNvSpPr>
-          <p:nvPr>
-            <p:ph type="body" idx="1"/>
+              <a:t>ครึ่งหนึ่งของงบ 4.8 ล้านบาท คือค่าพัฒนาระบบ</a:t>
+            </a:r>
+          </a:p>
+        </p:txBody>
+      </p:sp>
+      <p:sp>
+        <p:nvSpPr>
+          <p:cNvPr id="3" name="Total"/>
+          <p:cNvSpPr>
+            <a:spLocks noGrp="1"/>
+          </p:cNvSpPr>
+          <p:nvPr>
+            <p:ph type="body" idx="2"/>
           </p:nvPr>
         </p:nvSpPr>
         <p:spPr/>
@@ -27788,19 +28928,19 @@
             <a:pPr/>
             <a:r>
               <a:rPr lang="th-TH" dirty="0"/>
-              <a:t>Key Activity :</a:t>
-            </a:r>
-          </a:p>
-        </p:txBody>
-      </p:sp>
-      <p:sp>
-        <p:nvSpPr>
-          <p:cNvPr id="4" name="KAV"/>
-          <p:cNvSpPr>
-            <a:spLocks noGrp="1"/>
-          </p:cNvSpPr>
-          <p:nvPr>
-            <p:ph type="body" idx="2"/>
+              <a:t>4.8 ล้านบาท</a:t>
+            </a:r>
+          </a:p>
+        </p:txBody>
+      </p:sp>
+      <p:sp>
+        <p:nvSpPr>
+          <p:cNvPr id="4" name="TotalL"/>
+          <p:cNvSpPr>
+            <a:spLocks noGrp="1"/>
+          </p:cNvSpPr>
+          <p:nvPr>
+            <p:ph type="body" idx="3"/>
           </p:nvPr>
         </p:nvSpPr>
         <p:spPr/>
@@ -27811,19 +28951,19 @@
             <a:pPr/>
             <a:r>
               <a:rPr lang="th-TH" dirty="0"/>
-              <a:t>ตั้งค่าสภาพแวดล้อม ติดตั้งฮาร์ดแวร์และซอฟต์แวร์</a:t>
-            </a:r>
-          </a:p>
-        </p:txBody>
-      </p:sp>
-      <p:sp>
-        <p:nvSpPr>
-          <p:cNvPr id="5" name="PL"/>
-          <p:cNvSpPr>
-            <a:spLocks noGrp="1"/>
-          </p:cNvSpPr>
-          <p:nvPr>
-            <p:ph type="body" idx="3"/>
+              <a:t>งบโครงการรวมทั้งสิ้น</a:t>
+            </a:r>
+          </a:p>
+        </p:txBody>
+      </p:sp>
+      <p:sp>
+        <p:nvSpPr>
+          <p:cNvPr id="5" name="Intro"/>
+          <p:cNvSpPr>
+            <a:spLocks noGrp="1"/>
+          </p:cNvSpPr>
+          <p:nvPr>
+            <p:ph type="body" idx="4"/>
           </p:nvPr>
         </p:nvSpPr>
         <p:spPr/>
@@ -27834,19 +28974,39 @@
             <a:pPr/>
             <a:r>
               <a:rPr lang="th-TH" dirty="0"/>
-              <a:t>Participant :</a:t>
-            </a:r>
-          </a:p>
-        </p:txBody>
-      </p:sp>
-      <p:sp>
-        <p:nvSpPr>
-          <p:cNvPr id="6" name="PV"/>
-          <p:cNvSpPr>
-            <a:spLocks noGrp="1"/>
-          </p:cNvSpPr>
-          <p:nvPr>
-            <p:ph type="body" idx="4"/>
+              <a:t>รวมภาษีมูลค่าเพิ่ม · สัญญา 12 เดือน ไม่รวมค่าบริการรายเดือนหลังปีแรก</a:t>
+            </a:r>
+          </a:p>
+        </p:txBody>
+      </p:sp>
+      <p:graphicFrame>
+        <p:nvGraphicFramePr>
+          <p:cNvPr id="6" name="Composition"/>
+          <p:cNvGraphicFramePr>
+            <a:graphicFrameLocks noGrp="1"/>
+          </p:cNvGraphicFramePr>
+          <p:nvPr>
+            <p:ph type="chart" idx="1"/>
+          </p:nvPr>
+        </p:nvGraphicFramePr>
+        <p:xfrm>
+          <a:off x="2697480" y="3703320"/>
+          <a:ext cx="7299960" cy="1371600"/>
+        </p:xfrm>
+        <a:graphic>
+          <a:graphicData uri="http://schemas.openxmlformats.org/drawingml/2006/chart">
+            <c:chart xmlns:c="http://schemas.openxmlformats.org/drawingml/2006/chart" r:id="rId2"/>
+          </a:graphicData>
+        </a:graphic>
+      </p:graphicFrame>
+      <p:sp>
+        <p:nvSpPr>
+          <p:cNvPr id="7" name="B1"/>
+          <p:cNvSpPr>
+            <a:spLocks noGrp="1"/>
+          </p:cNvSpPr>
+          <p:nvPr>
+            <p:ph type="body" idx="20"/>
           </p:nvPr>
         </p:nvSpPr>
         <p:spPr/>
@@ -27857,14 +29017,290 @@
             <a:pPr/>
             <a:r>
               <a:rPr lang="th-TH" dirty="0"/>
-              <a:t>NCT Infra Engineer, ทีมไอทีลูกค้า, Business Analyst</a:t>
-            </a:r>
-          </a:p>
-        </p:txBody>
-      </p:sp>
-      <p:sp>
-        <p:nvSpPr>
-          <p:cNvPr id="7" name="PN"/>
+              <a:t>งบโครงการ</a:t>
+            </a:r>
+          </a:p>
+        </p:txBody>
+      </p:sp>
+      <p:sp>
+        <p:nvSpPr>
+          <p:cNvPr id="8" name="SN"/>
+          <p:cNvSpPr>
+            <a:spLocks noGrp="1"/>
+          </p:cNvSpPr>
+          <p:nvPr>
+            <p:ph type="body" idx="26"/>
+          </p:nvPr>
+        </p:nvSpPr>
+        <p:spPr/>
+        <p:txBody>
+          <a:bodyPr/>
+          <a:lstStyle/>
+          <a:p>
+            <a:pPr/>
+            <a:r>
+              <a:rPr lang="th-TH" dirty="0"/>
+              <a:t>พัฒนาและตั้งค่าระบบ</a:t>
+            </a:r>
+          </a:p>
+        </p:txBody>
+      </p:sp>
+      <p:sp>
+        <p:nvSpPr>
+          <p:cNvPr id="9" name="SV"/>
+          <p:cNvSpPr>
+            <a:spLocks noGrp="1"/>
+          </p:cNvSpPr>
+          <p:nvPr>
+            <p:ph type="body" idx="27"/>
+          </p:nvPr>
+        </p:nvSpPr>
+        <p:spPr/>
+        <p:txBody>
+          <a:bodyPr/>
+          <a:lstStyle/>
+          <a:p>
+            <a:pPr/>
+            <a:r>
+              <a:rPr lang="th-TH" dirty="0"/>
+              <a:t>2.4 ล้านบาท</a:t>
+            </a:r>
+          </a:p>
+        </p:txBody>
+      </p:sp>
+      <p:sp>
+        <p:nvSpPr>
+          <p:cNvPr id="10" name="SP"/>
+          <p:cNvSpPr>
+            <a:spLocks noGrp="1"/>
+          </p:cNvSpPr>
+          <p:nvPr>
+            <p:ph type="body" idx="28"/>
+          </p:nvPr>
+        </p:nvSpPr>
+        <p:spPr/>
+        <p:txBody>
+          <a:bodyPr/>
+          <a:lstStyle/>
+          <a:p>
+            <a:pPr/>
+            <a:r>
+              <a:rPr lang="th-TH" dirty="0"/>
+              <a:t>50%</a:t>
+            </a:r>
+          </a:p>
+        </p:txBody>
+      </p:sp>
+      <p:sp>
+        <p:nvSpPr>
+          <p:cNvPr id="11" name="SN"/>
+          <p:cNvSpPr>
+            <a:spLocks noGrp="1"/>
+          </p:cNvSpPr>
+          <p:nvPr>
+            <p:ph type="body" idx="29"/>
+          </p:nvPr>
+        </p:nvSpPr>
+        <p:spPr/>
+        <p:txBody>
+          <a:bodyPr/>
+          <a:lstStyle/>
+          <a:p>
+            <a:pPr/>
+            <a:r>
+              <a:rPr lang="th-TH" dirty="0"/>
+              <a:t>ไลเซนส์ซอฟต์แวร์</a:t>
+            </a:r>
+          </a:p>
+        </p:txBody>
+      </p:sp>
+      <p:sp>
+        <p:nvSpPr>
+          <p:cNvPr id="12" name="SV"/>
+          <p:cNvSpPr>
+            <a:spLocks noGrp="1"/>
+          </p:cNvSpPr>
+          <p:nvPr>
+            <p:ph type="body" idx="30"/>
+          </p:nvPr>
+        </p:nvSpPr>
+        <p:spPr/>
+        <p:txBody>
+          <a:bodyPr/>
+          <a:lstStyle/>
+          <a:p>
+            <a:pPr/>
+            <a:r>
+              <a:rPr lang="th-TH" dirty="0"/>
+              <a:t>1.2 ล้านบาท</a:t>
+            </a:r>
+          </a:p>
+        </p:txBody>
+      </p:sp>
+      <p:sp>
+        <p:nvSpPr>
+          <p:cNvPr id="13" name="SP"/>
+          <p:cNvSpPr>
+            <a:spLocks noGrp="1"/>
+          </p:cNvSpPr>
+          <p:nvPr>
+            <p:ph type="body" idx="31"/>
+          </p:nvPr>
+        </p:nvSpPr>
+        <p:spPr/>
+        <p:txBody>
+          <a:bodyPr/>
+          <a:lstStyle/>
+          <a:p>
+            <a:pPr/>
+            <a:r>
+              <a:rPr lang="th-TH" dirty="0"/>
+              <a:t>25%</a:t>
+            </a:r>
+          </a:p>
+        </p:txBody>
+      </p:sp>
+      <p:sp>
+        <p:nvSpPr>
+          <p:cNvPr id="14" name="SN"/>
+          <p:cNvSpPr>
+            <a:spLocks noGrp="1"/>
+          </p:cNvSpPr>
+          <p:nvPr>
+            <p:ph type="body" idx="32"/>
+          </p:nvPr>
+        </p:nvSpPr>
+        <p:spPr/>
+        <p:txBody>
+          <a:bodyPr/>
+          <a:lstStyle/>
+          <a:p>
+            <a:pPr/>
+            <a:r>
+              <a:rPr lang="th-TH" dirty="0"/>
+              <a:t>คลาวด์ปีแรก</a:t>
+            </a:r>
+          </a:p>
+        </p:txBody>
+      </p:sp>
+      <p:sp>
+        <p:nvSpPr>
+          <p:cNvPr id="15" name="SV"/>
+          <p:cNvSpPr>
+            <a:spLocks noGrp="1"/>
+          </p:cNvSpPr>
+          <p:nvPr>
+            <p:ph type="body" idx="33"/>
+          </p:nvPr>
+        </p:nvSpPr>
+        <p:spPr/>
+        <p:txBody>
+          <a:bodyPr/>
+          <a:lstStyle/>
+          <a:p>
+            <a:pPr/>
+            <a:r>
+              <a:rPr lang="th-TH" dirty="0"/>
+              <a:t>0.7 ล้านบาท</a:t>
+            </a:r>
+          </a:p>
+        </p:txBody>
+      </p:sp>
+      <p:sp>
+        <p:nvSpPr>
+          <p:cNvPr id="16" name="SP"/>
+          <p:cNvSpPr>
+            <a:spLocks noGrp="1"/>
+          </p:cNvSpPr>
+          <p:nvPr>
+            <p:ph type="body" idx="34"/>
+          </p:nvPr>
+        </p:nvSpPr>
+        <p:spPr/>
+        <p:txBody>
+          <a:bodyPr/>
+          <a:lstStyle/>
+          <a:p>
+            <a:pPr/>
+            <a:r>
+              <a:rPr lang="th-TH" dirty="0"/>
+              <a:t>15%</a:t>
+            </a:r>
+          </a:p>
+        </p:txBody>
+      </p:sp>
+      <p:sp>
+        <p:nvSpPr>
+          <p:cNvPr id="17" name="SN"/>
+          <p:cNvSpPr>
+            <a:spLocks noGrp="1"/>
+          </p:cNvSpPr>
+          <p:nvPr>
+            <p:ph type="body" idx="35"/>
+          </p:nvPr>
+        </p:nvSpPr>
+        <p:spPr/>
+        <p:txBody>
+          <a:bodyPr/>
+          <a:lstStyle/>
+          <a:p>
+            <a:pPr/>
+            <a:r>
+              <a:rPr lang="th-TH" dirty="0"/>
+              <a:t>อื่น ๆ</a:t>
+            </a:r>
+          </a:p>
+        </p:txBody>
+      </p:sp>
+      <p:sp>
+        <p:nvSpPr>
+          <p:cNvPr id="18" name="SV"/>
+          <p:cNvSpPr>
+            <a:spLocks noGrp="1"/>
+          </p:cNvSpPr>
+          <p:nvPr>
+            <p:ph type="body" idx="36"/>
+          </p:nvPr>
+        </p:nvSpPr>
+        <p:spPr/>
+        <p:txBody>
+          <a:bodyPr/>
+          <a:lstStyle/>
+          <a:p>
+            <a:pPr/>
+            <a:r>
+              <a:rPr lang="th-TH" dirty="0"/>
+              <a:t>0.5 ล้านบาท</a:t>
+            </a:r>
+          </a:p>
+        </p:txBody>
+      </p:sp>
+      <p:sp>
+        <p:nvSpPr>
+          <p:cNvPr id="19" name="SP"/>
+          <p:cNvSpPr>
+            <a:spLocks noGrp="1"/>
+          </p:cNvSpPr>
+          <p:nvPr>
+            <p:ph type="body" idx="37"/>
+          </p:nvPr>
+        </p:nvSpPr>
+        <p:spPr/>
+        <p:txBody>
+          <a:bodyPr/>
+          <a:lstStyle/>
+          <a:p>
+            <a:pPr/>
+            <a:r>
+              <a:rPr lang="th-TH" dirty="0"/>
+              <a:t>10%</a:t>
+            </a:r>
+          </a:p>
+        </p:txBody>
+      </p:sp>
+      <p:sp>
+        <p:nvSpPr>
+          <p:cNvPr id="20" name="Src"/>
           <p:cNvSpPr>
             <a:spLocks noGrp="1"/>
           </p:cNvSpPr>
@@ -27880,14 +29316,14 @@
             <a:pPr/>
             <a:r>
               <a:rPr lang="th-TH" dirty="0"/>
-              <a:t>01</a:t>
-            </a:r>
-          </a:p>
-        </p:txBody>
-      </p:sp>
-      <p:sp>
-        <p:nvSpPr>
-          <p:cNvPr id="8" name="PP"/>
+              <a:t>ใบเสนอราคา NCT-2569-041 · ปัดเป็นแสนบาท</a:t>
+            </a:r>
+          </a:p>
+        </p:txBody>
+      </p:sp>
+      <p:sp>
+        <p:nvSpPr>
+          <p:cNvPr id="21" name="TL"/>
           <p:cNvSpPr>
             <a:spLocks noGrp="1"/>
           </p:cNvSpPr>
@@ -27903,14 +29339,14 @@
             <a:pPr/>
             <a:r>
               <a:rPr lang="th-TH" dirty="0"/>
-              <a:t>Preparation Phase</a:t>
-            </a:r>
-          </a:p>
-        </p:txBody>
-      </p:sp>
-      <p:sp>
-        <p:nvSpPr>
-          <p:cNvPr id="9" name="PI"/>
+              <a:t>สรุป</a:t>
+            </a:r>
+          </a:p>
+        </p:txBody>
+      </p:sp>
+      <p:sp>
+        <p:nvSpPr>
+          <p:cNvPr id="22" name="TC"/>
           <p:cNvSpPr>
             <a:spLocks noGrp="1"/>
           </p:cNvSpPr>
@@ -27926,51 +29362,7 @@
             <a:pPr/>
             <a:r>
               <a:rPr lang="th-TH" dirty="0"/>
-              <a:t>สรุปสเปกเครื่องและบริการคลาวด์ที่ต้องเตรียมให้พร้อมก่อนเริ่มงานพัฒนา</a:t>
-            </a:r>
-          </a:p>
-        </p:txBody>
-      </p:sp>
-      <p:sp>
-        <p:nvSpPr>
-          <p:cNvPr id="10" name="PB"/>
-          <p:cNvSpPr>
-            <a:spLocks noGrp="1"/>
-          </p:cNvSpPr>
-          <p:nvPr>
-            <p:ph type="body" idx="8"/>
-          </p:nvPr>
-        </p:nvSpPr>
-        <p:spPr/>
-        <p:txBody>
-          <a:bodyPr/>
-          <a:lstStyle/>
-          <a:p>
-            <a:pPr/>
-            <a:r>
-              <a:rPr lang="th-TH" dirty="0"/>
-              <a:t>PRD · 4 คอร์ / 16GB / SSD 300GB</a:t>
-            </a:r>
-          </a:p>
-          <a:p>
-            <a:pPr/>
-            <a:r>
-              <a:rPr lang="th-TH" dirty="0"/>
-              <a:t>QA · 4 คอร์ / 16GB / SSD 150GB</a:t>
-            </a:r>
-          </a:p>
-          <a:p>
-            <a:pPr/>
-            <a:r>
-              <a:rPr lang="th-TH" dirty="0"/>
-              <a:t>Windows Server 2022 ทั้งสองเครื่อง</a:t>
-            </a:r>
-          </a:p>
-          <a:p>
-            <a:pPr/>
-            <a:r>
-              <a:rPr lang="th-TH" dirty="0"/>
-              <a:t>Lambda, EC2 และ Cognito เปิดทั้งสองสภาพแวดล้อม</a:t>
+              <a:t>ไลเซนส์กับคลาวด์รวมกันไม่ถึง 40% งบส่วนใหญ่จ่ายให้งานที่ทำครั้งเดียว</a:t>
             </a:r>
           </a:p>
         </p:txBody>
@@ -27984,6 +29376,259 @@
 </file>
 
 <file path=ppt/slides/slide21.xml><?xml version="1.0" encoding="utf-8"?>
+<p:sld xmlns:a="http://schemas.openxmlformats.org/drawingml/2006/main" xmlns:r="http://schemas.openxmlformats.org/officeDocument/2006/relationships" xmlns:p="http://schemas.openxmlformats.org/presentationml/2006/main">
+  <p:cSld name="">
+    <p:spTree>
+      <p:nvGrpSpPr>
+        <p:cNvPr id="1" name=""/>
+        <p:cNvGrpSpPr/>
+        <p:nvPr/>
+      </p:nvGrpSpPr>
+      <p:grpSpPr>
+        <a:xfrm>
+          <a:off x="0" y="0"/>
+          <a:ext cx="0" cy="0"/>
+          <a:chOff x="0" y="0"/>
+          <a:chExt cx="0" cy="0"/>
+        </a:xfrm>
+      </p:grpSpPr>
+      <p:sp>
+        <p:nvSpPr>
+          <p:cNvPr id="2" name="Title"/>
+          <p:cNvSpPr>
+            <a:spLocks noGrp="1"/>
+          </p:cNvSpPr>
+          <p:nvPr>
+            <p:ph type="title"/>
+          </p:nvPr>
+        </p:nvSpPr>
+        <p:spPr/>
+        <p:txBody>
+          <a:bodyPr/>
+          <a:lstStyle/>
+          <a:p>
+            <a:pPr/>
+            <a:r>
+              <a:rPr lang="th-TH" dirty="0"/>
+              <a:t>5. Implementation Stage</a:t>
+            </a:r>
+          </a:p>
+        </p:txBody>
+      </p:sp>
+      <p:sp>
+        <p:nvSpPr>
+          <p:cNvPr id="3" name="KAL"/>
+          <p:cNvSpPr>
+            <a:spLocks noGrp="1"/>
+          </p:cNvSpPr>
+          <p:nvPr>
+            <p:ph type="body" idx="1"/>
+          </p:nvPr>
+        </p:nvSpPr>
+        <p:spPr/>
+        <p:txBody>
+          <a:bodyPr/>
+          <a:lstStyle/>
+          <a:p>
+            <a:pPr/>
+            <a:r>
+              <a:rPr lang="th-TH" dirty="0"/>
+              <a:t>Key Activity :</a:t>
+            </a:r>
+          </a:p>
+        </p:txBody>
+      </p:sp>
+      <p:sp>
+        <p:nvSpPr>
+          <p:cNvPr id="4" name="KAV"/>
+          <p:cNvSpPr>
+            <a:spLocks noGrp="1"/>
+          </p:cNvSpPr>
+          <p:nvPr>
+            <p:ph type="body" idx="2"/>
+          </p:nvPr>
+        </p:nvSpPr>
+        <p:spPr/>
+        <p:txBody>
+          <a:bodyPr/>
+          <a:lstStyle/>
+          <a:p>
+            <a:pPr/>
+            <a:r>
+              <a:rPr lang="th-TH" dirty="0"/>
+              <a:t>ตั้งค่าสภาพแวดล้อม ติดตั้งฮาร์ดแวร์และซอฟต์แวร์</a:t>
+            </a:r>
+          </a:p>
+        </p:txBody>
+      </p:sp>
+      <p:sp>
+        <p:nvSpPr>
+          <p:cNvPr id="5" name="PL"/>
+          <p:cNvSpPr>
+            <a:spLocks noGrp="1"/>
+          </p:cNvSpPr>
+          <p:nvPr>
+            <p:ph type="body" idx="3"/>
+          </p:nvPr>
+        </p:nvSpPr>
+        <p:spPr/>
+        <p:txBody>
+          <a:bodyPr/>
+          <a:lstStyle/>
+          <a:p>
+            <a:pPr/>
+            <a:r>
+              <a:rPr lang="th-TH" dirty="0"/>
+              <a:t>Participant :</a:t>
+            </a:r>
+          </a:p>
+        </p:txBody>
+      </p:sp>
+      <p:sp>
+        <p:nvSpPr>
+          <p:cNvPr id="6" name="PV"/>
+          <p:cNvSpPr>
+            <a:spLocks noGrp="1"/>
+          </p:cNvSpPr>
+          <p:nvPr>
+            <p:ph type="body" idx="4"/>
+          </p:nvPr>
+        </p:nvSpPr>
+        <p:spPr/>
+        <p:txBody>
+          <a:bodyPr/>
+          <a:lstStyle/>
+          <a:p>
+            <a:pPr/>
+            <a:r>
+              <a:rPr lang="th-TH" dirty="0"/>
+              <a:t>NCT Infra Engineer, ทีมไอทีลูกค้า, Business Analyst</a:t>
+            </a:r>
+          </a:p>
+        </p:txBody>
+      </p:sp>
+      <p:sp>
+        <p:nvSpPr>
+          <p:cNvPr id="7" name="PN"/>
+          <p:cNvSpPr>
+            <a:spLocks noGrp="1"/>
+          </p:cNvSpPr>
+          <p:nvPr>
+            <p:ph type="body" idx="5"/>
+          </p:nvPr>
+        </p:nvSpPr>
+        <p:spPr/>
+        <p:txBody>
+          <a:bodyPr/>
+          <a:lstStyle/>
+          <a:p>
+            <a:pPr/>
+            <a:r>
+              <a:rPr lang="th-TH" dirty="0"/>
+              <a:t>01</a:t>
+            </a:r>
+          </a:p>
+        </p:txBody>
+      </p:sp>
+      <p:sp>
+        <p:nvSpPr>
+          <p:cNvPr id="8" name="PP"/>
+          <p:cNvSpPr>
+            <a:spLocks noGrp="1"/>
+          </p:cNvSpPr>
+          <p:nvPr>
+            <p:ph type="body" idx="6"/>
+          </p:nvPr>
+        </p:nvSpPr>
+        <p:spPr/>
+        <p:txBody>
+          <a:bodyPr/>
+          <a:lstStyle/>
+          <a:p>
+            <a:pPr/>
+            <a:r>
+              <a:rPr lang="th-TH" dirty="0"/>
+              <a:t>Preparation Phase</a:t>
+            </a:r>
+          </a:p>
+        </p:txBody>
+      </p:sp>
+      <p:sp>
+        <p:nvSpPr>
+          <p:cNvPr id="9" name="PI"/>
+          <p:cNvSpPr>
+            <a:spLocks noGrp="1"/>
+          </p:cNvSpPr>
+          <p:nvPr>
+            <p:ph type="body" idx="7"/>
+          </p:nvPr>
+        </p:nvSpPr>
+        <p:spPr/>
+        <p:txBody>
+          <a:bodyPr/>
+          <a:lstStyle/>
+          <a:p>
+            <a:pPr/>
+            <a:r>
+              <a:rPr lang="th-TH" dirty="0"/>
+              <a:t>สรุปสเปกเครื่องและบริการคลาวด์ที่ต้องเตรียมให้พร้อมก่อนเริ่มงานพัฒนา</a:t>
+            </a:r>
+          </a:p>
+        </p:txBody>
+      </p:sp>
+      <p:sp>
+        <p:nvSpPr>
+          <p:cNvPr id="10" name="PB"/>
+          <p:cNvSpPr>
+            <a:spLocks noGrp="1"/>
+          </p:cNvSpPr>
+          <p:nvPr>
+            <p:ph type="body" idx="8"/>
+          </p:nvPr>
+        </p:nvSpPr>
+        <p:spPr/>
+        <p:txBody>
+          <a:bodyPr/>
+          <a:lstStyle/>
+          <a:p>
+            <a:pPr/>
+            <a:r>
+              <a:rPr lang="th-TH" dirty="0"/>
+              <a:t>PRD · 4 คอร์ / 16GB / SSD 300GB</a:t>
+            </a:r>
+          </a:p>
+          <a:p>
+            <a:pPr/>
+            <a:r>
+              <a:rPr lang="th-TH" dirty="0"/>
+              <a:t>QA · 4 คอร์ / 16GB / SSD 150GB</a:t>
+            </a:r>
+          </a:p>
+          <a:p>
+            <a:pPr/>
+            <a:r>
+              <a:rPr lang="th-TH" dirty="0"/>
+              <a:t>Windows Server 2022 ทั้งสองเครื่อง</a:t>
+            </a:r>
+          </a:p>
+          <a:p>
+            <a:pPr/>
+            <a:r>
+              <a:rPr lang="th-TH" dirty="0"/>
+              <a:t>Lambda, EC2 และ Cognito เปิดทั้งสองสภาพแวดล้อม</a:t>
+            </a:r>
+          </a:p>
+        </p:txBody>
+      </p:sp>
+    </p:spTree>
+  </p:cSld>
+  <p:clrMapOvr>
+    <a:masterClrMapping/>
+  </p:clrMapOvr>
+</p:sld>
+</file>
+
+<file path=ppt/slides/slide22.xml><?xml version="1.0" encoding="utf-8"?>
 <p:sld xmlns:a="http://schemas.openxmlformats.org/drawingml/2006/main" xmlns:r="http://schemas.openxmlformats.org/officeDocument/2006/relationships" xmlns:p="http://schemas.openxmlformats.org/presentationml/2006/main">
   <p:cSld name="">
     <p:spTree>
@@ -28469,7 +30114,7 @@
 </p:sld>
 </file>
 
-<file path=ppt/slides/slide22.xml><?xml version="1.0" encoding="utf-8"?>
+<file path=ppt/slides/slide23.xml><?xml version="1.0" encoding="utf-8"?>
 <p:sld xmlns:a="http://schemas.openxmlformats.org/drawingml/2006/main" xmlns:r="http://schemas.openxmlformats.org/officeDocument/2006/relationships" xmlns:p="http://schemas.openxmlformats.org/presentationml/2006/main">
   <p:cSld name="">
     <p:spTree>
@@ -29343,14 +30988,288 @@
             <a:pPr/>
             <a:r>
               <a:rPr lang="th-TH" dirty="0"/>
-              <a:t>ก่อนและหลังใช้บริการ</a:t>
-            </a:r>
-          </a:p>
-        </p:txBody>
-      </p:sp>
-      <p:sp>
-        <p:nvSpPr>
-          <p:cNvPr id="3" name="LH"/>
+              <a:t>เอกสารเกินกำลังคีย์ 1,200 ใบครั้งแรกเดือน พ.ค.</a:t>
+            </a:r>
+          </a:p>
+        </p:txBody>
+      </p:sp>
+      <p:sp>
+        <p:nvSpPr>
+          <p:cNvPr id="3" name="TL0"/>
+          <p:cNvSpPr>
+            <a:spLocks noGrp="1"/>
+          </p:cNvSpPr>
+          <p:nvPr>
+            <p:ph type="body" idx="20"/>
+          </p:nvPr>
+        </p:nvSpPr>
+        <p:spPr/>
+        <p:txBody>
+          <a:bodyPr/>
+          <a:lstStyle/>
+          <a:p>
+            <a:pPr/>
+            <a:r>
+              <a:rPr lang="th-TH" dirty="0"/>
+              <a:t>เอกสารเข้า มิ.ย.</a:t>
+            </a:r>
+          </a:p>
+        </p:txBody>
+      </p:sp>
+      <p:sp>
+        <p:nvSpPr>
+          <p:cNvPr id="4" name="TV0"/>
+          <p:cNvSpPr>
+            <a:spLocks noGrp="1"/>
+          </p:cNvSpPr>
+          <p:nvPr>
+            <p:ph type="body" idx="21"/>
+          </p:nvPr>
+        </p:nvSpPr>
+        <p:spPr/>
+        <p:txBody>
+          <a:bodyPr/>
+          <a:lstStyle/>
+          <a:p>
+            <a:pPr/>
+            <a:r>
+              <a:rPr lang="th-TH" dirty="0"/>
+              <a:t>1,150 ใบ</a:t>
+            </a:r>
+          </a:p>
+        </p:txBody>
+      </p:sp>
+      <p:sp>
+        <p:nvSpPr>
+          <p:cNvPr id="5" name="TD0"/>
+          <p:cNvSpPr>
+            <a:spLocks noGrp="1"/>
+          </p:cNvSpPr>
+          <p:nvPr>
+            <p:ph type="body" idx="22"/>
+          </p:nvPr>
+        </p:nvSpPr>
+        <p:spPr/>
+        <p:txBody>
+          <a:bodyPr/>
+          <a:lstStyle/>
+          <a:p>
+            <a:pPr/>
+            <a:r>
+              <a:rPr lang="th-TH" dirty="0">
+                <a:solidFill>
+                  <a:srgbClr val="B3261E"/>
+                </a:solidFill>
+              </a:rPr>
+              <a:t>▲ </a:t>
+            </a:r>
+            <a:r>
+              <a:rPr lang="th-TH" dirty="0"/>
+              <a:t>15% จาก ม.ค.</a:t>
+            </a:r>
+          </a:p>
+        </p:txBody>
+      </p:sp>
+      <p:sp>
+        <p:nvSpPr>
+          <p:cNvPr id="6" name="TL1"/>
+          <p:cNvSpPr>
+            <a:spLocks noGrp="1"/>
+          </p:cNvSpPr>
+          <p:nvPr>
+            <p:ph type="body" idx="23"/>
+          </p:nvPr>
+        </p:nvSpPr>
+        <p:spPr/>
+        <p:txBody>
+          <a:bodyPr/>
+          <a:lstStyle/>
+          <a:p>
+            <a:pPr/>
+            <a:r>
+              <a:rPr lang="th-TH" dirty="0"/>
+              <a:t>เวลาคีย์ต่อใบ</a:t>
+            </a:r>
+          </a:p>
+        </p:txBody>
+      </p:sp>
+      <p:sp>
+        <p:nvSpPr>
+          <p:cNvPr id="7" name="TV1"/>
+          <p:cNvSpPr>
+            <a:spLocks noGrp="1"/>
+          </p:cNvSpPr>
+          <p:nvPr>
+            <p:ph type="body" idx="24"/>
+          </p:nvPr>
+        </p:nvSpPr>
+        <p:spPr/>
+        <p:txBody>
+          <a:bodyPr/>
+          <a:lstStyle/>
+          <a:p>
+            <a:pPr/>
+            <a:r>
+              <a:rPr lang="th-TH" dirty="0"/>
+              <a:t>4 นาที</a:t>
+            </a:r>
+          </a:p>
+        </p:txBody>
+      </p:sp>
+      <p:sp>
+        <p:nvSpPr>
+          <p:cNvPr id="8" name="TD1"/>
+          <p:cNvSpPr>
+            <a:spLocks noGrp="1"/>
+          </p:cNvSpPr>
+          <p:nvPr>
+            <p:ph type="body" idx="25"/>
+          </p:nvPr>
+        </p:nvSpPr>
+        <p:spPr/>
+        <p:txBody>
+          <a:bodyPr/>
+          <a:lstStyle/>
+          <a:p>
+            <a:pPr/>
+            <a:r>
+              <a:rPr lang="th-TH" dirty="0">
+                <a:solidFill>
+                  <a:srgbClr val="1A6647"/>
+                </a:solidFill>
+              </a:rPr>
+              <a:t>▼ </a:t>
+            </a:r>
+            <a:r>
+              <a:rPr lang="th-TH" dirty="0"/>
+              <a:t>0.5 นาที จากปีก่อน</a:t>
+            </a:r>
+          </a:p>
+        </p:txBody>
+      </p:sp>
+      <p:sp>
+        <p:nvSpPr>
+          <p:cNvPr id="9" name="TL2"/>
+          <p:cNvSpPr>
+            <a:spLocks noGrp="1"/>
+          </p:cNvSpPr>
+          <p:nvPr>
+            <p:ph type="body" idx="26"/>
+          </p:nvPr>
+        </p:nvSpPr>
+        <p:spPr/>
+        <p:txBody>
+          <a:bodyPr/>
+          <a:lstStyle/>
+          <a:p>
+            <a:pPr/>
+            <a:r>
+              <a:rPr lang="th-TH" dirty="0"/>
+              <a:t>ชั่วโมงคีย์ต่อเดือน</a:t>
+            </a:r>
+          </a:p>
+        </p:txBody>
+      </p:sp>
+      <p:sp>
+        <p:nvSpPr>
+          <p:cNvPr id="10" name="TV2"/>
+          <p:cNvSpPr>
+            <a:spLocks noGrp="1"/>
+          </p:cNvSpPr>
+          <p:nvPr>
+            <p:ph type="body" idx="27"/>
+          </p:nvPr>
+        </p:nvSpPr>
+        <p:spPr/>
+        <p:txBody>
+          <a:bodyPr/>
+          <a:lstStyle/>
+          <a:p>
+            <a:pPr/>
+            <a:r>
+              <a:rPr lang="th-TH" dirty="0"/>
+              <a:t>77 ชม.</a:t>
+            </a:r>
+          </a:p>
+        </p:txBody>
+      </p:sp>
+      <p:sp>
+        <p:nvSpPr>
+          <p:cNvPr id="11" name="TD2"/>
+          <p:cNvSpPr>
+            <a:spLocks noGrp="1"/>
+          </p:cNvSpPr>
+          <p:nvPr>
+            <p:ph type="body" idx="28"/>
+          </p:nvPr>
+        </p:nvSpPr>
+        <p:spPr/>
+        <p:txBody>
+          <a:bodyPr/>
+          <a:lstStyle/>
+          <a:p>
+            <a:pPr/>
+            <a:r>
+              <a:rPr lang="th-TH" dirty="0">
+                <a:solidFill>
+                  <a:srgbClr val="B3261E"/>
+                </a:solidFill>
+              </a:rPr>
+              <a:t>▲ </a:t>
+            </a:r>
+            <a:r>
+              <a:rPr lang="th-TH" dirty="0"/>
+              <a:t>10 ชม. จาก ม.ค.</a:t>
+            </a:r>
+          </a:p>
+        </p:txBody>
+      </p:sp>
+      <p:graphicFrame>
+        <p:nvGraphicFramePr>
+          <p:cNvPr id="12" name="Trend"/>
+          <p:cNvGraphicFramePr>
+            <a:graphicFrameLocks noGrp="1"/>
+          </p:cNvGraphicFramePr>
+          <p:nvPr>
+            <p:ph type="chart" idx="1"/>
+          </p:nvPr>
+        </p:nvGraphicFramePr>
+        <p:xfrm>
+          <a:off x="914400" y="3291840"/>
+          <a:ext cx="10363200" cy="1874520"/>
+        </p:xfrm>
+        <a:graphic>
+          <a:graphicData uri="http://schemas.openxmlformats.org/drawingml/2006/chart">
+            <c:chart xmlns:c="http://schemas.openxmlformats.org/drawingml/2006/chart" r:id="rId2"/>
+          </a:graphicData>
+        </a:graphic>
+      </p:graphicFrame>
+      <p:sp>
+        <p:nvSpPr>
+          <p:cNvPr id="13" name="Src"/>
+          <p:cNvSpPr>
+            <a:spLocks noGrp="1"/>
+          </p:cNvSpPr>
+          <p:nvPr>
+            <p:ph type="body" idx="2"/>
+          </p:nvPr>
+        </p:nvSpPr>
+        <p:spPr/>
+        <p:txBody>
+          <a:bodyPr/>
+          <a:lstStyle/>
+          <a:p>
+            <a:pPr/>
+            <a:r>
+              <a:rPr lang="th-TH" dirty="0"/>
+              <a:t>ระบบบัญชีของลูกค้า · ม.ค.–มิ.ย. 2569 · หน่วย: ใบต่อเดือน</a:t>
+            </a:r>
+          </a:p>
+        </p:txBody>
+      </p:sp>
+      <p:sp>
+        <p:nvSpPr>
+          <p:cNvPr id="14" name="TkL"/>
           <p:cNvSpPr>
             <a:spLocks noGrp="1"/>
           </p:cNvSpPr>
@@ -29366,19 +31285,19 @@
             <a:pPr/>
             <a:r>
               <a:rPr lang="th-TH" dirty="0"/>
-              <a:t>ก่อน</a:t>
-            </a:r>
-          </a:p>
-        </p:txBody>
-      </p:sp>
-      <p:sp>
-        <p:nvSpPr>
-          <p:cNvPr id="4" name="L"/>
-          <p:cNvSpPr>
-            <a:spLocks noGrp="1"/>
-          </p:cNvSpPr>
-          <p:nvPr>
-            <p:ph type="body" idx="1"/>
+              <a:t>สรุป</a:t>
+            </a:r>
+          </a:p>
+        </p:txBody>
+      </p:sp>
+      <p:sp>
+        <p:nvSpPr>
+          <p:cNvPr id="15" name="TkC"/>
+          <p:cNvSpPr>
+            <a:spLocks noGrp="1"/>
+          </p:cNvSpPr>
+          <p:nvPr>
+            <p:ph type="body" idx="4"/>
           </p:nvPr>
         </p:nvSpPr>
         <p:spPr/>
@@ -29389,67 +31308,7 @@
             <a:pPr/>
             <a:r>
               <a:rPr lang="th-TH" dirty="0"/>
-              <a:t>ระบบล่มบ่อย ไม่มีคนดูแลประจำ</a:t>
-            </a:r>
-          </a:p>
-          <a:p>
-            <a:pPr/>
-            <a:r>
-              <a:rPr lang="th-TH" dirty="0"/>
-              <a:t>ค่าใช้จ่ายไม่แน่นอน</a:t>
-            </a:r>
-          </a:p>
-        </p:txBody>
-      </p:sp>
-      <p:sp>
-        <p:nvSpPr>
-          <p:cNvPr id="5" name="RH"/>
-          <p:cNvSpPr>
-            <a:spLocks noGrp="1"/>
-          </p:cNvSpPr>
-          <p:nvPr>
-            <p:ph type="body" idx="4"/>
-          </p:nvPr>
-        </p:nvSpPr>
-        <p:spPr/>
-        <p:txBody>
-          <a:bodyPr/>
-          <a:lstStyle/>
-          <a:p>
-            <a:pPr/>
-            <a:r>
-              <a:rPr lang="th-TH" dirty="0"/>
-              <a:t>หลัง</a:t>
-            </a:r>
-          </a:p>
-        </p:txBody>
-      </p:sp>
-      <p:sp>
-        <p:nvSpPr>
-          <p:cNvPr id="6" name="R"/>
-          <p:cNvSpPr>
-            <a:spLocks noGrp="1"/>
-          </p:cNvSpPr>
-          <p:nvPr>
-            <p:ph type="body" idx="2"/>
-          </p:nvPr>
-        </p:nvSpPr>
-        <p:spPr/>
-        <p:txBody>
-          <a:bodyPr/>
-          <a:lstStyle/>
-          <a:p>
-            <a:pPr/>
-            <a:r>
-              <a:rPr lang="th-TH" dirty="0"/>
-              <a:t>มอนิเตอร์ 24 ชั่วโมง แจ้งเตือนอัตโนมัติ</a:t>
-            </a:r>
-          </a:p>
-          <a:p>
-            <a:pPr/>
-            <a:r>
-              <a:rPr lang="th-TH" dirty="0"/>
-              <a:t>ค่าใช้จ่ายคงที่ต่อเดือน</a:t>
+              <a:t>เดือนที่เกินกำลังคีย์คือเดือนที่ปิดงบนานสุด ต้องลดงานคีย์ ไม่ใช่เพิ่มคน</a:t>
             </a:r>
           </a:p>
         </p:txBody>
@@ -29497,19 +31356,19 @@
             <a:pPr/>
             <a:r>
               <a:rPr lang="th-TH" dirty="0"/>
-              <a:t>สี่ผลลัพธ์ที่ข้อเสนอนี้ให้</a:t>
-            </a:r>
-          </a:p>
-        </p:txBody>
-      </p:sp>
-      <p:sp>
-        <p:nvSpPr>
-          <p:cNvPr id="3" name="N0"/>
-          <p:cNvSpPr>
-            <a:spLocks noGrp="1"/>
-          </p:cNvSpPr>
-          <p:nvPr>
-            <p:ph type="body" idx="20"/>
+              <a:t>ก่อนและหลังใช้บริการ</a:t>
+            </a:r>
+          </a:p>
+        </p:txBody>
+      </p:sp>
+      <p:sp>
+        <p:nvSpPr>
+          <p:cNvPr id="3" name="LH"/>
+          <p:cNvSpPr>
+            <a:spLocks noGrp="1"/>
+          </p:cNvSpPr>
+          <p:nvPr>
+            <p:ph type="body" idx="3"/>
           </p:nvPr>
         </p:nvSpPr>
         <p:spPr/>
@@ -29520,19 +31379,19 @@
             <a:pPr/>
             <a:r>
               <a:rPr lang="th-TH" dirty="0"/>
-              <a:t>01</a:t>
-            </a:r>
-          </a:p>
-        </p:txBody>
-      </p:sp>
-      <p:sp>
-        <p:nvSpPr>
-          <p:cNvPr id="4" name="H0"/>
-          <p:cNvSpPr>
-            <a:spLocks noGrp="1"/>
-          </p:cNvSpPr>
-          <p:nvPr>
-            <p:ph type="body" idx="21"/>
+              <a:t>ก่อน</a:t>
+            </a:r>
+          </a:p>
+        </p:txBody>
+      </p:sp>
+      <p:sp>
+        <p:nvSpPr>
+          <p:cNvPr id="4" name="L"/>
+          <p:cNvSpPr>
+            <a:spLocks noGrp="1"/>
+          </p:cNvSpPr>
+          <p:nvPr>
+            <p:ph type="body" idx="1"/>
           </p:nvPr>
         </p:nvSpPr>
         <p:spPr/>
@@ -29543,19 +31402,26 @@
             <a:pPr/>
             <a:r>
               <a:rPr lang="th-TH" dirty="0"/>
-              <a:t>ลดงานคีย์ซ้ำ</a:t>
-            </a:r>
-          </a:p>
-        </p:txBody>
-      </p:sp>
-      <p:sp>
-        <p:nvSpPr>
-          <p:cNvPr id="5" name="B0"/>
-          <p:cNvSpPr>
-            <a:spLocks noGrp="1"/>
-          </p:cNvSpPr>
-          <p:nvPr>
-            <p:ph type="body" idx="22"/>
+              <a:t>ระบบล่มบ่อย ไม่มีคนดูแลประจำ</a:t>
+            </a:r>
+          </a:p>
+          <a:p>
+            <a:pPr/>
+            <a:r>
+              <a:rPr lang="th-TH" dirty="0"/>
+              <a:t>ค่าใช้จ่ายไม่แน่นอน</a:t>
+            </a:r>
+          </a:p>
+        </p:txBody>
+      </p:sp>
+      <p:sp>
+        <p:nvSpPr>
+          <p:cNvPr id="5" name="RH"/>
+          <p:cNvSpPr>
+            <a:spLocks noGrp="1"/>
+          </p:cNvSpPr>
+          <p:nvPr>
+            <p:ph type="body" idx="4"/>
           </p:nvPr>
         </p:nvSpPr>
         <p:spPr/>
@@ -29566,19 +31432,19 @@
             <a:pPr/>
             <a:r>
               <a:rPr lang="th-TH" dirty="0"/>
-              <a:t>รับเอกสารเข้าระบบเดียว แล้วกระจายต่อให้ทุกปลายทางอัตโนมัติ</a:t>
-            </a:r>
-          </a:p>
-        </p:txBody>
-      </p:sp>
-      <p:sp>
-        <p:nvSpPr>
-          <p:cNvPr id="6" name="N1"/>
-          <p:cNvSpPr>
-            <a:spLocks noGrp="1"/>
-          </p:cNvSpPr>
-          <p:nvPr>
-            <p:ph type="body" idx="23"/>
+              <a:t>หลัง</a:t>
+            </a:r>
+          </a:p>
+        </p:txBody>
+      </p:sp>
+      <p:sp>
+        <p:nvSpPr>
+          <p:cNvPr id="6" name="R"/>
+          <p:cNvSpPr>
+            <a:spLocks noGrp="1"/>
+          </p:cNvSpPr>
+          <p:nvPr>
+            <p:ph type="body" idx="2"/>
           </p:nvPr>
         </p:nvSpPr>
         <p:spPr/>
@@ -29589,237 +31455,14 @@
             <a:pPr/>
             <a:r>
               <a:rPr lang="th-TH" dirty="0"/>
-              <a:t>02</a:t>
-            </a:r>
-          </a:p>
-        </p:txBody>
-      </p:sp>
-      <p:sp>
-        <p:nvSpPr>
-          <p:cNvPr id="7" name="H1"/>
-          <p:cNvSpPr>
-            <a:spLocks noGrp="1"/>
-          </p:cNvSpPr>
-          <p:nvPr>
-            <p:ph type="body" idx="24"/>
-          </p:nvPr>
-        </p:nvSpPr>
-        <p:spPr/>
-        <p:txBody>
-          <a:bodyPr/>
-          <a:lstStyle/>
+              <a:t>มอนิเตอร์ 24 ชั่วโมง แจ้งเตือนอัตโนมัติ</a:t>
+            </a:r>
+          </a:p>
           <a:p>
             <a:pPr/>
             <a:r>
               <a:rPr lang="th-TH" dirty="0"/>
-              <a:t>ตรวจสอบได้</a:t>
-            </a:r>
-          </a:p>
-        </p:txBody>
-      </p:sp>
-      <p:sp>
-        <p:nvSpPr>
-          <p:cNvPr id="8" name="B1"/>
-          <p:cNvSpPr>
-            <a:spLocks noGrp="1"/>
-          </p:cNvSpPr>
-          <p:nvPr>
-            <p:ph type="body" idx="25"/>
-          </p:nvPr>
-        </p:nvSpPr>
-        <p:spPr/>
-        <p:txBody>
-          <a:bodyPr/>
-          <a:lstStyle/>
-          <a:p>
-            <a:pPr/>
-            <a:r>
-              <a:rPr lang="th-TH" dirty="0"/>
-              <a:t>ทุกรายการมี audit trail ผู้ทำ เวลา และค่าก่อนหลัง</a:t>
-            </a:r>
-          </a:p>
-        </p:txBody>
-      </p:sp>
-      <p:sp>
-        <p:nvSpPr>
-          <p:cNvPr id="9" name="N2"/>
-          <p:cNvSpPr>
-            <a:spLocks noGrp="1"/>
-          </p:cNvSpPr>
-          <p:nvPr>
-            <p:ph type="body" idx="26"/>
-          </p:nvPr>
-        </p:nvSpPr>
-        <p:spPr/>
-        <p:txBody>
-          <a:bodyPr/>
-          <a:lstStyle/>
-          <a:p>
-            <a:pPr/>
-            <a:r>
-              <a:rPr lang="th-TH" dirty="0"/>
-              <a:t>03</a:t>
-            </a:r>
-          </a:p>
-        </p:txBody>
-      </p:sp>
-      <p:sp>
-        <p:nvSpPr>
-          <p:cNvPr id="10" name="H2"/>
-          <p:cNvSpPr>
-            <a:spLocks noGrp="1"/>
-          </p:cNvSpPr>
-          <p:nvPr>
-            <p:ph type="body" idx="27"/>
-          </p:nvPr>
-        </p:nvSpPr>
-        <p:spPr/>
-        <p:txBody>
-          <a:bodyPr/>
-          <a:lstStyle/>
-          <a:p>
-            <a:pPr/>
-            <a:r>
-              <a:rPr lang="th-TH" dirty="0"/>
-              <a:t>ปิดงบเร็วขึ้น</a:t>
-            </a:r>
-          </a:p>
-        </p:txBody>
-      </p:sp>
-      <p:sp>
-        <p:nvSpPr>
-          <p:cNvPr id="11" name="B2"/>
-          <p:cNvSpPr>
-            <a:spLocks noGrp="1"/>
-          </p:cNvSpPr>
-          <p:nvPr>
-            <p:ph type="body" idx="28"/>
-          </p:nvPr>
-        </p:nvSpPr>
-        <p:spPr/>
-        <p:txBody>
-          <a:bodyPr/>
-          <a:lstStyle/>
-          <a:p>
-            <a:pPr/>
-            <a:r>
-              <a:rPr lang="th-TH" dirty="0"/>
-              <a:t>กระทบยอดอัตโนมัติรายวัน ไม่ต้องรอสิ้นเดือน</a:t>
-            </a:r>
-          </a:p>
-        </p:txBody>
-      </p:sp>
-      <p:sp>
-        <p:nvSpPr>
-          <p:cNvPr id="12" name="N3"/>
-          <p:cNvSpPr>
-            <a:spLocks noGrp="1"/>
-          </p:cNvSpPr>
-          <p:nvPr>
-            <p:ph type="body" idx="29"/>
-          </p:nvPr>
-        </p:nvSpPr>
-        <p:spPr/>
-        <p:txBody>
-          <a:bodyPr/>
-          <a:lstStyle/>
-          <a:p>
-            <a:pPr/>
-            <a:r>
-              <a:rPr lang="th-TH" dirty="0"/>
-              <a:t>04</a:t>
-            </a:r>
-          </a:p>
-        </p:txBody>
-      </p:sp>
-      <p:sp>
-        <p:nvSpPr>
-          <p:cNvPr id="13" name="H3"/>
-          <p:cNvSpPr>
-            <a:spLocks noGrp="1"/>
-          </p:cNvSpPr>
-          <p:nvPr>
-            <p:ph type="body" idx="30"/>
-          </p:nvPr>
-        </p:nvSpPr>
-        <p:spPr/>
-        <p:txBody>
-          <a:bodyPr/>
-          <a:lstStyle/>
-          <a:p>
-            <a:pPr/>
-            <a:r>
-              <a:rPr lang="th-TH" dirty="0"/>
-              <a:t>ขยายต่อได้</a:t>
-            </a:r>
-          </a:p>
-        </p:txBody>
-      </p:sp>
-      <p:sp>
-        <p:nvSpPr>
-          <p:cNvPr id="14" name="B3"/>
-          <p:cNvSpPr>
-            <a:spLocks noGrp="1"/>
-          </p:cNvSpPr>
-          <p:nvPr>
-            <p:ph type="body" idx="31"/>
-          </p:nvPr>
-        </p:nvSpPr>
-        <p:spPr/>
-        <p:txBody>
-          <a:bodyPr/>
-          <a:lstStyle/>
-          <a:p>
-            <a:pPr/>
-            <a:r>
-              <a:rPr lang="th-TH" dirty="0"/>
-              <a:t>เพิ่มกระบวนการใหม่โดยไม่แก้ของเดิม</a:t>
-            </a:r>
-          </a:p>
-        </p:txBody>
-      </p:sp>
-      <p:sp>
-        <p:nvSpPr>
-          <p:cNvPr id="15" name="BL"/>
-          <p:cNvSpPr>
-            <a:spLocks noGrp="1"/>
-          </p:cNvSpPr>
-          <p:nvPr>
-            <p:ph type="body" idx="32"/>
-          </p:nvPr>
-        </p:nvSpPr>
-        <p:spPr/>
-        <p:txBody>
-          <a:bodyPr/>
-          <a:lstStyle/>
-          <a:p>
-            <a:pPr/>
-            <a:r>
-              <a:rPr lang="th-TH" dirty="0"/>
-              <a:t>สรุป</a:t>
-            </a:r>
-          </a:p>
-        </p:txBody>
-      </p:sp>
-      <p:sp>
-        <p:nvSpPr>
-          <p:cNvPr id="16" name="BC"/>
-          <p:cNvSpPr>
-            <a:spLocks noGrp="1"/>
-          </p:cNvSpPr>
-          <p:nvPr>
-            <p:ph type="body" idx="33"/>
-          </p:nvPr>
-        </p:nvSpPr>
-        <p:spPr/>
-        <p:txBody>
-          <a:bodyPr/>
-          <a:lstStyle/>
-          <a:p>
-            <a:pPr/>
-            <a:r>
-              <a:rPr lang="th-TH" dirty="0"/>
-              <a:t>ทั้งสี่ข้อมาจากการแก้จุดเดียวกัน คือรวมจุดรับเอกสาร</a:t>
+              <a:t>ค่าใช้จ่ายคงที่ต่อเดือน</a:t>
             </a:r>
           </a:p>
         </p:txBody>
@@ -29867,19 +31510,19 @@
             <a:pPr/>
             <a:r>
               <a:rPr lang="th-TH" dirty="0"/>
-              <a:t>วิธีการทำงาน</a:t>
-            </a:r>
-          </a:p>
-        </p:txBody>
-      </p:sp>
-      <p:sp>
-        <p:nvSpPr>
-          <p:cNvPr id="3" name="Cap"/>
-          <p:cNvSpPr>
-            <a:spLocks noGrp="1"/>
-          </p:cNvSpPr>
-          <p:nvPr>
-            <p:ph type="body" idx="2"/>
+              <a:t>สี่ผลลัพธ์ที่ข้อเสนอนี้ให้</a:t>
+            </a:r>
+          </a:p>
+        </p:txBody>
+      </p:sp>
+      <p:sp>
+        <p:nvSpPr>
+          <p:cNvPr id="3" name="N0"/>
+          <p:cNvSpPr>
+            <a:spLocks noGrp="1"/>
+          </p:cNvSpPr>
+          <p:nvPr>
+            <p:ph type="body" idx="20"/>
           </p:nvPr>
         </p:nvSpPr>
         <p:spPr/>
@@ -29890,7 +31533,306 @@
             <a:pPr/>
             <a:r>
               <a:rPr lang="th-TH" dirty="0"/>
-              <a:t>กระบวนการ สถาปัตยกรรม และขอบเขตที่ตกลงกัน</a:t>
+              <a:t>01</a:t>
+            </a:r>
+          </a:p>
+        </p:txBody>
+      </p:sp>
+      <p:sp>
+        <p:nvSpPr>
+          <p:cNvPr id="4" name="H0"/>
+          <p:cNvSpPr>
+            <a:spLocks noGrp="1"/>
+          </p:cNvSpPr>
+          <p:nvPr>
+            <p:ph type="body" idx="21"/>
+          </p:nvPr>
+        </p:nvSpPr>
+        <p:spPr/>
+        <p:txBody>
+          <a:bodyPr/>
+          <a:lstStyle/>
+          <a:p>
+            <a:pPr/>
+            <a:r>
+              <a:rPr lang="th-TH" dirty="0"/>
+              <a:t>ลดงานคีย์ซ้ำ</a:t>
+            </a:r>
+          </a:p>
+        </p:txBody>
+      </p:sp>
+      <p:sp>
+        <p:nvSpPr>
+          <p:cNvPr id="5" name="B0"/>
+          <p:cNvSpPr>
+            <a:spLocks noGrp="1"/>
+          </p:cNvSpPr>
+          <p:nvPr>
+            <p:ph type="body" idx="22"/>
+          </p:nvPr>
+        </p:nvSpPr>
+        <p:spPr/>
+        <p:txBody>
+          <a:bodyPr/>
+          <a:lstStyle/>
+          <a:p>
+            <a:pPr/>
+            <a:r>
+              <a:rPr lang="th-TH" dirty="0"/>
+              <a:t>รับเอกสารเข้าระบบเดียว แล้วกระจายต่อให้ทุกปลายทางอัตโนมัติ</a:t>
+            </a:r>
+          </a:p>
+        </p:txBody>
+      </p:sp>
+      <p:sp>
+        <p:nvSpPr>
+          <p:cNvPr id="6" name="N1"/>
+          <p:cNvSpPr>
+            <a:spLocks noGrp="1"/>
+          </p:cNvSpPr>
+          <p:nvPr>
+            <p:ph type="body" idx="23"/>
+          </p:nvPr>
+        </p:nvSpPr>
+        <p:spPr/>
+        <p:txBody>
+          <a:bodyPr/>
+          <a:lstStyle/>
+          <a:p>
+            <a:pPr/>
+            <a:r>
+              <a:rPr lang="th-TH" dirty="0"/>
+              <a:t>02</a:t>
+            </a:r>
+          </a:p>
+        </p:txBody>
+      </p:sp>
+      <p:sp>
+        <p:nvSpPr>
+          <p:cNvPr id="7" name="H1"/>
+          <p:cNvSpPr>
+            <a:spLocks noGrp="1"/>
+          </p:cNvSpPr>
+          <p:nvPr>
+            <p:ph type="body" idx="24"/>
+          </p:nvPr>
+        </p:nvSpPr>
+        <p:spPr/>
+        <p:txBody>
+          <a:bodyPr/>
+          <a:lstStyle/>
+          <a:p>
+            <a:pPr/>
+            <a:r>
+              <a:rPr lang="th-TH" dirty="0"/>
+              <a:t>ตรวจสอบได้</a:t>
+            </a:r>
+          </a:p>
+        </p:txBody>
+      </p:sp>
+      <p:sp>
+        <p:nvSpPr>
+          <p:cNvPr id="8" name="B1"/>
+          <p:cNvSpPr>
+            <a:spLocks noGrp="1"/>
+          </p:cNvSpPr>
+          <p:nvPr>
+            <p:ph type="body" idx="25"/>
+          </p:nvPr>
+        </p:nvSpPr>
+        <p:spPr/>
+        <p:txBody>
+          <a:bodyPr/>
+          <a:lstStyle/>
+          <a:p>
+            <a:pPr/>
+            <a:r>
+              <a:rPr lang="th-TH" dirty="0"/>
+              <a:t>ทุกรายการมี audit trail ผู้ทำ เวลา และค่าก่อนหลัง</a:t>
+            </a:r>
+          </a:p>
+        </p:txBody>
+      </p:sp>
+      <p:sp>
+        <p:nvSpPr>
+          <p:cNvPr id="9" name="N2"/>
+          <p:cNvSpPr>
+            <a:spLocks noGrp="1"/>
+          </p:cNvSpPr>
+          <p:nvPr>
+            <p:ph type="body" idx="26"/>
+          </p:nvPr>
+        </p:nvSpPr>
+        <p:spPr/>
+        <p:txBody>
+          <a:bodyPr/>
+          <a:lstStyle/>
+          <a:p>
+            <a:pPr/>
+            <a:r>
+              <a:rPr lang="th-TH" dirty="0"/>
+              <a:t>03</a:t>
+            </a:r>
+          </a:p>
+        </p:txBody>
+      </p:sp>
+      <p:sp>
+        <p:nvSpPr>
+          <p:cNvPr id="10" name="H2"/>
+          <p:cNvSpPr>
+            <a:spLocks noGrp="1"/>
+          </p:cNvSpPr>
+          <p:nvPr>
+            <p:ph type="body" idx="27"/>
+          </p:nvPr>
+        </p:nvSpPr>
+        <p:spPr/>
+        <p:txBody>
+          <a:bodyPr/>
+          <a:lstStyle/>
+          <a:p>
+            <a:pPr/>
+            <a:r>
+              <a:rPr lang="th-TH" dirty="0"/>
+              <a:t>ปิดงบเร็วขึ้น</a:t>
+            </a:r>
+          </a:p>
+        </p:txBody>
+      </p:sp>
+      <p:sp>
+        <p:nvSpPr>
+          <p:cNvPr id="11" name="B2"/>
+          <p:cNvSpPr>
+            <a:spLocks noGrp="1"/>
+          </p:cNvSpPr>
+          <p:nvPr>
+            <p:ph type="body" idx="28"/>
+          </p:nvPr>
+        </p:nvSpPr>
+        <p:spPr/>
+        <p:txBody>
+          <a:bodyPr/>
+          <a:lstStyle/>
+          <a:p>
+            <a:pPr/>
+            <a:r>
+              <a:rPr lang="th-TH" dirty="0"/>
+              <a:t>กระทบยอดอัตโนมัติรายวัน ไม่ต้องรอสิ้นเดือน</a:t>
+            </a:r>
+          </a:p>
+        </p:txBody>
+      </p:sp>
+      <p:sp>
+        <p:nvSpPr>
+          <p:cNvPr id="12" name="N3"/>
+          <p:cNvSpPr>
+            <a:spLocks noGrp="1"/>
+          </p:cNvSpPr>
+          <p:nvPr>
+            <p:ph type="body" idx="29"/>
+          </p:nvPr>
+        </p:nvSpPr>
+        <p:spPr/>
+        <p:txBody>
+          <a:bodyPr/>
+          <a:lstStyle/>
+          <a:p>
+            <a:pPr/>
+            <a:r>
+              <a:rPr lang="th-TH" dirty="0"/>
+              <a:t>04</a:t>
+            </a:r>
+          </a:p>
+        </p:txBody>
+      </p:sp>
+      <p:sp>
+        <p:nvSpPr>
+          <p:cNvPr id="13" name="H3"/>
+          <p:cNvSpPr>
+            <a:spLocks noGrp="1"/>
+          </p:cNvSpPr>
+          <p:nvPr>
+            <p:ph type="body" idx="30"/>
+          </p:nvPr>
+        </p:nvSpPr>
+        <p:spPr/>
+        <p:txBody>
+          <a:bodyPr/>
+          <a:lstStyle/>
+          <a:p>
+            <a:pPr/>
+            <a:r>
+              <a:rPr lang="th-TH" dirty="0"/>
+              <a:t>ขยายต่อได้</a:t>
+            </a:r>
+          </a:p>
+        </p:txBody>
+      </p:sp>
+      <p:sp>
+        <p:nvSpPr>
+          <p:cNvPr id="14" name="B3"/>
+          <p:cNvSpPr>
+            <a:spLocks noGrp="1"/>
+          </p:cNvSpPr>
+          <p:nvPr>
+            <p:ph type="body" idx="31"/>
+          </p:nvPr>
+        </p:nvSpPr>
+        <p:spPr/>
+        <p:txBody>
+          <a:bodyPr/>
+          <a:lstStyle/>
+          <a:p>
+            <a:pPr/>
+            <a:r>
+              <a:rPr lang="th-TH" dirty="0"/>
+              <a:t>เพิ่มกระบวนการใหม่โดยไม่แก้ของเดิม</a:t>
+            </a:r>
+          </a:p>
+        </p:txBody>
+      </p:sp>
+      <p:sp>
+        <p:nvSpPr>
+          <p:cNvPr id="15" name="BL"/>
+          <p:cNvSpPr>
+            <a:spLocks noGrp="1"/>
+          </p:cNvSpPr>
+          <p:nvPr>
+            <p:ph type="body" idx="32"/>
+          </p:nvPr>
+        </p:nvSpPr>
+        <p:spPr/>
+        <p:txBody>
+          <a:bodyPr/>
+          <a:lstStyle/>
+          <a:p>
+            <a:pPr/>
+            <a:r>
+              <a:rPr lang="th-TH" dirty="0"/>
+              <a:t>สรุป</a:t>
+            </a:r>
+          </a:p>
+        </p:txBody>
+      </p:sp>
+      <p:sp>
+        <p:nvSpPr>
+          <p:cNvPr id="16" name="BC"/>
+          <p:cNvSpPr>
+            <a:spLocks noGrp="1"/>
+          </p:cNvSpPr>
+          <p:nvPr>
+            <p:ph type="body" idx="33"/>
+          </p:nvPr>
+        </p:nvSpPr>
+        <p:spPr/>
+        <p:txBody>
+          <a:bodyPr/>
+          <a:lstStyle/>
+          <a:p>
+            <a:pPr/>
+            <a:r>
+              <a:rPr lang="th-TH" dirty="0"/>
+              <a:t>ทั้งสี่ข้อมาจากการแก้จุดเดียวกัน คือรวมจุดรับเอกสาร</a:t>
             </a:r>
           </a:p>
         </p:txBody>

--- a/NCT-Slide-Template-Demo.pptx
+++ b/NCT-Slide-Template-Demo.pptx
@@ -28,6 +28,7 @@
     <p:sldId id="276" r:id="rId22"/>
     <p:sldId id="277" r:id="rId23"/>
     <p:sldId id="278" r:id="rId24"/>
+    <p:sldId id="279" r:id="rId25"/>
   </p:sldIdLst>
   <p:sldSz cx="12192000" cy="6858000"/>
   <p:notesSz cx="6858000" cy="9144000"/>
@@ -436,7 +437,7 @@
             <c:idx val="5"/>
             <c:marker>
               <c:symbol val="circle"/>
-              <c:size val="7"/>
+              <c:size val="8"/>
               <c:spPr>
                 <a:solidFill>
                   <a:srgbClr val="2A5EA0"/>
@@ -786,6 +787,548 @@
 </file>
 
 <file path=ppt/charts/chart3.xml><?xml version="1.0" encoding="utf-8"?>
+<c:chartSpace xmlns:c="http://schemas.openxmlformats.org/drawingml/2006/chart" xmlns:a="http://schemas.openxmlformats.org/drawingml/2006/main" xmlns:r="http://schemas.openxmlformats.org/officeDocument/2006/relationships">
+  <c:roundedCorners val="0"/>
+  <c:chart>
+    <c:autoTitleDeleted val="1"/>
+    <c:plotArea>
+      <c:layout>
+        <c:manualLayout>
+          <c:layoutTarget val="inner"/>
+          <c:xMode val="edge"/>
+          <c:yMode val="edge"/>
+          <c:x val="0"/>
+          <c:y val="0.1042"/>
+          <c:w val="1"/>
+          <c:h val="0.8958"/>
+        </c:manualLayout>
+      </c:layout>
+      <c:scatterChart>
+        <c:scatterStyle val="lineMarker"/>
+        <c:varyColors val="0"/>
+        <c:ser>
+          <c:idx val="0"/>
+          <c:order val="0"/>
+          <c:tx>
+            <c:strRef>
+              <c:f>Sheet1!$A$2</c:f>
+              <c:strCache>
+                <c:ptCount val="1"/>
+                <c:pt idx="0">
+                  <c:v>ปิดงบสิ้นเดือน</c:v>
+                </c:pt>
+              </c:strCache>
+            </c:strRef>
+          </c:tx>
+          <c:spPr>
+            <a:ln w="19050" cap="rnd">
+              <a:solidFill>
+                <a:srgbClr val="90B4E4"/>
+              </a:solidFill>
+              <a:round/>
+            </a:ln>
+          </c:spPr>
+          <c:marker>
+            <c:symbol val="circle"/>
+            <c:size val="8"/>
+            <c:spPr>
+              <a:solidFill>
+                <a:srgbClr val="90B4E4"/>
+              </a:solidFill>
+              <a:ln w="19050">
+                <a:solidFill>
+                  <a:srgbClr val="FFFFFF"/>
+                </a:solidFill>
+              </a:ln>
+            </c:spPr>
+          </c:marker>
+          <c:dPt>
+            <c:idx val="1"/>
+            <c:marker>
+              <c:symbol val="circle"/>
+              <c:size val="8"/>
+              <c:spPr>
+                <a:solidFill>
+                  <a:srgbClr val="2A5EA0"/>
+                </a:solidFill>
+                <a:ln w="19050">
+                  <a:solidFill>
+                    <a:srgbClr val="FFFFFF"/>
+                  </a:solidFill>
+                </a:ln>
+              </c:spPr>
+            </c:marker>
+            <c:bubble3D val="0"/>
+          </c:dPt>
+          <c:xVal>
+            <c:numRef>
+              <c:f>Sheet1!$B$2:$C$2</c:f>
+              <c:numCache>
+                <c:formatCode>General</c:formatCode>
+                <c:ptCount val="2"/>
+                <c:pt idx="0">
+                  <c:v>48</c:v>
+                </c:pt>
+                <c:pt idx="1">
+                  <c:v>16</c:v>
+                </c:pt>
+              </c:numCache>
+            </c:numRef>
+          </c:xVal>
+          <c:yVal>
+            <c:numRef>
+              <c:f>Sheet1!$D$2:$E$2</c:f>
+              <c:numCache>
+                <c:formatCode>General</c:formatCode>
+                <c:ptCount val="2"/>
+                <c:pt idx="0">
+                  <c:v>1</c:v>
+                </c:pt>
+                <c:pt idx="1">
+                  <c:v>1</c:v>
+                </c:pt>
+              </c:numCache>
+            </c:numRef>
+          </c:yVal>
+          <c:smooth val="0"/>
+        </c:ser>
+        <c:ser>
+          <c:idx val="1"/>
+          <c:order val="1"/>
+          <c:tx>
+            <c:strRef>
+              <c:f>Sheet1!$A$3</c:f>
+              <c:strCache>
+                <c:ptCount val="1"/>
+                <c:pt idx="0">
+                  <c:v>คีย์ใบแจ้งหนี้ซื้อ</c:v>
+                </c:pt>
+              </c:strCache>
+            </c:strRef>
+          </c:tx>
+          <c:spPr>
+            <a:ln w="19050" cap="rnd">
+              <a:solidFill>
+                <a:srgbClr val="90B4E4"/>
+              </a:solidFill>
+              <a:round/>
+            </a:ln>
+          </c:spPr>
+          <c:marker>
+            <c:symbol val="circle"/>
+            <c:size val="8"/>
+            <c:spPr>
+              <a:solidFill>
+                <a:srgbClr val="90B4E4"/>
+              </a:solidFill>
+              <a:ln w="19050">
+                <a:solidFill>
+                  <a:srgbClr val="FFFFFF"/>
+                </a:solidFill>
+              </a:ln>
+            </c:spPr>
+          </c:marker>
+          <c:dPt>
+            <c:idx val="1"/>
+            <c:marker>
+              <c:symbol val="circle"/>
+              <c:size val="8"/>
+              <c:spPr>
+                <a:solidFill>
+                  <a:srgbClr val="2A5EA0"/>
+                </a:solidFill>
+                <a:ln w="19050">
+                  <a:solidFill>
+                    <a:srgbClr val="FFFFFF"/>
+                  </a:solidFill>
+                </a:ln>
+              </c:spPr>
+            </c:marker>
+            <c:bubble3D val="0"/>
+          </c:dPt>
+          <c:xVal>
+            <c:numRef>
+              <c:f>Sheet1!$B$3:$C$3</c:f>
+              <c:numCache>
+                <c:formatCode>General</c:formatCode>
+                <c:ptCount val="2"/>
+                <c:pt idx="0">
+                  <c:v>28</c:v>
+                </c:pt>
+                <c:pt idx="1">
+                  <c:v>3</c:v>
+                </c:pt>
+              </c:numCache>
+            </c:numRef>
+          </c:xVal>
+          <c:yVal>
+            <c:numRef>
+              <c:f>Sheet1!$D$3:$E$3</c:f>
+              <c:numCache>
+                <c:formatCode>General</c:formatCode>
+                <c:ptCount val="2"/>
+                <c:pt idx="0">
+                  <c:v>2</c:v>
+                </c:pt>
+                <c:pt idx="1">
+                  <c:v>2</c:v>
+                </c:pt>
+              </c:numCache>
+            </c:numRef>
+          </c:yVal>
+          <c:smooth val="0"/>
+        </c:ser>
+        <c:ser>
+          <c:idx val="2"/>
+          <c:order val="2"/>
+          <c:tx>
+            <c:strRef>
+              <c:f>Sheet1!$A$4</c:f>
+              <c:strCache>
+                <c:ptCount val="1"/>
+                <c:pt idx="0">
+                  <c:v>กระทบยอดธนาคาร</c:v>
+                </c:pt>
+              </c:strCache>
+            </c:strRef>
+          </c:tx>
+          <c:spPr>
+            <a:ln w="19050" cap="rnd">
+              <a:solidFill>
+                <a:srgbClr val="90B4E4"/>
+              </a:solidFill>
+              <a:round/>
+            </a:ln>
+          </c:spPr>
+          <c:marker>
+            <c:symbol val="circle"/>
+            <c:size val="8"/>
+            <c:spPr>
+              <a:solidFill>
+                <a:srgbClr val="90B4E4"/>
+              </a:solidFill>
+              <a:ln w="19050">
+                <a:solidFill>
+                  <a:srgbClr val="FFFFFF"/>
+                </a:solidFill>
+              </a:ln>
+            </c:spPr>
+          </c:marker>
+          <c:dPt>
+            <c:idx val="1"/>
+            <c:marker>
+              <c:symbol val="circle"/>
+              <c:size val="8"/>
+              <c:spPr>
+                <a:solidFill>
+                  <a:srgbClr val="2A5EA0"/>
+                </a:solidFill>
+                <a:ln w="19050">
+                  <a:solidFill>
+                    <a:srgbClr val="FFFFFF"/>
+                  </a:solidFill>
+                </a:ln>
+              </c:spPr>
+            </c:marker>
+            <c:bubble3D val="0"/>
+          </c:dPt>
+          <c:xVal>
+            <c:numRef>
+              <c:f>Sheet1!$B$4:$C$4</c:f>
+              <c:numCache>
+                <c:formatCode>General</c:formatCode>
+                <c:ptCount val="2"/>
+                <c:pt idx="0">
+                  <c:v>16</c:v>
+                </c:pt>
+                <c:pt idx="1">
+                  <c:v>2</c:v>
+                </c:pt>
+              </c:numCache>
+            </c:numRef>
+          </c:xVal>
+          <c:yVal>
+            <c:numRef>
+              <c:f>Sheet1!$D$4:$E$4</c:f>
+              <c:numCache>
+                <c:formatCode>General</c:formatCode>
+                <c:ptCount val="2"/>
+                <c:pt idx="0">
+                  <c:v>3</c:v>
+                </c:pt>
+                <c:pt idx="1">
+                  <c:v>3</c:v>
+                </c:pt>
+              </c:numCache>
+            </c:numRef>
+          </c:yVal>
+          <c:smooth val="0"/>
+        </c:ser>
+        <c:ser>
+          <c:idx val="3"/>
+          <c:order val="3"/>
+          <c:tx>
+            <c:strRef>
+              <c:f>Sheet1!$A$5</c:f>
+              <c:strCache>
+                <c:ptCount val="1"/>
+                <c:pt idx="0">
+                  <c:v>ออกใบแจ้งหนี้ขาย</c:v>
+                </c:pt>
+              </c:strCache>
+            </c:strRef>
+          </c:tx>
+          <c:spPr>
+            <a:ln w="19050" cap="rnd">
+              <a:solidFill>
+                <a:srgbClr val="90B4E4"/>
+              </a:solidFill>
+              <a:round/>
+            </a:ln>
+          </c:spPr>
+          <c:marker>
+            <c:symbol val="circle"/>
+            <c:size val="8"/>
+            <c:spPr>
+              <a:solidFill>
+                <a:srgbClr val="90B4E4"/>
+              </a:solidFill>
+              <a:ln w="19050">
+                <a:solidFill>
+                  <a:srgbClr val="FFFFFF"/>
+                </a:solidFill>
+              </a:ln>
+            </c:spPr>
+          </c:marker>
+          <c:dPt>
+            <c:idx val="1"/>
+            <c:marker>
+              <c:symbol val="circle"/>
+              <c:size val="8"/>
+              <c:spPr>
+                <a:solidFill>
+                  <a:srgbClr val="2A5EA0"/>
+                </a:solidFill>
+                <a:ln w="19050">
+                  <a:solidFill>
+                    <a:srgbClr val="FFFFFF"/>
+                  </a:solidFill>
+                </a:ln>
+              </c:spPr>
+            </c:marker>
+            <c:bubble3D val="0"/>
+          </c:dPt>
+          <c:xVal>
+            <c:numRef>
+              <c:f>Sheet1!$B$5:$C$5</c:f>
+              <c:numCache>
+                <c:formatCode>General</c:formatCode>
+                <c:ptCount val="2"/>
+                <c:pt idx="0">
+                  <c:v>12</c:v>
+                </c:pt>
+                <c:pt idx="1">
+                  <c:v>4</c:v>
+                </c:pt>
+              </c:numCache>
+            </c:numRef>
+          </c:xVal>
+          <c:yVal>
+            <c:numRef>
+              <c:f>Sheet1!$D$5:$E$5</c:f>
+              <c:numCache>
+                <c:formatCode>General</c:formatCode>
+                <c:ptCount val="2"/>
+                <c:pt idx="0">
+                  <c:v>4</c:v>
+                </c:pt>
+                <c:pt idx="1">
+                  <c:v>4</c:v>
+                </c:pt>
+              </c:numCache>
+            </c:numRef>
+          </c:yVal>
+          <c:smooth val="0"/>
+        </c:ser>
+        <c:ser>
+          <c:idx val="4"/>
+          <c:order val="4"/>
+          <c:tx>
+            <c:strRef>
+              <c:f>Sheet1!$A$6</c:f>
+              <c:strCache>
+                <c:ptCount val="1"/>
+                <c:pt idx="0">
+                  <c:v>ติดตามลูกหนี้</c:v>
+                </c:pt>
+              </c:strCache>
+            </c:strRef>
+          </c:tx>
+          <c:spPr>
+            <a:ln w="19050" cap="rnd">
+              <a:solidFill>
+                <a:srgbClr val="90B4E4"/>
+              </a:solidFill>
+              <a:round/>
+            </a:ln>
+          </c:spPr>
+          <c:marker>
+            <c:symbol val="circle"/>
+            <c:size val="8"/>
+            <c:spPr>
+              <a:solidFill>
+                <a:srgbClr val="90B4E4"/>
+              </a:solidFill>
+              <a:ln w="19050">
+                <a:solidFill>
+                  <a:srgbClr val="FFFFFF"/>
+                </a:solidFill>
+              </a:ln>
+            </c:spPr>
+          </c:marker>
+          <c:dPt>
+            <c:idx val="1"/>
+            <c:marker>
+              <c:symbol val="circle"/>
+              <c:size val="8"/>
+              <c:spPr>
+                <a:solidFill>
+                  <a:srgbClr val="2A5EA0"/>
+                </a:solidFill>
+                <a:ln w="19050">
+                  <a:solidFill>
+                    <a:srgbClr val="FFFFFF"/>
+                  </a:solidFill>
+                </a:ln>
+              </c:spPr>
+            </c:marker>
+            <c:bubble3D val="0"/>
+          </c:dPt>
+          <c:xVal>
+            <c:numRef>
+              <c:f>Sheet1!$B$6:$C$6</c:f>
+              <c:numCache>
+                <c:formatCode>General</c:formatCode>
+                <c:ptCount val="2"/>
+                <c:pt idx="0">
+                  <c:v>10</c:v>
+                </c:pt>
+                <c:pt idx="1">
+                  <c:v>6</c:v>
+                </c:pt>
+              </c:numCache>
+            </c:numRef>
+          </c:xVal>
+          <c:yVal>
+            <c:numRef>
+              <c:f>Sheet1!$D$6:$E$6</c:f>
+              <c:numCache>
+                <c:formatCode>General</c:formatCode>
+                <c:ptCount val="2"/>
+                <c:pt idx="0">
+                  <c:v>5</c:v>
+                </c:pt>
+                <c:pt idx="1">
+                  <c:v>5</c:v>
+                </c:pt>
+              </c:numCache>
+            </c:numRef>
+          </c:yVal>
+          <c:smooth val="0"/>
+        </c:ser>
+        <c:axId val="24001"/>
+        <c:axId val="24002"/>
+      </c:scatterChart>
+      <c:valAx>
+        <c:axId val="24001"/>
+        <c:scaling>
+          <c:orientation val="minMax"/>
+          <c:max val="50"/>
+          <c:min val="0"/>
+        </c:scaling>
+        <c:delete val="0"/>
+        <c:axPos val="t"/>
+        <c:majorGridlines>
+          <c:spPr>
+            <a:ln w="9525">
+              <a:solidFill>
+                <a:srgbClr val="E5E5E5"/>
+              </a:solidFill>
+            </a:ln>
+          </c:spPr>
+        </c:majorGridlines>
+        <c:numFmt formatCode="#,##0" sourceLinked="0"/>
+        <c:majorTickMark val="none"/>
+        <c:minorTickMark val="none"/>
+        <c:tickLblPos val="low"/>
+        <c:spPr>
+          <a:ln>
+            <a:noFill/>
+          </a:ln>
+        </c:spPr>
+        <c:txPr>
+          <a:bodyPr/>
+          <a:lstStyle/>
+          <a:p>
+            <a:pPr>
+              <a:defRPr sz="1200">
+                <a:solidFill>
+                  <a:srgbClr val="5F5F5F"/>
+                </a:solidFill>
+                <a:latin typeface="+mn-lt"/>
+                <a:ea typeface="+mn-ea"/>
+                <a:cs typeface="+mn-cs"/>
+              </a:defRPr>
+            </a:pPr>
+            <a:endParaRPr lang="th-TH"/>
+          </a:p>
+        </c:txPr>
+        <c:crossAx val="24002"/>
+        <c:crosses val="min"/>
+        <c:crossBetween val="midCat"/>
+        <c:majorUnit val="10"/>
+      </c:valAx>
+      <c:valAx>
+        <c:axId val="24002"/>
+        <c:scaling>
+          <c:orientation val="maxMin"/>
+          <c:max val="7.5"/>
+          <c:min val="0.5"/>
+        </c:scaling>
+        <c:delete val="1"/>
+        <c:axPos val="l"/>
+        <c:numFmt formatCode="General" sourceLinked="0"/>
+        <c:majorTickMark val="none"/>
+        <c:minorTickMark val="none"/>
+        <c:tickLblPos val="none"/>
+        <c:crossAx val="24001"/>
+        <c:crosses val="autoZero"/>
+        <c:crossBetween val="midCat"/>
+        <c:majorUnit val="1"/>
+      </c:valAx>
+      <c:spPr>
+        <a:noFill/>
+        <a:ln>
+          <a:noFill/>
+        </a:ln>
+      </c:spPr>
+    </c:plotArea>
+    <c:plotVisOnly val="1"/>
+    <c:dispBlanksAs val="gap"/>
+  </c:chart>
+  <c:spPr>
+    <a:noFill/>
+    <a:ln>
+      <a:noFill/>
+    </a:ln>
+  </c:spPr>
+  <c:externalData r:id="rId1">
+    <c:autoUpdate val="0"/>
+  </c:externalData>
+</c:chartSpace>
+</file>
+
+<file path=ppt/charts/chart4.xml><?xml version="1.0" encoding="utf-8"?>
 <c:chartSpace xmlns:c="http://schemas.openxmlformats.org/drawingml/2006/chart" xmlns:a="http://schemas.openxmlformats.org/drawingml/2006/main" xmlns:r="http://schemas.openxmlformats.org/officeDocument/2006/relationships">
   <c:roundedCorners val="0"/>
   <c:chart>
@@ -1071,7 +1614,7 @@
 </c:chartSpace>
 </file>
 
-<file path=ppt/charts/chart4.xml><?xml version="1.0" encoding="utf-8"?>
+<file path=ppt/charts/chart5.xml><?xml version="1.0" encoding="utf-8"?>
 <c:chartSpace xmlns:c="http://schemas.openxmlformats.org/drawingml/2006/chart" xmlns:a="http://schemas.openxmlformats.org/drawingml/2006/main" xmlns:r="http://schemas.openxmlformats.org/officeDocument/2006/relationships">
   <c:roundedCorners val="0"/>
   <c:chart>
@@ -18643,6 +19186,1509 @@
 </p:sldLayout>
 </file>
 
+<file path=ppt/slideLayouts/slideLayout24.xml><?xml version="1.0" encoding="utf-8"?>
+<p:sldLayout xmlns:a="http://schemas.openxmlformats.org/drawingml/2006/main" xmlns:r="http://schemas.openxmlformats.org/officeDocument/2006/relationships" xmlns:p="http://schemas.openxmlformats.org/presentationml/2006/main" type="chart" showMasterSp="0" preserve="1">
+  <p:cSld name="24 Before After">
+    <p:bg>
+      <p:bgPr>
+        <a:solidFill>
+          <a:srgbClr val="FFFFFF"/>
+        </a:solidFill>
+        <a:effectLst/>
+      </p:bgPr>
+    </p:bg>
+    <p:spTree>
+      <p:nvGrpSpPr>
+        <p:cNvPr id="1" name=""/>
+        <p:cNvGrpSpPr/>
+        <p:nvPr/>
+      </p:nvGrpSpPr>
+      <p:grpSpPr>
+        <a:xfrm>
+          <a:off x="0" y="0"/>
+          <a:ext cx="0" cy="0"/>
+          <a:chOff x="0" y="0"/>
+          <a:chExt cx="0" cy="0"/>
+        </a:xfrm>
+      </p:grpSpPr>
+      <p:sp>
+        <p:nvSpPr>
+          <p:cNvPr id="10" name="Title Placeholder"/>
+          <p:cNvSpPr>
+            <a:spLocks noGrp="1"/>
+          </p:cNvSpPr>
+          <p:nvPr>
+            <p:ph type="title"/>
+          </p:nvPr>
+        </p:nvSpPr>
+        <p:spPr>
+          <a:xfrm>
+            <a:off x="914400" y="548640"/>
+            <a:ext cx="10363200" cy="731520"/>
+          </a:xfrm>
+          <a:prstGeom prst="rect">
+            <a:avLst/>
+          </a:prstGeom>
+        </p:spPr>
+        <p:txBody>
+          <a:bodyPr wrap="square" anchor="b" lIns="0" tIns="0" rIns="0" bIns="0" rtlCol="0"/>
+          <a:lstStyle>
+            <a:lvl1pPr algn="l" marL="0" indent="0">
+              <a:lnSpc>
+                <a:spcPct val="108000"/>
+              </a:lnSpc>
+              <a:buNone/>
+              <a:defRPr lang="th-TH" sz="3200" b="1" dirty="0">
+                <a:solidFill>
+                  <a:srgbClr val="23436D"/>
+                </a:solidFill>
+                <a:latin typeface="+mj-lt"/>
+                <a:ea typeface="+mj-ea"/>
+                <a:cs typeface="+mj-cs"/>
+              </a:defRPr>
+            </a:lvl1pPr>
+          </a:lstStyle>
+          <a:p>
+            <a:pPr algn="l" marL="0" indent="0">
+              <a:lnSpc>
+                <a:spcPct val="108000"/>
+              </a:lnSpc>
+              <a:buNone/>
+            </a:pPr>
+            <a:r>
+              <a:rPr lang="th-TH" sz="3200" b="1" dirty="0">
+                <a:solidFill>
+                  <a:srgbClr val="23436D"/>
+                </a:solidFill>
+                <a:latin typeface="+mj-lt"/>
+                <a:ea typeface="+mj-ea"/>
+                <a:cs typeface="+mj-cs"/>
+              </a:rPr>
+              <a:t>ชื่อสไลด์</a:t>
+            </a:r>
+          </a:p>
+        </p:txBody>
+      </p:sp>
+      <p:sp>
+        <p:nvSpPr>
+          <p:cNvPr id="11" name="Accent Rule"/>
+          <p:cNvSpPr/>
+          <p:nvPr/>
+        </p:nvSpPr>
+        <p:spPr>
+          <a:xfrm>
+            <a:off x="914400" y="1371600"/>
+            <a:ext cx="548640" cy="45720"/>
+          </a:xfrm>
+          <a:prstGeom prst="rect">
+            <a:avLst/>
+          </a:prstGeom>
+          <a:solidFill>
+            <a:srgbClr val="216B7F"/>
+          </a:solidFill>
+          <a:ln>
+            <a:noFill/>
+          </a:ln>
+        </p:spPr>
+        <p:txBody>
+          <a:bodyPr/>
+          <a:lstStyle/>
+          <a:p>
+            <a:endParaRPr lang="th-TH"/>
+          </a:p>
+        </p:txBody>
+      </p:sp>
+      <p:sp>
+        <p:nvSpPr>
+          <p:cNvPr id="12" name="Intro"/>
+          <p:cNvSpPr>
+            <a:spLocks noGrp="1"/>
+          </p:cNvSpPr>
+          <p:nvPr>
+            <p:ph type="body" idx="2"/>
+          </p:nvPr>
+        </p:nvSpPr>
+        <p:spPr>
+          <a:xfrm>
+            <a:off x="914400" y="1691640"/>
+            <a:ext cx="6400800" cy="274320"/>
+          </a:xfrm>
+          <a:prstGeom prst="rect">
+            <a:avLst/>
+          </a:prstGeom>
+        </p:spPr>
+        <p:txBody>
+          <a:bodyPr wrap="square" anchor="ctr" lIns="0" tIns="0" rIns="0" bIns="0" rtlCol="0"/>
+          <a:lstStyle>
+            <a:lvl1pPr algn="l" marL="0" indent="0">
+              <a:lnSpc>
+                <a:spcPct val="100000"/>
+              </a:lnSpc>
+              <a:buNone/>
+              <a:defRPr lang="th-TH" sz="1400" dirty="0">
+                <a:solidFill>
+                  <a:srgbClr val="5F5F5F"/>
+                </a:solidFill>
+                <a:latin typeface="+mn-lt"/>
+                <a:ea typeface="+mn-ea"/>
+                <a:cs typeface="+mn-cs"/>
+              </a:defRPr>
+            </a:lvl1pPr>
+          </a:lstStyle>
+          <a:p>
+            <a:pPr algn="l" marL="0" indent="0">
+              <a:lnSpc>
+                <a:spcPct val="100000"/>
+              </a:lnSpc>
+              <a:buNone/>
+            </a:pPr>
+            <a:r>
+              <a:rPr lang="th-TH" sz="1400" dirty="0">
+                <a:solidFill>
+                  <a:srgbClr val="5F5F5F"/>
+                </a:solidFill>
+                <a:latin typeface="+mn-lt"/>
+                <a:ea typeface="+mn-ea"/>
+                <a:cs typeface="+mn-cs"/>
+              </a:rPr>
+              <a:t>หน่วย · ทิศที่ดี (น้อยกว่าดีกว่า)</a:t>
+            </a:r>
+          </a:p>
+        </p:txBody>
+      </p:sp>
+      <p:sp>
+        <p:nvSpPr>
+          <p:cNvPr id="13" name="Legend"/>
+          <p:cNvSpPr>
+            <a:spLocks noGrp="1"/>
+          </p:cNvSpPr>
+          <p:nvPr>
+            <p:ph type="body" idx="3"/>
+          </p:nvPr>
+        </p:nvSpPr>
+        <p:spPr>
+          <a:xfrm>
+            <a:off x="7620000" y="1691640"/>
+            <a:ext cx="3657600" cy="274320"/>
+          </a:xfrm>
+          <a:prstGeom prst="rect">
+            <a:avLst/>
+          </a:prstGeom>
+        </p:spPr>
+        <p:txBody>
+          <a:bodyPr wrap="square" anchor="ctr" lIns="0" tIns="0" rIns="0" bIns="0" rtlCol="0"/>
+          <a:lstStyle>
+            <a:lvl1pPr algn="r" marL="0" indent="0">
+              <a:lnSpc>
+                <a:spcPct val="100000"/>
+              </a:lnSpc>
+              <a:buNone/>
+              <a:defRPr lang="th-TH" sz="1200" dirty="0">
+                <a:solidFill>
+                  <a:srgbClr val="333333"/>
+                </a:solidFill>
+                <a:latin typeface="+mn-lt"/>
+                <a:ea typeface="+mn-ea"/>
+                <a:cs typeface="+mn-cs"/>
+              </a:defRPr>
+            </a:lvl1pPr>
+          </a:lstStyle>
+          <a:p>
+            <a:pPr algn="r" marL="0" indent="0">
+              <a:lnSpc>
+                <a:spcPct val="100000"/>
+              </a:lnSpc>
+              <a:buNone/>
+            </a:pPr>
+            <a:r>
+              <a:rPr lang="th-TH" sz="1200" dirty="0">
+                <a:solidFill>
+                  <a:srgbClr val="333333"/>
+                </a:solidFill>
+                <a:latin typeface="+mn-lt"/>
+                <a:ea typeface="+mn-ea"/>
+                <a:cs typeface="+mn-cs"/>
+              </a:rPr>
+              <a:t>● ก่อน   ● หลัง</a:t>
+            </a:r>
+          </a:p>
+        </p:txBody>
+      </p:sp>
+      <p:sp>
+        <p:nvSpPr>
+          <p:cNvPr id="14" name="Chart Placeholder"/>
+          <p:cNvSpPr>
+            <a:spLocks noGrp="1"/>
+          </p:cNvSpPr>
+          <p:nvPr>
+            <p:ph type="chart" idx="1"/>
+          </p:nvPr>
+        </p:nvSpPr>
+        <p:spPr>
+          <a:xfrm>
+            <a:off x="3840480" y="2057400"/>
+            <a:ext cx="5791200" cy="3072384"/>
+          </a:xfrm>
+          <a:prstGeom prst="rect">
+            <a:avLst/>
+          </a:prstGeom>
+        </p:spPr>
+        <p:txBody>
+          <a:bodyPr wrap="square" anchor="ctr" lIns="0" tIns="0" rIns="0" bIns="0" rtlCol="0"/>
+          <a:lstStyle>
+            <a:lvl1pPr algn="l" marL="0" indent="0">
+              <a:lnSpc>
+                <a:spcPct val="100000"/>
+              </a:lnSpc>
+              <a:buNone/>
+              <a:defRPr lang="th-TH" sz="1200" dirty="0">
+                <a:solidFill>
+                  <a:srgbClr val="5F5F5F"/>
+                </a:solidFill>
+                <a:latin typeface="+mn-lt"/>
+                <a:ea typeface="+mn-ea"/>
+                <a:cs typeface="+mn-cs"/>
+              </a:defRPr>
+            </a:lvl1pPr>
+          </a:lstStyle>
+          <a:p>
+            <a:pPr algn="l" marL="0" indent="0">
+              <a:lnSpc>
+                <a:spcPct val="100000"/>
+              </a:lnSpc>
+              <a:buNone/>
+            </a:pPr>
+            <a:endParaRPr lang="th-TH" sz="1200"/>
+          </a:p>
+        </p:txBody>
+      </p:sp>
+      <p:sp>
+        <p:nvSpPr>
+          <p:cNvPr id="15" name="Row 1 Label"/>
+          <p:cNvSpPr>
+            <a:spLocks noGrp="1"/>
+          </p:cNvSpPr>
+          <p:nvPr>
+            <p:ph type="body" idx="20"/>
+          </p:nvPr>
+        </p:nvSpPr>
+        <p:spPr>
+          <a:xfrm>
+            <a:off x="914400" y="2377440"/>
+            <a:ext cx="2743200" cy="393192"/>
+          </a:xfrm>
+          <a:prstGeom prst="rect">
+            <a:avLst/>
+          </a:prstGeom>
+        </p:spPr>
+        <p:txBody>
+          <a:bodyPr wrap="square" anchor="ctr" lIns="0" tIns="0" rIns="0" bIns="0" rtlCol="0"/>
+          <a:lstStyle>
+            <a:lvl1pPr algn="l" marL="0" indent="0">
+              <a:lnSpc>
+                <a:spcPct val="100000"/>
+              </a:lnSpc>
+              <a:buNone/>
+              <a:defRPr lang="th-TH" sz="1400" dirty="0">
+                <a:solidFill>
+                  <a:srgbClr val="333333"/>
+                </a:solidFill>
+                <a:latin typeface="+mn-lt"/>
+                <a:ea typeface="+mn-ea"/>
+                <a:cs typeface="+mn-cs"/>
+              </a:defRPr>
+            </a:lvl1pPr>
+          </a:lstStyle>
+          <a:p>
+            <a:pPr algn="l" marL="0" indent="0">
+              <a:lnSpc>
+                <a:spcPct val="100000"/>
+              </a:lnSpc>
+              <a:buNone/>
+            </a:pPr>
+            <a:r>
+              <a:rPr lang="th-TH" sz="1400" dirty="0">
+                <a:solidFill>
+                  <a:srgbClr val="333333"/>
+                </a:solidFill>
+                <a:latin typeface="+mn-lt"/>
+                <a:ea typeface="+mn-ea"/>
+                <a:cs typeface="+mn-cs"/>
+              </a:rPr>
+              <a:t>รายการ</a:t>
+            </a:r>
+          </a:p>
+        </p:txBody>
+      </p:sp>
+      <p:sp>
+        <p:nvSpPr>
+          <p:cNvPr id="16" name="Row 1 Change"/>
+          <p:cNvSpPr>
+            <a:spLocks noGrp="1"/>
+          </p:cNvSpPr>
+          <p:nvPr>
+            <p:ph type="body" idx="21"/>
+          </p:nvPr>
+        </p:nvSpPr>
+        <p:spPr>
+          <a:xfrm>
+            <a:off x="9814560" y="2377440"/>
+            <a:ext cx="1463040" cy="393192"/>
+          </a:xfrm>
+          <a:prstGeom prst="rect">
+            <a:avLst/>
+          </a:prstGeom>
+        </p:spPr>
+        <p:txBody>
+          <a:bodyPr wrap="square" anchor="ctr" lIns="0" tIns="0" rIns="0" bIns="0" rtlCol="0"/>
+          <a:lstStyle>
+            <a:lvl1pPr algn="r" marL="0" indent="0">
+              <a:lnSpc>
+                <a:spcPct val="100000"/>
+              </a:lnSpc>
+              <a:buNone/>
+              <a:defRPr lang="th-TH" sz="1400" b="1" dirty="0">
+                <a:solidFill>
+                  <a:srgbClr val="333333"/>
+                </a:solidFill>
+                <a:latin typeface="+mn-lt"/>
+                <a:ea typeface="+mn-ea"/>
+                <a:cs typeface="+mn-cs"/>
+              </a:defRPr>
+            </a:lvl1pPr>
+          </a:lstStyle>
+          <a:p>
+            <a:pPr algn="r" marL="0" indent="0">
+              <a:lnSpc>
+                <a:spcPct val="100000"/>
+              </a:lnSpc>
+              <a:buNone/>
+            </a:pPr>
+            <a:r>
+              <a:rPr lang="th-TH" sz="1400" b="1" dirty="0">
+                <a:solidFill>
+                  <a:srgbClr val="333333"/>
+                </a:solidFill>
+                <a:latin typeface="+mn-lt"/>
+                <a:ea typeface="+mn-ea"/>
+                <a:cs typeface="+mn-cs"/>
+              </a:rPr>
+              <a:t>−0</a:t>
+            </a:r>
+          </a:p>
+        </p:txBody>
+      </p:sp>
+      <p:sp>
+        <p:nvSpPr>
+          <p:cNvPr id="17" name="Row 2 Label"/>
+          <p:cNvSpPr>
+            <a:spLocks noGrp="1"/>
+          </p:cNvSpPr>
+          <p:nvPr>
+            <p:ph type="body" idx="22"/>
+          </p:nvPr>
+        </p:nvSpPr>
+        <p:spPr>
+          <a:xfrm>
+            <a:off x="914400" y="2770632"/>
+            <a:ext cx="2743200" cy="393192"/>
+          </a:xfrm>
+          <a:prstGeom prst="rect">
+            <a:avLst/>
+          </a:prstGeom>
+        </p:spPr>
+        <p:txBody>
+          <a:bodyPr wrap="square" anchor="ctr" lIns="0" tIns="0" rIns="0" bIns="0" rtlCol="0"/>
+          <a:lstStyle>
+            <a:lvl1pPr algn="l" marL="0" indent="0">
+              <a:lnSpc>
+                <a:spcPct val="100000"/>
+              </a:lnSpc>
+              <a:buNone/>
+              <a:defRPr lang="th-TH" sz="1400" dirty="0">
+                <a:solidFill>
+                  <a:srgbClr val="333333"/>
+                </a:solidFill>
+                <a:latin typeface="+mn-lt"/>
+                <a:ea typeface="+mn-ea"/>
+                <a:cs typeface="+mn-cs"/>
+              </a:defRPr>
+            </a:lvl1pPr>
+          </a:lstStyle>
+          <a:p>
+            <a:pPr algn="l" marL="0" indent="0">
+              <a:lnSpc>
+                <a:spcPct val="100000"/>
+              </a:lnSpc>
+              <a:buNone/>
+            </a:pPr>
+            <a:r>
+              <a:rPr lang="th-TH" sz="1400" dirty="0">
+                <a:solidFill>
+                  <a:srgbClr val="333333"/>
+                </a:solidFill>
+                <a:latin typeface="+mn-lt"/>
+                <a:ea typeface="+mn-ea"/>
+                <a:cs typeface="+mn-cs"/>
+              </a:rPr>
+              <a:t>รายการ</a:t>
+            </a:r>
+          </a:p>
+        </p:txBody>
+      </p:sp>
+      <p:sp>
+        <p:nvSpPr>
+          <p:cNvPr id="18" name="Row 2 Change"/>
+          <p:cNvSpPr>
+            <a:spLocks noGrp="1"/>
+          </p:cNvSpPr>
+          <p:nvPr>
+            <p:ph type="body" idx="23"/>
+          </p:nvPr>
+        </p:nvSpPr>
+        <p:spPr>
+          <a:xfrm>
+            <a:off x="9814560" y="2770632"/>
+            <a:ext cx="1463040" cy="393192"/>
+          </a:xfrm>
+          <a:prstGeom prst="rect">
+            <a:avLst/>
+          </a:prstGeom>
+        </p:spPr>
+        <p:txBody>
+          <a:bodyPr wrap="square" anchor="ctr" lIns="0" tIns="0" rIns="0" bIns="0" rtlCol="0"/>
+          <a:lstStyle>
+            <a:lvl1pPr algn="r" marL="0" indent="0">
+              <a:lnSpc>
+                <a:spcPct val="100000"/>
+              </a:lnSpc>
+              <a:buNone/>
+              <a:defRPr lang="th-TH" sz="1400" b="1" dirty="0">
+                <a:solidFill>
+                  <a:srgbClr val="333333"/>
+                </a:solidFill>
+                <a:latin typeface="+mn-lt"/>
+                <a:ea typeface="+mn-ea"/>
+                <a:cs typeface="+mn-cs"/>
+              </a:defRPr>
+            </a:lvl1pPr>
+          </a:lstStyle>
+          <a:p>
+            <a:pPr algn="r" marL="0" indent="0">
+              <a:lnSpc>
+                <a:spcPct val="100000"/>
+              </a:lnSpc>
+              <a:buNone/>
+            </a:pPr>
+            <a:r>
+              <a:rPr lang="th-TH" sz="1400" b="1" dirty="0">
+                <a:solidFill>
+                  <a:srgbClr val="333333"/>
+                </a:solidFill>
+                <a:latin typeface="+mn-lt"/>
+                <a:ea typeface="+mn-ea"/>
+                <a:cs typeface="+mn-cs"/>
+              </a:rPr>
+              <a:t>−0</a:t>
+            </a:r>
+          </a:p>
+        </p:txBody>
+      </p:sp>
+      <p:sp>
+        <p:nvSpPr>
+          <p:cNvPr id="19" name="Row 3 Label"/>
+          <p:cNvSpPr>
+            <a:spLocks noGrp="1"/>
+          </p:cNvSpPr>
+          <p:nvPr>
+            <p:ph type="body" idx="24"/>
+          </p:nvPr>
+        </p:nvSpPr>
+        <p:spPr>
+          <a:xfrm>
+            <a:off x="914400" y="3163824"/>
+            <a:ext cx="2743200" cy="393192"/>
+          </a:xfrm>
+          <a:prstGeom prst="rect">
+            <a:avLst/>
+          </a:prstGeom>
+        </p:spPr>
+        <p:txBody>
+          <a:bodyPr wrap="square" anchor="ctr" lIns="0" tIns="0" rIns="0" bIns="0" rtlCol="0"/>
+          <a:lstStyle>
+            <a:lvl1pPr algn="l" marL="0" indent="0">
+              <a:lnSpc>
+                <a:spcPct val="100000"/>
+              </a:lnSpc>
+              <a:buNone/>
+              <a:defRPr lang="th-TH" sz="1400" dirty="0">
+                <a:solidFill>
+                  <a:srgbClr val="333333"/>
+                </a:solidFill>
+                <a:latin typeface="+mn-lt"/>
+                <a:ea typeface="+mn-ea"/>
+                <a:cs typeface="+mn-cs"/>
+              </a:defRPr>
+            </a:lvl1pPr>
+          </a:lstStyle>
+          <a:p>
+            <a:pPr algn="l" marL="0" indent="0">
+              <a:lnSpc>
+                <a:spcPct val="100000"/>
+              </a:lnSpc>
+              <a:buNone/>
+            </a:pPr>
+            <a:r>
+              <a:rPr lang="th-TH" sz="1400" dirty="0">
+                <a:solidFill>
+                  <a:srgbClr val="333333"/>
+                </a:solidFill>
+                <a:latin typeface="+mn-lt"/>
+                <a:ea typeface="+mn-ea"/>
+                <a:cs typeface="+mn-cs"/>
+              </a:rPr>
+              <a:t>รายการ</a:t>
+            </a:r>
+          </a:p>
+        </p:txBody>
+      </p:sp>
+      <p:sp>
+        <p:nvSpPr>
+          <p:cNvPr id="20" name="Row 3 Change"/>
+          <p:cNvSpPr>
+            <a:spLocks noGrp="1"/>
+          </p:cNvSpPr>
+          <p:nvPr>
+            <p:ph type="body" idx="25"/>
+          </p:nvPr>
+        </p:nvSpPr>
+        <p:spPr>
+          <a:xfrm>
+            <a:off x="9814560" y="3163824"/>
+            <a:ext cx="1463040" cy="393192"/>
+          </a:xfrm>
+          <a:prstGeom prst="rect">
+            <a:avLst/>
+          </a:prstGeom>
+        </p:spPr>
+        <p:txBody>
+          <a:bodyPr wrap="square" anchor="ctr" lIns="0" tIns="0" rIns="0" bIns="0" rtlCol="0"/>
+          <a:lstStyle>
+            <a:lvl1pPr algn="r" marL="0" indent="0">
+              <a:lnSpc>
+                <a:spcPct val="100000"/>
+              </a:lnSpc>
+              <a:buNone/>
+              <a:defRPr lang="th-TH" sz="1400" b="1" dirty="0">
+                <a:solidFill>
+                  <a:srgbClr val="333333"/>
+                </a:solidFill>
+                <a:latin typeface="+mn-lt"/>
+                <a:ea typeface="+mn-ea"/>
+                <a:cs typeface="+mn-cs"/>
+              </a:defRPr>
+            </a:lvl1pPr>
+          </a:lstStyle>
+          <a:p>
+            <a:pPr algn="r" marL="0" indent="0">
+              <a:lnSpc>
+                <a:spcPct val="100000"/>
+              </a:lnSpc>
+              <a:buNone/>
+            </a:pPr>
+            <a:r>
+              <a:rPr lang="th-TH" sz="1400" b="1" dirty="0">
+                <a:solidFill>
+                  <a:srgbClr val="333333"/>
+                </a:solidFill>
+                <a:latin typeface="+mn-lt"/>
+                <a:ea typeface="+mn-ea"/>
+                <a:cs typeface="+mn-cs"/>
+              </a:rPr>
+              <a:t>−0</a:t>
+            </a:r>
+          </a:p>
+        </p:txBody>
+      </p:sp>
+      <p:sp>
+        <p:nvSpPr>
+          <p:cNvPr id="21" name="Row 4 Label"/>
+          <p:cNvSpPr>
+            <a:spLocks noGrp="1"/>
+          </p:cNvSpPr>
+          <p:nvPr>
+            <p:ph type="body" idx="26"/>
+          </p:nvPr>
+        </p:nvSpPr>
+        <p:spPr>
+          <a:xfrm>
+            <a:off x="914400" y="3557016"/>
+            <a:ext cx="2743200" cy="393192"/>
+          </a:xfrm>
+          <a:prstGeom prst="rect">
+            <a:avLst/>
+          </a:prstGeom>
+        </p:spPr>
+        <p:txBody>
+          <a:bodyPr wrap="square" anchor="ctr" lIns="0" tIns="0" rIns="0" bIns="0" rtlCol="0"/>
+          <a:lstStyle>
+            <a:lvl1pPr algn="l" marL="0" indent="0">
+              <a:lnSpc>
+                <a:spcPct val="100000"/>
+              </a:lnSpc>
+              <a:buNone/>
+              <a:defRPr lang="th-TH" sz="1400" dirty="0">
+                <a:solidFill>
+                  <a:srgbClr val="333333"/>
+                </a:solidFill>
+                <a:latin typeface="+mn-lt"/>
+                <a:ea typeface="+mn-ea"/>
+                <a:cs typeface="+mn-cs"/>
+              </a:defRPr>
+            </a:lvl1pPr>
+          </a:lstStyle>
+          <a:p>
+            <a:pPr algn="l" marL="0" indent="0">
+              <a:lnSpc>
+                <a:spcPct val="100000"/>
+              </a:lnSpc>
+              <a:buNone/>
+            </a:pPr>
+            <a:r>
+              <a:rPr lang="th-TH" sz="1400" dirty="0">
+                <a:solidFill>
+                  <a:srgbClr val="333333"/>
+                </a:solidFill>
+                <a:latin typeface="+mn-lt"/>
+                <a:ea typeface="+mn-ea"/>
+                <a:cs typeface="+mn-cs"/>
+              </a:rPr>
+              <a:t>รายการ</a:t>
+            </a:r>
+          </a:p>
+        </p:txBody>
+      </p:sp>
+      <p:sp>
+        <p:nvSpPr>
+          <p:cNvPr id="22" name="Row 4 Change"/>
+          <p:cNvSpPr>
+            <a:spLocks noGrp="1"/>
+          </p:cNvSpPr>
+          <p:nvPr>
+            <p:ph type="body" idx="27"/>
+          </p:nvPr>
+        </p:nvSpPr>
+        <p:spPr>
+          <a:xfrm>
+            <a:off x="9814560" y="3557016"/>
+            <a:ext cx="1463040" cy="393192"/>
+          </a:xfrm>
+          <a:prstGeom prst="rect">
+            <a:avLst/>
+          </a:prstGeom>
+        </p:spPr>
+        <p:txBody>
+          <a:bodyPr wrap="square" anchor="ctr" lIns="0" tIns="0" rIns="0" bIns="0" rtlCol="0"/>
+          <a:lstStyle>
+            <a:lvl1pPr algn="r" marL="0" indent="0">
+              <a:lnSpc>
+                <a:spcPct val="100000"/>
+              </a:lnSpc>
+              <a:buNone/>
+              <a:defRPr lang="th-TH" sz="1400" b="1" dirty="0">
+                <a:solidFill>
+                  <a:srgbClr val="333333"/>
+                </a:solidFill>
+                <a:latin typeface="+mn-lt"/>
+                <a:ea typeface="+mn-ea"/>
+                <a:cs typeface="+mn-cs"/>
+              </a:defRPr>
+            </a:lvl1pPr>
+          </a:lstStyle>
+          <a:p>
+            <a:pPr algn="r" marL="0" indent="0">
+              <a:lnSpc>
+                <a:spcPct val="100000"/>
+              </a:lnSpc>
+              <a:buNone/>
+            </a:pPr>
+            <a:r>
+              <a:rPr lang="th-TH" sz="1400" b="1" dirty="0">
+                <a:solidFill>
+                  <a:srgbClr val="333333"/>
+                </a:solidFill>
+                <a:latin typeface="+mn-lt"/>
+                <a:ea typeface="+mn-ea"/>
+                <a:cs typeface="+mn-cs"/>
+              </a:rPr>
+              <a:t>−0</a:t>
+            </a:r>
+          </a:p>
+        </p:txBody>
+      </p:sp>
+      <p:sp>
+        <p:nvSpPr>
+          <p:cNvPr id="23" name="Row 5 Label"/>
+          <p:cNvSpPr>
+            <a:spLocks noGrp="1"/>
+          </p:cNvSpPr>
+          <p:nvPr>
+            <p:ph type="body" idx="28"/>
+          </p:nvPr>
+        </p:nvSpPr>
+        <p:spPr>
+          <a:xfrm>
+            <a:off x="914400" y="3950208"/>
+            <a:ext cx="2743200" cy="393192"/>
+          </a:xfrm>
+          <a:prstGeom prst="rect">
+            <a:avLst/>
+          </a:prstGeom>
+        </p:spPr>
+        <p:txBody>
+          <a:bodyPr wrap="square" anchor="ctr" lIns="0" tIns="0" rIns="0" bIns="0" rtlCol="0"/>
+          <a:lstStyle>
+            <a:lvl1pPr algn="l" marL="0" indent="0">
+              <a:lnSpc>
+                <a:spcPct val="100000"/>
+              </a:lnSpc>
+              <a:buNone/>
+              <a:defRPr lang="th-TH" sz="1400" dirty="0">
+                <a:solidFill>
+                  <a:srgbClr val="333333"/>
+                </a:solidFill>
+                <a:latin typeface="+mn-lt"/>
+                <a:ea typeface="+mn-ea"/>
+                <a:cs typeface="+mn-cs"/>
+              </a:defRPr>
+            </a:lvl1pPr>
+          </a:lstStyle>
+          <a:p>
+            <a:pPr algn="l" marL="0" indent="0">
+              <a:lnSpc>
+                <a:spcPct val="100000"/>
+              </a:lnSpc>
+              <a:buNone/>
+            </a:pPr>
+            <a:r>
+              <a:rPr lang="th-TH" sz="1400" dirty="0">
+                <a:solidFill>
+                  <a:srgbClr val="333333"/>
+                </a:solidFill>
+                <a:latin typeface="+mn-lt"/>
+                <a:ea typeface="+mn-ea"/>
+                <a:cs typeface="+mn-cs"/>
+              </a:rPr>
+              <a:t>รายการ</a:t>
+            </a:r>
+          </a:p>
+        </p:txBody>
+      </p:sp>
+      <p:sp>
+        <p:nvSpPr>
+          <p:cNvPr id="24" name="Row 5 Change"/>
+          <p:cNvSpPr>
+            <a:spLocks noGrp="1"/>
+          </p:cNvSpPr>
+          <p:nvPr>
+            <p:ph type="body" idx="29"/>
+          </p:nvPr>
+        </p:nvSpPr>
+        <p:spPr>
+          <a:xfrm>
+            <a:off x="9814560" y="3950208"/>
+            <a:ext cx="1463040" cy="393192"/>
+          </a:xfrm>
+          <a:prstGeom prst="rect">
+            <a:avLst/>
+          </a:prstGeom>
+        </p:spPr>
+        <p:txBody>
+          <a:bodyPr wrap="square" anchor="ctr" lIns="0" tIns="0" rIns="0" bIns="0" rtlCol="0"/>
+          <a:lstStyle>
+            <a:lvl1pPr algn="r" marL="0" indent="0">
+              <a:lnSpc>
+                <a:spcPct val="100000"/>
+              </a:lnSpc>
+              <a:buNone/>
+              <a:defRPr lang="th-TH" sz="1400" b="1" dirty="0">
+                <a:solidFill>
+                  <a:srgbClr val="333333"/>
+                </a:solidFill>
+                <a:latin typeface="+mn-lt"/>
+                <a:ea typeface="+mn-ea"/>
+                <a:cs typeface="+mn-cs"/>
+              </a:defRPr>
+            </a:lvl1pPr>
+          </a:lstStyle>
+          <a:p>
+            <a:pPr algn="r" marL="0" indent="0">
+              <a:lnSpc>
+                <a:spcPct val="100000"/>
+              </a:lnSpc>
+              <a:buNone/>
+            </a:pPr>
+            <a:r>
+              <a:rPr lang="th-TH" sz="1400" b="1" dirty="0">
+                <a:solidFill>
+                  <a:srgbClr val="333333"/>
+                </a:solidFill>
+                <a:latin typeface="+mn-lt"/>
+                <a:ea typeface="+mn-ea"/>
+                <a:cs typeface="+mn-cs"/>
+              </a:rPr>
+              <a:t>−0</a:t>
+            </a:r>
+          </a:p>
+        </p:txBody>
+      </p:sp>
+      <p:sp>
+        <p:nvSpPr>
+          <p:cNvPr id="25" name="Row 6 Label"/>
+          <p:cNvSpPr>
+            <a:spLocks noGrp="1"/>
+          </p:cNvSpPr>
+          <p:nvPr>
+            <p:ph type="body" idx="30"/>
+          </p:nvPr>
+        </p:nvSpPr>
+        <p:spPr>
+          <a:xfrm>
+            <a:off x="914400" y="4343400"/>
+            <a:ext cx="2743200" cy="393192"/>
+          </a:xfrm>
+          <a:prstGeom prst="rect">
+            <a:avLst/>
+          </a:prstGeom>
+        </p:spPr>
+        <p:txBody>
+          <a:bodyPr wrap="square" anchor="ctr" lIns="0" tIns="0" rIns="0" bIns="0" rtlCol="0"/>
+          <a:lstStyle>
+            <a:lvl1pPr algn="l" marL="0" indent="0">
+              <a:lnSpc>
+                <a:spcPct val="100000"/>
+              </a:lnSpc>
+              <a:buNone/>
+              <a:defRPr lang="th-TH" sz="1400" dirty="0">
+                <a:solidFill>
+                  <a:srgbClr val="333333"/>
+                </a:solidFill>
+                <a:latin typeface="+mn-lt"/>
+                <a:ea typeface="+mn-ea"/>
+                <a:cs typeface="+mn-cs"/>
+              </a:defRPr>
+            </a:lvl1pPr>
+          </a:lstStyle>
+          <a:p>
+            <a:pPr algn="l" marL="0" indent="0">
+              <a:lnSpc>
+                <a:spcPct val="100000"/>
+              </a:lnSpc>
+              <a:buNone/>
+            </a:pPr>
+            <a:r>
+              <a:rPr lang="th-TH" sz="1400" dirty="0">
+                <a:solidFill>
+                  <a:srgbClr val="333333"/>
+                </a:solidFill>
+                <a:latin typeface="+mn-lt"/>
+                <a:ea typeface="+mn-ea"/>
+                <a:cs typeface="+mn-cs"/>
+              </a:rPr>
+              <a:t>รายการ</a:t>
+            </a:r>
+          </a:p>
+        </p:txBody>
+      </p:sp>
+      <p:sp>
+        <p:nvSpPr>
+          <p:cNvPr id="26" name="Row 6 Change"/>
+          <p:cNvSpPr>
+            <a:spLocks noGrp="1"/>
+          </p:cNvSpPr>
+          <p:nvPr>
+            <p:ph type="body" idx="31"/>
+          </p:nvPr>
+        </p:nvSpPr>
+        <p:spPr>
+          <a:xfrm>
+            <a:off x="9814560" y="4343400"/>
+            <a:ext cx="1463040" cy="393192"/>
+          </a:xfrm>
+          <a:prstGeom prst="rect">
+            <a:avLst/>
+          </a:prstGeom>
+        </p:spPr>
+        <p:txBody>
+          <a:bodyPr wrap="square" anchor="ctr" lIns="0" tIns="0" rIns="0" bIns="0" rtlCol="0"/>
+          <a:lstStyle>
+            <a:lvl1pPr algn="r" marL="0" indent="0">
+              <a:lnSpc>
+                <a:spcPct val="100000"/>
+              </a:lnSpc>
+              <a:buNone/>
+              <a:defRPr lang="th-TH" sz="1400" b="1" dirty="0">
+                <a:solidFill>
+                  <a:srgbClr val="333333"/>
+                </a:solidFill>
+                <a:latin typeface="+mn-lt"/>
+                <a:ea typeface="+mn-ea"/>
+                <a:cs typeface="+mn-cs"/>
+              </a:defRPr>
+            </a:lvl1pPr>
+          </a:lstStyle>
+          <a:p>
+            <a:pPr algn="r" marL="0" indent="0">
+              <a:lnSpc>
+                <a:spcPct val="100000"/>
+              </a:lnSpc>
+              <a:buNone/>
+            </a:pPr>
+            <a:r>
+              <a:rPr lang="th-TH" sz="1400" b="1" dirty="0">
+                <a:solidFill>
+                  <a:srgbClr val="333333"/>
+                </a:solidFill>
+                <a:latin typeface="+mn-lt"/>
+                <a:ea typeface="+mn-ea"/>
+                <a:cs typeface="+mn-cs"/>
+              </a:rPr>
+              <a:t>−0</a:t>
+            </a:r>
+          </a:p>
+        </p:txBody>
+      </p:sp>
+      <p:sp>
+        <p:nvSpPr>
+          <p:cNvPr id="27" name="Row 7 Label"/>
+          <p:cNvSpPr>
+            <a:spLocks noGrp="1"/>
+          </p:cNvSpPr>
+          <p:nvPr>
+            <p:ph type="body" idx="32"/>
+          </p:nvPr>
+        </p:nvSpPr>
+        <p:spPr>
+          <a:xfrm>
+            <a:off x="914400" y="4736592"/>
+            <a:ext cx="2743200" cy="393192"/>
+          </a:xfrm>
+          <a:prstGeom prst="rect">
+            <a:avLst/>
+          </a:prstGeom>
+        </p:spPr>
+        <p:txBody>
+          <a:bodyPr wrap="square" anchor="ctr" lIns="0" tIns="0" rIns="0" bIns="0" rtlCol="0"/>
+          <a:lstStyle>
+            <a:lvl1pPr algn="l" marL="0" indent="0">
+              <a:lnSpc>
+                <a:spcPct val="100000"/>
+              </a:lnSpc>
+              <a:buNone/>
+              <a:defRPr lang="th-TH" sz="1400" dirty="0">
+                <a:solidFill>
+                  <a:srgbClr val="333333"/>
+                </a:solidFill>
+                <a:latin typeface="+mn-lt"/>
+                <a:ea typeface="+mn-ea"/>
+                <a:cs typeface="+mn-cs"/>
+              </a:defRPr>
+            </a:lvl1pPr>
+          </a:lstStyle>
+          <a:p>
+            <a:pPr algn="l" marL="0" indent="0">
+              <a:lnSpc>
+                <a:spcPct val="100000"/>
+              </a:lnSpc>
+              <a:buNone/>
+            </a:pPr>
+            <a:r>
+              <a:rPr lang="th-TH" sz="1400" dirty="0">
+                <a:solidFill>
+                  <a:srgbClr val="333333"/>
+                </a:solidFill>
+                <a:latin typeface="+mn-lt"/>
+                <a:ea typeface="+mn-ea"/>
+                <a:cs typeface="+mn-cs"/>
+              </a:rPr>
+              <a:t>รายการ</a:t>
+            </a:r>
+          </a:p>
+        </p:txBody>
+      </p:sp>
+      <p:sp>
+        <p:nvSpPr>
+          <p:cNvPr id="28" name="Row 7 Change"/>
+          <p:cNvSpPr>
+            <a:spLocks noGrp="1"/>
+          </p:cNvSpPr>
+          <p:nvPr>
+            <p:ph type="body" idx="33"/>
+          </p:nvPr>
+        </p:nvSpPr>
+        <p:spPr>
+          <a:xfrm>
+            <a:off x="9814560" y="4736592"/>
+            <a:ext cx="1463040" cy="393192"/>
+          </a:xfrm>
+          <a:prstGeom prst="rect">
+            <a:avLst/>
+          </a:prstGeom>
+        </p:spPr>
+        <p:txBody>
+          <a:bodyPr wrap="square" anchor="ctr" lIns="0" tIns="0" rIns="0" bIns="0" rtlCol="0"/>
+          <a:lstStyle>
+            <a:lvl1pPr algn="r" marL="0" indent="0">
+              <a:lnSpc>
+                <a:spcPct val="100000"/>
+              </a:lnSpc>
+              <a:buNone/>
+              <a:defRPr lang="th-TH" sz="1400" b="1" dirty="0">
+                <a:solidFill>
+                  <a:srgbClr val="333333"/>
+                </a:solidFill>
+                <a:latin typeface="+mn-lt"/>
+                <a:ea typeface="+mn-ea"/>
+                <a:cs typeface="+mn-cs"/>
+              </a:defRPr>
+            </a:lvl1pPr>
+          </a:lstStyle>
+          <a:p>
+            <a:pPr algn="r" marL="0" indent="0">
+              <a:lnSpc>
+                <a:spcPct val="100000"/>
+              </a:lnSpc>
+              <a:buNone/>
+            </a:pPr>
+            <a:r>
+              <a:rPr lang="th-TH" sz="1400" b="1" dirty="0">
+                <a:solidFill>
+                  <a:srgbClr val="333333"/>
+                </a:solidFill>
+                <a:latin typeface="+mn-lt"/>
+                <a:ea typeface="+mn-ea"/>
+                <a:cs typeface="+mn-cs"/>
+              </a:rPr>
+              <a:t>−0</a:t>
+            </a:r>
+          </a:p>
+        </p:txBody>
+      </p:sp>
+      <p:sp>
+        <p:nvSpPr>
+          <p:cNvPr id="29" name="Source"/>
+          <p:cNvSpPr>
+            <a:spLocks noGrp="1"/>
+          </p:cNvSpPr>
+          <p:nvPr>
+            <p:ph type="body" idx="4"/>
+          </p:nvPr>
+        </p:nvSpPr>
+        <p:spPr>
+          <a:xfrm>
+            <a:off x="914400" y="5257800"/>
+            <a:ext cx="10363200" cy="274320"/>
+          </a:xfrm>
+          <a:prstGeom prst="rect">
+            <a:avLst/>
+          </a:prstGeom>
+        </p:spPr>
+        <p:txBody>
+          <a:bodyPr wrap="square" anchor="t" lIns="0" tIns="0" rIns="0" bIns="0" rtlCol="0"/>
+          <a:lstStyle>
+            <a:lvl1pPr algn="l" marL="0" indent="0">
+              <a:lnSpc>
+                <a:spcPct val="130000"/>
+              </a:lnSpc>
+              <a:buNone/>
+              <a:defRPr lang="th-TH" sz="1000" dirty="0">
+                <a:solidFill>
+                  <a:srgbClr val="5F5F5F"/>
+                </a:solidFill>
+                <a:latin typeface="+mn-lt"/>
+                <a:ea typeface="+mn-ea"/>
+                <a:cs typeface="+mn-cs"/>
+              </a:defRPr>
+            </a:lvl1pPr>
+          </a:lstStyle>
+          <a:p>
+            <a:pPr algn="l" marL="0" indent="0">
+              <a:lnSpc>
+                <a:spcPct val="130000"/>
+              </a:lnSpc>
+              <a:buNone/>
+            </a:pPr>
+            <a:r>
+              <a:rPr lang="th-TH" sz="1000" dirty="0">
+                <a:solidFill>
+                  <a:srgbClr val="5F5F5F"/>
+                </a:solidFill>
+                <a:latin typeface="+mn-lt"/>
+                <a:ea typeface="+mn-ea"/>
+                <a:cs typeface="+mn-cs"/>
+              </a:rPr>
+              <a:t>ที่มาของตัวเลข · ตัวเลขเต็มอยู่ภาคผนวก</a:t>
+            </a:r>
+          </a:p>
+        </p:txBody>
+      </p:sp>
+      <p:sp>
+        <p:nvSpPr>
+          <p:cNvPr id="30" name="Takeaway Band"/>
+          <p:cNvSpPr/>
+          <p:nvPr/>
+        </p:nvSpPr>
+        <p:spPr>
+          <a:xfrm>
+            <a:off x="914400" y="5623560"/>
+            <a:ext cx="10363200" cy="411480"/>
+          </a:xfrm>
+          <a:prstGeom prst="rect">
+            <a:avLst/>
+          </a:prstGeom>
+          <a:solidFill>
+            <a:srgbClr val="E8F6F5"/>
+          </a:solidFill>
+          <a:ln>
+            <a:noFill/>
+          </a:ln>
+        </p:spPr>
+        <p:txBody>
+          <a:bodyPr/>
+          <a:lstStyle/>
+          <a:p>
+            <a:endParaRPr lang="th-TH"/>
+          </a:p>
+        </p:txBody>
+      </p:sp>
+      <p:sp>
+        <p:nvSpPr>
+          <p:cNvPr id="31" name="Takeaway Label"/>
+          <p:cNvSpPr>
+            <a:spLocks noGrp="1"/>
+          </p:cNvSpPr>
+          <p:nvPr>
+            <p:ph type="body" idx="5"/>
+          </p:nvPr>
+        </p:nvSpPr>
+        <p:spPr>
+          <a:xfrm>
+            <a:off x="1097280" y="5684520"/>
+            <a:ext cx="1828800" cy="289560"/>
+          </a:xfrm>
+          <a:prstGeom prst="rect">
+            <a:avLst/>
+          </a:prstGeom>
+        </p:spPr>
+        <p:txBody>
+          <a:bodyPr wrap="square" anchor="ctr" lIns="0" tIns="0" rIns="0" bIns="0" rtlCol="0"/>
+          <a:lstStyle>
+            <a:lvl1pPr algn="l" marL="0" indent="0">
+              <a:lnSpc>
+                <a:spcPct val="100000"/>
+              </a:lnSpc>
+              <a:buNone/>
+              <a:defRPr lang="th-TH" sz="1200" b="1" spc="120" dirty="0">
+                <a:solidFill>
+                  <a:srgbClr val="216B7F"/>
+                </a:solidFill>
+                <a:latin typeface="+mn-lt"/>
+                <a:ea typeface="+mn-ea"/>
+                <a:cs typeface="+mn-cs"/>
+              </a:defRPr>
+            </a:lvl1pPr>
+          </a:lstStyle>
+          <a:p>
+            <a:pPr algn="l" marL="0" indent="0">
+              <a:lnSpc>
+                <a:spcPct val="100000"/>
+              </a:lnSpc>
+              <a:buNone/>
+            </a:pPr>
+            <a:r>
+              <a:rPr lang="th-TH" sz="1200" b="1" spc="120" dirty="0">
+                <a:solidFill>
+                  <a:srgbClr val="216B7F"/>
+                </a:solidFill>
+                <a:latin typeface="+mn-lt"/>
+                <a:ea typeface="+mn-ea"/>
+                <a:cs typeface="+mn-cs"/>
+              </a:rPr>
+              <a:t>สรุป</a:t>
+            </a:r>
+          </a:p>
+        </p:txBody>
+      </p:sp>
+      <p:sp>
+        <p:nvSpPr>
+          <p:cNvPr id="32" name="Takeaway Copy"/>
+          <p:cNvSpPr>
+            <a:spLocks noGrp="1"/>
+          </p:cNvSpPr>
+          <p:nvPr>
+            <p:ph type="body" idx="6"/>
+          </p:nvPr>
+        </p:nvSpPr>
+        <p:spPr>
+          <a:xfrm>
+            <a:off x="2926080" y="5684520"/>
+            <a:ext cx="8168640" cy="289560"/>
+          </a:xfrm>
+          <a:prstGeom prst="rect">
+            <a:avLst/>
+          </a:prstGeom>
+        </p:spPr>
+        <p:txBody>
+          <a:bodyPr wrap="square" anchor="ctr" lIns="0" tIns="0" rIns="0" bIns="0" rtlCol="0"/>
+          <a:lstStyle>
+            <a:lvl1pPr algn="l" marL="0" indent="0">
+              <a:lnSpc>
+                <a:spcPct val="100000"/>
+              </a:lnSpc>
+              <a:buNone/>
+              <a:defRPr lang="th-TH" sz="1400" dirty="0">
+                <a:solidFill>
+                  <a:srgbClr val="333333"/>
+                </a:solidFill>
+                <a:latin typeface="+mn-lt"/>
+                <a:ea typeface="+mn-ea"/>
+                <a:cs typeface="+mn-cs"/>
+              </a:defRPr>
+            </a:lvl1pPr>
+          </a:lstStyle>
+          <a:p>
+            <a:pPr algn="l" marL="0" indent="0">
+              <a:lnSpc>
+                <a:spcPct val="100000"/>
+              </a:lnSpc>
+              <a:buNone/>
+            </a:pPr>
+            <a:r>
+              <a:rPr lang="th-TH" sz="1400" dirty="0">
+                <a:solidFill>
+                  <a:srgbClr val="333333"/>
+                </a:solidFill>
+                <a:latin typeface="+mn-lt"/>
+                <a:ea typeface="+mn-ea"/>
+                <a:cs typeface="+mn-cs"/>
+              </a:rPr>
+              <a:t>ประเด็นสรุปหนึ่งบรรทัด</a:t>
+            </a:r>
+          </a:p>
+        </p:txBody>
+      </p:sp>
+      <p:sp>
+        <p:nvSpPr>
+          <p:cNvPr id="90" name="Footer Rule"/>
+          <p:cNvSpPr/>
+          <p:nvPr/>
+        </p:nvSpPr>
+        <p:spPr>
+          <a:xfrm>
+            <a:off x="914400" y="6172200"/>
+            <a:ext cx="10363200" cy="12700"/>
+          </a:xfrm>
+          <a:prstGeom prst="rect">
+            <a:avLst/>
+          </a:prstGeom>
+          <a:solidFill>
+            <a:srgbClr val="E5E5E5"/>
+          </a:solidFill>
+          <a:ln>
+            <a:noFill/>
+          </a:ln>
+        </p:spPr>
+        <p:txBody>
+          <a:bodyPr/>
+          <a:lstStyle/>
+          <a:p>
+            <a:endParaRPr lang="th-TH"/>
+          </a:p>
+        </p:txBody>
+      </p:sp>
+      <p:sp>
+        <p:nvSpPr>
+          <p:cNvPr id="91" name="Date Placeholder"/>
+          <p:cNvSpPr>
+            <a:spLocks noGrp="1"/>
+          </p:cNvSpPr>
+          <p:nvPr>
+            <p:ph type="dt" idx="10"/>
+          </p:nvPr>
+        </p:nvSpPr>
+        <p:spPr>
+          <a:xfrm>
+            <a:off x="914400" y="6309360"/>
+            <a:ext cx="2743200" cy="274320"/>
+          </a:xfrm>
+          <a:prstGeom prst="rect">
+            <a:avLst/>
+          </a:prstGeom>
+        </p:spPr>
+        <p:txBody>
+          <a:bodyPr wrap="square" anchor="ctr" lIns="0" tIns="0" rIns="0" bIns="0" rtlCol="0"/>
+          <a:lstStyle>
+            <a:lvl1pPr algn="l" marL="0" indent="0">
+              <a:lnSpc>
+                <a:spcPct val="100000"/>
+              </a:lnSpc>
+              <a:buNone/>
+              <a:defRPr lang="th-TH" sz="1000" dirty="0">
+                <a:solidFill>
+                  <a:srgbClr val="5F5F5F"/>
+                </a:solidFill>
+                <a:latin typeface="+mn-lt"/>
+                <a:ea typeface="+mn-ea"/>
+                <a:cs typeface="+mn-cs"/>
+              </a:defRPr>
+            </a:lvl1pPr>
+          </a:lstStyle>
+          <a:p>
+            <a:pPr algn="l" marL="0" indent="0">
+              <a:lnSpc>
+                <a:spcPct val="100000"/>
+              </a:lnSpc>
+              <a:buNone/>
+            </a:pPr>
+            <a:endParaRPr lang="th-TH" sz="1000"/>
+          </a:p>
+        </p:txBody>
+      </p:sp>
+      <p:sp>
+        <p:nvSpPr>
+          <p:cNvPr id="92" name="Footer Placeholder"/>
+          <p:cNvSpPr>
+            <a:spLocks noGrp="1"/>
+          </p:cNvSpPr>
+          <p:nvPr>
+            <p:ph type="ftr" idx="11"/>
+          </p:nvPr>
+        </p:nvSpPr>
+        <p:spPr>
+          <a:xfrm>
+            <a:off x="4572000" y="6309360"/>
+            <a:ext cx="3657600" cy="274320"/>
+          </a:xfrm>
+          <a:prstGeom prst="rect">
+            <a:avLst/>
+          </a:prstGeom>
+        </p:spPr>
+        <p:txBody>
+          <a:bodyPr wrap="square" anchor="ctr" lIns="0" tIns="0" rIns="0" bIns="0" rtlCol="0"/>
+          <a:lstStyle>
+            <a:lvl1pPr algn="ctr" marL="0" indent="0">
+              <a:lnSpc>
+                <a:spcPct val="100000"/>
+              </a:lnSpc>
+              <a:buNone/>
+              <a:defRPr lang="th-TH" sz="1000" dirty="0">
+                <a:solidFill>
+                  <a:srgbClr val="5F5F5F"/>
+                </a:solidFill>
+                <a:latin typeface="+mn-lt"/>
+                <a:ea typeface="+mn-ea"/>
+                <a:cs typeface="+mn-cs"/>
+              </a:defRPr>
+            </a:lvl1pPr>
+          </a:lstStyle>
+          <a:p>
+            <a:pPr algn="ctr" marL="0" indent="0">
+              <a:lnSpc>
+                <a:spcPct val="100000"/>
+              </a:lnSpc>
+              <a:buNone/>
+            </a:pPr>
+            <a:endParaRPr lang="th-TH" sz="1000"/>
+          </a:p>
+        </p:txBody>
+      </p:sp>
+      <p:sp>
+        <p:nvSpPr>
+          <p:cNvPr id="93" name="Slide Number Placeholder"/>
+          <p:cNvSpPr>
+            <a:spLocks noGrp="1"/>
+          </p:cNvSpPr>
+          <p:nvPr>
+            <p:ph type="sldNum" sz="quarter" idx="12"/>
+          </p:nvPr>
+        </p:nvSpPr>
+        <p:spPr>
+          <a:xfrm>
+            <a:off x="9906000" y="6309360"/>
+            <a:ext cx="1371600" cy="274320"/>
+          </a:xfrm>
+          <a:prstGeom prst="rect">
+            <a:avLst/>
+          </a:prstGeom>
+        </p:spPr>
+        <p:txBody>
+          <a:bodyPr anchor="ctr"/>
+          <a:lstStyle>
+            <a:lvl1pPr algn="r" marL="0" indent="0">
+              <a:lnSpc>
+                <a:spcPct val="100000"/>
+              </a:lnSpc>
+              <a:buNone/>
+              <a:defRPr lang="th-TH" sz="1000" dirty="0">
+                <a:solidFill>
+                  <a:srgbClr val="5F5F5F"/>
+                </a:solidFill>
+                <a:latin typeface="+mn-lt"/>
+                <a:ea typeface="+mn-ea"/>
+                <a:cs typeface="+mn-cs"/>
+              </a:defRPr>
+            </a:lvl1pPr>
+          </a:lstStyle>
+          <a:p>
+            <a:pPr algn="r" marL="0" indent="0">
+              <a:buNone/>
+            </a:pPr>
+            <a:fld id="{B7E3A1C2-4F5D-4A88-9C1E-6D2F0A93B451}" type="slidenum">
+              <a:rPr lang="th-TH" sz="1000">
+                <a:solidFill>
+                  <a:srgbClr val="5F5F5F"/>
+                </a:solidFill>
+                <a:latin typeface="+mn-lt"/>
+                <a:cs typeface="+mn-cs"/>
+              </a:rPr>
+              <a:t>2</a:t>
+            </a:fld>
+            <a:endParaRPr lang="th-TH" sz="1000"/>
+          </a:p>
+        </p:txBody>
+      </p:sp>
+      <p:pic>
+        <p:nvPicPr>
+          <p:cNvPr id="94" name="NCT Mark"/>
+          <p:cNvPicPr>
+            <a:picLocks noChangeAspect="1"/>
+          </p:cNvPicPr>
+          <p:nvPr/>
+        </p:nvPicPr>
+        <p:blipFill>
+          <a:blip r:embed="rId2"/>
+          <a:stretch>
+            <a:fillRect/>
+          </a:stretch>
+        </p:blipFill>
+        <p:spPr>
+          <a:xfrm>
+            <a:off x="9494520" y="6289360"/>
+            <a:ext cx="274320" cy="174498"/>
+          </a:xfrm>
+          <a:prstGeom prst="rect">
+            <a:avLst/>
+          </a:prstGeom>
+        </p:spPr>
+      </p:pic>
+    </p:spTree>
+  </p:cSld>
+  <p:clrMapOvr>
+    <a:masterClrMapping/>
+  </p:clrMapOvr>
+</p:sldLayout>
+</file>
+
 <file path=ppt/slideLayouts/slideLayout3.xml><?xml version="1.0" encoding="utf-8"?>
 <p:sldLayout xmlns:a="http://schemas.openxmlformats.org/drawingml/2006/main" xmlns:r="http://schemas.openxmlformats.org/officeDocument/2006/relationships" xmlns:p="http://schemas.openxmlformats.org/presentationml/2006/main" type="obj" showMasterSp="0" preserve="1">
   <p:cSld name="03 Title and Content">
@@ -23554,7 +25600,7 @@
           <p:nvPr/>
         </p:nvPicPr>
         <p:blipFill>
-          <a:blip r:embed="rId25"/>
+          <a:blip r:embed="rId26"/>
           <a:stretch>
             <a:fillRect/>
           </a:stretch>
@@ -23596,6 +25642,7 @@
     <p:sldLayoutId id="2147483669" r:id="rId21"/>
     <p:sldLayoutId id="2147483670" r:id="rId22"/>
     <p:sldLayoutId id="2147483671" r:id="rId23"/>
+    <p:sldLayoutId id="2147483672" r:id="rId24"/>
   </p:sldLayoutIdLst>
   <p:txStyles>
     <p:titleStyle>
@@ -26990,12 +29037,12 @@
       </p:grpSpPr>
       <p:sp>
         <p:nvSpPr>
-          <p:cNvPr id="2" name="Q"/>
-          <p:cNvSpPr>
-            <a:spLocks noGrp="1"/>
-          </p:cNvSpPr>
-          <p:nvPr>
-            <p:ph type="body" idx="1"/>
+          <p:cNvPr id="2" name="Title"/>
+          <p:cNvSpPr>
+            <a:spLocks noGrp="1"/>
+          </p:cNvSpPr>
+          <p:nvPr>
+            <p:ph type="title"/>
           </p:nvPr>
         </p:nvSpPr>
         <p:spPr/>
@@ -27006,14 +29053,14 @@
             <a:pPr/>
             <a:r>
               <a:rPr lang="th-TH" dirty="0"/>
-              <a:t>ระบบไม่ล่มอีกเลยตั้งแต่เปลี่ยนมาใช้ทีมนี้ดูแล และเราวางแผนงบประมาณได้ล่วงหน้าจริง ๆ</a:t>
-            </a:r>
-          </a:p>
-        </p:txBody>
-      </p:sp>
-      <p:sp>
-        <p:nvSpPr>
-          <p:cNvPr id="3" name="A"/>
+              <a:t>ลูกค้ารายเดิมลดงานบัญชีจาก 114 เหลือ 31 ชั่วโมงต่อเดือน</a:t>
+            </a:r>
+          </a:p>
+        </p:txBody>
+      </p:sp>
+      <p:sp>
+        <p:nvSpPr>
+          <p:cNvPr id="3" name="Intro"/>
           <p:cNvSpPr>
             <a:spLocks noGrp="1"/>
           </p:cNvSpPr>
@@ -27029,7 +29076,369 @@
             <a:pPr/>
             <a:r>
               <a:rPr lang="th-TH" dirty="0"/>
-              <a:t>คุณสมชาย ป. — ผู้จัดการฝ่ายไอที, บริษัทตัวอย่าง จำกัด</a:t>
+              <a:t>ชั่วโมงทำงานต่อเดือน · น้อยกว่าดีกว่า</a:t>
+            </a:r>
+          </a:p>
+        </p:txBody>
+      </p:sp>
+      <p:sp>
+        <p:nvSpPr>
+          <p:cNvPr id="4" name="Legend"/>
+          <p:cNvSpPr>
+            <a:spLocks noGrp="1"/>
+          </p:cNvSpPr>
+          <p:nvPr>
+            <p:ph type="body" idx="3"/>
+          </p:nvPr>
+        </p:nvSpPr>
+        <p:spPr/>
+        <p:txBody>
+          <a:bodyPr/>
+          <a:lstStyle/>
+          <a:p>
+            <a:pPr/>
+            <a:r>
+              <a:rPr lang="th-TH" dirty="0">
+                <a:solidFill>
+                  <a:srgbClr val="90B4E4"/>
+                </a:solidFill>
+              </a:rPr>
+              <a:t>● </a:t>
+            </a:r>
+            <a:r>
+              <a:rPr lang="th-TH" dirty="0"/>
+              <a:t>ก่อน   </a:t>
+            </a:r>
+            <a:r>
+              <a:rPr lang="th-TH" dirty="0">
+                <a:solidFill>
+                  <a:srgbClr val="2A5EA0"/>
+                </a:solidFill>
+              </a:rPr>
+              <a:t>● </a:t>
+            </a:r>
+            <a:r>
+              <a:rPr lang="th-TH" dirty="0"/>
+              <a:t>หลัง</a:t>
+            </a:r>
+          </a:p>
+        </p:txBody>
+      </p:sp>
+      <p:graphicFrame>
+        <p:nvGraphicFramePr>
+          <p:cNvPr id="5" name="Before After"/>
+          <p:cNvGraphicFramePr>
+            <a:graphicFrameLocks noGrp="1"/>
+          </p:cNvGraphicFramePr>
+          <p:nvPr>
+            <p:ph type="chart" idx="1"/>
+          </p:nvPr>
+        </p:nvGraphicFramePr>
+        <p:xfrm>
+          <a:off x="3840480" y="2057400"/>
+          <a:ext cx="5791200" cy="3072384"/>
+        </p:xfrm>
+        <a:graphic>
+          <a:graphicData uri="http://schemas.openxmlformats.org/drawingml/2006/chart">
+            <c:chart xmlns:c="http://schemas.openxmlformats.org/drawingml/2006/chart" r:id="rId2"/>
+          </a:graphicData>
+        </a:graphic>
+      </p:graphicFrame>
+      <p:sp>
+        <p:nvSpPr>
+          <p:cNvPr id="6" name="R0"/>
+          <p:cNvSpPr>
+            <a:spLocks noGrp="1"/>
+          </p:cNvSpPr>
+          <p:nvPr>
+            <p:ph type="body" idx="20"/>
+          </p:nvPr>
+        </p:nvSpPr>
+        <p:spPr/>
+        <p:txBody>
+          <a:bodyPr/>
+          <a:lstStyle/>
+          <a:p>
+            <a:pPr/>
+            <a:r>
+              <a:rPr lang="th-TH" dirty="0"/>
+              <a:t>ปิดงบสิ้นเดือน</a:t>
+            </a:r>
+          </a:p>
+        </p:txBody>
+      </p:sp>
+      <p:sp>
+        <p:nvSpPr>
+          <p:cNvPr id="7" name="C0"/>
+          <p:cNvSpPr>
+            <a:spLocks noGrp="1"/>
+          </p:cNvSpPr>
+          <p:nvPr>
+            <p:ph type="body" idx="21"/>
+          </p:nvPr>
+        </p:nvSpPr>
+        <p:spPr/>
+        <p:txBody>
+          <a:bodyPr/>
+          <a:lstStyle/>
+          <a:p>
+            <a:pPr/>
+            <a:r>
+              <a:rPr lang="th-TH" dirty="0"/>
+              <a:t>−32 ชม.</a:t>
+            </a:r>
+          </a:p>
+        </p:txBody>
+      </p:sp>
+      <p:sp>
+        <p:nvSpPr>
+          <p:cNvPr id="8" name="R1"/>
+          <p:cNvSpPr>
+            <a:spLocks noGrp="1"/>
+          </p:cNvSpPr>
+          <p:nvPr>
+            <p:ph type="body" idx="22"/>
+          </p:nvPr>
+        </p:nvSpPr>
+        <p:spPr/>
+        <p:txBody>
+          <a:bodyPr/>
+          <a:lstStyle/>
+          <a:p>
+            <a:pPr/>
+            <a:r>
+              <a:rPr lang="th-TH" dirty="0"/>
+              <a:t>คีย์ใบแจ้งหนี้ซื้อ</a:t>
+            </a:r>
+          </a:p>
+        </p:txBody>
+      </p:sp>
+      <p:sp>
+        <p:nvSpPr>
+          <p:cNvPr id="9" name="C1"/>
+          <p:cNvSpPr>
+            <a:spLocks noGrp="1"/>
+          </p:cNvSpPr>
+          <p:nvPr>
+            <p:ph type="body" idx="23"/>
+          </p:nvPr>
+        </p:nvSpPr>
+        <p:spPr/>
+        <p:txBody>
+          <a:bodyPr/>
+          <a:lstStyle/>
+          <a:p>
+            <a:pPr/>
+            <a:r>
+              <a:rPr lang="th-TH" dirty="0"/>
+              <a:t>−25 ชม.</a:t>
+            </a:r>
+          </a:p>
+        </p:txBody>
+      </p:sp>
+      <p:sp>
+        <p:nvSpPr>
+          <p:cNvPr id="10" name="R2"/>
+          <p:cNvSpPr>
+            <a:spLocks noGrp="1"/>
+          </p:cNvSpPr>
+          <p:nvPr>
+            <p:ph type="body" idx="24"/>
+          </p:nvPr>
+        </p:nvSpPr>
+        <p:spPr/>
+        <p:txBody>
+          <a:bodyPr/>
+          <a:lstStyle/>
+          <a:p>
+            <a:pPr/>
+            <a:r>
+              <a:rPr lang="th-TH" dirty="0"/>
+              <a:t>กระทบยอดธนาคาร</a:t>
+            </a:r>
+          </a:p>
+        </p:txBody>
+      </p:sp>
+      <p:sp>
+        <p:nvSpPr>
+          <p:cNvPr id="11" name="C2"/>
+          <p:cNvSpPr>
+            <a:spLocks noGrp="1"/>
+          </p:cNvSpPr>
+          <p:nvPr>
+            <p:ph type="body" idx="25"/>
+          </p:nvPr>
+        </p:nvSpPr>
+        <p:spPr/>
+        <p:txBody>
+          <a:bodyPr/>
+          <a:lstStyle/>
+          <a:p>
+            <a:pPr/>
+            <a:r>
+              <a:rPr lang="th-TH" dirty="0"/>
+              <a:t>−14 ชม.</a:t>
+            </a:r>
+          </a:p>
+        </p:txBody>
+      </p:sp>
+      <p:sp>
+        <p:nvSpPr>
+          <p:cNvPr id="12" name="R3"/>
+          <p:cNvSpPr>
+            <a:spLocks noGrp="1"/>
+          </p:cNvSpPr>
+          <p:nvPr>
+            <p:ph type="body" idx="26"/>
+          </p:nvPr>
+        </p:nvSpPr>
+        <p:spPr/>
+        <p:txBody>
+          <a:bodyPr/>
+          <a:lstStyle/>
+          <a:p>
+            <a:pPr/>
+            <a:r>
+              <a:rPr lang="th-TH" dirty="0"/>
+              <a:t>ออกใบแจ้งหนี้ขาย</a:t>
+            </a:r>
+          </a:p>
+        </p:txBody>
+      </p:sp>
+      <p:sp>
+        <p:nvSpPr>
+          <p:cNvPr id="13" name="C3"/>
+          <p:cNvSpPr>
+            <a:spLocks noGrp="1"/>
+          </p:cNvSpPr>
+          <p:nvPr>
+            <p:ph type="body" idx="27"/>
+          </p:nvPr>
+        </p:nvSpPr>
+        <p:spPr/>
+        <p:txBody>
+          <a:bodyPr/>
+          <a:lstStyle/>
+          <a:p>
+            <a:pPr/>
+            <a:r>
+              <a:rPr lang="th-TH" dirty="0"/>
+              <a:t>−8 ชม.</a:t>
+            </a:r>
+          </a:p>
+        </p:txBody>
+      </p:sp>
+      <p:sp>
+        <p:nvSpPr>
+          <p:cNvPr id="14" name="R4"/>
+          <p:cNvSpPr>
+            <a:spLocks noGrp="1"/>
+          </p:cNvSpPr>
+          <p:nvPr>
+            <p:ph type="body" idx="28"/>
+          </p:nvPr>
+        </p:nvSpPr>
+        <p:spPr/>
+        <p:txBody>
+          <a:bodyPr/>
+          <a:lstStyle/>
+          <a:p>
+            <a:pPr/>
+            <a:r>
+              <a:rPr lang="th-TH" dirty="0"/>
+              <a:t>ติดตามลูกหนี้</a:t>
+            </a:r>
+          </a:p>
+        </p:txBody>
+      </p:sp>
+      <p:sp>
+        <p:nvSpPr>
+          <p:cNvPr id="15" name="C4"/>
+          <p:cNvSpPr>
+            <a:spLocks noGrp="1"/>
+          </p:cNvSpPr>
+          <p:nvPr>
+            <p:ph type="body" idx="29"/>
+          </p:nvPr>
+        </p:nvSpPr>
+        <p:spPr/>
+        <p:txBody>
+          <a:bodyPr/>
+          <a:lstStyle/>
+          <a:p>
+            <a:pPr/>
+            <a:r>
+              <a:rPr lang="th-TH" dirty="0"/>
+              <a:t>−4 ชม.</a:t>
+            </a:r>
+          </a:p>
+        </p:txBody>
+      </p:sp>
+      <p:sp>
+        <p:nvSpPr>
+          <p:cNvPr id="16" name="Src"/>
+          <p:cNvSpPr>
+            <a:spLocks noGrp="1"/>
+          </p:cNvSpPr>
+          <p:nvPr>
+            <p:ph type="body" idx="4"/>
+          </p:nvPr>
+        </p:nvSpPr>
+        <p:spPr/>
+        <p:txBody>
+          <a:bodyPr/>
+          <a:lstStyle/>
+          <a:p>
+            <a:pPr/>
+            <a:r>
+              <a:rPr lang="th-TH" dirty="0"/>
+              <a:t>ลูกค้าธุรกิจค้าปลีก ปี 2568 · วัดก่อนขึ้นระบบและหลังขึ้นระบบ 3 เดือน</a:t>
+            </a:r>
+          </a:p>
+        </p:txBody>
+      </p:sp>
+      <p:sp>
+        <p:nvSpPr>
+          <p:cNvPr id="17" name="TkL"/>
+          <p:cNvSpPr>
+            <a:spLocks noGrp="1"/>
+          </p:cNvSpPr>
+          <p:nvPr>
+            <p:ph type="body" idx="5"/>
+          </p:nvPr>
+        </p:nvSpPr>
+        <p:spPr/>
+        <p:txBody>
+          <a:bodyPr/>
+          <a:lstStyle/>
+          <a:p>
+            <a:pPr/>
+            <a:r>
+              <a:rPr lang="th-TH" dirty="0"/>
+              <a:t>สรุป</a:t>
+            </a:r>
+          </a:p>
+        </p:txBody>
+      </p:sp>
+      <p:sp>
+        <p:nvSpPr>
+          <p:cNvPr id="18" name="TkC"/>
+          <p:cNvSpPr>
+            <a:spLocks noGrp="1"/>
+          </p:cNvSpPr>
+          <p:nvPr>
+            <p:ph type="body" idx="6"/>
+          </p:nvPr>
+        </p:nvSpPr>
+        <p:spPr/>
+        <p:txBody>
+          <a:bodyPr/>
+          <a:lstStyle/>
+          <a:p>
+            <a:pPr/>
+            <a:r>
+              <a:rPr lang="th-TH" dirty="0"/>
+              <a:t>ปิดงบลดได้มากสุด ไม่ใช่งานคีย์ เพราะระบบกระทบยอดให้ทุกวัน</a:t>
             </a:r>
           </a:p>
         </p:txBody>
@@ -27043,6 +29452,77 @@
 </file>
 
 <file path=ppt/slides/slide18.xml><?xml version="1.0" encoding="utf-8"?>
+<p:sld xmlns:a="http://schemas.openxmlformats.org/drawingml/2006/main" xmlns:r="http://schemas.openxmlformats.org/officeDocument/2006/relationships" xmlns:p="http://schemas.openxmlformats.org/presentationml/2006/main">
+  <p:cSld name="">
+    <p:spTree>
+      <p:nvGrpSpPr>
+        <p:cNvPr id="1" name=""/>
+        <p:cNvGrpSpPr/>
+        <p:nvPr/>
+      </p:nvGrpSpPr>
+      <p:grpSpPr>
+        <a:xfrm>
+          <a:off x="0" y="0"/>
+          <a:ext cx="0" cy="0"/>
+          <a:chOff x="0" y="0"/>
+          <a:chExt cx="0" cy="0"/>
+        </a:xfrm>
+      </p:grpSpPr>
+      <p:sp>
+        <p:nvSpPr>
+          <p:cNvPr id="2" name="Q"/>
+          <p:cNvSpPr>
+            <a:spLocks noGrp="1"/>
+          </p:cNvSpPr>
+          <p:nvPr>
+            <p:ph type="body" idx="1"/>
+          </p:nvPr>
+        </p:nvSpPr>
+        <p:spPr/>
+        <p:txBody>
+          <a:bodyPr/>
+          <a:lstStyle/>
+          <a:p>
+            <a:pPr/>
+            <a:r>
+              <a:rPr lang="th-TH" dirty="0"/>
+              <a:t>ระบบไม่ล่มอีกเลยตั้งแต่เปลี่ยนมาใช้ทีมนี้ดูแล และเราวางแผนงบประมาณได้ล่วงหน้าจริง ๆ</a:t>
+            </a:r>
+          </a:p>
+        </p:txBody>
+      </p:sp>
+      <p:sp>
+        <p:nvSpPr>
+          <p:cNvPr id="3" name="A"/>
+          <p:cNvSpPr>
+            <a:spLocks noGrp="1"/>
+          </p:cNvSpPr>
+          <p:nvPr>
+            <p:ph type="body" idx="2"/>
+          </p:nvPr>
+        </p:nvSpPr>
+        <p:spPr/>
+        <p:txBody>
+          <a:bodyPr/>
+          <a:lstStyle/>
+          <a:p>
+            <a:pPr/>
+            <a:r>
+              <a:rPr lang="th-TH" dirty="0"/>
+              <a:t>คุณสมชาย ป. — ผู้จัดการฝ่ายไอที, บริษัทตัวอย่าง จำกัด</a:t>
+            </a:r>
+          </a:p>
+        </p:txBody>
+      </p:sp>
+    </p:spTree>
+  </p:cSld>
+  <p:clrMapOvr>
+    <a:masterClrMapping/>
+  </p:clrMapOvr>
+</p:sld>
+</file>
+
+<file path=ppt/slides/slide19.xml><?xml version="1.0" encoding="utf-8"?>
 <p:sld xmlns:a="http://schemas.openxmlformats.org/drawingml/2006/main" xmlns:r="http://schemas.openxmlformats.org/officeDocument/2006/relationships" xmlns:p="http://schemas.openxmlformats.org/presentationml/2006/main">
   <p:cSld name="">
     <p:spTree>
@@ -27773,1032 +30253,6 @@
 </p:sld>
 </file>
 
-<file path=ppt/slides/slide19.xml><?xml version="1.0" encoding="utf-8"?>
-<p:sld xmlns:a="http://schemas.openxmlformats.org/drawingml/2006/main" xmlns:r="http://schemas.openxmlformats.org/officeDocument/2006/relationships" xmlns:p="http://schemas.openxmlformats.org/presentationml/2006/main">
-  <p:cSld name="">
-    <p:spTree>
-      <p:nvGrpSpPr>
-        <p:cNvPr id="1" name=""/>
-        <p:cNvGrpSpPr/>
-        <p:nvPr/>
-      </p:nvGrpSpPr>
-      <p:grpSpPr>
-        <a:xfrm>
-          <a:off x="0" y="0"/>
-          <a:ext cx="0" cy="0"/>
-          <a:chOff x="0" y="0"/>
-          <a:chExt cx="0" cy="0"/>
-        </a:xfrm>
-      </p:grpSpPr>
-      <p:sp>
-        <p:nvSpPr>
-          <p:cNvPr id="2" name="Title"/>
-          <p:cNvSpPr>
-            <a:spLocks noGrp="1"/>
-          </p:cNvSpPr>
-          <p:nvPr>
-            <p:ph type="title"/>
-          </p:nvPr>
-        </p:nvSpPr>
-        <p:spPr/>
-        <p:txBody>
-          <a:bodyPr/>
-          <a:lstStyle/>
-          <a:p>
-            <a:pPr/>
-            <a:r>
-              <a:rPr lang="th-TH" dirty="0"/>
-              <a:t>แผนงาน 12 เดือน ขึ้นระบบต้นเดือนที่ 7</a:t>
-            </a:r>
-          </a:p>
-        </p:txBody>
-      </p:sp>
-      <p:graphicFrame>
-        <p:nvGraphicFramePr>
-          <p:cNvPr id="3" name="Plan"/>
-          <p:cNvGraphicFramePr>
-            <a:graphicFrameLocks noGrp="1"/>
-          </p:cNvGraphicFramePr>
-          <p:nvPr>
-            <p:ph type="chart" idx="1"/>
-          </p:nvPr>
-        </p:nvGraphicFramePr>
-        <p:xfrm>
-          <a:off x="3566160" y="2057400"/>
-          <a:ext cx="7711440" cy="3108960"/>
-        </p:xfrm>
-        <a:graphic>
-          <a:graphicData uri="http://schemas.openxmlformats.org/drawingml/2006/chart">
-            <c:chart xmlns:c="http://schemas.openxmlformats.org/drawingml/2006/chart" r:id="rId2"/>
-          </a:graphicData>
-        </a:graphic>
-      </p:graphicFrame>
-      <p:sp>
-        <p:nvSpPr>
-          <p:cNvPr id="4" name="P1"/>
-          <p:cNvSpPr>
-            <a:spLocks noGrp="1"/>
-          </p:cNvSpPr>
-          <p:nvPr>
-            <p:ph type="body" idx="20"/>
-          </p:nvPr>
-        </p:nvSpPr>
-        <p:spPr/>
-        <p:txBody>
-          <a:bodyPr/>
-          <a:lstStyle/>
-          <a:p>
-            <a:pPr/>
-            <a:r>
-              <a:rPr lang="th-TH" dirty="0"/>
-              <a:t>ด.1</a:t>
-            </a:r>
-          </a:p>
-        </p:txBody>
-      </p:sp>
-      <p:sp>
-        <p:nvSpPr>
-          <p:cNvPr id="5" name="P2"/>
-          <p:cNvSpPr>
-            <a:spLocks noGrp="1"/>
-          </p:cNvSpPr>
-          <p:nvPr>
-            <p:ph type="body" idx="21"/>
-          </p:nvPr>
-        </p:nvSpPr>
-        <p:spPr/>
-        <p:txBody>
-          <a:bodyPr/>
-          <a:lstStyle/>
-          <a:p>
-            <a:pPr/>
-            <a:r>
-              <a:rPr lang="th-TH" dirty="0"/>
-              <a:t>ด.2</a:t>
-            </a:r>
-          </a:p>
-        </p:txBody>
-      </p:sp>
-      <p:sp>
-        <p:nvSpPr>
-          <p:cNvPr id="6" name="P3"/>
-          <p:cNvSpPr>
-            <a:spLocks noGrp="1"/>
-          </p:cNvSpPr>
-          <p:nvPr>
-            <p:ph type="body" idx="22"/>
-          </p:nvPr>
-        </p:nvSpPr>
-        <p:spPr/>
-        <p:txBody>
-          <a:bodyPr/>
-          <a:lstStyle/>
-          <a:p>
-            <a:pPr/>
-            <a:r>
-              <a:rPr lang="th-TH" dirty="0"/>
-              <a:t>ด.3</a:t>
-            </a:r>
-          </a:p>
-        </p:txBody>
-      </p:sp>
-      <p:sp>
-        <p:nvSpPr>
-          <p:cNvPr id="7" name="P4"/>
-          <p:cNvSpPr>
-            <a:spLocks noGrp="1"/>
-          </p:cNvSpPr>
-          <p:nvPr>
-            <p:ph type="body" idx="23"/>
-          </p:nvPr>
-        </p:nvSpPr>
-        <p:spPr/>
-        <p:txBody>
-          <a:bodyPr/>
-          <a:lstStyle/>
-          <a:p>
-            <a:pPr/>
-            <a:r>
-              <a:rPr lang="th-TH" dirty="0"/>
-              <a:t>ด.4</a:t>
-            </a:r>
-          </a:p>
-        </p:txBody>
-      </p:sp>
-      <p:sp>
-        <p:nvSpPr>
-          <p:cNvPr id="8" name="P5"/>
-          <p:cNvSpPr>
-            <a:spLocks noGrp="1"/>
-          </p:cNvSpPr>
-          <p:nvPr>
-            <p:ph type="body" idx="24"/>
-          </p:nvPr>
-        </p:nvSpPr>
-        <p:spPr/>
-        <p:txBody>
-          <a:bodyPr/>
-          <a:lstStyle/>
-          <a:p>
-            <a:pPr/>
-            <a:r>
-              <a:rPr lang="th-TH" dirty="0"/>
-              <a:t>ด.5</a:t>
-            </a:r>
-          </a:p>
-        </p:txBody>
-      </p:sp>
-      <p:sp>
-        <p:nvSpPr>
-          <p:cNvPr id="9" name="P6"/>
-          <p:cNvSpPr>
-            <a:spLocks noGrp="1"/>
-          </p:cNvSpPr>
-          <p:nvPr>
-            <p:ph type="body" idx="25"/>
-          </p:nvPr>
-        </p:nvSpPr>
-        <p:spPr/>
-        <p:txBody>
-          <a:bodyPr/>
-          <a:lstStyle/>
-          <a:p>
-            <a:pPr/>
-            <a:r>
-              <a:rPr lang="th-TH" dirty="0"/>
-              <a:t>ด.6</a:t>
-            </a:r>
-          </a:p>
-        </p:txBody>
-      </p:sp>
-      <p:sp>
-        <p:nvSpPr>
-          <p:cNvPr id="10" name="P7"/>
-          <p:cNvSpPr>
-            <a:spLocks noGrp="1"/>
-          </p:cNvSpPr>
-          <p:nvPr>
-            <p:ph type="body" idx="26"/>
-          </p:nvPr>
-        </p:nvSpPr>
-        <p:spPr/>
-        <p:txBody>
-          <a:bodyPr/>
-          <a:lstStyle/>
-          <a:p>
-            <a:pPr/>
-            <a:r>
-              <a:rPr lang="th-TH" dirty="0"/>
-              <a:t>ด.7</a:t>
-            </a:r>
-          </a:p>
-        </p:txBody>
-      </p:sp>
-      <p:sp>
-        <p:nvSpPr>
-          <p:cNvPr id="11" name="P8"/>
-          <p:cNvSpPr>
-            <a:spLocks noGrp="1"/>
-          </p:cNvSpPr>
-          <p:nvPr>
-            <p:ph type="body" idx="27"/>
-          </p:nvPr>
-        </p:nvSpPr>
-        <p:spPr/>
-        <p:txBody>
-          <a:bodyPr/>
-          <a:lstStyle/>
-          <a:p>
-            <a:pPr/>
-            <a:r>
-              <a:rPr lang="th-TH" dirty="0"/>
-              <a:t>ด.8</a:t>
-            </a:r>
-          </a:p>
-        </p:txBody>
-      </p:sp>
-      <p:sp>
-        <p:nvSpPr>
-          <p:cNvPr id="12" name="P9"/>
-          <p:cNvSpPr>
-            <a:spLocks noGrp="1"/>
-          </p:cNvSpPr>
-          <p:nvPr>
-            <p:ph type="body" idx="28"/>
-          </p:nvPr>
-        </p:nvSpPr>
-        <p:spPr/>
-        <p:txBody>
-          <a:bodyPr/>
-          <a:lstStyle/>
-          <a:p>
-            <a:pPr/>
-            <a:r>
-              <a:rPr lang="th-TH" dirty="0"/>
-              <a:t>ด.9</a:t>
-            </a:r>
-          </a:p>
-        </p:txBody>
-      </p:sp>
-      <p:sp>
-        <p:nvSpPr>
-          <p:cNvPr id="13" name="P10"/>
-          <p:cNvSpPr>
-            <a:spLocks noGrp="1"/>
-          </p:cNvSpPr>
-          <p:nvPr>
-            <p:ph type="body" idx="29"/>
-          </p:nvPr>
-        </p:nvSpPr>
-        <p:spPr/>
-        <p:txBody>
-          <a:bodyPr/>
-          <a:lstStyle/>
-          <a:p>
-            <a:pPr/>
-            <a:r>
-              <a:rPr lang="th-TH" dirty="0"/>
-              <a:t>ด.10</a:t>
-            </a:r>
-          </a:p>
-        </p:txBody>
-      </p:sp>
-      <p:sp>
-        <p:nvSpPr>
-          <p:cNvPr id="14" name="P11"/>
-          <p:cNvSpPr>
-            <a:spLocks noGrp="1"/>
-          </p:cNvSpPr>
-          <p:nvPr>
-            <p:ph type="body" idx="30"/>
-          </p:nvPr>
-        </p:nvSpPr>
-        <p:spPr/>
-        <p:txBody>
-          <a:bodyPr/>
-          <a:lstStyle/>
-          <a:p>
-            <a:pPr/>
-            <a:r>
-              <a:rPr lang="th-TH" dirty="0"/>
-              <a:t>ด.11</a:t>
-            </a:r>
-          </a:p>
-        </p:txBody>
-      </p:sp>
-      <p:sp>
-        <p:nvSpPr>
-          <p:cNvPr id="15" name="P12"/>
-          <p:cNvSpPr>
-            <a:spLocks noGrp="1"/>
-          </p:cNvSpPr>
-          <p:nvPr>
-            <p:ph type="body" idx="31"/>
-          </p:nvPr>
-        </p:nvSpPr>
-        <p:spPr/>
-        <p:txBody>
-          <a:bodyPr/>
-          <a:lstStyle/>
-          <a:p>
-            <a:pPr/>
-            <a:r>
-              <a:rPr lang="th-TH" dirty="0"/>
-              <a:t>ด.12</a:t>
-            </a:r>
-          </a:p>
-        </p:txBody>
-      </p:sp>
-      <p:sp>
-        <p:nvSpPr>
-          <p:cNvPr id="16" name="R1"/>
-          <p:cNvSpPr>
-            <a:spLocks noGrp="1"/>
-          </p:cNvSpPr>
-          <p:nvPr>
-            <p:ph type="body" idx="32"/>
-          </p:nvPr>
-        </p:nvSpPr>
-        <p:spPr/>
-        <p:txBody>
-          <a:bodyPr/>
-          <a:lstStyle/>
-          <a:p>
-            <a:pPr/>
-            <a:r>
-              <a:rPr lang="th-TH" dirty="0"/>
-              <a:t>1. เตรียมระบบ</a:t>
-            </a:r>
-          </a:p>
-        </p:txBody>
-      </p:sp>
-      <p:sp>
-        <p:nvSpPr>
-          <p:cNvPr id="17" name="D1"/>
-          <p:cNvSpPr>
-            <a:spLocks noGrp="1"/>
-          </p:cNvSpPr>
-          <p:nvPr>
-            <p:ph type="body" idx="33"/>
-          </p:nvPr>
-        </p:nvSpPr>
-        <p:spPr/>
-        <p:txBody>
-          <a:bodyPr/>
-          <a:lstStyle/>
-          <a:p>
-            <a:pPr/>
-            <a:r>
-              <a:rPr lang="th-TH" dirty="0"/>
-              <a:t>4 สัปดาห์</a:t>
-            </a:r>
-          </a:p>
-        </p:txBody>
-      </p:sp>
-      <p:sp>
-        <p:nvSpPr>
-          <p:cNvPr id="18" name="R2"/>
-          <p:cNvSpPr>
-            <a:spLocks noGrp="1"/>
-          </p:cNvSpPr>
-          <p:nvPr>
-            <p:ph type="body" idx="34"/>
-          </p:nvPr>
-        </p:nvSpPr>
-        <p:spPr/>
-        <p:txBody>
-          <a:bodyPr/>
-          <a:lstStyle/>
-          <a:p>
-            <a:pPr/>
-            <a:r>
-              <a:rPr lang="th-TH" dirty="0"/>
-              <a:t>2. วิเคราะห์และออกแบบ</a:t>
-            </a:r>
-          </a:p>
-        </p:txBody>
-      </p:sp>
-      <p:sp>
-        <p:nvSpPr>
-          <p:cNvPr id="19" name="D2"/>
-          <p:cNvSpPr>
-            <a:spLocks noGrp="1"/>
-          </p:cNvSpPr>
-          <p:nvPr>
-            <p:ph type="body" idx="35"/>
-          </p:nvPr>
-        </p:nvSpPr>
-        <p:spPr/>
-        <p:txBody>
-          <a:bodyPr/>
-          <a:lstStyle/>
-          <a:p>
-            <a:pPr/>
-            <a:r>
-              <a:rPr lang="th-TH" dirty="0"/>
-              <a:t>6 สัปดาห์</a:t>
-            </a:r>
-          </a:p>
-        </p:txBody>
-      </p:sp>
-      <p:sp>
-        <p:nvSpPr>
-          <p:cNvPr id="20" name="R3"/>
-          <p:cNvSpPr>
-            <a:spLocks noGrp="1"/>
-          </p:cNvSpPr>
-          <p:nvPr>
-            <p:ph type="body" idx="36"/>
-          </p:nvPr>
-        </p:nvSpPr>
-        <p:spPr/>
-        <p:txBody>
-          <a:bodyPr/>
-          <a:lstStyle/>
-          <a:p>
-            <a:pPr/>
-            <a:r>
-              <a:rPr lang="th-TH" dirty="0"/>
-              <a:t>3. พัฒนาและตั้งค่าระบบ</a:t>
-            </a:r>
-          </a:p>
-        </p:txBody>
-      </p:sp>
-      <p:sp>
-        <p:nvSpPr>
-          <p:cNvPr id="21" name="D3"/>
-          <p:cNvSpPr>
-            <a:spLocks noGrp="1"/>
-          </p:cNvSpPr>
-          <p:nvPr>
-            <p:ph type="body" idx="37"/>
-          </p:nvPr>
-        </p:nvSpPr>
-        <p:spPr/>
-        <p:txBody>
-          <a:bodyPr/>
-          <a:lstStyle/>
-          <a:p>
-            <a:pPr/>
-            <a:r>
-              <a:rPr lang="th-TH" dirty="0"/>
-              <a:t>10 สัปดาห์</a:t>
-            </a:r>
-          </a:p>
-        </p:txBody>
-      </p:sp>
-      <p:sp>
-        <p:nvSpPr>
-          <p:cNvPr id="22" name="R4"/>
-          <p:cNvSpPr>
-            <a:spLocks noGrp="1"/>
-          </p:cNvSpPr>
-          <p:nvPr>
-            <p:ph type="body" idx="38"/>
-          </p:nvPr>
-        </p:nvSpPr>
-        <p:spPr/>
-        <p:txBody>
-          <a:bodyPr/>
-          <a:lstStyle/>
-          <a:p>
-            <a:pPr/>
-            <a:r>
-              <a:rPr lang="th-TH" dirty="0"/>
-              <a:t>4. ทดสอบ UAT</a:t>
-            </a:r>
-          </a:p>
-        </p:txBody>
-      </p:sp>
-      <p:sp>
-        <p:nvSpPr>
-          <p:cNvPr id="23" name="D4"/>
-          <p:cNvSpPr>
-            <a:spLocks noGrp="1"/>
-          </p:cNvSpPr>
-          <p:nvPr>
-            <p:ph type="body" idx="39"/>
-          </p:nvPr>
-        </p:nvSpPr>
-        <p:spPr/>
-        <p:txBody>
-          <a:bodyPr/>
-          <a:lstStyle/>
-          <a:p>
-            <a:pPr/>
-            <a:r>
-              <a:rPr lang="th-TH" dirty="0"/>
-              <a:t>4 สัปดาห์</a:t>
-            </a:r>
-          </a:p>
-        </p:txBody>
-      </p:sp>
-      <p:sp>
-        <p:nvSpPr>
-          <p:cNvPr id="24" name="R5"/>
-          <p:cNvSpPr>
-            <a:spLocks noGrp="1"/>
-          </p:cNvSpPr>
-          <p:nvPr>
-            <p:ph type="body" idx="40"/>
-          </p:nvPr>
-        </p:nvSpPr>
-        <p:spPr/>
-        <p:txBody>
-          <a:bodyPr/>
-          <a:lstStyle/>
-          <a:p>
-            <a:pPr/>
-            <a:r>
-              <a:rPr lang="th-TH" dirty="0"/>
-              <a:t>5. อบรมผู้ใช้</a:t>
-            </a:r>
-          </a:p>
-        </p:txBody>
-      </p:sp>
-      <p:sp>
-        <p:nvSpPr>
-          <p:cNvPr id="25" name="D5"/>
-          <p:cNvSpPr>
-            <a:spLocks noGrp="1"/>
-          </p:cNvSpPr>
-          <p:nvPr>
-            <p:ph type="body" idx="41"/>
-          </p:nvPr>
-        </p:nvSpPr>
-        <p:spPr/>
-        <p:txBody>
-          <a:bodyPr/>
-          <a:lstStyle/>
-          <a:p>
-            <a:pPr/>
-            <a:r>
-              <a:rPr lang="th-TH" dirty="0"/>
-              <a:t>1 สัปดาห์</a:t>
-            </a:r>
-          </a:p>
-        </p:txBody>
-      </p:sp>
-      <p:sp>
-        <p:nvSpPr>
-          <p:cNvPr id="26" name="R6"/>
-          <p:cNvSpPr>
-            <a:spLocks noGrp="1"/>
-          </p:cNvSpPr>
-          <p:nvPr>
-            <p:ph type="body" idx="42"/>
-          </p:nvPr>
-        </p:nvSpPr>
-        <p:spPr/>
-        <p:txBody>
-          <a:bodyPr/>
-          <a:lstStyle/>
-          <a:p>
-            <a:pPr/>
-            <a:r>
-              <a:rPr lang="th-TH" dirty="0"/>
-              <a:t>6. ขึ้นระบบ</a:t>
-            </a:r>
-          </a:p>
-        </p:txBody>
-      </p:sp>
-      <p:sp>
-        <p:nvSpPr>
-          <p:cNvPr id="27" name="D6"/>
-          <p:cNvSpPr>
-            <a:spLocks noGrp="1"/>
-          </p:cNvSpPr>
-          <p:nvPr>
-            <p:ph type="body" idx="43"/>
-          </p:nvPr>
-        </p:nvSpPr>
-        <p:spPr/>
-        <p:txBody>
-          <a:bodyPr/>
-          <a:lstStyle/>
-          <a:p>
-            <a:pPr/>
-            <a:r>
-              <a:rPr lang="th-TH" dirty="0"/>
-              <a:t>2 สัปดาห์</a:t>
-            </a:r>
-          </a:p>
-        </p:txBody>
-      </p:sp>
-      <p:sp>
-        <p:nvSpPr>
-          <p:cNvPr id="28" name="R7"/>
-          <p:cNvSpPr>
-            <a:spLocks noGrp="1"/>
-          </p:cNvSpPr>
-          <p:nvPr>
-            <p:ph type="body" idx="44"/>
-          </p:nvPr>
-        </p:nvSpPr>
-        <p:spPr/>
-        <p:txBody>
-          <a:bodyPr/>
-          <a:lstStyle/>
-          <a:p>
-            <a:pPr/>
-            <a:r>
-              <a:rPr lang="th-TH" dirty="0"/>
-              <a:t>7. ดูแลหลังขึ้นระบบ</a:t>
-            </a:r>
-          </a:p>
-        </p:txBody>
-      </p:sp>
-      <p:sp>
-        <p:nvSpPr>
-          <p:cNvPr id="29" name="D7"/>
-          <p:cNvSpPr>
-            <a:spLocks noGrp="1"/>
-          </p:cNvSpPr>
-          <p:nvPr>
-            <p:ph type="body" idx="45"/>
-          </p:nvPr>
-        </p:nvSpPr>
-        <p:spPr/>
-        <p:txBody>
-          <a:bodyPr/>
-          <a:lstStyle/>
-          <a:p>
-            <a:pPr/>
-            <a:r>
-              <a:rPr lang="th-TH" dirty="0"/>
-              <a:t>3 เดือน</a:t>
-            </a:r>
-          </a:p>
-        </p:txBody>
-      </p:sp>
-      <p:sp>
-        <p:nvSpPr>
-          <p:cNvPr id="30" name="R8"/>
-          <p:cNvSpPr>
-            <a:spLocks noGrp="1"/>
-          </p:cNvSpPr>
-          <p:nvPr>
-            <p:ph type="body" idx="46"/>
-          </p:nvPr>
-        </p:nvSpPr>
-        <p:spPr/>
-        <p:txBody>
-          <a:bodyPr/>
-          <a:lstStyle/>
-          <a:p>
-            <a:pPr/>
-            <a:r>
-              <a:rPr lang="th-TH" dirty="0"/>
-              <a:t>8. รับประกันระบบ</a:t>
-            </a:r>
-          </a:p>
-        </p:txBody>
-      </p:sp>
-      <p:sp>
-        <p:nvSpPr>
-          <p:cNvPr id="31" name="D8"/>
-          <p:cNvSpPr>
-            <a:spLocks noGrp="1"/>
-          </p:cNvSpPr>
-          <p:nvPr>
-            <p:ph type="body" idx="47"/>
-          </p:nvPr>
-        </p:nvSpPr>
-        <p:spPr/>
-        <p:txBody>
-          <a:bodyPr/>
-          <a:lstStyle/>
-          <a:p>
-            <a:pPr/>
-            <a:r>
-              <a:rPr lang="th-TH" dirty="0"/>
-              <a:t>2.5 เดือน</a:t>
-            </a:r>
-          </a:p>
-        </p:txBody>
-      </p:sp>
-      <p:sp>
-        <p:nvSpPr>
-          <p:cNvPr id="32" name="Key"/>
-          <p:cNvSpPr>
-            <a:spLocks noGrp="1"/>
-          </p:cNvSpPr>
-          <p:nvPr>
-            <p:ph type="body" idx="2"/>
-          </p:nvPr>
-        </p:nvSpPr>
-        <p:spPr/>
-        <p:txBody>
-          <a:bodyPr/>
-          <a:lstStyle/>
-          <a:p>
-            <a:pPr/>
-            <a:r>
-              <a:rPr lang="th-TH" dirty="0"/>
-              <a:t>■ ช่วงงาน   ◆ ส่งมอบ / ตรวจรับ</a:t>
-            </a:r>
-          </a:p>
-        </p:txBody>
-      </p:sp>
-      <p:sp>
-        <p:nvSpPr>
-          <p:cNvPr id="33" name="Asm"/>
-          <p:cNvSpPr>
-            <a:spLocks noGrp="1"/>
-          </p:cNvSpPr>
-          <p:nvPr>
-            <p:ph type="body" idx="3"/>
-          </p:nvPr>
-        </p:nvSpPr>
-        <p:spPr/>
-        <p:txBody>
-          <a:bodyPr/>
-          <a:lstStyle/>
-          <a:p>
-            <a:pPr/>
-            <a:r>
-              <a:rPr lang="th-TH" dirty="0"/>
-              <a:t>นับจากวันลงนามสัญญา · หน่วย: เดือน</a:t>
-            </a:r>
-          </a:p>
-        </p:txBody>
-      </p:sp>
-      <p:sp>
-        <p:nvSpPr>
-          <p:cNvPr id="34" name="TL"/>
-          <p:cNvSpPr>
-            <a:spLocks noGrp="1"/>
-          </p:cNvSpPr>
-          <p:nvPr>
-            <p:ph type="body" idx="4"/>
-          </p:nvPr>
-        </p:nvSpPr>
-        <p:spPr/>
-        <p:txBody>
-          <a:bodyPr/>
-          <a:lstStyle/>
-          <a:p>
-            <a:pPr/>
-            <a:r>
-              <a:rPr lang="th-TH" dirty="0"/>
-              <a:t>สรุป</a:t>
-            </a:r>
-          </a:p>
-        </p:txBody>
-      </p:sp>
-      <p:sp>
-        <p:nvSpPr>
-          <p:cNvPr id="35" name="TC"/>
-          <p:cNvSpPr>
-            <a:spLocks noGrp="1"/>
-          </p:cNvSpPr>
-          <p:nvPr>
-            <p:ph type="body" idx="5"/>
-          </p:nvPr>
-        </p:nvSpPr>
-        <p:spPr/>
-        <p:txBody>
-          <a:bodyPr/>
-          <a:lstStyle/>
-          <a:p>
-            <a:pPr/>
-            <a:r>
-              <a:rPr lang="th-TH" dirty="0"/>
-              <a:t>ขึ้นระบบต้นเดือนที่ 7 ตรวจรับ 3 งวดตามจุดส่งมอบ</a:t>
-            </a:r>
-          </a:p>
-        </p:txBody>
-      </p:sp>
-      <p:sp>
-        <p:nvSpPr>
-          <p:cNvPr id="36" name="Milestone 2"/>
-          <p:cNvSpPr/>
-          <p:nvPr/>
-        </p:nvSpPr>
-        <p:spPr>
-          <a:xfrm>
-            <a:off x="5099558" y="2567178"/>
-            <a:ext cx="146304" cy="146304"/>
-          </a:xfrm>
-          <a:prstGeom prst="diamond">
-            <a:avLst/>
-          </a:prstGeom>
-          <a:solidFill>
-            <a:srgbClr val="BB731B"/>
-          </a:solidFill>
-          <a:ln w="19050">
-            <a:solidFill>
-              <a:srgbClr val="FFFFFF"/>
-            </a:solidFill>
-          </a:ln>
-        </p:spPr>
-        <p:txBody>
-          <a:bodyPr/>
-          <a:lstStyle/>
-          <a:p>
-            <a:endParaRPr lang="th-TH"/>
-          </a:p>
-        </p:txBody>
-      </p:sp>
-      <p:sp>
-        <p:nvSpPr>
-          <p:cNvPr id="37" name="Milestone 2 Label"/>
-          <p:cNvSpPr/>
-          <p:nvPr/>
-        </p:nvSpPr>
-        <p:spPr>
-          <a:xfrm>
-            <a:off x="5291582" y="2446020"/>
-            <a:ext cx="1463040" cy="388620"/>
-          </a:xfrm>
-          <a:prstGeom prst="rect">
-            <a:avLst/>
-          </a:prstGeom>
-          <a:noFill/>
-          <a:ln>
-            <a:noFill/>
-          </a:ln>
-        </p:spPr>
-        <p:txBody>
-          <a:bodyPr wrap="square" anchor="ctr" lIns="0" tIns="0" rIns="0" bIns="0" rtlCol="0"/>
-          <a:lstStyle/>
-          <a:p>
-            <a:pPr algn="l" marL="0" indent="0">
-              <a:lnSpc>
-                <a:spcPct val="100000"/>
-              </a:lnSpc>
-              <a:buNone/>
-            </a:pPr>
-            <a:r>
-              <a:rPr lang="th-TH" sz="1000" dirty="0">
-                <a:solidFill>
-                  <a:srgbClr val="5F5F5F"/>
-                </a:solidFill>
-                <a:latin typeface="+mn-lt"/>
-                <a:ea typeface="+mn-ea"/>
-                <a:cs typeface="+mn-cs"/>
-              </a:rPr>
-              <a:t>ตรวจรับงวด 1</a:t>
-            </a:r>
-          </a:p>
-        </p:txBody>
-      </p:sp>
-      <p:sp>
-        <p:nvSpPr>
-          <p:cNvPr id="38" name="Milestone 4"/>
-          <p:cNvSpPr/>
-          <p:nvPr/>
-        </p:nvSpPr>
-        <p:spPr>
-          <a:xfrm>
-            <a:off x="7348728" y="3344418"/>
-            <a:ext cx="146304" cy="146304"/>
-          </a:xfrm>
-          <a:prstGeom prst="diamond">
-            <a:avLst/>
-          </a:prstGeom>
-          <a:solidFill>
-            <a:srgbClr val="BB731B"/>
-          </a:solidFill>
-          <a:ln w="19050">
-            <a:solidFill>
-              <a:srgbClr val="FFFFFF"/>
-            </a:solidFill>
-          </a:ln>
-        </p:spPr>
-        <p:txBody>
-          <a:bodyPr/>
-          <a:lstStyle/>
-          <a:p>
-            <a:endParaRPr lang="th-TH"/>
-          </a:p>
-        </p:txBody>
-      </p:sp>
-      <p:sp>
-        <p:nvSpPr>
-          <p:cNvPr id="39" name="Milestone 4 Label"/>
-          <p:cNvSpPr/>
-          <p:nvPr/>
-        </p:nvSpPr>
-        <p:spPr>
-          <a:xfrm>
-            <a:off x="7540752" y="3223260"/>
-            <a:ext cx="1463040" cy="388620"/>
-          </a:xfrm>
-          <a:prstGeom prst="rect">
-            <a:avLst/>
-          </a:prstGeom>
-          <a:noFill/>
-          <a:ln>
-            <a:noFill/>
-          </a:ln>
-        </p:spPr>
-        <p:txBody>
-          <a:bodyPr wrap="square" anchor="ctr" lIns="0" tIns="0" rIns="0" bIns="0" rtlCol="0"/>
-          <a:lstStyle/>
-          <a:p>
-            <a:pPr algn="l" marL="0" indent="0">
-              <a:lnSpc>
-                <a:spcPct val="100000"/>
-              </a:lnSpc>
-              <a:buNone/>
-            </a:pPr>
-            <a:r>
-              <a:rPr lang="th-TH" sz="1000" dirty="0">
-                <a:solidFill>
-                  <a:srgbClr val="5F5F5F"/>
-                </a:solidFill>
-                <a:latin typeface="+mn-lt"/>
-                <a:ea typeface="+mn-ea"/>
-                <a:cs typeface="+mn-cs"/>
-              </a:rPr>
-              <a:t>ตรวจรับงวด 2</a:t>
-            </a:r>
-          </a:p>
-        </p:txBody>
-      </p:sp>
-      <p:sp>
-        <p:nvSpPr>
-          <p:cNvPr id="40" name="Milestone 7"/>
-          <p:cNvSpPr/>
-          <p:nvPr/>
-        </p:nvSpPr>
-        <p:spPr>
-          <a:xfrm>
-            <a:off x="9597898" y="4510278"/>
-            <a:ext cx="146304" cy="146304"/>
-          </a:xfrm>
-          <a:prstGeom prst="diamond">
-            <a:avLst/>
-          </a:prstGeom>
-          <a:solidFill>
-            <a:srgbClr val="BB731B"/>
-          </a:solidFill>
-          <a:ln w="19050">
-            <a:solidFill>
-              <a:srgbClr val="FFFFFF"/>
-            </a:solidFill>
-          </a:ln>
-        </p:spPr>
-        <p:txBody>
-          <a:bodyPr/>
-          <a:lstStyle/>
-          <a:p>
-            <a:endParaRPr lang="th-TH"/>
-          </a:p>
-        </p:txBody>
-      </p:sp>
-      <p:sp>
-        <p:nvSpPr>
-          <p:cNvPr id="41" name="Milestone 7 Label"/>
-          <p:cNvSpPr/>
-          <p:nvPr/>
-        </p:nvSpPr>
-        <p:spPr>
-          <a:xfrm>
-            <a:off x="9789922" y="4389120"/>
-            <a:ext cx="1463040" cy="388620"/>
-          </a:xfrm>
-          <a:prstGeom prst="rect">
-            <a:avLst/>
-          </a:prstGeom>
-          <a:noFill/>
-          <a:ln>
-            <a:noFill/>
-          </a:ln>
-        </p:spPr>
-        <p:txBody>
-          <a:bodyPr wrap="square" anchor="ctr" lIns="0" tIns="0" rIns="0" bIns="0" rtlCol="0"/>
-          <a:lstStyle/>
-          <a:p>
-            <a:pPr algn="l" marL="0" indent="0">
-              <a:lnSpc>
-                <a:spcPct val="100000"/>
-              </a:lnSpc>
-              <a:buNone/>
-            </a:pPr>
-            <a:r>
-              <a:rPr lang="th-TH" sz="1000" dirty="0">
-                <a:solidFill>
-                  <a:srgbClr val="5F5F5F"/>
-                </a:solidFill>
-                <a:latin typeface="+mn-lt"/>
-                <a:ea typeface="+mn-ea"/>
-                <a:cs typeface="+mn-cs"/>
-              </a:rPr>
-              <a:t>ตรวจรับงวด 3</a:t>
-            </a:r>
-          </a:p>
-        </p:txBody>
-      </p:sp>
-    </p:spTree>
-  </p:cSld>
-  <p:clrMapOvr>
-    <a:masterClrMapping/>
-  </p:clrMapOvr>
-</p:sld>
-</file>
-
 <file path=ppt/slides/slide2.xml><?xml version="1.0" encoding="utf-8"?>
 <p:sld xmlns:a="http://schemas.openxmlformats.org/drawingml/2006/main" xmlns:r="http://schemas.openxmlformats.org/officeDocument/2006/relationships" xmlns:p="http://schemas.openxmlformats.org/presentationml/2006/main">
   <p:cSld name="">
@@ -28905,83 +30359,14 @@
             <a:pPr/>
             <a:r>
               <a:rPr lang="th-TH" dirty="0"/>
-              <a:t>ครึ่งหนึ่งของงบ 4.8 ล้านบาท คือค่าพัฒนาระบบ</a:t>
-            </a:r>
-          </a:p>
-        </p:txBody>
-      </p:sp>
-      <p:sp>
-        <p:nvSpPr>
-          <p:cNvPr id="3" name="Total"/>
-          <p:cNvSpPr>
-            <a:spLocks noGrp="1"/>
-          </p:cNvSpPr>
-          <p:nvPr>
-            <p:ph type="body" idx="2"/>
-          </p:nvPr>
-        </p:nvSpPr>
-        <p:spPr/>
-        <p:txBody>
-          <a:bodyPr/>
-          <a:lstStyle/>
-          <a:p>
-            <a:pPr/>
-            <a:r>
-              <a:rPr lang="th-TH" dirty="0"/>
-              <a:t>4.8 ล้านบาท</a:t>
-            </a:r>
-          </a:p>
-        </p:txBody>
-      </p:sp>
-      <p:sp>
-        <p:nvSpPr>
-          <p:cNvPr id="4" name="TotalL"/>
-          <p:cNvSpPr>
-            <a:spLocks noGrp="1"/>
-          </p:cNvSpPr>
-          <p:nvPr>
-            <p:ph type="body" idx="3"/>
-          </p:nvPr>
-        </p:nvSpPr>
-        <p:spPr/>
-        <p:txBody>
-          <a:bodyPr/>
-          <a:lstStyle/>
-          <a:p>
-            <a:pPr/>
-            <a:r>
-              <a:rPr lang="th-TH" dirty="0"/>
-              <a:t>งบโครงการรวมทั้งสิ้น</a:t>
-            </a:r>
-          </a:p>
-        </p:txBody>
-      </p:sp>
-      <p:sp>
-        <p:nvSpPr>
-          <p:cNvPr id="5" name="Intro"/>
-          <p:cNvSpPr>
-            <a:spLocks noGrp="1"/>
-          </p:cNvSpPr>
-          <p:nvPr>
-            <p:ph type="body" idx="4"/>
-          </p:nvPr>
-        </p:nvSpPr>
-        <p:spPr/>
-        <p:txBody>
-          <a:bodyPr/>
-          <a:lstStyle/>
-          <a:p>
-            <a:pPr/>
-            <a:r>
-              <a:rPr lang="th-TH" dirty="0"/>
-              <a:t>รวมภาษีมูลค่าเพิ่ม · สัญญา 12 เดือน ไม่รวมค่าบริการรายเดือนหลังปีแรก</a:t>
+              <a:t>แผนงาน 12 เดือน ขึ้นระบบต้นเดือนที่ 7</a:t>
             </a:r>
           </a:p>
         </p:txBody>
       </p:sp>
       <p:graphicFrame>
         <p:nvGraphicFramePr>
-          <p:cNvPr id="6" name="Composition"/>
+          <p:cNvPr id="3" name="Plan"/>
           <p:cNvGraphicFramePr>
             <a:graphicFrameLocks noGrp="1"/>
           </p:cNvGraphicFramePr>
@@ -28990,8 +30375,8 @@
           </p:nvPr>
         </p:nvGraphicFramePr>
         <p:xfrm>
-          <a:off x="2697480" y="3703320"/>
-          <a:ext cx="7299960" cy="1371600"/>
+          <a:off x="3566160" y="2057400"/>
+          <a:ext cx="7711440" cy="3108960"/>
         </p:xfrm>
         <a:graphic>
           <a:graphicData uri="http://schemas.openxmlformats.org/drawingml/2006/chart">
@@ -29001,7 +30386,7 @@
       </p:graphicFrame>
       <p:sp>
         <p:nvSpPr>
-          <p:cNvPr id="7" name="B1"/>
+          <p:cNvPr id="4" name="P1"/>
           <p:cNvSpPr>
             <a:spLocks noGrp="1"/>
           </p:cNvSpPr>
@@ -29017,14 +30402,129 @@
             <a:pPr/>
             <a:r>
               <a:rPr lang="th-TH" dirty="0"/>
-              <a:t>งบโครงการ</a:t>
-            </a:r>
-          </a:p>
-        </p:txBody>
-      </p:sp>
-      <p:sp>
-        <p:nvSpPr>
-          <p:cNvPr id="8" name="SN"/>
+              <a:t>ด.1</a:t>
+            </a:r>
+          </a:p>
+        </p:txBody>
+      </p:sp>
+      <p:sp>
+        <p:nvSpPr>
+          <p:cNvPr id="5" name="P2"/>
+          <p:cNvSpPr>
+            <a:spLocks noGrp="1"/>
+          </p:cNvSpPr>
+          <p:nvPr>
+            <p:ph type="body" idx="21"/>
+          </p:nvPr>
+        </p:nvSpPr>
+        <p:spPr/>
+        <p:txBody>
+          <a:bodyPr/>
+          <a:lstStyle/>
+          <a:p>
+            <a:pPr/>
+            <a:r>
+              <a:rPr lang="th-TH" dirty="0"/>
+              <a:t>ด.2</a:t>
+            </a:r>
+          </a:p>
+        </p:txBody>
+      </p:sp>
+      <p:sp>
+        <p:nvSpPr>
+          <p:cNvPr id="6" name="P3"/>
+          <p:cNvSpPr>
+            <a:spLocks noGrp="1"/>
+          </p:cNvSpPr>
+          <p:nvPr>
+            <p:ph type="body" idx="22"/>
+          </p:nvPr>
+        </p:nvSpPr>
+        <p:spPr/>
+        <p:txBody>
+          <a:bodyPr/>
+          <a:lstStyle/>
+          <a:p>
+            <a:pPr/>
+            <a:r>
+              <a:rPr lang="th-TH" dirty="0"/>
+              <a:t>ด.3</a:t>
+            </a:r>
+          </a:p>
+        </p:txBody>
+      </p:sp>
+      <p:sp>
+        <p:nvSpPr>
+          <p:cNvPr id="7" name="P4"/>
+          <p:cNvSpPr>
+            <a:spLocks noGrp="1"/>
+          </p:cNvSpPr>
+          <p:nvPr>
+            <p:ph type="body" idx="23"/>
+          </p:nvPr>
+        </p:nvSpPr>
+        <p:spPr/>
+        <p:txBody>
+          <a:bodyPr/>
+          <a:lstStyle/>
+          <a:p>
+            <a:pPr/>
+            <a:r>
+              <a:rPr lang="th-TH" dirty="0"/>
+              <a:t>ด.4</a:t>
+            </a:r>
+          </a:p>
+        </p:txBody>
+      </p:sp>
+      <p:sp>
+        <p:nvSpPr>
+          <p:cNvPr id="8" name="P5"/>
+          <p:cNvSpPr>
+            <a:spLocks noGrp="1"/>
+          </p:cNvSpPr>
+          <p:nvPr>
+            <p:ph type="body" idx="24"/>
+          </p:nvPr>
+        </p:nvSpPr>
+        <p:spPr/>
+        <p:txBody>
+          <a:bodyPr/>
+          <a:lstStyle/>
+          <a:p>
+            <a:pPr/>
+            <a:r>
+              <a:rPr lang="th-TH" dirty="0"/>
+              <a:t>ด.5</a:t>
+            </a:r>
+          </a:p>
+        </p:txBody>
+      </p:sp>
+      <p:sp>
+        <p:nvSpPr>
+          <p:cNvPr id="9" name="P6"/>
+          <p:cNvSpPr>
+            <a:spLocks noGrp="1"/>
+          </p:cNvSpPr>
+          <p:nvPr>
+            <p:ph type="body" idx="25"/>
+          </p:nvPr>
+        </p:nvSpPr>
+        <p:spPr/>
+        <p:txBody>
+          <a:bodyPr/>
+          <a:lstStyle/>
+          <a:p>
+            <a:pPr/>
+            <a:r>
+              <a:rPr lang="th-TH" dirty="0"/>
+              <a:t>ด.6</a:t>
+            </a:r>
+          </a:p>
+        </p:txBody>
+      </p:sp>
+      <p:sp>
+        <p:nvSpPr>
+          <p:cNvPr id="10" name="P7"/>
           <p:cNvSpPr>
             <a:spLocks noGrp="1"/>
           </p:cNvSpPr>
@@ -29040,14 +30540,14 @@
             <a:pPr/>
             <a:r>
               <a:rPr lang="th-TH" dirty="0"/>
-              <a:t>พัฒนาและตั้งค่าระบบ</a:t>
-            </a:r>
-          </a:p>
-        </p:txBody>
-      </p:sp>
-      <p:sp>
-        <p:nvSpPr>
-          <p:cNvPr id="9" name="SV"/>
+              <a:t>ด.7</a:t>
+            </a:r>
+          </a:p>
+        </p:txBody>
+      </p:sp>
+      <p:sp>
+        <p:nvSpPr>
+          <p:cNvPr id="11" name="P8"/>
           <p:cNvSpPr>
             <a:spLocks noGrp="1"/>
           </p:cNvSpPr>
@@ -29063,14 +30563,14 @@
             <a:pPr/>
             <a:r>
               <a:rPr lang="th-TH" dirty="0"/>
-              <a:t>2.4 ล้านบาท</a:t>
-            </a:r>
-          </a:p>
-        </p:txBody>
-      </p:sp>
-      <p:sp>
-        <p:nvSpPr>
-          <p:cNvPr id="10" name="SP"/>
+              <a:t>ด.8</a:t>
+            </a:r>
+          </a:p>
+        </p:txBody>
+      </p:sp>
+      <p:sp>
+        <p:nvSpPr>
+          <p:cNvPr id="12" name="P9"/>
           <p:cNvSpPr>
             <a:spLocks noGrp="1"/>
           </p:cNvSpPr>
@@ -29086,14 +30586,14 @@
             <a:pPr/>
             <a:r>
               <a:rPr lang="th-TH" dirty="0"/>
-              <a:t>50%</a:t>
-            </a:r>
-          </a:p>
-        </p:txBody>
-      </p:sp>
-      <p:sp>
-        <p:nvSpPr>
-          <p:cNvPr id="11" name="SN"/>
+              <a:t>ด.9</a:t>
+            </a:r>
+          </a:p>
+        </p:txBody>
+      </p:sp>
+      <p:sp>
+        <p:nvSpPr>
+          <p:cNvPr id="13" name="P10"/>
           <p:cNvSpPr>
             <a:spLocks noGrp="1"/>
           </p:cNvSpPr>
@@ -29109,14 +30609,14 @@
             <a:pPr/>
             <a:r>
               <a:rPr lang="th-TH" dirty="0"/>
-              <a:t>ไลเซนส์ซอฟต์แวร์</a:t>
-            </a:r>
-          </a:p>
-        </p:txBody>
-      </p:sp>
-      <p:sp>
-        <p:nvSpPr>
-          <p:cNvPr id="12" name="SV"/>
+              <a:t>ด.10</a:t>
+            </a:r>
+          </a:p>
+        </p:txBody>
+      </p:sp>
+      <p:sp>
+        <p:nvSpPr>
+          <p:cNvPr id="14" name="P11"/>
           <p:cNvSpPr>
             <a:spLocks noGrp="1"/>
           </p:cNvSpPr>
@@ -29132,14 +30632,14 @@
             <a:pPr/>
             <a:r>
               <a:rPr lang="th-TH" dirty="0"/>
-              <a:t>1.2 ล้านบาท</a:t>
-            </a:r>
-          </a:p>
-        </p:txBody>
-      </p:sp>
-      <p:sp>
-        <p:nvSpPr>
-          <p:cNvPr id="13" name="SP"/>
+              <a:t>ด.11</a:t>
+            </a:r>
+          </a:p>
+        </p:txBody>
+      </p:sp>
+      <p:sp>
+        <p:nvSpPr>
+          <p:cNvPr id="15" name="P12"/>
           <p:cNvSpPr>
             <a:spLocks noGrp="1"/>
           </p:cNvSpPr>
@@ -29155,14 +30655,14 @@
             <a:pPr/>
             <a:r>
               <a:rPr lang="th-TH" dirty="0"/>
-              <a:t>25%</a:t>
-            </a:r>
-          </a:p>
-        </p:txBody>
-      </p:sp>
-      <p:sp>
-        <p:nvSpPr>
-          <p:cNvPr id="14" name="SN"/>
+              <a:t>ด.12</a:t>
+            </a:r>
+          </a:p>
+        </p:txBody>
+      </p:sp>
+      <p:sp>
+        <p:nvSpPr>
+          <p:cNvPr id="16" name="R1"/>
           <p:cNvSpPr>
             <a:spLocks noGrp="1"/>
           </p:cNvSpPr>
@@ -29178,14 +30678,14 @@
             <a:pPr/>
             <a:r>
               <a:rPr lang="th-TH" dirty="0"/>
-              <a:t>คลาวด์ปีแรก</a:t>
-            </a:r>
-          </a:p>
-        </p:txBody>
-      </p:sp>
-      <p:sp>
-        <p:nvSpPr>
-          <p:cNvPr id="15" name="SV"/>
+              <a:t>1. เตรียมระบบ</a:t>
+            </a:r>
+          </a:p>
+        </p:txBody>
+      </p:sp>
+      <p:sp>
+        <p:nvSpPr>
+          <p:cNvPr id="17" name="D1"/>
           <p:cNvSpPr>
             <a:spLocks noGrp="1"/>
           </p:cNvSpPr>
@@ -29201,14 +30701,14 @@
             <a:pPr/>
             <a:r>
               <a:rPr lang="th-TH" dirty="0"/>
-              <a:t>0.7 ล้านบาท</a:t>
-            </a:r>
-          </a:p>
-        </p:txBody>
-      </p:sp>
-      <p:sp>
-        <p:nvSpPr>
-          <p:cNvPr id="16" name="SP"/>
+              <a:t>4 สัปดาห์</a:t>
+            </a:r>
+          </a:p>
+        </p:txBody>
+      </p:sp>
+      <p:sp>
+        <p:nvSpPr>
+          <p:cNvPr id="18" name="R2"/>
           <p:cNvSpPr>
             <a:spLocks noGrp="1"/>
           </p:cNvSpPr>
@@ -29224,14 +30724,14 @@
             <a:pPr/>
             <a:r>
               <a:rPr lang="th-TH" dirty="0"/>
-              <a:t>15%</a:t>
-            </a:r>
-          </a:p>
-        </p:txBody>
-      </p:sp>
-      <p:sp>
-        <p:nvSpPr>
-          <p:cNvPr id="17" name="SN"/>
+              <a:t>2. วิเคราะห์และออกแบบ</a:t>
+            </a:r>
+          </a:p>
+        </p:txBody>
+      </p:sp>
+      <p:sp>
+        <p:nvSpPr>
+          <p:cNvPr id="19" name="D2"/>
           <p:cNvSpPr>
             <a:spLocks noGrp="1"/>
           </p:cNvSpPr>
@@ -29247,14 +30747,14 @@
             <a:pPr/>
             <a:r>
               <a:rPr lang="th-TH" dirty="0"/>
-              <a:t>อื่น ๆ</a:t>
-            </a:r>
-          </a:p>
-        </p:txBody>
-      </p:sp>
-      <p:sp>
-        <p:nvSpPr>
-          <p:cNvPr id="18" name="SV"/>
+              <a:t>6 สัปดาห์</a:t>
+            </a:r>
+          </a:p>
+        </p:txBody>
+      </p:sp>
+      <p:sp>
+        <p:nvSpPr>
+          <p:cNvPr id="20" name="R3"/>
           <p:cNvSpPr>
             <a:spLocks noGrp="1"/>
           </p:cNvSpPr>
@@ -29270,14 +30770,14 @@
             <a:pPr/>
             <a:r>
               <a:rPr lang="th-TH" dirty="0"/>
-              <a:t>0.5 ล้านบาท</a:t>
-            </a:r>
-          </a:p>
-        </p:txBody>
-      </p:sp>
-      <p:sp>
-        <p:nvSpPr>
-          <p:cNvPr id="19" name="SP"/>
+              <a:t>3. พัฒนาและตั้งค่าระบบ</a:t>
+            </a:r>
+          </a:p>
+        </p:txBody>
+      </p:sp>
+      <p:sp>
+        <p:nvSpPr>
+          <p:cNvPr id="21" name="D3"/>
           <p:cNvSpPr>
             <a:spLocks noGrp="1"/>
           </p:cNvSpPr>
@@ -29293,19 +30793,19 @@
             <a:pPr/>
             <a:r>
               <a:rPr lang="th-TH" dirty="0"/>
-              <a:t>10%</a:t>
-            </a:r>
-          </a:p>
-        </p:txBody>
-      </p:sp>
-      <p:sp>
-        <p:nvSpPr>
-          <p:cNvPr id="20" name="Src"/>
-          <p:cNvSpPr>
-            <a:spLocks noGrp="1"/>
-          </p:cNvSpPr>
-          <p:nvPr>
-            <p:ph type="body" idx="5"/>
+              <a:t>10 สัปดาห์</a:t>
+            </a:r>
+          </a:p>
+        </p:txBody>
+      </p:sp>
+      <p:sp>
+        <p:nvSpPr>
+          <p:cNvPr id="22" name="R4"/>
+          <p:cNvSpPr>
+            <a:spLocks noGrp="1"/>
+          </p:cNvSpPr>
+          <p:nvPr>
+            <p:ph type="body" idx="38"/>
           </p:nvPr>
         </p:nvSpPr>
         <p:spPr/>
@@ -29316,19 +30816,272 @@
             <a:pPr/>
             <a:r>
               <a:rPr lang="th-TH" dirty="0"/>
-              <a:t>ใบเสนอราคา NCT-2569-041 · ปัดเป็นแสนบาท</a:t>
-            </a:r>
-          </a:p>
-        </p:txBody>
-      </p:sp>
-      <p:sp>
-        <p:nvSpPr>
-          <p:cNvPr id="21" name="TL"/>
-          <p:cNvSpPr>
-            <a:spLocks noGrp="1"/>
-          </p:cNvSpPr>
-          <p:nvPr>
-            <p:ph type="body" idx="6"/>
+              <a:t>4. ทดสอบ UAT</a:t>
+            </a:r>
+          </a:p>
+        </p:txBody>
+      </p:sp>
+      <p:sp>
+        <p:nvSpPr>
+          <p:cNvPr id="23" name="D4"/>
+          <p:cNvSpPr>
+            <a:spLocks noGrp="1"/>
+          </p:cNvSpPr>
+          <p:nvPr>
+            <p:ph type="body" idx="39"/>
+          </p:nvPr>
+        </p:nvSpPr>
+        <p:spPr/>
+        <p:txBody>
+          <a:bodyPr/>
+          <a:lstStyle/>
+          <a:p>
+            <a:pPr/>
+            <a:r>
+              <a:rPr lang="th-TH" dirty="0"/>
+              <a:t>4 สัปดาห์</a:t>
+            </a:r>
+          </a:p>
+        </p:txBody>
+      </p:sp>
+      <p:sp>
+        <p:nvSpPr>
+          <p:cNvPr id="24" name="R5"/>
+          <p:cNvSpPr>
+            <a:spLocks noGrp="1"/>
+          </p:cNvSpPr>
+          <p:nvPr>
+            <p:ph type="body" idx="40"/>
+          </p:nvPr>
+        </p:nvSpPr>
+        <p:spPr/>
+        <p:txBody>
+          <a:bodyPr/>
+          <a:lstStyle/>
+          <a:p>
+            <a:pPr/>
+            <a:r>
+              <a:rPr lang="th-TH" dirty="0"/>
+              <a:t>5. อบรมผู้ใช้</a:t>
+            </a:r>
+          </a:p>
+        </p:txBody>
+      </p:sp>
+      <p:sp>
+        <p:nvSpPr>
+          <p:cNvPr id="25" name="D5"/>
+          <p:cNvSpPr>
+            <a:spLocks noGrp="1"/>
+          </p:cNvSpPr>
+          <p:nvPr>
+            <p:ph type="body" idx="41"/>
+          </p:nvPr>
+        </p:nvSpPr>
+        <p:spPr/>
+        <p:txBody>
+          <a:bodyPr/>
+          <a:lstStyle/>
+          <a:p>
+            <a:pPr/>
+            <a:r>
+              <a:rPr lang="th-TH" dirty="0"/>
+              <a:t>1 สัปดาห์</a:t>
+            </a:r>
+          </a:p>
+        </p:txBody>
+      </p:sp>
+      <p:sp>
+        <p:nvSpPr>
+          <p:cNvPr id="26" name="R6"/>
+          <p:cNvSpPr>
+            <a:spLocks noGrp="1"/>
+          </p:cNvSpPr>
+          <p:nvPr>
+            <p:ph type="body" idx="42"/>
+          </p:nvPr>
+        </p:nvSpPr>
+        <p:spPr/>
+        <p:txBody>
+          <a:bodyPr/>
+          <a:lstStyle/>
+          <a:p>
+            <a:pPr/>
+            <a:r>
+              <a:rPr lang="th-TH" dirty="0"/>
+              <a:t>6. ขึ้นระบบ</a:t>
+            </a:r>
+          </a:p>
+        </p:txBody>
+      </p:sp>
+      <p:sp>
+        <p:nvSpPr>
+          <p:cNvPr id="27" name="D6"/>
+          <p:cNvSpPr>
+            <a:spLocks noGrp="1"/>
+          </p:cNvSpPr>
+          <p:nvPr>
+            <p:ph type="body" idx="43"/>
+          </p:nvPr>
+        </p:nvSpPr>
+        <p:spPr/>
+        <p:txBody>
+          <a:bodyPr/>
+          <a:lstStyle/>
+          <a:p>
+            <a:pPr/>
+            <a:r>
+              <a:rPr lang="th-TH" dirty="0"/>
+              <a:t>2 สัปดาห์</a:t>
+            </a:r>
+          </a:p>
+        </p:txBody>
+      </p:sp>
+      <p:sp>
+        <p:nvSpPr>
+          <p:cNvPr id="28" name="R7"/>
+          <p:cNvSpPr>
+            <a:spLocks noGrp="1"/>
+          </p:cNvSpPr>
+          <p:nvPr>
+            <p:ph type="body" idx="44"/>
+          </p:nvPr>
+        </p:nvSpPr>
+        <p:spPr/>
+        <p:txBody>
+          <a:bodyPr/>
+          <a:lstStyle/>
+          <a:p>
+            <a:pPr/>
+            <a:r>
+              <a:rPr lang="th-TH" dirty="0"/>
+              <a:t>7. ดูแลหลังขึ้นระบบ</a:t>
+            </a:r>
+          </a:p>
+        </p:txBody>
+      </p:sp>
+      <p:sp>
+        <p:nvSpPr>
+          <p:cNvPr id="29" name="D7"/>
+          <p:cNvSpPr>
+            <a:spLocks noGrp="1"/>
+          </p:cNvSpPr>
+          <p:nvPr>
+            <p:ph type="body" idx="45"/>
+          </p:nvPr>
+        </p:nvSpPr>
+        <p:spPr/>
+        <p:txBody>
+          <a:bodyPr/>
+          <a:lstStyle/>
+          <a:p>
+            <a:pPr/>
+            <a:r>
+              <a:rPr lang="th-TH" dirty="0"/>
+              <a:t>3 เดือน</a:t>
+            </a:r>
+          </a:p>
+        </p:txBody>
+      </p:sp>
+      <p:sp>
+        <p:nvSpPr>
+          <p:cNvPr id="30" name="R8"/>
+          <p:cNvSpPr>
+            <a:spLocks noGrp="1"/>
+          </p:cNvSpPr>
+          <p:nvPr>
+            <p:ph type="body" idx="46"/>
+          </p:nvPr>
+        </p:nvSpPr>
+        <p:spPr/>
+        <p:txBody>
+          <a:bodyPr/>
+          <a:lstStyle/>
+          <a:p>
+            <a:pPr/>
+            <a:r>
+              <a:rPr lang="th-TH" dirty="0"/>
+              <a:t>8. รับประกันระบบ</a:t>
+            </a:r>
+          </a:p>
+        </p:txBody>
+      </p:sp>
+      <p:sp>
+        <p:nvSpPr>
+          <p:cNvPr id="31" name="D8"/>
+          <p:cNvSpPr>
+            <a:spLocks noGrp="1"/>
+          </p:cNvSpPr>
+          <p:nvPr>
+            <p:ph type="body" idx="47"/>
+          </p:nvPr>
+        </p:nvSpPr>
+        <p:spPr/>
+        <p:txBody>
+          <a:bodyPr/>
+          <a:lstStyle/>
+          <a:p>
+            <a:pPr/>
+            <a:r>
+              <a:rPr lang="th-TH" dirty="0"/>
+              <a:t>2.5 เดือน</a:t>
+            </a:r>
+          </a:p>
+        </p:txBody>
+      </p:sp>
+      <p:sp>
+        <p:nvSpPr>
+          <p:cNvPr id="32" name="Key"/>
+          <p:cNvSpPr>
+            <a:spLocks noGrp="1"/>
+          </p:cNvSpPr>
+          <p:nvPr>
+            <p:ph type="body" idx="2"/>
+          </p:nvPr>
+        </p:nvSpPr>
+        <p:spPr/>
+        <p:txBody>
+          <a:bodyPr/>
+          <a:lstStyle/>
+          <a:p>
+            <a:pPr/>
+            <a:r>
+              <a:rPr lang="th-TH" dirty="0"/>
+              <a:t>■ ช่วงงาน   ◆ ส่งมอบ / ตรวจรับ</a:t>
+            </a:r>
+          </a:p>
+        </p:txBody>
+      </p:sp>
+      <p:sp>
+        <p:nvSpPr>
+          <p:cNvPr id="33" name="Asm"/>
+          <p:cNvSpPr>
+            <a:spLocks noGrp="1"/>
+          </p:cNvSpPr>
+          <p:nvPr>
+            <p:ph type="body" idx="3"/>
+          </p:nvPr>
+        </p:nvSpPr>
+        <p:spPr/>
+        <p:txBody>
+          <a:bodyPr/>
+          <a:lstStyle/>
+          <a:p>
+            <a:pPr/>
+            <a:r>
+              <a:rPr lang="th-TH" dirty="0"/>
+              <a:t>นับจากวันลงนามสัญญา · หน่วย: เดือน</a:t>
+            </a:r>
+          </a:p>
+        </p:txBody>
+      </p:sp>
+      <p:sp>
+        <p:nvSpPr>
+          <p:cNvPr id="34" name="TL"/>
+          <p:cNvSpPr>
+            <a:spLocks noGrp="1"/>
+          </p:cNvSpPr>
+          <p:nvPr>
+            <p:ph type="body" idx="4"/>
           </p:nvPr>
         </p:nvSpPr>
         <p:spPr/>
@@ -29346,12 +31099,12 @@
       </p:sp>
       <p:sp>
         <p:nvSpPr>
-          <p:cNvPr id="22" name="TC"/>
-          <p:cNvSpPr>
-            <a:spLocks noGrp="1"/>
-          </p:cNvSpPr>
-          <p:nvPr>
-            <p:ph type="body" idx="7"/>
+          <p:cNvPr id="35" name="TC"/>
+          <p:cNvSpPr>
+            <a:spLocks noGrp="1"/>
+          </p:cNvSpPr>
+          <p:nvPr>
+            <p:ph type="body" idx="5"/>
           </p:nvPr>
         </p:nvSpPr>
         <p:spPr/>
@@ -29362,7 +31115,229 @@
             <a:pPr/>
             <a:r>
               <a:rPr lang="th-TH" dirty="0"/>
-              <a:t>ไลเซนส์กับคลาวด์รวมกันไม่ถึง 40% งบส่วนใหญ่จ่ายให้งานที่ทำครั้งเดียว</a:t>
+              <a:t>ขึ้นระบบต้นเดือนที่ 7 ตรวจรับ 3 งวดตามจุดส่งมอบ</a:t>
+            </a:r>
+          </a:p>
+        </p:txBody>
+      </p:sp>
+      <p:sp>
+        <p:nvSpPr>
+          <p:cNvPr id="36" name="Milestone 2"/>
+          <p:cNvSpPr/>
+          <p:nvPr/>
+        </p:nvSpPr>
+        <p:spPr>
+          <a:xfrm>
+            <a:off x="5099558" y="2567178"/>
+            <a:ext cx="146304" cy="146304"/>
+          </a:xfrm>
+          <a:prstGeom prst="diamond">
+            <a:avLst/>
+          </a:prstGeom>
+          <a:solidFill>
+            <a:srgbClr val="BB731B"/>
+          </a:solidFill>
+          <a:ln w="19050">
+            <a:solidFill>
+              <a:srgbClr val="FFFFFF"/>
+            </a:solidFill>
+          </a:ln>
+        </p:spPr>
+        <p:txBody>
+          <a:bodyPr/>
+          <a:lstStyle/>
+          <a:p>
+            <a:endParaRPr lang="th-TH"/>
+          </a:p>
+        </p:txBody>
+      </p:sp>
+      <p:sp>
+        <p:nvSpPr>
+          <p:cNvPr id="37" name="Milestone 2 Label"/>
+          <p:cNvSpPr/>
+          <p:nvPr/>
+        </p:nvSpPr>
+        <p:spPr>
+          <a:xfrm>
+            <a:off x="5291582" y="2446020"/>
+            <a:ext cx="1463040" cy="388620"/>
+          </a:xfrm>
+          <a:prstGeom prst="rect">
+            <a:avLst/>
+          </a:prstGeom>
+          <a:noFill/>
+          <a:ln>
+            <a:noFill/>
+          </a:ln>
+        </p:spPr>
+        <p:txBody>
+          <a:bodyPr wrap="square" anchor="ctr" lIns="0" tIns="0" rIns="0" bIns="0" rtlCol="0"/>
+          <a:lstStyle/>
+          <a:p>
+            <a:pPr algn="l" marL="0" indent="0">
+              <a:lnSpc>
+                <a:spcPct val="100000"/>
+              </a:lnSpc>
+              <a:buNone/>
+            </a:pPr>
+            <a:r>
+              <a:rPr lang="th-TH" sz="1000" dirty="0">
+                <a:solidFill>
+                  <a:srgbClr val="5F5F5F"/>
+                </a:solidFill>
+                <a:latin typeface="+mn-lt"/>
+                <a:ea typeface="+mn-ea"/>
+                <a:cs typeface="+mn-cs"/>
+              </a:rPr>
+              <a:t>ตรวจรับงวด 1</a:t>
+            </a:r>
+          </a:p>
+        </p:txBody>
+      </p:sp>
+      <p:sp>
+        <p:nvSpPr>
+          <p:cNvPr id="38" name="Milestone 4"/>
+          <p:cNvSpPr/>
+          <p:nvPr/>
+        </p:nvSpPr>
+        <p:spPr>
+          <a:xfrm>
+            <a:off x="7348728" y="3344418"/>
+            <a:ext cx="146304" cy="146304"/>
+          </a:xfrm>
+          <a:prstGeom prst="diamond">
+            <a:avLst/>
+          </a:prstGeom>
+          <a:solidFill>
+            <a:srgbClr val="BB731B"/>
+          </a:solidFill>
+          <a:ln w="19050">
+            <a:solidFill>
+              <a:srgbClr val="FFFFFF"/>
+            </a:solidFill>
+          </a:ln>
+        </p:spPr>
+        <p:txBody>
+          <a:bodyPr/>
+          <a:lstStyle/>
+          <a:p>
+            <a:endParaRPr lang="th-TH"/>
+          </a:p>
+        </p:txBody>
+      </p:sp>
+      <p:sp>
+        <p:nvSpPr>
+          <p:cNvPr id="39" name="Milestone 4 Label"/>
+          <p:cNvSpPr/>
+          <p:nvPr/>
+        </p:nvSpPr>
+        <p:spPr>
+          <a:xfrm>
+            <a:off x="7540752" y="3223260"/>
+            <a:ext cx="1463040" cy="388620"/>
+          </a:xfrm>
+          <a:prstGeom prst="rect">
+            <a:avLst/>
+          </a:prstGeom>
+          <a:noFill/>
+          <a:ln>
+            <a:noFill/>
+          </a:ln>
+        </p:spPr>
+        <p:txBody>
+          <a:bodyPr wrap="square" anchor="ctr" lIns="0" tIns="0" rIns="0" bIns="0" rtlCol="0"/>
+          <a:lstStyle/>
+          <a:p>
+            <a:pPr algn="l" marL="0" indent="0">
+              <a:lnSpc>
+                <a:spcPct val="100000"/>
+              </a:lnSpc>
+              <a:buNone/>
+            </a:pPr>
+            <a:r>
+              <a:rPr lang="th-TH" sz="1000" dirty="0">
+                <a:solidFill>
+                  <a:srgbClr val="5F5F5F"/>
+                </a:solidFill>
+                <a:latin typeface="+mn-lt"/>
+                <a:ea typeface="+mn-ea"/>
+                <a:cs typeface="+mn-cs"/>
+              </a:rPr>
+              <a:t>ตรวจรับงวด 2</a:t>
+            </a:r>
+          </a:p>
+        </p:txBody>
+      </p:sp>
+      <p:sp>
+        <p:nvSpPr>
+          <p:cNvPr id="40" name="Milestone 7"/>
+          <p:cNvSpPr/>
+          <p:nvPr/>
+        </p:nvSpPr>
+        <p:spPr>
+          <a:xfrm>
+            <a:off x="9597898" y="4510278"/>
+            <a:ext cx="146304" cy="146304"/>
+          </a:xfrm>
+          <a:prstGeom prst="diamond">
+            <a:avLst/>
+          </a:prstGeom>
+          <a:solidFill>
+            <a:srgbClr val="BB731B"/>
+          </a:solidFill>
+          <a:ln w="19050">
+            <a:solidFill>
+              <a:srgbClr val="FFFFFF"/>
+            </a:solidFill>
+          </a:ln>
+        </p:spPr>
+        <p:txBody>
+          <a:bodyPr/>
+          <a:lstStyle/>
+          <a:p>
+            <a:endParaRPr lang="th-TH"/>
+          </a:p>
+        </p:txBody>
+      </p:sp>
+      <p:sp>
+        <p:nvSpPr>
+          <p:cNvPr id="41" name="Milestone 7 Label"/>
+          <p:cNvSpPr/>
+          <p:nvPr/>
+        </p:nvSpPr>
+        <p:spPr>
+          <a:xfrm>
+            <a:off x="9789922" y="4389120"/>
+            <a:ext cx="1463040" cy="388620"/>
+          </a:xfrm>
+          <a:prstGeom prst="rect">
+            <a:avLst/>
+          </a:prstGeom>
+          <a:noFill/>
+          <a:ln>
+            <a:noFill/>
+          </a:ln>
+        </p:spPr>
+        <p:txBody>
+          <a:bodyPr wrap="square" anchor="ctr" lIns="0" tIns="0" rIns="0" bIns="0" rtlCol="0"/>
+          <a:lstStyle/>
+          <a:p>
+            <a:pPr algn="l" marL="0" indent="0">
+              <a:lnSpc>
+                <a:spcPct val="100000"/>
+              </a:lnSpc>
+              <a:buNone/>
+            </a:pPr>
+            <a:r>
+              <a:rPr lang="th-TH" sz="1000" dirty="0">
+                <a:solidFill>
+                  <a:srgbClr val="5F5F5F"/>
+                </a:solidFill>
+                <a:latin typeface="+mn-lt"/>
+                <a:ea typeface="+mn-ea"/>
+                <a:cs typeface="+mn-cs"/>
+              </a:rPr>
+              <a:t>ตรวจรับงวด 3</a:t>
             </a:r>
           </a:p>
         </p:txBody>
@@ -29410,19 +31385,19 @@
             <a:pPr/>
             <a:r>
               <a:rPr lang="th-TH" dirty="0"/>
-              <a:t>5. Implementation Stage</a:t>
-            </a:r>
-          </a:p>
-        </p:txBody>
-      </p:sp>
-      <p:sp>
-        <p:nvSpPr>
-          <p:cNvPr id="3" name="KAL"/>
-          <p:cNvSpPr>
-            <a:spLocks noGrp="1"/>
-          </p:cNvSpPr>
-          <p:nvPr>
-            <p:ph type="body" idx="1"/>
+              <a:t>ครึ่งหนึ่งของงบ 4.8 ล้านบาท คือค่าพัฒนาระบบ</a:t>
+            </a:r>
+          </a:p>
+        </p:txBody>
+      </p:sp>
+      <p:sp>
+        <p:nvSpPr>
+          <p:cNvPr id="3" name="Total"/>
+          <p:cNvSpPr>
+            <a:spLocks noGrp="1"/>
+          </p:cNvSpPr>
+          <p:nvPr>
+            <p:ph type="body" idx="2"/>
           </p:nvPr>
         </p:nvSpPr>
         <p:spPr/>
@@ -29433,19 +31408,19 @@
             <a:pPr/>
             <a:r>
               <a:rPr lang="th-TH" dirty="0"/>
-              <a:t>Key Activity :</a:t>
-            </a:r>
-          </a:p>
-        </p:txBody>
-      </p:sp>
-      <p:sp>
-        <p:nvSpPr>
-          <p:cNvPr id="4" name="KAV"/>
-          <p:cNvSpPr>
-            <a:spLocks noGrp="1"/>
-          </p:cNvSpPr>
-          <p:nvPr>
-            <p:ph type="body" idx="2"/>
+              <a:t>4.8 ล้านบาท</a:t>
+            </a:r>
+          </a:p>
+        </p:txBody>
+      </p:sp>
+      <p:sp>
+        <p:nvSpPr>
+          <p:cNvPr id="4" name="TotalL"/>
+          <p:cNvSpPr>
+            <a:spLocks noGrp="1"/>
+          </p:cNvSpPr>
+          <p:nvPr>
+            <p:ph type="body" idx="3"/>
           </p:nvPr>
         </p:nvSpPr>
         <p:spPr/>
@@ -29456,19 +31431,19 @@
             <a:pPr/>
             <a:r>
               <a:rPr lang="th-TH" dirty="0"/>
-              <a:t>ตั้งค่าสภาพแวดล้อม ติดตั้งฮาร์ดแวร์และซอฟต์แวร์</a:t>
-            </a:r>
-          </a:p>
-        </p:txBody>
-      </p:sp>
-      <p:sp>
-        <p:nvSpPr>
-          <p:cNvPr id="5" name="PL"/>
-          <p:cNvSpPr>
-            <a:spLocks noGrp="1"/>
-          </p:cNvSpPr>
-          <p:nvPr>
-            <p:ph type="body" idx="3"/>
+              <a:t>งบโครงการรวมทั้งสิ้น</a:t>
+            </a:r>
+          </a:p>
+        </p:txBody>
+      </p:sp>
+      <p:sp>
+        <p:nvSpPr>
+          <p:cNvPr id="5" name="Intro"/>
+          <p:cNvSpPr>
+            <a:spLocks noGrp="1"/>
+          </p:cNvSpPr>
+          <p:nvPr>
+            <p:ph type="body" idx="4"/>
           </p:nvPr>
         </p:nvSpPr>
         <p:spPr/>
@@ -29479,19 +31454,39 @@
             <a:pPr/>
             <a:r>
               <a:rPr lang="th-TH" dirty="0"/>
-              <a:t>Participant :</a:t>
-            </a:r>
-          </a:p>
-        </p:txBody>
-      </p:sp>
-      <p:sp>
-        <p:nvSpPr>
-          <p:cNvPr id="6" name="PV"/>
-          <p:cNvSpPr>
-            <a:spLocks noGrp="1"/>
-          </p:cNvSpPr>
-          <p:nvPr>
-            <p:ph type="body" idx="4"/>
+              <a:t>รวมภาษีมูลค่าเพิ่ม · สัญญา 12 เดือน ไม่รวมค่าบริการรายเดือนหลังปีแรก</a:t>
+            </a:r>
+          </a:p>
+        </p:txBody>
+      </p:sp>
+      <p:graphicFrame>
+        <p:nvGraphicFramePr>
+          <p:cNvPr id="6" name="Composition"/>
+          <p:cNvGraphicFramePr>
+            <a:graphicFrameLocks noGrp="1"/>
+          </p:cNvGraphicFramePr>
+          <p:nvPr>
+            <p:ph type="chart" idx="1"/>
+          </p:nvPr>
+        </p:nvGraphicFramePr>
+        <p:xfrm>
+          <a:off x="2697480" y="3703320"/>
+          <a:ext cx="7299960" cy="1371600"/>
+        </p:xfrm>
+        <a:graphic>
+          <a:graphicData uri="http://schemas.openxmlformats.org/drawingml/2006/chart">
+            <c:chart xmlns:c="http://schemas.openxmlformats.org/drawingml/2006/chart" r:id="rId2"/>
+          </a:graphicData>
+        </a:graphic>
+      </p:graphicFrame>
+      <p:sp>
+        <p:nvSpPr>
+          <p:cNvPr id="7" name="B1"/>
+          <p:cNvSpPr>
+            <a:spLocks noGrp="1"/>
+          </p:cNvSpPr>
+          <p:nvPr>
+            <p:ph type="body" idx="20"/>
           </p:nvPr>
         </p:nvSpPr>
         <p:spPr/>
@@ -29502,14 +31497,290 @@
             <a:pPr/>
             <a:r>
               <a:rPr lang="th-TH" dirty="0"/>
-              <a:t>NCT Infra Engineer, ทีมไอทีลูกค้า, Business Analyst</a:t>
-            </a:r>
-          </a:p>
-        </p:txBody>
-      </p:sp>
-      <p:sp>
-        <p:nvSpPr>
-          <p:cNvPr id="7" name="PN"/>
+              <a:t>งบโครงการ</a:t>
+            </a:r>
+          </a:p>
+        </p:txBody>
+      </p:sp>
+      <p:sp>
+        <p:nvSpPr>
+          <p:cNvPr id="8" name="SN"/>
+          <p:cNvSpPr>
+            <a:spLocks noGrp="1"/>
+          </p:cNvSpPr>
+          <p:nvPr>
+            <p:ph type="body" idx="26"/>
+          </p:nvPr>
+        </p:nvSpPr>
+        <p:spPr/>
+        <p:txBody>
+          <a:bodyPr/>
+          <a:lstStyle/>
+          <a:p>
+            <a:pPr/>
+            <a:r>
+              <a:rPr lang="th-TH" dirty="0"/>
+              <a:t>พัฒนาและตั้งค่าระบบ</a:t>
+            </a:r>
+          </a:p>
+        </p:txBody>
+      </p:sp>
+      <p:sp>
+        <p:nvSpPr>
+          <p:cNvPr id="9" name="SV"/>
+          <p:cNvSpPr>
+            <a:spLocks noGrp="1"/>
+          </p:cNvSpPr>
+          <p:nvPr>
+            <p:ph type="body" idx="27"/>
+          </p:nvPr>
+        </p:nvSpPr>
+        <p:spPr/>
+        <p:txBody>
+          <a:bodyPr/>
+          <a:lstStyle/>
+          <a:p>
+            <a:pPr/>
+            <a:r>
+              <a:rPr lang="th-TH" dirty="0"/>
+              <a:t>2.4 ล้านบาท</a:t>
+            </a:r>
+          </a:p>
+        </p:txBody>
+      </p:sp>
+      <p:sp>
+        <p:nvSpPr>
+          <p:cNvPr id="10" name="SP"/>
+          <p:cNvSpPr>
+            <a:spLocks noGrp="1"/>
+          </p:cNvSpPr>
+          <p:nvPr>
+            <p:ph type="body" idx="28"/>
+          </p:nvPr>
+        </p:nvSpPr>
+        <p:spPr/>
+        <p:txBody>
+          <a:bodyPr/>
+          <a:lstStyle/>
+          <a:p>
+            <a:pPr/>
+            <a:r>
+              <a:rPr lang="th-TH" dirty="0"/>
+              <a:t>50%</a:t>
+            </a:r>
+          </a:p>
+        </p:txBody>
+      </p:sp>
+      <p:sp>
+        <p:nvSpPr>
+          <p:cNvPr id="11" name="SN"/>
+          <p:cNvSpPr>
+            <a:spLocks noGrp="1"/>
+          </p:cNvSpPr>
+          <p:nvPr>
+            <p:ph type="body" idx="29"/>
+          </p:nvPr>
+        </p:nvSpPr>
+        <p:spPr/>
+        <p:txBody>
+          <a:bodyPr/>
+          <a:lstStyle/>
+          <a:p>
+            <a:pPr/>
+            <a:r>
+              <a:rPr lang="th-TH" dirty="0"/>
+              <a:t>ไลเซนส์ซอฟต์แวร์</a:t>
+            </a:r>
+          </a:p>
+        </p:txBody>
+      </p:sp>
+      <p:sp>
+        <p:nvSpPr>
+          <p:cNvPr id="12" name="SV"/>
+          <p:cNvSpPr>
+            <a:spLocks noGrp="1"/>
+          </p:cNvSpPr>
+          <p:nvPr>
+            <p:ph type="body" idx="30"/>
+          </p:nvPr>
+        </p:nvSpPr>
+        <p:spPr/>
+        <p:txBody>
+          <a:bodyPr/>
+          <a:lstStyle/>
+          <a:p>
+            <a:pPr/>
+            <a:r>
+              <a:rPr lang="th-TH" dirty="0"/>
+              <a:t>1.2 ล้านบาท</a:t>
+            </a:r>
+          </a:p>
+        </p:txBody>
+      </p:sp>
+      <p:sp>
+        <p:nvSpPr>
+          <p:cNvPr id="13" name="SP"/>
+          <p:cNvSpPr>
+            <a:spLocks noGrp="1"/>
+          </p:cNvSpPr>
+          <p:nvPr>
+            <p:ph type="body" idx="31"/>
+          </p:nvPr>
+        </p:nvSpPr>
+        <p:spPr/>
+        <p:txBody>
+          <a:bodyPr/>
+          <a:lstStyle/>
+          <a:p>
+            <a:pPr/>
+            <a:r>
+              <a:rPr lang="th-TH" dirty="0"/>
+              <a:t>25%</a:t>
+            </a:r>
+          </a:p>
+        </p:txBody>
+      </p:sp>
+      <p:sp>
+        <p:nvSpPr>
+          <p:cNvPr id="14" name="SN"/>
+          <p:cNvSpPr>
+            <a:spLocks noGrp="1"/>
+          </p:cNvSpPr>
+          <p:nvPr>
+            <p:ph type="body" idx="32"/>
+          </p:nvPr>
+        </p:nvSpPr>
+        <p:spPr/>
+        <p:txBody>
+          <a:bodyPr/>
+          <a:lstStyle/>
+          <a:p>
+            <a:pPr/>
+            <a:r>
+              <a:rPr lang="th-TH" dirty="0"/>
+              <a:t>คลาวด์ปีแรก</a:t>
+            </a:r>
+          </a:p>
+        </p:txBody>
+      </p:sp>
+      <p:sp>
+        <p:nvSpPr>
+          <p:cNvPr id="15" name="SV"/>
+          <p:cNvSpPr>
+            <a:spLocks noGrp="1"/>
+          </p:cNvSpPr>
+          <p:nvPr>
+            <p:ph type="body" idx="33"/>
+          </p:nvPr>
+        </p:nvSpPr>
+        <p:spPr/>
+        <p:txBody>
+          <a:bodyPr/>
+          <a:lstStyle/>
+          <a:p>
+            <a:pPr/>
+            <a:r>
+              <a:rPr lang="th-TH" dirty="0"/>
+              <a:t>0.7 ล้านบาท</a:t>
+            </a:r>
+          </a:p>
+        </p:txBody>
+      </p:sp>
+      <p:sp>
+        <p:nvSpPr>
+          <p:cNvPr id="16" name="SP"/>
+          <p:cNvSpPr>
+            <a:spLocks noGrp="1"/>
+          </p:cNvSpPr>
+          <p:nvPr>
+            <p:ph type="body" idx="34"/>
+          </p:nvPr>
+        </p:nvSpPr>
+        <p:spPr/>
+        <p:txBody>
+          <a:bodyPr/>
+          <a:lstStyle/>
+          <a:p>
+            <a:pPr/>
+            <a:r>
+              <a:rPr lang="th-TH" dirty="0"/>
+              <a:t>15%</a:t>
+            </a:r>
+          </a:p>
+        </p:txBody>
+      </p:sp>
+      <p:sp>
+        <p:nvSpPr>
+          <p:cNvPr id="17" name="SN"/>
+          <p:cNvSpPr>
+            <a:spLocks noGrp="1"/>
+          </p:cNvSpPr>
+          <p:nvPr>
+            <p:ph type="body" idx="35"/>
+          </p:nvPr>
+        </p:nvSpPr>
+        <p:spPr/>
+        <p:txBody>
+          <a:bodyPr/>
+          <a:lstStyle/>
+          <a:p>
+            <a:pPr/>
+            <a:r>
+              <a:rPr lang="th-TH" dirty="0"/>
+              <a:t>อื่น ๆ</a:t>
+            </a:r>
+          </a:p>
+        </p:txBody>
+      </p:sp>
+      <p:sp>
+        <p:nvSpPr>
+          <p:cNvPr id="18" name="SV"/>
+          <p:cNvSpPr>
+            <a:spLocks noGrp="1"/>
+          </p:cNvSpPr>
+          <p:nvPr>
+            <p:ph type="body" idx="36"/>
+          </p:nvPr>
+        </p:nvSpPr>
+        <p:spPr/>
+        <p:txBody>
+          <a:bodyPr/>
+          <a:lstStyle/>
+          <a:p>
+            <a:pPr/>
+            <a:r>
+              <a:rPr lang="th-TH" dirty="0"/>
+              <a:t>0.5 ล้านบาท</a:t>
+            </a:r>
+          </a:p>
+        </p:txBody>
+      </p:sp>
+      <p:sp>
+        <p:nvSpPr>
+          <p:cNvPr id="19" name="SP"/>
+          <p:cNvSpPr>
+            <a:spLocks noGrp="1"/>
+          </p:cNvSpPr>
+          <p:nvPr>
+            <p:ph type="body" idx="37"/>
+          </p:nvPr>
+        </p:nvSpPr>
+        <p:spPr/>
+        <p:txBody>
+          <a:bodyPr/>
+          <a:lstStyle/>
+          <a:p>
+            <a:pPr/>
+            <a:r>
+              <a:rPr lang="th-TH" dirty="0"/>
+              <a:t>10%</a:t>
+            </a:r>
+          </a:p>
+        </p:txBody>
+      </p:sp>
+      <p:sp>
+        <p:nvSpPr>
+          <p:cNvPr id="20" name="Src"/>
           <p:cNvSpPr>
             <a:spLocks noGrp="1"/>
           </p:cNvSpPr>
@@ -29525,14 +31796,14 @@
             <a:pPr/>
             <a:r>
               <a:rPr lang="th-TH" dirty="0"/>
-              <a:t>01</a:t>
-            </a:r>
-          </a:p>
-        </p:txBody>
-      </p:sp>
-      <p:sp>
-        <p:nvSpPr>
-          <p:cNvPr id="8" name="PP"/>
+              <a:t>ใบเสนอราคา NCT-2569-041 · ปัดเป็นแสนบาท</a:t>
+            </a:r>
+          </a:p>
+        </p:txBody>
+      </p:sp>
+      <p:sp>
+        <p:nvSpPr>
+          <p:cNvPr id="21" name="TL"/>
           <p:cNvSpPr>
             <a:spLocks noGrp="1"/>
           </p:cNvSpPr>
@@ -29548,14 +31819,14 @@
             <a:pPr/>
             <a:r>
               <a:rPr lang="th-TH" dirty="0"/>
-              <a:t>Preparation Phase</a:t>
-            </a:r>
-          </a:p>
-        </p:txBody>
-      </p:sp>
-      <p:sp>
-        <p:nvSpPr>
-          <p:cNvPr id="9" name="PI"/>
+              <a:t>สรุป</a:t>
+            </a:r>
+          </a:p>
+        </p:txBody>
+      </p:sp>
+      <p:sp>
+        <p:nvSpPr>
+          <p:cNvPr id="22" name="TC"/>
           <p:cNvSpPr>
             <a:spLocks noGrp="1"/>
           </p:cNvSpPr>
@@ -29571,51 +31842,7 @@
             <a:pPr/>
             <a:r>
               <a:rPr lang="th-TH" dirty="0"/>
-              <a:t>สรุปสเปกเครื่องและบริการคลาวด์ที่ต้องเตรียมให้พร้อมก่อนเริ่มงานพัฒนา</a:t>
-            </a:r>
-          </a:p>
-        </p:txBody>
-      </p:sp>
-      <p:sp>
-        <p:nvSpPr>
-          <p:cNvPr id="10" name="PB"/>
-          <p:cNvSpPr>
-            <a:spLocks noGrp="1"/>
-          </p:cNvSpPr>
-          <p:nvPr>
-            <p:ph type="body" idx="8"/>
-          </p:nvPr>
-        </p:nvSpPr>
-        <p:spPr/>
-        <p:txBody>
-          <a:bodyPr/>
-          <a:lstStyle/>
-          <a:p>
-            <a:pPr/>
-            <a:r>
-              <a:rPr lang="th-TH" dirty="0"/>
-              <a:t>PRD · 4 คอร์ / 16GB / SSD 300GB</a:t>
-            </a:r>
-          </a:p>
-          <a:p>
-            <a:pPr/>
-            <a:r>
-              <a:rPr lang="th-TH" dirty="0"/>
-              <a:t>QA · 4 คอร์ / 16GB / SSD 150GB</a:t>
-            </a:r>
-          </a:p>
-          <a:p>
-            <a:pPr/>
-            <a:r>
-              <a:rPr lang="th-TH" dirty="0"/>
-              <a:t>Windows Server 2022 ทั้งสองเครื่อง</a:t>
-            </a:r>
-          </a:p>
-          <a:p>
-            <a:pPr/>
-            <a:r>
-              <a:rPr lang="th-TH" dirty="0"/>
-              <a:t>Lambda, EC2 และ Cognito เปิดทั้งสองสภาพแวดล้อม</a:t>
+              <a:t>ไลเซนส์กับคลาวด์รวมกันไม่ถึง 40% งบส่วนใหญ่จ่ายให้งานที่ทำครั้งเดียว</a:t>
             </a:r>
           </a:p>
         </p:txBody>
@@ -29629,6 +31856,259 @@
 </file>
 
 <file path=ppt/slides/slide22.xml><?xml version="1.0" encoding="utf-8"?>
+<p:sld xmlns:a="http://schemas.openxmlformats.org/drawingml/2006/main" xmlns:r="http://schemas.openxmlformats.org/officeDocument/2006/relationships" xmlns:p="http://schemas.openxmlformats.org/presentationml/2006/main">
+  <p:cSld name="">
+    <p:spTree>
+      <p:nvGrpSpPr>
+        <p:cNvPr id="1" name=""/>
+        <p:cNvGrpSpPr/>
+        <p:nvPr/>
+      </p:nvGrpSpPr>
+      <p:grpSpPr>
+        <a:xfrm>
+          <a:off x="0" y="0"/>
+          <a:ext cx="0" cy="0"/>
+          <a:chOff x="0" y="0"/>
+          <a:chExt cx="0" cy="0"/>
+        </a:xfrm>
+      </p:grpSpPr>
+      <p:sp>
+        <p:nvSpPr>
+          <p:cNvPr id="2" name="Title"/>
+          <p:cNvSpPr>
+            <a:spLocks noGrp="1"/>
+          </p:cNvSpPr>
+          <p:nvPr>
+            <p:ph type="title"/>
+          </p:nvPr>
+        </p:nvSpPr>
+        <p:spPr/>
+        <p:txBody>
+          <a:bodyPr/>
+          <a:lstStyle/>
+          <a:p>
+            <a:pPr/>
+            <a:r>
+              <a:rPr lang="th-TH" dirty="0"/>
+              <a:t>5. Implementation Stage</a:t>
+            </a:r>
+          </a:p>
+        </p:txBody>
+      </p:sp>
+      <p:sp>
+        <p:nvSpPr>
+          <p:cNvPr id="3" name="KAL"/>
+          <p:cNvSpPr>
+            <a:spLocks noGrp="1"/>
+          </p:cNvSpPr>
+          <p:nvPr>
+            <p:ph type="body" idx="1"/>
+          </p:nvPr>
+        </p:nvSpPr>
+        <p:spPr/>
+        <p:txBody>
+          <a:bodyPr/>
+          <a:lstStyle/>
+          <a:p>
+            <a:pPr/>
+            <a:r>
+              <a:rPr lang="th-TH" dirty="0"/>
+              <a:t>Key Activity :</a:t>
+            </a:r>
+          </a:p>
+        </p:txBody>
+      </p:sp>
+      <p:sp>
+        <p:nvSpPr>
+          <p:cNvPr id="4" name="KAV"/>
+          <p:cNvSpPr>
+            <a:spLocks noGrp="1"/>
+          </p:cNvSpPr>
+          <p:nvPr>
+            <p:ph type="body" idx="2"/>
+          </p:nvPr>
+        </p:nvSpPr>
+        <p:spPr/>
+        <p:txBody>
+          <a:bodyPr/>
+          <a:lstStyle/>
+          <a:p>
+            <a:pPr/>
+            <a:r>
+              <a:rPr lang="th-TH" dirty="0"/>
+              <a:t>ตั้งค่าสภาพแวดล้อม ติดตั้งฮาร์ดแวร์และซอฟต์แวร์</a:t>
+            </a:r>
+          </a:p>
+        </p:txBody>
+      </p:sp>
+      <p:sp>
+        <p:nvSpPr>
+          <p:cNvPr id="5" name="PL"/>
+          <p:cNvSpPr>
+            <a:spLocks noGrp="1"/>
+          </p:cNvSpPr>
+          <p:nvPr>
+            <p:ph type="body" idx="3"/>
+          </p:nvPr>
+        </p:nvSpPr>
+        <p:spPr/>
+        <p:txBody>
+          <a:bodyPr/>
+          <a:lstStyle/>
+          <a:p>
+            <a:pPr/>
+            <a:r>
+              <a:rPr lang="th-TH" dirty="0"/>
+              <a:t>Participant :</a:t>
+            </a:r>
+          </a:p>
+        </p:txBody>
+      </p:sp>
+      <p:sp>
+        <p:nvSpPr>
+          <p:cNvPr id="6" name="PV"/>
+          <p:cNvSpPr>
+            <a:spLocks noGrp="1"/>
+          </p:cNvSpPr>
+          <p:nvPr>
+            <p:ph type="body" idx="4"/>
+          </p:nvPr>
+        </p:nvSpPr>
+        <p:spPr/>
+        <p:txBody>
+          <a:bodyPr/>
+          <a:lstStyle/>
+          <a:p>
+            <a:pPr/>
+            <a:r>
+              <a:rPr lang="th-TH" dirty="0"/>
+              <a:t>NCT Infra Engineer, ทีมไอทีลูกค้า, Business Analyst</a:t>
+            </a:r>
+          </a:p>
+        </p:txBody>
+      </p:sp>
+      <p:sp>
+        <p:nvSpPr>
+          <p:cNvPr id="7" name="PN"/>
+          <p:cNvSpPr>
+            <a:spLocks noGrp="1"/>
+          </p:cNvSpPr>
+          <p:nvPr>
+            <p:ph type="body" idx="5"/>
+          </p:nvPr>
+        </p:nvSpPr>
+        <p:spPr/>
+        <p:txBody>
+          <a:bodyPr/>
+          <a:lstStyle/>
+          <a:p>
+            <a:pPr/>
+            <a:r>
+              <a:rPr lang="th-TH" dirty="0"/>
+              <a:t>01</a:t>
+            </a:r>
+          </a:p>
+        </p:txBody>
+      </p:sp>
+      <p:sp>
+        <p:nvSpPr>
+          <p:cNvPr id="8" name="PP"/>
+          <p:cNvSpPr>
+            <a:spLocks noGrp="1"/>
+          </p:cNvSpPr>
+          <p:nvPr>
+            <p:ph type="body" idx="6"/>
+          </p:nvPr>
+        </p:nvSpPr>
+        <p:spPr/>
+        <p:txBody>
+          <a:bodyPr/>
+          <a:lstStyle/>
+          <a:p>
+            <a:pPr/>
+            <a:r>
+              <a:rPr lang="th-TH" dirty="0"/>
+              <a:t>Preparation Phase</a:t>
+            </a:r>
+          </a:p>
+        </p:txBody>
+      </p:sp>
+      <p:sp>
+        <p:nvSpPr>
+          <p:cNvPr id="9" name="PI"/>
+          <p:cNvSpPr>
+            <a:spLocks noGrp="1"/>
+          </p:cNvSpPr>
+          <p:nvPr>
+            <p:ph type="body" idx="7"/>
+          </p:nvPr>
+        </p:nvSpPr>
+        <p:spPr/>
+        <p:txBody>
+          <a:bodyPr/>
+          <a:lstStyle/>
+          <a:p>
+            <a:pPr/>
+            <a:r>
+              <a:rPr lang="th-TH" dirty="0"/>
+              <a:t>สรุปสเปกเครื่องและบริการคลาวด์ที่ต้องเตรียมให้พร้อมก่อนเริ่มงานพัฒนา</a:t>
+            </a:r>
+          </a:p>
+        </p:txBody>
+      </p:sp>
+      <p:sp>
+        <p:nvSpPr>
+          <p:cNvPr id="10" name="PB"/>
+          <p:cNvSpPr>
+            <a:spLocks noGrp="1"/>
+          </p:cNvSpPr>
+          <p:nvPr>
+            <p:ph type="body" idx="8"/>
+          </p:nvPr>
+        </p:nvSpPr>
+        <p:spPr/>
+        <p:txBody>
+          <a:bodyPr/>
+          <a:lstStyle/>
+          <a:p>
+            <a:pPr/>
+            <a:r>
+              <a:rPr lang="th-TH" dirty="0"/>
+              <a:t>PRD · 4 คอร์ / 16GB / SSD 300GB</a:t>
+            </a:r>
+          </a:p>
+          <a:p>
+            <a:pPr/>
+            <a:r>
+              <a:rPr lang="th-TH" dirty="0"/>
+              <a:t>QA · 4 คอร์ / 16GB / SSD 150GB</a:t>
+            </a:r>
+          </a:p>
+          <a:p>
+            <a:pPr/>
+            <a:r>
+              <a:rPr lang="th-TH" dirty="0"/>
+              <a:t>Windows Server 2022 ทั้งสองเครื่อง</a:t>
+            </a:r>
+          </a:p>
+          <a:p>
+            <a:pPr/>
+            <a:r>
+              <a:rPr lang="th-TH" dirty="0"/>
+              <a:t>Lambda, EC2 และ Cognito เปิดทั้งสองสภาพแวดล้อม</a:t>
+            </a:r>
+          </a:p>
+        </p:txBody>
+      </p:sp>
+    </p:spTree>
+  </p:cSld>
+  <p:clrMapOvr>
+    <a:masterClrMapping/>
+  </p:clrMapOvr>
+</p:sld>
+</file>
+
+<file path=ppt/slides/slide23.xml><?xml version="1.0" encoding="utf-8"?>
 <p:sld xmlns:a="http://schemas.openxmlformats.org/drawingml/2006/main" xmlns:r="http://schemas.openxmlformats.org/officeDocument/2006/relationships" xmlns:p="http://schemas.openxmlformats.org/presentationml/2006/main">
   <p:cSld name="">
     <p:spTree>
@@ -30114,7 +32594,7 @@
 </p:sld>
 </file>
 
-<file path=ppt/slides/slide23.xml><?xml version="1.0" encoding="utf-8"?>
+<file path=ppt/slides/slide24.xml><?xml version="1.0" encoding="utf-8"?>
 <p:sld xmlns:a="http://schemas.openxmlformats.org/drawingml/2006/main" xmlns:r="http://schemas.openxmlformats.org/officeDocument/2006/relationships" xmlns:p="http://schemas.openxmlformats.org/presentationml/2006/main">
   <p:cSld name="">
     <p:spTree>

--- a/NCT-Slide-Template-Demo.pptx
+++ b/NCT-Slide-Template-Demo.pptx
@@ -29,6 +29,7 @@
     <p:sldId id="277" r:id="rId23"/>
     <p:sldId id="278" r:id="rId24"/>
     <p:sldId id="279" r:id="rId25"/>
+    <p:sldId id="280" r:id="rId26"/>
   </p:sldIdLst>
   <p:sldSz cx="12192000" cy="6858000"/>
   <p:notesSz cx="6858000" cy="9144000"/>
@@ -20689,6 +20690,2337 @@
 </p:sldLayout>
 </file>
 
+<file path=ppt/slideLayouts/slideLayout25.xml><?xml version="1.0" encoding="utf-8"?>
+<p:sldLayout xmlns:a="http://schemas.openxmlformats.org/drawingml/2006/main" xmlns:r="http://schemas.openxmlformats.org/officeDocument/2006/relationships" xmlns:p="http://schemas.openxmlformats.org/presentationml/2006/main" type="obj" showMasterSp="0" preserve="1">
+  <p:cSld name="25 Project Team">
+    <p:bg>
+      <p:bgPr>
+        <a:solidFill>
+          <a:srgbClr val="FFFFFF"/>
+        </a:solidFill>
+        <a:effectLst/>
+      </p:bgPr>
+    </p:bg>
+    <p:spTree>
+      <p:nvGrpSpPr>
+        <p:cNvPr id="1" name=""/>
+        <p:cNvGrpSpPr/>
+        <p:nvPr/>
+      </p:nvGrpSpPr>
+      <p:grpSpPr>
+        <a:xfrm>
+          <a:off x="0" y="0"/>
+          <a:ext cx="0" cy="0"/>
+          <a:chOff x="0" y="0"/>
+          <a:chExt cx="0" cy="0"/>
+        </a:xfrm>
+      </p:grpSpPr>
+      <p:sp>
+        <p:nvSpPr>
+          <p:cNvPr id="10" name="Title Placeholder"/>
+          <p:cNvSpPr>
+            <a:spLocks noGrp="1"/>
+          </p:cNvSpPr>
+          <p:nvPr>
+            <p:ph type="title"/>
+          </p:nvPr>
+        </p:nvSpPr>
+        <p:spPr>
+          <a:xfrm>
+            <a:off x="914400" y="548640"/>
+            <a:ext cx="10363200" cy="731520"/>
+          </a:xfrm>
+          <a:prstGeom prst="rect">
+            <a:avLst/>
+          </a:prstGeom>
+        </p:spPr>
+        <p:txBody>
+          <a:bodyPr wrap="square" anchor="b" lIns="0" tIns="0" rIns="0" bIns="0" rtlCol="0"/>
+          <a:lstStyle>
+            <a:lvl1pPr algn="l" marL="0" indent="0">
+              <a:lnSpc>
+                <a:spcPct val="108000"/>
+              </a:lnSpc>
+              <a:buNone/>
+              <a:defRPr lang="th-TH" sz="3200" b="1" dirty="0">
+                <a:solidFill>
+                  <a:srgbClr val="23436D"/>
+                </a:solidFill>
+                <a:latin typeface="+mj-lt"/>
+                <a:ea typeface="+mj-ea"/>
+                <a:cs typeface="+mj-cs"/>
+              </a:defRPr>
+            </a:lvl1pPr>
+          </a:lstStyle>
+          <a:p>
+            <a:pPr algn="l" marL="0" indent="0">
+              <a:lnSpc>
+                <a:spcPct val="108000"/>
+              </a:lnSpc>
+              <a:buNone/>
+            </a:pPr>
+            <a:r>
+              <a:rPr lang="th-TH" sz="3200" b="1" dirty="0">
+                <a:solidFill>
+                  <a:srgbClr val="23436D"/>
+                </a:solidFill>
+                <a:latin typeface="+mj-lt"/>
+                <a:ea typeface="+mj-ea"/>
+                <a:cs typeface="+mj-cs"/>
+              </a:rPr>
+              <a:t>ชื่อสไลด์</a:t>
+            </a:r>
+          </a:p>
+        </p:txBody>
+      </p:sp>
+      <p:sp>
+        <p:nvSpPr>
+          <p:cNvPr id="11" name="Accent Rule"/>
+          <p:cNvSpPr/>
+          <p:nvPr/>
+        </p:nvSpPr>
+        <p:spPr>
+          <a:xfrm>
+            <a:off x="914400" y="1371600"/>
+            <a:ext cx="548640" cy="45720"/>
+          </a:xfrm>
+          <a:prstGeom prst="rect">
+            <a:avLst/>
+          </a:prstGeom>
+          <a:solidFill>
+            <a:srgbClr val="216B7F"/>
+          </a:solidFill>
+          <a:ln>
+            <a:noFill/>
+          </a:ln>
+        </p:spPr>
+        <p:txBody>
+          <a:bodyPr/>
+          <a:lstStyle/>
+          <a:p>
+            <a:endParaRPr lang="th-TH"/>
+          </a:p>
+        </p:txBody>
+      </p:sp>
+      <p:sp>
+        <p:nvSpPr>
+          <p:cNvPr id="12" name="Lead Card"/>
+          <p:cNvSpPr/>
+          <p:nvPr/>
+        </p:nvSpPr>
+        <p:spPr>
+          <a:xfrm>
+            <a:off x="3550920" y="1691640"/>
+            <a:ext cx="5090160" cy="1051560"/>
+          </a:xfrm>
+          <a:prstGeom prst="rect">
+            <a:avLst/>
+          </a:prstGeom>
+          <a:solidFill>
+            <a:srgbClr val="E8F6F5"/>
+          </a:solidFill>
+          <a:ln>
+            <a:noFill/>
+          </a:ln>
+        </p:spPr>
+        <p:txBody>
+          <a:bodyPr/>
+          <a:lstStyle/>
+          <a:p>
+            <a:endParaRPr lang="th-TH"/>
+          </a:p>
+        </p:txBody>
+      </p:sp>
+      <p:sp>
+        <p:nvSpPr>
+          <p:cNvPr id="13" name="Lead Role"/>
+          <p:cNvSpPr>
+            <a:spLocks noGrp="1"/>
+          </p:cNvSpPr>
+          <p:nvPr>
+            <p:ph type="body" idx="20"/>
+          </p:nvPr>
+        </p:nvSpPr>
+        <p:spPr>
+          <a:xfrm>
+            <a:off x="3733800" y="1828800"/>
+            <a:ext cx="2194560" cy="274320"/>
+          </a:xfrm>
+          <a:prstGeom prst="rect">
+            <a:avLst/>
+          </a:prstGeom>
+        </p:spPr>
+        <p:txBody>
+          <a:bodyPr wrap="square" anchor="t" lIns="0" tIns="0" rIns="0" bIns="0" rtlCol="0"/>
+          <a:lstStyle>
+            <a:lvl1pPr algn="l" marL="0" indent="0">
+              <a:lnSpc>
+                <a:spcPct val="100000"/>
+              </a:lnSpc>
+              <a:buNone/>
+              <a:defRPr lang="th-TH" sz="1200" b="1" spc="120" dirty="0">
+                <a:solidFill>
+                  <a:srgbClr val="5F5F5F"/>
+                </a:solidFill>
+                <a:latin typeface="+mn-lt"/>
+                <a:ea typeface="+mn-ea"/>
+                <a:cs typeface="+mn-cs"/>
+              </a:defRPr>
+            </a:lvl1pPr>
+          </a:lstStyle>
+          <a:p>
+            <a:pPr algn="l" marL="0" indent="0">
+              <a:lnSpc>
+                <a:spcPct val="100000"/>
+              </a:lnSpc>
+              <a:buNone/>
+            </a:pPr>
+            <a:r>
+              <a:rPr lang="th-TH" sz="1200" b="1" spc="120" dirty="0">
+                <a:solidFill>
+                  <a:srgbClr val="5F5F5F"/>
+                </a:solidFill>
+                <a:latin typeface="+mn-lt"/>
+                <a:ea typeface="+mn-ea"/>
+                <a:cs typeface="+mn-cs"/>
+              </a:rPr>
+              <a:t>บทบาท</a:t>
+            </a:r>
+          </a:p>
+        </p:txBody>
+      </p:sp>
+      <p:sp>
+        <p:nvSpPr>
+          <p:cNvPr id="14" name="Lead Name"/>
+          <p:cNvSpPr>
+            <a:spLocks noGrp="1"/>
+          </p:cNvSpPr>
+          <p:nvPr>
+            <p:ph type="body" idx="21"/>
+          </p:nvPr>
+        </p:nvSpPr>
+        <p:spPr>
+          <a:xfrm>
+            <a:off x="3733800" y="2112264"/>
+            <a:ext cx="2194560" cy="338328"/>
+          </a:xfrm>
+          <a:prstGeom prst="rect">
+            <a:avLst/>
+          </a:prstGeom>
+        </p:spPr>
+        <p:txBody>
+          <a:bodyPr wrap="square" anchor="t" lIns="0" tIns="0" rIns="0" bIns="0" rtlCol="0"/>
+          <a:lstStyle>
+            <a:lvl1pPr algn="l" marL="0" indent="0">
+              <a:lnSpc>
+                <a:spcPct val="100000"/>
+              </a:lnSpc>
+              <a:buNone/>
+              <a:defRPr lang="th-TH" sz="2000" b="1" dirty="0">
+                <a:solidFill>
+                  <a:srgbClr val="23436D"/>
+                </a:solidFill>
+                <a:latin typeface="+mj-lt"/>
+                <a:ea typeface="+mj-ea"/>
+                <a:cs typeface="+mj-cs"/>
+              </a:defRPr>
+            </a:lvl1pPr>
+          </a:lstStyle>
+          <a:p>
+            <a:pPr algn="l" marL="0" indent="0">
+              <a:lnSpc>
+                <a:spcPct val="100000"/>
+              </a:lnSpc>
+              <a:buNone/>
+            </a:pPr>
+            <a:r>
+              <a:rPr lang="th-TH" sz="2000" b="1" dirty="0">
+                <a:solidFill>
+                  <a:srgbClr val="23436D"/>
+                </a:solidFill>
+                <a:latin typeface="+mj-lt"/>
+                <a:ea typeface="+mj-ea"/>
+                <a:cs typeface="+mj-cs"/>
+              </a:rPr>
+              <a:t>ชื่อหัวหน้าโครงการ</a:t>
+            </a:r>
+          </a:p>
+        </p:txBody>
+      </p:sp>
+      <p:sp>
+        <p:nvSpPr>
+          <p:cNvPr id="15" name="Lead Credential"/>
+          <p:cNvSpPr>
+            <a:spLocks noGrp="1"/>
+          </p:cNvSpPr>
+          <p:nvPr>
+            <p:ph type="body" idx="22"/>
+          </p:nvPr>
+        </p:nvSpPr>
+        <p:spPr>
+          <a:xfrm>
+            <a:off x="3733800" y="2478024"/>
+            <a:ext cx="2194560" cy="228600"/>
+          </a:xfrm>
+          <a:prstGeom prst="rect">
+            <a:avLst/>
+          </a:prstGeom>
+        </p:spPr>
+        <p:txBody>
+          <a:bodyPr wrap="square" anchor="t" lIns="0" tIns="0" rIns="0" bIns="0" rtlCol="0"/>
+          <a:lstStyle>
+            <a:lvl1pPr algn="l" marL="0" indent="0">
+              <a:lnSpc>
+                <a:spcPct val="100000"/>
+              </a:lnSpc>
+              <a:buNone/>
+              <a:defRPr lang="th-TH" sz="1200" dirty="0">
+                <a:solidFill>
+                  <a:srgbClr val="5F5F5F"/>
+                </a:solidFill>
+                <a:latin typeface="+mn-lt"/>
+                <a:ea typeface="+mn-ea"/>
+                <a:cs typeface="+mn-cs"/>
+              </a:defRPr>
+            </a:lvl1pPr>
+          </a:lstStyle>
+          <a:p>
+            <a:pPr algn="l" marL="0" indent="0">
+              <a:lnSpc>
+                <a:spcPct val="100000"/>
+              </a:lnSpc>
+              <a:buNone/>
+            </a:pPr>
+            <a:r>
+              <a:rPr lang="th-TH" sz="1200" dirty="0">
+                <a:solidFill>
+                  <a:srgbClr val="5F5F5F"/>
+                </a:solidFill>
+                <a:latin typeface="+mn-lt"/>
+                <a:ea typeface="+mn-ea"/>
+                <a:cs typeface="+mn-cs"/>
+              </a:rPr>
+              <a:t>ประสบการณ์ · วุฒิบัตร</a:t>
+            </a:r>
+          </a:p>
+        </p:txBody>
+      </p:sp>
+      <p:sp>
+        <p:nvSpPr>
+          <p:cNvPr id="16" name="Lead Duties"/>
+          <p:cNvSpPr>
+            <a:spLocks noGrp="1"/>
+          </p:cNvSpPr>
+          <p:nvPr>
+            <p:ph type="body" idx="23"/>
+          </p:nvPr>
+        </p:nvSpPr>
+        <p:spPr>
+          <a:xfrm>
+            <a:off x="6111240" y="1828800"/>
+            <a:ext cx="2346960" cy="777240"/>
+          </a:xfrm>
+          <a:prstGeom prst="rect">
+            <a:avLst/>
+          </a:prstGeom>
+        </p:spPr>
+        <p:txBody>
+          <a:bodyPr wrap="square" anchor="t" lIns="0" tIns="0" rIns="0" bIns="0" rtlCol="0"/>
+          <a:lstStyle>
+            <a:lvl1pPr algn="l" marL="182880" indent="-182880">
+              <a:lnSpc>
+                <a:spcPct val="132000"/>
+              </a:lnSpc>
+              <a:spcBef>
+                <a:spcPts val="500"/>
+              </a:spcBef>
+              <a:buClr>
+                <a:srgbClr val="216B7F"/>
+              </a:buClr>
+              <a:buSzPct val="90000"/>
+              <a:buFont typeface="Arial"/>
+              <a:buChar char="•"/>
+              <a:defRPr lang="th-TH" sz="1200" dirty="0">
+                <a:solidFill>
+                  <a:srgbClr val="333333"/>
+                </a:solidFill>
+                <a:latin typeface="+mn-lt"/>
+                <a:ea typeface="+mn-ea"/>
+                <a:cs typeface="+mn-cs"/>
+              </a:defRPr>
+            </a:lvl1pPr>
+            <a:lvl2pPr algn="l" marL="548640" indent="-182880">
+              <a:lnSpc>
+                <a:spcPct val="132000"/>
+              </a:lnSpc>
+              <a:spcBef>
+                <a:spcPts val="350"/>
+              </a:spcBef>
+              <a:buClr>
+                <a:srgbClr val="5F5F5F"/>
+              </a:buClr>
+              <a:buSzPct val="90000"/>
+              <a:buFont typeface="Arial"/>
+              <a:buChar char="–"/>
+              <a:defRPr lang="th-TH" sz="1200" dirty="0">
+                <a:solidFill>
+                  <a:srgbClr val="333333"/>
+                </a:solidFill>
+                <a:latin typeface="+mn-lt"/>
+                <a:ea typeface="+mn-ea"/>
+                <a:cs typeface="+mn-cs"/>
+              </a:defRPr>
+            </a:lvl2pPr>
+          </a:lstStyle>
+          <a:p>
+            <a:pPr algn="l" marL="182880" indent="-182880">
+              <a:lnSpc>
+                <a:spcPct val="132000"/>
+              </a:lnSpc>
+              <a:spcBef>
+                <a:spcPts val="500"/>
+              </a:spcBef>
+              <a:buClr>
+                <a:srgbClr val="216B7F"/>
+              </a:buClr>
+              <a:buSzPct val="90000"/>
+              <a:buFont typeface="Arial"/>
+              <a:buChar char="•"/>
+            </a:pPr>
+            <a:r>
+              <a:rPr lang="th-TH" sz="1200" dirty="0">
+                <a:solidFill>
+                  <a:srgbClr val="333333"/>
+                </a:solidFill>
+                <a:latin typeface="+mn-lt"/>
+                <a:ea typeface="+mn-ea"/>
+                <a:cs typeface="+mn-cs"/>
+              </a:rPr>
+              <a:t>หน้าที่หลัก</a:t>
+            </a:r>
+          </a:p>
+          <a:p>
+            <a:pPr algn="l" marL="548640" indent="-182880">
+              <a:lnSpc>
+                <a:spcPct val="132000"/>
+              </a:lnSpc>
+              <a:spcBef>
+                <a:spcPts val="350"/>
+              </a:spcBef>
+              <a:buClr>
+                <a:srgbClr val="5F5F5F"/>
+              </a:buClr>
+              <a:buSzPct val="90000"/>
+              <a:buFont typeface="Arial"/>
+              <a:buChar char="–"/>
+            </a:pPr>
+            <a:r>
+              <a:rPr lang="th-TH" sz="1200" dirty="0">
+                <a:solidFill>
+                  <a:srgbClr val="333333"/>
+                </a:solidFill>
+                <a:latin typeface="+mn-lt"/>
+                <a:ea typeface="+mn-ea"/>
+                <a:cs typeface="+mn-cs"/>
+              </a:rPr>
+              <a:t>หน้าที่หลัก</a:t>
+            </a:r>
+          </a:p>
+        </p:txBody>
+      </p:sp>
+      <p:sp>
+        <p:nvSpPr>
+          <p:cNvPr id="17" name="Stem"/>
+          <p:cNvSpPr/>
+          <p:nvPr/>
+        </p:nvSpPr>
+        <p:spPr>
+          <a:xfrm>
+            <a:off x="6089650" y="2743200"/>
+            <a:ext cx="12700" cy="160020"/>
+          </a:xfrm>
+          <a:prstGeom prst="rect">
+            <a:avLst/>
+          </a:prstGeom>
+          <a:solidFill>
+            <a:srgbClr val="216B7F"/>
+          </a:solidFill>
+          <a:ln>
+            <a:noFill/>
+          </a:ln>
+        </p:spPr>
+        <p:txBody>
+          <a:bodyPr/>
+          <a:lstStyle/>
+          <a:p>
+            <a:endParaRPr lang="th-TH"/>
+          </a:p>
+        </p:txBody>
+      </p:sp>
+      <p:sp>
+        <p:nvSpPr>
+          <p:cNvPr id="18" name="Bar"/>
+          <p:cNvSpPr/>
+          <p:nvPr/>
+        </p:nvSpPr>
+        <p:spPr>
+          <a:xfrm>
+            <a:off x="2134870" y="2903220"/>
+            <a:ext cx="7922260" cy="12700"/>
+          </a:xfrm>
+          <a:prstGeom prst="rect">
+            <a:avLst/>
+          </a:prstGeom>
+          <a:solidFill>
+            <a:srgbClr val="216B7F"/>
+          </a:solidFill>
+          <a:ln>
+            <a:noFill/>
+          </a:ln>
+        </p:spPr>
+        <p:txBody>
+          <a:bodyPr/>
+          <a:lstStyle/>
+          <a:p>
+            <a:endParaRPr lang="th-TH"/>
+          </a:p>
+        </p:txBody>
+      </p:sp>
+      <p:sp>
+        <p:nvSpPr>
+          <p:cNvPr id="19" name="Drop 1"/>
+          <p:cNvSpPr/>
+          <p:nvPr/>
+        </p:nvSpPr>
+        <p:spPr>
+          <a:xfrm>
+            <a:off x="2134870" y="2903220"/>
+            <a:ext cx="12700" cy="160020"/>
+          </a:xfrm>
+          <a:prstGeom prst="rect">
+            <a:avLst/>
+          </a:prstGeom>
+          <a:solidFill>
+            <a:srgbClr val="216B7F"/>
+          </a:solidFill>
+          <a:ln>
+            <a:noFill/>
+          </a:ln>
+        </p:spPr>
+        <p:txBody>
+          <a:bodyPr/>
+          <a:lstStyle/>
+          <a:p>
+            <a:endParaRPr lang="th-TH"/>
+          </a:p>
+        </p:txBody>
+      </p:sp>
+      <p:sp>
+        <p:nvSpPr>
+          <p:cNvPr id="20" name="Card 1"/>
+          <p:cNvSpPr/>
+          <p:nvPr/>
+        </p:nvSpPr>
+        <p:spPr>
+          <a:xfrm>
+            <a:off x="914400" y="3063240"/>
+            <a:ext cx="2453640" cy="2103120"/>
+          </a:xfrm>
+          <a:prstGeom prst="rect">
+            <a:avLst/>
+          </a:prstGeom>
+          <a:solidFill>
+            <a:srgbClr val="E8F6F5"/>
+          </a:solidFill>
+          <a:ln>
+            <a:noFill/>
+          </a:ln>
+        </p:spPr>
+        <p:txBody>
+          <a:bodyPr/>
+          <a:lstStyle/>
+          <a:p>
+            <a:endParaRPr lang="th-TH"/>
+          </a:p>
+        </p:txBody>
+      </p:sp>
+      <p:sp>
+        <p:nvSpPr>
+          <p:cNvPr id="21" name="Card 1 Role"/>
+          <p:cNvSpPr>
+            <a:spLocks noGrp="1"/>
+          </p:cNvSpPr>
+          <p:nvPr>
+            <p:ph type="body" idx="24"/>
+          </p:nvPr>
+        </p:nvSpPr>
+        <p:spPr>
+          <a:xfrm>
+            <a:off x="1097280" y="3246120"/>
+            <a:ext cx="2087880" cy="274320"/>
+          </a:xfrm>
+          <a:prstGeom prst="rect">
+            <a:avLst/>
+          </a:prstGeom>
+        </p:spPr>
+        <p:txBody>
+          <a:bodyPr wrap="square" anchor="t" lIns="0" tIns="0" rIns="0" bIns="0" rtlCol="0"/>
+          <a:lstStyle>
+            <a:lvl1pPr algn="l" marL="0" indent="0">
+              <a:lnSpc>
+                <a:spcPct val="100000"/>
+              </a:lnSpc>
+              <a:buNone/>
+              <a:defRPr lang="th-TH" sz="1200" b="1" spc="120" dirty="0">
+                <a:solidFill>
+                  <a:srgbClr val="5F5F5F"/>
+                </a:solidFill>
+                <a:latin typeface="+mn-lt"/>
+                <a:ea typeface="+mn-ea"/>
+                <a:cs typeface="+mn-cs"/>
+              </a:defRPr>
+            </a:lvl1pPr>
+          </a:lstStyle>
+          <a:p>
+            <a:pPr algn="l" marL="0" indent="0">
+              <a:lnSpc>
+                <a:spcPct val="100000"/>
+              </a:lnSpc>
+              <a:buNone/>
+            </a:pPr>
+            <a:r>
+              <a:rPr lang="th-TH" sz="1200" b="1" spc="120" dirty="0">
+                <a:solidFill>
+                  <a:srgbClr val="5F5F5F"/>
+                </a:solidFill>
+                <a:latin typeface="+mn-lt"/>
+                <a:ea typeface="+mn-ea"/>
+                <a:cs typeface="+mn-cs"/>
+              </a:rPr>
+              <a:t>บทบาท</a:t>
+            </a:r>
+          </a:p>
+        </p:txBody>
+      </p:sp>
+      <p:sp>
+        <p:nvSpPr>
+          <p:cNvPr id="22" name="Card 1 Name"/>
+          <p:cNvSpPr>
+            <a:spLocks noGrp="1"/>
+          </p:cNvSpPr>
+          <p:nvPr>
+            <p:ph type="body" idx="25"/>
+          </p:nvPr>
+        </p:nvSpPr>
+        <p:spPr>
+          <a:xfrm>
+            <a:off x="1097280" y="3529584"/>
+            <a:ext cx="2087880" cy="338328"/>
+          </a:xfrm>
+          <a:prstGeom prst="rect">
+            <a:avLst/>
+          </a:prstGeom>
+        </p:spPr>
+        <p:txBody>
+          <a:bodyPr wrap="square" anchor="t" lIns="0" tIns="0" rIns="0" bIns="0" rtlCol="0"/>
+          <a:lstStyle>
+            <a:lvl1pPr algn="l" marL="0" indent="0">
+              <a:lnSpc>
+                <a:spcPct val="100000"/>
+              </a:lnSpc>
+              <a:buNone/>
+              <a:defRPr lang="th-TH" sz="2000" b="1" dirty="0">
+                <a:solidFill>
+                  <a:srgbClr val="23436D"/>
+                </a:solidFill>
+                <a:latin typeface="+mj-lt"/>
+                <a:ea typeface="+mj-ea"/>
+                <a:cs typeface="+mj-cs"/>
+              </a:defRPr>
+            </a:lvl1pPr>
+          </a:lstStyle>
+          <a:p>
+            <a:pPr algn="l" marL="0" indent="0">
+              <a:lnSpc>
+                <a:spcPct val="100000"/>
+              </a:lnSpc>
+              <a:buNone/>
+            </a:pPr>
+            <a:r>
+              <a:rPr lang="th-TH" sz="2000" b="1" dirty="0">
+                <a:solidFill>
+                  <a:srgbClr val="23436D"/>
+                </a:solidFill>
+                <a:latin typeface="+mj-lt"/>
+                <a:ea typeface="+mj-ea"/>
+                <a:cs typeface="+mj-cs"/>
+              </a:rPr>
+              <a:t>ชื่อผู้รับผิดชอบ</a:t>
+            </a:r>
+          </a:p>
+        </p:txBody>
+      </p:sp>
+      <p:sp>
+        <p:nvSpPr>
+          <p:cNvPr id="23" name="Card 1 Credential"/>
+          <p:cNvSpPr>
+            <a:spLocks noGrp="1"/>
+          </p:cNvSpPr>
+          <p:nvPr>
+            <p:ph type="body" idx="26"/>
+          </p:nvPr>
+        </p:nvSpPr>
+        <p:spPr>
+          <a:xfrm>
+            <a:off x="1097280" y="3895344"/>
+            <a:ext cx="2087880" cy="228600"/>
+          </a:xfrm>
+          <a:prstGeom prst="rect">
+            <a:avLst/>
+          </a:prstGeom>
+        </p:spPr>
+        <p:txBody>
+          <a:bodyPr wrap="square" anchor="t" lIns="0" tIns="0" rIns="0" bIns="0" rtlCol="0"/>
+          <a:lstStyle>
+            <a:lvl1pPr algn="l" marL="0" indent="0">
+              <a:lnSpc>
+                <a:spcPct val="100000"/>
+              </a:lnSpc>
+              <a:buNone/>
+              <a:defRPr lang="th-TH" sz="1200" dirty="0">
+                <a:solidFill>
+                  <a:srgbClr val="5F5F5F"/>
+                </a:solidFill>
+                <a:latin typeface="+mn-lt"/>
+                <a:ea typeface="+mn-ea"/>
+                <a:cs typeface="+mn-cs"/>
+              </a:defRPr>
+            </a:lvl1pPr>
+          </a:lstStyle>
+          <a:p>
+            <a:pPr algn="l" marL="0" indent="0">
+              <a:lnSpc>
+                <a:spcPct val="100000"/>
+              </a:lnSpc>
+              <a:buNone/>
+            </a:pPr>
+            <a:r>
+              <a:rPr lang="th-TH" sz="1200" dirty="0">
+                <a:solidFill>
+                  <a:srgbClr val="5F5F5F"/>
+                </a:solidFill>
+                <a:latin typeface="+mn-lt"/>
+                <a:ea typeface="+mn-ea"/>
+                <a:cs typeface="+mn-cs"/>
+              </a:rPr>
+              <a:t>ประสบการณ์ · วุฒิบัตร</a:t>
+            </a:r>
+          </a:p>
+        </p:txBody>
+      </p:sp>
+      <p:sp>
+        <p:nvSpPr>
+          <p:cNvPr id="24" name="Card 1 Duties"/>
+          <p:cNvSpPr>
+            <a:spLocks noGrp="1"/>
+          </p:cNvSpPr>
+          <p:nvPr>
+            <p:ph type="body" idx="27"/>
+          </p:nvPr>
+        </p:nvSpPr>
+        <p:spPr>
+          <a:xfrm>
+            <a:off x="1097280" y="4251960"/>
+            <a:ext cx="2087880" cy="731520"/>
+          </a:xfrm>
+          <a:prstGeom prst="rect">
+            <a:avLst/>
+          </a:prstGeom>
+        </p:spPr>
+        <p:txBody>
+          <a:bodyPr wrap="square" anchor="t" lIns="0" tIns="0" rIns="0" bIns="0" rtlCol="0"/>
+          <a:lstStyle>
+            <a:lvl1pPr algn="l" marL="182880" indent="-182880">
+              <a:lnSpc>
+                <a:spcPct val="132000"/>
+              </a:lnSpc>
+              <a:spcBef>
+                <a:spcPts val="500"/>
+              </a:spcBef>
+              <a:buClr>
+                <a:srgbClr val="216B7F"/>
+              </a:buClr>
+              <a:buSzPct val="90000"/>
+              <a:buFont typeface="Arial"/>
+              <a:buChar char="•"/>
+              <a:defRPr lang="th-TH" sz="1200" dirty="0">
+                <a:solidFill>
+                  <a:srgbClr val="333333"/>
+                </a:solidFill>
+                <a:latin typeface="+mn-lt"/>
+                <a:ea typeface="+mn-ea"/>
+                <a:cs typeface="+mn-cs"/>
+              </a:defRPr>
+            </a:lvl1pPr>
+            <a:lvl2pPr algn="l" marL="548640" indent="-182880">
+              <a:lnSpc>
+                <a:spcPct val="132000"/>
+              </a:lnSpc>
+              <a:spcBef>
+                <a:spcPts val="350"/>
+              </a:spcBef>
+              <a:buClr>
+                <a:srgbClr val="5F5F5F"/>
+              </a:buClr>
+              <a:buSzPct val="90000"/>
+              <a:buFont typeface="Arial"/>
+              <a:buChar char="–"/>
+              <a:defRPr lang="th-TH" sz="1200" dirty="0">
+                <a:solidFill>
+                  <a:srgbClr val="333333"/>
+                </a:solidFill>
+                <a:latin typeface="+mn-lt"/>
+                <a:ea typeface="+mn-ea"/>
+                <a:cs typeface="+mn-cs"/>
+              </a:defRPr>
+            </a:lvl2pPr>
+          </a:lstStyle>
+          <a:p>
+            <a:pPr algn="l" marL="182880" indent="-182880">
+              <a:lnSpc>
+                <a:spcPct val="132000"/>
+              </a:lnSpc>
+              <a:spcBef>
+                <a:spcPts val="500"/>
+              </a:spcBef>
+              <a:buClr>
+                <a:srgbClr val="216B7F"/>
+              </a:buClr>
+              <a:buSzPct val="90000"/>
+              <a:buFont typeface="Arial"/>
+              <a:buChar char="•"/>
+            </a:pPr>
+            <a:r>
+              <a:rPr lang="th-TH" sz="1200" dirty="0">
+                <a:solidFill>
+                  <a:srgbClr val="333333"/>
+                </a:solidFill>
+                <a:latin typeface="+mn-lt"/>
+                <a:ea typeface="+mn-ea"/>
+                <a:cs typeface="+mn-cs"/>
+              </a:rPr>
+              <a:t>หน้าที่หลัก</a:t>
+            </a:r>
+          </a:p>
+          <a:p>
+            <a:pPr algn="l" marL="548640" indent="-182880">
+              <a:lnSpc>
+                <a:spcPct val="132000"/>
+              </a:lnSpc>
+              <a:spcBef>
+                <a:spcPts val="350"/>
+              </a:spcBef>
+              <a:buClr>
+                <a:srgbClr val="5F5F5F"/>
+              </a:buClr>
+              <a:buSzPct val="90000"/>
+              <a:buFont typeface="Arial"/>
+              <a:buChar char="–"/>
+            </a:pPr>
+            <a:r>
+              <a:rPr lang="th-TH" sz="1200" dirty="0">
+                <a:solidFill>
+                  <a:srgbClr val="333333"/>
+                </a:solidFill>
+                <a:latin typeface="+mn-lt"/>
+                <a:ea typeface="+mn-ea"/>
+                <a:cs typeface="+mn-cs"/>
+              </a:rPr>
+              <a:t>หน้าที่หลัก</a:t>
+            </a:r>
+          </a:p>
+        </p:txBody>
+      </p:sp>
+      <p:sp>
+        <p:nvSpPr>
+          <p:cNvPr id="25" name="Drop 2"/>
+          <p:cNvSpPr/>
+          <p:nvPr/>
+        </p:nvSpPr>
+        <p:spPr>
+          <a:xfrm>
+            <a:off x="4771390" y="2903220"/>
+            <a:ext cx="12700" cy="160020"/>
+          </a:xfrm>
+          <a:prstGeom prst="rect">
+            <a:avLst/>
+          </a:prstGeom>
+          <a:solidFill>
+            <a:srgbClr val="216B7F"/>
+          </a:solidFill>
+          <a:ln>
+            <a:noFill/>
+          </a:ln>
+        </p:spPr>
+        <p:txBody>
+          <a:bodyPr/>
+          <a:lstStyle/>
+          <a:p>
+            <a:endParaRPr lang="th-TH"/>
+          </a:p>
+        </p:txBody>
+      </p:sp>
+      <p:sp>
+        <p:nvSpPr>
+          <p:cNvPr id="26" name="Card 2"/>
+          <p:cNvSpPr/>
+          <p:nvPr/>
+        </p:nvSpPr>
+        <p:spPr>
+          <a:xfrm>
+            <a:off x="3550920" y="3063240"/>
+            <a:ext cx="2453640" cy="2103120"/>
+          </a:xfrm>
+          <a:prstGeom prst="rect">
+            <a:avLst/>
+          </a:prstGeom>
+          <a:solidFill>
+            <a:srgbClr val="E8F6F5"/>
+          </a:solidFill>
+          <a:ln>
+            <a:noFill/>
+          </a:ln>
+        </p:spPr>
+        <p:txBody>
+          <a:bodyPr/>
+          <a:lstStyle/>
+          <a:p>
+            <a:endParaRPr lang="th-TH"/>
+          </a:p>
+        </p:txBody>
+      </p:sp>
+      <p:sp>
+        <p:nvSpPr>
+          <p:cNvPr id="27" name="Card 2 Role"/>
+          <p:cNvSpPr>
+            <a:spLocks noGrp="1"/>
+          </p:cNvSpPr>
+          <p:nvPr>
+            <p:ph type="body" idx="28"/>
+          </p:nvPr>
+        </p:nvSpPr>
+        <p:spPr>
+          <a:xfrm>
+            <a:off x="3733800" y="3246120"/>
+            <a:ext cx="2087880" cy="274320"/>
+          </a:xfrm>
+          <a:prstGeom prst="rect">
+            <a:avLst/>
+          </a:prstGeom>
+        </p:spPr>
+        <p:txBody>
+          <a:bodyPr wrap="square" anchor="t" lIns="0" tIns="0" rIns="0" bIns="0" rtlCol="0"/>
+          <a:lstStyle>
+            <a:lvl1pPr algn="l" marL="0" indent="0">
+              <a:lnSpc>
+                <a:spcPct val="100000"/>
+              </a:lnSpc>
+              <a:buNone/>
+              <a:defRPr lang="th-TH" sz="1200" b="1" spc="120" dirty="0">
+                <a:solidFill>
+                  <a:srgbClr val="5F5F5F"/>
+                </a:solidFill>
+                <a:latin typeface="+mn-lt"/>
+                <a:ea typeface="+mn-ea"/>
+                <a:cs typeface="+mn-cs"/>
+              </a:defRPr>
+            </a:lvl1pPr>
+          </a:lstStyle>
+          <a:p>
+            <a:pPr algn="l" marL="0" indent="0">
+              <a:lnSpc>
+                <a:spcPct val="100000"/>
+              </a:lnSpc>
+              <a:buNone/>
+            </a:pPr>
+            <a:r>
+              <a:rPr lang="th-TH" sz="1200" b="1" spc="120" dirty="0">
+                <a:solidFill>
+                  <a:srgbClr val="5F5F5F"/>
+                </a:solidFill>
+                <a:latin typeface="+mn-lt"/>
+                <a:ea typeface="+mn-ea"/>
+                <a:cs typeface="+mn-cs"/>
+              </a:rPr>
+              <a:t>บทบาท</a:t>
+            </a:r>
+          </a:p>
+        </p:txBody>
+      </p:sp>
+      <p:sp>
+        <p:nvSpPr>
+          <p:cNvPr id="28" name="Card 2 Name"/>
+          <p:cNvSpPr>
+            <a:spLocks noGrp="1"/>
+          </p:cNvSpPr>
+          <p:nvPr>
+            <p:ph type="body" idx="29"/>
+          </p:nvPr>
+        </p:nvSpPr>
+        <p:spPr>
+          <a:xfrm>
+            <a:off x="3733800" y="3529584"/>
+            <a:ext cx="2087880" cy="338328"/>
+          </a:xfrm>
+          <a:prstGeom prst="rect">
+            <a:avLst/>
+          </a:prstGeom>
+        </p:spPr>
+        <p:txBody>
+          <a:bodyPr wrap="square" anchor="t" lIns="0" tIns="0" rIns="0" bIns="0" rtlCol="0"/>
+          <a:lstStyle>
+            <a:lvl1pPr algn="l" marL="0" indent="0">
+              <a:lnSpc>
+                <a:spcPct val="100000"/>
+              </a:lnSpc>
+              <a:buNone/>
+              <a:defRPr lang="th-TH" sz="2000" b="1" dirty="0">
+                <a:solidFill>
+                  <a:srgbClr val="23436D"/>
+                </a:solidFill>
+                <a:latin typeface="+mj-lt"/>
+                <a:ea typeface="+mj-ea"/>
+                <a:cs typeface="+mj-cs"/>
+              </a:defRPr>
+            </a:lvl1pPr>
+          </a:lstStyle>
+          <a:p>
+            <a:pPr algn="l" marL="0" indent="0">
+              <a:lnSpc>
+                <a:spcPct val="100000"/>
+              </a:lnSpc>
+              <a:buNone/>
+            </a:pPr>
+            <a:r>
+              <a:rPr lang="th-TH" sz="2000" b="1" dirty="0">
+                <a:solidFill>
+                  <a:srgbClr val="23436D"/>
+                </a:solidFill>
+                <a:latin typeface="+mj-lt"/>
+                <a:ea typeface="+mj-ea"/>
+                <a:cs typeface="+mj-cs"/>
+              </a:rPr>
+              <a:t>ชื่อผู้รับผิดชอบ</a:t>
+            </a:r>
+          </a:p>
+        </p:txBody>
+      </p:sp>
+      <p:sp>
+        <p:nvSpPr>
+          <p:cNvPr id="29" name="Card 2 Credential"/>
+          <p:cNvSpPr>
+            <a:spLocks noGrp="1"/>
+          </p:cNvSpPr>
+          <p:nvPr>
+            <p:ph type="body" idx="30"/>
+          </p:nvPr>
+        </p:nvSpPr>
+        <p:spPr>
+          <a:xfrm>
+            <a:off x="3733800" y="3895344"/>
+            <a:ext cx="2087880" cy="228600"/>
+          </a:xfrm>
+          <a:prstGeom prst="rect">
+            <a:avLst/>
+          </a:prstGeom>
+        </p:spPr>
+        <p:txBody>
+          <a:bodyPr wrap="square" anchor="t" lIns="0" tIns="0" rIns="0" bIns="0" rtlCol="0"/>
+          <a:lstStyle>
+            <a:lvl1pPr algn="l" marL="0" indent="0">
+              <a:lnSpc>
+                <a:spcPct val="100000"/>
+              </a:lnSpc>
+              <a:buNone/>
+              <a:defRPr lang="th-TH" sz="1200" dirty="0">
+                <a:solidFill>
+                  <a:srgbClr val="5F5F5F"/>
+                </a:solidFill>
+                <a:latin typeface="+mn-lt"/>
+                <a:ea typeface="+mn-ea"/>
+                <a:cs typeface="+mn-cs"/>
+              </a:defRPr>
+            </a:lvl1pPr>
+          </a:lstStyle>
+          <a:p>
+            <a:pPr algn="l" marL="0" indent="0">
+              <a:lnSpc>
+                <a:spcPct val="100000"/>
+              </a:lnSpc>
+              <a:buNone/>
+            </a:pPr>
+            <a:r>
+              <a:rPr lang="th-TH" sz="1200" dirty="0">
+                <a:solidFill>
+                  <a:srgbClr val="5F5F5F"/>
+                </a:solidFill>
+                <a:latin typeface="+mn-lt"/>
+                <a:ea typeface="+mn-ea"/>
+                <a:cs typeface="+mn-cs"/>
+              </a:rPr>
+              <a:t>ประสบการณ์ · วุฒิบัตร</a:t>
+            </a:r>
+          </a:p>
+        </p:txBody>
+      </p:sp>
+      <p:sp>
+        <p:nvSpPr>
+          <p:cNvPr id="30" name="Card 2 Duties"/>
+          <p:cNvSpPr>
+            <a:spLocks noGrp="1"/>
+          </p:cNvSpPr>
+          <p:nvPr>
+            <p:ph type="body" idx="31"/>
+          </p:nvPr>
+        </p:nvSpPr>
+        <p:spPr>
+          <a:xfrm>
+            <a:off x="3733800" y="4251960"/>
+            <a:ext cx="2087880" cy="731520"/>
+          </a:xfrm>
+          <a:prstGeom prst="rect">
+            <a:avLst/>
+          </a:prstGeom>
+        </p:spPr>
+        <p:txBody>
+          <a:bodyPr wrap="square" anchor="t" lIns="0" tIns="0" rIns="0" bIns="0" rtlCol="0"/>
+          <a:lstStyle>
+            <a:lvl1pPr algn="l" marL="182880" indent="-182880">
+              <a:lnSpc>
+                <a:spcPct val="132000"/>
+              </a:lnSpc>
+              <a:spcBef>
+                <a:spcPts val="500"/>
+              </a:spcBef>
+              <a:buClr>
+                <a:srgbClr val="216B7F"/>
+              </a:buClr>
+              <a:buSzPct val="90000"/>
+              <a:buFont typeface="Arial"/>
+              <a:buChar char="•"/>
+              <a:defRPr lang="th-TH" sz="1200" dirty="0">
+                <a:solidFill>
+                  <a:srgbClr val="333333"/>
+                </a:solidFill>
+                <a:latin typeface="+mn-lt"/>
+                <a:ea typeface="+mn-ea"/>
+                <a:cs typeface="+mn-cs"/>
+              </a:defRPr>
+            </a:lvl1pPr>
+            <a:lvl2pPr algn="l" marL="548640" indent="-182880">
+              <a:lnSpc>
+                <a:spcPct val="132000"/>
+              </a:lnSpc>
+              <a:spcBef>
+                <a:spcPts val="350"/>
+              </a:spcBef>
+              <a:buClr>
+                <a:srgbClr val="5F5F5F"/>
+              </a:buClr>
+              <a:buSzPct val="90000"/>
+              <a:buFont typeface="Arial"/>
+              <a:buChar char="–"/>
+              <a:defRPr lang="th-TH" sz="1200" dirty="0">
+                <a:solidFill>
+                  <a:srgbClr val="333333"/>
+                </a:solidFill>
+                <a:latin typeface="+mn-lt"/>
+                <a:ea typeface="+mn-ea"/>
+                <a:cs typeface="+mn-cs"/>
+              </a:defRPr>
+            </a:lvl2pPr>
+          </a:lstStyle>
+          <a:p>
+            <a:pPr algn="l" marL="182880" indent="-182880">
+              <a:lnSpc>
+                <a:spcPct val="132000"/>
+              </a:lnSpc>
+              <a:spcBef>
+                <a:spcPts val="500"/>
+              </a:spcBef>
+              <a:buClr>
+                <a:srgbClr val="216B7F"/>
+              </a:buClr>
+              <a:buSzPct val="90000"/>
+              <a:buFont typeface="Arial"/>
+              <a:buChar char="•"/>
+            </a:pPr>
+            <a:r>
+              <a:rPr lang="th-TH" sz="1200" dirty="0">
+                <a:solidFill>
+                  <a:srgbClr val="333333"/>
+                </a:solidFill>
+                <a:latin typeface="+mn-lt"/>
+                <a:ea typeface="+mn-ea"/>
+                <a:cs typeface="+mn-cs"/>
+              </a:rPr>
+              <a:t>หน้าที่หลัก</a:t>
+            </a:r>
+          </a:p>
+          <a:p>
+            <a:pPr algn="l" marL="548640" indent="-182880">
+              <a:lnSpc>
+                <a:spcPct val="132000"/>
+              </a:lnSpc>
+              <a:spcBef>
+                <a:spcPts val="350"/>
+              </a:spcBef>
+              <a:buClr>
+                <a:srgbClr val="5F5F5F"/>
+              </a:buClr>
+              <a:buSzPct val="90000"/>
+              <a:buFont typeface="Arial"/>
+              <a:buChar char="–"/>
+            </a:pPr>
+            <a:r>
+              <a:rPr lang="th-TH" sz="1200" dirty="0">
+                <a:solidFill>
+                  <a:srgbClr val="333333"/>
+                </a:solidFill>
+                <a:latin typeface="+mn-lt"/>
+                <a:ea typeface="+mn-ea"/>
+                <a:cs typeface="+mn-cs"/>
+              </a:rPr>
+              <a:t>หน้าที่หลัก</a:t>
+            </a:r>
+          </a:p>
+        </p:txBody>
+      </p:sp>
+      <p:sp>
+        <p:nvSpPr>
+          <p:cNvPr id="31" name="Drop 3"/>
+          <p:cNvSpPr/>
+          <p:nvPr/>
+        </p:nvSpPr>
+        <p:spPr>
+          <a:xfrm>
+            <a:off x="7407910" y="2903220"/>
+            <a:ext cx="12700" cy="160020"/>
+          </a:xfrm>
+          <a:prstGeom prst="rect">
+            <a:avLst/>
+          </a:prstGeom>
+          <a:solidFill>
+            <a:srgbClr val="216B7F"/>
+          </a:solidFill>
+          <a:ln>
+            <a:noFill/>
+          </a:ln>
+        </p:spPr>
+        <p:txBody>
+          <a:bodyPr/>
+          <a:lstStyle/>
+          <a:p>
+            <a:endParaRPr lang="th-TH"/>
+          </a:p>
+        </p:txBody>
+      </p:sp>
+      <p:sp>
+        <p:nvSpPr>
+          <p:cNvPr id="32" name="Card 3"/>
+          <p:cNvSpPr/>
+          <p:nvPr/>
+        </p:nvSpPr>
+        <p:spPr>
+          <a:xfrm>
+            <a:off x="6187440" y="3063240"/>
+            <a:ext cx="2453640" cy="2103120"/>
+          </a:xfrm>
+          <a:prstGeom prst="rect">
+            <a:avLst/>
+          </a:prstGeom>
+          <a:solidFill>
+            <a:srgbClr val="E8F6F5"/>
+          </a:solidFill>
+          <a:ln>
+            <a:noFill/>
+          </a:ln>
+        </p:spPr>
+        <p:txBody>
+          <a:bodyPr/>
+          <a:lstStyle/>
+          <a:p>
+            <a:endParaRPr lang="th-TH"/>
+          </a:p>
+        </p:txBody>
+      </p:sp>
+      <p:sp>
+        <p:nvSpPr>
+          <p:cNvPr id="33" name="Card 3 Role"/>
+          <p:cNvSpPr>
+            <a:spLocks noGrp="1"/>
+          </p:cNvSpPr>
+          <p:nvPr>
+            <p:ph type="body" idx="32"/>
+          </p:nvPr>
+        </p:nvSpPr>
+        <p:spPr>
+          <a:xfrm>
+            <a:off x="6370320" y="3246120"/>
+            <a:ext cx="2087880" cy="274320"/>
+          </a:xfrm>
+          <a:prstGeom prst="rect">
+            <a:avLst/>
+          </a:prstGeom>
+        </p:spPr>
+        <p:txBody>
+          <a:bodyPr wrap="square" anchor="t" lIns="0" tIns="0" rIns="0" bIns="0" rtlCol="0"/>
+          <a:lstStyle>
+            <a:lvl1pPr algn="l" marL="0" indent="0">
+              <a:lnSpc>
+                <a:spcPct val="100000"/>
+              </a:lnSpc>
+              <a:buNone/>
+              <a:defRPr lang="th-TH" sz="1200" b="1" spc="120" dirty="0">
+                <a:solidFill>
+                  <a:srgbClr val="5F5F5F"/>
+                </a:solidFill>
+                <a:latin typeface="+mn-lt"/>
+                <a:ea typeface="+mn-ea"/>
+                <a:cs typeface="+mn-cs"/>
+              </a:defRPr>
+            </a:lvl1pPr>
+          </a:lstStyle>
+          <a:p>
+            <a:pPr algn="l" marL="0" indent="0">
+              <a:lnSpc>
+                <a:spcPct val="100000"/>
+              </a:lnSpc>
+              <a:buNone/>
+            </a:pPr>
+            <a:r>
+              <a:rPr lang="th-TH" sz="1200" b="1" spc="120" dirty="0">
+                <a:solidFill>
+                  <a:srgbClr val="5F5F5F"/>
+                </a:solidFill>
+                <a:latin typeface="+mn-lt"/>
+                <a:ea typeface="+mn-ea"/>
+                <a:cs typeface="+mn-cs"/>
+              </a:rPr>
+              <a:t>บทบาท</a:t>
+            </a:r>
+          </a:p>
+        </p:txBody>
+      </p:sp>
+      <p:sp>
+        <p:nvSpPr>
+          <p:cNvPr id="34" name="Card 3 Name"/>
+          <p:cNvSpPr>
+            <a:spLocks noGrp="1"/>
+          </p:cNvSpPr>
+          <p:nvPr>
+            <p:ph type="body" idx="33"/>
+          </p:nvPr>
+        </p:nvSpPr>
+        <p:spPr>
+          <a:xfrm>
+            <a:off x="6370320" y="3529584"/>
+            <a:ext cx="2087880" cy="338328"/>
+          </a:xfrm>
+          <a:prstGeom prst="rect">
+            <a:avLst/>
+          </a:prstGeom>
+        </p:spPr>
+        <p:txBody>
+          <a:bodyPr wrap="square" anchor="t" lIns="0" tIns="0" rIns="0" bIns="0" rtlCol="0"/>
+          <a:lstStyle>
+            <a:lvl1pPr algn="l" marL="0" indent="0">
+              <a:lnSpc>
+                <a:spcPct val="100000"/>
+              </a:lnSpc>
+              <a:buNone/>
+              <a:defRPr lang="th-TH" sz="2000" b="1" dirty="0">
+                <a:solidFill>
+                  <a:srgbClr val="23436D"/>
+                </a:solidFill>
+                <a:latin typeface="+mj-lt"/>
+                <a:ea typeface="+mj-ea"/>
+                <a:cs typeface="+mj-cs"/>
+              </a:defRPr>
+            </a:lvl1pPr>
+          </a:lstStyle>
+          <a:p>
+            <a:pPr algn="l" marL="0" indent="0">
+              <a:lnSpc>
+                <a:spcPct val="100000"/>
+              </a:lnSpc>
+              <a:buNone/>
+            </a:pPr>
+            <a:r>
+              <a:rPr lang="th-TH" sz="2000" b="1" dirty="0">
+                <a:solidFill>
+                  <a:srgbClr val="23436D"/>
+                </a:solidFill>
+                <a:latin typeface="+mj-lt"/>
+                <a:ea typeface="+mj-ea"/>
+                <a:cs typeface="+mj-cs"/>
+              </a:rPr>
+              <a:t>ชื่อผู้รับผิดชอบ</a:t>
+            </a:r>
+          </a:p>
+        </p:txBody>
+      </p:sp>
+      <p:sp>
+        <p:nvSpPr>
+          <p:cNvPr id="35" name="Card 3 Credential"/>
+          <p:cNvSpPr>
+            <a:spLocks noGrp="1"/>
+          </p:cNvSpPr>
+          <p:nvPr>
+            <p:ph type="body" idx="34"/>
+          </p:nvPr>
+        </p:nvSpPr>
+        <p:spPr>
+          <a:xfrm>
+            <a:off x="6370320" y="3895344"/>
+            <a:ext cx="2087880" cy="228600"/>
+          </a:xfrm>
+          <a:prstGeom prst="rect">
+            <a:avLst/>
+          </a:prstGeom>
+        </p:spPr>
+        <p:txBody>
+          <a:bodyPr wrap="square" anchor="t" lIns="0" tIns="0" rIns="0" bIns="0" rtlCol="0"/>
+          <a:lstStyle>
+            <a:lvl1pPr algn="l" marL="0" indent="0">
+              <a:lnSpc>
+                <a:spcPct val="100000"/>
+              </a:lnSpc>
+              <a:buNone/>
+              <a:defRPr lang="th-TH" sz="1200" dirty="0">
+                <a:solidFill>
+                  <a:srgbClr val="5F5F5F"/>
+                </a:solidFill>
+                <a:latin typeface="+mn-lt"/>
+                <a:ea typeface="+mn-ea"/>
+                <a:cs typeface="+mn-cs"/>
+              </a:defRPr>
+            </a:lvl1pPr>
+          </a:lstStyle>
+          <a:p>
+            <a:pPr algn="l" marL="0" indent="0">
+              <a:lnSpc>
+                <a:spcPct val="100000"/>
+              </a:lnSpc>
+              <a:buNone/>
+            </a:pPr>
+            <a:r>
+              <a:rPr lang="th-TH" sz="1200" dirty="0">
+                <a:solidFill>
+                  <a:srgbClr val="5F5F5F"/>
+                </a:solidFill>
+                <a:latin typeface="+mn-lt"/>
+                <a:ea typeface="+mn-ea"/>
+                <a:cs typeface="+mn-cs"/>
+              </a:rPr>
+              <a:t>ประสบการณ์ · วุฒิบัตร</a:t>
+            </a:r>
+          </a:p>
+        </p:txBody>
+      </p:sp>
+      <p:sp>
+        <p:nvSpPr>
+          <p:cNvPr id="36" name="Card 3 Duties"/>
+          <p:cNvSpPr>
+            <a:spLocks noGrp="1"/>
+          </p:cNvSpPr>
+          <p:nvPr>
+            <p:ph type="body" idx="35"/>
+          </p:nvPr>
+        </p:nvSpPr>
+        <p:spPr>
+          <a:xfrm>
+            <a:off x="6370320" y="4251960"/>
+            <a:ext cx="2087880" cy="731520"/>
+          </a:xfrm>
+          <a:prstGeom prst="rect">
+            <a:avLst/>
+          </a:prstGeom>
+        </p:spPr>
+        <p:txBody>
+          <a:bodyPr wrap="square" anchor="t" lIns="0" tIns="0" rIns="0" bIns="0" rtlCol="0"/>
+          <a:lstStyle>
+            <a:lvl1pPr algn="l" marL="182880" indent="-182880">
+              <a:lnSpc>
+                <a:spcPct val="132000"/>
+              </a:lnSpc>
+              <a:spcBef>
+                <a:spcPts val="500"/>
+              </a:spcBef>
+              <a:buClr>
+                <a:srgbClr val="216B7F"/>
+              </a:buClr>
+              <a:buSzPct val="90000"/>
+              <a:buFont typeface="Arial"/>
+              <a:buChar char="•"/>
+              <a:defRPr lang="th-TH" sz="1200" dirty="0">
+                <a:solidFill>
+                  <a:srgbClr val="333333"/>
+                </a:solidFill>
+                <a:latin typeface="+mn-lt"/>
+                <a:ea typeface="+mn-ea"/>
+                <a:cs typeface="+mn-cs"/>
+              </a:defRPr>
+            </a:lvl1pPr>
+            <a:lvl2pPr algn="l" marL="548640" indent="-182880">
+              <a:lnSpc>
+                <a:spcPct val="132000"/>
+              </a:lnSpc>
+              <a:spcBef>
+                <a:spcPts val="350"/>
+              </a:spcBef>
+              <a:buClr>
+                <a:srgbClr val="5F5F5F"/>
+              </a:buClr>
+              <a:buSzPct val="90000"/>
+              <a:buFont typeface="Arial"/>
+              <a:buChar char="–"/>
+              <a:defRPr lang="th-TH" sz="1200" dirty="0">
+                <a:solidFill>
+                  <a:srgbClr val="333333"/>
+                </a:solidFill>
+                <a:latin typeface="+mn-lt"/>
+                <a:ea typeface="+mn-ea"/>
+                <a:cs typeface="+mn-cs"/>
+              </a:defRPr>
+            </a:lvl2pPr>
+          </a:lstStyle>
+          <a:p>
+            <a:pPr algn="l" marL="182880" indent="-182880">
+              <a:lnSpc>
+                <a:spcPct val="132000"/>
+              </a:lnSpc>
+              <a:spcBef>
+                <a:spcPts val="500"/>
+              </a:spcBef>
+              <a:buClr>
+                <a:srgbClr val="216B7F"/>
+              </a:buClr>
+              <a:buSzPct val="90000"/>
+              <a:buFont typeface="Arial"/>
+              <a:buChar char="•"/>
+            </a:pPr>
+            <a:r>
+              <a:rPr lang="th-TH" sz="1200" dirty="0">
+                <a:solidFill>
+                  <a:srgbClr val="333333"/>
+                </a:solidFill>
+                <a:latin typeface="+mn-lt"/>
+                <a:ea typeface="+mn-ea"/>
+                <a:cs typeface="+mn-cs"/>
+              </a:rPr>
+              <a:t>หน้าที่หลัก</a:t>
+            </a:r>
+          </a:p>
+          <a:p>
+            <a:pPr algn="l" marL="548640" indent="-182880">
+              <a:lnSpc>
+                <a:spcPct val="132000"/>
+              </a:lnSpc>
+              <a:spcBef>
+                <a:spcPts val="350"/>
+              </a:spcBef>
+              <a:buClr>
+                <a:srgbClr val="5F5F5F"/>
+              </a:buClr>
+              <a:buSzPct val="90000"/>
+              <a:buFont typeface="Arial"/>
+              <a:buChar char="–"/>
+            </a:pPr>
+            <a:r>
+              <a:rPr lang="th-TH" sz="1200" dirty="0">
+                <a:solidFill>
+                  <a:srgbClr val="333333"/>
+                </a:solidFill>
+                <a:latin typeface="+mn-lt"/>
+                <a:ea typeface="+mn-ea"/>
+                <a:cs typeface="+mn-cs"/>
+              </a:rPr>
+              <a:t>หน้าที่หลัก</a:t>
+            </a:r>
+          </a:p>
+        </p:txBody>
+      </p:sp>
+      <p:sp>
+        <p:nvSpPr>
+          <p:cNvPr id="37" name="Drop 4"/>
+          <p:cNvSpPr/>
+          <p:nvPr/>
+        </p:nvSpPr>
+        <p:spPr>
+          <a:xfrm>
+            <a:off x="10044430" y="2903220"/>
+            <a:ext cx="12700" cy="160020"/>
+          </a:xfrm>
+          <a:prstGeom prst="rect">
+            <a:avLst/>
+          </a:prstGeom>
+          <a:solidFill>
+            <a:srgbClr val="216B7F"/>
+          </a:solidFill>
+          <a:ln>
+            <a:noFill/>
+          </a:ln>
+        </p:spPr>
+        <p:txBody>
+          <a:bodyPr/>
+          <a:lstStyle/>
+          <a:p>
+            <a:endParaRPr lang="th-TH"/>
+          </a:p>
+        </p:txBody>
+      </p:sp>
+      <p:sp>
+        <p:nvSpPr>
+          <p:cNvPr id="38" name="Card 4"/>
+          <p:cNvSpPr/>
+          <p:nvPr/>
+        </p:nvSpPr>
+        <p:spPr>
+          <a:xfrm>
+            <a:off x="8823960" y="3063240"/>
+            <a:ext cx="2453640" cy="2103120"/>
+          </a:xfrm>
+          <a:prstGeom prst="rect">
+            <a:avLst/>
+          </a:prstGeom>
+          <a:solidFill>
+            <a:srgbClr val="E8F6F5"/>
+          </a:solidFill>
+          <a:ln>
+            <a:noFill/>
+          </a:ln>
+        </p:spPr>
+        <p:txBody>
+          <a:bodyPr/>
+          <a:lstStyle/>
+          <a:p>
+            <a:endParaRPr lang="th-TH"/>
+          </a:p>
+        </p:txBody>
+      </p:sp>
+      <p:sp>
+        <p:nvSpPr>
+          <p:cNvPr id="39" name="Card 4 Role"/>
+          <p:cNvSpPr>
+            <a:spLocks noGrp="1"/>
+          </p:cNvSpPr>
+          <p:nvPr>
+            <p:ph type="body" idx="36"/>
+          </p:nvPr>
+        </p:nvSpPr>
+        <p:spPr>
+          <a:xfrm>
+            <a:off x="9006840" y="3246120"/>
+            <a:ext cx="2087880" cy="274320"/>
+          </a:xfrm>
+          <a:prstGeom prst="rect">
+            <a:avLst/>
+          </a:prstGeom>
+        </p:spPr>
+        <p:txBody>
+          <a:bodyPr wrap="square" anchor="t" lIns="0" tIns="0" rIns="0" bIns="0" rtlCol="0"/>
+          <a:lstStyle>
+            <a:lvl1pPr algn="l" marL="0" indent="0">
+              <a:lnSpc>
+                <a:spcPct val="100000"/>
+              </a:lnSpc>
+              <a:buNone/>
+              <a:defRPr lang="th-TH" sz="1200" b="1" spc="120" dirty="0">
+                <a:solidFill>
+                  <a:srgbClr val="5F5F5F"/>
+                </a:solidFill>
+                <a:latin typeface="+mn-lt"/>
+                <a:ea typeface="+mn-ea"/>
+                <a:cs typeface="+mn-cs"/>
+              </a:defRPr>
+            </a:lvl1pPr>
+          </a:lstStyle>
+          <a:p>
+            <a:pPr algn="l" marL="0" indent="0">
+              <a:lnSpc>
+                <a:spcPct val="100000"/>
+              </a:lnSpc>
+              <a:buNone/>
+            </a:pPr>
+            <a:r>
+              <a:rPr lang="th-TH" sz="1200" b="1" spc="120" dirty="0">
+                <a:solidFill>
+                  <a:srgbClr val="5F5F5F"/>
+                </a:solidFill>
+                <a:latin typeface="+mn-lt"/>
+                <a:ea typeface="+mn-ea"/>
+                <a:cs typeface="+mn-cs"/>
+              </a:rPr>
+              <a:t>บทบาท</a:t>
+            </a:r>
+          </a:p>
+        </p:txBody>
+      </p:sp>
+      <p:sp>
+        <p:nvSpPr>
+          <p:cNvPr id="40" name="Card 4 Name"/>
+          <p:cNvSpPr>
+            <a:spLocks noGrp="1"/>
+          </p:cNvSpPr>
+          <p:nvPr>
+            <p:ph type="body" idx="37"/>
+          </p:nvPr>
+        </p:nvSpPr>
+        <p:spPr>
+          <a:xfrm>
+            <a:off x="9006840" y="3529584"/>
+            <a:ext cx="2087880" cy="338328"/>
+          </a:xfrm>
+          <a:prstGeom prst="rect">
+            <a:avLst/>
+          </a:prstGeom>
+        </p:spPr>
+        <p:txBody>
+          <a:bodyPr wrap="square" anchor="t" lIns="0" tIns="0" rIns="0" bIns="0" rtlCol="0"/>
+          <a:lstStyle>
+            <a:lvl1pPr algn="l" marL="0" indent="0">
+              <a:lnSpc>
+                <a:spcPct val="100000"/>
+              </a:lnSpc>
+              <a:buNone/>
+              <a:defRPr lang="th-TH" sz="2000" b="1" dirty="0">
+                <a:solidFill>
+                  <a:srgbClr val="23436D"/>
+                </a:solidFill>
+                <a:latin typeface="+mj-lt"/>
+                <a:ea typeface="+mj-ea"/>
+                <a:cs typeface="+mj-cs"/>
+              </a:defRPr>
+            </a:lvl1pPr>
+          </a:lstStyle>
+          <a:p>
+            <a:pPr algn="l" marL="0" indent="0">
+              <a:lnSpc>
+                <a:spcPct val="100000"/>
+              </a:lnSpc>
+              <a:buNone/>
+            </a:pPr>
+            <a:r>
+              <a:rPr lang="th-TH" sz="2000" b="1" dirty="0">
+                <a:solidFill>
+                  <a:srgbClr val="23436D"/>
+                </a:solidFill>
+                <a:latin typeface="+mj-lt"/>
+                <a:ea typeface="+mj-ea"/>
+                <a:cs typeface="+mj-cs"/>
+              </a:rPr>
+              <a:t>ชื่อผู้รับผิดชอบ</a:t>
+            </a:r>
+          </a:p>
+        </p:txBody>
+      </p:sp>
+      <p:sp>
+        <p:nvSpPr>
+          <p:cNvPr id="41" name="Card 4 Credential"/>
+          <p:cNvSpPr>
+            <a:spLocks noGrp="1"/>
+          </p:cNvSpPr>
+          <p:nvPr>
+            <p:ph type="body" idx="38"/>
+          </p:nvPr>
+        </p:nvSpPr>
+        <p:spPr>
+          <a:xfrm>
+            <a:off x="9006840" y="3895344"/>
+            <a:ext cx="2087880" cy="228600"/>
+          </a:xfrm>
+          <a:prstGeom prst="rect">
+            <a:avLst/>
+          </a:prstGeom>
+        </p:spPr>
+        <p:txBody>
+          <a:bodyPr wrap="square" anchor="t" lIns="0" tIns="0" rIns="0" bIns="0" rtlCol="0"/>
+          <a:lstStyle>
+            <a:lvl1pPr algn="l" marL="0" indent="0">
+              <a:lnSpc>
+                <a:spcPct val="100000"/>
+              </a:lnSpc>
+              <a:buNone/>
+              <a:defRPr lang="th-TH" sz="1200" dirty="0">
+                <a:solidFill>
+                  <a:srgbClr val="5F5F5F"/>
+                </a:solidFill>
+                <a:latin typeface="+mn-lt"/>
+                <a:ea typeface="+mn-ea"/>
+                <a:cs typeface="+mn-cs"/>
+              </a:defRPr>
+            </a:lvl1pPr>
+          </a:lstStyle>
+          <a:p>
+            <a:pPr algn="l" marL="0" indent="0">
+              <a:lnSpc>
+                <a:spcPct val="100000"/>
+              </a:lnSpc>
+              <a:buNone/>
+            </a:pPr>
+            <a:r>
+              <a:rPr lang="th-TH" sz="1200" dirty="0">
+                <a:solidFill>
+                  <a:srgbClr val="5F5F5F"/>
+                </a:solidFill>
+                <a:latin typeface="+mn-lt"/>
+                <a:ea typeface="+mn-ea"/>
+                <a:cs typeface="+mn-cs"/>
+              </a:rPr>
+              <a:t>ประสบการณ์ · วุฒิบัตร</a:t>
+            </a:r>
+          </a:p>
+        </p:txBody>
+      </p:sp>
+      <p:sp>
+        <p:nvSpPr>
+          <p:cNvPr id="42" name="Card 4 Duties"/>
+          <p:cNvSpPr>
+            <a:spLocks noGrp="1"/>
+          </p:cNvSpPr>
+          <p:nvPr>
+            <p:ph type="body" idx="39"/>
+          </p:nvPr>
+        </p:nvSpPr>
+        <p:spPr>
+          <a:xfrm>
+            <a:off x="9006840" y="4251960"/>
+            <a:ext cx="2087880" cy="731520"/>
+          </a:xfrm>
+          <a:prstGeom prst="rect">
+            <a:avLst/>
+          </a:prstGeom>
+        </p:spPr>
+        <p:txBody>
+          <a:bodyPr wrap="square" anchor="t" lIns="0" tIns="0" rIns="0" bIns="0" rtlCol="0"/>
+          <a:lstStyle>
+            <a:lvl1pPr algn="l" marL="182880" indent="-182880">
+              <a:lnSpc>
+                <a:spcPct val="132000"/>
+              </a:lnSpc>
+              <a:spcBef>
+                <a:spcPts val="500"/>
+              </a:spcBef>
+              <a:buClr>
+                <a:srgbClr val="216B7F"/>
+              </a:buClr>
+              <a:buSzPct val="90000"/>
+              <a:buFont typeface="Arial"/>
+              <a:buChar char="•"/>
+              <a:defRPr lang="th-TH" sz="1200" dirty="0">
+                <a:solidFill>
+                  <a:srgbClr val="333333"/>
+                </a:solidFill>
+                <a:latin typeface="+mn-lt"/>
+                <a:ea typeface="+mn-ea"/>
+                <a:cs typeface="+mn-cs"/>
+              </a:defRPr>
+            </a:lvl1pPr>
+            <a:lvl2pPr algn="l" marL="548640" indent="-182880">
+              <a:lnSpc>
+                <a:spcPct val="132000"/>
+              </a:lnSpc>
+              <a:spcBef>
+                <a:spcPts val="350"/>
+              </a:spcBef>
+              <a:buClr>
+                <a:srgbClr val="5F5F5F"/>
+              </a:buClr>
+              <a:buSzPct val="90000"/>
+              <a:buFont typeface="Arial"/>
+              <a:buChar char="–"/>
+              <a:defRPr lang="th-TH" sz="1200" dirty="0">
+                <a:solidFill>
+                  <a:srgbClr val="333333"/>
+                </a:solidFill>
+                <a:latin typeface="+mn-lt"/>
+                <a:ea typeface="+mn-ea"/>
+                <a:cs typeface="+mn-cs"/>
+              </a:defRPr>
+            </a:lvl2pPr>
+          </a:lstStyle>
+          <a:p>
+            <a:pPr algn="l" marL="182880" indent="-182880">
+              <a:lnSpc>
+                <a:spcPct val="132000"/>
+              </a:lnSpc>
+              <a:spcBef>
+                <a:spcPts val="500"/>
+              </a:spcBef>
+              <a:buClr>
+                <a:srgbClr val="216B7F"/>
+              </a:buClr>
+              <a:buSzPct val="90000"/>
+              <a:buFont typeface="Arial"/>
+              <a:buChar char="•"/>
+            </a:pPr>
+            <a:r>
+              <a:rPr lang="th-TH" sz="1200" dirty="0">
+                <a:solidFill>
+                  <a:srgbClr val="333333"/>
+                </a:solidFill>
+                <a:latin typeface="+mn-lt"/>
+                <a:ea typeface="+mn-ea"/>
+                <a:cs typeface="+mn-cs"/>
+              </a:rPr>
+              <a:t>หน้าที่หลัก</a:t>
+            </a:r>
+          </a:p>
+          <a:p>
+            <a:pPr algn="l" marL="548640" indent="-182880">
+              <a:lnSpc>
+                <a:spcPct val="132000"/>
+              </a:lnSpc>
+              <a:spcBef>
+                <a:spcPts val="350"/>
+              </a:spcBef>
+              <a:buClr>
+                <a:srgbClr val="5F5F5F"/>
+              </a:buClr>
+              <a:buSzPct val="90000"/>
+              <a:buFont typeface="Arial"/>
+              <a:buChar char="–"/>
+            </a:pPr>
+            <a:r>
+              <a:rPr lang="th-TH" sz="1200" dirty="0">
+                <a:solidFill>
+                  <a:srgbClr val="333333"/>
+                </a:solidFill>
+                <a:latin typeface="+mn-lt"/>
+                <a:ea typeface="+mn-ea"/>
+                <a:cs typeface="+mn-cs"/>
+              </a:rPr>
+              <a:t>หน้าที่หลัก</a:t>
+            </a:r>
+          </a:p>
+        </p:txBody>
+      </p:sp>
+      <p:sp>
+        <p:nvSpPr>
+          <p:cNvPr id="43" name="Note"/>
+          <p:cNvSpPr>
+            <a:spLocks noGrp="1"/>
+          </p:cNvSpPr>
+          <p:nvPr>
+            <p:ph type="body" idx="1"/>
+          </p:nvPr>
+        </p:nvSpPr>
+        <p:spPr>
+          <a:xfrm>
+            <a:off x="914400" y="5257800"/>
+            <a:ext cx="10363200" cy="274320"/>
+          </a:xfrm>
+          <a:prstGeom prst="rect">
+            <a:avLst/>
+          </a:prstGeom>
+        </p:spPr>
+        <p:txBody>
+          <a:bodyPr wrap="square" anchor="t" lIns="0" tIns="0" rIns="0" bIns="0" rtlCol="0"/>
+          <a:lstStyle>
+            <a:lvl1pPr algn="l" marL="0" indent="0">
+              <a:lnSpc>
+                <a:spcPct val="130000"/>
+              </a:lnSpc>
+              <a:buNone/>
+              <a:defRPr lang="th-TH" sz="1000" dirty="0">
+                <a:solidFill>
+                  <a:srgbClr val="5F5F5F"/>
+                </a:solidFill>
+                <a:latin typeface="+mn-lt"/>
+                <a:ea typeface="+mn-ea"/>
+                <a:cs typeface="+mn-cs"/>
+              </a:defRPr>
+            </a:lvl1pPr>
+          </a:lstStyle>
+          <a:p>
+            <a:pPr algn="l" marL="0" indent="0">
+              <a:lnSpc>
+                <a:spcPct val="130000"/>
+              </a:lnSpc>
+              <a:buNone/>
+            </a:pPr>
+            <a:r>
+              <a:rPr lang="th-TH" sz="1000" dirty="0">
+                <a:solidFill>
+                  <a:srgbClr val="5F5F5F"/>
+                </a:solidFill>
+                <a:latin typeface="+mn-lt"/>
+                <a:ea typeface="+mn-ea"/>
+                <a:cs typeface="+mn-cs"/>
+              </a:rPr>
+              <a:t>จำนวนคนรวม · ประวัติเต็มอยู่ภาคผนวก</a:t>
+            </a:r>
+          </a:p>
+        </p:txBody>
+      </p:sp>
+      <p:sp>
+        <p:nvSpPr>
+          <p:cNvPr id="44" name="Takeaway Band"/>
+          <p:cNvSpPr/>
+          <p:nvPr/>
+        </p:nvSpPr>
+        <p:spPr>
+          <a:xfrm>
+            <a:off x="914400" y="5623560"/>
+            <a:ext cx="10363200" cy="411480"/>
+          </a:xfrm>
+          <a:prstGeom prst="rect">
+            <a:avLst/>
+          </a:prstGeom>
+          <a:solidFill>
+            <a:srgbClr val="E8F6F5"/>
+          </a:solidFill>
+          <a:ln>
+            <a:noFill/>
+          </a:ln>
+        </p:spPr>
+        <p:txBody>
+          <a:bodyPr/>
+          <a:lstStyle/>
+          <a:p>
+            <a:endParaRPr lang="th-TH"/>
+          </a:p>
+        </p:txBody>
+      </p:sp>
+      <p:sp>
+        <p:nvSpPr>
+          <p:cNvPr id="45" name="Takeaway Label"/>
+          <p:cNvSpPr>
+            <a:spLocks noGrp="1"/>
+          </p:cNvSpPr>
+          <p:nvPr>
+            <p:ph type="body" idx="2"/>
+          </p:nvPr>
+        </p:nvSpPr>
+        <p:spPr>
+          <a:xfrm>
+            <a:off x="1097280" y="5684520"/>
+            <a:ext cx="1828800" cy="289560"/>
+          </a:xfrm>
+          <a:prstGeom prst="rect">
+            <a:avLst/>
+          </a:prstGeom>
+        </p:spPr>
+        <p:txBody>
+          <a:bodyPr wrap="square" anchor="ctr" lIns="0" tIns="0" rIns="0" bIns="0" rtlCol="0"/>
+          <a:lstStyle>
+            <a:lvl1pPr algn="l" marL="0" indent="0">
+              <a:lnSpc>
+                <a:spcPct val="100000"/>
+              </a:lnSpc>
+              <a:buNone/>
+              <a:defRPr lang="th-TH" sz="1200" b="1" spc="120" dirty="0">
+                <a:solidFill>
+                  <a:srgbClr val="216B7F"/>
+                </a:solidFill>
+                <a:latin typeface="+mn-lt"/>
+                <a:ea typeface="+mn-ea"/>
+                <a:cs typeface="+mn-cs"/>
+              </a:defRPr>
+            </a:lvl1pPr>
+          </a:lstStyle>
+          <a:p>
+            <a:pPr algn="l" marL="0" indent="0">
+              <a:lnSpc>
+                <a:spcPct val="100000"/>
+              </a:lnSpc>
+              <a:buNone/>
+            </a:pPr>
+            <a:r>
+              <a:rPr lang="th-TH" sz="1200" b="1" spc="120" dirty="0">
+                <a:solidFill>
+                  <a:srgbClr val="216B7F"/>
+                </a:solidFill>
+                <a:latin typeface="+mn-lt"/>
+                <a:ea typeface="+mn-ea"/>
+                <a:cs typeface="+mn-cs"/>
+              </a:rPr>
+              <a:t>สรุป</a:t>
+            </a:r>
+          </a:p>
+        </p:txBody>
+      </p:sp>
+      <p:sp>
+        <p:nvSpPr>
+          <p:cNvPr id="46" name="Takeaway Copy"/>
+          <p:cNvSpPr>
+            <a:spLocks noGrp="1"/>
+          </p:cNvSpPr>
+          <p:nvPr>
+            <p:ph type="body" idx="3"/>
+          </p:nvPr>
+        </p:nvSpPr>
+        <p:spPr>
+          <a:xfrm>
+            <a:off x="2926080" y="5684520"/>
+            <a:ext cx="8168640" cy="289560"/>
+          </a:xfrm>
+          <a:prstGeom prst="rect">
+            <a:avLst/>
+          </a:prstGeom>
+        </p:spPr>
+        <p:txBody>
+          <a:bodyPr wrap="square" anchor="ctr" lIns="0" tIns="0" rIns="0" bIns="0" rtlCol="0"/>
+          <a:lstStyle>
+            <a:lvl1pPr algn="l" marL="0" indent="0">
+              <a:lnSpc>
+                <a:spcPct val="100000"/>
+              </a:lnSpc>
+              <a:buNone/>
+              <a:defRPr lang="th-TH" sz="1400" dirty="0">
+                <a:solidFill>
+                  <a:srgbClr val="333333"/>
+                </a:solidFill>
+                <a:latin typeface="+mn-lt"/>
+                <a:ea typeface="+mn-ea"/>
+                <a:cs typeface="+mn-cs"/>
+              </a:defRPr>
+            </a:lvl1pPr>
+          </a:lstStyle>
+          <a:p>
+            <a:pPr algn="l" marL="0" indent="0">
+              <a:lnSpc>
+                <a:spcPct val="100000"/>
+              </a:lnSpc>
+              <a:buNone/>
+            </a:pPr>
+            <a:r>
+              <a:rPr lang="th-TH" sz="1400" dirty="0">
+                <a:solidFill>
+                  <a:srgbClr val="333333"/>
+                </a:solidFill>
+                <a:latin typeface="+mn-lt"/>
+                <a:ea typeface="+mn-ea"/>
+                <a:cs typeface="+mn-cs"/>
+              </a:rPr>
+              <a:t>ประเด็นสรุปหนึ่งบรรทัด</a:t>
+            </a:r>
+          </a:p>
+        </p:txBody>
+      </p:sp>
+      <p:sp>
+        <p:nvSpPr>
+          <p:cNvPr id="90" name="Footer Rule"/>
+          <p:cNvSpPr/>
+          <p:nvPr/>
+        </p:nvSpPr>
+        <p:spPr>
+          <a:xfrm>
+            <a:off x="914400" y="6172200"/>
+            <a:ext cx="10363200" cy="12700"/>
+          </a:xfrm>
+          <a:prstGeom prst="rect">
+            <a:avLst/>
+          </a:prstGeom>
+          <a:solidFill>
+            <a:srgbClr val="E5E5E5"/>
+          </a:solidFill>
+          <a:ln>
+            <a:noFill/>
+          </a:ln>
+        </p:spPr>
+        <p:txBody>
+          <a:bodyPr/>
+          <a:lstStyle/>
+          <a:p>
+            <a:endParaRPr lang="th-TH"/>
+          </a:p>
+        </p:txBody>
+      </p:sp>
+      <p:sp>
+        <p:nvSpPr>
+          <p:cNvPr id="91" name="Date Placeholder"/>
+          <p:cNvSpPr>
+            <a:spLocks noGrp="1"/>
+          </p:cNvSpPr>
+          <p:nvPr>
+            <p:ph type="dt" idx="10"/>
+          </p:nvPr>
+        </p:nvSpPr>
+        <p:spPr>
+          <a:xfrm>
+            <a:off x="914400" y="6309360"/>
+            <a:ext cx="2743200" cy="274320"/>
+          </a:xfrm>
+          <a:prstGeom prst="rect">
+            <a:avLst/>
+          </a:prstGeom>
+        </p:spPr>
+        <p:txBody>
+          <a:bodyPr wrap="square" anchor="ctr" lIns="0" tIns="0" rIns="0" bIns="0" rtlCol="0"/>
+          <a:lstStyle>
+            <a:lvl1pPr algn="l" marL="0" indent="0">
+              <a:lnSpc>
+                <a:spcPct val="100000"/>
+              </a:lnSpc>
+              <a:buNone/>
+              <a:defRPr lang="th-TH" sz="1000" dirty="0">
+                <a:solidFill>
+                  <a:srgbClr val="5F5F5F"/>
+                </a:solidFill>
+                <a:latin typeface="+mn-lt"/>
+                <a:ea typeface="+mn-ea"/>
+                <a:cs typeface="+mn-cs"/>
+              </a:defRPr>
+            </a:lvl1pPr>
+          </a:lstStyle>
+          <a:p>
+            <a:pPr algn="l" marL="0" indent="0">
+              <a:lnSpc>
+                <a:spcPct val="100000"/>
+              </a:lnSpc>
+              <a:buNone/>
+            </a:pPr>
+            <a:endParaRPr lang="th-TH" sz="1000"/>
+          </a:p>
+        </p:txBody>
+      </p:sp>
+      <p:sp>
+        <p:nvSpPr>
+          <p:cNvPr id="92" name="Footer Placeholder"/>
+          <p:cNvSpPr>
+            <a:spLocks noGrp="1"/>
+          </p:cNvSpPr>
+          <p:nvPr>
+            <p:ph type="ftr" idx="11"/>
+          </p:nvPr>
+        </p:nvSpPr>
+        <p:spPr>
+          <a:xfrm>
+            <a:off x="4572000" y="6309360"/>
+            <a:ext cx="3657600" cy="274320"/>
+          </a:xfrm>
+          <a:prstGeom prst="rect">
+            <a:avLst/>
+          </a:prstGeom>
+        </p:spPr>
+        <p:txBody>
+          <a:bodyPr wrap="square" anchor="ctr" lIns="0" tIns="0" rIns="0" bIns="0" rtlCol="0"/>
+          <a:lstStyle>
+            <a:lvl1pPr algn="ctr" marL="0" indent="0">
+              <a:lnSpc>
+                <a:spcPct val="100000"/>
+              </a:lnSpc>
+              <a:buNone/>
+              <a:defRPr lang="th-TH" sz="1000" dirty="0">
+                <a:solidFill>
+                  <a:srgbClr val="5F5F5F"/>
+                </a:solidFill>
+                <a:latin typeface="+mn-lt"/>
+                <a:ea typeface="+mn-ea"/>
+                <a:cs typeface="+mn-cs"/>
+              </a:defRPr>
+            </a:lvl1pPr>
+          </a:lstStyle>
+          <a:p>
+            <a:pPr algn="ctr" marL="0" indent="0">
+              <a:lnSpc>
+                <a:spcPct val="100000"/>
+              </a:lnSpc>
+              <a:buNone/>
+            </a:pPr>
+            <a:endParaRPr lang="th-TH" sz="1000"/>
+          </a:p>
+        </p:txBody>
+      </p:sp>
+      <p:sp>
+        <p:nvSpPr>
+          <p:cNvPr id="93" name="Slide Number Placeholder"/>
+          <p:cNvSpPr>
+            <a:spLocks noGrp="1"/>
+          </p:cNvSpPr>
+          <p:nvPr>
+            <p:ph type="sldNum" sz="quarter" idx="12"/>
+          </p:nvPr>
+        </p:nvSpPr>
+        <p:spPr>
+          <a:xfrm>
+            <a:off x="9906000" y="6309360"/>
+            <a:ext cx="1371600" cy="274320"/>
+          </a:xfrm>
+          <a:prstGeom prst="rect">
+            <a:avLst/>
+          </a:prstGeom>
+        </p:spPr>
+        <p:txBody>
+          <a:bodyPr anchor="ctr"/>
+          <a:lstStyle>
+            <a:lvl1pPr algn="r" marL="0" indent="0">
+              <a:lnSpc>
+                <a:spcPct val="100000"/>
+              </a:lnSpc>
+              <a:buNone/>
+              <a:defRPr lang="th-TH" sz="1000" dirty="0">
+                <a:solidFill>
+                  <a:srgbClr val="5F5F5F"/>
+                </a:solidFill>
+                <a:latin typeface="+mn-lt"/>
+                <a:ea typeface="+mn-ea"/>
+                <a:cs typeface="+mn-cs"/>
+              </a:defRPr>
+            </a:lvl1pPr>
+          </a:lstStyle>
+          <a:p>
+            <a:pPr algn="r" marL="0" indent="0">
+              <a:buNone/>
+            </a:pPr>
+            <a:fld id="{B7E3A1C2-4F5D-4A88-9C1E-6D2F0A93B451}" type="slidenum">
+              <a:rPr lang="th-TH" sz="1000">
+                <a:solidFill>
+                  <a:srgbClr val="5F5F5F"/>
+                </a:solidFill>
+                <a:latin typeface="+mn-lt"/>
+                <a:cs typeface="+mn-cs"/>
+              </a:rPr>
+              <a:t>2</a:t>
+            </a:fld>
+            <a:endParaRPr lang="th-TH" sz="1000"/>
+          </a:p>
+        </p:txBody>
+      </p:sp>
+      <p:pic>
+        <p:nvPicPr>
+          <p:cNvPr id="94" name="NCT Mark"/>
+          <p:cNvPicPr>
+            <a:picLocks noChangeAspect="1"/>
+          </p:cNvPicPr>
+          <p:nvPr/>
+        </p:nvPicPr>
+        <p:blipFill>
+          <a:blip r:embed="rId2"/>
+          <a:stretch>
+            <a:fillRect/>
+          </a:stretch>
+        </p:blipFill>
+        <p:spPr>
+          <a:xfrm>
+            <a:off x="9494520" y="6289360"/>
+            <a:ext cx="274320" cy="174498"/>
+          </a:xfrm>
+          <a:prstGeom prst="rect">
+            <a:avLst/>
+          </a:prstGeom>
+        </p:spPr>
+      </p:pic>
+    </p:spTree>
+  </p:cSld>
+  <p:clrMapOvr>
+    <a:masterClrMapping/>
+  </p:clrMapOvr>
+</p:sldLayout>
+</file>
+
 <file path=ppt/slideLayouts/slideLayout3.xml><?xml version="1.0" encoding="utf-8"?>
 <p:sldLayout xmlns:a="http://schemas.openxmlformats.org/drawingml/2006/main" xmlns:r="http://schemas.openxmlformats.org/officeDocument/2006/relationships" xmlns:p="http://schemas.openxmlformats.org/presentationml/2006/main" type="obj" showMasterSp="0" preserve="1">
   <p:cSld name="03 Title and Content">
@@ -25600,7 +27932,7 @@
           <p:nvPr/>
         </p:nvPicPr>
         <p:blipFill>
-          <a:blip r:embed="rId26"/>
+          <a:blip r:embed="rId27"/>
           <a:stretch>
             <a:fillRect/>
           </a:stretch>
@@ -25643,6 +27975,7 @@
     <p:sldLayoutId id="2147483670" r:id="rId22"/>
     <p:sldLayoutId id="2147483671" r:id="rId23"/>
     <p:sldLayoutId id="2147483672" r:id="rId24"/>
+    <p:sldLayoutId id="2147483673" r:id="rId25"/>
   </p:sldLayoutIdLst>
   <p:txStyles>
     <p:titleStyle>
@@ -32629,6 +34962,618 @@
             <a:pPr/>
             <a:r>
               <a:rPr lang="th-TH" dirty="0"/>
+              <a:t>ทีม 7 คน ทำเองตั้งแต่ออกแบบจนถึงอบรม</a:t>
+            </a:r>
+          </a:p>
+        </p:txBody>
+      </p:sp>
+      <p:sp>
+        <p:nvSpPr>
+          <p:cNvPr id="3" name="Note"/>
+          <p:cNvSpPr>
+            <a:spLocks noGrp="1"/>
+          </p:cNvSpPr>
+          <p:nvPr>
+            <p:ph type="body" idx="1"/>
+          </p:nvPr>
+        </p:nvSpPr>
+        <p:spPr/>
+        <p:txBody>
+          <a:bodyPr/>
+          <a:lstStyle/>
+          <a:p>
+            <a:pPr/>
+            <a:r>
+              <a:rPr lang="th-TH" dirty="0"/>
+              <a:t>ทีมรวม 7 คน · ประวัติและวุฒิบัตรเต็มอยู่ภาคผนวก ข</a:t>
+            </a:r>
+          </a:p>
+        </p:txBody>
+      </p:sp>
+      <p:sp>
+        <p:nvSpPr>
+          <p:cNvPr id="4" name="TL"/>
+          <p:cNvSpPr>
+            <a:spLocks noGrp="1"/>
+          </p:cNvSpPr>
+          <p:nvPr>
+            <p:ph type="body" idx="2"/>
+          </p:nvPr>
+        </p:nvSpPr>
+        <p:spPr/>
+        <p:txBody>
+          <a:bodyPr/>
+          <a:lstStyle/>
+          <a:p>
+            <a:pPr/>
+            <a:r>
+              <a:rPr lang="th-TH" dirty="0"/>
+              <a:t>สรุป</a:t>
+            </a:r>
+          </a:p>
+        </p:txBody>
+      </p:sp>
+      <p:sp>
+        <p:nvSpPr>
+          <p:cNvPr id="5" name="TC"/>
+          <p:cNvSpPr>
+            <a:spLocks noGrp="1"/>
+          </p:cNvSpPr>
+          <p:nvPr>
+            <p:ph type="body" idx="3"/>
+          </p:nvPr>
+        </p:nvSpPr>
+        <p:spPr/>
+        <p:txBody>
+          <a:bodyPr/>
+          <a:lstStyle/>
+          <a:p>
+            <a:pPr/>
+            <a:r>
+              <a:rPr lang="th-TH" dirty="0"/>
+              <a:t>ทุกตำแหน่งมีคุณวุฒิครบตาม TOR ข้อ 5.3 ไม่มีงานส่วนไหนจ้างช่วง</a:t>
+            </a:r>
+          </a:p>
+        </p:txBody>
+      </p:sp>
+      <p:sp>
+        <p:nvSpPr>
+          <p:cNvPr id="10" name="R0"/>
+          <p:cNvSpPr>
+            <a:spLocks noGrp="1"/>
+          </p:cNvSpPr>
+          <p:nvPr>
+            <p:ph type="body" idx="20"/>
+          </p:nvPr>
+        </p:nvSpPr>
+        <p:spPr/>
+        <p:txBody>
+          <a:bodyPr/>
+          <a:lstStyle/>
+          <a:p>
+            <a:pPr/>
+            <a:r>
+              <a:rPr lang="th-TH" dirty="0"/>
+              <a:t>ผู้จัดการโครงการ</a:t>
+            </a:r>
+          </a:p>
+        </p:txBody>
+      </p:sp>
+      <p:sp>
+        <p:nvSpPr>
+          <p:cNvPr id="11" name="N0"/>
+          <p:cNvSpPr>
+            <a:spLocks noGrp="1"/>
+          </p:cNvSpPr>
+          <p:nvPr>
+            <p:ph type="body" idx="21"/>
+          </p:nvPr>
+        </p:nvSpPr>
+        <p:spPr/>
+        <p:txBody>
+          <a:bodyPr/>
+          <a:lstStyle/>
+          <a:p>
+            <a:pPr/>
+            <a:r>
+              <a:rPr lang="th-TH" dirty="0"/>
+              <a:t>กานดา ศรีสุข</a:t>
+            </a:r>
+          </a:p>
+        </p:txBody>
+      </p:sp>
+      <p:sp>
+        <p:nvSpPr>
+          <p:cNvPr id="12" name="C0"/>
+          <p:cNvSpPr>
+            <a:spLocks noGrp="1"/>
+          </p:cNvSpPr>
+          <p:nvPr>
+            <p:ph type="body" idx="22"/>
+          </p:nvPr>
+        </p:nvSpPr>
+        <p:spPr/>
+        <p:txBody>
+          <a:bodyPr/>
+          <a:lstStyle/>
+          <a:p>
+            <a:pPr/>
+            <a:r>
+              <a:rPr lang="th-TH" dirty="0"/>
+              <a:t>PMP · ประสบการณ์ 15 ปี</a:t>
+            </a:r>
+          </a:p>
+        </p:txBody>
+      </p:sp>
+      <p:sp>
+        <p:nvSpPr>
+          <p:cNvPr id="13" name="D0"/>
+          <p:cNvSpPr>
+            <a:spLocks noGrp="1"/>
+          </p:cNvSpPr>
+          <p:nvPr>
+            <p:ph type="body" idx="23"/>
+          </p:nvPr>
+        </p:nvSpPr>
+        <p:spPr/>
+        <p:txBody>
+          <a:bodyPr/>
+          <a:lstStyle/>
+          <a:p>
+            <a:pPr/>
+            <a:r>
+              <a:rPr lang="th-TH" dirty="0"/>
+              <a:t>คุมแผนและการส่งมอบทั้ง 3 งวด</a:t>
+            </a:r>
+          </a:p>
+          <a:p>
+            <a:pPr/>
+            <a:r>
+              <a:rPr lang="th-TH" dirty="0"/>
+              <a:t>ประสานกับคณะกรรมการตรวจรับ</a:t>
+            </a:r>
+          </a:p>
+        </p:txBody>
+      </p:sp>
+      <p:sp>
+        <p:nvSpPr>
+          <p:cNvPr id="14" name="R1"/>
+          <p:cNvSpPr>
+            <a:spLocks noGrp="1"/>
+          </p:cNvSpPr>
+          <p:nvPr>
+            <p:ph type="body" idx="24"/>
+          </p:nvPr>
+        </p:nvSpPr>
+        <p:spPr/>
+        <p:txBody>
+          <a:bodyPr/>
+          <a:lstStyle/>
+          <a:p>
+            <a:pPr/>
+            <a:r>
+              <a:rPr lang="th-TH" dirty="0"/>
+              <a:t>นักวิเคราะห์ธุรกิจ</a:t>
+            </a:r>
+          </a:p>
+        </p:txBody>
+      </p:sp>
+      <p:sp>
+        <p:nvSpPr>
+          <p:cNvPr id="15" name="N1"/>
+          <p:cNvSpPr>
+            <a:spLocks noGrp="1"/>
+          </p:cNvSpPr>
+          <p:nvPr>
+            <p:ph type="body" idx="25"/>
+          </p:nvPr>
+        </p:nvSpPr>
+        <p:spPr/>
+        <p:txBody>
+          <a:bodyPr/>
+          <a:lstStyle/>
+          <a:p>
+            <a:pPr/>
+            <a:r>
+              <a:rPr lang="th-TH" dirty="0"/>
+              <a:t>ปวีณา ทองดี</a:t>
+            </a:r>
+          </a:p>
+        </p:txBody>
+      </p:sp>
+      <p:sp>
+        <p:nvSpPr>
+          <p:cNvPr id="16" name="C1"/>
+          <p:cNvSpPr>
+            <a:spLocks noGrp="1"/>
+          </p:cNvSpPr>
+          <p:nvPr>
+            <p:ph type="body" idx="26"/>
+          </p:nvPr>
+        </p:nvSpPr>
+        <p:spPr/>
+        <p:txBody>
+          <a:bodyPr/>
+          <a:lstStyle/>
+          <a:p>
+            <a:pPr/>
+            <a:r>
+              <a:rPr lang="th-TH" dirty="0"/>
+              <a:t>CPA · ประสบการณ์ 10 ปี</a:t>
+            </a:r>
+          </a:p>
+        </p:txBody>
+      </p:sp>
+      <p:sp>
+        <p:nvSpPr>
+          <p:cNvPr id="17" name="D1"/>
+          <p:cNvSpPr>
+            <a:spLocks noGrp="1"/>
+          </p:cNvSpPr>
+          <p:nvPr>
+            <p:ph type="body" idx="27"/>
+          </p:nvPr>
+        </p:nvSpPr>
+        <p:spPr/>
+        <p:txBody>
+          <a:bodyPr/>
+          <a:lstStyle/>
+          <a:p>
+            <a:pPr/>
+            <a:r>
+              <a:rPr lang="th-TH" dirty="0"/>
+              <a:t>เก็บความต้องการงานบัญชี</a:t>
+            </a:r>
+          </a:p>
+          <a:p>
+            <a:pPr/>
+            <a:r>
+              <a:rPr lang="th-TH" dirty="0"/>
+              <a:t>ออกแบบผังบัญชีและกฎตรวจ</a:t>
+            </a:r>
+          </a:p>
+        </p:txBody>
+      </p:sp>
+      <p:sp>
+        <p:nvSpPr>
+          <p:cNvPr id="18" name="R2"/>
+          <p:cNvSpPr>
+            <a:spLocks noGrp="1"/>
+          </p:cNvSpPr>
+          <p:nvPr>
+            <p:ph type="body" idx="28"/>
+          </p:nvPr>
+        </p:nvSpPr>
+        <p:spPr/>
+        <p:txBody>
+          <a:bodyPr/>
+          <a:lstStyle/>
+          <a:p>
+            <a:pPr/>
+            <a:r>
+              <a:rPr lang="th-TH" dirty="0"/>
+              <a:t>นักพัฒนาระบบ × 3</a:t>
+            </a:r>
+          </a:p>
+        </p:txBody>
+      </p:sp>
+      <p:sp>
+        <p:nvSpPr>
+          <p:cNvPr id="19" name="N2"/>
+          <p:cNvSpPr>
+            <a:spLocks noGrp="1"/>
+          </p:cNvSpPr>
+          <p:nvPr>
+            <p:ph type="body" idx="29"/>
+          </p:nvPr>
+        </p:nvSpPr>
+        <p:spPr/>
+        <p:txBody>
+          <a:bodyPr/>
+          <a:lstStyle/>
+          <a:p>
+            <a:pPr/>
+            <a:r>
+              <a:rPr lang="th-TH" dirty="0"/>
+              <a:t>ธนพล มีสุข</a:t>
+            </a:r>
+          </a:p>
+        </p:txBody>
+      </p:sp>
+      <p:sp>
+        <p:nvSpPr>
+          <p:cNvPr id="20" name="C2"/>
+          <p:cNvSpPr>
+            <a:spLocks noGrp="1"/>
+          </p:cNvSpPr>
+          <p:nvPr>
+            <p:ph type="body" idx="30"/>
+          </p:nvPr>
+        </p:nvSpPr>
+        <p:spPr/>
+        <p:txBody>
+          <a:bodyPr/>
+          <a:lstStyle/>
+          <a:p>
+            <a:pPr/>
+            <a:r>
+              <a:rPr lang="th-TH" dirty="0"/>
+              <a:t>AWS · ประสบการณ์ 8 ปี</a:t>
+            </a:r>
+          </a:p>
+        </p:txBody>
+      </p:sp>
+      <p:sp>
+        <p:nvSpPr>
+          <p:cNvPr id="21" name="D2"/>
+          <p:cNvSpPr>
+            <a:spLocks noGrp="1"/>
+          </p:cNvSpPr>
+          <p:nvPr>
+            <p:ph type="body" idx="31"/>
+          </p:nvPr>
+        </p:nvSpPr>
+        <p:spPr/>
+        <p:txBody>
+          <a:bodyPr/>
+          <a:lstStyle/>
+          <a:p>
+            <a:pPr/>
+            <a:r>
+              <a:rPr lang="th-TH" dirty="0"/>
+              <a:t>ตัวเชื่อม ERP</a:t>
+            </a:r>
+          </a:p>
+          <a:p>
+            <a:pPr/>
+            <a:r>
+              <a:rPr lang="th-TH" dirty="0"/>
+              <a:t>คิวเอกสารและตัวตรวจกฎ</a:t>
+            </a:r>
+          </a:p>
+        </p:txBody>
+      </p:sp>
+      <p:sp>
+        <p:nvSpPr>
+          <p:cNvPr id="22" name="R3"/>
+          <p:cNvSpPr>
+            <a:spLocks noGrp="1"/>
+          </p:cNvSpPr>
+          <p:nvPr>
+            <p:ph type="body" idx="32"/>
+          </p:nvPr>
+        </p:nvSpPr>
+        <p:spPr/>
+        <p:txBody>
+          <a:bodyPr/>
+          <a:lstStyle/>
+          <a:p>
+            <a:pPr/>
+            <a:r>
+              <a:rPr lang="th-TH" dirty="0"/>
+              <a:t>วิศวกรระบบ</a:t>
+            </a:r>
+          </a:p>
+        </p:txBody>
+      </p:sp>
+      <p:sp>
+        <p:nvSpPr>
+          <p:cNvPr id="23" name="N3"/>
+          <p:cNvSpPr>
+            <a:spLocks noGrp="1"/>
+          </p:cNvSpPr>
+          <p:nvPr>
+            <p:ph type="body" idx="33"/>
+          </p:nvPr>
+        </p:nvSpPr>
+        <p:spPr/>
+        <p:txBody>
+          <a:bodyPr/>
+          <a:lstStyle/>
+          <a:p>
+            <a:pPr/>
+            <a:r>
+              <a:rPr lang="th-TH" dirty="0"/>
+              <a:t>อนุชา แก้วใส</a:t>
+            </a:r>
+          </a:p>
+        </p:txBody>
+      </p:sp>
+      <p:sp>
+        <p:nvSpPr>
+          <p:cNvPr id="24" name="C3"/>
+          <p:cNvSpPr>
+            <a:spLocks noGrp="1"/>
+          </p:cNvSpPr>
+          <p:nvPr>
+            <p:ph type="body" idx="34"/>
+          </p:nvPr>
+        </p:nvSpPr>
+        <p:spPr/>
+        <p:txBody>
+          <a:bodyPr/>
+          <a:lstStyle/>
+          <a:p>
+            <a:pPr/>
+            <a:r>
+              <a:rPr lang="th-TH" dirty="0"/>
+              <a:t>MCSA · ประสบการณ์ 7 ปี</a:t>
+            </a:r>
+          </a:p>
+        </p:txBody>
+      </p:sp>
+      <p:sp>
+        <p:nvSpPr>
+          <p:cNvPr id="25" name="D3"/>
+          <p:cNvSpPr>
+            <a:spLocks noGrp="1"/>
+          </p:cNvSpPr>
+          <p:nvPr>
+            <p:ph type="body" idx="35"/>
+          </p:nvPr>
+        </p:nvSpPr>
+        <p:spPr/>
+        <p:txBody>
+          <a:bodyPr/>
+          <a:lstStyle/>
+          <a:p>
+            <a:pPr/>
+            <a:r>
+              <a:rPr lang="th-TH" dirty="0"/>
+              <a:t>ติดตั้ง PRD และ QA</a:t>
+            </a:r>
+          </a:p>
+          <a:p>
+            <a:pPr/>
+            <a:r>
+              <a:rPr lang="th-TH" dirty="0"/>
+              <a:t>สำรองข้อมูลและกู้คืน</a:t>
+            </a:r>
+          </a:p>
+        </p:txBody>
+      </p:sp>
+      <p:sp>
+        <p:nvSpPr>
+          <p:cNvPr id="26" name="R4"/>
+          <p:cNvSpPr>
+            <a:spLocks noGrp="1"/>
+          </p:cNvSpPr>
+          <p:nvPr>
+            <p:ph type="body" idx="36"/>
+          </p:nvPr>
+        </p:nvSpPr>
+        <p:spPr/>
+        <p:txBody>
+          <a:bodyPr/>
+          <a:lstStyle/>
+          <a:p>
+            <a:pPr/>
+            <a:r>
+              <a:rPr lang="th-TH" dirty="0"/>
+              <a:t>ทดสอบและอบรม</a:t>
+            </a:r>
+          </a:p>
+        </p:txBody>
+      </p:sp>
+      <p:sp>
+        <p:nvSpPr>
+          <p:cNvPr id="27" name="N4"/>
+          <p:cNvSpPr>
+            <a:spLocks noGrp="1"/>
+          </p:cNvSpPr>
+          <p:nvPr>
+            <p:ph type="body" idx="37"/>
+          </p:nvPr>
+        </p:nvSpPr>
+        <p:spPr/>
+        <p:txBody>
+          <a:bodyPr/>
+          <a:lstStyle/>
+          <a:p>
+            <a:pPr/>
+            <a:r>
+              <a:rPr lang="th-TH" dirty="0"/>
+              <a:t>นภา รุ่งเรือง</a:t>
+            </a:r>
+          </a:p>
+        </p:txBody>
+      </p:sp>
+      <p:sp>
+        <p:nvSpPr>
+          <p:cNvPr id="28" name="C4"/>
+          <p:cNvSpPr>
+            <a:spLocks noGrp="1"/>
+          </p:cNvSpPr>
+          <p:nvPr>
+            <p:ph type="body" idx="38"/>
+          </p:nvPr>
+        </p:nvSpPr>
+        <p:spPr/>
+        <p:txBody>
+          <a:bodyPr/>
+          <a:lstStyle/>
+          <a:p>
+            <a:pPr/>
+            <a:r>
+              <a:rPr lang="th-TH" dirty="0"/>
+              <a:t>ISTQB · ประสบการณ์ 5 ปี</a:t>
+            </a:r>
+          </a:p>
+        </p:txBody>
+      </p:sp>
+      <p:sp>
+        <p:nvSpPr>
+          <p:cNvPr id="29" name="D4"/>
+          <p:cNvSpPr>
+            <a:spLocks noGrp="1"/>
+          </p:cNvSpPr>
+          <p:nvPr>
+            <p:ph type="body" idx="39"/>
+          </p:nvPr>
+        </p:nvSpPr>
+        <p:spPr/>
+        <p:txBody>
+          <a:bodyPr/>
+          <a:lstStyle/>
+          <a:p>
+            <a:pPr/>
+            <a:r>
+              <a:rPr lang="th-TH" dirty="0"/>
+              <a:t>ทดสอบรับรองก่อนขึ้นระบบ</a:t>
+            </a:r>
+          </a:p>
+          <a:p>
+            <a:pPr/>
+            <a:r>
+              <a:rPr lang="th-TH" dirty="0"/>
+              <a:t>อบรมผู้ใช้ 2 หลักสูตร</a:t>
+            </a:r>
+          </a:p>
+        </p:txBody>
+      </p:sp>
+    </p:spTree>
+  </p:cSld>
+  <p:clrMapOvr>
+    <a:masterClrMapping/>
+  </p:clrMapOvr>
+</p:sld>
+</file>
+
+<file path=ppt/slides/slide25.xml><?xml version="1.0" encoding="utf-8"?>
+<p:sld xmlns:a="http://schemas.openxmlformats.org/drawingml/2006/main" xmlns:r="http://schemas.openxmlformats.org/officeDocument/2006/relationships" xmlns:p="http://schemas.openxmlformats.org/presentationml/2006/main">
+  <p:cSld name="">
+    <p:spTree>
+      <p:nvGrpSpPr>
+        <p:cNvPr id="1" name=""/>
+        <p:cNvGrpSpPr/>
+        <p:nvPr/>
+      </p:nvGrpSpPr>
+      <p:grpSpPr>
+        <a:xfrm>
+          <a:off x="0" y="0"/>
+          <a:ext cx="0" cy="0"/>
+          <a:chOff x="0" y="0"/>
+          <a:chExt cx="0" cy="0"/>
+        </a:xfrm>
+      </p:grpSpPr>
+      <p:sp>
+        <p:nvSpPr>
+          <p:cNvPr id="2" name="Title"/>
+          <p:cNvSpPr>
+            <a:spLocks noGrp="1"/>
+          </p:cNvSpPr>
+          <p:nvPr>
+            <p:ph type="title"/>
+          </p:nvPr>
+        </p:nvSpPr>
+        <p:spPr/>
+        <p:txBody>
+          <a:bodyPr/>
+          <a:lstStyle/>
+          <a:p>
+            <a:pPr/>
+            <a:r>
+              <a:rPr lang="th-TH" dirty="0"/>
               <a:t>ขอบคุณครับ</a:t>
             </a:r>
           </a:p>

--- a/NCT-Slide-Template-Demo.pptx
+++ b/NCT-Slide-Template-Demo.pptx
@@ -30,6 +30,7 @@
     <p:sldId id="278" r:id="rId24"/>
     <p:sldId id="279" r:id="rId25"/>
     <p:sldId id="280" r:id="rId26"/>
+    <p:sldId id="281" r:id="rId27"/>
   </p:sldIdLst>
   <p:sldSz cx="12192000" cy="6858000"/>
   <p:notesSz cx="6858000" cy="9144000"/>
@@ -23021,6 +23022,2355 @@
 </p:sldLayout>
 </file>
 
+<file path=ppt/slideLayouts/slideLayout26.xml><?xml version="1.0" encoding="utf-8"?>
+<p:sldLayout xmlns:a="http://schemas.openxmlformats.org/drawingml/2006/main" xmlns:r="http://schemas.openxmlformats.org/officeDocument/2006/relationships" xmlns:p="http://schemas.openxmlformats.org/presentationml/2006/main" type="obj" showMasterSp="0" preserve="1">
+  <p:cSld name="26 Client References">
+    <p:bg>
+      <p:bgPr>
+        <a:solidFill>
+          <a:srgbClr val="FFFFFF"/>
+        </a:solidFill>
+        <a:effectLst/>
+      </p:bgPr>
+    </p:bg>
+    <p:spTree>
+      <p:nvGrpSpPr>
+        <p:cNvPr id="1" name=""/>
+        <p:cNvGrpSpPr/>
+        <p:nvPr/>
+      </p:nvGrpSpPr>
+      <p:grpSpPr>
+        <a:xfrm>
+          <a:off x="0" y="0"/>
+          <a:ext cx="0" cy="0"/>
+          <a:chOff x="0" y="0"/>
+          <a:chExt cx="0" cy="0"/>
+        </a:xfrm>
+      </p:grpSpPr>
+      <p:sp>
+        <p:nvSpPr>
+          <p:cNvPr id="10" name="Title Placeholder"/>
+          <p:cNvSpPr>
+            <a:spLocks noGrp="1"/>
+          </p:cNvSpPr>
+          <p:nvPr>
+            <p:ph type="title"/>
+          </p:nvPr>
+        </p:nvSpPr>
+        <p:spPr>
+          <a:xfrm>
+            <a:off x="914400" y="548640"/>
+            <a:ext cx="10363200" cy="731520"/>
+          </a:xfrm>
+          <a:prstGeom prst="rect">
+            <a:avLst/>
+          </a:prstGeom>
+        </p:spPr>
+        <p:txBody>
+          <a:bodyPr wrap="square" anchor="b" lIns="0" tIns="0" rIns="0" bIns="0" rtlCol="0"/>
+          <a:lstStyle>
+            <a:lvl1pPr algn="l" marL="0" indent="0">
+              <a:lnSpc>
+                <a:spcPct val="108000"/>
+              </a:lnSpc>
+              <a:buNone/>
+              <a:defRPr lang="th-TH" sz="3200" b="1" dirty="0">
+                <a:solidFill>
+                  <a:srgbClr val="23436D"/>
+                </a:solidFill>
+                <a:latin typeface="+mj-lt"/>
+                <a:ea typeface="+mj-ea"/>
+                <a:cs typeface="+mj-cs"/>
+              </a:defRPr>
+            </a:lvl1pPr>
+          </a:lstStyle>
+          <a:p>
+            <a:pPr algn="l" marL="0" indent="0">
+              <a:lnSpc>
+                <a:spcPct val="108000"/>
+              </a:lnSpc>
+              <a:buNone/>
+            </a:pPr>
+            <a:r>
+              <a:rPr lang="th-TH" sz="3200" b="1" dirty="0">
+                <a:solidFill>
+                  <a:srgbClr val="23436D"/>
+                </a:solidFill>
+                <a:latin typeface="+mj-lt"/>
+                <a:ea typeface="+mj-ea"/>
+                <a:cs typeface="+mj-cs"/>
+              </a:rPr>
+              <a:t>ชื่อสไลด์</a:t>
+            </a:r>
+          </a:p>
+        </p:txBody>
+      </p:sp>
+      <p:sp>
+        <p:nvSpPr>
+          <p:cNvPr id="11" name="Accent Rule"/>
+          <p:cNvSpPr/>
+          <p:nvPr/>
+        </p:nvSpPr>
+        <p:spPr>
+          <a:xfrm>
+            <a:off x="914400" y="1371600"/>
+            <a:ext cx="548640" cy="45720"/>
+          </a:xfrm>
+          <a:prstGeom prst="rect">
+            <a:avLst/>
+          </a:prstGeom>
+          <a:solidFill>
+            <a:srgbClr val="216B7F"/>
+          </a:solidFill>
+          <a:ln>
+            <a:noFill/>
+          </a:ln>
+        </p:spPr>
+        <p:txBody>
+          <a:bodyPr/>
+          <a:lstStyle/>
+          <a:p>
+            <a:endParaRPr lang="th-TH"/>
+          </a:p>
+        </p:txBody>
+      </p:sp>
+      <p:sp>
+        <p:nvSpPr>
+          <p:cNvPr id="12" name="Intro"/>
+          <p:cNvSpPr>
+            <a:spLocks noGrp="1"/>
+          </p:cNvSpPr>
+          <p:nvPr>
+            <p:ph type="body" idx="1"/>
+          </p:nvPr>
+        </p:nvSpPr>
+        <p:spPr>
+          <a:xfrm>
+            <a:off x="914400" y="1691640"/>
+            <a:ext cx="10363200" cy="274320"/>
+          </a:xfrm>
+          <a:prstGeom prst="rect">
+            <a:avLst/>
+          </a:prstGeom>
+        </p:spPr>
+        <p:txBody>
+          <a:bodyPr wrap="square" anchor="ctr" lIns="0" tIns="0" rIns="0" bIns="0" rtlCol="0"/>
+          <a:lstStyle>
+            <a:lvl1pPr algn="l" marL="0" indent="0">
+              <a:lnSpc>
+                <a:spcPct val="100000"/>
+              </a:lnSpc>
+              <a:buNone/>
+              <a:defRPr lang="th-TH" sz="1400" dirty="0">
+                <a:solidFill>
+                  <a:srgbClr val="5F5F5F"/>
+                </a:solidFill>
+                <a:latin typeface="+mn-lt"/>
+                <a:ea typeface="+mn-ea"/>
+                <a:cs typeface="+mn-cs"/>
+              </a:defRPr>
+            </a:lvl1pPr>
+          </a:lstStyle>
+          <a:p>
+            <a:pPr algn="l" marL="0" indent="0">
+              <a:lnSpc>
+                <a:spcPct val="100000"/>
+              </a:lnSpc>
+              <a:buNone/>
+            </a:pPr>
+            <a:r>
+              <a:rPr lang="th-TH" sz="1400" dirty="0">
+                <a:solidFill>
+                  <a:srgbClr val="5F5F5F"/>
+                </a:solidFill>
+                <a:latin typeface="+mn-lt"/>
+                <a:ea typeface="+mn-ea"/>
+                <a:cs typeface="+mn-cs"/>
+              </a:rPr>
+              <a:t>คัดมาจากลูกค้าทั้งหมดกี่ราย · เกณฑ์ที่ใช้คัด</a:t>
+            </a:r>
+          </a:p>
+        </p:txBody>
+      </p:sp>
+      <p:sp>
+        <p:nvSpPr>
+          <p:cNvPr id="13" name="Tile 1"/>
+          <p:cNvSpPr/>
+          <p:nvPr/>
+        </p:nvSpPr>
+        <p:spPr>
+          <a:xfrm>
+            <a:off x="914400" y="2057400"/>
+            <a:ext cx="2453640" cy="914400"/>
+          </a:xfrm>
+          <a:prstGeom prst="rect">
+            <a:avLst/>
+          </a:prstGeom>
+          <a:solidFill>
+            <a:srgbClr val="FFFFFF"/>
+          </a:solidFill>
+          <a:ln w="9525">
+            <a:solidFill>
+              <a:srgbClr val="E5E5E5"/>
+            </a:solidFill>
+          </a:ln>
+        </p:spPr>
+        <p:txBody>
+          <a:bodyPr/>
+          <a:lstStyle/>
+          <a:p>
+            <a:endParaRPr lang="th-TH"/>
+          </a:p>
+        </p:txBody>
+      </p:sp>
+      <p:sp>
+        <p:nvSpPr>
+          <p:cNvPr id="14" name="Tile 1 Logo"/>
+          <p:cNvSpPr>
+            <a:spLocks noGrp="1"/>
+          </p:cNvSpPr>
+          <p:nvPr>
+            <p:ph idx="20"/>
+          </p:nvPr>
+        </p:nvSpPr>
+        <p:spPr>
+          <a:xfrm>
+            <a:off x="1051560" y="2148840"/>
+            <a:ext cx="2179320" cy="502920"/>
+          </a:xfrm>
+          <a:prstGeom prst="rect">
+            <a:avLst/>
+          </a:prstGeom>
+        </p:spPr>
+        <p:txBody>
+          <a:bodyPr wrap="square" anchor="ctr" lIns="0" tIns="0" rIns="0" bIns="0" rtlCol="0"/>
+          <a:lstStyle>
+            <a:lvl1pPr algn="ctr" marL="0" indent="0">
+              <a:lnSpc>
+                <a:spcPct val="100000"/>
+              </a:lnSpc>
+              <a:buNone/>
+              <a:defRPr lang="th-TH" sz="1600" b="1" dirty="0">
+                <a:solidFill>
+                  <a:srgbClr val="333333"/>
+                </a:solidFill>
+                <a:latin typeface="+mj-lt"/>
+                <a:ea typeface="+mj-ea"/>
+                <a:cs typeface="+mj-cs"/>
+              </a:defRPr>
+            </a:lvl1pPr>
+          </a:lstStyle>
+          <a:p>
+            <a:pPr algn="ctr" marL="0" indent="0">
+              <a:lnSpc>
+                <a:spcPct val="100000"/>
+              </a:lnSpc>
+              <a:buNone/>
+            </a:pPr>
+            <a:r>
+              <a:rPr lang="th-TH" sz="1600" b="1" dirty="0">
+                <a:solidFill>
+                  <a:srgbClr val="333333"/>
+                </a:solidFill>
+                <a:latin typeface="+mj-lt"/>
+                <a:ea typeface="+mj-ea"/>
+                <a:cs typeface="+mj-cs"/>
+              </a:rPr>
+              <a:t>โลโก้ หรือชื่อลูกค้า</a:t>
+            </a:r>
+          </a:p>
+        </p:txBody>
+      </p:sp>
+      <p:sp>
+        <p:nvSpPr>
+          <p:cNvPr id="15" name="Tile 1 Caption"/>
+          <p:cNvSpPr>
+            <a:spLocks noGrp="1"/>
+          </p:cNvSpPr>
+          <p:nvPr>
+            <p:ph type="body" idx="21"/>
+          </p:nvPr>
+        </p:nvSpPr>
+        <p:spPr>
+          <a:xfrm>
+            <a:off x="1005840" y="2660904"/>
+            <a:ext cx="2270760" cy="219456"/>
+          </a:xfrm>
+          <a:prstGeom prst="rect">
+            <a:avLst/>
+          </a:prstGeom>
+        </p:spPr>
+        <p:txBody>
+          <a:bodyPr wrap="square" anchor="ctr" lIns="0" tIns="0" rIns="0" bIns="0" rtlCol="0"/>
+          <a:lstStyle>
+            <a:lvl1pPr algn="ctr" marL="0" indent="0">
+              <a:lnSpc>
+                <a:spcPct val="100000"/>
+              </a:lnSpc>
+              <a:buNone/>
+              <a:defRPr lang="th-TH" sz="1200" dirty="0">
+                <a:solidFill>
+                  <a:srgbClr val="5F5F5F"/>
+                </a:solidFill>
+                <a:latin typeface="+mn-lt"/>
+                <a:ea typeface="+mn-ea"/>
+                <a:cs typeface="+mn-cs"/>
+              </a:defRPr>
+            </a:lvl1pPr>
+          </a:lstStyle>
+          <a:p>
+            <a:pPr algn="ctr" marL="0" indent="0">
+              <a:lnSpc>
+                <a:spcPct val="100000"/>
+              </a:lnSpc>
+              <a:buNone/>
+            </a:pPr>
+            <a:r>
+              <a:rPr lang="th-TH" sz="1200" dirty="0">
+                <a:solidFill>
+                  <a:srgbClr val="5F5F5F"/>
+                </a:solidFill>
+                <a:latin typeface="+mn-lt"/>
+                <a:ea typeface="+mn-ea"/>
+                <a:cs typeface="+mn-cs"/>
+              </a:rPr>
+              <a:t>อุตสาหกรรม · งานที่ทำ</a:t>
+            </a:r>
+          </a:p>
+        </p:txBody>
+      </p:sp>
+      <p:sp>
+        <p:nvSpPr>
+          <p:cNvPr id="16" name="Tile 2"/>
+          <p:cNvSpPr/>
+          <p:nvPr/>
+        </p:nvSpPr>
+        <p:spPr>
+          <a:xfrm>
+            <a:off x="3550920" y="2057400"/>
+            <a:ext cx="2453640" cy="914400"/>
+          </a:xfrm>
+          <a:prstGeom prst="rect">
+            <a:avLst/>
+          </a:prstGeom>
+          <a:solidFill>
+            <a:srgbClr val="FFFFFF"/>
+          </a:solidFill>
+          <a:ln w="9525">
+            <a:solidFill>
+              <a:srgbClr val="E5E5E5"/>
+            </a:solidFill>
+          </a:ln>
+        </p:spPr>
+        <p:txBody>
+          <a:bodyPr/>
+          <a:lstStyle/>
+          <a:p>
+            <a:endParaRPr lang="th-TH"/>
+          </a:p>
+        </p:txBody>
+      </p:sp>
+      <p:sp>
+        <p:nvSpPr>
+          <p:cNvPr id="17" name="Tile 2 Logo"/>
+          <p:cNvSpPr>
+            <a:spLocks noGrp="1"/>
+          </p:cNvSpPr>
+          <p:nvPr>
+            <p:ph idx="22"/>
+          </p:nvPr>
+        </p:nvSpPr>
+        <p:spPr>
+          <a:xfrm>
+            <a:off x="3688080" y="2148840"/>
+            <a:ext cx="2179320" cy="502920"/>
+          </a:xfrm>
+          <a:prstGeom prst="rect">
+            <a:avLst/>
+          </a:prstGeom>
+        </p:spPr>
+        <p:txBody>
+          <a:bodyPr wrap="square" anchor="ctr" lIns="0" tIns="0" rIns="0" bIns="0" rtlCol="0"/>
+          <a:lstStyle>
+            <a:lvl1pPr algn="ctr" marL="0" indent="0">
+              <a:lnSpc>
+                <a:spcPct val="100000"/>
+              </a:lnSpc>
+              <a:buNone/>
+              <a:defRPr lang="th-TH" sz="1600" b="1" dirty="0">
+                <a:solidFill>
+                  <a:srgbClr val="333333"/>
+                </a:solidFill>
+                <a:latin typeface="+mj-lt"/>
+                <a:ea typeface="+mj-ea"/>
+                <a:cs typeface="+mj-cs"/>
+              </a:defRPr>
+            </a:lvl1pPr>
+          </a:lstStyle>
+          <a:p>
+            <a:pPr algn="ctr" marL="0" indent="0">
+              <a:lnSpc>
+                <a:spcPct val="100000"/>
+              </a:lnSpc>
+              <a:buNone/>
+            </a:pPr>
+            <a:r>
+              <a:rPr lang="th-TH" sz="1600" b="1" dirty="0">
+                <a:solidFill>
+                  <a:srgbClr val="333333"/>
+                </a:solidFill>
+                <a:latin typeface="+mj-lt"/>
+                <a:ea typeface="+mj-ea"/>
+                <a:cs typeface="+mj-cs"/>
+              </a:rPr>
+              <a:t>โลโก้ หรือชื่อลูกค้า</a:t>
+            </a:r>
+          </a:p>
+        </p:txBody>
+      </p:sp>
+      <p:sp>
+        <p:nvSpPr>
+          <p:cNvPr id="18" name="Tile 2 Caption"/>
+          <p:cNvSpPr>
+            <a:spLocks noGrp="1"/>
+          </p:cNvSpPr>
+          <p:nvPr>
+            <p:ph type="body" idx="23"/>
+          </p:nvPr>
+        </p:nvSpPr>
+        <p:spPr>
+          <a:xfrm>
+            <a:off x="3642360" y="2660904"/>
+            <a:ext cx="2270760" cy="219456"/>
+          </a:xfrm>
+          <a:prstGeom prst="rect">
+            <a:avLst/>
+          </a:prstGeom>
+        </p:spPr>
+        <p:txBody>
+          <a:bodyPr wrap="square" anchor="ctr" lIns="0" tIns="0" rIns="0" bIns="0" rtlCol="0"/>
+          <a:lstStyle>
+            <a:lvl1pPr algn="ctr" marL="0" indent="0">
+              <a:lnSpc>
+                <a:spcPct val="100000"/>
+              </a:lnSpc>
+              <a:buNone/>
+              <a:defRPr lang="th-TH" sz="1200" dirty="0">
+                <a:solidFill>
+                  <a:srgbClr val="5F5F5F"/>
+                </a:solidFill>
+                <a:latin typeface="+mn-lt"/>
+                <a:ea typeface="+mn-ea"/>
+                <a:cs typeface="+mn-cs"/>
+              </a:defRPr>
+            </a:lvl1pPr>
+          </a:lstStyle>
+          <a:p>
+            <a:pPr algn="ctr" marL="0" indent="0">
+              <a:lnSpc>
+                <a:spcPct val="100000"/>
+              </a:lnSpc>
+              <a:buNone/>
+            </a:pPr>
+            <a:r>
+              <a:rPr lang="th-TH" sz="1200" dirty="0">
+                <a:solidFill>
+                  <a:srgbClr val="5F5F5F"/>
+                </a:solidFill>
+                <a:latin typeface="+mn-lt"/>
+                <a:ea typeface="+mn-ea"/>
+                <a:cs typeface="+mn-cs"/>
+              </a:rPr>
+              <a:t>อุตสาหกรรม · งานที่ทำ</a:t>
+            </a:r>
+          </a:p>
+        </p:txBody>
+      </p:sp>
+      <p:sp>
+        <p:nvSpPr>
+          <p:cNvPr id="19" name="Tile 3"/>
+          <p:cNvSpPr/>
+          <p:nvPr/>
+        </p:nvSpPr>
+        <p:spPr>
+          <a:xfrm>
+            <a:off x="6187440" y="2057400"/>
+            <a:ext cx="2453640" cy="914400"/>
+          </a:xfrm>
+          <a:prstGeom prst="rect">
+            <a:avLst/>
+          </a:prstGeom>
+          <a:solidFill>
+            <a:srgbClr val="FFFFFF"/>
+          </a:solidFill>
+          <a:ln w="9525">
+            <a:solidFill>
+              <a:srgbClr val="E5E5E5"/>
+            </a:solidFill>
+          </a:ln>
+        </p:spPr>
+        <p:txBody>
+          <a:bodyPr/>
+          <a:lstStyle/>
+          <a:p>
+            <a:endParaRPr lang="th-TH"/>
+          </a:p>
+        </p:txBody>
+      </p:sp>
+      <p:sp>
+        <p:nvSpPr>
+          <p:cNvPr id="20" name="Tile 3 Logo"/>
+          <p:cNvSpPr>
+            <a:spLocks noGrp="1"/>
+          </p:cNvSpPr>
+          <p:nvPr>
+            <p:ph idx="24"/>
+          </p:nvPr>
+        </p:nvSpPr>
+        <p:spPr>
+          <a:xfrm>
+            <a:off x="6324600" y="2148840"/>
+            <a:ext cx="2179320" cy="502920"/>
+          </a:xfrm>
+          <a:prstGeom prst="rect">
+            <a:avLst/>
+          </a:prstGeom>
+        </p:spPr>
+        <p:txBody>
+          <a:bodyPr wrap="square" anchor="ctr" lIns="0" tIns="0" rIns="0" bIns="0" rtlCol="0"/>
+          <a:lstStyle>
+            <a:lvl1pPr algn="ctr" marL="0" indent="0">
+              <a:lnSpc>
+                <a:spcPct val="100000"/>
+              </a:lnSpc>
+              <a:buNone/>
+              <a:defRPr lang="th-TH" sz="1600" b="1" dirty="0">
+                <a:solidFill>
+                  <a:srgbClr val="333333"/>
+                </a:solidFill>
+                <a:latin typeface="+mj-lt"/>
+                <a:ea typeface="+mj-ea"/>
+                <a:cs typeface="+mj-cs"/>
+              </a:defRPr>
+            </a:lvl1pPr>
+          </a:lstStyle>
+          <a:p>
+            <a:pPr algn="ctr" marL="0" indent="0">
+              <a:lnSpc>
+                <a:spcPct val="100000"/>
+              </a:lnSpc>
+              <a:buNone/>
+            </a:pPr>
+            <a:r>
+              <a:rPr lang="th-TH" sz="1600" b="1" dirty="0">
+                <a:solidFill>
+                  <a:srgbClr val="333333"/>
+                </a:solidFill>
+                <a:latin typeface="+mj-lt"/>
+                <a:ea typeface="+mj-ea"/>
+                <a:cs typeface="+mj-cs"/>
+              </a:rPr>
+              <a:t>โลโก้ หรือชื่อลูกค้า</a:t>
+            </a:r>
+          </a:p>
+        </p:txBody>
+      </p:sp>
+      <p:sp>
+        <p:nvSpPr>
+          <p:cNvPr id="21" name="Tile 3 Caption"/>
+          <p:cNvSpPr>
+            <a:spLocks noGrp="1"/>
+          </p:cNvSpPr>
+          <p:nvPr>
+            <p:ph type="body" idx="25"/>
+          </p:nvPr>
+        </p:nvSpPr>
+        <p:spPr>
+          <a:xfrm>
+            <a:off x="6278880" y="2660904"/>
+            <a:ext cx="2270760" cy="219456"/>
+          </a:xfrm>
+          <a:prstGeom prst="rect">
+            <a:avLst/>
+          </a:prstGeom>
+        </p:spPr>
+        <p:txBody>
+          <a:bodyPr wrap="square" anchor="ctr" lIns="0" tIns="0" rIns="0" bIns="0" rtlCol="0"/>
+          <a:lstStyle>
+            <a:lvl1pPr algn="ctr" marL="0" indent="0">
+              <a:lnSpc>
+                <a:spcPct val="100000"/>
+              </a:lnSpc>
+              <a:buNone/>
+              <a:defRPr lang="th-TH" sz="1200" dirty="0">
+                <a:solidFill>
+                  <a:srgbClr val="5F5F5F"/>
+                </a:solidFill>
+                <a:latin typeface="+mn-lt"/>
+                <a:ea typeface="+mn-ea"/>
+                <a:cs typeface="+mn-cs"/>
+              </a:defRPr>
+            </a:lvl1pPr>
+          </a:lstStyle>
+          <a:p>
+            <a:pPr algn="ctr" marL="0" indent="0">
+              <a:lnSpc>
+                <a:spcPct val="100000"/>
+              </a:lnSpc>
+              <a:buNone/>
+            </a:pPr>
+            <a:r>
+              <a:rPr lang="th-TH" sz="1200" dirty="0">
+                <a:solidFill>
+                  <a:srgbClr val="5F5F5F"/>
+                </a:solidFill>
+                <a:latin typeface="+mn-lt"/>
+                <a:ea typeface="+mn-ea"/>
+                <a:cs typeface="+mn-cs"/>
+              </a:rPr>
+              <a:t>อุตสาหกรรม · งานที่ทำ</a:t>
+            </a:r>
+          </a:p>
+        </p:txBody>
+      </p:sp>
+      <p:sp>
+        <p:nvSpPr>
+          <p:cNvPr id="22" name="Tile 4"/>
+          <p:cNvSpPr/>
+          <p:nvPr/>
+        </p:nvSpPr>
+        <p:spPr>
+          <a:xfrm>
+            <a:off x="8823960" y="2057400"/>
+            <a:ext cx="2453640" cy="914400"/>
+          </a:xfrm>
+          <a:prstGeom prst="rect">
+            <a:avLst/>
+          </a:prstGeom>
+          <a:solidFill>
+            <a:srgbClr val="FFFFFF"/>
+          </a:solidFill>
+          <a:ln w="9525">
+            <a:solidFill>
+              <a:srgbClr val="E5E5E5"/>
+            </a:solidFill>
+          </a:ln>
+        </p:spPr>
+        <p:txBody>
+          <a:bodyPr/>
+          <a:lstStyle/>
+          <a:p>
+            <a:endParaRPr lang="th-TH"/>
+          </a:p>
+        </p:txBody>
+      </p:sp>
+      <p:sp>
+        <p:nvSpPr>
+          <p:cNvPr id="23" name="Tile 4 Logo"/>
+          <p:cNvSpPr>
+            <a:spLocks noGrp="1"/>
+          </p:cNvSpPr>
+          <p:nvPr>
+            <p:ph idx="26"/>
+          </p:nvPr>
+        </p:nvSpPr>
+        <p:spPr>
+          <a:xfrm>
+            <a:off x="8961120" y="2148840"/>
+            <a:ext cx="2179320" cy="502920"/>
+          </a:xfrm>
+          <a:prstGeom prst="rect">
+            <a:avLst/>
+          </a:prstGeom>
+        </p:spPr>
+        <p:txBody>
+          <a:bodyPr wrap="square" anchor="ctr" lIns="0" tIns="0" rIns="0" bIns="0" rtlCol="0"/>
+          <a:lstStyle>
+            <a:lvl1pPr algn="ctr" marL="0" indent="0">
+              <a:lnSpc>
+                <a:spcPct val="100000"/>
+              </a:lnSpc>
+              <a:buNone/>
+              <a:defRPr lang="th-TH" sz="1600" b="1" dirty="0">
+                <a:solidFill>
+                  <a:srgbClr val="333333"/>
+                </a:solidFill>
+                <a:latin typeface="+mj-lt"/>
+                <a:ea typeface="+mj-ea"/>
+                <a:cs typeface="+mj-cs"/>
+              </a:defRPr>
+            </a:lvl1pPr>
+          </a:lstStyle>
+          <a:p>
+            <a:pPr algn="ctr" marL="0" indent="0">
+              <a:lnSpc>
+                <a:spcPct val="100000"/>
+              </a:lnSpc>
+              <a:buNone/>
+            </a:pPr>
+            <a:r>
+              <a:rPr lang="th-TH" sz="1600" b="1" dirty="0">
+                <a:solidFill>
+                  <a:srgbClr val="333333"/>
+                </a:solidFill>
+                <a:latin typeface="+mj-lt"/>
+                <a:ea typeface="+mj-ea"/>
+                <a:cs typeface="+mj-cs"/>
+              </a:rPr>
+              <a:t>โลโก้ หรือชื่อลูกค้า</a:t>
+            </a:r>
+          </a:p>
+        </p:txBody>
+      </p:sp>
+      <p:sp>
+        <p:nvSpPr>
+          <p:cNvPr id="24" name="Tile 4 Caption"/>
+          <p:cNvSpPr>
+            <a:spLocks noGrp="1"/>
+          </p:cNvSpPr>
+          <p:nvPr>
+            <p:ph type="body" idx="27"/>
+          </p:nvPr>
+        </p:nvSpPr>
+        <p:spPr>
+          <a:xfrm>
+            <a:off x="8915400" y="2660904"/>
+            <a:ext cx="2270760" cy="219456"/>
+          </a:xfrm>
+          <a:prstGeom prst="rect">
+            <a:avLst/>
+          </a:prstGeom>
+        </p:spPr>
+        <p:txBody>
+          <a:bodyPr wrap="square" anchor="ctr" lIns="0" tIns="0" rIns="0" bIns="0" rtlCol="0"/>
+          <a:lstStyle>
+            <a:lvl1pPr algn="ctr" marL="0" indent="0">
+              <a:lnSpc>
+                <a:spcPct val="100000"/>
+              </a:lnSpc>
+              <a:buNone/>
+              <a:defRPr lang="th-TH" sz="1200" dirty="0">
+                <a:solidFill>
+                  <a:srgbClr val="5F5F5F"/>
+                </a:solidFill>
+                <a:latin typeface="+mn-lt"/>
+                <a:ea typeface="+mn-ea"/>
+                <a:cs typeface="+mn-cs"/>
+              </a:defRPr>
+            </a:lvl1pPr>
+          </a:lstStyle>
+          <a:p>
+            <a:pPr algn="ctr" marL="0" indent="0">
+              <a:lnSpc>
+                <a:spcPct val="100000"/>
+              </a:lnSpc>
+              <a:buNone/>
+            </a:pPr>
+            <a:r>
+              <a:rPr lang="th-TH" sz="1200" dirty="0">
+                <a:solidFill>
+                  <a:srgbClr val="5F5F5F"/>
+                </a:solidFill>
+                <a:latin typeface="+mn-lt"/>
+                <a:ea typeface="+mn-ea"/>
+                <a:cs typeface="+mn-cs"/>
+              </a:rPr>
+              <a:t>อุตสาหกรรม · งานที่ทำ</a:t>
+            </a:r>
+          </a:p>
+        </p:txBody>
+      </p:sp>
+      <p:sp>
+        <p:nvSpPr>
+          <p:cNvPr id="25" name="Tile 5"/>
+          <p:cNvSpPr/>
+          <p:nvPr/>
+        </p:nvSpPr>
+        <p:spPr>
+          <a:xfrm>
+            <a:off x="914400" y="3154680"/>
+            <a:ext cx="2453640" cy="914400"/>
+          </a:xfrm>
+          <a:prstGeom prst="rect">
+            <a:avLst/>
+          </a:prstGeom>
+          <a:solidFill>
+            <a:srgbClr val="FFFFFF"/>
+          </a:solidFill>
+          <a:ln w="9525">
+            <a:solidFill>
+              <a:srgbClr val="E5E5E5"/>
+            </a:solidFill>
+          </a:ln>
+        </p:spPr>
+        <p:txBody>
+          <a:bodyPr/>
+          <a:lstStyle/>
+          <a:p>
+            <a:endParaRPr lang="th-TH"/>
+          </a:p>
+        </p:txBody>
+      </p:sp>
+      <p:sp>
+        <p:nvSpPr>
+          <p:cNvPr id="26" name="Tile 5 Logo"/>
+          <p:cNvSpPr>
+            <a:spLocks noGrp="1"/>
+          </p:cNvSpPr>
+          <p:nvPr>
+            <p:ph idx="28"/>
+          </p:nvPr>
+        </p:nvSpPr>
+        <p:spPr>
+          <a:xfrm>
+            <a:off x="1051560" y="3246120"/>
+            <a:ext cx="2179320" cy="502920"/>
+          </a:xfrm>
+          <a:prstGeom prst="rect">
+            <a:avLst/>
+          </a:prstGeom>
+        </p:spPr>
+        <p:txBody>
+          <a:bodyPr wrap="square" anchor="ctr" lIns="0" tIns="0" rIns="0" bIns="0" rtlCol="0"/>
+          <a:lstStyle>
+            <a:lvl1pPr algn="ctr" marL="0" indent="0">
+              <a:lnSpc>
+                <a:spcPct val="100000"/>
+              </a:lnSpc>
+              <a:buNone/>
+              <a:defRPr lang="th-TH" sz="1600" b="1" dirty="0">
+                <a:solidFill>
+                  <a:srgbClr val="333333"/>
+                </a:solidFill>
+                <a:latin typeface="+mj-lt"/>
+                <a:ea typeface="+mj-ea"/>
+                <a:cs typeface="+mj-cs"/>
+              </a:defRPr>
+            </a:lvl1pPr>
+          </a:lstStyle>
+          <a:p>
+            <a:pPr algn="ctr" marL="0" indent="0">
+              <a:lnSpc>
+                <a:spcPct val="100000"/>
+              </a:lnSpc>
+              <a:buNone/>
+            </a:pPr>
+            <a:r>
+              <a:rPr lang="th-TH" sz="1600" b="1" dirty="0">
+                <a:solidFill>
+                  <a:srgbClr val="333333"/>
+                </a:solidFill>
+                <a:latin typeface="+mj-lt"/>
+                <a:ea typeface="+mj-ea"/>
+                <a:cs typeface="+mj-cs"/>
+              </a:rPr>
+              <a:t>โลโก้ หรือชื่อลูกค้า</a:t>
+            </a:r>
+          </a:p>
+        </p:txBody>
+      </p:sp>
+      <p:sp>
+        <p:nvSpPr>
+          <p:cNvPr id="27" name="Tile 5 Caption"/>
+          <p:cNvSpPr>
+            <a:spLocks noGrp="1"/>
+          </p:cNvSpPr>
+          <p:nvPr>
+            <p:ph type="body" idx="29"/>
+          </p:nvPr>
+        </p:nvSpPr>
+        <p:spPr>
+          <a:xfrm>
+            <a:off x="1005840" y="3758184"/>
+            <a:ext cx="2270760" cy="219456"/>
+          </a:xfrm>
+          <a:prstGeom prst="rect">
+            <a:avLst/>
+          </a:prstGeom>
+        </p:spPr>
+        <p:txBody>
+          <a:bodyPr wrap="square" anchor="ctr" lIns="0" tIns="0" rIns="0" bIns="0" rtlCol="0"/>
+          <a:lstStyle>
+            <a:lvl1pPr algn="ctr" marL="0" indent="0">
+              <a:lnSpc>
+                <a:spcPct val="100000"/>
+              </a:lnSpc>
+              <a:buNone/>
+              <a:defRPr lang="th-TH" sz="1200" dirty="0">
+                <a:solidFill>
+                  <a:srgbClr val="5F5F5F"/>
+                </a:solidFill>
+                <a:latin typeface="+mn-lt"/>
+                <a:ea typeface="+mn-ea"/>
+                <a:cs typeface="+mn-cs"/>
+              </a:defRPr>
+            </a:lvl1pPr>
+          </a:lstStyle>
+          <a:p>
+            <a:pPr algn="ctr" marL="0" indent="0">
+              <a:lnSpc>
+                <a:spcPct val="100000"/>
+              </a:lnSpc>
+              <a:buNone/>
+            </a:pPr>
+            <a:r>
+              <a:rPr lang="th-TH" sz="1200" dirty="0">
+                <a:solidFill>
+                  <a:srgbClr val="5F5F5F"/>
+                </a:solidFill>
+                <a:latin typeface="+mn-lt"/>
+                <a:ea typeface="+mn-ea"/>
+                <a:cs typeface="+mn-cs"/>
+              </a:rPr>
+              <a:t>อุตสาหกรรม · งานที่ทำ</a:t>
+            </a:r>
+          </a:p>
+        </p:txBody>
+      </p:sp>
+      <p:sp>
+        <p:nvSpPr>
+          <p:cNvPr id="28" name="Tile 6"/>
+          <p:cNvSpPr/>
+          <p:nvPr/>
+        </p:nvSpPr>
+        <p:spPr>
+          <a:xfrm>
+            <a:off x="3550920" y="3154680"/>
+            <a:ext cx="2453640" cy="914400"/>
+          </a:xfrm>
+          <a:prstGeom prst="rect">
+            <a:avLst/>
+          </a:prstGeom>
+          <a:solidFill>
+            <a:srgbClr val="FFFFFF"/>
+          </a:solidFill>
+          <a:ln w="9525">
+            <a:solidFill>
+              <a:srgbClr val="E5E5E5"/>
+            </a:solidFill>
+          </a:ln>
+        </p:spPr>
+        <p:txBody>
+          <a:bodyPr/>
+          <a:lstStyle/>
+          <a:p>
+            <a:endParaRPr lang="th-TH"/>
+          </a:p>
+        </p:txBody>
+      </p:sp>
+      <p:sp>
+        <p:nvSpPr>
+          <p:cNvPr id="29" name="Tile 6 Logo"/>
+          <p:cNvSpPr>
+            <a:spLocks noGrp="1"/>
+          </p:cNvSpPr>
+          <p:nvPr>
+            <p:ph idx="30"/>
+          </p:nvPr>
+        </p:nvSpPr>
+        <p:spPr>
+          <a:xfrm>
+            <a:off x="3688080" y="3246120"/>
+            <a:ext cx="2179320" cy="502920"/>
+          </a:xfrm>
+          <a:prstGeom prst="rect">
+            <a:avLst/>
+          </a:prstGeom>
+        </p:spPr>
+        <p:txBody>
+          <a:bodyPr wrap="square" anchor="ctr" lIns="0" tIns="0" rIns="0" bIns="0" rtlCol="0"/>
+          <a:lstStyle>
+            <a:lvl1pPr algn="ctr" marL="0" indent="0">
+              <a:lnSpc>
+                <a:spcPct val="100000"/>
+              </a:lnSpc>
+              <a:buNone/>
+              <a:defRPr lang="th-TH" sz="1600" b="1" dirty="0">
+                <a:solidFill>
+                  <a:srgbClr val="333333"/>
+                </a:solidFill>
+                <a:latin typeface="+mj-lt"/>
+                <a:ea typeface="+mj-ea"/>
+                <a:cs typeface="+mj-cs"/>
+              </a:defRPr>
+            </a:lvl1pPr>
+          </a:lstStyle>
+          <a:p>
+            <a:pPr algn="ctr" marL="0" indent="0">
+              <a:lnSpc>
+                <a:spcPct val="100000"/>
+              </a:lnSpc>
+              <a:buNone/>
+            </a:pPr>
+            <a:r>
+              <a:rPr lang="th-TH" sz="1600" b="1" dirty="0">
+                <a:solidFill>
+                  <a:srgbClr val="333333"/>
+                </a:solidFill>
+                <a:latin typeface="+mj-lt"/>
+                <a:ea typeface="+mj-ea"/>
+                <a:cs typeface="+mj-cs"/>
+              </a:rPr>
+              <a:t>โลโก้ หรือชื่อลูกค้า</a:t>
+            </a:r>
+          </a:p>
+        </p:txBody>
+      </p:sp>
+      <p:sp>
+        <p:nvSpPr>
+          <p:cNvPr id="30" name="Tile 6 Caption"/>
+          <p:cNvSpPr>
+            <a:spLocks noGrp="1"/>
+          </p:cNvSpPr>
+          <p:nvPr>
+            <p:ph type="body" idx="31"/>
+          </p:nvPr>
+        </p:nvSpPr>
+        <p:spPr>
+          <a:xfrm>
+            <a:off x="3642360" y="3758184"/>
+            <a:ext cx="2270760" cy="219456"/>
+          </a:xfrm>
+          <a:prstGeom prst="rect">
+            <a:avLst/>
+          </a:prstGeom>
+        </p:spPr>
+        <p:txBody>
+          <a:bodyPr wrap="square" anchor="ctr" lIns="0" tIns="0" rIns="0" bIns="0" rtlCol="0"/>
+          <a:lstStyle>
+            <a:lvl1pPr algn="ctr" marL="0" indent="0">
+              <a:lnSpc>
+                <a:spcPct val="100000"/>
+              </a:lnSpc>
+              <a:buNone/>
+              <a:defRPr lang="th-TH" sz="1200" dirty="0">
+                <a:solidFill>
+                  <a:srgbClr val="5F5F5F"/>
+                </a:solidFill>
+                <a:latin typeface="+mn-lt"/>
+                <a:ea typeface="+mn-ea"/>
+                <a:cs typeface="+mn-cs"/>
+              </a:defRPr>
+            </a:lvl1pPr>
+          </a:lstStyle>
+          <a:p>
+            <a:pPr algn="ctr" marL="0" indent="0">
+              <a:lnSpc>
+                <a:spcPct val="100000"/>
+              </a:lnSpc>
+              <a:buNone/>
+            </a:pPr>
+            <a:r>
+              <a:rPr lang="th-TH" sz="1200" dirty="0">
+                <a:solidFill>
+                  <a:srgbClr val="5F5F5F"/>
+                </a:solidFill>
+                <a:latin typeface="+mn-lt"/>
+                <a:ea typeface="+mn-ea"/>
+                <a:cs typeface="+mn-cs"/>
+              </a:rPr>
+              <a:t>อุตสาหกรรม · งานที่ทำ</a:t>
+            </a:r>
+          </a:p>
+        </p:txBody>
+      </p:sp>
+      <p:sp>
+        <p:nvSpPr>
+          <p:cNvPr id="31" name="Tile 7"/>
+          <p:cNvSpPr/>
+          <p:nvPr/>
+        </p:nvSpPr>
+        <p:spPr>
+          <a:xfrm>
+            <a:off x="6187440" y="3154680"/>
+            <a:ext cx="2453640" cy="914400"/>
+          </a:xfrm>
+          <a:prstGeom prst="rect">
+            <a:avLst/>
+          </a:prstGeom>
+          <a:solidFill>
+            <a:srgbClr val="FFFFFF"/>
+          </a:solidFill>
+          <a:ln w="9525">
+            <a:solidFill>
+              <a:srgbClr val="E5E5E5"/>
+            </a:solidFill>
+          </a:ln>
+        </p:spPr>
+        <p:txBody>
+          <a:bodyPr/>
+          <a:lstStyle/>
+          <a:p>
+            <a:endParaRPr lang="th-TH"/>
+          </a:p>
+        </p:txBody>
+      </p:sp>
+      <p:sp>
+        <p:nvSpPr>
+          <p:cNvPr id="32" name="Tile 7 Logo"/>
+          <p:cNvSpPr>
+            <a:spLocks noGrp="1"/>
+          </p:cNvSpPr>
+          <p:nvPr>
+            <p:ph idx="32"/>
+          </p:nvPr>
+        </p:nvSpPr>
+        <p:spPr>
+          <a:xfrm>
+            <a:off x="6324600" y="3246120"/>
+            <a:ext cx="2179320" cy="502920"/>
+          </a:xfrm>
+          <a:prstGeom prst="rect">
+            <a:avLst/>
+          </a:prstGeom>
+        </p:spPr>
+        <p:txBody>
+          <a:bodyPr wrap="square" anchor="ctr" lIns="0" tIns="0" rIns="0" bIns="0" rtlCol="0"/>
+          <a:lstStyle>
+            <a:lvl1pPr algn="ctr" marL="0" indent="0">
+              <a:lnSpc>
+                <a:spcPct val="100000"/>
+              </a:lnSpc>
+              <a:buNone/>
+              <a:defRPr lang="th-TH" sz="1600" b="1" dirty="0">
+                <a:solidFill>
+                  <a:srgbClr val="333333"/>
+                </a:solidFill>
+                <a:latin typeface="+mj-lt"/>
+                <a:ea typeface="+mj-ea"/>
+                <a:cs typeface="+mj-cs"/>
+              </a:defRPr>
+            </a:lvl1pPr>
+          </a:lstStyle>
+          <a:p>
+            <a:pPr algn="ctr" marL="0" indent="0">
+              <a:lnSpc>
+                <a:spcPct val="100000"/>
+              </a:lnSpc>
+              <a:buNone/>
+            </a:pPr>
+            <a:r>
+              <a:rPr lang="th-TH" sz="1600" b="1" dirty="0">
+                <a:solidFill>
+                  <a:srgbClr val="333333"/>
+                </a:solidFill>
+                <a:latin typeface="+mj-lt"/>
+                <a:ea typeface="+mj-ea"/>
+                <a:cs typeface="+mj-cs"/>
+              </a:rPr>
+              <a:t>โลโก้ หรือชื่อลูกค้า</a:t>
+            </a:r>
+          </a:p>
+        </p:txBody>
+      </p:sp>
+      <p:sp>
+        <p:nvSpPr>
+          <p:cNvPr id="33" name="Tile 7 Caption"/>
+          <p:cNvSpPr>
+            <a:spLocks noGrp="1"/>
+          </p:cNvSpPr>
+          <p:nvPr>
+            <p:ph type="body" idx="33"/>
+          </p:nvPr>
+        </p:nvSpPr>
+        <p:spPr>
+          <a:xfrm>
+            <a:off x="6278880" y="3758184"/>
+            <a:ext cx="2270760" cy="219456"/>
+          </a:xfrm>
+          <a:prstGeom prst="rect">
+            <a:avLst/>
+          </a:prstGeom>
+        </p:spPr>
+        <p:txBody>
+          <a:bodyPr wrap="square" anchor="ctr" lIns="0" tIns="0" rIns="0" bIns="0" rtlCol="0"/>
+          <a:lstStyle>
+            <a:lvl1pPr algn="ctr" marL="0" indent="0">
+              <a:lnSpc>
+                <a:spcPct val="100000"/>
+              </a:lnSpc>
+              <a:buNone/>
+              <a:defRPr lang="th-TH" sz="1200" dirty="0">
+                <a:solidFill>
+                  <a:srgbClr val="5F5F5F"/>
+                </a:solidFill>
+                <a:latin typeface="+mn-lt"/>
+                <a:ea typeface="+mn-ea"/>
+                <a:cs typeface="+mn-cs"/>
+              </a:defRPr>
+            </a:lvl1pPr>
+          </a:lstStyle>
+          <a:p>
+            <a:pPr algn="ctr" marL="0" indent="0">
+              <a:lnSpc>
+                <a:spcPct val="100000"/>
+              </a:lnSpc>
+              <a:buNone/>
+            </a:pPr>
+            <a:r>
+              <a:rPr lang="th-TH" sz="1200" dirty="0">
+                <a:solidFill>
+                  <a:srgbClr val="5F5F5F"/>
+                </a:solidFill>
+                <a:latin typeface="+mn-lt"/>
+                <a:ea typeface="+mn-ea"/>
+                <a:cs typeface="+mn-cs"/>
+              </a:rPr>
+              <a:t>อุตสาหกรรม · งานที่ทำ</a:t>
+            </a:r>
+          </a:p>
+        </p:txBody>
+      </p:sp>
+      <p:sp>
+        <p:nvSpPr>
+          <p:cNvPr id="34" name="Tile 8"/>
+          <p:cNvSpPr/>
+          <p:nvPr/>
+        </p:nvSpPr>
+        <p:spPr>
+          <a:xfrm>
+            <a:off x="8823960" y="3154680"/>
+            <a:ext cx="2453640" cy="914400"/>
+          </a:xfrm>
+          <a:prstGeom prst="rect">
+            <a:avLst/>
+          </a:prstGeom>
+          <a:solidFill>
+            <a:srgbClr val="FFFFFF"/>
+          </a:solidFill>
+          <a:ln w="9525">
+            <a:solidFill>
+              <a:srgbClr val="E5E5E5"/>
+            </a:solidFill>
+          </a:ln>
+        </p:spPr>
+        <p:txBody>
+          <a:bodyPr/>
+          <a:lstStyle/>
+          <a:p>
+            <a:endParaRPr lang="th-TH"/>
+          </a:p>
+        </p:txBody>
+      </p:sp>
+      <p:sp>
+        <p:nvSpPr>
+          <p:cNvPr id="35" name="Tile 8 Logo"/>
+          <p:cNvSpPr>
+            <a:spLocks noGrp="1"/>
+          </p:cNvSpPr>
+          <p:nvPr>
+            <p:ph idx="34"/>
+          </p:nvPr>
+        </p:nvSpPr>
+        <p:spPr>
+          <a:xfrm>
+            <a:off x="8961120" y="3246120"/>
+            <a:ext cx="2179320" cy="502920"/>
+          </a:xfrm>
+          <a:prstGeom prst="rect">
+            <a:avLst/>
+          </a:prstGeom>
+        </p:spPr>
+        <p:txBody>
+          <a:bodyPr wrap="square" anchor="ctr" lIns="0" tIns="0" rIns="0" bIns="0" rtlCol="0"/>
+          <a:lstStyle>
+            <a:lvl1pPr algn="ctr" marL="0" indent="0">
+              <a:lnSpc>
+                <a:spcPct val="100000"/>
+              </a:lnSpc>
+              <a:buNone/>
+              <a:defRPr lang="th-TH" sz="1600" b="1" dirty="0">
+                <a:solidFill>
+                  <a:srgbClr val="333333"/>
+                </a:solidFill>
+                <a:latin typeface="+mj-lt"/>
+                <a:ea typeface="+mj-ea"/>
+                <a:cs typeface="+mj-cs"/>
+              </a:defRPr>
+            </a:lvl1pPr>
+          </a:lstStyle>
+          <a:p>
+            <a:pPr algn="ctr" marL="0" indent="0">
+              <a:lnSpc>
+                <a:spcPct val="100000"/>
+              </a:lnSpc>
+              <a:buNone/>
+            </a:pPr>
+            <a:r>
+              <a:rPr lang="th-TH" sz="1600" b="1" dirty="0">
+                <a:solidFill>
+                  <a:srgbClr val="333333"/>
+                </a:solidFill>
+                <a:latin typeface="+mj-lt"/>
+                <a:ea typeface="+mj-ea"/>
+                <a:cs typeface="+mj-cs"/>
+              </a:rPr>
+              <a:t>โลโก้ หรือชื่อลูกค้า</a:t>
+            </a:r>
+          </a:p>
+        </p:txBody>
+      </p:sp>
+      <p:sp>
+        <p:nvSpPr>
+          <p:cNvPr id="36" name="Tile 8 Caption"/>
+          <p:cNvSpPr>
+            <a:spLocks noGrp="1"/>
+          </p:cNvSpPr>
+          <p:nvPr>
+            <p:ph type="body" idx="35"/>
+          </p:nvPr>
+        </p:nvSpPr>
+        <p:spPr>
+          <a:xfrm>
+            <a:off x="8915400" y="3758184"/>
+            <a:ext cx="2270760" cy="219456"/>
+          </a:xfrm>
+          <a:prstGeom prst="rect">
+            <a:avLst/>
+          </a:prstGeom>
+        </p:spPr>
+        <p:txBody>
+          <a:bodyPr wrap="square" anchor="ctr" lIns="0" tIns="0" rIns="0" bIns="0" rtlCol="0"/>
+          <a:lstStyle>
+            <a:lvl1pPr algn="ctr" marL="0" indent="0">
+              <a:lnSpc>
+                <a:spcPct val="100000"/>
+              </a:lnSpc>
+              <a:buNone/>
+              <a:defRPr lang="th-TH" sz="1200" dirty="0">
+                <a:solidFill>
+                  <a:srgbClr val="5F5F5F"/>
+                </a:solidFill>
+                <a:latin typeface="+mn-lt"/>
+                <a:ea typeface="+mn-ea"/>
+                <a:cs typeface="+mn-cs"/>
+              </a:defRPr>
+            </a:lvl1pPr>
+          </a:lstStyle>
+          <a:p>
+            <a:pPr algn="ctr" marL="0" indent="0">
+              <a:lnSpc>
+                <a:spcPct val="100000"/>
+              </a:lnSpc>
+              <a:buNone/>
+            </a:pPr>
+            <a:r>
+              <a:rPr lang="th-TH" sz="1200" dirty="0">
+                <a:solidFill>
+                  <a:srgbClr val="5F5F5F"/>
+                </a:solidFill>
+                <a:latin typeface="+mn-lt"/>
+                <a:ea typeface="+mn-ea"/>
+                <a:cs typeface="+mn-cs"/>
+              </a:rPr>
+              <a:t>อุตสาหกรรม · งานที่ทำ</a:t>
+            </a:r>
+          </a:p>
+        </p:txBody>
+      </p:sp>
+      <p:sp>
+        <p:nvSpPr>
+          <p:cNvPr id="37" name="Tile 9"/>
+          <p:cNvSpPr/>
+          <p:nvPr/>
+        </p:nvSpPr>
+        <p:spPr>
+          <a:xfrm>
+            <a:off x="914400" y="4251960"/>
+            <a:ext cx="2453640" cy="914400"/>
+          </a:xfrm>
+          <a:prstGeom prst="rect">
+            <a:avLst/>
+          </a:prstGeom>
+          <a:solidFill>
+            <a:srgbClr val="FFFFFF"/>
+          </a:solidFill>
+          <a:ln w="9525">
+            <a:solidFill>
+              <a:srgbClr val="E5E5E5"/>
+            </a:solidFill>
+          </a:ln>
+        </p:spPr>
+        <p:txBody>
+          <a:bodyPr/>
+          <a:lstStyle/>
+          <a:p>
+            <a:endParaRPr lang="th-TH"/>
+          </a:p>
+        </p:txBody>
+      </p:sp>
+      <p:sp>
+        <p:nvSpPr>
+          <p:cNvPr id="38" name="Tile 9 Logo"/>
+          <p:cNvSpPr>
+            <a:spLocks noGrp="1"/>
+          </p:cNvSpPr>
+          <p:nvPr>
+            <p:ph idx="36"/>
+          </p:nvPr>
+        </p:nvSpPr>
+        <p:spPr>
+          <a:xfrm>
+            <a:off x="1051560" y="4343400"/>
+            <a:ext cx="2179320" cy="502920"/>
+          </a:xfrm>
+          <a:prstGeom prst="rect">
+            <a:avLst/>
+          </a:prstGeom>
+        </p:spPr>
+        <p:txBody>
+          <a:bodyPr wrap="square" anchor="ctr" lIns="0" tIns="0" rIns="0" bIns="0" rtlCol="0"/>
+          <a:lstStyle>
+            <a:lvl1pPr algn="ctr" marL="0" indent="0">
+              <a:lnSpc>
+                <a:spcPct val="100000"/>
+              </a:lnSpc>
+              <a:buNone/>
+              <a:defRPr lang="th-TH" sz="1600" b="1" dirty="0">
+                <a:solidFill>
+                  <a:srgbClr val="333333"/>
+                </a:solidFill>
+                <a:latin typeface="+mj-lt"/>
+                <a:ea typeface="+mj-ea"/>
+                <a:cs typeface="+mj-cs"/>
+              </a:defRPr>
+            </a:lvl1pPr>
+          </a:lstStyle>
+          <a:p>
+            <a:pPr algn="ctr" marL="0" indent="0">
+              <a:lnSpc>
+                <a:spcPct val="100000"/>
+              </a:lnSpc>
+              <a:buNone/>
+            </a:pPr>
+            <a:r>
+              <a:rPr lang="th-TH" sz="1600" b="1" dirty="0">
+                <a:solidFill>
+                  <a:srgbClr val="333333"/>
+                </a:solidFill>
+                <a:latin typeface="+mj-lt"/>
+                <a:ea typeface="+mj-ea"/>
+                <a:cs typeface="+mj-cs"/>
+              </a:rPr>
+              <a:t>โลโก้ หรือชื่อลูกค้า</a:t>
+            </a:r>
+          </a:p>
+        </p:txBody>
+      </p:sp>
+      <p:sp>
+        <p:nvSpPr>
+          <p:cNvPr id="39" name="Tile 9 Caption"/>
+          <p:cNvSpPr>
+            <a:spLocks noGrp="1"/>
+          </p:cNvSpPr>
+          <p:nvPr>
+            <p:ph type="body" idx="37"/>
+          </p:nvPr>
+        </p:nvSpPr>
+        <p:spPr>
+          <a:xfrm>
+            <a:off x="1005840" y="4855464"/>
+            <a:ext cx="2270760" cy="219456"/>
+          </a:xfrm>
+          <a:prstGeom prst="rect">
+            <a:avLst/>
+          </a:prstGeom>
+        </p:spPr>
+        <p:txBody>
+          <a:bodyPr wrap="square" anchor="ctr" lIns="0" tIns="0" rIns="0" bIns="0" rtlCol="0"/>
+          <a:lstStyle>
+            <a:lvl1pPr algn="ctr" marL="0" indent="0">
+              <a:lnSpc>
+                <a:spcPct val="100000"/>
+              </a:lnSpc>
+              <a:buNone/>
+              <a:defRPr lang="th-TH" sz="1200" dirty="0">
+                <a:solidFill>
+                  <a:srgbClr val="5F5F5F"/>
+                </a:solidFill>
+                <a:latin typeface="+mn-lt"/>
+                <a:ea typeface="+mn-ea"/>
+                <a:cs typeface="+mn-cs"/>
+              </a:defRPr>
+            </a:lvl1pPr>
+          </a:lstStyle>
+          <a:p>
+            <a:pPr algn="ctr" marL="0" indent="0">
+              <a:lnSpc>
+                <a:spcPct val="100000"/>
+              </a:lnSpc>
+              <a:buNone/>
+            </a:pPr>
+            <a:r>
+              <a:rPr lang="th-TH" sz="1200" dirty="0">
+                <a:solidFill>
+                  <a:srgbClr val="5F5F5F"/>
+                </a:solidFill>
+                <a:latin typeface="+mn-lt"/>
+                <a:ea typeface="+mn-ea"/>
+                <a:cs typeface="+mn-cs"/>
+              </a:rPr>
+              <a:t>อุตสาหกรรม · งานที่ทำ</a:t>
+            </a:r>
+          </a:p>
+        </p:txBody>
+      </p:sp>
+      <p:sp>
+        <p:nvSpPr>
+          <p:cNvPr id="40" name="Tile 10"/>
+          <p:cNvSpPr/>
+          <p:nvPr/>
+        </p:nvSpPr>
+        <p:spPr>
+          <a:xfrm>
+            <a:off x="3550920" y="4251960"/>
+            <a:ext cx="2453640" cy="914400"/>
+          </a:xfrm>
+          <a:prstGeom prst="rect">
+            <a:avLst/>
+          </a:prstGeom>
+          <a:solidFill>
+            <a:srgbClr val="FFFFFF"/>
+          </a:solidFill>
+          <a:ln w="9525">
+            <a:solidFill>
+              <a:srgbClr val="E5E5E5"/>
+            </a:solidFill>
+          </a:ln>
+        </p:spPr>
+        <p:txBody>
+          <a:bodyPr/>
+          <a:lstStyle/>
+          <a:p>
+            <a:endParaRPr lang="th-TH"/>
+          </a:p>
+        </p:txBody>
+      </p:sp>
+      <p:sp>
+        <p:nvSpPr>
+          <p:cNvPr id="41" name="Tile 10 Logo"/>
+          <p:cNvSpPr>
+            <a:spLocks noGrp="1"/>
+          </p:cNvSpPr>
+          <p:nvPr>
+            <p:ph idx="38"/>
+          </p:nvPr>
+        </p:nvSpPr>
+        <p:spPr>
+          <a:xfrm>
+            <a:off x="3688080" y="4343400"/>
+            <a:ext cx="2179320" cy="502920"/>
+          </a:xfrm>
+          <a:prstGeom prst="rect">
+            <a:avLst/>
+          </a:prstGeom>
+        </p:spPr>
+        <p:txBody>
+          <a:bodyPr wrap="square" anchor="ctr" lIns="0" tIns="0" rIns="0" bIns="0" rtlCol="0"/>
+          <a:lstStyle>
+            <a:lvl1pPr algn="ctr" marL="0" indent="0">
+              <a:lnSpc>
+                <a:spcPct val="100000"/>
+              </a:lnSpc>
+              <a:buNone/>
+              <a:defRPr lang="th-TH" sz="1600" b="1" dirty="0">
+                <a:solidFill>
+                  <a:srgbClr val="333333"/>
+                </a:solidFill>
+                <a:latin typeface="+mj-lt"/>
+                <a:ea typeface="+mj-ea"/>
+                <a:cs typeface="+mj-cs"/>
+              </a:defRPr>
+            </a:lvl1pPr>
+          </a:lstStyle>
+          <a:p>
+            <a:pPr algn="ctr" marL="0" indent="0">
+              <a:lnSpc>
+                <a:spcPct val="100000"/>
+              </a:lnSpc>
+              <a:buNone/>
+            </a:pPr>
+            <a:r>
+              <a:rPr lang="th-TH" sz="1600" b="1" dirty="0">
+                <a:solidFill>
+                  <a:srgbClr val="333333"/>
+                </a:solidFill>
+                <a:latin typeface="+mj-lt"/>
+                <a:ea typeface="+mj-ea"/>
+                <a:cs typeface="+mj-cs"/>
+              </a:rPr>
+              <a:t>โลโก้ หรือชื่อลูกค้า</a:t>
+            </a:r>
+          </a:p>
+        </p:txBody>
+      </p:sp>
+      <p:sp>
+        <p:nvSpPr>
+          <p:cNvPr id="42" name="Tile 10 Caption"/>
+          <p:cNvSpPr>
+            <a:spLocks noGrp="1"/>
+          </p:cNvSpPr>
+          <p:nvPr>
+            <p:ph type="body" idx="39"/>
+          </p:nvPr>
+        </p:nvSpPr>
+        <p:spPr>
+          <a:xfrm>
+            <a:off x="3642360" y="4855464"/>
+            <a:ext cx="2270760" cy="219456"/>
+          </a:xfrm>
+          <a:prstGeom prst="rect">
+            <a:avLst/>
+          </a:prstGeom>
+        </p:spPr>
+        <p:txBody>
+          <a:bodyPr wrap="square" anchor="ctr" lIns="0" tIns="0" rIns="0" bIns="0" rtlCol="0"/>
+          <a:lstStyle>
+            <a:lvl1pPr algn="ctr" marL="0" indent="0">
+              <a:lnSpc>
+                <a:spcPct val="100000"/>
+              </a:lnSpc>
+              <a:buNone/>
+              <a:defRPr lang="th-TH" sz="1200" dirty="0">
+                <a:solidFill>
+                  <a:srgbClr val="5F5F5F"/>
+                </a:solidFill>
+                <a:latin typeface="+mn-lt"/>
+                <a:ea typeface="+mn-ea"/>
+                <a:cs typeface="+mn-cs"/>
+              </a:defRPr>
+            </a:lvl1pPr>
+          </a:lstStyle>
+          <a:p>
+            <a:pPr algn="ctr" marL="0" indent="0">
+              <a:lnSpc>
+                <a:spcPct val="100000"/>
+              </a:lnSpc>
+              <a:buNone/>
+            </a:pPr>
+            <a:r>
+              <a:rPr lang="th-TH" sz="1200" dirty="0">
+                <a:solidFill>
+                  <a:srgbClr val="5F5F5F"/>
+                </a:solidFill>
+                <a:latin typeface="+mn-lt"/>
+                <a:ea typeface="+mn-ea"/>
+                <a:cs typeface="+mn-cs"/>
+              </a:rPr>
+              <a:t>อุตสาหกรรม · งานที่ทำ</a:t>
+            </a:r>
+          </a:p>
+        </p:txBody>
+      </p:sp>
+      <p:sp>
+        <p:nvSpPr>
+          <p:cNvPr id="43" name="Tile 11"/>
+          <p:cNvSpPr/>
+          <p:nvPr/>
+        </p:nvSpPr>
+        <p:spPr>
+          <a:xfrm>
+            <a:off x="6187440" y="4251960"/>
+            <a:ext cx="2453640" cy="914400"/>
+          </a:xfrm>
+          <a:prstGeom prst="rect">
+            <a:avLst/>
+          </a:prstGeom>
+          <a:solidFill>
+            <a:srgbClr val="FFFFFF"/>
+          </a:solidFill>
+          <a:ln w="9525">
+            <a:solidFill>
+              <a:srgbClr val="E5E5E5"/>
+            </a:solidFill>
+          </a:ln>
+        </p:spPr>
+        <p:txBody>
+          <a:bodyPr/>
+          <a:lstStyle/>
+          <a:p>
+            <a:endParaRPr lang="th-TH"/>
+          </a:p>
+        </p:txBody>
+      </p:sp>
+      <p:sp>
+        <p:nvSpPr>
+          <p:cNvPr id="44" name="Tile 11 Logo"/>
+          <p:cNvSpPr>
+            <a:spLocks noGrp="1"/>
+          </p:cNvSpPr>
+          <p:nvPr>
+            <p:ph idx="40"/>
+          </p:nvPr>
+        </p:nvSpPr>
+        <p:spPr>
+          <a:xfrm>
+            <a:off x="6324600" y="4343400"/>
+            <a:ext cx="2179320" cy="502920"/>
+          </a:xfrm>
+          <a:prstGeom prst="rect">
+            <a:avLst/>
+          </a:prstGeom>
+        </p:spPr>
+        <p:txBody>
+          <a:bodyPr wrap="square" anchor="ctr" lIns="0" tIns="0" rIns="0" bIns="0" rtlCol="0"/>
+          <a:lstStyle>
+            <a:lvl1pPr algn="ctr" marL="0" indent="0">
+              <a:lnSpc>
+                <a:spcPct val="100000"/>
+              </a:lnSpc>
+              <a:buNone/>
+              <a:defRPr lang="th-TH" sz="1600" b="1" dirty="0">
+                <a:solidFill>
+                  <a:srgbClr val="333333"/>
+                </a:solidFill>
+                <a:latin typeface="+mj-lt"/>
+                <a:ea typeface="+mj-ea"/>
+                <a:cs typeface="+mj-cs"/>
+              </a:defRPr>
+            </a:lvl1pPr>
+          </a:lstStyle>
+          <a:p>
+            <a:pPr algn="ctr" marL="0" indent="0">
+              <a:lnSpc>
+                <a:spcPct val="100000"/>
+              </a:lnSpc>
+              <a:buNone/>
+            </a:pPr>
+            <a:r>
+              <a:rPr lang="th-TH" sz="1600" b="1" dirty="0">
+                <a:solidFill>
+                  <a:srgbClr val="333333"/>
+                </a:solidFill>
+                <a:latin typeface="+mj-lt"/>
+                <a:ea typeface="+mj-ea"/>
+                <a:cs typeface="+mj-cs"/>
+              </a:rPr>
+              <a:t>โลโก้ หรือชื่อลูกค้า</a:t>
+            </a:r>
+          </a:p>
+        </p:txBody>
+      </p:sp>
+      <p:sp>
+        <p:nvSpPr>
+          <p:cNvPr id="45" name="Tile 11 Caption"/>
+          <p:cNvSpPr>
+            <a:spLocks noGrp="1"/>
+          </p:cNvSpPr>
+          <p:nvPr>
+            <p:ph type="body" idx="41"/>
+          </p:nvPr>
+        </p:nvSpPr>
+        <p:spPr>
+          <a:xfrm>
+            <a:off x="6278880" y="4855464"/>
+            <a:ext cx="2270760" cy="219456"/>
+          </a:xfrm>
+          <a:prstGeom prst="rect">
+            <a:avLst/>
+          </a:prstGeom>
+        </p:spPr>
+        <p:txBody>
+          <a:bodyPr wrap="square" anchor="ctr" lIns="0" tIns="0" rIns="0" bIns="0" rtlCol="0"/>
+          <a:lstStyle>
+            <a:lvl1pPr algn="ctr" marL="0" indent="0">
+              <a:lnSpc>
+                <a:spcPct val="100000"/>
+              </a:lnSpc>
+              <a:buNone/>
+              <a:defRPr lang="th-TH" sz="1200" dirty="0">
+                <a:solidFill>
+                  <a:srgbClr val="5F5F5F"/>
+                </a:solidFill>
+                <a:latin typeface="+mn-lt"/>
+                <a:ea typeface="+mn-ea"/>
+                <a:cs typeface="+mn-cs"/>
+              </a:defRPr>
+            </a:lvl1pPr>
+          </a:lstStyle>
+          <a:p>
+            <a:pPr algn="ctr" marL="0" indent="0">
+              <a:lnSpc>
+                <a:spcPct val="100000"/>
+              </a:lnSpc>
+              <a:buNone/>
+            </a:pPr>
+            <a:r>
+              <a:rPr lang="th-TH" sz="1200" dirty="0">
+                <a:solidFill>
+                  <a:srgbClr val="5F5F5F"/>
+                </a:solidFill>
+                <a:latin typeface="+mn-lt"/>
+                <a:ea typeface="+mn-ea"/>
+                <a:cs typeface="+mn-cs"/>
+              </a:rPr>
+              <a:t>อุตสาหกรรม · งานที่ทำ</a:t>
+            </a:r>
+          </a:p>
+        </p:txBody>
+      </p:sp>
+      <p:sp>
+        <p:nvSpPr>
+          <p:cNvPr id="46" name="Tile 12"/>
+          <p:cNvSpPr/>
+          <p:nvPr/>
+        </p:nvSpPr>
+        <p:spPr>
+          <a:xfrm>
+            <a:off x="8823960" y="4251960"/>
+            <a:ext cx="2453640" cy="914400"/>
+          </a:xfrm>
+          <a:prstGeom prst="rect">
+            <a:avLst/>
+          </a:prstGeom>
+          <a:solidFill>
+            <a:srgbClr val="FFFFFF"/>
+          </a:solidFill>
+          <a:ln w="9525">
+            <a:solidFill>
+              <a:srgbClr val="E5E5E5"/>
+            </a:solidFill>
+          </a:ln>
+        </p:spPr>
+        <p:txBody>
+          <a:bodyPr/>
+          <a:lstStyle/>
+          <a:p>
+            <a:endParaRPr lang="th-TH"/>
+          </a:p>
+        </p:txBody>
+      </p:sp>
+      <p:sp>
+        <p:nvSpPr>
+          <p:cNvPr id="47" name="Tile 12 Logo"/>
+          <p:cNvSpPr>
+            <a:spLocks noGrp="1"/>
+          </p:cNvSpPr>
+          <p:nvPr>
+            <p:ph idx="42"/>
+          </p:nvPr>
+        </p:nvSpPr>
+        <p:spPr>
+          <a:xfrm>
+            <a:off x="8961120" y="4343400"/>
+            <a:ext cx="2179320" cy="502920"/>
+          </a:xfrm>
+          <a:prstGeom prst="rect">
+            <a:avLst/>
+          </a:prstGeom>
+        </p:spPr>
+        <p:txBody>
+          <a:bodyPr wrap="square" anchor="ctr" lIns="0" tIns="0" rIns="0" bIns="0" rtlCol="0"/>
+          <a:lstStyle>
+            <a:lvl1pPr algn="ctr" marL="0" indent="0">
+              <a:lnSpc>
+                <a:spcPct val="100000"/>
+              </a:lnSpc>
+              <a:buNone/>
+              <a:defRPr lang="th-TH" sz="1600" b="1" dirty="0">
+                <a:solidFill>
+                  <a:srgbClr val="333333"/>
+                </a:solidFill>
+                <a:latin typeface="+mj-lt"/>
+                <a:ea typeface="+mj-ea"/>
+                <a:cs typeface="+mj-cs"/>
+              </a:defRPr>
+            </a:lvl1pPr>
+          </a:lstStyle>
+          <a:p>
+            <a:pPr algn="ctr" marL="0" indent="0">
+              <a:lnSpc>
+                <a:spcPct val="100000"/>
+              </a:lnSpc>
+              <a:buNone/>
+            </a:pPr>
+            <a:r>
+              <a:rPr lang="th-TH" sz="1600" b="1" dirty="0">
+                <a:solidFill>
+                  <a:srgbClr val="333333"/>
+                </a:solidFill>
+                <a:latin typeface="+mj-lt"/>
+                <a:ea typeface="+mj-ea"/>
+                <a:cs typeface="+mj-cs"/>
+              </a:rPr>
+              <a:t>โลโก้ หรือชื่อลูกค้า</a:t>
+            </a:r>
+          </a:p>
+        </p:txBody>
+      </p:sp>
+      <p:sp>
+        <p:nvSpPr>
+          <p:cNvPr id="48" name="Tile 12 Caption"/>
+          <p:cNvSpPr>
+            <a:spLocks noGrp="1"/>
+          </p:cNvSpPr>
+          <p:nvPr>
+            <p:ph type="body" idx="43"/>
+          </p:nvPr>
+        </p:nvSpPr>
+        <p:spPr>
+          <a:xfrm>
+            <a:off x="8915400" y="4855464"/>
+            <a:ext cx="2270760" cy="219456"/>
+          </a:xfrm>
+          <a:prstGeom prst="rect">
+            <a:avLst/>
+          </a:prstGeom>
+        </p:spPr>
+        <p:txBody>
+          <a:bodyPr wrap="square" anchor="ctr" lIns="0" tIns="0" rIns="0" bIns="0" rtlCol="0"/>
+          <a:lstStyle>
+            <a:lvl1pPr algn="ctr" marL="0" indent="0">
+              <a:lnSpc>
+                <a:spcPct val="100000"/>
+              </a:lnSpc>
+              <a:buNone/>
+              <a:defRPr lang="th-TH" sz="1200" dirty="0">
+                <a:solidFill>
+                  <a:srgbClr val="5F5F5F"/>
+                </a:solidFill>
+                <a:latin typeface="+mn-lt"/>
+                <a:ea typeface="+mn-ea"/>
+                <a:cs typeface="+mn-cs"/>
+              </a:defRPr>
+            </a:lvl1pPr>
+          </a:lstStyle>
+          <a:p>
+            <a:pPr algn="ctr" marL="0" indent="0">
+              <a:lnSpc>
+                <a:spcPct val="100000"/>
+              </a:lnSpc>
+              <a:buNone/>
+            </a:pPr>
+            <a:r>
+              <a:rPr lang="th-TH" sz="1200" dirty="0">
+                <a:solidFill>
+                  <a:srgbClr val="5F5F5F"/>
+                </a:solidFill>
+                <a:latin typeface="+mn-lt"/>
+                <a:ea typeface="+mn-ea"/>
+                <a:cs typeface="+mn-cs"/>
+              </a:rPr>
+              <a:t>อุตสาหกรรม · งานที่ทำ</a:t>
+            </a:r>
+          </a:p>
+        </p:txBody>
+      </p:sp>
+      <p:sp>
+        <p:nvSpPr>
+          <p:cNvPr id="49" name="Note"/>
+          <p:cNvSpPr>
+            <a:spLocks noGrp="1"/>
+          </p:cNvSpPr>
+          <p:nvPr>
+            <p:ph type="body" idx="2"/>
+          </p:nvPr>
+        </p:nvSpPr>
+        <p:spPr>
+          <a:xfrm>
+            <a:off x="914400" y="5257800"/>
+            <a:ext cx="10363200" cy="274320"/>
+          </a:xfrm>
+          <a:prstGeom prst="rect">
+            <a:avLst/>
+          </a:prstGeom>
+        </p:spPr>
+        <p:txBody>
+          <a:bodyPr wrap="square" anchor="t" lIns="0" tIns="0" rIns="0" bIns="0" rtlCol="0"/>
+          <a:lstStyle>
+            <a:lvl1pPr algn="l" marL="0" indent="0">
+              <a:lnSpc>
+                <a:spcPct val="130000"/>
+              </a:lnSpc>
+              <a:buNone/>
+              <a:defRPr lang="th-TH" sz="1000" dirty="0">
+                <a:solidFill>
+                  <a:srgbClr val="5F5F5F"/>
+                </a:solidFill>
+                <a:latin typeface="+mn-lt"/>
+                <a:ea typeface="+mn-ea"/>
+                <a:cs typeface="+mn-cs"/>
+              </a:defRPr>
+            </a:lvl1pPr>
+          </a:lstStyle>
+          <a:p>
+            <a:pPr algn="l" marL="0" indent="0">
+              <a:lnSpc>
+                <a:spcPct val="130000"/>
+              </a:lnSpc>
+              <a:buNone/>
+            </a:pPr>
+            <a:r>
+              <a:rPr lang="th-TH" sz="1000" dirty="0">
+                <a:solidFill>
+                  <a:srgbClr val="5F5F5F"/>
+                </a:solidFill>
+                <a:latin typeface="+mn-lt"/>
+                <a:ea typeface="+mn-ea"/>
+                <a:cs typeface="+mn-cs"/>
+              </a:rPr>
+              <a:t>รายชื่อเต็มอยู่ภาคผนวก · ใช้โลโก้เมื่อลูกค้าอนุญาต</a:t>
+            </a:r>
+          </a:p>
+        </p:txBody>
+      </p:sp>
+      <p:sp>
+        <p:nvSpPr>
+          <p:cNvPr id="50" name="Takeaway Band"/>
+          <p:cNvSpPr/>
+          <p:nvPr/>
+        </p:nvSpPr>
+        <p:spPr>
+          <a:xfrm>
+            <a:off x="914400" y="5623560"/>
+            <a:ext cx="10363200" cy="411480"/>
+          </a:xfrm>
+          <a:prstGeom prst="rect">
+            <a:avLst/>
+          </a:prstGeom>
+          <a:solidFill>
+            <a:srgbClr val="E8F6F5"/>
+          </a:solidFill>
+          <a:ln>
+            <a:noFill/>
+          </a:ln>
+        </p:spPr>
+        <p:txBody>
+          <a:bodyPr/>
+          <a:lstStyle/>
+          <a:p>
+            <a:endParaRPr lang="th-TH"/>
+          </a:p>
+        </p:txBody>
+      </p:sp>
+      <p:sp>
+        <p:nvSpPr>
+          <p:cNvPr id="51" name="Takeaway Label"/>
+          <p:cNvSpPr>
+            <a:spLocks noGrp="1"/>
+          </p:cNvSpPr>
+          <p:nvPr>
+            <p:ph type="body" idx="3"/>
+          </p:nvPr>
+        </p:nvSpPr>
+        <p:spPr>
+          <a:xfrm>
+            <a:off x="1097280" y="5684520"/>
+            <a:ext cx="1828800" cy="289560"/>
+          </a:xfrm>
+          <a:prstGeom prst="rect">
+            <a:avLst/>
+          </a:prstGeom>
+        </p:spPr>
+        <p:txBody>
+          <a:bodyPr wrap="square" anchor="ctr" lIns="0" tIns="0" rIns="0" bIns="0" rtlCol="0"/>
+          <a:lstStyle>
+            <a:lvl1pPr algn="l" marL="0" indent="0">
+              <a:lnSpc>
+                <a:spcPct val="100000"/>
+              </a:lnSpc>
+              <a:buNone/>
+              <a:defRPr lang="th-TH" sz="1200" b="1" spc="120" dirty="0">
+                <a:solidFill>
+                  <a:srgbClr val="216B7F"/>
+                </a:solidFill>
+                <a:latin typeface="+mn-lt"/>
+                <a:ea typeface="+mn-ea"/>
+                <a:cs typeface="+mn-cs"/>
+              </a:defRPr>
+            </a:lvl1pPr>
+          </a:lstStyle>
+          <a:p>
+            <a:pPr algn="l" marL="0" indent="0">
+              <a:lnSpc>
+                <a:spcPct val="100000"/>
+              </a:lnSpc>
+              <a:buNone/>
+            </a:pPr>
+            <a:r>
+              <a:rPr lang="th-TH" sz="1200" b="1" spc="120" dirty="0">
+                <a:solidFill>
+                  <a:srgbClr val="216B7F"/>
+                </a:solidFill>
+                <a:latin typeface="+mn-lt"/>
+                <a:ea typeface="+mn-ea"/>
+                <a:cs typeface="+mn-cs"/>
+              </a:rPr>
+              <a:t>สรุป</a:t>
+            </a:r>
+          </a:p>
+        </p:txBody>
+      </p:sp>
+      <p:sp>
+        <p:nvSpPr>
+          <p:cNvPr id="52" name="Takeaway Copy"/>
+          <p:cNvSpPr>
+            <a:spLocks noGrp="1"/>
+          </p:cNvSpPr>
+          <p:nvPr>
+            <p:ph type="body" idx="4"/>
+          </p:nvPr>
+        </p:nvSpPr>
+        <p:spPr>
+          <a:xfrm>
+            <a:off x="2926080" y="5684520"/>
+            <a:ext cx="8168640" cy="289560"/>
+          </a:xfrm>
+          <a:prstGeom prst="rect">
+            <a:avLst/>
+          </a:prstGeom>
+        </p:spPr>
+        <p:txBody>
+          <a:bodyPr wrap="square" anchor="ctr" lIns="0" tIns="0" rIns="0" bIns="0" rtlCol="0"/>
+          <a:lstStyle>
+            <a:lvl1pPr algn="l" marL="0" indent="0">
+              <a:lnSpc>
+                <a:spcPct val="100000"/>
+              </a:lnSpc>
+              <a:buNone/>
+              <a:defRPr lang="th-TH" sz="1400" dirty="0">
+                <a:solidFill>
+                  <a:srgbClr val="333333"/>
+                </a:solidFill>
+                <a:latin typeface="+mn-lt"/>
+                <a:ea typeface="+mn-ea"/>
+                <a:cs typeface="+mn-cs"/>
+              </a:defRPr>
+            </a:lvl1pPr>
+          </a:lstStyle>
+          <a:p>
+            <a:pPr algn="l" marL="0" indent="0">
+              <a:lnSpc>
+                <a:spcPct val="100000"/>
+              </a:lnSpc>
+              <a:buNone/>
+            </a:pPr>
+            <a:r>
+              <a:rPr lang="th-TH" sz="1400" dirty="0">
+                <a:solidFill>
+                  <a:srgbClr val="333333"/>
+                </a:solidFill>
+                <a:latin typeface="+mn-lt"/>
+                <a:ea typeface="+mn-ea"/>
+                <a:cs typeface="+mn-cs"/>
+              </a:rPr>
+              <a:t>ประเด็นสรุปหนึ่งบรรทัด</a:t>
+            </a:r>
+          </a:p>
+        </p:txBody>
+      </p:sp>
+      <p:sp>
+        <p:nvSpPr>
+          <p:cNvPr id="90" name="Footer Rule"/>
+          <p:cNvSpPr/>
+          <p:nvPr/>
+        </p:nvSpPr>
+        <p:spPr>
+          <a:xfrm>
+            <a:off x="914400" y="6172200"/>
+            <a:ext cx="10363200" cy="12700"/>
+          </a:xfrm>
+          <a:prstGeom prst="rect">
+            <a:avLst/>
+          </a:prstGeom>
+          <a:solidFill>
+            <a:srgbClr val="E5E5E5"/>
+          </a:solidFill>
+          <a:ln>
+            <a:noFill/>
+          </a:ln>
+        </p:spPr>
+        <p:txBody>
+          <a:bodyPr/>
+          <a:lstStyle/>
+          <a:p>
+            <a:endParaRPr lang="th-TH"/>
+          </a:p>
+        </p:txBody>
+      </p:sp>
+      <p:sp>
+        <p:nvSpPr>
+          <p:cNvPr id="91" name="Date Placeholder"/>
+          <p:cNvSpPr>
+            <a:spLocks noGrp="1"/>
+          </p:cNvSpPr>
+          <p:nvPr>
+            <p:ph type="dt" idx="10"/>
+          </p:nvPr>
+        </p:nvSpPr>
+        <p:spPr>
+          <a:xfrm>
+            <a:off x="914400" y="6309360"/>
+            <a:ext cx="2743200" cy="274320"/>
+          </a:xfrm>
+          <a:prstGeom prst="rect">
+            <a:avLst/>
+          </a:prstGeom>
+        </p:spPr>
+        <p:txBody>
+          <a:bodyPr wrap="square" anchor="ctr" lIns="0" tIns="0" rIns="0" bIns="0" rtlCol="0"/>
+          <a:lstStyle>
+            <a:lvl1pPr algn="l" marL="0" indent="0">
+              <a:lnSpc>
+                <a:spcPct val="100000"/>
+              </a:lnSpc>
+              <a:buNone/>
+              <a:defRPr lang="th-TH" sz="1000" dirty="0">
+                <a:solidFill>
+                  <a:srgbClr val="5F5F5F"/>
+                </a:solidFill>
+                <a:latin typeface="+mn-lt"/>
+                <a:ea typeface="+mn-ea"/>
+                <a:cs typeface="+mn-cs"/>
+              </a:defRPr>
+            </a:lvl1pPr>
+          </a:lstStyle>
+          <a:p>
+            <a:pPr algn="l" marL="0" indent="0">
+              <a:lnSpc>
+                <a:spcPct val="100000"/>
+              </a:lnSpc>
+              <a:buNone/>
+            </a:pPr>
+            <a:endParaRPr lang="th-TH" sz="1000"/>
+          </a:p>
+        </p:txBody>
+      </p:sp>
+      <p:sp>
+        <p:nvSpPr>
+          <p:cNvPr id="92" name="Footer Placeholder"/>
+          <p:cNvSpPr>
+            <a:spLocks noGrp="1"/>
+          </p:cNvSpPr>
+          <p:nvPr>
+            <p:ph type="ftr" idx="11"/>
+          </p:nvPr>
+        </p:nvSpPr>
+        <p:spPr>
+          <a:xfrm>
+            <a:off x="4572000" y="6309360"/>
+            <a:ext cx="3657600" cy="274320"/>
+          </a:xfrm>
+          <a:prstGeom prst="rect">
+            <a:avLst/>
+          </a:prstGeom>
+        </p:spPr>
+        <p:txBody>
+          <a:bodyPr wrap="square" anchor="ctr" lIns="0" tIns="0" rIns="0" bIns="0" rtlCol="0"/>
+          <a:lstStyle>
+            <a:lvl1pPr algn="ctr" marL="0" indent="0">
+              <a:lnSpc>
+                <a:spcPct val="100000"/>
+              </a:lnSpc>
+              <a:buNone/>
+              <a:defRPr lang="th-TH" sz="1000" dirty="0">
+                <a:solidFill>
+                  <a:srgbClr val="5F5F5F"/>
+                </a:solidFill>
+                <a:latin typeface="+mn-lt"/>
+                <a:ea typeface="+mn-ea"/>
+                <a:cs typeface="+mn-cs"/>
+              </a:defRPr>
+            </a:lvl1pPr>
+          </a:lstStyle>
+          <a:p>
+            <a:pPr algn="ctr" marL="0" indent="0">
+              <a:lnSpc>
+                <a:spcPct val="100000"/>
+              </a:lnSpc>
+              <a:buNone/>
+            </a:pPr>
+            <a:endParaRPr lang="th-TH" sz="1000"/>
+          </a:p>
+        </p:txBody>
+      </p:sp>
+      <p:sp>
+        <p:nvSpPr>
+          <p:cNvPr id="93" name="Slide Number Placeholder"/>
+          <p:cNvSpPr>
+            <a:spLocks noGrp="1"/>
+          </p:cNvSpPr>
+          <p:nvPr>
+            <p:ph type="sldNum" sz="quarter" idx="12"/>
+          </p:nvPr>
+        </p:nvSpPr>
+        <p:spPr>
+          <a:xfrm>
+            <a:off x="9906000" y="6309360"/>
+            <a:ext cx="1371600" cy="274320"/>
+          </a:xfrm>
+          <a:prstGeom prst="rect">
+            <a:avLst/>
+          </a:prstGeom>
+        </p:spPr>
+        <p:txBody>
+          <a:bodyPr anchor="ctr"/>
+          <a:lstStyle>
+            <a:lvl1pPr algn="r" marL="0" indent="0">
+              <a:lnSpc>
+                <a:spcPct val="100000"/>
+              </a:lnSpc>
+              <a:buNone/>
+              <a:defRPr lang="th-TH" sz="1000" dirty="0">
+                <a:solidFill>
+                  <a:srgbClr val="5F5F5F"/>
+                </a:solidFill>
+                <a:latin typeface="+mn-lt"/>
+                <a:ea typeface="+mn-ea"/>
+                <a:cs typeface="+mn-cs"/>
+              </a:defRPr>
+            </a:lvl1pPr>
+          </a:lstStyle>
+          <a:p>
+            <a:pPr algn="r" marL="0" indent="0">
+              <a:buNone/>
+            </a:pPr>
+            <a:fld id="{B7E3A1C2-4F5D-4A88-9C1E-6D2F0A93B451}" type="slidenum">
+              <a:rPr lang="th-TH" sz="1000">
+                <a:solidFill>
+                  <a:srgbClr val="5F5F5F"/>
+                </a:solidFill>
+                <a:latin typeface="+mn-lt"/>
+                <a:cs typeface="+mn-cs"/>
+              </a:rPr>
+              <a:t>2</a:t>
+            </a:fld>
+            <a:endParaRPr lang="th-TH" sz="1000"/>
+          </a:p>
+        </p:txBody>
+      </p:sp>
+      <p:pic>
+        <p:nvPicPr>
+          <p:cNvPr id="94" name="NCT Mark"/>
+          <p:cNvPicPr>
+            <a:picLocks noChangeAspect="1"/>
+          </p:cNvPicPr>
+          <p:nvPr/>
+        </p:nvPicPr>
+        <p:blipFill>
+          <a:blip r:embed="rId2"/>
+          <a:stretch>
+            <a:fillRect/>
+          </a:stretch>
+        </p:blipFill>
+        <p:spPr>
+          <a:xfrm>
+            <a:off x="9494520" y="6289360"/>
+            <a:ext cx="274320" cy="174498"/>
+          </a:xfrm>
+          <a:prstGeom prst="rect">
+            <a:avLst/>
+          </a:prstGeom>
+        </p:spPr>
+      </p:pic>
+    </p:spTree>
+  </p:cSld>
+  <p:clrMapOvr>
+    <a:masterClrMapping/>
+  </p:clrMapOvr>
+</p:sldLayout>
+</file>
+
 <file path=ppt/slideLayouts/slideLayout3.xml><?xml version="1.0" encoding="utf-8"?>
 <p:sldLayout xmlns:a="http://schemas.openxmlformats.org/drawingml/2006/main" xmlns:r="http://schemas.openxmlformats.org/officeDocument/2006/relationships" xmlns:p="http://schemas.openxmlformats.org/presentationml/2006/main" type="obj" showMasterSp="0" preserve="1">
   <p:cSld name="03 Title and Content">
@@ -27932,7 +30282,7 @@
           <p:nvPr/>
         </p:nvPicPr>
         <p:blipFill>
-          <a:blip r:embed="rId27"/>
+          <a:blip r:embed="rId28"/>
           <a:stretch>
             <a:fillRect/>
           </a:stretch>
@@ -27976,6 +30326,7 @@
     <p:sldLayoutId id="2147483671" r:id="rId23"/>
     <p:sldLayoutId id="2147483672" r:id="rId24"/>
     <p:sldLayoutId id="2147483673" r:id="rId25"/>
+    <p:sldLayoutId id="2147483674" r:id="rId26"/>
   </p:sldLayoutIdLst>
   <p:txStyles>
     <p:titleStyle>
@@ -31803,7 +34154,30 @@
       </p:grpSpPr>
       <p:sp>
         <p:nvSpPr>
-          <p:cNvPr id="2" name="Q"/>
+          <p:cNvPr id="2" name="Title"/>
+          <p:cNvSpPr>
+            <a:spLocks noGrp="1"/>
+          </p:cNvSpPr>
+          <p:nvPr>
+            <p:ph type="title"/>
+          </p:nvPr>
+        </p:nvSpPr>
+        <p:spPr/>
+        <p:txBody>
+          <a:bodyPr/>
+          <a:lstStyle/>
+          <a:p>
+            <a:pPr/>
+            <a:r>
+              <a:rPr lang="th-TH" dirty="0"/>
+              <a:t>40 องค์กรปิดงบด้วยระบบที่ NCT วางอยู่ทุกเดือน</a:t>
+            </a:r>
+          </a:p>
+        </p:txBody>
+      </p:sp>
+      <p:sp>
+        <p:nvSpPr>
+          <p:cNvPr id="3" name="Intro"/>
           <p:cNvSpPr>
             <a:spLocks noGrp="1"/>
           </p:cNvSpPr>
@@ -31819,14 +34193,14 @@
             <a:pPr/>
             <a:r>
               <a:rPr lang="th-TH" dirty="0"/>
-              <a:t>ระบบไม่ล่มอีกเลยตั้งแต่เปลี่ยนมาใช้ทีมนี้ดูแล และเราวางแผนงบประมาณได้ล่วงหน้าจริง ๆ</a:t>
-            </a:r>
-          </a:p>
-        </p:txBody>
-      </p:sp>
-      <p:sp>
-        <p:nvSpPr>
-          <p:cNvPr id="3" name="A"/>
+              <a:t>คัด 12 จาก 40 องค์กร ที่ใช้งานต่อเนื่องเกิน 2 ปี</a:t>
+            </a:r>
+          </a:p>
+        </p:txBody>
+      </p:sp>
+      <p:sp>
+        <p:nvSpPr>
+          <p:cNvPr id="4" name="Note"/>
           <p:cNvSpPr>
             <a:spLocks noGrp="1"/>
           </p:cNvSpPr>
@@ -31842,7 +34216,605 @@
             <a:pPr/>
             <a:r>
               <a:rPr lang="th-TH" dirty="0"/>
-              <a:t>คุณสมชาย ป. — ผู้จัดการฝ่ายไอที, บริษัทตัวอย่าง จำกัด</a:t>
+              <a:t>รายชื่อเต็มอยู่ภาคผนวก ค · ชื่อในตัวอย่างนี้เป็นบริษัทสมมติ</a:t>
+            </a:r>
+          </a:p>
+        </p:txBody>
+      </p:sp>
+      <p:sp>
+        <p:nvSpPr>
+          <p:cNvPr id="5" name="TkL"/>
+          <p:cNvSpPr>
+            <a:spLocks noGrp="1"/>
+          </p:cNvSpPr>
+          <p:nvPr>
+            <p:ph type="body" idx="3"/>
+          </p:nvPr>
+        </p:nvSpPr>
+        <p:spPr/>
+        <p:txBody>
+          <a:bodyPr/>
+          <a:lstStyle/>
+          <a:p>
+            <a:pPr/>
+            <a:r>
+              <a:rPr lang="th-TH" dirty="0"/>
+              <a:t>สรุป</a:t>
+            </a:r>
+          </a:p>
+        </p:txBody>
+      </p:sp>
+      <p:sp>
+        <p:nvSpPr>
+          <p:cNvPr id="6" name="TkC"/>
+          <p:cNvSpPr>
+            <a:spLocks noGrp="1"/>
+          </p:cNvSpPr>
+          <p:nvPr>
+            <p:ph type="body" idx="4"/>
+          </p:nvPr>
+        </p:nvSpPr>
+        <p:spPr/>
+        <p:txBody>
+          <a:bodyPr/>
+          <a:lstStyle/>
+          <a:p>
+            <a:pPr/>
+            <a:r>
+              <a:rPr lang="th-TH" dirty="0"/>
+              <a:t>ระบบเดียวกับที่เสนอ ใช้งานจริงแล้วทั้งค้าปลีก การผลิต และการเงิน</a:t>
+            </a:r>
+          </a:p>
+        </p:txBody>
+      </p:sp>
+      <p:sp>
+        <p:nvSpPr>
+          <p:cNvPr id="10" name="L0"/>
+          <p:cNvSpPr>
+            <a:spLocks noGrp="1"/>
+          </p:cNvSpPr>
+          <p:nvPr>
+            <p:ph idx="20"/>
+          </p:nvPr>
+        </p:nvSpPr>
+        <p:spPr/>
+        <p:txBody>
+          <a:bodyPr/>
+          <a:lstStyle/>
+          <a:p>
+            <a:pPr/>
+            <a:r>
+              <a:rPr lang="th-TH" dirty="0"/>
+              <a:t>Contoso</a:t>
+            </a:r>
+          </a:p>
+        </p:txBody>
+      </p:sp>
+      <p:sp>
+        <p:nvSpPr>
+          <p:cNvPr id="11" name="C0"/>
+          <p:cNvSpPr>
+            <a:spLocks noGrp="1"/>
+          </p:cNvSpPr>
+          <p:nvPr>
+            <p:ph type="body" idx="21"/>
+          </p:nvPr>
+        </p:nvSpPr>
+        <p:spPr/>
+        <p:txBody>
+          <a:bodyPr/>
+          <a:lstStyle/>
+          <a:p>
+            <a:pPr/>
+            <a:r>
+              <a:rPr lang="th-TH" dirty="0"/>
+              <a:t>ค้าปลีก · ปิดงบอัตโนมัติ</a:t>
+            </a:r>
+          </a:p>
+        </p:txBody>
+      </p:sp>
+      <p:sp>
+        <p:nvSpPr>
+          <p:cNvPr id="12" name="L1"/>
+          <p:cNvSpPr>
+            <a:spLocks noGrp="1"/>
+          </p:cNvSpPr>
+          <p:nvPr>
+            <p:ph idx="22"/>
+          </p:nvPr>
+        </p:nvSpPr>
+        <p:spPr/>
+        <p:txBody>
+          <a:bodyPr/>
+          <a:lstStyle/>
+          <a:p>
+            <a:pPr/>
+            <a:r>
+              <a:rPr lang="th-TH" dirty="0"/>
+              <a:t>Fabrikam</a:t>
+            </a:r>
+          </a:p>
+        </p:txBody>
+      </p:sp>
+      <p:sp>
+        <p:nvSpPr>
+          <p:cNvPr id="13" name="C1"/>
+          <p:cNvSpPr>
+            <a:spLocks noGrp="1"/>
+          </p:cNvSpPr>
+          <p:nvPr>
+            <p:ph type="body" idx="23"/>
+          </p:nvPr>
+        </p:nvSpPr>
+        <p:spPr/>
+        <p:txBody>
+          <a:bodyPr/>
+          <a:lstStyle/>
+          <a:p>
+            <a:pPr/>
+            <a:r>
+              <a:rPr lang="th-TH" dirty="0"/>
+              <a:t>การผลิต · ใบแจ้งหนี้ด้วย OCR</a:t>
+            </a:r>
+          </a:p>
+        </p:txBody>
+      </p:sp>
+      <p:sp>
+        <p:nvSpPr>
+          <p:cNvPr id="14" name="L2"/>
+          <p:cNvSpPr>
+            <a:spLocks noGrp="1"/>
+          </p:cNvSpPr>
+          <p:nvPr>
+            <p:ph idx="24"/>
+          </p:nvPr>
+        </p:nvSpPr>
+        <p:spPr/>
+        <p:txBody>
+          <a:bodyPr/>
+          <a:lstStyle/>
+          <a:p>
+            <a:pPr/>
+            <a:r>
+              <a:rPr lang="th-TH" dirty="0"/>
+              <a:t>Northwind Traders</a:t>
+            </a:r>
+          </a:p>
+        </p:txBody>
+      </p:sp>
+      <p:sp>
+        <p:nvSpPr>
+          <p:cNvPr id="15" name="C2"/>
+          <p:cNvSpPr>
+            <a:spLocks noGrp="1"/>
+          </p:cNvSpPr>
+          <p:nvPr>
+            <p:ph type="body" idx="25"/>
+          </p:nvPr>
+        </p:nvSpPr>
+        <p:spPr/>
+        <p:txBody>
+          <a:bodyPr/>
+          <a:lstStyle/>
+          <a:p>
+            <a:pPr/>
+            <a:r>
+              <a:rPr lang="th-TH" dirty="0"/>
+              <a:t>นำเข้า-ส่งออก · กระทบยอดธนาคาร</a:t>
+            </a:r>
+          </a:p>
+        </p:txBody>
+      </p:sp>
+      <p:sp>
+        <p:nvSpPr>
+          <p:cNvPr id="16" name="L3"/>
+          <p:cNvSpPr>
+            <a:spLocks noGrp="1"/>
+          </p:cNvSpPr>
+          <p:nvPr>
+            <p:ph idx="26"/>
+          </p:nvPr>
+        </p:nvSpPr>
+        <p:spPr/>
+        <p:txBody>
+          <a:bodyPr/>
+          <a:lstStyle/>
+          <a:p>
+            <a:pPr/>
+            <a:r>
+              <a:rPr lang="th-TH" dirty="0"/>
+              <a:t>Adventure Works</a:t>
+            </a:r>
+          </a:p>
+        </p:txBody>
+      </p:sp>
+      <p:sp>
+        <p:nvSpPr>
+          <p:cNvPr id="17" name="C3"/>
+          <p:cNvSpPr>
+            <a:spLocks noGrp="1"/>
+          </p:cNvSpPr>
+          <p:nvPr>
+            <p:ph type="body" idx="27"/>
+          </p:nvPr>
+        </p:nvSpPr>
+        <p:spPr/>
+        <p:txBody>
+          <a:bodyPr/>
+          <a:lstStyle/>
+          <a:p>
+            <a:pPr/>
+            <a:r>
+              <a:rPr lang="th-TH" dirty="0"/>
+              <a:t>การผลิต · Dynamics 365 BC</a:t>
+            </a:r>
+          </a:p>
+        </p:txBody>
+      </p:sp>
+      <p:sp>
+        <p:nvSpPr>
+          <p:cNvPr id="18" name="L4"/>
+          <p:cNvSpPr>
+            <a:spLocks noGrp="1"/>
+          </p:cNvSpPr>
+          <p:nvPr>
+            <p:ph idx="28"/>
+          </p:nvPr>
+        </p:nvSpPr>
+        <p:spPr/>
+        <p:txBody>
+          <a:bodyPr/>
+          <a:lstStyle/>
+          <a:p>
+            <a:pPr/>
+            <a:r>
+              <a:rPr lang="th-TH" dirty="0"/>
+              <a:t>Tailspin Toys</a:t>
+            </a:r>
+          </a:p>
+        </p:txBody>
+      </p:sp>
+      <p:sp>
+        <p:nvSpPr>
+          <p:cNvPr id="19" name="C4"/>
+          <p:cNvSpPr>
+            <a:spLocks noGrp="1"/>
+          </p:cNvSpPr>
+          <p:nvPr>
+            <p:ph type="body" idx="29"/>
+          </p:nvPr>
+        </p:nvSpPr>
+        <p:spPr/>
+        <p:txBody>
+          <a:bodyPr/>
+          <a:lstStyle/>
+          <a:p>
+            <a:pPr/>
+            <a:r>
+              <a:rPr lang="th-TH" dirty="0"/>
+              <a:t>ค้าปลีก · ใบกำกับภาษีอัตโนมัติ</a:t>
+            </a:r>
+          </a:p>
+        </p:txBody>
+      </p:sp>
+      <p:sp>
+        <p:nvSpPr>
+          <p:cNvPr id="20" name="L5"/>
+          <p:cNvSpPr>
+            <a:spLocks noGrp="1"/>
+          </p:cNvSpPr>
+          <p:nvPr>
+            <p:ph idx="30"/>
+          </p:nvPr>
+        </p:nvSpPr>
+        <p:spPr/>
+        <p:txBody>
+          <a:bodyPr/>
+          <a:lstStyle/>
+          <a:p>
+            <a:pPr/>
+            <a:r>
+              <a:rPr lang="th-TH" dirty="0"/>
+              <a:t>Wide World Importers</a:t>
+            </a:r>
+          </a:p>
+        </p:txBody>
+      </p:sp>
+      <p:sp>
+        <p:nvSpPr>
+          <p:cNvPr id="21" name="C5"/>
+          <p:cNvSpPr>
+            <a:spLocks noGrp="1"/>
+          </p:cNvSpPr>
+          <p:nvPr>
+            <p:ph type="body" idx="31"/>
+          </p:nvPr>
+        </p:nvSpPr>
+        <p:spPr/>
+        <p:txBody>
+          <a:bodyPr/>
+          <a:lstStyle/>
+          <a:p>
+            <a:pPr/>
+            <a:r>
+              <a:rPr lang="th-TH" dirty="0"/>
+              <a:t>โลจิสติกส์ · Intercompany</a:t>
+            </a:r>
+          </a:p>
+        </p:txBody>
+      </p:sp>
+      <p:sp>
+        <p:nvSpPr>
+          <p:cNvPr id="22" name="L6"/>
+          <p:cNvSpPr>
+            <a:spLocks noGrp="1"/>
+          </p:cNvSpPr>
+          <p:nvPr>
+            <p:ph idx="32"/>
+          </p:nvPr>
+        </p:nvSpPr>
+        <p:spPr/>
+        <p:txBody>
+          <a:bodyPr/>
+          <a:lstStyle/>
+          <a:p>
+            <a:pPr/>
+            <a:r>
+              <a:rPr lang="th-TH" dirty="0"/>
+              <a:t>Woodgrove Bank</a:t>
+            </a:r>
+          </a:p>
+        </p:txBody>
+      </p:sp>
+      <p:sp>
+        <p:nvSpPr>
+          <p:cNvPr id="23" name="C6"/>
+          <p:cNvSpPr>
+            <a:spLocks noGrp="1"/>
+          </p:cNvSpPr>
+          <p:nvPr>
+            <p:ph type="body" idx="33"/>
+          </p:nvPr>
+        </p:nvSpPr>
+        <p:spPr/>
+        <p:txBody>
+          <a:bodyPr/>
+          <a:lstStyle/>
+          <a:p>
+            <a:pPr/>
+            <a:r>
+              <a:rPr lang="th-TH" dirty="0"/>
+              <a:t>การเงิน · RPA กระทบยอด</a:t>
+            </a:r>
+          </a:p>
+        </p:txBody>
+      </p:sp>
+      <p:sp>
+        <p:nvSpPr>
+          <p:cNvPr id="24" name="L7"/>
+          <p:cNvSpPr>
+            <a:spLocks noGrp="1"/>
+          </p:cNvSpPr>
+          <p:nvPr>
+            <p:ph idx="34"/>
+          </p:nvPr>
+        </p:nvSpPr>
+        <p:spPr/>
+        <p:txBody>
+          <a:bodyPr/>
+          <a:lstStyle/>
+          <a:p>
+            <a:pPr/>
+            <a:r>
+              <a:rPr lang="th-TH" dirty="0"/>
+              <a:t>Litware</a:t>
+            </a:r>
+          </a:p>
+        </p:txBody>
+      </p:sp>
+      <p:sp>
+        <p:nvSpPr>
+          <p:cNvPr id="25" name="C7"/>
+          <p:cNvSpPr>
+            <a:spLocks noGrp="1"/>
+          </p:cNvSpPr>
+          <p:nvPr>
+            <p:ph type="body" idx="35"/>
+          </p:nvPr>
+        </p:nvSpPr>
+        <p:spPr/>
+        <p:txBody>
+          <a:bodyPr/>
+          <a:lstStyle/>
+          <a:p>
+            <a:pPr/>
+            <a:r>
+              <a:rPr lang="th-TH" dirty="0"/>
+              <a:t>ซอฟต์แวร์ · ระบบเบิกจ่าย</a:t>
+            </a:r>
+          </a:p>
+        </p:txBody>
+      </p:sp>
+      <p:sp>
+        <p:nvSpPr>
+          <p:cNvPr id="26" name="L8"/>
+          <p:cNvSpPr>
+            <a:spLocks noGrp="1"/>
+          </p:cNvSpPr>
+          <p:nvPr>
+            <p:ph idx="36"/>
+          </p:nvPr>
+        </p:nvSpPr>
+        <p:spPr/>
+        <p:txBody>
+          <a:bodyPr/>
+          <a:lstStyle/>
+          <a:p>
+            <a:pPr/>
+            <a:r>
+              <a:rPr lang="th-TH" dirty="0"/>
+              <a:t>Proseware</a:t>
+            </a:r>
+          </a:p>
+        </p:txBody>
+      </p:sp>
+      <p:sp>
+        <p:nvSpPr>
+          <p:cNvPr id="27" name="C8"/>
+          <p:cNvSpPr>
+            <a:spLocks noGrp="1"/>
+          </p:cNvSpPr>
+          <p:nvPr>
+            <p:ph type="body" idx="37"/>
+          </p:nvPr>
+        </p:nvSpPr>
+        <p:spPr/>
+        <p:txBody>
+          <a:bodyPr/>
+          <a:lstStyle/>
+          <a:p>
+            <a:pPr/>
+            <a:r>
+              <a:rPr lang="th-TH" dirty="0"/>
+              <a:t>บริการ · วางบิลและติดตามเช็ค</a:t>
+            </a:r>
+          </a:p>
+        </p:txBody>
+      </p:sp>
+      <p:sp>
+        <p:nvSpPr>
+          <p:cNvPr id="28" name="L9"/>
+          <p:cNvSpPr>
+            <a:spLocks noGrp="1"/>
+          </p:cNvSpPr>
+          <p:nvPr>
+            <p:ph idx="38"/>
+          </p:nvPr>
+        </p:nvSpPr>
+        <p:spPr/>
+        <p:txBody>
+          <a:bodyPr/>
+          <a:lstStyle/>
+          <a:p>
+            <a:pPr/>
+            <a:r>
+              <a:rPr lang="th-TH" dirty="0"/>
+              <a:t>Alpine Ski House</a:t>
+            </a:r>
+          </a:p>
+        </p:txBody>
+      </p:sp>
+      <p:sp>
+        <p:nvSpPr>
+          <p:cNvPr id="29" name="C9"/>
+          <p:cNvSpPr>
+            <a:spLocks noGrp="1"/>
+          </p:cNvSpPr>
+          <p:nvPr>
+            <p:ph type="body" idx="39"/>
+          </p:nvPr>
+        </p:nvSpPr>
+        <p:spPr/>
+        <p:txBody>
+          <a:bodyPr/>
+          <a:lstStyle/>
+          <a:p>
+            <a:pPr/>
+            <a:r>
+              <a:rPr lang="th-TH" dirty="0"/>
+              <a:t>ท่องเที่ยว · ตรวจเงินสดย่อย</a:t>
+            </a:r>
+          </a:p>
+        </p:txBody>
+      </p:sp>
+      <p:sp>
+        <p:nvSpPr>
+          <p:cNvPr id="30" name="L10"/>
+          <p:cNvSpPr>
+            <a:spLocks noGrp="1"/>
+          </p:cNvSpPr>
+          <p:nvPr>
+            <p:ph idx="40"/>
+          </p:nvPr>
+        </p:nvSpPr>
+        <p:spPr/>
+        <p:txBody>
+          <a:bodyPr/>
+          <a:lstStyle/>
+          <a:p>
+            <a:pPr/>
+            <a:r>
+              <a:rPr lang="th-TH" dirty="0"/>
+              <a:t>Coho Winery</a:t>
+            </a:r>
+          </a:p>
+        </p:txBody>
+      </p:sp>
+      <p:sp>
+        <p:nvSpPr>
+          <p:cNvPr id="31" name="C10"/>
+          <p:cNvSpPr>
+            <a:spLocks noGrp="1"/>
+          </p:cNvSpPr>
+          <p:nvPr>
+            <p:ph type="body" idx="41"/>
+          </p:nvPr>
+        </p:nvSpPr>
+        <p:spPr/>
+        <p:txBody>
+          <a:bodyPr/>
+          <a:lstStyle/>
+          <a:p>
+            <a:pPr/>
+            <a:r>
+              <a:rPr lang="th-TH" dirty="0"/>
+              <a:t>เครื่องดื่ม · ลูกหนี้และวางบิล</a:t>
+            </a:r>
+          </a:p>
+        </p:txBody>
+      </p:sp>
+      <p:sp>
+        <p:nvSpPr>
+          <p:cNvPr id="32" name="L11"/>
+          <p:cNvSpPr>
+            <a:spLocks noGrp="1"/>
+          </p:cNvSpPr>
+          <p:nvPr>
+            <p:ph idx="42"/>
+          </p:nvPr>
+        </p:nvSpPr>
+        <p:spPr/>
+        <p:txBody>
+          <a:bodyPr/>
+          <a:lstStyle/>
+          <a:p>
+            <a:pPr/>
+            <a:r>
+              <a:rPr lang="th-TH" dirty="0"/>
+              <a:t>Lucerne Publishing</a:t>
+            </a:r>
+          </a:p>
+        </p:txBody>
+      </p:sp>
+      <p:sp>
+        <p:nvSpPr>
+          <p:cNvPr id="33" name="C11"/>
+          <p:cNvSpPr>
+            <a:spLocks noGrp="1"/>
+          </p:cNvSpPr>
+          <p:nvPr>
+            <p:ph type="body" idx="43"/>
+          </p:nvPr>
+        </p:nvSpPr>
+        <p:spPr/>
+        <p:txBody>
+          <a:bodyPr/>
+          <a:lstStyle/>
+          <a:p>
+            <a:pPr/>
+            <a:r>
+              <a:rPr lang="th-TH" dirty="0"/>
+              <a:t>สื่อ · ปิดงบรายเดือน</a:t>
             </a:r>
           </a:p>
         </p:txBody>
@@ -31856,6 +34828,148 @@
 </file>
 
 <file path=ppt/slides/slide19.xml><?xml version="1.0" encoding="utf-8"?>
+<p:sld xmlns:a="http://schemas.openxmlformats.org/drawingml/2006/main" xmlns:r="http://schemas.openxmlformats.org/officeDocument/2006/relationships" xmlns:p="http://schemas.openxmlformats.org/presentationml/2006/main">
+  <p:cSld name="">
+    <p:spTree>
+      <p:nvGrpSpPr>
+        <p:cNvPr id="1" name=""/>
+        <p:cNvGrpSpPr/>
+        <p:nvPr/>
+      </p:nvGrpSpPr>
+      <p:grpSpPr>
+        <a:xfrm>
+          <a:off x="0" y="0"/>
+          <a:ext cx="0" cy="0"/>
+          <a:chOff x="0" y="0"/>
+          <a:chExt cx="0" cy="0"/>
+        </a:xfrm>
+      </p:grpSpPr>
+      <p:sp>
+        <p:nvSpPr>
+          <p:cNvPr id="2" name="Q"/>
+          <p:cNvSpPr>
+            <a:spLocks noGrp="1"/>
+          </p:cNvSpPr>
+          <p:nvPr>
+            <p:ph type="body" idx="1"/>
+          </p:nvPr>
+        </p:nvSpPr>
+        <p:spPr/>
+        <p:txBody>
+          <a:bodyPr/>
+          <a:lstStyle/>
+          <a:p>
+            <a:pPr/>
+            <a:r>
+              <a:rPr lang="th-TH" dirty="0"/>
+              <a:t>ระบบไม่ล่มอีกเลยตั้งแต่เปลี่ยนมาใช้ทีมนี้ดูแล และเราวางแผนงบประมาณได้ล่วงหน้าจริง ๆ</a:t>
+            </a:r>
+          </a:p>
+        </p:txBody>
+      </p:sp>
+      <p:sp>
+        <p:nvSpPr>
+          <p:cNvPr id="3" name="A"/>
+          <p:cNvSpPr>
+            <a:spLocks noGrp="1"/>
+          </p:cNvSpPr>
+          <p:nvPr>
+            <p:ph type="body" idx="2"/>
+          </p:nvPr>
+        </p:nvSpPr>
+        <p:spPr/>
+        <p:txBody>
+          <a:bodyPr/>
+          <a:lstStyle/>
+          <a:p>
+            <a:pPr/>
+            <a:r>
+              <a:rPr lang="th-TH" dirty="0"/>
+              <a:t>คุณสมชาย ป. — ผู้จัดการฝ่ายไอที, บริษัทตัวอย่าง จำกัด</a:t>
+            </a:r>
+          </a:p>
+        </p:txBody>
+      </p:sp>
+    </p:spTree>
+  </p:cSld>
+  <p:clrMapOvr>
+    <a:masterClrMapping/>
+  </p:clrMapOvr>
+</p:sld>
+</file>
+
+<file path=ppt/slides/slide2.xml><?xml version="1.0" encoding="utf-8"?>
+<p:sld xmlns:a="http://schemas.openxmlformats.org/drawingml/2006/main" xmlns:r="http://schemas.openxmlformats.org/officeDocument/2006/relationships" xmlns:p="http://schemas.openxmlformats.org/presentationml/2006/main">
+  <p:cSld name="">
+    <p:spTree>
+      <p:nvGrpSpPr>
+        <p:cNvPr id="1" name=""/>
+        <p:cNvGrpSpPr/>
+        <p:nvPr/>
+      </p:nvGrpSpPr>
+      <p:grpSpPr>
+        <a:xfrm>
+          <a:off x="0" y="0"/>
+          <a:ext cx="0" cy="0"/>
+          <a:chOff x="0" y="0"/>
+          <a:chExt cx="0" cy="0"/>
+        </a:xfrm>
+      </p:grpSpPr>
+      <p:sp>
+        <p:nvSpPr>
+          <p:cNvPr id="2" name="Title"/>
+          <p:cNvSpPr>
+            <a:spLocks noGrp="1"/>
+          </p:cNvSpPr>
+          <p:nvPr>
+            <p:ph type="ctrTitle"/>
+          </p:nvPr>
+        </p:nvSpPr>
+        <p:spPr/>
+        <p:txBody>
+          <a:bodyPr/>
+          <a:lstStyle/>
+          <a:p>
+            <a:pPr/>
+            <a:r>
+              <a:rPr lang="th-TH" dirty="0"/>
+              <a:t>เปลี่ยนงานบัญชีให้ระบบทำแทน</a:t>
+            </a:r>
+          </a:p>
+        </p:txBody>
+      </p:sp>
+      <p:sp>
+        <p:nvSpPr>
+          <p:cNvPr id="3" name="Subtitle"/>
+          <p:cNvSpPr>
+            <a:spLocks noGrp="1"/>
+          </p:cNvSpPr>
+          <p:nvPr>
+            <p:ph type="subTitle" idx="1"/>
+          </p:nvPr>
+        </p:nvSpPr>
+        <p:spPr/>
+        <p:txBody>
+          <a:bodyPr/>
+          <a:lstStyle/>
+          <a:p>
+            <a:pPr/>
+            <a:r>
+              <a:rPr lang="th-TH" dirty="0"/>
+              <a:t>NCT · สัมมนาลูกค้า 2569</a:t>
+            </a:r>
+          </a:p>
+        </p:txBody>
+      </p:sp>
+    </p:spTree>
+  </p:cSld>
+  <p:clrMapOvr>
+    <a:masterClrMapping/>
+  </p:clrMapOvr>
+</p:sld>
+</file>
+
+<file path=ppt/slides/slide20.xml><?xml version="1.0" encoding="utf-8"?>
 <p:sld xmlns:a="http://schemas.openxmlformats.org/drawingml/2006/main" xmlns:r="http://schemas.openxmlformats.org/officeDocument/2006/relationships" xmlns:p="http://schemas.openxmlformats.org/presentationml/2006/main">
   <p:cSld name="">
     <p:spTree>
@@ -32586,1103 +35700,6 @@
 </p:sld>
 </file>
 
-<file path=ppt/slides/slide2.xml><?xml version="1.0" encoding="utf-8"?>
-<p:sld xmlns:a="http://schemas.openxmlformats.org/drawingml/2006/main" xmlns:r="http://schemas.openxmlformats.org/officeDocument/2006/relationships" xmlns:p="http://schemas.openxmlformats.org/presentationml/2006/main">
-  <p:cSld name="">
-    <p:spTree>
-      <p:nvGrpSpPr>
-        <p:cNvPr id="1" name=""/>
-        <p:cNvGrpSpPr/>
-        <p:nvPr/>
-      </p:nvGrpSpPr>
-      <p:grpSpPr>
-        <a:xfrm>
-          <a:off x="0" y="0"/>
-          <a:ext cx="0" cy="0"/>
-          <a:chOff x="0" y="0"/>
-          <a:chExt cx="0" cy="0"/>
-        </a:xfrm>
-      </p:grpSpPr>
-      <p:sp>
-        <p:nvSpPr>
-          <p:cNvPr id="2" name="Title"/>
-          <p:cNvSpPr>
-            <a:spLocks noGrp="1"/>
-          </p:cNvSpPr>
-          <p:nvPr>
-            <p:ph type="ctrTitle"/>
-          </p:nvPr>
-        </p:nvSpPr>
-        <p:spPr/>
-        <p:txBody>
-          <a:bodyPr/>
-          <a:lstStyle/>
-          <a:p>
-            <a:pPr/>
-            <a:r>
-              <a:rPr lang="th-TH" dirty="0"/>
-              <a:t>เปลี่ยนงานบัญชีให้ระบบทำแทน</a:t>
-            </a:r>
-          </a:p>
-        </p:txBody>
-      </p:sp>
-      <p:sp>
-        <p:nvSpPr>
-          <p:cNvPr id="3" name="Subtitle"/>
-          <p:cNvSpPr>
-            <a:spLocks noGrp="1"/>
-          </p:cNvSpPr>
-          <p:nvPr>
-            <p:ph type="subTitle" idx="1"/>
-          </p:nvPr>
-        </p:nvSpPr>
-        <p:spPr/>
-        <p:txBody>
-          <a:bodyPr/>
-          <a:lstStyle/>
-          <a:p>
-            <a:pPr/>
-            <a:r>
-              <a:rPr lang="th-TH" dirty="0"/>
-              <a:t>NCT · สัมมนาลูกค้า 2569</a:t>
-            </a:r>
-          </a:p>
-        </p:txBody>
-      </p:sp>
-    </p:spTree>
-  </p:cSld>
-  <p:clrMapOvr>
-    <a:masterClrMapping/>
-  </p:clrMapOvr>
-</p:sld>
-</file>
-
-<file path=ppt/slides/slide20.xml><?xml version="1.0" encoding="utf-8"?>
-<p:sld xmlns:a="http://schemas.openxmlformats.org/drawingml/2006/main" xmlns:r="http://schemas.openxmlformats.org/officeDocument/2006/relationships" xmlns:p="http://schemas.openxmlformats.org/presentationml/2006/main">
-  <p:cSld name="">
-    <p:spTree>
-      <p:nvGrpSpPr>
-        <p:cNvPr id="1" name=""/>
-        <p:cNvGrpSpPr/>
-        <p:nvPr/>
-      </p:nvGrpSpPr>
-      <p:grpSpPr>
-        <a:xfrm>
-          <a:off x="0" y="0"/>
-          <a:ext cx="0" cy="0"/>
-          <a:chOff x="0" y="0"/>
-          <a:chExt cx="0" cy="0"/>
-        </a:xfrm>
-      </p:grpSpPr>
-      <p:sp>
-        <p:nvSpPr>
-          <p:cNvPr id="2" name="Title"/>
-          <p:cNvSpPr>
-            <a:spLocks noGrp="1"/>
-          </p:cNvSpPr>
-          <p:nvPr>
-            <p:ph type="title"/>
-          </p:nvPr>
-        </p:nvSpPr>
-        <p:spPr/>
-        <p:txBody>
-          <a:bodyPr/>
-          <a:lstStyle/>
-          <a:p>
-            <a:pPr/>
-            <a:r>
-              <a:rPr lang="th-TH" dirty="0"/>
-              <a:t>แผนงาน 12 เดือน ขึ้นระบบต้นเดือนที่ 7</a:t>
-            </a:r>
-          </a:p>
-        </p:txBody>
-      </p:sp>
-      <p:graphicFrame>
-        <p:nvGraphicFramePr>
-          <p:cNvPr id="3" name="Plan"/>
-          <p:cNvGraphicFramePr>
-            <a:graphicFrameLocks noGrp="1"/>
-          </p:cNvGraphicFramePr>
-          <p:nvPr>
-            <p:ph type="chart" idx="1"/>
-          </p:nvPr>
-        </p:nvGraphicFramePr>
-        <p:xfrm>
-          <a:off x="3566160" y="2057400"/>
-          <a:ext cx="7711440" cy="3108960"/>
-        </p:xfrm>
-        <a:graphic>
-          <a:graphicData uri="http://schemas.openxmlformats.org/drawingml/2006/chart">
-            <c:chart xmlns:c="http://schemas.openxmlformats.org/drawingml/2006/chart" r:id="rId2"/>
-          </a:graphicData>
-        </a:graphic>
-      </p:graphicFrame>
-      <p:sp>
-        <p:nvSpPr>
-          <p:cNvPr id="4" name="P1"/>
-          <p:cNvSpPr>
-            <a:spLocks noGrp="1"/>
-          </p:cNvSpPr>
-          <p:nvPr>
-            <p:ph type="body" idx="20"/>
-          </p:nvPr>
-        </p:nvSpPr>
-        <p:spPr/>
-        <p:txBody>
-          <a:bodyPr/>
-          <a:lstStyle/>
-          <a:p>
-            <a:pPr/>
-            <a:r>
-              <a:rPr lang="th-TH" dirty="0"/>
-              <a:t>ด.1</a:t>
-            </a:r>
-          </a:p>
-        </p:txBody>
-      </p:sp>
-      <p:sp>
-        <p:nvSpPr>
-          <p:cNvPr id="5" name="P2"/>
-          <p:cNvSpPr>
-            <a:spLocks noGrp="1"/>
-          </p:cNvSpPr>
-          <p:nvPr>
-            <p:ph type="body" idx="21"/>
-          </p:nvPr>
-        </p:nvSpPr>
-        <p:spPr/>
-        <p:txBody>
-          <a:bodyPr/>
-          <a:lstStyle/>
-          <a:p>
-            <a:pPr/>
-            <a:r>
-              <a:rPr lang="th-TH" dirty="0"/>
-              <a:t>ด.2</a:t>
-            </a:r>
-          </a:p>
-        </p:txBody>
-      </p:sp>
-      <p:sp>
-        <p:nvSpPr>
-          <p:cNvPr id="6" name="P3"/>
-          <p:cNvSpPr>
-            <a:spLocks noGrp="1"/>
-          </p:cNvSpPr>
-          <p:nvPr>
-            <p:ph type="body" idx="22"/>
-          </p:nvPr>
-        </p:nvSpPr>
-        <p:spPr/>
-        <p:txBody>
-          <a:bodyPr/>
-          <a:lstStyle/>
-          <a:p>
-            <a:pPr/>
-            <a:r>
-              <a:rPr lang="th-TH" dirty="0"/>
-              <a:t>ด.3</a:t>
-            </a:r>
-          </a:p>
-        </p:txBody>
-      </p:sp>
-      <p:sp>
-        <p:nvSpPr>
-          <p:cNvPr id="7" name="P4"/>
-          <p:cNvSpPr>
-            <a:spLocks noGrp="1"/>
-          </p:cNvSpPr>
-          <p:nvPr>
-            <p:ph type="body" idx="23"/>
-          </p:nvPr>
-        </p:nvSpPr>
-        <p:spPr/>
-        <p:txBody>
-          <a:bodyPr/>
-          <a:lstStyle/>
-          <a:p>
-            <a:pPr/>
-            <a:r>
-              <a:rPr lang="th-TH" dirty="0"/>
-              <a:t>ด.4</a:t>
-            </a:r>
-          </a:p>
-        </p:txBody>
-      </p:sp>
-      <p:sp>
-        <p:nvSpPr>
-          <p:cNvPr id="8" name="P5"/>
-          <p:cNvSpPr>
-            <a:spLocks noGrp="1"/>
-          </p:cNvSpPr>
-          <p:nvPr>
-            <p:ph type="body" idx="24"/>
-          </p:nvPr>
-        </p:nvSpPr>
-        <p:spPr/>
-        <p:txBody>
-          <a:bodyPr/>
-          <a:lstStyle/>
-          <a:p>
-            <a:pPr/>
-            <a:r>
-              <a:rPr lang="th-TH" dirty="0"/>
-              <a:t>ด.5</a:t>
-            </a:r>
-          </a:p>
-        </p:txBody>
-      </p:sp>
-      <p:sp>
-        <p:nvSpPr>
-          <p:cNvPr id="9" name="P6"/>
-          <p:cNvSpPr>
-            <a:spLocks noGrp="1"/>
-          </p:cNvSpPr>
-          <p:nvPr>
-            <p:ph type="body" idx="25"/>
-          </p:nvPr>
-        </p:nvSpPr>
-        <p:spPr/>
-        <p:txBody>
-          <a:bodyPr/>
-          <a:lstStyle/>
-          <a:p>
-            <a:pPr/>
-            <a:r>
-              <a:rPr lang="th-TH" dirty="0"/>
-              <a:t>ด.6</a:t>
-            </a:r>
-          </a:p>
-        </p:txBody>
-      </p:sp>
-      <p:sp>
-        <p:nvSpPr>
-          <p:cNvPr id="10" name="P7"/>
-          <p:cNvSpPr>
-            <a:spLocks noGrp="1"/>
-          </p:cNvSpPr>
-          <p:nvPr>
-            <p:ph type="body" idx="26"/>
-          </p:nvPr>
-        </p:nvSpPr>
-        <p:spPr/>
-        <p:txBody>
-          <a:bodyPr/>
-          <a:lstStyle/>
-          <a:p>
-            <a:pPr/>
-            <a:r>
-              <a:rPr lang="th-TH" dirty="0"/>
-              <a:t>ด.7</a:t>
-            </a:r>
-          </a:p>
-        </p:txBody>
-      </p:sp>
-      <p:sp>
-        <p:nvSpPr>
-          <p:cNvPr id="11" name="P8"/>
-          <p:cNvSpPr>
-            <a:spLocks noGrp="1"/>
-          </p:cNvSpPr>
-          <p:nvPr>
-            <p:ph type="body" idx="27"/>
-          </p:nvPr>
-        </p:nvSpPr>
-        <p:spPr/>
-        <p:txBody>
-          <a:bodyPr/>
-          <a:lstStyle/>
-          <a:p>
-            <a:pPr/>
-            <a:r>
-              <a:rPr lang="th-TH" dirty="0"/>
-              <a:t>ด.8</a:t>
-            </a:r>
-          </a:p>
-        </p:txBody>
-      </p:sp>
-      <p:sp>
-        <p:nvSpPr>
-          <p:cNvPr id="12" name="P9"/>
-          <p:cNvSpPr>
-            <a:spLocks noGrp="1"/>
-          </p:cNvSpPr>
-          <p:nvPr>
-            <p:ph type="body" idx="28"/>
-          </p:nvPr>
-        </p:nvSpPr>
-        <p:spPr/>
-        <p:txBody>
-          <a:bodyPr/>
-          <a:lstStyle/>
-          <a:p>
-            <a:pPr/>
-            <a:r>
-              <a:rPr lang="th-TH" dirty="0"/>
-              <a:t>ด.9</a:t>
-            </a:r>
-          </a:p>
-        </p:txBody>
-      </p:sp>
-      <p:sp>
-        <p:nvSpPr>
-          <p:cNvPr id="13" name="P10"/>
-          <p:cNvSpPr>
-            <a:spLocks noGrp="1"/>
-          </p:cNvSpPr>
-          <p:nvPr>
-            <p:ph type="body" idx="29"/>
-          </p:nvPr>
-        </p:nvSpPr>
-        <p:spPr/>
-        <p:txBody>
-          <a:bodyPr/>
-          <a:lstStyle/>
-          <a:p>
-            <a:pPr/>
-            <a:r>
-              <a:rPr lang="th-TH" dirty="0"/>
-              <a:t>ด.10</a:t>
-            </a:r>
-          </a:p>
-        </p:txBody>
-      </p:sp>
-      <p:sp>
-        <p:nvSpPr>
-          <p:cNvPr id="14" name="P11"/>
-          <p:cNvSpPr>
-            <a:spLocks noGrp="1"/>
-          </p:cNvSpPr>
-          <p:nvPr>
-            <p:ph type="body" idx="30"/>
-          </p:nvPr>
-        </p:nvSpPr>
-        <p:spPr/>
-        <p:txBody>
-          <a:bodyPr/>
-          <a:lstStyle/>
-          <a:p>
-            <a:pPr/>
-            <a:r>
-              <a:rPr lang="th-TH" dirty="0"/>
-              <a:t>ด.11</a:t>
-            </a:r>
-          </a:p>
-        </p:txBody>
-      </p:sp>
-      <p:sp>
-        <p:nvSpPr>
-          <p:cNvPr id="15" name="P12"/>
-          <p:cNvSpPr>
-            <a:spLocks noGrp="1"/>
-          </p:cNvSpPr>
-          <p:nvPr>
-            <p:ph type="body" idx="31"/>
-          </p:nvPr>
-        </p:nvSpPr>
-        <p:spPr/>
-        <p:txBody>
-          <a:bodyPr/>
-          <a:lstStyle/>
-          <a:p>
-            <a:pPr/>
-            <a:r>
-              <a:rPr lang="th-TH" dirty="0"/>
-              <a:t>ด.12</a:t>
-            </a:r>
-          </a:p>
-        </p:txBody>
-      </p:sp>
-      <p:sp>
-        <p:nvSpPr>
-          <p:cNvPr id="16" name="R1"/>
-          <p:cNvSpPr>
-            <a:spLocks noGrp="1"/>
-          </p:cNvSpPr>
-          <p:nvPr>
-            <p:ph type="body" idx="32"/>
-          </p:nvPr>
-        </p:nvSpPr>
-        <p:spPr/>
-        <p:txBody>
-          <a:bodyPr/>
-          <a:lstStyle/>
-          <a:p>
-            <a:pPr/>
-            <a:r>
-              <a:rPr lang="th-TH" dirty="0"/>
-              <a:t>1. เตรียมระบบ</a:t>
-            </a:r>
-          </a:p>
-        </p:txBody>
-      </p:sp>
-      <p:sp>
-        <p:nvSpPr>
-          <p:cNvPr id="17" name="D1"/>
-          <p:cNvSpPr>
-            <a:spLocks noGrp="1"/>
-          </p:cNvSpPr>
-          <p:nvPr>
-            <p:ph type="body" idx="33"/>
-          </p:nvPr>
-        </p:nvSpPr>
-        <p:spPr/>
-        <p:txBody>
-          <a:bodyPr/>
-          <a:lstStyle/>
-          <a:p>
-            <a:pPr/>
-            <a:r>
-              <a:rPr lang="th-TH" dirty="0"/>
-              <a:t>4 สัปดาห์</a:t>
-            </a:r>
-          </a:p>
-        </p:txBody>
-      </p:sp>
-      <p:sp>
-        <p:nvSpPr>
-          <p:cNvPr id="18" name="R2"/>
-          <p:cNvSpPr>
-            <a:spLocks noGrp="1"/>
-          </p:cNvSpPr>
-          <p:nvPr>
-            <p:ph type="body" idx="34"/>
-          </p:nvPr>
-        </p:nvSpPr>
-        <p:spPr/>
-        <p:txBody>
-          <a:bodyPr/>
-          <a:lstStyle/>
-          <a:p>
-            <a:pPr/>
-            <a:r>
-              <a:rPr lang="th-TH" dirty="0"/>
-              <a:t>2. วิเคราะห์และออกแบบ</a:t>
-            </a:r>
-          </a:p>
-        </p:txBody>
-      </p:sp>
-      <p:sp>
-        <p:nvSpPr>
-          <p:cNvPr id="19" name="D2"/>
-          <p:cNvSpPr>
-            <a:spLocks noGrp="1"/>
-          </p:cNvSpPr>
-          <p:nvPr>
-            <p:ph type="body" idx="35"/>
-          </p:nvPr>
-        </p:nvSpPr>
-        <p:spPr/>
-        <p:txBody>
-          <a:bodyPr/>
-          <a:lstStyle/>
-          <a:p>
-            <a:pPr/>
-            <a:r>
-              <a:rPr lang="th-TH" dirty="0"/>
-              <a:t>6 สัปดาห์</a:t>
-            </a:r>
-          </a:p>
-        </p:txBody>
-      </p:sp>
-      <p:sp>
-        <p:nvSpPr>
-          <p:cNvPr id="20" name="R3"/>
-          <p:cNvSpPr>
-            <a:spLocks noGrp="1"/>
-          </p:cNvSpPr>
-          <p:nvPr>
-            <p:ph type="body" idx="36"/>
-          </p:nvPr>
-        </p:nvSpPr>
-        <p:spPr/>
-        <p:txBody>
-          <a:bodyPr/>
-          <a:lstStyle/>
-          <a:p>
-            <a:pPr/>
-            <a:r>
-              <a:rPr lang="th-TH" dirty="0"/>
-              <a:t>3. พัฒนาและตั้งค่าระบบ</a:t>
-            </a:r>
-          </a:p>
-        </p:txBody>
-      </p:sp>
-      <p:sp>
-        <p:nvSpPr>
-          <p:cNvPr id="21" name="D3"/>
-          <p:cNvSpPr>
-            <a:spLocks noGrp="1"/>
-          </p:cNvSpPr>
-          <p:nvPr>
-            <p:ph type="body" idx="37"/>
-          </p:nvPr>
-        </p:nvSpPr>
-        <p:spPr/>
-        <p:txBody>
-          <a:bodyPr/>
-          <a:lstStyle/>
-          <a:p>
-            <a:pPr/>
-            <a:r>
-              <a:rPr lang="th-TH" dirty="0"/>
-              <a:t>10 สัปดาห์</a:t>
-            </a:r>
-          </a:p>
-        </p:txBody>
-      </p:sp>
-      <p:sp>
-        <p:nvSpPr>
-          <p:cNvPr id="22" name="R4"/>
-          <p:cNvSpPr>
-            <a:spLocks noGrp="1"/>
-          </p:cNvSpPr>
-          <p:nvPr>
-            <p:ph type="body" idx="38"/>
-          </p:nvPr>
-        </p:nvSpPr>
-        <p:spPr/>
-        <p:txBody>
-          <a:bodyPr/>
-          <a:lstStyle/>
-          <a:p>
-            <a:pPr/>
-            <a:r>
-              <a:rPr lang="th-TH" dirty="0"/>
-              <a:t>4. ทดสอบ UAT</a:t>
-            </a:r>
-          </a:p>
-        </p:txBody>
-      </p:sp>
-      <p:sp>
-        <p:nvSpPr>
-          <p:cNvPr id="23" name="D4"/>
-          <p:cNvSpPr>
-            <a:spLocks noGrp="1"/>
-          </p:cNvSpPr>
-          <p:nvPr>
-            <p:ph type="body" idx="39"/>
-          </p:nvPr>
-        </p:nvSpPr>
-        <p:spPr/>
-        <p:txBody>
-          <a:bodyPr/>
-          <a:lstStyle/>
-          <a:p>
-            <a:pPr/>
-            <a:r>
-              <a:rPr lang="th-TH" dirty="0"/>
-              <a:t>4 สัปดาห์</a:t>
-            </a:r>
-          </a:p>
-        </p:txBody>
-      </p:sp>
-      <p:sp>
-        <p:nvSpPr>
-          <p:cNvPr id="24" name="R5"/>
-          <p:cNvSpPr>
-            <a:spLocks noGrp="1"/>
-          </p:cNvSpPr>
-          <p:nvPr>
-            <p:ph type="body" idx="40"/>
-          </p:nvPr>
-        </p:nvSpPr>
-        <p:spPr/>
-        <p:txBody>
-          <a:bodyPr/>
-          <a:lstStyle/>
-          <a:p>
-            <a:pPr/>
-            <a:r>
-              <a:rPr lang="th-TH" dirty="0"/>
-              <a:t>5. อบรมผู้ใช้</a:t>
-            </a:r>
-          </a:p>
-        </p:txBody>
-      </p:sp>
-      <p:sp>
-        <p:nvSpPr>
-          <p:cNvPr id="25" name="D5"/>
-          <p:cNvSpPr>
-            <a:spLocks noGrp="1"/>
-          </p:cNvSpPr>
-          <p:nvPr>
-            <p:ph type="body" idx="41"/>
-          </p:nvPr>
-        </p:nvSpPr>
-        <p:spPr/>
-        <p:txBody>
-          <a:bodyPr/>
-          <a:lstStyle/>
-          <a:p>
-            <a:pPr/>
-            <a:r>
-              <a:rPr lang="th-TH" dirty="0"/>
-              <a:t>1 สัปดาห์</a:t>
-            </a:r>
-          </a:p>
-        </p:txBody>
-      </p:sp>
-      <p:sp>
-        <p:nvSpPr>
-          <p:cNvPr id="26" name="R6"/>
-          <p:cNvSpPr>
-            <a:spLocks noGrp="1"/>
-          </p:cNvSpPr>
-          <p:nvPr>
-            <p:ph type="body" idx="42"/>
-          </p:nvPr>
-        </p:nvSpPr>
-        <p:spPr/>
-        <p:txBody>
-          <a:bodyPr/>
-          <a:lstStyle/>
-          <a:p>
-            <a:pPr/>
-            <a:r>
-              <a:rPr lang="th-TH" dirty="0"/>
-              <a:t>6. ขึ้นระบบ</a:t>
-            </a:r>
-          </a:p>
-        </p:txBody>
-      </p:sp>
-      <p:sp>
-        <p:nvSpPr>
-          <p:cNvPr id="27" name="D6"/>
-          <p:cNvSpPr>
-            <a:spLocks noGrp="1"/>
-          </p:cNvSpPr>
-          <p:nvPr>
-            <p:ph type="body" idx="43"/>
-          </p:nvPr>
-        </p:nvSpPr>
-        <p:spPr/>
-        <p:txBody>
-          <a:bodyPr/>
-          <a:lstStyle/>
-          <a:p>
-            <a:pPr/>
-            <a:r>
-              <a:rPr lang="th-TH" dirty="0"/>
-              <a:t>2 สัปดาห์</a:t>
-            </a:r>
-          </a:p>
-        </p:txBody>
-      </p:sp>
-      <p:sp>
-        <p:nvSpPr>
-          <p:cNvPr id="28" name="R7"/>
-          <p:cNvSpPr>
-            <a:spLocks noGrp="1"/>
-          </p:cNvSpPr>
-          <p:nvPr>
-            <p:ph type="body" idx="44"/>
-          </p:nvPr>
-        </p:nvSpPr>
-        <p:spPr/>
-        <p:txBody>
-          <a:bodyPr/>
-          <a:lstStyle/>
-          <a:p>
-            <a:pPr/>
-            <a:r>
-              <a:rPr lang="th-TH" dirty="0"/>
-              <a:t>7. ดูแลหลังขึ้นระบบ</a:t>
-            </a:r>
-          </a:p>
-        </p:txBody>
-      </p:sp>
-      <p:sp>
-        <p:nvSpPr>
-          <p:cNvPr id="29" name="D7"/>
-          <p:cNvSpPr>
-            <a:spLocks noGrp="1"/>
-          </p:cNvSpPr>
-          <p:nvPr>
-            <p:ph type="body" idx="45"/>
-          </p:nvPr>
-        </p:nvSpPr>
-        <p:spPr/>
-        <p:txBody>
-          <a:bodyPr/>
-          <a:lstStyle/>
-          <a:p>
-            <a:pPr/>
-            <a:r>
-              <a:rPr lang="th-TH" dirty="0"/>
-              <a:t>3 เดือน</a:t>
-            </a:r>
-          </a:p>
-        </p:txBody>
-      </p:sp>
-      <p:sp>
-        <p:nvSpPr>
-          <p:cNvPr id="30" name="R8"/>
-          <p:cNvSpPr>
-            <a:spLocks noGrp="1"/>
-          </p:cNvSpPr>
-          <p:nvPr>
-            <p:ph type="body" idx="46"/>
-          </p:nvPr>
-        </p:nvSpPr>
-        <p:spPr/>
-        <p:txBody>
-          <a:bodyPr/>
-          <a:lstStyle/>
-          <a:p>
-            <a:pPr/>
-            <a:r>
-              <a:rPr lang="th-TH" dirty="0"/>
-              <a:t>8. รับประกันระบบ</a:t>
-            </a:r>
-          </a:p>
-        </p:txBody>
-      </p:sp>
-      <p:sp>
-        <p:nvSpPr>
-          <p:cNvPr id="31" name="D8"/>
-          <p:cNvSpPr>
-            <a:spLocks noGrp="1"/>
-          </p:cNvSpPr>
-          <p:nvPr>
-            <p:ph type="body" idx="47"/>
-          </p:nvPr>
-        </p:nvSpPr>
-        <p:spPr/>
-        <p:txBody>
-          <a:bodyPr/>
-          <a:lstStyle/>
-          <a:p>
-            <a:pPr/>
-            <a:r>
-              <a:rPr lang="th-TH" dirty="0"/>
-              <a:t>2.5 เดือน</a:t>
-            </a:r>
-          </a:p>
-        </p:txBody>
-      </p:sp>
-      <p:sp>
-        <p:nvSpPr>
-          <p:cNvPr id="32" name="Key"/>
-          <p:cNvSpPr>
-            <a:spLocks noGrp="1"/>
-          </p:cNvSpPr>
-          <p:nvPr>
-            <p:ph type="body" idx="2"/>
-          </p:nvPr>
-        </p:nvSpPr>
-        <p:spPr/>
-        <p:txBody>
-          <a:bodyPr/>
-          <a:lstStyle/>
-          <a:p>
-            <a:pPr/>
-            <a:r>
-              <a:rPr lang="th-TH" dirty="0"/>
-              <a:t>■ ช่วงงาน   ◆ ส่งมอบ / ตรวจรับ</a:t>
-            </a:r>
-          </a:p>
-        </p:txBody>
-      </p:sp>
-      <p:sp>
-        <p:nvSpPr>
-          <p:cNvPr id="33" name="Asm"/>
-          <p:cNvSpPr>
-            <a:spLocks noGrp="1"/>
-          </p:cNvSpPr>
-          <p:nvPr>
-            <p:ph type="body" idx="3"/>
-          </p:nvPr>
-        </p:nvSpPr>
-        <p:spPr/>
-        <p:txBody>
-          <a:bodyPr/>
-          <a:lstStyle/>
-          <a:p>
-            <a:pPr/>
-            <a:r>
-              <a:rPr lang="th-TH" dirty="0"/>
-              <a:t>นับจากวันลงนามสัญญา · หน่วย: เดือน</a:t>
-            </a:r>
-          </a:p>
-        </p:txBody>
-      </p:sp>
-      <p:sp>
-        <p:nvSpPr>
-          <p:cNvPr id="34" name="TL"/>
-          <p:cNvSpPr>
-            <a:spLocks noGrp="1"/>
-          </p:cNvSpPr>
-          <p:nvPr>
-            <p:ph type="body" idx="4"/>
-          </p:nvPr>
-        </p:nvSpPr>
-        <p:spPr/>
-        <p:txBody>
-          <a:bodyPr/>
-          <a:lstStyle/>
-          <a:p>
-            <a:pPr/>
-            <a:r>
-              <a:rPr lang="th-TH" dirty="0"/>
-              <a:t>สรุป</a:t>
-            </a:r>
-          </a:p>
-        </p:txBody>
-      </p:sp>
-      <p:sp>
-        <p:nvSpPr>
-          <p:cNvPr id="35" name="TC"/>
-          <p:cNvSpPr>
-            <a:spLocks noGrp="1"/>
-          </p:cNvSpPr>
-          <p:nvPr>
-            <p:ph type="body" idx="5"/>
-          </p:nvPr>
-        </p:nvSpPr>
-        <p:spPr/>
-        <p:txBody>
-          <a:bodyPr/>
-          <a:lstStyle/>
-          <a:p>
-            <a:pPr/>
-            <a:r>
-              <a:rPr lang="th-TH" dirty="0"/>
-              <a:t>ขึ้นระบบต้นเดือนที่ 7 ตรวจรับ 3 งวดตามจุดส่งมอบ</a:t>
-            </a:r>
-          </a:p>
-        </p:txBody>
-      </p:sp>
-      <p:sp>
-        <p:nvSpPr>
-          <p:cNvPr id="36" name="Milestone 2"/>
-          <p:cNvSpPr/>
-          <p:nvPr/>
-        </p:nvSpPr>
-        <p:spPr>
-          <a:xfrm>
-            <a:off x="5099558" y="2567178"/>
-            <a:ext cx="146304" cy="146304"/>
-          </a:xfrm>
-          <a:prstGeom prst="diamond">
-            <a:avLst/>
-          </a:prstGeom>
-          <a:solidFill>
-            <a:srgbClr val="BB731B"/>
-          </a:solidFill>
-          <a:ln w="19050">
-            <a:solidFill>
-              <a:srgbClr val="FFFFFF"/>
-            </a:solidFill>
-          </a:ln>
-        </p:spPr>
-        <p:txBody>
-          <a:bodyPr/>
-          <a:lstStyle/>
-          <a:p>
-            <a:endParaRPr lang="th-TH"/>
-          </a:p>
-        </p:txBody>
-      </p:sp>
-      <p:sp>
-        <p:nvSpPr>
-          <p:cNvPr id="37" name="Milestone 2 Label"/>
-          <p:cNvSpPr/>
-          <p:nvPr/>
-        </p:nvSpPr>
-        <p:spPr>
-          <a:xfrm>
-            <a:off x="5291582" y="2446020"/>
-            <a:ext cx="1463040" cy="388620"/>
-          </a:xfrm>
-          <a:prstGeom prst="rect">
-            <a:avLst/>
-          </a:prstGeom>
-          <a:noFill/>
-          <a:ln>
-            <a:noFill/>
-          </a:ln>
-        </p:spPr>
-        <p:txBody>
-          <a:bodyPr wrap="square" anchor="ctr" lIns="0" tIns="0" rIns="0" bIns="0" rtlCol="0"/>
-          <a:lstStyle/>
-          <a:p>
-            <a:pPr algn="l" marL="0" indent="0">
-              <a:lnSpc>
-                <a:spcPct val="100000"/>
-              </a:lnSpc>
-              <a:buNone/>
-            </a:pPr>
-            <a:r>
-              <a:rPr lang="th-TH" sz="1000" dirty="0">
-                <a:solidFill>
-                  <a:srgbClr val="5F5F5F"/>
-                </a:solidFill>
-                <a:latin typeface="+mn-lt"/>
-                <a:ea typeface="+mn-ea"/>
-                <a:cs typeface="+mn-cs"/>
-              </a:rPr>
-              <a:t>ตรวจรับงวด 1</a:t>
-            </a:r>
-          </a:p>
-        </p:txBody>
-      </p:sp>
-      <p:sp>
-        <p:nvSpPr>
-          <p:cNvPr id="38" name="Milestone 4"/>
-          <p:cNvSpPr/>
-          <p:nvPr/>
-        </p:nvSpPr>
-        <p:spPr>
-          <a:xfrm>
-            <a:off x="7348728" y="3344418"/>
-            <a:ext cx="146304" cy="146304"/>
-          </a:xfrm>
-          <a:prstGeom prst="diamond">
-            <a:avLst/>
-          </a:prstGeom>
-          <a:solidFill>
-            <a:srgbClr val="BB731B"/>
-          </a:solidFill>
-          <a:ln w="19050">
-            <a:solidFill>
-              <a:srgbClr val="FFFFFF"/>
-            </a:solidFill>
-          </a:ln>
-        </p:spPr>
-        <p:txBody>
-          <a:bodyPr/>
-          <a:lstStyle/>
-          <a:p>
-            <a:endParaRPr lang="th-TH"/>
-          </a:p>
-        </p:txBody>
-      </p:sp>
-      <p:sp>
-        <p:nvSpPr>
-          <p:cNvPr id="39" name="Milestone 4 Label"/>
-          <p:cNvSpPr/>
-          <p:nvPr/>
-        </p:nvSpPr>
-        <p:spPr>
-          <a:xfrm>
-            <a:off x="7540752" y="3223260"/>
-            <a:ext cx="1463040" cy="388620"/>
-          </a:xfrm>
-          <a:prstGeom prst="rect">
-            <a:avLst/>
-          </a:prstGeom>
-          <a:noFill/>
-          <a:ln>
-            <a:noFill/>
-          </a:ln>
-        </p:spPr>
-        <p:txBody>
-          <a:bodyPr wrap="square" anchor="ctr" lIns="0" tIns="0" rIns="0" bIns="0" rtlCol="0"/>
-          <a:lstStyle/>
-          <a:p>
-            <a:pPr algn="l" marL="0" indent="0">
-              <a:lnSpc>
-                <a:spcPct val="100000"/>
-              </a:lnSpc>
-              <a:buNone/>
-            </a:pPr>
-            <a:r>
-              <a:rPr lang="th-TH" sz="1000" dirty="0">
-                <a:solidFill>
-                  <a:srgbClr val="5F5F5F"/>
-                </a:solidFill>
-                <a:latin typeface="+mn-lt"/>
-                <a:ea typeface="+mn-ea"/>
-                <a:cs typeface="+mn-cs"/>
-              </a:rPr>
-              <a:t>ตรวจรับงวด 2</a:t>
-            </a:r>
-          </a:p>
-        </p:txBody>
-      </p:sp>
-      <p:sp>
-        <p:nvSpPr>
-          <p:cNvPr id="40" name="Milestone 7"/>
-          <p:cNvSpPr/>
-          <p:nvPr/>
-        </p:nvSpPr>
-        <p:spPr>
-          <a:xfrm>
-            <a:off x="9597898" y="4510278"/>
-            <a:ext cx="146304" cy="146304"/>
-          </a:xfrm>
-          <a:prstGeom prst="diamond">
-            <a:avLst/>
-          </a:prstGeom>
-          <a:solidFill>
-            <a:srgbClr val="BB731B"/>
-          </a:solidFill>
-          <a:ln w="19050">
-            <a:solidFill>
-              <a:srgbClr val="FFFFFF"/>
-            </a:solidFill>
-          </a:ln>
-        </p:spPr>
-        <p:txBody>
-          <a:bodyPr/>
-          <a:lstStyle/>
-          <a:p>
-            <a:endParaRPr lang="th-TH"/>
-          </a:p>
-        </p:txBody>
-      </p:sp>
-      <p:sp>
-        <p:nvSpPr>
-          <p:cNvPr id="41" name="Milestone 7 Label"/>
-          <p:cNvSpPr/>
-          <p:nvPr/>
-        </p:nvSpPr>
-        <p:spPr>
-          <a:xfrm>
-            <a:off x="9789922" y="4389120"/>
-            <a:ext cx="1463040" cy="388620"/>
-          </a:xfrm>
-          <a:prstGeom prst="rect">
-            <a:avLst/>
-          </a:prstGeom>
-          <a:noFill/>
-          <a:ln>
-            <a:noFill/>
-          </a:ln>
-        </p:spPr>
-        <p:txBody>
-          <a:bodyPr wrap="square" anchor="ctr" lIns="0" tIns="0" rIns="0" bIns="0" rtlCol="0"/>
-          <a:lstStyle/>
-          <a:p>
-            <a:pPr algn="l" marL="0" indent="0">
-              <a:lnSpc>
-                <a:spcPct val="100000"/>
-              </a:lnSpc>
-              <a:buNone/>
-            </a:pPr>
-            <a:r>
-              <a:rPr lang="th-TH" sz="1000" dirty="0">
-                <a:solidFill>
-                  <a:srgbClr val="5F5F5F"/>
-                </a:solidFill>
-                <a:latin typeface="+mn-lt"/>
-                <a:ea typeface="+mn-ea"/>
-                <a:cs typeface="+mn-cs"/>
-              </a:rPr>
-              <a:t>ตรวจรับงวด 3</a:t>
-            </a:r>
-          </a:p>
-        </p:txBody>
-      </p:sp>
-    </p:spTree>
-  </p:cSld>
-  <p:clrMapOvr>
-    <a:masterClrMapping/>
-  </p:clrMapOvr>
-</p:sld>
-</file>
-
 <file path=ppt/slides/slide21.xml><?xml version="1.0" encoding="utf-8"?>
 <p:sld xmlns:a="http://schemas.openxmlformats.org/drawingml/2006/main" xmlns:r="http://schemas.openxmlformats.org/officeDocument/2006/relationships" xmlns:p="http://schemas.openxmlformats.org/presentationml/2006/main">
   <p:cSld name="">
@@ -33718,83 +35735,14 @@
             <a:pPr/>
             <a:r>
               <a:rPr lang="th-TH" dirty="0"/>
-              <a:t>ครึ่งหนึ่งของงบ 4.8 ล้านบาท คือค่าพัฒนาระบบ</a:t>
-            </a:r>
-          </a:p>
-        </p:txBody>
-      </p:sp>
-      <p:sp>
-        <p:nvSpPr>
-          <p:cNvPr id="3" name="Total"/>
-          <p:cNvSpPr>
-            <a:spLocks noGrp="1"/>
-          </p:cNvSpPr>
-          <p:nvPr>
-            <p:ph type="body" idx="2"/>
-          </p:nvPr>
-        </p:nvSpPr>
-        <p:spPr/>
-        <p:txBody>
-          <a:bodyPr/>
-          <a:lstStyle/>
-          <a:p>
-            <a:pPr/>
-            <a:r>
-              <a:rPr lang="th-TH" dirty="0"/>
-              <a:t>4.8 ล้านบาท</a:t>
-            </a:r>
-          </a:p>
-        </p:txBody>
-      </p:sp>
-      <p:sp>
-        <p:nvSpPr>
-          <p:cNvPr id="4" name="TotalL"/>
-          <p:cNvSpPr>
-            <a:spLocks noGrp="1"/>
-          </p:cNvSpPr>
-          <p:nvPr>
-            <p:ph type="body" idx="3"/>
-          </p:nvPr>
-        </p:nvSpPr>
-        <p:spPr/>
-        <p:txBody>
-          <a:bodyPr/>
-          <a:lstStyle/>
-          <a:p>
-            <a:pPr/>
-            <a:r>
-              <a:rPr lang="th-TH" dirty="0"/>
-              <a:t>งบโครงการรวมทั้งสิ้น</a:t>
-            </a:r>
-          </a:p>
-        </p:txBody>
-      </p:sp>
-      <p:sp>
-        <p:nvSpPr>
-          <p:cNvPr id="5" name="Intro"/>
-          <p:cNvSpPr>
-            <a:spLocks noGrp="1"/>
-          </p:cNvSpPr>
-          <p:nvPr>
-            <p:ph type="body" idx="4"/>
-          </p:nvPr>
-        </p:nvSpPr>
-        <p:spPr/>
-        <p:txBody>
-          <a:bodyPr/>
-          <a:lstStyle/>
-          <a:p>
-            <a:pPr/>
-            <a:r>
-              <a:rPr lang="th-TH" dirty="0"/>
-              <a:t>รวมภาษีมูลค่าเพิ่ม · สัญญา 12 เดือน ไม่รวมค่าบริการรายเดือนหลังปีแรก</a:t>
+              <a:t>แผนงาน 12 เดือน ขึ้นระบบต้นเดือนที่ 7</a:t>
             </a:r>
           </a:p>
         </p:txBody>
       </p:sp>
       <p:graphicFrame>
         <p:nvGraphicFramePr>
-          <p:cNvPr id="6" name="Composition"/>
+          <p:cNvPr id="3" name="Plan"/>
           <p:cNvGraphicFramePr>
             <a:graphicFrameLocks noGrp="1"/>
           </p:cNvGraphicFramePr>
@@ -33803,8 +35751,8 @@
           </p:nvPr>
         </p:nvGraphicFramePr>
         <p:xfrm>
-          <a:off x="2697480" y="3703320"/>
-          <a:ext cx="7299960" cy="1371600"/>
+          <a:off x="3566160" y="2057400"/>
+          <a:ext cx="7711440" cy="3108960"/>
         </p:xfrm>
         <a:graphic>
           <a:graphicData uri="http://schemas.openxmlformats.org/drawingml/2006/chart">
@@ -33814,7 +35762,7 @@
       </p:graphicFrame>
       <p:sp>
         <p:nvSpPr>
-          <p:cNvPr id="7" name="B1"/>
+          <p:cNvPr id="4" name="P1"/>
           <p:cNvSpPr>
             <a:spLocks noGrp="1"/>
           </p:cNvSpPr>
@@ -33830,14 +35778,129 @@
             <a:pPr/>
             <a:r>
               <a:rPr lang="th-TH" dirty="0"/>
-              <a:t>งบโครงการ</a:t>
-            </a:r>
-          </a:p>
-        </p:txBody>
-      </p:sp>
-      <p:sp>
-        <p:nvSpPr>
-          <p:cNvPr id="8" name="SN"/>
+              <a:t>ด.1</a:t>
+            </a:r>
+          </a:p>
+        </p:txBody>
+      </p:sp>
+      <p:sp>
+        <p:nvSpPr>
+          <p:cNvPr id="5" name="P2"/>
+          <p:cNvSpPr>
+            <a:spLocks noGrp="1"/>
+          </p:cNvSpPr>
+          <p:nvPr>
+            <p:ph type="body" idx="21"/>
+          </p:nvPr>
+        </p:nvSpPr>
+        <p:spPr/>
+        <p:txBody>
+          <a:bodyPr/>
+          <a:lstStyle/>
+          <a:p>
+            <a:pPr/>
+            <a:r>
+              <a:rPr lang="th-TH" dirty="0"/>
+              <a:t>ด.2</a:t>
+            </a:r>
+          </a:p>
+        </p:txBody>
+      </p:sp>
+      <p:sp>
+        <p:nvSpPr>
+          <p:cNvPr id="6" name="P3"/>
+          <p:cNvSpPr>
+            <a:spLocks noGrp="1"/>
+          </p:cNvSpPr>
+          <p:nvPr>
+            <p:ph type="body" idx="22"/>
+          </p:nvPr>
+        </p:nvSpPr>
+        <p:spPr/>
+        <p:txBody>
+          <a:bodyPr/>
+          <a:lstStyle/>
+          <a:p>
+            <a:pPr/>
+            <a:r>
+              <a:rPr lang="th-TH" dirty="0"/>
+              <a:t>ด.3</a:t>
+            </a:r>
+          </a:p>
+        </p:txBody>
+      </p:sp>
+      <p:sp>
+        <p:nvSpPr>
+          <p:cNvPr id="7" name="P4"/>
+          <p:cNvSpPr>
+            <a:spLocks noGrp="1"/>
+          </p:cNvSpPr>
+          <p:nvPr>
+            <p:ph type="body" idx="23"/>
+          </p:nvPr>
+        </p:nvSpPr>
+        <p:spPr/>
+        <p:txBody>
+          <a:bodyPr/>
+          <a:lstStyle/>
+          <a:p>
+            <a:pPr/>
+            <a:r>
+              <a:rPr lang="th-TH" dirty="0"/>
+              <a:t>ด.4</a:t>
+            </a:r>
+          </a:p>
+        </p:txBody>
+      </p:sp>
+      <p:sp>
+        <p:nvSpPr>
+          <p:cNvPr id="8" name="P5"/>
+          <p:cNvSpPr>
+            <a:spLocks noGrp="1"/>
+          </p:cNvSpPr>
+          <p:nvPr>
+            <p:ph type="body" idx="24"/>
+          </p:nvPr>
+        </p:nvSpPr>
+        <p:spPr/>
+        <p:txBody>
+          <a:bodyPr/>
+          <a:lstStyle/>
+          <a:p>
+            <a:pPr/>
+            <a:r>
+              <a:rPr lang="th-TH" dirty="0"/>
+              <a:t>ด.5</a:t>
+            </a:r>
+          </a:p>
+        </p:txBody>
+      </p:sp>
+      <p:sp>
+        <p:nvSpPr>
+          <p:cNvPr id="9" name="P6"/>
+          <p:cNvSpPr>
+            <a:spLocks noGrp="1"/>
+          </p:cNvSpPr>
+          <p:nvPr>
+            <p:ph type="body" idx="25"/>
+          </p:nvPr>
+        </p:nvSpPr>
+        <p:spPr/>
+        <p:txBody>
+          <a:bodyPr/>
+          <a:lstStyle/>
+          <a:p>
+            <a:pPr/>
+            <a:r>
+              <a:rPr lang="th-TH" dirty="0"/>
+              <a:t>ด.6</a:t>
+            </a:r>
+          </a:p>
+        </p:txBody>
+      </p:sp>
+      <p:sp>
+        <p:nvSpPr>
+          <p:cNvPr id="10" name="P7"/>
           <p:cNvSpPr>
             <a:spLocks noGrp="1"/>
           </p:cNvSpPr>
@@ -33853,14 +35916,14 @@
             <a:pPr/>
             <a:r>
               <a:rPr lang="th-TH" dirty="0"/>
-              <a:t>พัฒนาและตั้งค่าระบบ</a:t>
-            </a:r>
-          </a:p>
-        </p:txBody>
-      </p:sp>
-      <p:sp>
-        <p:nvSpPr>
-          <p:cNvPr id="9" name="SV"/>
+              <a:t>ด.7</a:t>
+            </a:r>
+          </a:p>
+        </p:txBody>
+      </p:sp>
+      <p:sp>
+        <p:nvSpPr>
+          <p:cNvPr id="11" name="P8"/>
           <p:cNvSpPr>
             <a:spLocks noGrp="1"/>
           </p:cNvSpPr>
@@ -33876,14 +35939,14 @@
             <a:pPr/>
             <a:r>
               <a:rPr lang="th-TH" dirty="0"/>
-              <a:t>2.4 ล้านบาท</a:t>
-            </a:r>
-          </a:p>
-        </p:txBody>
-      </p:sp>
-      <p:sp>
-        <p:nvSpPr>
-          <p:cNvPr id="10" name="SP"/>
+              <a:t>ด.8</a:t>
+            </a:r>
+          </a:p>
+        </p:txBody>
+      </p:sp>
+      <p:sp>
+        <p:nvSpPr>
+          <p:cNvPr id="12" name="P9"/>
           <p:cNvSpPr>
             <a:spLocks noGrp="1"/>
           </p:cNvSpPr>
@@ -33899,14 +35962,14 @@
             <a:pPr/>
             <a:r>
               <a:rPr lang="th-TH" dirty="0"/>
-              <a:t>50%</a:t>
-            </a:r>
-          </a:p>
-        </p:txBody>
-      </p:sp>
-      <p:sp>
-        <p:nvSpPr>
-          <p:cNvPr id="11" name="SN"/>
+              <a:t>ด.9</a:t>
+            </a:r>
+          </a:p>
+        </p:txBody>
+      </p:sp>
+      <p:sp>
+        <p:nvSpPr>
+          <p:cNvPr id="13" name="P10"/>
           <p:cNvSpPr>
             <a:spLocks noGrp="1"/>
           </p:cNvSpPr>
@@ -33922,14 +35985,14 @@
             <a:pPr/>
             <a:r>
               <a:rPr lang="th-TH" dirty="0"/>
-              <a:t>ไลเซนส์ซอฟต์แวร์</a:t>
-            </a:r>
-          </a:p>
-        </p:txBody>
-      </p:sp>
-      <p:sp>
-        <p:nvSpPr>
-          <p:cNvPr id="12" name="SV"/>
+              <a:t>ด.10</a:t>
+            </a:r>
+          </a:p>
+        </p:txBody>
+      </p:sp>
+      <p:sp>
+        <p:nvSpPr>
+          <p:cNvPr id="14" name="P11"/>
           <p:cNvSpPr>
             <a:spLocks noGrp="1"/>
           </p:cNvSpPr>
@@ -33945,14 +36008,14 @@
             <a:pPr/>
             <a:r>
               <a:rPr lang="th-TH" dirty="0"/>
-              <a:t>1.2 ล้านบาท</a:t>
-            </a:r>
-          </a:p>
-        </p:txBody>
-      </p:sp>
-      <p:sp>
-        <p:nvSpPr>
-          <p:cNvPr id="13" name="SP"/>
+              <a:t>ด.11</a:t>
+            </a:r>
+          </a:p>
+        </p:txBody>
+      </p:sp>
+      <p:sp>
+        <p:nvSpPr>
+          <p:cNvPr id="15" name="P12"/>
           <p:cNvSpPr>
             <a:spLocks noGrp="1"/>
           </p:cNvSpPr>
@@ -33968,14 +36031,14 @@
             <a:pPr/>
             <a:r>
               <a:rPr lang="th-TH" dirty="0"/>
-              <a:t>25%</a:t>
-            </a:r>
-          </a:p>
-        </p:txBody>
-      </p:sp>
-      <p:sp>
-        <p:nvSpPr>
-          <p:cNvPr id="14" name="SN"/>
+              <a:t>ด.12</a:t>
+            </a:r>
+          </a:p>
+        </p:txBody>
+      </p:sp>
+      <p:sp>
+        <p:nvSpPr>
+          <p:cNvPr id="16" name="R1"/>
           <p:cNvSpPr>
             <a:spLocks noGrp="1"/>
           </p:cNvSpPr>
@@ -33991,14 +36054,14 @@
             <a:pPr/>
             <a:r>
               <a:rPr lang="th-TH" dirty="0"/>
-              <a:t>คลาวด์ปีแรก</a:t>
-            </a:r>
-          </a:p>
-        </p:txBody>
-      </p:sp>
-      <p:sp>
-        <p:nvSpPr>
-          <p:cNvPr id="15" name="SV"/>
+              <a:t>1. เตรียมระบบ</a:t>
+            </a:r>
+          </a:p>
+        </p:txBody>
+      </p:sp>
+      <p:sp>
+        <p:nvSpPr>
+          <p:cNvPr id="17" name="D1"/>
           <p:cNvSpPr>
             <a:spLocks noGrp="1"/>
           </p:cNvSpPr>
@@ -34014,14 +36077,14 @@
             <a:pPr/>
             <a:r>
               <a:rPr lang="th-TH" dirty="0"/>
-              <a:t>0.7 ล้านบาท</a:t>
-            </a:r>
-          </a:p>
-        </p:txBody>
-      </p:sp>
-      <p:sp>
-        <p:nvSpPr>
-          <p:cNvPr id="16" name="SP"/>
+              <a:t>4 สัปดาห์</a:t>
+            </a:r>
+          </a:p>
+        </p:txBody>
+      </p:sp>
+      <p:sp>
+        <p:nvSpPr>
+          <p:cNvPr id="18" name="R2"/>
           <p:cNvSpPr>
             <a:spLocks noGrp="1"/>
           </p:cNvSpPr>
@@ -34037,14 +36100,14 @@
             <a:pPr/>
             <a:r>
               <a:rPr lang="th-TH" dirty="0"/>
-              <a:t>15%</a:t>
-            </a:r>
-          </a:p>
-        </p:txBody>
-      </p:sp>
-      <p:sp>
-        <p:nvSpPr>
-          <p:cNvPr id="17" name="SN"/>
+              <a:t>2. วิเคราะห์และออกแบบ</a:t>
+            </a:r>
+          </a:p>
+        </p:txBody>
+      </p:sp>
+      <p:sp>
+        <p:nvSpPr>
+          <p:cNvPr id="19" name="D2"/>
           <p:cNvSpPr>
             <a:spLocks noGrp="1"/>
           </p:cNvSpPr>
@@ -34060,14 +36123,14 @@
             <a:pPr/>
             <a:r>
               <a:rPr lang="th-TH" dirty="0"/>
-              <a:t>อื่น ๆ</a:t>
-            </a:r>
-          </a:p>
-        </p:txBody>
-      </p:sp>
-      <p:sp>
-        <p:nvSpPr>
-          <p:cNvPr id="18" name="SV"/>
+              <a:t>6 สัปดาห์</a:t>
+            </a:r>
+          </a:p>
+        </p:txBody>
+      </p:sp>
+      <p:sp>
+        <p:nvSpPr>
+          <p:cNvPr id="20" name="R3"/>
           <p:cNvSpPr>
             <a:spLocks noGrp="1"/>
           </p:cNvSpPr>
@@ -34083,14 +36146,14 @@
             <a:pPr/>
             <a:r>
               <a:rPr lang="th-TH" dirty="0"/>
-              <a:t>0.5 ล้านบาท</a:t>
-            </a:r>
-          </a:p>
-        </p:txBody>
-      </p:sp>
-      <p:sp>
-        <p:nvSpPr>
-          <p:cNvPr id="19" name="SP"/>
+              <a:t>3. พัฒนาและตั้งค่าระบบ</a:t>
+            </a:r>
+          </a:p>
+        </p:txBody>
+      </p:sp>
+      <p:sp>
+        <p:nvSpPr>
+          <p:cNvPr id="21" name="D3"/>
           <p:cNvSpPr>
             <a:spLocks noGrp="1"/>
           </p:cNvSpPr>
@@ -34106,19 +36169,19 @@
             <a:pPr/>
             <a:r>
               <a:rPr lang="th-TH" dirty="0"/>
-              <a:t>10%</a:t>
-            </a:r>
-          </a:p>
-        </p:txBody>
-      </p:sp>
-      <p:sp>
-        <p:nvSpPr>
-          <p:cNvPr id="20" name="Src"/>
-          <p:cNvSpPr>
-            <a:spLocks noGrp="1"/>
-          </p:cNvSpPr>
-          <p:nvPr>
-            <p:ph type="body" idx="5"/>
+              <a:t>10 สัปดาห์</a:t>
+            </a:r>
+          </a:p>
+        </p:txBody>
+      </p:sp>
+      <p:sp>
+        <p:nvSpPr>
+          <p:cNvPr id="22" name="R4"/>
+          <p:cNvSpPr>
+            <a:spLocks noGrp="1"/>
+          </p:cNvSpPr>
+          <p:nvPr>
+            <p:ph type="body" idx="38"/>
           </p:nvPr>
         </p:nvSpPr>
         <p:spPr/>
@@ -34129,19 +36192,272 @@
             <a:pPr/>
             <a:r>
               <a:rPr lang="th-TH" dirty="0"/>
-              <a:t>ใบเสนอราคา NCT-2569-041 · ปัดเป็นแสนบาท</a:t>
-            </a:r>
-          </a:p>
-        </p:txBody>
-      </p:sp>
-      <p:sp>
-        <p:nvSpPr>
-          <p:cNvPr id="21" name="TL"/>
-          <p:cNvSpPr>
-            <a:spLocks noGrp="1"/>
-          </p:cNvSpPr>
-          <p:nvPr>
-            <p:ph type="body" idx="6"/>
+              <a:t>4. ทดสอบ UAT</a:t>
+            </a:r>
+          </a:p>
+        </p:txBody>
+      </p:sp>
+      <p:sp>
+        <p:nvSpPr>
+          <p:cNvPr id="23" name="D4"/>
+          <p:cNvSpPr>
+            <a:spLocks noGrp="1"/>
+          </p:cNvSpPr>
+          <p:nvPr>
+            <p:ph type="body" idx="39"/>
+          </p:nvPr>
+        </p:nvSpPr>
+        <p:spPr/>
+        <p:txBody>
+          <a:bodyPr/>
+          <a:lstStyle/>
+          <a:p>
+            <a:pPr/>
+            <a:r>
+              <a:rPr lang="th-TH" dirty="0"/>
+              <a:t>4 สัปดาห์</a:t>
+            </a:r>
+          </a:p>
+        </p:txBody>
+      </p:sp>
+      <p:sp>
+        <p:nvSpPr>
+          <p:cNvPr id="24" name="R5"/>
+          <p:cNvSpPr>
+            <a:spLocks noGrp="1"/>
+          </p:cNvSpPr>
+          <p:nvPr>
+            <p:ph type="body" idx="40"/>
+          </p:nvPr>
+        </p:nvSpPr>
+        <p:spPr/>
+        <p:txBody>
+          <a:bodyPr/>
+          <a:lstStyle/>
+          <a:p>
+            <a:pPr/>
+            <a:r>
+              <a:rPr lang="th-TH" dirty="0"/>
+              <a:t>5. อบรมผู้ใช้</a:t>
+            </a:r>
+          </a:p>
+        </p:txBody>
+      </p:sp>
+      <p:sp>
+        <p:nvSpPr>
+          <p:cNvPr id="25" name="D5"/>
+          <p:cNvSpPr>
+            <a:spLocks noGrp="1"/>
+          </p:cNvSpPr>
+          <p:nvPr>
+            <p:ph type="body" idx="41"/>
+          </p:nvPr>
+        </p:nvSpPr>
+        <p:spPr/>
+        <p:txBody>
+          <a:bodyPr/>
+          <a:lstStyle/>
+          <a:p>
+            <a:pPr/>
+            <a:r>
+              <a:rPr lang="th-TH" dirty="0"/>
+              <a:t>1 สัปดาห์</a:t>
+            </a:r>
+          </a:p>
+        </p:txBody>
+      </p:sp>
+      <p:sp>
+        <p:nvSpPr>
+          <p:cNvPr id="26" name="R6"/>
+          <p:cNvSpPr>
+            <a:spLocks noGrp="1"/>
+          </p:cNvSpPr>
+          <p:nvPr>
+            <p:ph type="body" idx="42"/>
+          </p:nvPr>
+        </p:nvSpPr>
+        <p:spPr/>
+        <p:txBody>
+          <a:bodyPr/>
+          <a:lstStyle/>
+          <a:p>
+            <a:pPr/>
+            <a:r>
+              <a:rPr lang="th-TH" dirty="0"/>
+              <a:t>6. ขึ้นระบบ</a:t>
+            </a:r>
+          </a:p>
+        </p:txBody>
+      </p:sp>
+      <p:sp>
+        <p:nvSpPr>
+          <p:cNvPr id="27" name="D6"/>
+          <p:cNvSpPr>
+            <a:spLocks noGrp="1"/>
+          </p:cNvSpPr>
+          <p:nvPr>
+            <p:ph type="body" idx="43"/>
+          </p:nvPr>
+        </p:nvSpPr>
+        <p:spPr/>
+        <p:txBody>
+          <a:bodyPr/>
+          <a:lstStyle/>
+          <a:p>
+            <a:pPr/>
+            <a:r>
+              <a:rPr lang="th-TH" dirty="0"/>
+              <a:t>2 สัปดาห์</a:t>
+            </a:r>
+          </a:p>
+        </p:txBody>
+      </p:sp>
+      <p:sp>
+        <p:nvSpPr>
+          <p:cNvPr id="28" name="R7"/>
+          <p:cNvSpPr>
+            <a:spLocks noGrp="1"/>
+          </p:cNvSpPr>
+          <p:nvPr>
+            <p:ph type="body" idx="44"/>
+          </p:nvPr>
+        </p:nvSpPr>
+        <p:spPr/>
+        <p:txBody>
+          <a:bodyPr/>
+          <a:lstStyle/>
+          <a:p>
+            <a:pPr/>
+            <a:r>
+              <a:rPr lang="th-TH" dirty="0"/>
+              <a:t>7. ดูแลหลังขึ้นระบบ</a:t>
+            </a:r>
+          </a:p>
+        </p:txBody>
+      </p:sp>
+      <p:sp>
+        <p:nvSpPr>
+          <p:cNvPr id="29" name="D7"/>
+          <p:cNvSpPr>
+            <a:spLocks noGrp="1"/>
+          </p:cNvSpPr>
+          <p:nvPr>
+            <p:ph type="body" idx="45"/>
+          </p:nvPr>
+        </p:nvSpPr>
+        <p:spPr/>
+        <p:txBody>
+          <a:bodyPr/>
+          <a:lstStyle/>
+          <a:p>
+            <a:pPr/>
+            <a:r>
+              <a:rPr lang="th-TH" dirty="0"/>
+              <a:t>3 เดือน</a:t>
+            </a:r>
+          </a:p>
+        </p:txBody>
+      </p:sp>
+      <p:sp>
+        <p:nvSpPr>
+          <p:cNvPr id="30" name="R8"/>
+          <p:cNvSpPr>
+            <a:spLocks noGrp="1"/>
+          </p:cNvSpPr>
+          <p:nvPr>
+            <p:ph type="body" idx="46"/>
+          </p:nvPr>
+        </p:nvSpPr>
+        <p:spPr/>
+        <p:txBody>
+          <a:bodyPr/>
+          <a:lstStyle/>
+          <a:p>
+            <a:pPr/>
+            <a:r>
+              <a:rPr lang="th-TH" dirty="0"/>
+              <a:t>8. รับประกันระบบ</a:t>
+            </a:r>
+          </a:p>
+        </p:txBody>
+      </p:sp>
+      <p:sp>
+        <p:nvSpPr>
+          <p:cNvPr id="31" name="D8"/>
+          <p:cNvSpPr>
+            <a:spLocks noGrp="1"/>
+          </p:cNvSpPr>
+          <p:nvPr>
+            <p:ph type="body" idx="47"/>
+          </p:nvPr>
+        </p:nvSpPr>
+        <p:spPr/>
+        <p:txBody>
+          <a:bodyPr/>
+          <a:lstStyle/>
+          <a:p>
+            <a:pPr/>
+            <a:r>
+              <a:rPr lang="th-TH" dirty="0"/>
+              <a:t>2.5 เดือน</a:t>
+            </a:r>
+          </a:p>
+        </p:txBody>
+      </p:sp>
+      <p:sp>
+        <p:nvSpPr>
+          <p:cNvPr id="32" name="Key"/>
+          <p:cNvSpPr>
+            <a:spLocks noGrp="1"/>
+          </p:cNvSpPr>
+          <p:nvPr>
+            <p:ph type="body" idx="2"/>
+          </p:nvPr>
+        </p:nvSpPr>
+        <p:spPr/>
+        <p:txBody>
+          <a:bodyPr/>
+          <a:lstStyle/>
+          <a:p>
+            <a:pPr/>
+            <a:r>
+              <a:rPr lang="th-TH" dirty="0"/>
+              <a:t>■ ช่วงงาน   ◆ ส่งมอบ / ตรวจรับ</a:t>
+            </a:r>
+          </a:p>
+        </p:txBody>
+      </p:sp>
+      <p:sp>
+        <p:nvSpPr>
+          <p:cNvPr id="33" name="Asm"/>
+          <p:cNvSpPr>
+            <a:spLocks noGrp="1"/>
+          </p:cNvSpPr>
+          <p:nvPr>
+            <p:ph type="body" idx="3"/>
+          </p:nvPr>
+        </p:nvSpPr>
+        <p:spPr/>
+        <p:txBody>
+          <a:bodyPr/>
+          <a:lstStyle/>
+          <a:p>
+            <a:pPr/>
+            <a:r>
+              <a:rPr lang="th-TH" dirty="0"/>
+              <a:t>นับจากวันลงนามสัญญา · หน่วย: เดือน</a:t>
+            </a:r>
+          </a:p>
+        </p:txBody>
+      </p:sp>
+      <p:sp>
+        <p:nvSpPr>
+          <p:cNvPr id="34" name="TL"/>
+          <p:cNvSpPr>
+            <a:spLocks noGrp="1"/>
+          </p:cNvSpPr>
+          <p:nvPr>
+            <p:ph type="body" idx="4"/>
           </p:nvPr>
         </p:nvSpPr>
         <p:spPr/>
@@ -34159,12 +36475,12 @@
       </p:sp>
       <p:sp>
         <p:nvSpPr>
-          <p:cNvPr id="22" name="TC"/>
-          <p:cNvSpPr>
-            <a:spLocks noGrp="1"/>
-          </p:cNvSpPr>
-          <p:nvPr>
-            <p:ph type="body" idx="7"/>
+          <p:cNvPr id="35" name="TC"/>
+          <p:cNvSpPr>
+            <a:spLocks noGrp="1"/>
+          </p:cNvSpPr>
+          <p:nvPr>
+            <p:ph type="body" idx="5"/>
           </p:nvPr>
         </p:nvSpPr>
         <p:spPr/>
@@ -34175,7 +36491,229 @@
             <a:pPr/>
             <a:r>
               <a:rPr lang="th-TH" dirty="0"/>
-              <a:t>ไลเซนส์กับคลาวด์รวมกันไม่ถึง 40% งบส่วนใหญ่จ่ายให้งานที่ทำครั้งเดียว</a:t>
+              <a:t>ขึ้นระบบต้นเดือนที่ 7 ตรวจรับ 3 งวดตามจุดส่งมอบ</a:t>
+            </a:r>
+          </a:p>
+        </p:txBody>
+      </p:sp>
+      <p:sp>
+        <p:nvSpPr>
+          <p:cNvPr id="36" name="Milestone 2"/>
+          <p:cNvSpPr/>
+          <p:nvPr/>
+        </p:nvSpPr>
+        <p:spPr>
+          <a:xfrm>
+            <a:off x="5099558" y="2567178"/>
+            <a:ext cx="146304" cy="146304"/>
+          </a:xfrm>
+          <a:prstGeom prst="diamond">
+            <a:avLst/>
+          </a:prstGeom>
+          <a:solidFill>
+            <a:srgbClr val="BB731B"/>
+          </a:solidFill>
+          <a:ln w="19050">
+            <a:solidFill>
+              <a:srgbClr val="FFFFFF"/>
+            </a:solidFill>
+          </a:ln>
+        </p:spPr>
+        <p:txBody>
+          <a:bodyPr/>
+          <a:lstStyle/>
+          <a:p>
+            <a:endParaRPr lang="th-TH"/>
+          </a:p>
+        </p:txBody>
+      </p:sp>
+      <p:sp>
+        <p:nvSpPr>
+          <p:cNvPr id="37" name="Milestone 2 Label"/>
+          <p:cNvSpPr/>
+          <p:nvPr/>
+        </p:nvSpPr>
+        <p:spPr>
+          <a:xfrm>
+            <a:off x="5291582" y="2446020"/>
+            <a:ext cx="1463040" cy="388620"/>
+          </a:xfrm>
+          <a:prstGeom prst="rect">
+            <a:avLst/>
+          </a:prstGeom>
+          <a:noFill/>
+          <a:ln>
+            <a:noFill/>
+          </a:ln>
+        </p:spPr>
+        <p:txBody>
+          <a:bodyPr wrap="square" anchor="ctr" lIns="0" tIns="0" rIns="0" bIns="0" rtlCol="0"/>
+          <a:lstStyle/>
+          <a:p>
+            <a:pPr algn="l" marL="0" indent="0">
+              <a:lnSpc>
+                <a:spcPct val="100000"/>
+              </a:lnSpc>
+              <a:buNone/>
+            </a:pPr>
+            <a:r>
+              <a:rPr lang="th-TH" sz="1000" dirty="0">
+                <a:solidFill>
+                  <a:srgbClr val="5F5F5F"/>
+                </a:solidFill>
+                <a:latin typeface="+mn-lt"/>
+                <a:ea typeface="+mn-ea"/>
+                <a:cs typeface="+mn-cs"/>
+              </a:rPr>
+              <a:t>ตรวจรับงวด 1</a:t>
+            </a:r>
+          </a:p>
+        </p:txBody>
+      </p:sp>
+      <p:sp>
+        <p:nvSpPr>
+          <p:cNvPr id="38" name="Milestone 4"/>
+          <p:cNvSpPr/>
+          <p:nvPr/>
+        </p:nvSpPr>
+        <p:spPr>
+          <a:xfrm>
+            <a:off x="7348728" y="3344418"/>
+            <a:ext cx="146304" cy="146304"/>
+          </a:xfrm>
+          <a:prstGeom prst="diamond">
+            <a:avLst/>
+          </a:prstGeom>
+          <a:solidFill>
+            <a:srgbClr val="BB731B"/>
+          </a:solidFill>
+          <a:ln w="19050">
+            <a:solidFill>
+              <a:srgbClr val="FFFFFF"/>
+            </a:solidFill>
+          </a:ln>
+        </p:spPr>
+        <p:txBody>
+          <a:bodyPr/>
+          <a:lstStyle/>
+          <a:p>
+            <a:endParaRPr lang="th-TH"/>
+          </a:p>
+        </p:txBody>
+      </p:sp>
+      <p:sp>
+        <p:nvSpPr>
+          <p:cNvPr id="39" name="Milestone 4 Label"/>
+          <p:cNvSpPr/>
+          <p:nvPr/>
+        </p:nvSpPr>
+        <p:spPr>
+          <a:xfrm>
+            <a:off x="7540752" y="3223260"/>
+            <a:ext cx="1463040" cy="388620"/>
+          </a:xfrm>
+          <a:prstGeom prst="rect">
+            <a:avLst/>
+          </a:prstGeom>
+          <a:noFill/>
+          <a:ln>
+            <a:noFill/>
+          </a:ln>
+        </p:spPr>
+        <p:txBody>
+          <a:bodyPr wrap="square" anchor="ctr" lIns="0" tIns="0" rIns="0" bIns="0" rtlCol="0"/>
+          <a:lstStyle/>
+          <a:p>
+            <a:pPr algn="l" marL="0" indent="0">
+              <a:lnSpc>
+                <a:spcPct val="100000"/>
+              </a:lnSpc>
+              <a:buNone/>
+            </a:pPr>
+            <a:r>
+              <a:rPr lang="th-TH" sz="1000" dirty="0">
+                <a:solidFill>
+                  <a:srgbClr val="5F5F5F"/>
+                </a:solidFill>
+                <a:latin typeface="+mn-lt"/>
+                <a:ea typeface="+mn-ea"/>
+                <a:cs typeface="+mn-cs"/>
+              </a:rPr>
+              <a:t>ตรวจรับงวด 2</a:t>
+            </a:r>
+          </a:p>
+        </p:txBody>
+      </p:sp>
+      <p:sp>
+        <p:nvSpPr>
+          <p:cNvPr id="40" name="Milestone 7"/>
+          <p:cNvSpPr/>
+          <p:nvPr/>
+        </p:nvSpPr>
+        <p:spPr>
+          <a:xfrm>
+            <a:off x="9597898" y="4510278"/>
+            <a:ext cx="146304" cy="146304"/>
+          </a:xfrm>
+          <a:prstGeom prst="diamond">
+            <a:avLst/>
+          </a:prstGeom>
+          <a:solidFill>
+            <a:srgbClr val="BB731B"/>
+          </a:solidFill>
+          <a:ln w="19050">
+            <a:solidFill>
+              <a:srgbClr val="FFFFFF"/>
+            </a:solidFill>
+          </a:ln>
+        </p:spPr>
+        <p:txBody>
+          <a:bodyPr/>
+          <a:lstStyle/>
+          <a:p>
+            <a:endParaRPr lang="th-TH"/>
+          </a:p>
+        </p:txBody>
+      </p:sp>
+      <p:sp>
+        <p:nvSpPr>
+          <p:cNvPr id="41" name="Milestone 7 Label"/>
+          <p:cNvSpPr/>
+          <p:nvPr/>
+        </p:nvSpPr>
+        <p:spPr>
+          <a:xfrm>
+            <a:off x="9789922" y="4389120"/>
+            <a:ext cx="1463040" cy="388620"/>
+          </a:xfrm>
+          <a:prstGeom prst="rect">
+            <a:avLst/>
+          </a:prstGeom>
+          <a:noFill/>
+          <a:ln>
+            <a:noFill/>
+          </a:ln>
+        </p:spPr>
+        <p:txBody>
+          <a:bodyPr wrap="square" anchor="ctr" lIns="0" tIns="0" rIns="0" bIns="0" rtlCol="0"/>
+          <a:lstStyle/>
+          <a:p>
+            <a:pPr algn="l" marL="0" indent="0">
+              <a:lnSpc>
+                <a:spcPct val="100000"/>
+              </a:lnSpc>
+              <a:buNone/>
+            </a:pPr>
+            <a:r>
+              <a:rPr lang="th-TH" sz="1000" dirty="0">
+                <a:solidFill>
+                  <a:srgbClr val="5F5F5F"/>
+                </a:solidFill>
+                <a:latin typeface="+mn-lt"/>
+                <a:ea typeface="+mn-ea"/>
+                <a:cs typeface="+mn-cs"/>
+              </a:rPr>
+              <a:t>ตรวจรับงวด 3</a:t>
             </a:r>
           </a:p>
         </p:txBody>
@@ -34223,19 +36761,19 @@
             <a:pPr/>
             <a:r>
               <a:rPr lang="th-TH" dirty="0"/>
-              <a:t>5. Implementation Stage</a:t>
-            </a:r>
-          </a:p>
-        </p:txBody>
-      </p:sp>
-      <p:sp>
-        <p:nvSpPr>
-          <p:cNvPr id="3" name="KAL"/>
-          <p:cNvSpPr>
-            <a:spLocks noGrp="1"/>
-          </p:cNvSpPr>
-          <p:nvPr>
-            <p:ph type="body" idx="1"/>
+              <a:t>ครึ่งหนึ่งของงบ 4.8 ล้านบาท คือค่าพัฒนาระบบ</a:t>
+            </a:r>
+          </a:p>
+        </p:txBody>
+      </p:sp>
+      <p:sp>
+        <p:nvSpPr>
+          <p:cNvPr id="3" name="Total"/>
+          <p:cNvSpPr>
+            <a:spLocks noGrp="1"/>
+          </p:cNvSpPr>
+          <p:nvPr>
+            <p:ph type="body" idx="2"/>
           </p:nvPr>
         </p:nvSpPr>
         <p:spPr/>
@@ -34246,19 +36784,19 @@
             <a:pPr/>
             <a:r>
               <a:rPr lang="th-TH" dirty="0"/>
-              <a:t>Key Activity :</a:t>
-            </a:r>
-          </a:p>
-        </p:txBody>
-      </p:sp>
-      <p:sp>
-        <p:nvSpPr>
-          <p:cNvPr id="4" name="KAV"/>
-          <p:cNvSpPr>
-            <a:spLocks noGrp="1"/>
-          </p:cNvSpPr>
-          <p:nvPr>
-            <p:ph type="body" idx="2"/>
+              <a:t>4.8 ล้านบาท</a:t>
+            </a:r>
+          </a:p>
+        </p:txBody>
+      </p:sp>
+      <p:sp>
+        <p:nvSpPr>
+          <p:cNvPr id="4" name="TotalL"/>
+          <p:cNvSpPr>
+            <a:spLocks noGrp="1"/>
+          </p:cNvSpPr>
+          <p:nvPr>
+            <p:ph type="body" idx="3"/>
           </p:nvPr>
         </p:nvSpPr>
         <p:spPr/>
@@ -34269,19 +36807,19 @@
             <a:pPr/>
             <a:r>
               <a:rPr lang="th-TH" dirty="0"/>
-              <a:t>ตั้งค่าสภาพแวดล้อม ติดตั้งฮาร์ดแวร์และซอฟต์แวร์</a:t>
-            </a:r>
-          </a:p>
-        </p:txBody>
-      </p:sp>
-      <p:sp>
-        <p:nvSpPr>
-          <p:cNvPr id="5" name="PL"/>
-          <p:cNvSpPr>
-            <a:spLocks noGrp="1"/>
-          </p:cNvSpPr>
-          <p:nvPr>
-            <p:ph type="body" idx="3"/>
+              <a:t>งบโครงการรวมทั้งสิ้น</a:t>
+            </a:r>
+          </a:p>
+        </p:txBody>
+      </p:sp>
+      <p:sp>
+        <p:nvSpPr>
+          <p:cNvPr id="5" name="Intro"/>
+          <p:cNvSpPr>
+            <a:spLocks noGrp="1"/>
+          </p:cNvSpPr>
+          <p:nvPr>
+            <p:ph type="body" idx="4"/>
           </p:nvPr>
         </p:nvSpPr>
         <p:spPr/>
@@ -34292,19 +36830,39 @@
             <a:pPr/>
             <a:r>
               <a:rPr lang="th-TH" dirty="0"/>
-              <a:t>Participant :</a:t>
-            </a:r>
-          </a:p>
-        </p:txBody>
-      </p:sp>
-      <p:sp>
-        <p:nvSpPr>
-          <p:cNvPr id="6" name="PV"/>
-          <p:cNvSpPr>
-            <a:spLocks noGrp="1"/>
-          </p:cNvSpPr>
-          <p:nvPr>
-            <p:ph type="body" idx="4"/>
+              <a:t>รวมภาษีมูลค่าเพิ่ม · สัญญา 12 เดือน ไม่รวมค่าบริการรายเดือนหลังปีแรก</a:t>
+            </a:r>
+          </a:p>
+        </p:txBody>
+      </p:sp>
+      <p:graphicFrame>
+        <p:nvGraphicFramePr>
+          <p:cNvPr id="6" name="Composition"/>
+          <p:cNvGraphicFramePr>
+            <a:graphicFrameLocks noGrp="1"/>
+          </p:cNvGraphicFramePr>
+          <p:nvPr>
+            <p:ph type="chart" idx="1"/>
+          </p:nvPr>
+        </p:nvGraphicFramePr>
+        <p:xfrm>
+          <a:off x="2697480" y="3703320"/>
+          <a:ext cx="7299960" cy="1371600"/>
+        </p:xfrm>
+        <a:graphic>
+          <a:graphicData uri="http://schemas.openxmlformats.org/drawingml/2006/chart">
+            <c:chart xmlns:c="http://schemas.openxmlformats.org/drawingml/2006/chart" r:id="rId2"/>
+          </a:graphicData>
+        </a:graphic>
+      </p:graphicFrame>
+      <p:sp>
+        <p:nvSpPr>
+          <p:cNvPr id="7" name="B1"/>
+          <p:cNvSpPr>
+            <a:spLocks noGrp="1"/>
+          </p:cNvSpPr>
+          <p:nvPr>
+            <p:ph type="body" idx="20"/>
           </p:nvPr>
         </p:nvSpPr>
         <p:spPr/>
@@ -34315,14 +36873,290 @@
             <a:pPr/>
             <a:r>
               <a:rPr lang="th-TH" dirty="0"/>
-              <a:t>NCT Infra Engineer, ทีมไอทีลูกค้า, Business Analyst</a:t>
-            </a:r>
-          </a:p>
-        </p:txBody>
-      </p:sp>
-      <p:sp>
-        <p:nvSpPr>
-          <p:cNvPr id="7" name="PN"/>
+              <a:t>งบโครงการ</a:t>
+            </a:r>
+          </a:p>
+        </p:txBody>
+      </p:sp>
+      <p:sp>
+        <p:nvSpPr>
+          <p:cNvPr id="8" name="SN"/>
+          <p:cNvSpPr>
+            <a:spLocks noGrp="1"/>
+          </p:cNvSpPr>
+          <p:nvPr>
+            <p:ph type="body" idx="26"/>
+          </p:nvPr>
+        </p:nvSpPr>
+        <p:spPr/>
+        <p:txBody>
+          <a:bodyPr/>
+          <a:lstStyle/>
+          <a:p>
+            <a:pPr/>
+            <a:r>
+              <a:rPr lang="th-TH" dirty="0"/>
+              <a:t>พัฒนาและตั้งค่าระบบ</a:t>
+            </a:r>
+          </a:p>
+        </p:txBody>
+      </p:sp>
+      <p:sp>
+        <p:nvSpPr>
+          <p:cNvPr id="9" name="SV"/>
+          <p:cNvSpPr>
+            <a:spLocks noGrp="1"/>
+          </p:cNvSpPr>
+          <p:nvPr>
+            <p:ph type="body" idx="27"/>
+          </p:nvPr>
+        </p:nvSpPr>
+        <p:spPr/>
+        <p:txBody>
+          <a:bodyPr/>
+          <a:lstStyle/>
+          <a:p>
+            <a:pPr/>
+            <a:r>
+              <a:rPr lang="th-TH" dirty="0"/>
+              <a:t>2.4 ล้านบาท</a:t>
+            </a:r>
+          </a:p>
+        </p:txBody>
+      </p:sp>
+      <p:sp>
+        <p:nvSpPr>
+          <p:cNvPr id="10" name="SP"/>
+          <p:cNvSpPr>
+            <a:spLocks noGrp="1"/>
+          </p:cNvSpPr>
+          <p:nvPr>
+            <p:ph type="body" idx="28"/>
+          </p:nvPr>
+        </p:nvSpPr>
+        <p:spPr/>
+        <p:txBody>
+          <a:bodyPr/>
+          <a:lstStyle/>
+          <a:p>
+            <a:pPr/>
+            <a:r>
+              <a:rPr lang="th-TH" dirty="0"/>
+              <a:t>50%</a:t>
+            </a:r>
+          </a:p>
+        </p:txBody>
+      </p:sp>
+      <p:sp>
+        <p:nvSpPr>
+          <p:cNvPr id="11" name="SN"/>
+          <p:cNvSpPr>
+            <a:spLocks noGrp="1"/>
+          </p:cNvSpPr>
+          <p:nvPr>
+            <p:ph type="body" idx="29"/>
+          </p:nvPr>
+        </p:nvSpPr>
+        <p:spPr/>
+        <p:txBody>
+          <a:bodyPr/>
+          <a:lstStyle/>
+          <a:p>
+            <a:pPr/>
+            <a:r>
+              <a:rPr lang="th-TH" dirty="0"/>
+              <a:t>ไลเซนส์ซอฟต์แวร์</a:t>
+            </a:r>
+          </a:p>
+        </p:txBody>
+      </p:sp>
+      <p:sp>
+        <p:nvSpPr>
+          <p:cNvPr id="12" name="SV"/>
+          <p:cNvSpPr>
+            <a:spLocks noGrp="1"/>
+          </p:cNvSpPr>
+          <p:nvPr>
+            <p:ph type="body" idx="30"/>
+          </p:nvPr>
+        </p:nvSpPr>
+        <p:spPr/>
+        <p:txBody>
+          <a:bodyPr/>
+          <a:lstStyle/>
+          <a:p>
+            <a:pPr/>
+            <a:r>
+              <a:rPr lang="th-TH" dirty="0"/>
+              <a:t>1.2 ล้านบาท</a:t>
+            </a:r>
+          </a:p>
+        </p:txBody>
+      </p:sp>
+      <p:sp>
+        <p:nvSpPr>
+          <p:cNvPr id="13" name="SP"/>
+          <p:cNvSpPr>
+            <a:spLocks noGrp="1"/>
+          </p:cNvSpPr>
+          <p:nvPr>
+            <p:ph type="body" idx="31"/>
+          </p:nvPr>
+        </p:nvSpPr>
+        <p:spPr/>
+        <p:txBody>
+          <a:bodyPr/>
+          <a:lstStyle/>
+          <a:p>
+            <a:pPr/>
+            <a:r>
+              <a:rPr lang="th-TH" dirty="0"/>
+              <a:t>25%</a:t>
+            </a:r>
+          </a:p>
+        </p:txBody>
+      </p:sp>
+      <p:sp>
+        <p:nvSpPr>
+          <p:cNvPr id="14" name="SN"/>
+          <p:cNvSpPr>
+            <a:spLocks noGrp="1"/>
+          </p:cNvSpPr>
+          <p:nvPr>
+            <p:ph type="body" idx="32"/>
+          </p:nvPr>
+        </p:nvSpPr>
+        <p:spPr/>
+        <p:txBody>
+          <a:bodyPr/>
+          <a:lstStyle/>
+          <a:p>
+            <a:pPr/>
+            <a:r>
+              <a:rPr lang="th-TH" dirty="0"/>
+              <a:t>คลาวด์ปีแรก</a:t>
+            </a:r>
+          </a:p>
+        </p:txBody>
+      </p:sp>
+      <p:sp>
+        <p:nvSpPr>
+          <p:cNvPr id="15" name="SV"/>
+          <p:cNvSpPr>
+            <a:spLocks noGrp="1"/>
+          </p:cNvSpPr>
+          <p:nvPr>
+            <p:ph type="body" idx="33"/>
+          </p:nvPr>
+        </p:nvSpPr>
+        <p:spPr/>
+        <p:txBody>
+          <a:bodyPr/>
+          <a:lstStyle/>
+          <a:p>
+            <a:pPr/>
+            <a:r>
+              <a:rPr lang="th-TH" dirty="0"/>
+              <a:t>0.7 ล้านบาท</a:t>
+            </a:r>
+          </a:p>
+        </p:txBody>
+      </p:sp>
+      <p:sp>
+        <p:nvSpPr>
+          <p:cNvPr id="16" name="SP"/>
+          <p:cNvSpPr>
+            <a:spLocks noGrp="1"/>
+          </p:cNvSpPr>
+          <p:nvPr>
+            <p:ph type="body" idx="34"/>
+          </p:nvPr>
+        </p:nvSpPr>
+        <p:spPr/>
+        <p:txBody>
+          <a:bodyPr/>
+          <a:lstStyle/>
+          <a:p>
+            <a:pPr/>
+            <a:r>
+              <a:rPr lang="th-TH" dirty="0"/>
+              <a:t>15%</a:t>
+            </a:r>
+          </a:p>
+        </p:txBody>
+      </p:sp>
+      <p:sp>
+        <p:nvSpPr>
+          <p:cNvPr id="17" name="SN"/>
+          <p:cNvSpPr>
+            <a:spLocks noGrp="1"/>
+          </p:cNvSpPr>
+          <p:nvPr>
+            <p:ph type="body" idx="35"/>
+          </p:nvPr>
+        </p:nvSpPr>
+        <p:spPr/>
+        <p:txBody>
+          <a:bodyPr/>
+          <a:lstStyle/>
+          <a:p>
+            <a:pPr/>
+            <a:r>
+              <a:rPr lang="th-TH" dirty="0"/>
+              <a:t>อื่น ๆ</a:t>
+            </a:r>
+          </a:p>
+        </p:txBody>
+      </p:sp>
+      <p:sp>
+        <p:nvSpPr>
+          <p:cNvPr id="18" name="SV"/>
+          <p:cNvSpPr>
+            <a:spLocks noGrp="1"/>
+          </p:cNvSpPr>
+          <p:nvPr>
+            <p:ph type="body" idx="36"/>
+          </p:nvPr>
+        </p:nvSpPr>
+        <p:spPr/>
+        <p:txBody>
+          <a:bodyPr/>
+          <a:lstStyle/>
+          <a:p>
+            <a:pPr/>
+            <a:r>
+              <a:rPr lang="th-TH" dirty="0"/>
+              <a:t>0.5 ล้านบาท</a:t>
+            </a:r>
+          </a:p>
+        </p:txBody>
+      </p:sp>
+      <p:sp>
+        <p:nvSpPr>
+          <p:cNvPr id="19" name="SP"/>
+          <p:cNvSpPr>
+            <a:spLocks noGrp="1"/>
+          </p:cNvSpPr>
+          <p:nvPr>
+            <p:ph type="body" idx="37"/>
+          </p:nvPr>
+        </p:nvSpPr>
+        <p:spPr/>
+        <p:txBody>
+          <a:bodyPr/>
+          <a:lstStyle/>
+          <a:p>
+            <a:pPr/>
+            <a:r>
+              <a:rPr lang="th-TH" dirty="0"/>
+              <a:t>10%</a:t>
+            </a:r>
+          </a:p>
+        </p:txBody>
+      </p:sp>
+      <p:sp>
+        <p:nvSpPr>
+          <p:cNvPr id="20" name="Src"/>
           <p:cNvSpPr>
             <a:spLocks noGrp="1"/>
           </p:cNvSpPr>
@@ -34338,14 +37172,14 @@
             <a:pPr/>
             <a:r>
               <a:rPr lang="th-TH" dirty="0"/>
-              <a:t>01</a:t>
-            </a:r>
-          </a:p>
-        </p:txBody>
-      </p:sp>
-      <p:sp>
-        <p:nvSpPr>
-          <p:cNvPr id="8" name="PP"/>
+              <a:t>ใบเสนอราคา NCT-2569-041 · ปัดเป็นแสนบาท</a:t>
+            </a:r>
+          </a:p>
+        </p:txBody>
+      </p:sp>
+      <p:sp>
+        <p:nvSpPr>
+          <p:cNvPr id="21" name="TL"/>
           <p:cNvSpPr>
             <a:spLocks noGrp="1"/>
           </p:cNvSpPr>
@@ -34361,14 +37195,14 @@
             <a:pPr/>
             <a:r>
               <a:rPr lang="th-TH" dirty="0"/>
-              <a:t>Preparation Phase</a:t>
-            </a:r>
-          </a:p>
-        </p:txBody>
-      </p:sp>
-      <p:sp>
-        <p:nvSpPr>
-          <p:cNvPr id="9" name="PI"/>
+              <a:t>สรุป</a:t>
+            </a:r>
+          </a:p>
+        </p:txBody>
+      </p:sp>
+      <p:sp>
+        <p:nvSpPr>
+          <p:cNvPr id="22" name="TC"/>
           <p:cNvSpPr>
             <a:spLocks noGrp="1"/>
           </p:cNvSpPr>
@@ -34384,51 +37218,7 @@
             <a:pPr/>
             <a:r>
               <a:rPr lang="th-TH" dirty="0"/>
-              <a:t>สรุปสเปกเครื่องและบริการคลาวด์ที่ต้องเตรียมให้พร้อมก่อนเริ่มงานพัฒนา</a:t>
-            </a:r>
-          </a:p>
-        </p:txBody>
-      </p:sp>
-      <p:sp>
-        <p:nvSpPr>
-          <p:cNvPr id="10" name="PB"/>
-          <p:cNvSpPr>
-            <a:spLocks noGrp="1"/>
-          </p:cNvSpPr>
-          <p:nvPr>
-            <p:ph type="body" idx="8"/>
-          </p:nvPr>
-        </p:nvSpPr>
-        <p:spPr/>
-        <p:txBody>
-          <a:bodyPr/>
-          <a:lstStyle/>
-          <a:p>
-            <a:pPr/>
-            <a:r>
-              <a:rPr lang="th-TH" dirty="0"/>
-              <a:t>PRD · 4 คอร์ / 16GB / SSD 300GB</a:t>
-            </a:r>
-          </a:p>
-          <a:p>
-            <a:pPr/>
-            <a:r>
-              <a:rPr lang="th-TH" dirty="0"/>
-              <a:t>QA · 4 คอร์ / 16GB / SSD 150GB</a:t>
-            </a:r>
-          </a:p>
-          <a:p>
-            <a:pPr/>
-            <a:r>
-              <a:rPr lang="th-TH" dirty="0"/>
-              <a:t>Windows Server 2022 ทั้งสองเครื่อง</a:t>
-            </a:r>
-          </a:p>
-          <a:p>
-            <a:pPr/>
-            <a:r>
-              <a:rPr lang="th-TH" dirty="0"/>
-              <a:t>Lambda, EC2 และ Cognito เปิดทั้งสองสภาพแวดล้อม</a:t>
+              <a:t>ไลเซนส์กับคลาวด์รวมกันไม่ถึง 40% งบส่วนใหญ่จ่ายให้งานที่ทำครั้งเดียว</a:t>
             </a:r>
           </a:p>
         </p:txBody>
@@ -34442,6 +37232,259 @@
 </file>
 
 <file path=ppt/slides/slide23.xml><?xml version="1.0" encoding="utf-8"?>
+<p:sld xmlns:a="http://schemas.openxmlformats.org/drawingml/2006/main" xmlns:r="http://schemas.openxmlformats.org/officeDocument/2006/relationships" xmlns:p="http://schemas.openxmlformats.org/presentationml/2006/main">
+  <p:cSld name="">
+    <p:spTree>
+      <p:nvGrpSpPr>
+        <p:cNvPr id="1" name=""/>
+        <p:cNvGrpSpPr/>
+        <p:nvPr/>
+      </p:nvGrpSpPr>
+      <p:grpSpPr>
+        <a:xfrm>
+          <a:off x="0" y="0"/>
+          <a:ext cx="0" cy="0"/>
+          <a:chOff x="0" y="0"/>
+          <a:chExt cx="0" cy="0"/>
+        </a:xfrm>
+      </p:grpSpPr>
+      <p:sp>
+        <p:nvSpPr>
+          <p:cNvPr id="2" name="Title"/>
+          <p:cNvSpPr>
+            <a:spLocks noGrp="1"/>
+          </p:cNvSpPr>
+          <p:nvPr>
+            <p:ph type="title"/>
+          </p:nvPr>
+        </p:nvSpPr>
+        <p:spPr/>
+        <p:txBody>
+          <a:bodyPr/>
+          <a:lstStyle/>
+          <a:p>
+            <a:pPr/>
+            <a:r>
+              <a:rPr lang="th-TH" dirty="0"/>
+              <a:t>5. Implementation Stage</a:t>
+            </a:r>
+          </a:p>
+        </p:txBody>
+      </p:sp>
+      <p:sp>
+        <p:nvSpPr>
+          <p:cNvPr id="3" name="KAL"/>
+          <p:cNvSpPr>
+            <a:spLocks noGrp="1"/>
+          </p:cNvSpPr>
+          <p:nvPr>
+            <p:ph type="body" idx="1"/>
+          </p:nvPr>
+        </p:nvSpPr>
+        <p:spPr/>
+        <p:txBody>
+          <a:bodyPr/>
+          <a:lstStyle/>
+          <a:p>
+            <a:pPr/>
+            <a:r>
+              <a:rPr lang="th-TH" dirty="0"/>
+              <a:t>Key Activity :</a:t>
+            </a:r>
+          </a:p>
+        </p:txBody>
+      </p:sp>
+      <p:sp>
+        <p:nvSpPr>
+          <p:cNvPr id="4" name="KAV"/>
+          <p:cNvSpPr>
+            <a:spLocks noGrp="1"/>
+          </p:cNvSpPr>
+          <p:nvPr>
+            <p:ph type="body" idx="2"/>
+          </p:nvPr>
+        </p:nvSpPr>
+        <p:spPr/>
+        <p:txBody>
+          <a:bodyPr/>
+          <a:lstStyle/>
+          <a:p>
+            <a:pPr/>
+            <a:r>
+              <a:rPr lang="th-TH" dirty="0"/>
+              <a:t>ตั้งค่าสภาพแวดล้อม ติดตั้งฮาร์ดแวร์และซอฟต์แวร์</a:t>
+            </a:r>
+          </a:p>
+        </p:txBody>
+      </p:sp>
+      <p:sp>
+        <p:nvSpPr>
+          <p:cNvPr id="5" name="PL"/>
+          <p:cNvSpPr>
+            <a:spLocks noGrp="1"/>
+          </p:cNvSpPr>
+          <p:nvPr>
+            <p:ph type="body" idx="3"/>
+          </p:nvPr>
+        </p:nvSpPr>
+        <p:spPr/>
+        <p:txBody>
+          <a:bodyPr/>
+          <a:lstStyle/>
+          <a:p>
+            <a:pPr/>
+            <a:r>
+              <a:rPr lang="th-TH" dirty="0"/>
+              <a:t>Participant :</a:t>
+            </a:r>
+          </a:p>
+        </p:txBody>
+      </p:sp>
+      <p:sp>
+        <p:nvSpPr>
+          <p:cNvPr id="6" name="PV"/>
+          <p:cNvSpPr>
+            <a:spLocks noGrp="1"/>
+          </p:cNvSpPr>
+          <p:nvPr>
+            <p:ph type="body" idx="4"/>
+          </p:nvPr>
+        </p:nvSpPr>
+        <p:spPr/>
+        <p:txBody>
+          <a:bodyPr/>
+          <a:lstStyle/>
+          <a:p>
+            <a:pPr/>
+            <a:r>
+              <a:rPr lang="th-TH" dirty="0"/>
+              <a:t>NCT Infra Engineer, ทีมไอทีลูกค้า, Business Analyst</a:t>
+            </a:r>
+          </a:p>
+        </p:txBody>
+      </p:sp>
+      <p:sp>
+        <p:nvSpPr>
+          <p:cNvPr id="7" name="PN"/>
+          <p:cNvSpPr>
+            <a:spLocks noGrp="1"/>
+          </p:cNvSpPr>
+          <p:nvPr>
+            <p:ph type="body" idx="5"/>
+          </p:nvPr>
+        </p:nvSpPr>
+        <p:spPr/>
+        <p:txBody>
+          <a:bodyPr/>
+          <a:lstStyle/>
+          <a:p>
+            <a:pPr/>
+            <a:r>
+              <a:rPr lang="th-TH" dirty="0"/>
+              <a:t>01</a:t>
+            </a:r>
+          </a:p>
+        </p:txBody>
+      </p:sp>
+      <p:sp>
+        <p:nvSpPr>
+          <p:cNvPr id="8" name="PP"/>
+          <p:cNvSpPr>
+            <a:spLocks noGrp="1"/>
+          </p:cNvSpPr>
+          <p:nvPr>
+            <p:ph type="body" idx="6"/>
+          </p:nvPr>
+        </p:nvSpPr>
+        <p:spPr/>
+        <p:txBody>
+          <a:bodyPr/>
+          <a:lstStyle/>
+          <a:p>
+            <a:pPr/>
+            <a:r>
+              <a:rPr lang="th-TH" dirty="0"/>
+              <a:t>Preparation Phase</a:t>
+            </a:r>
+          </a:p>
+        </p:txBody>
+      </p:sp>
+      <p:sp>
+        <p:nvSpPr>
+          <p:cNvPr id="9" name="PI"/>
+          <p:cNvSpPr>
+            <a:spLocks noGrp="1"/>
+          </p:cNvSpPr>
+          <p:nvPr>
+            <p:ph type="body" idx="7"/>
+          </p:nvPr>
+        </p:nvSpPr>
+        <p:spPr/>
+        <p:txBody>
+          <a:bodyPr/>
+          <a:lstStyle/>
+          <a:p>
+            <a:pPr/>
+            <a:r>
+              <a:rPr lang="th-TH" dirty="0"/>
+              <a:t>สรุปสเปกเครื่องและบริการคลาวด์ที่ต้องเตรียมให้พร้อมก่อนเริ่มงานพัฒนา</a:t>
+            </a:r>
+          </a:p>
+        </p:txBody>
+      </p:sp>
+      <p:sp>
+        <p:nvSpPr>
+          <p:cNvPr id="10" name="PB"/>
+          <p:cNvSpPr>
+            <a:spLocks noGrp="1"/>
+          </p:cNvSpPr>
+          <p:nvPr>
+            <p:ph type="body" idx="8"/>
+          </p:nvPr>
+        </p:nvSpPr>
+        <p:spPr/>
+        <p:txBody>
+          <a:bodyPr/>
+          <a:lstStyle/>
+          <a:p>
+            <a:pPr/>
+            <a:r>
+              <a:rPr lang="th-TH" dirty="0"/>
+              <a:t>PRD · 4 คอร์ / 16GB / SSD 300GB</a:t>
+            </a:r>
+          </a:p>
+          <a:p>
+            <a:pPr/>
+            <a:r>
+              <a:rPr lang="th-TH" dirty="0"/>
+              <a:t>QA · 4 คอร์ / 16GB / SSD 150GB</a:t>
+            </a:r>
+          </a:p>
+          <a:p>
+            <a:pPr/>
+            <a:r>
+              <a:rPr lang="th-TH" dirty="0"/>
+              <a:t>Windows Server 2022 ทั้งสองเครื่อง</a:t>
+            </a:r>
+          </a:p>
+          <a:p>
+            <a:pPr/>
+            <a:r>
+              <a:rPr lang="th-TH" dirty="0"/>
+              <a:t>Lambda, EC2 และ Cognito เปิดทั้งสองสภาพแวดล้อม</a:t>
+            </a:r>
+          </a:p>
+        </p:txBody>
+      </p:sp>
+    </p:spTree>
+  </p:cSld>
+  <p:clrMapOvr>
+    <a:masterClrMapping/>
+  </p:clrMapOvr>
+</p:sld>
+</file>
+
+<file path=ppt/slides/slide24.xml><?xml version="1.0" encoding="utf-8"?>
 <p:sld xmlns:a="http://schemas.openxmlformats.org/drawingml/2006/main" xmlns:r="http://schemas.openxmlformats.org/officeDocument/2006/relationships" xmlns:p="http://schemas.openxmlformats.org/presentationml/2006/main">
   <p:cSld name="">
     <p:spTree>
@@ -34927,7 +37970,7 @@
 </p:sld>
 </file>
 
-<file path=ppt/slides/slide24.xml><?xml version="1.0" encoding="utf-8"?>
+<file path=ppt/slides/slide25.xml><?xml version="1.0" encoding="utf-8"?>
 <p:sld xmlns:a="http://schemas.openxmlformats.org/drawingml/2006/main" xmlns:r="http://schemas.openxmlformats.org/officeDocument/2006/relationships" xmlns:p="http://schemas.openxmlformats.org/presentationml/2006/main">
   <p:cSld name="">
     <p:spTree>
@@ -35539,7 +38582,7 @@
 </p:sld>
 </file>
 
-<file path=ppt/slides/slide25.xml><?xml version="1.0" encoding="utf-8"?>
+<file path=ppt/slides/slide26.xml><?xml version="1.0" encoding="utf-8"?>
 <p:sld xmlns:a="http://schemas.openxmlformats.org/drawingml/2006/main" xmlns:r="http://schemas.openxmlformats.org/officeDocument/2006/relationships" xmlns:p="http://schemas.openxmlformats.org/presentationml/2006/main">
   <p:cSld name="">
     <p:spTree>

--- a/NCT-Slide-Template-Demo.pptx
+++ b/NCT-Slide-Template-Demo.pptx
@@ -25496,7 +25496,7 @@
         <p:spPr>
           <a:xfrm>
             <a:off x="914400" y="1691640"/>
-            <a:ext cx="10363200" cy="4343400"/>
+            <a:ext cx="10363200" cy="3749040"/>
           </a:xfrm>
           <a:prstGeom prst="rect">
             <a:avLst/>
@@ -25651,6 +25651,128 @@
                 <a:cs typeface="+mn-cs"/>
               </a:rPr>
               <a:t>ระดับที่สาม</a:t>
+            </a:r>
+          </a:p>
+        </p:txBody>
+      </p:sp>
+      <p:sp>
+        <p:nvSpPr>
+          <p:cNvPr id="13" name="Takeaway Label"/>
+          <p:cNvSpPr>
+            <a:spLocks noGrp="1"/>
+          </p:cNvSpPr>
+          <p:nvPr>
+            <p:ph type="body" idx="2"/>
+          </p:nvPr>
+        </p:nvSpPr>
+        <p:spPr>
+          <a:xfrm>
+            <a:off x="914400" y="5623560"/>
+            <a:ext cx="2011680" cy="411480"/>
+          </a:xfrm>
+          <a:prstGeom prst="rect">
+            <a:avLst/>
+          </a:prstGeom>
+          <a:solidFill>
+            <a:srgbClr val="E8F6F5"/>
+          </a:solidFill>
+        </p:spPr>
+        <p:txBody>
+          <a:bodyPr wrap="square" anchor="ctr" lIns="182880" tIns="0" rIns="91440" bIns="0" rtlCol="0"/>
+          <a:lstStyle>
+            <a:lvl1pPr algn="l" marL="0" indent="0">
+              <a:lnSpc>
+                <a:spcPct val="100000"/>
+              </a:lnSpc>
+              <a:buNone/>
+              <a:defRPr lang="th-TH" sz="1200" b="1" spc="120" dirty="0">
+                <a:solidFill>
+                  <a:srgbClr val="216B7F"/>
+                </a:solidFill>
+                <a:latin typeface="+mn-lt"/>
+                <a:ea typeface="+mn-ea"/>
+                <a:cs typeface="+mn-cs"/>
+              </a:defRPr>
+            </a:lvl1pPr>
+          </a:lstStyle>
+          <a:p>
+            <a:pPr algn="l" marL="0" indent="0">
+              <a:lnSpc>
+                <a:spcPct val="100000"/>
+              </a:lnSpc>
+              <a:buNone/>
+            </a:pPr>
+            <a:r>
+              <a:rPr lang="th-TH" sz="1200" b="1" spc="120" dirty="0">
+                <a:solidFill>
+                  <a:srgbClr val="216B7F"/>
+                </a:solidFill>
+                <a:latin typeface="+mn-lt"/>
+                <a:ea typeface="+mn-ea"/>
+                <a:cs typeface="+mn-cs"/>
+              </a:rPr>
+              <a:t>สรุป</a:t>
+            </a:r>
+          </a:p>
+        </p:txBody>
+      </p:sp>
+      <p:sp>
+        <p:nvSpPr>
+          <p:cNvPr id="14" name="Takeaway Copy"/>
+          <p:cNvSpPr>
+            <a:spLocks noGrp="1"/>
+          </p:cNvSpPr>
+          <p:nvPr>
+            <p:ph type="body" idx="3"/>
+          </p:nvPr>
+        </p:nvSpPr>
+        <p:spPr>
+          <a:xfrm>
+            <a:off x="2926080" y="5623560"/>
+            <a:ext cx="8351520" cy="411480"/>
+          </a:xfrm>
+          <a:prstGeom prst="rect">
+            <a:avLst/>
+          </a:prstGeom>
+          <a:solidFill>
+            <a:srgbClr val="E8F6F5"/>
+          </a:solidFill>
+        </p:spPr>
+        <p:txBody>
+          <a:bodyPr wrap="square" anchor="ctr" lIns="0" tIns="0" rIns="182880" bIns="0" rtlCol="0"/>
+          <a:lstStyle>
+            <a:lvl1pPr algn="l" marL="0" indent="0">
+              <a:lnSpc>
+                <a:spcPct val="100000"/>
+              </a:lnSpc>
+              <a:buNone/>
+              <a:defRPr lang="th-TH" sz="1400" dirty="0">
+                <a:solidFill>
+                  <a:srgbClr val="333333"/>
+                </a:solidFill>
+                <a:latin typeface="+mn-lt"/>
+                <a:ea typeface="+mn-ea"/>
+                <a:cs typeface="+mn-cs"/>
+              </a:defRPr>
+            </a:lvl1pPr>
+          </a:lstStyle>
+          <a:p>
+            <a:pPr algn="l" marL="0" indent="0">
+              <a:lnSpc>
+                <a:spcPct val="100000"/>
+              </a:lnSpc>
+              <a:buNone/>
+            </a:pPr>
+            <a:r>
+              <a:rPr lang="th-TH" sz="1400" dirty="0">
+                <a:solidFill>
+                  <a:srgbClr val="333333"/>
+                </a:solidFill>
+                <a:latin typeface="+mn-lt"/>
+                <a:ea typeface="+mn-ea"/>
+                <a:cs typeface="+mn-cs"/>
+              </a:rPr>
+              <a:t>ประเด็นสรุปหนึ่งบรรทัด (ไม่ใส่ก็ได้)</a:t>
             </a:r>
           </a:p>
         </p:txBody>
@@ -27311,6 +27433,128 @@
       </p:sp>
       <p:sp>
         <p:nvSpPr>
+          <p:cNvPr id="24" name="Takeaway Label"/>
+          <p:cNvSpPr>
+            <a:spLocks noGrp="1"/>
+          </p:cNvSpPr>
+          <p:nvPr>
+            <p:ph type="body" idx="7"/>
+          </p:nvPr>
+        </p:nvSpPr>
+        <p:spPr>
+          <a:xfrm>
+            <a:off x="914400" y="5623560"/>
+            <a:ext cx="2011680" cy="411480"/>
+          </a:xfrm>
+          <a:prstGeom prst="rect">
+            <a:avLst/>
+          </a:prstGeom>
+          <a:solidFill>
+            <a:srgbClr val="E8F6F5"/>
+          </a:solidFill>
+        </p:spPr>
+        <p:txBody>
+          <a:bodyPr wrap="square" anchor="ctr" lIns="182880" tIns="0" rIns="91440" bIns="0" rtlCol="0"/>
+          <a:lstStyle>
+            <a:lvl1pPr algn="l" marL="0" indent="0">
+              <a:lnSpc>
+                <a:spcPct val="100000"/>
+              </a:lnSpc>
+              <a:buNone/>
+              <a:defRPr lang="th-TH" sz="1200" b="1" spc="120" dirty="0">
+                <a:solidFill>
+                  <a:srgbClr val="216B7F"/>
+                </a:solidFill>
+                <a:latin typeface="+mn-lt"/>
+                <a:ea typeface="+mn-ea"/>
+                <a:cs typeface="+mn-cs"/>
+              </a:defRPr>
+            </a:lvl1pPr>
+          </a:lstStyle>
+          <a:p>
+            <a:pPr algn="l" marL="0" indent="0">
+              <a:lnSpc>
+                <a:spcPct val="100000"/>
+              </a:lnSpc>
+              <a:buNone/>
+            </a:pPr>
+            <a:r>
+              <a:rPr lang="th-TH" sz="1200" b="1" spc="120" dirty="0">
+                <a:solidFill>
+                  <a:srgbClr val="216B7F"/>
+                </a:solidFill>
+                <a:latin typeface="+mn-lt"/>
+                <a:ea typeface="+mn-ea"/>
+                <a:cs typeface="+mn-cs"/>
+              </a:rPr>
+              <a:t>สรุป</a:t>
+            </a:r>
+          </a:p>
+        </p:txBody>
+      </p:sp>
+      <p:sp>
+        <p:nvSpPr>
+          <p:cNvPr id="25" name="Takeaway Copy"/>
+          <p:cNvSpPr>
+            <a:spLocks noGrp="1"/>
+          </p:cNvSpPr>
+          <p:nvPr>
+            <p:ph type="body" idx="8"/>
+          </p:nvPr>
+        </p:nvSpPr>
+        <p:spPr>
+          <a:xfrm>
+            <a:off x="2926080" y="5623560"/>
+            <a:ext cx="8351520" cy="411480"/>
+          </a:xfrm>
+          <a:prstGeom prst="rect">
+            <a:avLst/>
+          </a:prstGeom>
+          <a:solidFill>
+            <a:srgbClr val="E8F6F5"/>
+          </a:solidFill>
+        </p:spPr>
+        <p:txBody>
+          <a:bodyPr wrap="square" anchor="ctr" lIns="0" tIns="0" rIns="182880" bIns="0" rtlCol="0"/>
+          <a:lstStyle>
+            <a:lvl1pPr algn="l" marL="0" indent="0">
+              <a:lnSpc>
+                <a:spcPct val="100000"/>
+              </a:lnSpc>
+              <a:buNone/>
+              <a:defRPr lang="th-TH" sz="1400" dirty="0">
+                <a:solidFill>
+                  <a:srgbClr val="333333"/>
+                </a:solidFill>
+                <a:latin typeface="+mn-lt"/>
+                <a:ea typeface="+mn-ea"/>
+                <a:cs typeface="+mn-cs"/>
+              </a:defRPr>
+            </a:lvl1pPr>
+          </a:lstStyle>
+          <a:p>
+            <a:pPr algn="l" marL="0" indent="0">
+              <a:lnSpc>
+                <a:spcPct val="100000"/>
+              </a:lnSpc>
+              <a:buNone/>
+            </a:pPr>
+            <a:r>
+              <a:rPr lang="th-TH" sz="1400" dirty="0">
+                <a:solidFill>
+                  <a:srgbClr val="333333"/>
+                </a:solidFill>
+                <a:latin typeface="+mn-lt"/>
+                <a:ea typeface="+mn-ea"/>
+                <a:cs typeface="+mn-cs"/>
+              </a:rPr>
+              <a:t>ประเด็นสรุปหนึ่งบรรทัด (ไม่ใส่ก็ได้)</a:t>
+            </a:r>
+          </a:p>
+        </p:txBody>
+      </p:sp>
+      <p:sp>
+        <p:nvSpPr>
           <p:cNvPr id="90" name="Footer Rule"/>
           <p:cNvSpPr/>
           <p:nvPr/>
@@ -28093,6 +28337,128 @@
                 <a:cs typeface="+mn-cs"/>
               </a:rPr>
               <a:t>ที่มาของข้อมูล / หมายเหตุ</a:t>
+            </a:r>
+          </a:p>
+        </p:txBody>
+      </p:sp>
+      <p:sp>
+        <p:nvSpPr>
+          <p:cNvPr id="21" name="Takeaway Label"/>
+          <p:cNvSpPr>
+            <a:spLocks noGrp="1"/>
+          </p:cNvSpPr>
+          <p:nvPr>
+            <p:ph type="body" idx="8"/>
+          </p:nvPr>
+        </p:nvSpPr>
+        <p:spPr>
+          <a:xfrm>
+            <a:off x="914400" y="5623560"/>
+            <a:ext cx="2011680" cy="411480"/>
+          </a:xfrm>
+          <a:prstGeom prst="rect">
+            <a:avLst/>
+          </a:prstGeom>
+          <a:solidFill>
+            <a:srgbClr val="E8F6F5"/>
+          </a:solidFill>
+        </p:spPr>
+        <p:txBody>
+          <a:bodyPr wrap="square" anchor="ctr" lIns="182880" tIns="0" rIns="91440" bIns="0" rtlCol="0"/>
+          <a:lstStyle>
+            <a:lvl1pPr algn="l" marL="0" indent="0">
+              <a:lnSpc>
+                <a:spcPct val="100000"/>
+              </a:lnSpc>
+              <a:buNone/>
+              <a:defRPr lang="th-TH" sz="1200" b="1" spc="120" dirty="0">
+                <a:solidFill>
+                  <a:srgbClr val="216B7F"/>
+                </a:solidFill>
+                <a:latin typeface="+mn-lt"/>
+                <a:ea typeface="+mn-ea"/>
+                <a:cs typeface="+mn-cs"/>
+              </a:defRPr>
+            </a:lvl1pPr>
+          </a:lstStyle>
+          <a:p>
+            <a:pPr algn="l" marL="0" indent="0">
+              <a:lnSpc>
+                <a:spcPct val="100000"/>
+              </a:lnSpc>
+              <a:buNone/>
+            </a:pPr>
+            <a:r>
+              <a:rPr lang="th-TH" sz="1200" b="1" spc="120" dirty="0">
+                <a:solidFill>
+                  <a:srgbClr val="216B7F"/>
+                </a:solidFill>
+                <a:latin typeface="+mn-lt"/>
+                <a:ea typeface="+mn-ea"/>
+                <a:cs typeface="+mn-cs"/>
+              </a:rPr>
+              <a:t>สรุป</a:t>
+            </a:r>
+          </a:p>
+        </p:txBody>
+      </p:sp>
+      <p:sp>
+        <p:nvSpPr>
+          <p:cNvPr id="22" name="Takeaway Copy"/>
+          <p:cNvSpPr>
+            <a:spLocks noGrp="1"/>
+          </p:cNvSpPr>
+          <p:nvPr>
+            <p:ph type="body" idx="9"/>
+          </p:nvPr>
+        </p:nvSpPr>
+        <p:spPr>
+          <a:xfrm>
+            <a:off x="2926080" y="5623560"/>
+            <a:ext cx="8351520" cy="411480"/>
+          </a:xfrm>
+          <a:prstGeom prst="rect">
+            <a:avLst/>
+          </a:prstGeom>
+          <a:solidFill>
+            <a:srgbClr val="E8F6F5"/>
+          </a:solidFill>
+        </p:spPr>
+        <p:txBody>
+          <a:bodyPr wrap="square" anchor="ctr" lIns="0" tIns="0" rIns="182880" bIns="0" rtlCol="0"/>
+          <a:lstStyle>
+            <a:lvl1pPr algn="l" marL="0" indent="0">
+              <a:lnSpc>
+                <a:spcPct val="100000"/>
+              </a:lnSpc>
+              <a:buNone/>
+              <a:defRPr lang="th-TH" sz="1400" dirty="0">
+                <a:solidFill>
+                  <a:srgbClr val="333333"/>
+                </a:solidFill>
+                <a:latin typeface="+mn-lt"/>
+                <a:ea typeface="+mn-ea"/>
+                <a:cs typeface="+mn-cs"/>
+              </a:defRPr>
+            </a:lvl1pPr>
+          </a:lstStyle>
+          <a:p>
+            <a:pPr algn="l" marL="0" indent="0">
+              <a:lnSpc>
+                <a:spcPct val="100000"/>
+              </a:lnSpc>
+              <a:buNone/>
+            </a:pPr>
+            <a:r>
+              <a:rPr lang="th-TH" sz="1400" dirty="0">
+                <a:solidFill>
+                  <a:srgbClr val="333333"/>
+                </a:solidFill>
+                <a:latin typeface="+mn-lt"/>
+                <a:ea typeface="+mn-ea"/>
+                <a:cs typeface="+mn-cs"/>
+              </a:rPr>
+              <a:t>ประเด็นสรุปหนึ่งบรรทัด (ไม่ใส่ก็ได้)</a:t>
             </a:r>
           </a:p>
         </p:txBody>
@@ -33485,6 +33851,52 @@
           </a:p>
         </p:txBody>
       </p:sp>
+      <p:sp>
+        <p:nvSpPr>
+          <p:cNvPr id="9" name="TkL"/>
+          <p:cNvSpPr>
+            <a:spLocks noGrp="1"/>
+          </p:cNvSpPr>
+          <p:nvPr>
+            <p:ph type="body" idx="7"/>
+          </p:nvPr>
+        </p:nvSpPr>
+        <p:spPr/>
+        <p:txBody>
+          <a:bodyPr/>
+          <a:lstStyle/>
+          <a:p>
+            <a:pPr/>
+            <a:r>
+              <a:rPr lang="th-TH" dirty="0"/>
+              <a:t>สรุป</a:t>
+            </a:r>
+          </a:p>
+        </p:txBody>
+      </p:sp>
+      <p:sp>
+        <p:nvSpPr>
+          <p:cNvPr id="10" name="TkC"/>
+          <p:cNvSpPr>
+            <a:spLocks noGrp="1"/>
+          </p:cNvSpPr>
+          <p:nvPr>
+            <p:ph type="body" idx="8"/>
+          </p:nvPr>
+        </p:nvSpPr>
+        <p:spPr/>
+        <p:txBody>
+          <a:bodyPr/>
+          <a:lstStyle/>
+          <a:p>
+            <a:pPr/>
+            <a:r>
+              <a:rPr lang="th-TH" dirty="0"/>
+              <a:t>ทีมเดียวดูแลครบทั้งสามด้าน ไม่ต้องประสานผู้รับจ้างหลายราย</a:t>
+            </a:r>
+          </a:p>
+        </p:txBody>
+      </p:sp>
     </p:spTree>
   </p:cSld>
   <p:clrMapOvr>
@@ -33690,6 +34102,52 @@
             <a:r>
               <a:rPr lang="th-TH" dirty="0"/>
               <a:t>ข้อมูล ณ ไตรมาส 1 ปี 2569</a:t>
+            </a:r>
+          </a:p>
+        </p:txBody>
+      </p:sp>
+      <p:sp>
+        <p:nvSpPr>
+          <p:cNvPr id="10" name="TkL"/>
+          <p:cNvSpPr>
+            <a:spLocks noGrp="1"/>
+          </p:cNvSpPr>
+          <p:nvPr>
+            <p:ph type="body" idx="8"/>
+          </p:nvPr>
+        </p:nvSpPr>
+        <p:spPr/>
+        <p:txBody>
+          <a:bodyPr/>
+          <a:lstStyle/>
+          <a:p>
+            <a:pPr/>
+            <a:r>
+              <a:rPr lang="th-TH" dirty="0"/>
+              <a:t>สรุป</a:t>
+            </a:r>
+          </a:p>
+        </p:txBody>
+      </p:sp>
+      <p:sp>
+        <p:nvSpPr>
+          <p:cNvPr id="11" name="TkC"/>
+          <p:cNvSpPr>
+            <a:spLocks noGrp="1"/>
+          </p:cNvSpPr>
+          <p:nvPr>
+            <p:ph type="body" idx="9"/>
+          </p:nvPr>
+        </p:nvSpPr>
+        <p:spPr/>
+        <p:txBody>
+          <a:bodyPr/>
+          <a:lstStyle/>
+          <a:p>
+            <a:pPr/>
+            <a:r>
+              <a:rPr lang="th-TH" dirty="0"/>
+              <a:t>ระบบที่เราดูแลหยุดรวมไม่ถึง 9 ชั่วโมงต่อปี</a:t>
             </a:r>
           </a:p>
         </p:txBody>

--- a/NCT-Slide-Template-Demo.pptx
+++ b/NCT-Slide-Template-Demo.pptx
@@ -3228,7 +3228,7 @@
                 <a:spcPct val="100000"/>
               </a:lnSpc>
               <a:buNone/>
-              <a:defRPr lang="th-TH" sz="1200" b="1" spc="120" dirty="0">
+              <a:defRPr lang="th-TH" sz="1200" b="1" dirty="0">
                 <a:solidFill>
                   <a:srgbClr val="8FBACE"/>
                 </a:solidFill>
@@ -3246,7 +3246,7 @@
               <a:buNone/>
             </a:pPr>
             <a:r>
-              <a:rPr lang="th-TH" sz="1200" b="1" spc="120" dirty="0">
+              <a:rPr lang="th-TH" sz="1200" b="1" dirty="0">
                 <a:solidFill>
                   <a:srgbClr val="8FBACE"/>
                 </a:solidFill>
@@ -3536,7 +3536,7 @@
               <a:buNone/>
             </a:pPr>
             <a:r>
-              <a:rPr lang="th-TH" sz="1200" b="1" spc="120" dirty="0">
+              <a:rPr lang="th-TH" sz="1200" b="1" dirty="0">
                 <a:solidFill>
                   <a:srgbClr val="216B7F"/>
                 </a:solidFill>
@@ -4449,7 +4449,7 @@
                 <a:spcPct val="100000"/>
               </a:lnSpc>
               <a:buNone/>
-              <a:defRPr lang="th-TH" sz="1200" b="1" spc="120" dirty="0">
+              <a:defRPr lang="th-TH" sz="1200" b="1" dirty="0">
                 <a:solidFill>
                   <a:srgbClr val="216B7F"/>
                 </a:solidFill>
@@ -4467,7 +4467,7 @@
               <a:buNone/>
             </a:pPr>
             <a:r>
-              <a:rPr lang="th-TH" sz="1200" b="1" spc="120" dirty="0">
+              <a:rPr lang="th-TH" sz="1200" b="1" dirty="0">
                 <a:solidFill>
                   <a:srgbClr val="216B7F"/>
                 </a:solidFill>
@@ -5870,7 +5870,7 @@
                 <a:spcPct val="100000"/>
               </a:lnSpc>
               <a:buNone/>
-              <a:defRPr lang="th-TH" sz="1200" b="1" spc="120" dirty="0">
+              <a:defRPr lang="th-TH" sz="1200" b="1" dirty="0">
                 <a:solidFill>
                   <a:srgbClr val="8FBACE"/>
                 </a:solidFill>
@@ -5888,7 +5888,7 @@
               <a:buNone/>
             </a:pPr>
             <a:r>
-              <a:rPr lang="th-TH" sz="1200" b="1" spc="120" dirty="0">
+              <a:rPr lang="th-TH" sz="1200" b="1" dirty="0">
                 <a:solidFill>
                   <a:srgbClr val="8FBACE"/>
                 </a:solidFill>
@@ -7673,7 +7673,7 @@
                 <a:spcPct val="100000"/>
               </a:lnSpc>
               <a:buNone/>
-              <a:defRPr lang="th-TH" sz="1200" b="1" spc="120" dirty="0">
+              <a:defRPr lang="th-TH" sz="1200" b="1" dirty="0">
                 <a:solidFill>
                   <a:srgbClr val="216B7F"/>
                 </a:solidFill>
@@ -7691,7 +7691,7 @@
               <a:buNone/>
             </a:pPr>
             <a:r>
-              <a:rPr lang="th-TH" sz="1200" b="1" spc="120" dirty="0">
+              <a:rPr lang="th-TH" sz="1200" b="1" dirty="0">
                 <a:solidFill>
                   <a:srgbClr val="216B7F"/>
                 </a:solidFill>
@@ -8258,7 +8258,7 @@
                 <a:spcPct val="100000"/>
               </a:lnSpc>
               <a:buNone/>
-              <a:defRPr lang="th-TH" sz="1200" b="1" spc="120" dirty="0">
+              <a:defRPr lang="th-TH" sz="1200" b="1" dirty="0">
                 <a:solidFill>
                   <a:srgbClr val="216B7F"/>
                 </a:solidFill>
@@ -8276,7 +8276,7 @@
               <a:buNone/>
             </a:pPr>
             <a:r>
-              <a:rPr lang="th-TH" sz="1200" b="1" spc="120" dirty="0">
+              <a:rPr lang="th-TH" sz="1200" b="1" dirty="0">
                 <a:solidFill>
                   <a:srgbClr val="216B7F"/>
                 </a:solidFill>
@@ -9701,7 +9701,7 @@
                 <a:spcPct val="100000"/>
               </a:lnSpc>
               <a:buNone/>
-              <a:defRPr lang="th-TH" sz="1200" b="1" spc="120" dirty="0">
+              <a:defRPr lang="th-TH" sz="1200" b="1" dirty="0">
                 <a:solidFill>
                   <a:srgbClr val="216B7F"/>
                 </a:solidFill>
@@ -9719,7 +9719,7 @@
               <a:buNone/>
             </a:pPr>
             <a:r>
-              <a:rPr lang="th-TH" sz="1200" b="1" spc="120" dirty="0">
+              <a:rPr lang="th-TH" sz="1200" b="1" dirty="0">
                 <a:solidFill>
                   <a:srgbClr val="216B7F"/>
                 </a:solidFill>
@@ -11251,7 +11251,7 @@
                 <a:spcPct val="100000"/>
               </a:lnSpc>
               <a:buNone/>
-              <a:defRPr lang="th-TH" sz="1200" b="1" spc="120" dirty="0">
+              <a:defRPr lang="th-TH" sz="1200" b="1" dirty="0">
                 <a:solidFill>
                   <a:srgbClr val="8FBACE"/>
                 </a:solidFill>
@@ -11269,7 +11269,7 @@
               <a:buNone/>
             </a:pPr>
             <a:r>
-              <a:rPr lang="th-TH" sz="1200" b="1" spc="120" dirty="0">
+              <a:rPr lang="th-TH" sz="1200" b="1" dirty="0">
                 <a:solidFill>
                   <a:srgbClr val="8FBACE"/>
                 </a:solidFill>
@@ -12202,7 +12202,7 @@
                 <a:spcPct val="130000"/>
               </a:lnSpc>
               <a:buNone/>
-              <a:defRPr lang="th-TH" sz="1200" b="1" spc="120" dirty="0">
+              <a:defRPr lang="th-TH" sz="1200" b="1" dirty="0">
                 <a:solidFill>
                   <a:srgbClr val="5F5F5F"/>
                 </a:solidFill>
@@ -12220,7 +12220,7 @@
               <a:buNone/>
             </a:pPr>
             <a:r>
-              <a:rPr lang="th-TH" sz="1200" b="1" spc="120" dirty="0">
+              <a:rPr lang="th-TH" sz="1200" b="1" dirty="0">
                 <a:solidFill>
                   <a:srgbClr val="5F5F5F"/>
                 </a:solidFill>
@@ -12421,7 +12421,7 @@
                 <a:spcPct val="100000"/>
               </a:lnSpc>
               <a:buNone/>
-              <a:defRPr lang="th-TH" sz="1200" b="1" spc="120" dirty="0">
+              <a:defRPr lang="th-TH" sz="1200" b="1" dirty="0">
                 <a:solidFill>
                   <a:srgbClr val="216B7F"/>
                 </a:solidFill>
@@ -12439,7 +12439,7 @@
               <a:buNone/>
             </a:pPr>
             <a:r>
-              <a:rPr lang="th-TH" sz="1200" b="1" spc="120" dirty="0">
+              <a:rPr lang="th-TH" sz="1200" b="1" dirty="0">
                 <a:solidFill>
                   <a:srgbClr val="216B7F"/>
                 </a:solidFill>
@@ -15794,7 +15794,7 @@
                 <a:spcPct val="100000"/>
               </a:lnSpc>
               <a:buNone/>
-              <a:defRPr lang="th-TH" sz="1200" b="1" spc="120" dirty="0">
+              <a:defRPr lang="th-TH" sz="1200" b="1" dirty="0">
                 <a:solidFill>
                   <a:srgbClr val="216B7F"/>
                 </a:solidFill>
@@ -15812,7 +15812,7 @@
               <a:buNone/>
             </a:pPr>
             <a:r>
-              <a:rPr lang="th-TH" sz="1200" b="1" spc="120" dirty="0">
+              <a:rPr lang="th-TH" sz="1200" b="1" dirty="0">
                 <a:solidFill>
                   <a:srgbClr val="216B7F"/>
                 </a:solidFill>
@@ -16292,7 +16292,7 @@
                 <a:spcPct val="130000"/>
               </a:lnSpc>
               <a:buNone/>
-              <a:defRPr lang="th-TH" sz="1200" b="1" spc="120" dirty="0">
+              <a:defRPr lang="th-TH" sz="1200" b="1" dirty="0">
                 <a:solidFill>
                   <a:srgbClr val="5F5F5F"/>
                 </a:solidFill>
@@ -16310,7 +16310,7 @@
               <a:buNone/>
             </a:pPr>
             <a:r>
-              <a:rPr lang="th-TH" sz="1200" b="1" spc="120" dirty="0">
+              <a:rPr lang="th-TH" sz="1200" b="1" dirty="0">
                 <a:solidFill>
                   <a:srgbClr val="5F5F5F"/>
                 </a:solidFill>
@@ -17703,7 +17703,7 @@
                 <a:spcPct val="100000"/>
               </a:lnSpc>
               <a:buNone/>
-              <a:defRPr lang="th-TH" sz="1200" b="1" spc="120" dirty="0">
+              <a:defRPr lang="th-TH" sz="1200" b="1" dirty="0">
                 <a:solidFill>
                   <a:srgbClr val="216B7F"/>
                 </a:solidFill>
@@ -17721,7 +17721,7 @@
               <a:buNone/>
             </a:pPr>
             <a:r>
-              <a:rPr lang="th-TH" sz="1200" b="1" spc="120" dirty="0">
+              <a:rPr lang="th-TH" sz="1200" b="1" dirty="0">
                 <a:solidFill>
                   <a:srgbClr val="216B7F"/>
                 </a:solidFill>
@@ -18172,7 +18172,7 @@
                 <a:spcPct val="130000"/>
               </a:lnSpc>
               <a:buNone/>
-              <a:defRPr lang="th-TH" sz="1200" b="1" spc="120" dirty="0">
+              <a:defRPr lang="th-TH" sz="1200" b="1" dirty="0">
                 <a:solidFill>
                   <a:srgbClr val="5F5F5F"/>
                 </a:solidFill>
@@ -18190,7 +18190,7 @@
               <a:buNone/>
             </a:pPr>
             <a:r>
-              <a:rPr lang="th-TH" sz="1200" b="1" spc="120" dirty="0">
+              <a:rPr lang="th-TH" sz="1200" b="1" dirty="0">
                 <a:solidFill>
                   <a:srgbClr val="5F5F5F"/>
                 </a:solidFill>
@@ -18375,7 +18375,7 @@
                 <a:spcPct val="130000"/>
               </a:lnSpc>
               <a:buNone/>
-              <a:defRPr lang="th-TH" sz="1200" b="1" spc="120" dirty="0">
+              <a:defRPr lang="th-TH" sz="1200" b="1" dirty="0">
                 <a:solidFill>
                   <a:srgbClr val="5F5F5F"/>
                 </a:solidFill>
@@ -18393,7 +18393,7 @@
               <a:buNone/>
             </a:pPr>
             <a:r>
-              <a:rPr lang="th-TH" sz="1200" b="1" spc="120" dirty="0">
+              <a:rPr lang="th-TH" sz="1200" b="1" dirty="0">
                 <a:solidFill>
                   <a:srgbClr val="5F5F5F"/>
                 </a:solidFill>
@@ -18578,7 +18578,7 @@
                 <a:spcPct val="130000"/>
               </a:lnSpc>
               <a:buNone/>
-              <a:defRPr lang="th-TH" sz="1200" b="1" spc="120" dirty="0">
+              <a:defRPr lang="th-TH" sz="1200" b="1" dirty="0">
                 <a:solidFill>
                   <a:srgbClr val="5F5F5F"/>
                 </a:solidFill>
@@ -18596,7 +18596,7 @@
               <a:buNone/>
             </a:pPr>
             <a:r>
-              <a:rPr lang="th-TH" sz="1200" b="1" spc="120" dirty="0">
+              <a:rPr lang="th-TH" sz="1200" b="1" dirty="0">
                 <a:solidFill>
                   <a:srgbClr val="5F5F5F"/>
                 </a:solidFill>
@@ -18887,7 +18887,7 @@
                 <a:spcPct val="100000"/>
               </a:lnSpc>
               <a:buNone/>
-              <a:defRPr lang="th-TH" sz="1200" b="1" spc="120" dirty="0">
+              <a:defRPr lang="th-TH" sz="1200" b="1" dirty="0">
                 <a:solidFill>
                   <a:srgbClr val="216B7F"/>
                 </a:solidFill>
@@ -18905,7 +18905,7 @@
               <a:buNone/>
             </a:pPr>
             <a:r>
-              <a:rPr lang="th-TH" sz="1200" b="1" spc="120" dirty="0">
+              <a:rPr lang="th-TH" sz="1200" b="1" dirty="0">
                 <a:solidFill>
                   <a:srgbClr val="216B7F"/>
                 </a:solidFill>
@@ -20390,7 +20390,7 @@
                 <a:spcPct val="100000"/>
               </a:lnSpc>
               <a:buNone/>
-              <a:defRPr lang="th-TH" sz="1200" b="1" spc="120" dirty="0">
+              <a:defRPr lang="th-TH" sz="1200" b="1" dirty="0">
                 <a:solidFill>
                   <a:srgbClr val="216B7F"/>
                 </a:solidFill>
@@ -20408,7 +20408,7 @@
               <a:buNone/>
             </a:pPr>
             <a:r>
-              <a:rPr lang="th-TH" sz="1200" b="1" spc="120" dirty="0">
+              <a:rPr lang="th-TH" sz="1200" b="1" dirty="0">
                 <a:solidFill>
                   <a:srgbClr val="216B7F"/>
                 </a:solidFill>
@@ -20859,7 +20859,7 @@
                 <a:spcPct val="100000"/>
               </a:lnSpc>
               <a:buNone/>
-              <a:defRPr lang="th-TH" sz="1200" b="1" spc="120" dirty="0">
+              <a:defRPr lang="th-TH" sz="1200" b="1" dirty="0">
                 <a:solidFill>
                   <a:srgbClr val="5F5F5F"/>
                 </a:solidFill>
@@ -20877,7 +20877,7 @@
               <a:buNone/>
             </a:pPr>
             <a:r>
-              <a:rPr lang="th-TH" sz="1200" b="1" spc="120" dirty="0">
+              <a:rPr lang="th-TH" sz="1200" b="1" dirty="0">
                 <a:solidFill>
                   <a:srgbClr val="5F5F5F"/>
                 </a:solidFill>
@@ -21272,7 +21272,7 @@
                 <a:spcPct val="100000"/>
               </a:lnSpc>
               <a:buNone/>
-              <a:defRPr lang="th-TH" sz="1200" b="1" spc="120" dirty="0">
+              <a:defRPr lang="th-TH" sz="1200" b="1" dirty="0">
                 <a:solidFill>
                   <a:srgbClr val="5F5F5F"/>
                 </a:solidFill>
@@ -21290,7 +21290,7 @@
               <a:buNone/>
             </a:pPr>
             <a:r>
-              <a:rPr lang="th-TH" sz="1200" b="1" spc="120" dirty="0">
+              <a:rPr lang="th-TH" sz="1200" b="1" dirty="0">
                 <a:solidFill>
                   <a:srgbClr val="5F5F5F"/>
                 </a:solidFill>
@@ -21627,7 +21627,7 @@
                 <a:spcPct val="100000"/>
               </a:lnSpc>
               <a:buNone/>
-              <a:defRPr lang="th-TH" sz="1200" b="1" spc="120" dirty="0">
+              <a:defRPr lang="th-TH" sz="1200" b="1" dirty="0">
                 <a:solidFill>
                   <a:srgbClr val="5F5F5F"/>
                 </a:solidFill>
@@ -21645,7 +21645,7 @@
               <a:buNone/>
             </a:pPr>
             <a:r>
-              <a:rPr lang="th-TH" sz="1200" b="1" spc="120" dirty="0">
+              <a:rPr lang="th-TH" sz="1200" b="1" dirty="0">
                 <a:solidFill>
                   <a:srgbClr val="5F5F5F"/>
                 </a:solidFill>
@@ -21982,7 +21982,7 @@
                 <a:spcPct val="100000"/>
               </a:lnSpc>
               <a:buNone/>
-              <a:defRPr lang="th-TH" sz="1200" b="1" spc="120" dirty="0">
+              <a:defRPr lang="th-TH" sz="1200" b="1" dirty="0">
                 <a:solidFill>
                   <a:srgbClr val="5F5F5F"/>
                 </a:solidFill>
@@ -22000,7 +22000,7 @@
               <a:buNone/>
             </a:pPr>
             <a:r>
-              <a:rPr lang="th-TH" sz="1200" b="1" spc="120" dirty="0">
+              <a:rPr lang="th-TH" sz="1200" b="1" dirty="0">
                 <a:solidFill>
                   <a:srgbClr val="5F5F5F"/>
                 </a:solidFill>
@@ -22337,7 +22337,7 @@
                 <a:spcPct val="100000"/>
               </a:lnSpc>
               <a:buNone/>
-              <a:defRPr lang="th-TH" sz="1200" b="1" spc="120" dirty="0">
+              <a:defRPr lang="th-TH" sz="1200" b="1" dirty="0">
                 <a:solidFill>
                   <a:srgbClr val="5F5F5F"/>
                 </a:solidFill>
@@ -22355,7 +22355,7 @@
               <a:buNone/>
             </a:pPr>
             <a:r>
-              <a:rPr lang="th-TH" sz="1200" b="1" spc="120" dirty="0">
+              <a:rPr lang="th-TH" sz="1200" b="1" dirty="0">
                 <a:solidFill>
                   <a:srgbClr val="5F5F5F"/>
                 </a:solidFill>
@@ -22721,7 +22721,7 @@
                 <a:spcPct val="100000"/>
               </a:lnSpc>
               <a:buNone/>
-              <a:defRPr lang="th-TH" sz="1200" b="1" spc="120" dirty="0">
+              <a:defRPr lang="th-TH" sz="1200" b="1" dirty="0">
                 <a:solidFill>
                   <a:srgbClr val="216B7F"/>
                 </a:solidFill>
@@ -22739,7 +22739,7 @@
               <a:buNone/>
             </a:pPr>
             <a:r>
-              <a:rPr lang="th-TH" sz="1200" b="1" spc="120" dirty="0">
+              <a:rPr lang="th-TH" sz="1200" b="1" dirty="0">
                 <a:solidFill>
                   <a:srgbClr val="216B7F"/>
                 </a:solidFill>
@@ -25070,7 +25070,7 @@
                 <a:spcPct val="100000"/>
               </a:lnSpc>
               <a:buNone/>
-              <a:defRPr lang="th-TH" sz="1200" b="1" spc="120" dirty="0">
+              <a:defRPr lang="th-TH" sz="1200" b="1" dirty="0">
                 <a:solidFill>
                   <a:srgbClr val="216B7F"/>
                 </a:solidFill>
@@ -25088,7 +25088,7 @@
               <a:buNone/>
             </a:pPr>
             <a:r>
-              <a:rPr lang="th-TH" sz="1200" b="1" spc="120" dirty="0">
+              <a:rPr lang="th-TH" sz="1200" b="1" dirty="0">
                 <a:solidFill>
                   <a:srgbClr val="216B7F"/>
                 </a:solidFill>
@@ -25685,7 +25685,7 @@
                 <a:spcPct val="100000"/>
               </a:lnSpc>
               <a:buNone/>
-              <a:defRPr lang="th-TH" sz="1200" b="1" spc="120" dirty="0">
+              <a:defRPr lang="th-TH" sz="1200" b="1" dirty="0">
                 <a:solidFill>
                   <a:srgbClr val="216B7F"/>
                 </a:solidFill>
@@ -25703,7 +25703,7 @@
               <a:buNone/>
             </a:pPr>
             <a:r>
-              <a:rPr lang="th-TH" sz="1200" b="1" spc="120" dirty="0">
+              <a:rPr lang="th-TH" sz="1200" b="1" dirty="0">
                 <a:solidFill>
                   <a:srgbClr val="216B7F"/>
                 </a:solidFill>
@@ -27461,7 +27461,7 @@
                 <a:spcPct val="100000"/>
               </a:lnSpc>
               <a:buNone/>
-              <a:defRPr lang="th-TH" sz="1200" b="1" spc="120" dirty="0">
+              <a:defRPr lang="th-TH" sz="1200" b="1" dirty="0">
                 <a:solidFill>
                   <a:srgbClr val="216B7F"/>
                 </a:solidFill>
@@ -27479,7 +27479,7 @@
               <a:buNone/>
             </a:pPr>
             <a:r>
-              <a:rPr lang="th-TH" sz="1200" b="1" spc="120" dirty="0">
+              <a:rPr lang="th-TH" sz="1200" b="1" dirty="0">
                 <a:solidFill>
                   <a:srgbClr val="216B7F"/>
                 </a:solidFill>
@@ -27962,7 +27962,7 @@
                 <a:spcPct val="130000"/>
               </a:lnSpc>
               <a:buNone/>
-              <a:defRPr lang="th-TH" sz="1200" b="1" spc="120" dirty="0">
+              <a:defRPr lang="th-TH" sz="1200" b="1" dirty="0">
                 <a:solidFill>
                   <a:srgbClr val="5F5F5F"/>
                 </a:solidFill>
@@ -27980,7 +27980,7 @@
               <a:buNone/>
             </a:pPr>
             <a:r>
-              <a:rPr lang="th-TH" sz="1200" b="1" spc="120" dirty="0">
+              <a:rPr lang="th-TH" sz="1200" b="1" dirty="0">
                 <a:solidFill>
                   <a:srgbClr val="5F5F5F"/>
                 </a:solidFill>
@@ -28107,7 +28107,7 @@
                 <a:spcPct val="130000"/>
               </a:lnSpc>
               <a:buNone/>
-              <a:defRPr lang="th-TH" sz="1200" b="1" spc="120" dirty="0">
+              <a:defRPr lang="th-TH" sz="1200" b="1" dirty="0">
                 <a:solidFill>
                   <a:srgbClr val="5F5F5F"/>
                 </a:solidFill>
@@ -28125,7 +28125,7 @@
               <a:buNone/>
             </a:pPr>
             <a:r>
-              <a:rPr lang="th-TH" sz="1200" b="1" spc="120" dirty="0">
+              <a:rPr lang="th-TH" sz="1200" b="1" dirty="0">
                 <a:solidFill>
                   <a:srgbClr val="5F5F5F"/>
                 </a:solidFill>
@@ -28252,7 +28252,7 @@
                 <a:spcPct val="130000"/>
               </a:lnSpc>
               <a:buNone/>
-              <a:defRPr lang="th-TH" sz="1200" b="1" spc="120" dirty="0">
+              <a:defRPr lang="th-TH" sz="1200" b="1" dirty="0">
                 <a:solidFill>
                   <a:srgbClr val="5F5F5F"/>
                 </a:solidFill>
@@ -28270,7 +28270,7 @@
               <a:buNone/>
             </a:pPr>
             <a:r>
-              <a:rPr lang="th-TH" sz="1200" b="1" spc="120" dirty="0">
+              <a:rPr lang="th-TH" sz="1200" b="1" dirty="0">
                 <a:solidFill>
                   <a:srgbClr val="5F5F5F"/>
                 </a:solidFill>
@@ -28371,7 +28371,7 @@
                 <a:spcPct val="100000"/>
               </a:lnSpc>
               <a:buNone/>
-              <a:defRPr lang="th-TH" sz="1200" b="1" spc="120" dirty="0">
+              <a:defRPr lang="th-TH" sz="1200" b="1" dirty="0">
                 <a:solidFill>
                   <a:srgbClr val="216B7F"/>
                 </a:solidFill>
@@ -28389,7 +28389,7 @@
               <a:buNone/>
             </a:pPr>
             <a:r>
-              <a:rPr lang="th-TH" sz="1200" b="1" spc="120" dirty="0">
+              <a:rPr lang="th-TH" sz="1200" b="1" dirty="0">
                 <a:solidFill>
                   <a:srgbClr val="216B7F"/>
                 </a:solidFill>
@@ -28896,7 +28896,7 @@
                 <a:spcPct val="130000"/>
               </a:lnSpc>
               <a:buNone/>
-              <a:defRPr lang="th-TH" sz="1400" spc="60" dirty="0">
+              <a:defRPr lang="th-TH" sz="1400" dirty="0">
                 <a:solidFill>
                   <a:srgbClr val="5F5F5F"/>
                 </a:solidFill>
@@ -28914,7 +28914,7 @@
               <a:buNone/>
             </a:pPr>
             <a:r>
-              <a:rPr lang="th-TH" sz="1400" spc="60" dirty="0">
+              <a:rPr lang="th-TH" sz="1400" dirty="0">
                 <a:solidFill>
                   <a:srgbClr val="5F5F5F"/>
                 </a:solidFill>
@@ -29874,7 +29874,7 @@
                 <a:spcPct val="100000"/>
               </a:lnSpc>
               <a:buNone/>
-              <a:defRPr lang="th-TH" sz="1200" b="1" spc="120" dirty="0">
+              <a:defRPr lang="th-TH" sz="1200" b="1" dirty="0">
                 <a:solidFill>
                   <a:srgbClr val="216B7F"/>
                 </a:solidFill>
@@ -29892,7 +29892,7 @@
               <a:buNone/>
             </a:pPr>
             <a:r>
-              <a:rPr lang="th-TH" sz="1200" b="1" spc="120" dirty="0">
+              <a:rPr lang="th-TH" sz="1200" b="1" dirty="0">
                 <a:solidFill>
                   <a:srgbClr val="216B7F"/>
                 </a:solidFill>
@@ -31638,7 +31638,7 @@
               <a:buNone/>
             </a:pPr>
             <a:r>
-              <a:rPr lang="th-TH" sz="1200" b="1" spc="120" dirty="0">
+              <a:rPr lang="th-TH" sz="1200" b="1" dirty="0">
                 <a:solidFill>
                   <a:srgbClr val="216B7F"/>
                 </a:solidFill>
@@ -32138,7 +32138,7 @@
                         <a:buNone/>
                       </a:pPr>
                       <a:r>
-                        <a:rPr lang="th-TH" sz="1100" b="1" spc="60" dirty="0">
+                        <a:rPr lang="th-TH" sz="1100" b="1" dirty="0">
                           <a:solidFill>
                             <a:srgbClr val="FFFFFF"/>
                           </a:solidFill>
@@ -32160,7 +32160,7 @@
                         <a:buNone/>
                       </a:pPr>
                       <a:r>
-                        <a:rPr lang="th-TH" sz="1100" b="1" spc="60" dirty="0">
+                        <a:rPr lang="th-TH" sz="1100" b="1" dirty="0">
                           <a:solidFill>
                             <a:srgbClr val="FFFFFF"/>
                           </a:solidFill>
@@ -32182,7 +32182,7 @@
                         <a:buNone/>
                       </a:pPr>
                       <a:r>
-                        <a:rPr lang="th-TH" sz="1100" b="1" spc="60" dirty="0">
+                        <a:rPr lang="th-TH" sz="1100" b="1" dirty="0">
                           <a:solidFill>
                             <a:srgbClr val="FFFFFF"/>
                           </a:solidFill>
@@ -32204,7 +32204,7 @@
                         <a:buNone/>
                       </a:pPr>
                       <a:r>
-                        <a:rPr lang="th-TH" sz="1100" b="1" spc="60" dirty="0">
+                        <a:rPr lang="th-TH" sz="1100" b="1" dirty="0">
                           <a:solidFill>
                             <a:srgbClr val="FFFFFF"/>
                           </a:solidFill>
@@ -32226,7 +32226,7 @@
                         <a:buNone/>
                       </a:pPr>
                       <a:r>
-                        <a:rPr lang="th-TH" sz="1100" b="1" spc="60" dirty="0">
+                        <a:rPr lang="th-TH" sz="1100" b="1" dirty="0">
                           <a:solidFill>
                             <a:srgbClr val="FFFFFF"/>
                           </a:solidFill>
@@ -32248,7 +32248,7 @@
                         <a:buNone/>
                       </a:pPr>
                       <a:r>
-                        <a:rPr lang="th-TH" sz="1100" b="1" spc="60" dirty="0">
+                        <a:rPr lang="th-TH" sz="1100" b="1" dirty="0">
                           <a:solidFill>
                             <a:srgbClr val="FFFFFF"/>
                           </a:solidFill>
@@ -35539,7 +35539,7 @@
                         <a:buNone/>
                       </a:pPr>
                       <a:r>
-                        <a:rPr lang="th-TH" sz="1100" b="1" spc="60" dirty="0">
+                        <a:rPr lang="th-TH" sz="1100" b="1" dirty="0">
                           <a:solidFill>
                             <a:srgbClr val="FFFFFF"/>
                           </a:solidFill>
@@ -35561,7 +35561,7 @@
                         <a:buNone/>
                       </a:pPr>
                       <a:r>
-                        <a:rPr lang="th-TH" sz="1100" b="1" spc="60" dirty="0">
+                        <a:rPr lang="th-TH" sz="1100" b="1" dirty="0">
                           <a:solidFill>
                             <a:srgbClr val="FFFFFF"/>
                           </a:solidFill>
@@ -35587,7 +35587,7 @@
                         <a:buNone/>
                       </a:pPr>
                       <a:r>
-                        <a:rPr lang="th-TH" sz="1100" b="1" spc="60" dirty="0">
+                        <a:rPr lang="th-TH" sz="1100" b="1" dirty="0">
                           <a:solidFill>
                             <a:srgbClr val="FFFFFF"/>
                           </a:solidFill>
@@ -38041,7 +38041,7 @@
                         <a:buNone/>
                       </a:pPr>
                       <a:r>
-                        <a:rPr lang="th-TH" sz="1100" b="1" spc="60" dirty="0">
+                        <a:rPr lang="th-TH" sz="1100" b="1" dirty="0">
                           <a:solidFill>
                             <a:srgbClr val="FFFFFF"/>
                           </a:solidFill>
@@ -38063,7 +38063,7 @@
                         <a:buNone/>
                       </a:pPr>
                       <a:r>
-                        <a:rPr lang="th-TH" sz="1100" b="1" spc="60" dirty="0">
+                        <a:rPr lang="th-TH" sz="1100" b="1" dirty="0">
                           <a:solidFill>
                             <a:srgbClr val="FFFFFF"/>
                           </a:solidFill>
@@ -38085,7 +38085,7 @@
                         <a:buNone/>
                       </a:pPr>
                       <a:r>
-                        <a:rPr lang="th-TH" sz="1100" b="1" spc="60" dirty="0">
+                        <a:rPr lang="th-TH" sz="1100" b="1" dirty="0">
                           <a:solidFill>
                             <a:srgbClr val="FFFFFF"/>
                           </a:solidFill>
@@ -38107,7 +38107,7 @@
                         <a:buNone/>
                       </a:pPr>
                       <a:r>
-                        <a:rPr lang="th-TH" sz="1100" b="1" spc="60" dirty="0">
+                        <a:rPr lang="th-TH" sz="1100" b="1" dirty="0">
                           <a:solidFill>
                             <a:srgbClr val="FFFFFF"/>
                           </a:solidFill>

--- a/NCT-Slide-Template-Demo.pptx
+++ b/NCT-Slide-Template-Demo.pptx
@@ -4401,7 +4401,7 @@
         </p:nvSpPr>
         <p:spPr>
           <a:xfrm>
-            <a:off x="914400" y="5638800"/>
+            <a:off x="914400" y="5623560"/>
             <a:ext cx="10363200" cy="411480"/>
           </a:xfrm>
           <a:prstGeom prst="rect">
@@ -4434,8 +4434,8 @@
         </p:nvSpPr>
         <p:spPr>
           <a:xfrm>
-            <a:off x="1097280" y="5699760"/>
-            <a:ext cx="1828800" cy="289560"/>
+            <a:off x="1097280" y="5684520"/>
+            <a:ext cx="914400" cy="289560"/>
           </a:xfrm>
           <a:prstGeom prst="rect">
             <a:avLst/>
@@ -4492,8 +4492,8 @@
         </p:nvSpPr>
         <p:spPr>
           <a:xfrm>
-            <a:off x="2926080" y="5699760"/>
-            <a:ext cx="8168640" cy="289560"/>
+            <a:off x="2240280" y="5684520"/>
+            <a:ext cx="8854440" cy="289560"/>
           </a:xfrm>
           <a:prstGeom prst="rect">
             <a:avLst/>
@@ -5816,20 +5816,20 @@
       </p:sp>
       <p:sp>
         <p:nvSpPr>
-          <p:cNvPr id="32" name="Band"/>
+          <p:cNvPr id="32" name="Takeaway Band"/>
           <p:cNvSpPr/>
           <p:nvPr/>
         </p:nvSpPr>
         <p:spPr>
           <a:xfrm>
-            <a:off x="914400" y="5303520"/>
-            <a:ext cx="10363200" cy="548640"/>
+            <a:off x="914400" y="5623560"/>
+            <a:ext cx="10363200" cy="411480"/>
           </a:xfrm>
           <a:prstGeom prst="rect">
             <a:avLst/>
           </a:prstGeom>
           <a:solidFill>
-            <a:srgbClr val="23436D"/>
+            <a:srgbClr val="E8F6F5"/>
           </a:solidFill>
           <a:ln>
             <a:noFill/>
@@ -5845,7 +5845,7 @@
       </p:sp>
       <p:sp>
         <p:nvSpPr>
-          <p:cNvPr id="33" name="Band Label"/>
+          <p:cNvPr id="33" name="Takeaway Label"/>
           <p:cNvSpPr>
             <a:spLocks noGrp="1"/>
           </p:cNvSpPr>
@@ -5855,8 +5855,8 @@
         </p:nvSpPr>
         <p:spPr>
           <a:xfrm>
-            <a:off x="1143000" y="5394960"/>
-            <a:ext cx="2011680" cy="365760"/>
+            <a:off x="1097280" y="5684520"/>
+            <a:ext cx="914400" cy="289560"/>
           </a:xfrm>
           <a:prstGeom prst="rect">
             <a:avLst/>
@@ -5872,7 +5872,7 @@
               <a:buNone/>
               <a:defRPr lang="th-TH" sz="1200" b="1" dirty="0">
                 <a:solidFill>
-                  <a:srgbClr val="8FBACE"/>
+                  <a:srgbClr val="216B7F"/>
                 </a:solidFill>
                 <a:latin typeface="+mn-lt"/>
                 <a:ea typeface="+mn-ea"/>
@@ -5890,7 +5890,7 @@
             <a:r>
               <a:rPr lang="th-TH" sz="1200" b="1" dirty="0">
                 <a:solidFill>
-                  <a:srgbClr val="8FBACE"/>
+                  <a:srgbClr val="216B7F"/>
                 </a:solidFill>
                 <a:latin typeface="+mn-lt"/>
                 <a:ea typeface="+mn-ea"/>
@@ -5903,7 +5903,7 @@
       </p:sp>
       <p:sp>
         <p:nvSpPr>
-          <p:cNvPr id="34" name="Band Copy"/>
+          <p:cNvPr id="34" name="Takeaway Copy"/>
           <p:cNvSpPr>
             <a:spLocks noGrp="1"/>
           </p:cNvSpPr>
@@ -5913,8 +5913,8 @@
         </p:nvSpPr>
         <p:spPr>
           <a:xfrm>
-            <a:off x="3154680" y="5394960"/>
-            <a:ext cx="7894320" cy="365760"/>
+            <a:off x="2240280" y="5684520"/>
+            <a:ext cx="8854440" cy="289560"/>
           </a:xfrm>
           <a:prstGeom prst="rect">
             <a:avLst/>
@@ -5925,12 +5925,12 @@
           <a:lstStyle>
             <a:lvl1pPr algn="l" marL="0" indent="0">
               <a:lnSpc>
-                <a:spcPct val="130000"/>
+                <a:spcPct val="100000"/>
               </a:lnSpc>
               <a:buNone/>
               <a:defRPr lang="th-TH" sz="1400" dirty="0">
                 <a:solidFill>
-                  <a:srgbClr val="FFFFFF"/>
+                  <a:srgbClr val="333333"/>
                 </a:solidFill>
                 <a:latin typeface="+mn-lt"/>
                 <a:ea typeface="+mn-ea"/>
@@ -5941,14 +5941,14 @@
           <a:p>
             <a:pPr algn="l" marL="0" indent="0">
               <a:lnSpc>
-                <a:spcPct val="130000"/>
+                <a:spcPct val="100000"/>
               </a:lnSpc>
               <a:buNone/>
             </a:pPr>
             <a:r>
               <a:rPr lang="th-TH" sz="1400" dirty="0">
                 <a:solidFill>
-                  <a:srgbClr val="FFFFFF"/>
+                  <a:srgbClr val="333333"/>
                 </a:solidFill>
                 <a:latin typeface="+mn-lt"/>
                 <a:ea typeface="+mn-ea"/>
@@ -7619,14 +7619,14 @@
       </p:sp>
       <p:sp>
         <p:nvSpPr>
-          <p:cNvPr id="42" name="Result Band"/>
+          <p:cNvPr id="42" name="Takeaway Band"/>
           <p:cNvSpPr/>
           <p:nvPr/>
         </p:nvSpPr>
         <p:spPr>
           <a:xfrm>
-            <a:off x="914400" y="4343400"/>
-            <a:ext cx="10363200" cy="548640"/>
+            <a:off x="914400" y="5623560"/>
+            <a:ext cx="10363200" cy="411480"/>
           </a:xfrm>
           <a:prstGeom prst="rect">
             <a:avLst/>
@@ -7648,7 +7648,7 @@
       </p:sp>
       <p:sp>
         <p:nvSpPr>
-          <p:cNvPr id="43" name="Result Label"/>
+          <p:cNvPr id="43" name="Takeaway Label"/>
           <p:cNvSpPr>
             <a:spLocks noGrp="1"/>
           </p:cNvSpPr>
@@ -7658,8 +7658,8 @@
         </p:nvSpPr>
         <p:spPr>
           <a:xfrm>
-            <a:off x="1143000" y="4434840"/>
-            <a:ext cx="2011680" cy="365760"/>
+            <a:off x="1097280" y="5684520"/>
+            <a:ext cx="914400" cy="289560"/>
           </a:xfrm>
           <a:prstGeom prst="rect">
             <a:avLst/>
@@ -7706,7 +7706,7 @@
       </p:sp>
       <p:sp>
         <p:nvSpPr>
-          <p:cNvPr id="44" name="Result Copy"/>
+          <p:cNvPr id="44" name="Takeaway Copy"/>
           <p:cNvSpPr>
             <a:spLocks noGrp="1"/>
           </p:cNvSpPr>
@@ -7716,8 +7716,8 @@
         </p:nvSpPr>
         <p:spPr>
           <a:xfrm>
-            <a:off x="3154680" y="4434840"/>
-            <a:ext cx="7894320" cy="365760"/>
+            <a:off x="2240280" y="5684520"/>
+            <a:ext cx="8854440" cy="289560"/>
           </a:xfrm>
           <a:prstGeom prst="rect">
             <a:avLst/>
@@ -7728,7 +7728,7 @@
           <a:lstStyle>
             <a:lvl1pPr algn="l" marL="0" indent="0">
               <a:lnSpc>
-                <a:spcPct val="130000"/>
+                <a:spcPct val="100000"/>
               </a:lnSpc>
               <a:buNone/>
               <a:defRPr lang="th-TH" sz="1400" dirty="0">
@@ -7744,7 +7744,7 @@
           <a:p>
             <a:pPr algn="l" marL="0" indent="0">
               <a:lnSpc>
-                <a:spcPct val="130000"/>
+                <a:spcPct val="100000"/>
               </a:lnSpc>
               <a:buNone/>
             </a:pPr>
@@ -8244,7 +8244,7 @@
         <p:spPr>
           <a:xfrm>
             <a:off x="1097280" y="5684520"/>
-            <a:ext cx="1828800" cy="289560"/>
+            <a:ext cx="914400" cy="289560"/>
           </a:xfrm>
           <a:prstGeom prst="rect">
             <a:avLst/>
@@ -8301,8 +8301,8 @@
         </p:nvSpPr>
         <p:spPr>
           <a:xfrm>
-            <a:off x="2926080" y="5684520"/>
-            <a:ext cx="8168640" cy="289560"/>
+            <a:off x="2240280" y="5684520"/>
+            <a:ext cx="8854440" cy="289560"/>
           </a:xfrm>
           <a:prstGeom prst="rect">
             <a:avLst/>
@@ -9687,7 +9687,7 @@
         <p:spPr>
           <a:xfrm>
             <a:off x="1097280" y="5684520"/>
-            <a:ext cx="1828800" cy="289560"/>
+            <a:ext cx="914400" cy="289560"/>
           </a:xfrm>
           <a:prstGeom prst="rect">
             <a:avLst/>
@@ -9744,8 +9744,8 @@
         </p:nvSpPr>
         <p:spPr>
           <a:xfrm>
-            <a:off x="2926080" y="5684520"/>
-            <a:ext cx="8168640" cy="289560"/>
+            <a:off x="2240280" y="5684520"/>
+            <a:ext cx="8854440" cy="289560"/>
           </a:xfrm>
           <a:prstGeom prst="rect">
             <a:avLst/>
@@ -11203,14 +11203,14 @@
         </p:nvSpPr>
         <p:spPr>
           <a:xfrm>
-            <a:off x="914400" y="3840480"/>
+            <a:off x="914400" y="5623560"/>
             <a:ext cx="10363200" cy="411480"/>
           </a:xfrm>
           <a:prstGeom prst="rect">
             <a:avLst/>
           </a:prstGeom>
           <a:solidFill>
-            <a:srgbClr val="23436D"/>
+            <a:srgbClr val="E8F6F5"/>
           </a:solidFill>
           <a:ln>
             <a:noFill/>
@@ -11236,8 +11236,8 @@
         </p:nvSpPr>
         <p:spPr>
           <a:xfrm>
-            <a:off x="1097280" y="3901440"/>
-            <a:ext cx="1828800" cy="289560"/>
+            <a:off x="1097280" y="5684520"/>
+            <a:ext cx="914400" cy="289560"/>
           </a:xfrm>
           <a:prstGeom prst="rect">
             <a:avLst/>
@@ -11253,7 +11253,7 @@
               <a:buNone/>
               <a:defRPr lang="th-TH" sz="1200" b="1" dirty="0">
                 <a:solidFill>
-                  <a:srgbClr val="8FBACE"/>
+                  <a:srgbClr val="216B7F"/>
                 </a:solidFill>
                 <a:latin typeface="+mn-lt"/>
                 <a:ea typeface="+mn-ea"/>
@@ -11271,7 +11271,7 @@
             <a:r>
               <a:rPr lang="th-TH" sz="1200" b="1" dirty="0">
                 <a:solidFill>
-                  <a:srgbClr val="8FBACE"/>
+                  <a:srgbClr val="216B7F"/>
                 </a:solidFill>
                 <a:latin typeface="+mn-lt"/>
                 <a:ea typeface="+mn-ea"/>
@@ -11294,8 +11294,8 @@
         </p:nvSpPr>
         <p:spPr>
           <a:xfrm>
-            <a:off x="2926080" y="3901440"/>
-            <a:ext cx="8168640" cy="289560"/>
+            <a:off x="2240280" y="5684520"/>
+            <a:ext cx="8854440" cy="289560"/>
           </a:xfrm>
           <a:prstGeom prst="rect">
             <a:avLst/>
@@ -11311,7 +11311,7 @@
               <a:buNone/>
               <a:defRPr lang="th-TH" sz="1400" dirty="0">
                 <a:solidFill>
-                  <a:srgbClr val="FFFFFF"/>
+                  <a:srgbClr val="333333"/>
                 </a:solidFill>
                 <a:latin typeface="+mn-lt"/>
                 <a:ea typeface="+mn-ea"/>
@@ -11329,7 +11329,7 @@
             <a:r>
               <a:rPr lang="th-TH" sz="1400" dirty="0">
                 <a:solidFill>
-                  <a:srgbClr val="FFFFFF"/>
+                  <a:srgbClr val="333333"/>
                 </a:solidFill>
                 <a:latin typeface="+mn-lt"/>
                 <a:ea typeface="+mn-ea"/>
@@ -11352,7 +11352,7 @@
         </p:nvSpPr>
         <p:spPr>
           <a:xfrm>
-            <a:off x="914400" y="4389120"/>
+            <a:off x="914400" y="3840480"/>
             <a:ext cx="3332480" cy="228600"/>
           </a:xfrm>
           <a:prstGeom prst="rect">
@@ -11406,7 +11406,7 @@
         </p:nvSpPr>
         <p:spPr>
           <a:xfrm>
-            <a:off x="914400" y="4674870"/>
+            <a:off x="914400" y="4126230"/>
             <a:ext cx="3332480" cy="1360170"/>
           </a:xfrm>
           <a:prstGeom prst="rect">
@@ -11439,7 +11439,7 @@
         </p:nvSpPr>
         <p:spPr>
           <a:xfrm>
-            <a:off x="914400" y="4674870"/>
+            <a:off x="914400" y="4126230"/>
             <a:ext cx="3332480" cy="1360170"/>
           </a:xfrm>
           <a:prstGeom prst="rect">
@@ -11487,7 +11487,7 @@
         </p:nvSpPr>
         <p:spPr>
           <a:xfrm>
-            <a:off x="4429760" y="4389120"/>
+            <a:off x="4429760" y="3840480"/>
             <a:ext cx="3332480" cy="228600"/>
           </a:xfrm>
           <a:prstGeom prst="rect">
@@ -11541,7 +11541,7 @@
         </p:nvSpPr>
         <p:spPr>
           <a:xfrm>
-            <a:off x="4429760" y="4674870"/>
+            <a:off x="4429760" y="4126230"/>
             <a:ext cx="3332480" cy="1360170"/>
           </a:xfrm>
           <a:prstGeom prst="rect">
@@ -11574,7 +11574,7 @@
         </p:nvSpPr>
         <p:spPr>
           <a:xfrm>
-            <a:off x="4429760" y="4674870"/>
+            <a:off x="4429760" y="4126230"/>
             <a:ext cx="3332480" cy="1360170"/>
           </a:xfrm>
           <a:prstGeom prst="rect">
@@ -11622,7 +11622,7 @@
         </p:nvSpPr>
         <p:spPr>
           <a:xfrm>
-            <a:off x="7945120" y="4389120"/>
+            <a:off x="7945120" y="3840480"/>
             <a:ext cx="3332480" cy="228600"/>
           </a:xfrm>
           <a:prstGeom prst="rect">
@@ -11676,7 +11676,7 @@
         </p:nvSpPr>
         <p:spPr>
           <a:xfrm>
-            <a:off x="7945120" y="4674870"/>
+            <a:off x="7945120" y="4126230"/>
             <a:ext cx="3332480" cy="1360170"/>
           </a:xfrm>
           <a:prstGeom prst="rect">
@@ -11709,7 +11709,7 @@
         </p:nvSpPr>
         <p:spPr>
           <a:xfrm>
-            <a:off x="7945120" y="4674870"/>
+            <a:off x="7945120" y="4126230"/>
             <a:ext cx="3332480" cy="1360170"/>
           </a:xfrm>
           <a:prstGeom prst="rect">
@@ -12407,7 +12407,7 @@
         <p:spPr>
           <a:xfrm>
             <a:off x="1097280" y="5684520"/>
-            <a:ext cx="1828800" cy="289560"/>
+            <a:ext cx="914400" cy="289560"/>
           </a:xfrm>
           <a:prstGeom prst="rect">
             <a:avLst/>
@@ -12464,8 +12464,8 @@
         </p:nvSpPr>
         <p:spPr>
           <a:xfrm>
-            <a:off x="2926080" y="5684520"/>
-            <a:ext cx="8168640" cy="289560"/>
+            <a:off x="2240280" y="5684520"/>
+            <a:ext cx="8854440" cy="289560"/>
           </a:xfrm>
           <a:prstGeom prst="rect">
             <a:avLst/>
@@ -15780,7 +15780,7 @@
         <p:spPr>
           <a:xfrm>
             <a:off x="1097280" y="5684520"/>
-            <a:ext cx="1828800" cy="289560"/>
+            <a:ext cx="914400" cy="289560"/>
           </a:xfrm>
           <a:prstGeom prst="rect">
             <a:avLst/>
@@ -15837,8 +15837,8 @@
         </p:nvSpPr>
         <p:spPr>
           <a:xfrm>
-            <a:off x="2926080" y="5684520"/>
-            <a:ext cx="8168640" cy="289560"/>
+            <a:off x="2240280" y="5684520"/>
+            <a:ext cx="8854440" cy="289560"/>
           </a:xfrm>
           <a:prstGeom prst="rect">
             <a:avLst/>
@@ -17689,7 +17689,7 @@
         <p:spPr>
           <a:xfrm>
             <a:off x="1097280" y="5684520"/>
-            <a:ext cx="1828800" cy="289560"/>
+            <a:ext cx="914400" cy="289560"/>
           </a:xfrm>
           <a:prstGeom prst="rect">
             <a:avLst/>
@@ -17746,8 +17746,8 @@
         </p:nvSpPr>
         <p:spPr>
           <a:xfrm>
-            <a:off x="2926080" y="5684520"/>
-            <a:ext cx="8168640" cy="289560"/>
+            <a:off x="2240280" y="5684520"/>
+            <a:ext cx="8854440" cy="289560"/>
           </a:xfrm>
           <a:prstGeom prst="rect">
             <a:avLst/>
@@ -18873,7 +18873,7 @@
         <p:spPr>
           <a:xfrm>
             <a:off x="1097280" y="5684520"/>
-            <a:ext cx="1828800" cy="289560"/>
+            <a:ext cx="914400" cy="289560"/>
           </a:xfrm>
           <a:prstGeom prst="rect">
             <a:avLst/>
@@ -18930,8 +18930,8 @@
         </p:nvSpPr>
         <p:spPr>
           <a:xfrm>
-            <a:off x="2926080" y="5684520"/>
-            <a:ext cx="8168640" cy="289560"/>
+            <a:off x="2240280" y="5684520"/>
+            <a:ext cx="8854440" cy="289560"/>
           </a:xfrm>
           <a:prstGeom prst="rect">
             <a:avLst/>
@@ -20376,7 +20376,7 @@
         <p:spPr>
           <a:xfrm>
             <a:off x="1097280" y="5684520"/>
-            <a:ext cx="1828800" cy="289560"/>
+            <a:ext cx="914400" cy="289560"/>
           </a:xfrm>
           <a:prstGeom prst="rect">
             <a:avLst/>
@@ -20433,8 +20433,8 @@
         </p:nvSpPr>
         <p:spPr>
           <a:xfrm>
-            <a:off x="2926080" y="5684520"/>
-            <a:ext cx="8168640" cy="289560"/>
+            <a:off x="2240280" y="5684520"/>
+            <a:ext cx="8854440" cy="289560"/>
           </a:xfrm>
           <a:prstGeom prst="rect">
             <a:avLst/>
@@ -22707,7 +22707,7 @@
         <p:spPr>
           <a:xfrm>
             <a:off x="1097280" y="5684520"/>
-            <a:ext cx="1828800" cy="289560"/>
+            <a:ext cx="914400" cy="289560"/>
           </a:xfrm>
           <a:prstGeom prst="rect">
             <a:avLst/>
@@ -22764,8 +22764,8 @@
         </p:nvSpPr>
         <p:spPr>
           <a:xfrm>
-            <a:off x="2926080" y="5684520"/>
-            <a:ext cx="8168640" cy="289560"/>
+            <a:off x="2240280" y="5684520"/>
+            <a:ext cx="8854440" cy="289560"/>
           </a:xfrm>
           <a:prstGeom prst="rect">
             <a:avLst/>
@@ -25056,7 +25056,7 @@
         <p:spPr>
           <a:xfrm>
             <a:off x="1097280" y="5684520"/>
-            <a:ext cx="1828800" cy="289560"/>
+            <a:ext cx="914400" cy="289560"/>
           </a:xfrm>
           <a:prstGeom prst="rect">
             <a:avLst/>
@@ -25113,8 +25113,8 @@
         </p:nvSpPr>
         <p:spPr>
           <a:xfrm>
-            <a:off x="2926080" y="5684520"/>
-            <a:ext cx="8168640" cy="289560"/>
+            <a:off x="2240280" y="5684520"/>
+            <a:ext cx="8854440" cy="289560"/>
           </a:xfrm>
           <a:prstGeom prst="rect">
             <a:avLst/>
@@ -25668,7 +25668,7 @@
         <p:spPr>
           <a:xfrm>
             <a:off x="914400" y="5623560"/>
-            <a:ext cx="2011680" cy="411480"/>
+            <a:ext cx="1325880" cy="411480"/>
           </a:xfrm>
           <a:prstGeom prst="rect">
             <a:avLst/>
@@ -25728,8 +25728,8 @@
         </p:nvSpPr>
         <p:spPr>
           <a:xfrm>
-            <a:off x="2926080" y="5623560"/>
-            <a:ext cx="8351520" cy="411480"/>
+            <a:off x="2240280" y="5623560"/>
+            <a:ext cx="9037320" cy="411480"/>
           </a:xfrm>
           <a:prstGeom prst="rect">
             <a:avLst/>
@@ -26161,6 +26161,35 @@
       </p:sp>
       <p:sp>
         <p:nvSpPr>
+          <p:cNvPr id="20" name="Left Heading Rule"/>
+          <p:cNvSpPr/>
+          <p:nvPr/>
+        </p:nvSpPr>
+        <p:spPr>
+          <a:xfrm>
+            <a:off x="914400" y="2148840"/>
+            <a:ext cx="5090160" cy="12700"/>
+          </a:xfrm>
+          <a:prstGeom prst="rect">
+            <a:avLst/>
+          </a:prstGeom>
+          <a:solidFill>
+            <a:srgbClr val="E5E5E5"/>
+          </a:solidFill>
+          <a:ln>
+            <a:noFill/>
+          </a:ln>
+        </p:spPr>
+        <p:txBody>
+          <a:bodyPr/>
+          <a:lstStyle/>
+          <a:p>
+            <a:endParaRPr lang="th-TH"/>
+          </a:p>
+        </p:txBody>
+      </p:sp>
+      <p:sp>
+        <p:nvSpPr>
           <p:cNvPr id="13" name="Left Content"/>
           <p:cNvSpPr>
             <a:spLocks noGrp="1"/>
@@ -26386,6 +26415,35 @@
               </a:rPr>
               <a:t>หัวคอลัมน์ขวา</a:t>
             </a:r>
+          </a:p>
+        </p:txBody>
+      </p:sp>
+      <p:sp>
+        <p:nvSpPr>
+          <p:cNvPr id="21" name="Right Heading Rule"/>
+          <p:cNvSpPr/>
+          <p:nvPr/>
+        </p:nvSpPr>
+        <p:spPr>
+          <a:xfrm>
+            <a:off x="6187440" y="2148840"/>
+            <a:ext cx="5090160" cy="12700"/>
+          </a:xfrm>
+          <a:prstGeom prst="rect">
+            <a:avLst/>
+          </a:prstGeom>
+          <a:solidFill>
+            <a:srgbClr val="E5E5E5"/>
+          </a:solidFill>
+          <a:ln>
+            <a:noFill/>
+          </a:ln>
+        </p:spPr>
+        <p:txBody>
+          <a:bodyPr/>
+          <a:lstStyle/>
+          <a:p>
+            <a:endParaRPr lang="th-TH"/>
           </a:p>
         </p:txBody>
       </p:sp>
@@ -27444,7 +27502,7 @@
         <p:spPr>
           <a:xfrm>
             <a:off x="914400" y="5623560"/>
-            <a:ext cx="2011680" cy="411480"/>
+            <a:ext cx="1325880" cy="411480"/>
           </a:xfrm>
           <a:prstGeom prst="rect">
             <a:avLst/>
@@ -27504,8 +27562,8 @@
         </p:nvSpPr>
         <p:spPr>
           <a:xfrm>
-            <a:off x="2926080" y="5623560"/>
-            <a:ext cx="8351520" cy="411480"/>
+            <a:off x="2240280" y="5623560"/>
+            <a:ext cx="9037320" cy="411480"/>
           </a:xfrm>
           <a:prstGeom prst="rect">
             <a:avLst/>
@@ -28354,7 +28412,7 @@
         <p:spPr>
           <a:xfrm>
             <a:off x="914400" y="5623560"/>
-            <a:ext cx="2011680" cy="411480"/>
+            <a:ext cx="1325880" cy="411480"/>
           </a:xfrm>
           <a:prstGeom prst="rect">
             <a:avLst/>
@@ -28414,8 +28472,8 @@
         </p:nvSpPr>
         <p:spPr>
           <a:xfrm>
-            <a:off x="2926080" y="5623560"/>
-            <a:ext cx="8351520" cy="411480"/>
+            <a:off x="2240280" y="5623560"/>
+            <a:ext cx="9037320" cy="411480"/>
           </a:xfrm>
           <a:prstGeom prst="rect">
             <a:avLst/>
@@ -29860,7 +29918,7 @@
         <p:spPr>
           <a:xfrm>
             <a:off x="1097280" y="5684520"/>
-            <a:ext cx="1828800" cy="289560"/>
+            <a:ext cx="914400" cy="289560"/>
           </a:xfrm>
           <a:prstGeom prst="rect">
             <a:avLst/>
@@ -29917,8 +29975,8 @@
         </p:nvSpPr>
         <p:spPr>
           <a:xfrm>
-            <a:off x="2926080" y="5684520"/>
-            <a:ext cx="8168640" cy="289560"/>
+            <a:off x="2240280" y="5684520"/>
+            <a:ext cx="8854440" cy="289560"/>
           </a:xfrm>
           <a:prstGeom prst="rect">
             <a:avLst/>
@@ -30949,19 +31007,19 @@
             <a:pPr/>
             <a:r>
               <a:rPr lang="th-TH" dirty="0"/>
-              <a:t>วิธีการทำงาน</a:t>
-            </a:r>
-          </a:p>
-        </p:txBody>
-      </p:sp>
-      <p:sp>
-        <p:nvSpPr>
-          <p:cNvPr id="3" name="Cap"/>
-          <p:cNvSpPr>
-            <a:spLocks noGrp="1"/>
-          </p:cNvSpPr>
-          <p:nvPr>
-            <p:ph type="body" idx="2"/>
+              <a:t>กระบวนการที่เสนอ</a:t>
+            </a:r>
+          </a:p>
+        </p:txBody>
+      </p:sp>
+      <p:sp>
+        <p:nvSpPr>
+          <p:cNvPr id="3" name="Sub"/>
+          <p:cNvSpPr>
+            <a:spLocks noGrp="1"/>
+          </p:cNvSpPr>
+          <p:nvPr>
+            <p:ph type="body" idx="1"/>
           </p:nvPr>
         </p:nvSpPr>
         <p:spPr/>
@@ -30972,7 +31030,398 @@
             <a:pPr/>
             <a:r>
               <a:rPr lang="th-TH" dirty="0"/>
-              <a:t>กระบวนการ สถาปัตยกรรม และขอบเขตที่ตกลงกัน</a:t>
+              <a:t>ห้าขั้นตอน ทำงานต่อเนื่องโดยไม่ต้องคีย์ซ้ำ</a:t>
+            </a:r>
+          </a:p>
+        </p:txBody>
+      </p:sp>
+      <p:sp>
+        <p:nvSpPr>
+          <p:cNvPr id="4" name="C0"/>
+          <p:cNvSpPr>
+            <a:spLocks noGrp="1"/>
+          </p:cNvSpPr>
+          <p:nvPr>
+            <p:ph type="body" idx="20"/>
+          </p:nvPr>
+        </p:nvSpPr>
+        <p:spPr/>
+        <p:txBody>
+          <a:bodyPr/>
+          <a:lstStyle/>
+          <a:p>
+            <a:pPr/>
+            <a:r>
+              <a:rPr lang="th-TH" dirty="0"/>
+              <a:t>1</a:t>
+            </a:r>
+          </a:p>
+        </p:txBody>
+      </p:sp>
+      <p:sp>
+        <p:nvSpPr>
+          <p:cNvPr id="5" name="H0"/>
+          <p:cNvSpPr>
+            <a:spLocks noGrp="1"/>
+          </p:cNvSpPr>
+          <p:nvPr>
+            <p:ph type="body" idx="21"/>
+          </p:nvPr>
+        </p:nvSpPr>
+        <p:spPr/>
+        <p:txBody>
+          <a:bodyPr/>
+          <a:lstStyle/>
+          <a:p>
+            <a:pPr/>
+            <a:r>
+              <a:rPr lang="th-TH" dirty="0"/>
+              <a:t>รับเอกสาร</a:t>
+            </a:r>
+          </a:p>
+        </p:txBody>
+      </p:sp>
+      <p:sp>
+        <p:nvSpPr>
+          <p:cNvPr id="6" name="B0"/>
+          <p:cNvSpPr>
+            <a:spLocks noGrp="1"/>
+          </p:cNvSpPr>
+          <p:nvPr>
+            <p:ph type="body" idx="22"/>
+          </p:nvPr>
+        </p:nvSpPr>
+        <p:spPr/>
+        <p:txBody>
+          <a:bodyPr/>
+          <a:lstStyle/>
+          <a:p>
+            <a:pPr/>
+            <a:r>
+              <a:rPr lang="th-TH" dirty="0"/>
+              <a:t>สแกนหรือรับไฟล์เข้าคิวกลาง</a:t>
+            </a:r>
+          </a:p>
+        </p:txBody>
+      </p:sp>
+      <p:sp>
+        <p:nvSpPr>
+          <p:cNvPr id="7" name="C1"/>
+          <p:cNvSpPr>
+            <a:spLocks noGrp="1"/>
+          </p:cNvSpPr>
+          <p:nvPr>
+            <p:ph type="body" idx="23"/>
+          </p:nvPr>
+        </p:nvSpPr>
+        <p:spPr/>
+        <p:txBody>
+          <a:bodyPr/>
+          <a:lstStyle/>
+          <a:p>
+            <a:pPr/>
+            <a:r>
+              <a:rPr lang="th-TH" dirty="0"/>
+              <a:t>2</a:t>
+            </a:r>
+          </a:p>
+        </p:txBody>
+      </p:sp>
+      <p:sp>
+        <p:nvSpPr>
+          <p:cNvPr id="8" name="H1"/>
+          <p:cNvSpPr>
+            <a:spLocks noGrp="1"/>
+          </p:cNvSpPr>
+          <p:nvPr>
+            <p:ph type="body" idx="24"/>
+          </p:nvPr>
+        </p:nvSpPr>
+        <p:spPr/>
+        <p:txBody>
+          <a:bodyPr/>
+          <a:lstStyle/>
+          <a:p>
+            <a:pPr/>
+            <a:r>
+              <a:rPr lang="th-TH" dirty="0"/>
+              <a:t>อ่านข้อมูล</a:t>
+            </a:r>
+          </a:p>
+        </p:txBody>
+      </p:sp>
+      <p:sp>
+        <p:nvSpPr>
+          <p:cNvPr id="9" name="B1"/>
+          <p:cNvSpPr>
+            <a:spLocks noGrp="1"/>
+          </p:cNvSpPr>
+          <p:nvPr>
+            <p:ph type="body" idx="25"/>
+          </p:nvPr>
+        </p:nvSpPr>
+        <p:spPr/>
+        <p:txBody>
+          <a:bodyPr/>
+          <a:lstStyle/>
+          <a:p>
+            <a:pPr/>
+            <a:r>
+              <a:rPr lang="th-TH" dirty="0"/>
+              <a:t>ดึงฟิลด์สำคัญ ตรวจกับต้นทาง</a:t>
+            </a:r>
+          </a:p>
+        </p:txBody>
+      </p:sp>
+      <p:sp>
+        <p:nvSpPr>
+          <p:cNvPr id="10" name="C2"/>
+          <p:cNvSpPr>
+            <a:spLocks noGrp="1"/>
+          </p:cNvSpPr>
+          <p:nvPr>
+            <p:ph type="body" idx="26"/>
+          </p:nvPr>
+        </p:nvSpPr>
+        <p:spPr/>
+        <p:txBody>
+          <a:bodyPr/>
+          <a:lstStyle/>
+          <a:p>
+            <a:pPr/>
+            <a:r>
+              <a:rPr lang="th-TH" dirty="0"/>
+              <a:t>3</a:t>
+            </a:r>
+          </a:p>
+        </p:txBody>
+      </p:sp>
+      <p:sp>
+        <p:nvSpPr>
+          <p:cNvPr id="11" name="H2"/>
+          <p:cNvSpPr>
+            <a:spLocks noGrp="1"/>
+          </p:cNvSpPr>
+          <p:nvPr>
+            <p:ph type="body" idx="27"/>
+          </p:nvPr>
+        </p:nvSpPr>
+        <p:spPr/>
+        <p:txBody>
+          <a:bodyPr/>
+          <a:lstStyle/>
+          <a:p>
+            <a:pPr/>
+            <a:r>
+              <a:rPr lang="th-TH" dirty="0"/>
+              <a:t>ตรวจสอบ</a:t>
+            </a:r>
+          </a:p>
+        </p:txBody>
+      </p:sp>
+      <p:sp>
+        <p:nvSpPr>
+          <p:cNvPr id="12" name="B2"/>
+          <p:cNvSpPr>
+            <a:spLocks noGrp="1"/>
+          </p:cNvSpPr>
+          <p:nvPr>
+            <p:ph type="body" idx="28"/>
+          </p:nvPr>
+        </p:nvSpPr>
+        <p:spPr/>
+        <p:txBody>
+          <a:bodyPr/>
+          <a:lstStyle/>
+          <a:p>
+            <a:pPr/>
+            <a:r>
+              <a:rPr lang="th-TH" dirty="0"/>
+              <a:t>กฎธุรกิจและวงเงินอนุมัติ</a:t>
+            </a:r>
+          </a:p>
+        </p:txBody>
+      </p:sp>
+      <p:sp>
+        <p:nvSpPr>
+          <p:cNvPr id="13" name="C3"/>
+          <p:cNvSpPr>
+            <a:spLocks noGrp="1"/>
+          </p:cNvSpPr>
+          <p:nvPr>
+            <p:ph type="body" idx="29"/>
+          </p:nvPr>
+        </p:nvSpPr>
+        <p:spPr/>
+        <p:txBody>
+          <a:bodyPr/>
+          <a:lstStyle/>
+          <a:p>
+            <a:pPr/>
+            <a:r>
+              <a:rPr lang="th-TH" dirty="0"/>
+              <a:t>4</a:t>
+            </a:r>
+          </a:p>
+        </p:txBody>
+      </p:sp>
+      <p:sp>
+        <p:nvSpPr>
+          <p:cNvPr id="14" name="H3"/>
+          <p:cNvSpPr>
+            <a:spLocks noGrp="1"/>
+          </p:cNvSpPr>
+          <p:nvPr>
+            <p:ph type="body" idx="30"/>
+          </p:nvPr>
+        </p:nvSpPr>
+        <p:spPr/>
+        <p:txBody>
+          <a:bodyPr/>
+          <a:lstStyle/>
+          <a:p>
+            <a:pPr/>
+            <a:r>
+              <a:rPr lang="th-TH" dirty="0"/>
+              <a:t>บันทึก</a:t>
+            </a:r>
+          </a:p>
+        </p:txBody>
+      </p:sp>
+      <p:sp>
+        <p:nvSpPr>
+          <p:cNvPr id="15" name="B3"/>
+          <p:cNvSpPr>
+            <a:spLocks noGrp="1"/>
+          </p:cNvSpPr>
+          <p:nvPr>
+            <p:ph type="body" idx="31"/>
+          </p:nvPr>
+        </p:nvSpPr>
+        <p:spPr/>
+        <p:txBody>
+          <a:bodyPr/>
+          <a:lstStyle/>
+          <a:p>
+            <a:pPr/>
+            <a:r>
+              <a:rPr lang="th-TH" dirty="0"/>
+              <a:t>ลงระบบบัญชีพร้อม audit trail</a:t>
+            </a:r>
+          </a:p>
+        </p:txBody>
+      </p:sp>
+      <p:sp>
+        <p:nvSpPr>
+          <p:cNvPr id="16" name="C4"/>
+          <p:cNvSpPr>
+            <a:spLocks noGrp="1"/>
+          </p:cNvSpPr>
+          <p:nvPr>
+            <p:ph type="body" idx="32"/>
+          </p:nvPr>
+        </p:nvSpPr>
+        <p:spPr/>
+        <p:txBody>
+          <a:bodyPr/>
+          <a:lstStyle/>
+          <a:p>
+            <a:pPr/>
+            <a:r>
+              <a:rPr lang="th-TH" dirty="0"/>
+              <a:t>5</a:t>
+            </a:r>
+          </a:p>
+        </p:txBody>
+      </p:sp>
+      <p:sp>
+        <p:nvSpPr>
+          <p:cNvPr id="17" name="H4"/>
+          <p:cNvSpPr>
+            <a:spLocks noGrp="1"/>
+          </p:cNvSpPr>
+          <p:nvPr>
+            <p:ph type="body" idx="33"/>
+          </p:nvPr>
+        </p:nvSpPr>
+        <p:spPr/>
+        <p:txBody>
+          <a:bodyPr/>
+          <a:lstStyle/>
+          <a:p>
+            <a:pPr/>
+            <a:r>
+              <a:rPr lang="th-TH" dirty="0"/>
+              <a:t>กระทบยอด</a:t>
+            </a:r>
+          </a:p>
+        </p:txBody>
+      </p:sp>
+      <p:sp>
+        <p:nvSpPr>
+          <p:cNvPr id="18" name="B4"/>
+          <p:cNvSpPr>
+            <a:spLocks noGrp="1"/>
+          </p:cNvSpPr>
+          <p:nvPr>
+            <p:ph type="body" idx="34"/>
+          </p:nvPr>
+        </p:nvSpPr>
+        <p:spPr/>
+        <p:txBody>
+          <a:bodyPr/>
+          <a:lstStyle/>
+          <a:p>
+            <a:pPr/>
+            <a:r>
+              <a:rPr lang="th-TH" dirty="0"/>
+              <a:t>จับคู่อัตโนมัติ ส่งรายงาน</a:t>
+            </a:r>
+          </a:p>
+        </p:txBody>
+      </p:sp>
+      <p:sp>
+        <p:nvSpPr>
+          <p:cNvPr id="19" name="RL"/>
+          <p:cNvSpPr>
+            <a:spLocks noGrp="1"/>
+          </p:cNvSpPr>
+          <p:nvPr>
+            <p:ph type="body" idx="35"/>
+          </p:nvPr>
+        </p:nvSpPr>
+        <p:spPr/>
+        <p:txBody>
+          <a:bodyPr/>
+          <a:lstStyle/>
+          <a:p>
+            <a:pPr/>
+            <a:r>
+              <a:rPr lang="th-TH" dirty="0"/>
+              <a:t>ผลลัพธ์</a:t>
+            </a:r>
+          </a:p>
+        </p:txBody>
+      </p:sp>
+      <p:sp>
+        <p:nvSpPr>
+          <p:cNvPr id="20" name="RC"/>
+          <p:cNvSpPr>
+            <a:spLocks noGrp="1"/>
+          </p:cNvSpPr>
+          <p:nvPr>
+            <p:ph type="body" idx="36"/>
+          </p:nvPr>
+        </p:nvSpPr>
+        <p:spPr/>
+        <p:txBody>
+          <a:bodyPr/>
+          <a:lstStyle/>
+          <a:p>
+            <a:pPr/>
+            <a:r>
+              <a:rPr lang="th-TH" dirty="0"/>
+              <a:t>เอกสารหนึ่งใบผ่านครบห้าขั้นโดยไม่มีการคีย์ซ้ำเลย</a:t>
             </a:r>
           </a:p>
         </p:txBody>
@@ -31020,7 +31469,7 @@
             <a:pPr/>
             <a:r>
               <a:rPr lang="th-TH" dirty="0"/>
-              <a:t>กระบวนการที่เสนอ</a:t>
+              <a:t>ภาพรวมสถาปัตยกรรมระบบ</a:t>
             </a:r>
           </a:p>
         </p:txBody>
@@ -31043,19 +31492,19 @@
             <a:pPr/>
             <a:r>
               <a:rPr lang="th-TH" dirty="0"/>
-              <a:t>ห้าขั้นตอน ทำงานต่อเนื่องโดยไม่ต้องคีย์ซ้ำ</a:t>
-            </a:r>
-          </a:p>
-        </p:txBody>
-      </p:sp>
-      <p:sp>
-        <p:nvSpPr>
-          <p:cNvPr id="4" name="C0"/>
-          <p:cNvSpPr>
-            <a:spLocks noGrp="1"/>
-          </p:cNvSpPr>
-          <p:nvPr>
-            <p:ph type="body" idx="20"/>
+              <a:t>ใช้ชุดชิ้นส่วนมาตรฐาน — กล่องมุมตรง เส้นหักมุมฉาก ไม่มีเงา</a:t>
+            </a:r>
+          </a:p>
+        </p:txBody>
+      </p:sp>
+      <p:sp>
+        <p:nvSpPr>
+          <p:cNvPr id="4" name="Leg"/>
+          <p:cNvSpPr>
+            <a:spLocks noGrp="1"/>
+          </p:cNvSpPr>
+          <p:nvPr>
+            <p:ph type="body" idx="2"/>
           </p:nvPr>
         </p:nvSpPr>
         <p:spPr/>
@@ -31066,19 +31515,19 @@
             <a:pPr/>
             <a:r>
               <a:rPr lang="th-TH" dirty="0"/>
-              <a:t>1</a:t>
-            </a:r>
-          </a:p>
-        </p:txBody>
-      </p:sp>
-      <p:sp>
-        <p:nvSpPr>
-          <p:cNvPr id="5" name="H0"/>
-          <p:cNvSpPr>
-            <a:spLocks noGrp="1"/>
-          </p:cNvSpPr>
-          <p:nvPr>
-            <p:ph type="body" idx="21"/>
+              <a:t>กล่องทึบ = ระบบที่มีอยู่  ·  กล่องมีสีหมวด = ส่วนที่เพิ่ม  ·  เส้นทึบ = ข้อมูลไหลอัตโนมัติ</a:t>
+            </a:r>
+          </a:p>
+        </p:txBody>
+      </p:sp>
+      <p:sp>
+        <p:nvSpPr>
+          <p:cNvPr id="5" name="TL"/>
+          <p:cNvSpPr>
+            <a:spLocks noGrp="1"/>
+          </p:cNvSpPr>
+          <p:nvPr>
+            <p:ph type="body" idx="3"/>
           </p:nvPr>
         </p:nvSpPr>
         <p:spPr/>
@@ -31089,19 +31538,19 @@
             <a:pPr/>
             <a:r>
               <a:rPr lang="th-TH" dirty="0"/>
-              <a:t>รับเอกสาร</a:t>
-            </a:r>
-          </a:p>
-        </p:txBody>
-      </p:sp>
-      <p:sp>
-        <p:nvSpPr>
-          <p:cNvPr id="6" name="B0"/>
-          <p:cNvSpPr>
-            <a:spLocks noGrp="1"/>
-          </p:cNvSpPr>
-          <p:nvPr>
-            <p:ph type="body" idx="22"/>
+              <a:t>สรุป</a:t>
+            </a:r>
+          </a:p>
+        </p:txBody>
+      </p:sp>
+      <p:sp>
+        <p:nvSpPr>
+          <p:cNvPr id="6" name="TC"/>
+          <p:cNvSpPr>
+            <a:spLocks noGrp="1"/>
+          </p:cNvSpPr>
+          <p:nvPr>
+            <p:ph type="body" idx="4"/>
           </p:nvPr>
         </p:nvSpPr>
         <p:spPr/>
@@ -31112,329 +31561,457 @@
             <a:pPr/>
             <a:r>
               <a:rPr lang="th-TH" dirty="0"/>
-              <a:t>สแกนหรือรับไฟล์เข้าคิวกลาง</a:t>
-            </a:r>
-          </a:p>
-        </p:txBody>
-      </p:sp>
-      <p:sp>
-        <p:nvSpPr>
-          <p:cNvPr id="7" name="C1"/>
-          <p:cNvSpPr>
-            <a:spLocks noGrp="1"/>
-          </p:cNvSpPr>
-          <p:nvPr>
-            <p:ph type="body" idx="23"/>
-          </p:nvPr>
-        </p:nvSpPr>
-        <p:spPr/>
-        <p:txBody>
-          <a:bodyPr/>
-          <a:lstStyle/>
-          <a:p>
-            <a:pPr/>
-            <a:r>
-              <a:rPr lang="th-TH" dirty="0"/>
-              <a:t>2</a:t>
-            </a:r>
-          </a:p>
-        </p:txBody>
-      </p:sp>
-      <p:sp>
-        <p:nvSpPr>
-          <p:cNvPr id="8" name="H1"/>
-          <p:cNvSpPr>
-            <a:spLocks noGrp="1"/>
-          </p:cNvSpPr>
-          <p:nvPr>
-            <p:ph type="body" idx="24"/>
-          </p:nvPr>
-        </p:nvSpPr>
-        <p:spPr/>
-        <p:txBody>
-          <a:bodyPr/>
-          <a:lstStyle/>
-          <a:p>
-            <a:pPr/>
-            <a:r>
-              <a:rPr lang="th-TH" dirty="0"/>
-              <a:t>อ่านข้อมูล</a:t>
-            </a:r>
-          </a:p>
-        </p:txBody>
-      </p:sp>
-      <p:sp>
-        <p:nvSpPr>
-          <p:cNvPr id="9" name="B1"/>
-          <p:cNvSpPr>
-            <a:spLocks noGrp="1"/>
-          </p:cNvSpPr>
-          <p:nvPr>
-            <p:ph type="body" idx="25"/>
-          </p:nvPr>
-        </p:nvSpPr>
-        <p:spPr/>
-        <p:txBody>
-          <a:bodyPr/>
-          <a:lstStyle/>
-          <a:p>
-            <a:pPr/>
-            <a:r>
-              <a:rPr lang="th-TH" dirty="0"/>
-              <a:t>ดึงฟิลด์สำคัญ ตรวจกับต้นทาง</a:t>
-            </a:r>
-          </a:p>
-        </p:txBody>
-      </p:sp>
-      <p:sp>
-        <p:nvSpPr>
-          <p:cNvPr id="10" name="C2"/>
-          <p:cNvSpPr>
-            <a:spLocks noGrp="1"/>
-          </p:cNvSpPr>
-          <p:nvPr>
-            <p:ph type="body" idx="26"/>
-          </p:nvPr>
-        </p:nvSpPr>
-        <p:spPr/>
-        <p:txBody>
-          <a:bodyPr/>
-          <a:lstStyle/>
-          <a:p>
-            <a:pPr/>
-            <a:r>
-              <a:rPr lang="th-TH" dirty="0"/>
-              <a:t>3</a:t>
-            </a:r>
-          </a:p>
-        </p:txBody>
-      </p:sp>
-      <p:sp>
-        <p:nvSpPr>
-          <p:cNvPr id="11" name="H2"/>
-          <p:cNvSpPr>
-            <a:spLocks noGrp="1"/>
-          </p:cNvSpPr>
-          <p:nvPr>
-            <p:ph type="body" idx="27"/>
-          </p:nvPr>
-        </p:nvSpPr>
-        <p:spPr/>
-        <p:txBody>
-          <a:bodyPr/>
-          <a:lstStyle/>
-          <a:p>
-            <a:pPr/>
-            <a:r>
-              <a:rPr lang="th-TH" dirty="0"/>
-              <a:t>ตรวจสอบ</a:t>
-            </a:r>
-          </a:p>
-        </p:txBody>
-      </p:sp>
-      <p:sp>
-        <p:nvSpPr>
-          <p:cNvPr id="12" name="B2"/>
-          <p:cNvSpPr>
-            <a:spLocks noGrp="1"/>
-          </p:cNvSpPr>
-          <p:nvPr>
-            <p:ph type="body" idx="28"/>
-          </p:nvPr>
-        </p:nvSpPr>
-        <p:spPr/>
-        <p:txBody>
-          <a:bodyPr/>
-          <a:lstStyle/>
-          <a:p>
-            <a:pPr/>
-            <a:r>
-              <a:rPr lang="th-TH" dirty="0"/>
-              <a:t>กฎธุรกิจและวงเงินอนุมัติ</a:t>
-            </a:r>
-          </a:p>
-        </p:txBody>
-      </p:sp>
-      <p:sp>
-        <p:nvSpPr>
-          <p:cNvPr id="13" name="C3"/>
-          <p:cNvSpPr>
-            <a:spLocks noGrp="1"/>
-          </p:cNvSpPr>
-          <p:nvPr>
-            <p:ph type="body" idx="29"/>
-          </p:nvPr>
-        </p:nvSpPr>
-        <p:spPr/>
-        <p:txBody>
-          <a:bodyPr/>
-          <a:lstStyle/>
-          <a:p>
-            <a:pPr/>
-            <a:r>
-              <a:rPr lang="th-TH" dirty="0"/>
-              <a:t>4</a:t>
-            </a:r>
-          </a:p>
-        </p:txBody>
-      </p:sp>
-      <p:sp>
-        <p:nvSpPr>
-          <p:cNvPr id="14" name="H3"/>
-          <p:cNvSpPr>
-            <a:spLocks noGrp="1"/>
-          </p:cNvSpPr>
-          <p:nvPr>
-            <p:ph type="body" idx="30"/>
-          </p:nvPr>
-        </p:nvSpPr>
-        <p:spPr/>
-        <p:txBody>
-          <a:bodyPr/>
-          <a:lstStyle/>
-          <a:p>
-            <a:pPr/>
-            <a:r>
-              <a:rPr lang="th-TH" dirty="0"/>
-              <a:t>บันทึก</a:t>
-            </a:r>
-          </a:p>
-        </p:txBody>
-      </p:sp>
-      <p:sp>
-        <p:nvSpPr>
-          <p:cNvPr id="15" name="B3"/>
-          <p:cNvSpPr>
-            <a:spLocks noGrp="1"/>
-          </p:cNvSpPr>
-          <p:nvPr>
-            <p:ph type="body" idx="31"/>
-          </p:nvPr>
-        </p:nvSpPr>
-        <p:spPr/>
-        <p:txBody>
-          <a:bodyPr/>
-          <a:lstStyle/>
-          <a:p>
-            <a:pPr/>
-            <a:r>
-              <a:rPr lang="th-TH" dirty="0"/>
-              <a:t>ลงระบบบัญชีพร้อม audit trail</a:t>
-            </a:r>
-          </a:p>
-        </p:txBody>
-      </p:sp>
-      <p:sp>
-        <p:nvSpPr>
-          <p:cNvPr id="16" name="C4"/>
-          <p:cNvSpPr>
-            <a:spLocks noGrp="1"/>
-          </p:cNvSpPr>
-          <p:nvPr>
-            <p:ph type="body" idx="32"/>
-          </p:nvPr>
-        </p:nvSpPr>
-        <p:spPr/>
-        <p:txBody>
-          <a:bodyPr/>
-          <a:lstStyle/>
-          <a:p>
-            <a:pPr/>
-            <a:r>
-              <a:rPr lang="th-TH" dirty="0"/>
-              <a:t>5</a:t>
-            </a:r>
-          </a:p>
-        </p:txBody>
-      </p:sp>
-      <p:sp>
-        <p:nvSpPr>
-          <p:cNvPr id="17" name="H4"/>
-          <p:cNvSpPr>
-            <a:spLocks noGrp="1"/>
-          </p:cNvSpPr>
-          <p:nvPr>
-            <p:ph type="body" idx="33"/>
-          </p:nvPr>
-        </p:nvSpPr>
-        <p:spPr/>
-        <p:txBody>
-          <a:bodyPr/>
-          <a:lstStyle/>
-          <a:p>
-            <a:pPr/>
-            <a:r>
-              <a:rPr lang="th-TH" dirty="0"/>
-              <a:t>กระทบยอด</a:t>
-            </a:r>
-          </a:p>
-        </p:txBody>
-      </p:sp>
-      <p:sp>
-        <p:nvSpPr>
-          <p:cNvPr id="18" name="B4"/>
-          <p:cNvSpPr>
-            <a:spLocks noGrp="1"/>
-          </p:cNvSpPr>
-          <p:nvPr>
-            <p:ph type="body" idx="34"/>
-          </p:nvPr>
-        </p:nvSpPr>
-        <p:spPr/>
-        <p:txBody>
-          <a:bodyPr/>
-          <a:lstStyle/>
-          <a:p>
-            <a:pPr/>
-            <a:r>
-              <a:rPr lang="th-TH" dirty="0"/>
-              <a:t>จับคู่อัตโนมัติ ส่งรายงาน</a:t>
-            </a:r>
-          </a:p>
-        </p:txBody>
-      </p:sp>
-      <p:sp>
-        <p:nvSpPr>
-          <p:cNvPr id="19" name="RL"/>
-          <p:cNvSpPr>
-            <a:spLocks noGrp="1"/>
-          </p:cNvSpPr>
-          <p:nvPr>
-            <p:ph type="body" idx="35"/>
-          </p:nvPr>
-        </p:nvSpPr>
-        <p:spPr/>
-        <p:txBody>
-          <a:bodyPr/>
-          <a:lstStyle/>
-          <a:p>
-            <a:pPr/>
-            <a:r>
-              <a:rPr lang="th-TH" dirty="0"/>
-              <a:t>ผลลัพธ์</a:t>
-            </a:r>
-          </a:p>
-        </p:txBody>
-      </p:sp>
-      <p:sp>
-        <p:nvSpPr>
-          <p:cNvPr id="20" name="RC"/>
-          <p:cNvSpPr>
-            <a:spLocks noGrp="1"/>
-          </p:cNvSpPr>
-          <p:nvPr>
-            <p:ph type="body" idx="36"/>
-          </p:nvPr>
-        </p:nvSpPr>
-        <p:spPr/>
-        <p:txBody>
-          <a:bodyPr/>
-          <a:lstStyle/>
-          <a:p>
-            <a:pPr/>
-            <a:r>
-              <a:rPr lang="th-TH" dirty="0"/>
-              <a:t>เอกสารหนึ่งใบผ่านครบห้าขั้นโดยไม่มีการคีย์ซ้ำเลย</a:t>
+              <a:t>ระบบเดิมไม่ถูกแก้ ของใหม่แทรกเป็นคิวและตัวตรวจกฎคั่นกลางเท่านั้น</a:t>
+            </a:r>
+          </a:p>
+        </p:txBody>
+      </p:sp>
+      <p:sp>
+        <p:nvSpPr>
+          <p:cNvPr id="10" name="Group Zone"/>
+          <p:cNvSpPr/>
+          <p:nvPr/>
+        </p:nvSpPr>
+        <p:spPr>
+          <a:xfrm>
+            <a:off x="3566160" y="2766060"/>
+            <a:ext cx="5257800" cy="1645920"/>
+          </a:xfrm>
+          <a:prstGeom prst="rect">
+            <a:avLst/>
+          </a:prstGeom>
+          <a:solidFill>
+            <a:srgbClr val="E8F6F5"/>
+          </a:solidFill>
+          <a:ln>
+            <a:noFill/>
+          </a:ln>
+        </p:spPr>
+        <p:txBody>
+          <a:bodyPr/>
+          <a:lstStyle/>
+          <a:p>
+            <a:endParaRPr lang="th-TH"/>
+          </a:p>
+        </p:txBody>
+      </p:sp>
+      <p:sp>
+        <p:nvSpPr>
+          <p:cNvPr id="11" name="Group Label"/>
+          <p:cNvSpPr/>
+          <p:nvPr/>
+        </p:nvSpPr>
+        <p:spPr>
+          <a:xfrm>
+            <a:off x="3840480" y="2926080"/>
+            <a:ext cx="3200400" cy="228600"/>
+          </a:xfrm>
+          <a:prstGeom prst="rect">
+            <a:avLst/>
+          </a:prstGeom>
+          <a:noFill/>
+          <a:ln>
+            <a:noFill/>
+          </a:ln>
+        </p:spPr>
+        <p:txBody>
+          <a:bodyPr wrap="square" anchor="ctr" lIns="0" tIns="0" rIns="0" bIns="0" rtlCol="0"/>
+          <a:lstStyle/>
+          <a:p>
+            <a:pPr algn="l" marL="0" indent="0">
+              <a:lnSpc>
+                <a:spcPct val="100000"/>
+              </a:lnSpc>
+              <a:buNone/>
+            </a:pPr>
+            <a:r>
+              <a:rPr lang="th-TH" sz="1200" b="1" dirty="0">
+                <a:solidFill>
+                  <a:srgbClr val="216B7F"/>
+                </a:solidFill>
+                <a:latin typeface="+mn-lt"/>
+                <a:ea typeface="+mn-ea"/>
+                <a:cs typeface="+mn-cs"/>
+              </a:rPr>
+              <a:t>ส่วนที่เพิ่มใหม่</a:t>
+            </a:r>
+          </a:p>
+        </p:txBody>
+      </p:sp>
+      <p:sp>
+        <p:nvSpPr>
+          <p:cNvPr id="12" name="Box 1"/>
+          <p:cNvSpPr/>
+          <p:nvPr/>
+        </p:nvSpPr>
+        <p:spPr>
+          <a:xfrm>
+            <a:off x="1143000" y="3223260"/>
+            <a:ext cx="2011680" cy="731520"/>
+          </a:xfrm>
+          <a:prstGeom prst="rect">
+            <a:avLst/>
+          </a:prstGeom>
+          <a:solidFill>
+            <a:srgbClr val="23436D"/>
+          </a:solidFill>
+          <a:ln>
+            <a:noFill/>
+          </a:ln>
+        </p:spPr>
+        <p:txBody>
+          <a:bodyPr wrap="square" anchor="ctr" lIns="0" tIns="0" rIns="0" bIns="0" rtlCol="0"/>
+          <a:lstStyle/>
+          <a:p>
+            <a:pPr algn="ctr" marL="0" indent="0">
+              <a:lnSpc>
+                <a:spcPct val="110000"/>
+              </a:lnSpc>
+              <a:buNone/>
+            </a:pPr>
+            <a:r>
+              <a:rPr lang="th-TH" sz="1200" dirty="0">
+                <a:solidFill>
+                  <a:srgbClr val="FFFFFF"/>
+                </a:solidFill>
+                <a:latin typeface="+mn-lt"/>
+                <a:ea typeface="+mn-ea"/>
+                <a:cs typeface="+mn-cs"/>
+              </a:rPr>
+              <a:t>ระบบ ERP ปัจจุบัน</a:t>
+            </a:r>
+          </a:p>
+        </p:txBody>
+      </p:sp>
+      <p:sp>
+        <p:nvSpPr>
+          <p:cNvPr id="13" name="Box 2"/>
+          <p:cNvSpPr/>
+          <p:nvPr/>
+        </p:nvSpPr>
+        <p:spPr>
+          <a:xfrm>
+            <a:off x="3840480" y="3223260"/>
+            <a:ext cx="2011680" cy="731520"/>
+          </a:xfrm>
+          <a:prstGeom prst="rect">
+            <a:avLst/>
+          </a:prstGeom>
+          <a:solidFill>
+            <a:srgbClr val="FFFFFF"/>
+          </a:solidFill>
+          <a:ln w="12700">
+            <a:solidFill>
+              <a:srgbClr val="2A5EA0"/>
+            </a:solidFill>
+          </a:ln>
+        </p:spPr>
+        <p:txBody>
+          <a:bodyPr wrap="square" anchor="ctr" lIns="0" tIns="0" rIns="0" bIns="0" rtlCol="0"/>
+          <a:lstStyle/>
+          <a:p>
+            <a:pPr algn="ctr" marL="0" indent="0">
+              <a:lnSpc>
+                <a:spcPct val="110000"/>
+              </a:lnSpc>
+              <a:buNone/>
+            </a:pPr>
+            <a:r>
+              <a:rPr lang="th-TH" sz="1200" dirty="0">
+                <a:solidFill>
+                  <a:srgbClr val="333333"/>
+                </a:solidFill>
+                <a:latin typeface="+mn-lt"/>
+                <a:ea typeface="+mn-ea"/>
+                <a:cs typeface="+mn-cs"/>
+              </a:rPr>
+              <a:t>คิวเอกสารกลาง</a:t>
+            </a:r>
+          </a:p>
+        </p:txBody>
+      </p:sp>
+      <p:sp>
+        <p:nvSpPr>
+          <p:cNvPr id="113" name="Box 2 Tab"/>
+          <p:cNvSpPr/>
+          <p:nvPr/>
+        </p:nvSpPr>
+        <p:spPr>
+          <a:xfrm>
+            <a:off x="3954780" y="3337560"/>
+            <a:ext cx="205740" cy="45720"/>
+          </a:xfrm>
+          <a:prstGeom prst="rect">
+            <a:avLst/>
+          </a:prstGeom>
+          <a:solidFill>
+            <a:srgbClr val="2A5EA0"/>
+          </a:solidFill>
+          <a:ln>
+            <a:noFill/>
+          </a:ln>
+        </p:spPr>
+        <p:txBody>
+          <a:bodyPr/>
+          <a:lstStyle/>
+          <a:p>
+            <a:endParaRPr lang="th-TH"/>
+          </a:p>
+        </p:txBody>
+      </p:sp>
+      <p:sp>
+        <p:nvSpPr>
+          <p:cNvPr id="14" name="Box 3"/>
+          <p:cNvSpPr/>
+          <p:nvPr/>
+        </p:nvSpPr>
+        <p:spPr>
+          <a:xfrm>
+            <a:off x="6537960" y="3223260"/>
+            <a:ext cx="2011680" cy="731520"/>
+          </a:xfrm>
+          <a:prstGeom prst="rect">
+            <a:avLst/>
+          </a:prstGeom>
+          <a:solidFill>
+            <a:srgbClr val="FFFFFF"/>
+          </a:solidFill>
+          <a:ln w="12700">
+            <a:solidFill>
+              <a:srgbClr val="BB731B"/>
+            </a:solidFill>
+          </a:ln>
+        </p:spPr>
+        <p:txBody>
+          <a:bodyPr wrap="square" anchor="ctr" lIns="0" tIns="0" rIns="0" bIns="0" rtlCol="0"/>
+          <a:lstStyle/>
+          <a:p>
+            <a:pPr algn="ctr" marL="0" indent="0">
+              <a:lnSpc>
+                <a:spcPct val="110000"/>
+              </a:lnSpc>
+              <a:buNone/>
+            </a:pPr>
+            <a:r>
+              <a:rPr lang="th-TH" sz="1200" dirty="0">
+                <a:solidFill>
+                  <a:srgbClr val="333333"/>
+                </a:solidFill>
+                <a:latin typeface="+mn-lt"/>
+                <a:ea typeface="+mn-ea"/>
+                <a:cs typeface="+mn-cs"/>
+              </a:rPr>
+              <a:t>ตัวตรวจกฎธุรกิจ</a:t>
+            </a:r>
+          </a:p>
+        </p:txBody>
+      </p:sp>
+      <p:sp>
+        <p:nvSpPr>
+          <p:cNvPr id="114" name="Box 3 Tab"/>
+          <p:cNvSpPr/>
+          <p:nvPr/>
+        </p:nvSpPr>
+        <p:spPr>
+          <a:xfrm>
+            <a:off x="6652260" y="3337560"/>
+            <a:ext cx="205740" cy="45720"/>
+          </a:xfrm>
+          <a:prstGeom prst="rect">
+            <a:avLst/>
+          </a:prstGeom>
+          <a:solidFill>
+            <a:srgbClr val="BB731B"/>
+          </a:solidFill>
+          <a:ln>
+            <a:noFill/>
+          </a:ln>
+        </p:spPr>
+        <p:txBody>
+          <a:bodyPr/>
+          <a:lstStyle/>
+          <a:p>
+            <a:endParaRPr lang="th-TH"/>
+          </a:p>
+        </p:txBody>
+      </p:sp>
+      <p:sp>
+        <p:nvSpPr>
+          <p:cNvPr id="15" name="Box 4"/>
+          <p:cNvSpPr/>
+          <p:nvPr/>
+        </p:nvSpPr>
+        <p:spPr>
+          <a:xfrm>
+            <a:off x="9235440" y="3223260"/>
+            <a:ext cx="2011680" cy="731520"/>
+          </a:xfrm>
+          <a:prstGeom prst="rect">
+            <a:avLst/>
+          </a:prstGeom>
+          <a:solidFill>
+            <a:srgbClr val="23436D"/>
+          </a:solidFill>
+          <a:ln>
+            <a:noFill/>
+          </a:ln>
+        </p:spPr>
+        <p:txBody>
+          <a:bodyPr wrap="square" anchor="ctr" lIns="0" tIns="0" rIns="0" bIns="0" rtlCol="0"/>
+          <a:lstStyle/>
+          <a:p>
+            <a:pPr algn="ctr" marL="0" indent="0">
+              <a:lnSpc>
+                <a:spcPct val="110000"/>
+              </a:lnSpc>
+              <a:buNone/>
+            </a:pPr>
+            <a:r>
+              <a:rPr lang="th-TH" sz="1200" dirty="0">
+                <a:solidFill>
+                  <a:srgbClr val="FFFFFF"/>
+                </a:solidFill>
+                <a:latin typeface="+mn-lt"/>
+                <a:ea typeface="+mn-ea"/>
+                <a:cs typeface="+mn-cs"/>
+              </a:rPr>
+              <a:t>ระบบบัญชี</a:t>
+            </a:r>
+          </a:p>
+        </p:txBody>
+      </p:sp>
+      <p:sp>
+        <p:nvSpPr>
+          <p:cNvPr id="16" name="Link 1"/>
+          <p:cNvSpPr/>
+          <p:nvPr/>
+        </p:nvSpPr>
+        <p:spPr>
+          <a:xfrm>
+            <a:off x="3268980" y="3589020"/>
+            <a:ext cx="457200" cy="0"/>
+          </a:xfrm>
+          <a:prstGeom prst="line">
+            <a:avLst/>
+          </a:prstGeom>
+          <a:noFill/>
+          <a:ln w="15875" cap="flat">
+            <a:solidFill>
+              <a:srgbClr val="216B7F"/>
+            </a:solidFill>
+            <a:prstDash val="solid"/>
+            <a:tailEnd type="triangle" w="med" len="med"/>
+          </a:ln>
+        </p:spPr>
+        <p:txBody>
+          <a:bodyPr/>
+          <a:lstStyle/>
+          <a:p>
+            <a:endParaRPr lang="th-TH"/>
+          </a:p>
+        </p:txBody>
+      </p:sp>
+      <p:sp>
+        <p:nvSpPr>
+          <p:cNvPr id="17" name="Link 2"/>
+          <p:cNvSpPr/>
+          <p:nvPr/>
+        </p:nvSpPr>
+        <p:spPr>
+          <a:xfrm>
+            <a:off x="5966460" y="3589020"/>
+            <a:ext cx="457200" cy="0"/>
+          </a:xfrm>
+          <a:prstGeom prst="line">
+            <a:avLst/>
+          </a:prstGeom>
+          <a:noFill/>
+          <a:ln w="15875" cap="flat">
+            <a:solidFill>
+              <a:srgbClr val="216B7F"/>
+            </a:solidFill>
+            <a:prstDash val="solid"/>
+            <a:tailEnd type="triangle" w="med" len="med"/>
+          </a:ln>
+        </p:spPr>
+        <p:txBody>
+          <a:bodyPr/>
+          <a:lstStyle/>
+          <a:p>
+            <a:endParaRPr lang="th-TH"/>
+          </a:p>
+        </p:txBody>
+      </p:sp>
+      <p:sp>
+        <p:nvSpPr>
+          <p:cNvPr id="18" name="Link 3"/>
+          <p:cNvSpPr/>
+          <p:nvPr/>
+        </p:nvSpPr>
+        <p:spPr>
+          <a:xfrm>
+            <a:off x="8663940" y="3589020"/>
+            <a:ext cx="457200" cy="0"/>
+          </a:xfrm>
+          <a:prstGeom prst="line">
+            <a:avLst/>
+          </a:prstGeom>
+          <a:noFill/>
+          <a:ln w="15875" cap="flat">
+            <a:solidFill>
+              <a:srgbClr val="216B7F"/>
+            </a:solidFill>
+            <a:prstDash val="solid"/>
+            <a:tailEnd type="triangle" w="med" len="med"/>
+          </a:ln>
+        </p:spPr>
+        <p:txBody>
+          <a:bodyPr/>
+          <a:lstStyle/>
+          <a:p>
+            <a:endParaRPr lang="th-TH"/>
+          </a:p>
+        </p:txBody>
+      </p:sp>
+      <p:sp>
+        <p:nvSpPr>
+          <p:cNvPr id="19" name="Edge Label"/>
+          <p:cNvSpPr/>
+          <p:nvPr/>
+        </p:nvSpPr>
+        <p:spPr>
+          <a:xfrm>
+            <a:off x="5806440" y="3268980"/>
+            <a:ext cx="822960" cy="228600"/>
+          </a:xfrm>
+          <a:prstGeom prst="rect">
+            <a:avLst/>
+          </a:prstGeom>
+          <a:noFill/>
+          <a:ln>
+            <a:noFill/>
+          </a:ln>
+        </p:spPr>
+        <p:txBody>
+          <a:bodyPr wrap="square" anchor="ctr" lIns="0" tIns="0" rIns="0" bIns="0" rtlCol="0"/>
+          <a:lstStyle/>
+          <a:p>
+            <a:pPr algn="ctr" marL="0" indent="0">
+              <a:lnSpc>
+                <a:spcPct val="100000"/>
+              </a:lnSpc>
+              <a:buNone/>
+            </a:pPr>
+            <a:r>
+              <a:rPr lang="th-TH" sz="1000" dirty="0">
+                <a:solidFill>
+                  <a:srgbClr val="5F5F5F"/>
+                </a:solidFill>
+                <a:latin typeface="+mn-lt"/>
+                <a:ea typeface="+mn-ea"/>
+                <a:cs typeface="+mn-cs"/>
+              </a:rPr>
+              <a:t>ผ่านกฎ</a:t>
             </a:r>
           </a:p>
         </p:txBody>
@@ -31448,596 +32025,6 @@
 </file>
 
 <file path=ppt/slides/slide12.xml><?xml version="1.0" encoding="utf-8"?>
-<p:sld xmlns:a="http://schemas.openxmlformats.org/drawingml/2006/main" xmlns:r="http://schemas.openxmlformats.org/officeDocument/2006/relationships" xmlns:p="http://schemas.openxmlformats.org/presentationml/2006/main">
-  <p:cSld name="">
-    <p:spTree>
-      <p:nvGrpSpPr>
-        <p:cNvPr id="1" name=""/>
-        <p:cNvGrpSpPr/>
-        <p:nvPr/>
-      </p:nvGrpSpPr>
-      <p:grpSpPr>
-        <a:xfrm>
-          <a:off x="0" y="0"/>
-          <a:ext cx="0" cy="0"/>
-          <a:chOff x="0" y="0"/>
-          <a:chExt cx="0" cy="0"/>
-        </a:xfrm>
-      </p:grpSpPr>
-      <p:sp>
-        <p:nvSpPr>
-          <p:cNvPr id="2" name="Title"/>
-          <p:cNvSpPr>
-            <a:spLocks noGrp="1"/>
-          </p:cNvSpPr>
-          <p:nvPr>
-            <p:ph type="title"/>
-          </p:nvPr>
-        </p:nvSpPr>
-        <p:spPr/>
-        <p:txBody>
-          <a:bodyPr/>
-          <a:lstStyle/>
-          <a:p>
-            <a:pPr/>
-            <a:r>
-              <a:rPr lang="th-TH" dirty="0"/>
-              <a:t>ภาพรวมสถาปัตยกรรมระบบ</a:t>
-            </a:r>
-          </a:p>
-        </p:txBody>
-      </p:sp>
-      <p:sp>
-        <p:nvSpPr>
-          <p:cNvPr id="3" name="Sub"/>
-          <p:cNvSpPr>
-            <a:spLocks noGrp="1"/>
-          </p:cNvSpPr>
-          <p:nvPr>
-            <p:ph type="body" idx="1"/>
-          </p:nvPr>
-        </p:nvSpPr>
-        <p:spPr/>
-        <p:txBody>
-          <a:bodyPr/>
-          <a:lstStyle/>
-          <a:p>
-            <a:pPr/>
-            <a:r>
-              <a:rPr lang="th-TH" dirty="0"/>
-              <a:t>ใช้ชุดชิ้นส่วนมาตรฐาน — กล่องมุมตรง เส้นหักมุมฉาก ไม่มีเงา</a:t>
-            </a:r>
-          </a:p>
-        </p:txBody>
-      </p:sp>
-      <p:sp>
-        <p:nvSpPr>
-          <p:cNvPr id="4" name="Leg"/>
-          <p:cNvSpPr>
-            <a:spLocks noGrp="1"/>
-          </p:cNvSpPr>
-          <p:nvPr>
-            <p:ph type="body" idx="2"/>
-          </p:nvPr>
-        </p:nvSpPr>
-        <p:spPr/>
-        <p:txBody>
-          <a:bodyPr/>
-          <a:lstStyle/>
-          <a:p>
-            <a:pPr/>
-            <a:r>
-              <a:rPr lang="th-TH" dirty="0"/>
-              <a:t>กล่องทึบ = ระบบที่มีอยู่  ·  กล่องมีสีหมวด = ส่วนที่เพิ่ม  ·  เส้นทึบ = ข้อมูลไหลอัตโนมัติ</a:t>
-            </a:r>
-          </a:p>
-        </p:txBody>
-      </p:sp>
-      <p:sp>
-        <p:nvSpPr>
-          <p:cNvPr id="5" name="TL"/>
-          <p:cNvSpPr>
-            <a:spLocks noGrp="1"/>
-          </p:cNvSpPr>
-          <p:nvPr>
-            <p:ph type="body" idx="3"/>
-          </p:nvPr>
-        </p:nvSpPr>
-        <p:spPr/>
-        <p:txBody>
-          <a:bodyPr/>
-          <a:lstStyle/>
-          <a:p>
-            <a:pPr/>
-            <a:r>
-              <a:rPr lang="th-TH" dirty="0"/>
-              <a:t>สรุป</a:t>
-            </a:r>
-          </a:p>
-        </p:txBody>
-      </p:sp>
-      <p:sp>
-        <p:nvSpPr>
-          <p:cNvPr id="6" name="TC"/>
-          <p:cNvSpPr>
-            <a:spLocks noGrp="1"/>
-          </p:cNvSpPr>
-          <p:nvPr>
-            <p:ph type="body" idx="4"/>
-          </p:nvPr>
-        </p:nvSpPr>
-        <p:spPr/>
-        <p:txBody>
-          <a:bodyPr/>
-          <a:lstStyle/>
-          <a:p>
-            <a:pPr/>
-            <a:r>
-              <a:rPr lang="th-TH" dirty="0"/>
-              <a:t>ระบบเดิมไม่ถูกแก้ ของใหม่แทรกเป็นคิวและตัวตรวจกฎคั่นกลางเท่านั้น</a:t>
-            </a:r>
-          </a:p>
-        </p:txBody>
-      </p:sp>
-      <p:sp>
-        <p:nvSpPr>
-          <p:cNvPr id="10" name="Group Zone"/>
-          <p:cNvSpPr/>
-          <p:nvPr/>
-        </p:nvSpPr>
-        <p:spPr>
-          <a:xfrm>
-            <a:off x="3566160" y="2766060"/>
-            <a:ext cx="5257800" cy="1645920"/>
-          </a:xfrm>
-          <a:prstGeom prst="rect">
-            <a:avLst/>
-          </a:prstGeom>
-          <a:solidFill>
-            <a:srgbClr val="E8F6F5"/>
-          </a:solidFill>
-          <a:ln>
-            <a:noFill/>
-          </a:ln>
-        </p:spPr>
-        <p:txBody>
-          <a:bodyPr/>
-          <a:lstStyle/>
-          <a:p>
-            <a:endParaRPr lang="th-TH"/>
-          </a:p>
-        </p:txBody>
-      </p:sp>
-      <p:sp>
-        <p:nvSpPr>
-          <p:cNvPr id="11" name="Group Label"/>
-          <p:cNvSpPr/>
-          <p:nvPr/>
-        </p:nvSpPr>
-        <p:spPr>
-          <a:xfrm>
-            <a:off x="3840480" y="2926080"/>
-            <a:ext cx="3200400" cy="228600"/>
-          </a:xfrm>
-          <a:prstGeom prst="rect">
-            <a:avLst/>
-          </a:prstGeom>
-          <a:noFill/>
-          <a:ln>
-            <a:noFill/>
-          </a:ln>
-        </p:spPr>
-        <p:txBody>
-          <a:bodyPr wrap="square" anchor="ctr" lIns="0" tIns="0" rIns="0" bIns="0" rtlCol="0"/>
-          <a:lstStyle/>
-          <a:p>
-            <a:pPr algn="l" marL="0" indent="0">
-              <a:lnSpc>
-                <a:spcPct val="100000"/>
-              </a:lnSpc>
-              <a:buNone/>
-            </a:pPr>
-            <a:r>
-              <a:rPr lang="th-TH" sz="1200" b="1" dirty="0">
-                <a:solidFill>
-                  <a:srgbClr val="216B7F"/>
-                </a:solidFill>
-                <a:latin typeface="+mn-lt"/>
-                <a:ea typeface="+mn-ea"/>
-                <a:cs typeface="+mn-cs"/>
-              </a:rPr>
-              <a:t>ส่วนที่เพิ่มใหม่</a:t>
-            </a:r>
-          </a:p>
-        </p:txBody>
-      </p:sp>
-      <p:sp>
-        <p:nvSpPr>
-          <p:cNvPr id="12" name="Box 1"/>
-          <p:cNvSpPr/>
-          <p:nvPr/>
-        </p:nvSpPr>
-        <p:spPr>
-          <a:xfrm>
-            <a:off x="1143000" y="3223260"/>
-            <a:ext cx="2011680" cy="731520"/>
-          </a:xfrm>
-          <a:prstGeom prst="rect">
-            <a:avLst/>
-          </a:prstGeom>
-          <a:solidFill>
-            <a:srgbClr val="23436D"/>
-          </a:solidFill>
-          <a:ln>
-            <a:noFill/>
-          </a:ln>
-        </p:spPr>
-        <p:txBody>
-          <a:bodyPr wrap="square" anchor="ctr" lIns="0" tIns="0" rIns="0" bIns="0" rtlCol="0"/>
-          <a:lstStyle/>
-          <a:p>
-            <a:pPr algn="ctr" marL="0" indent="0">
-              <a:lnSpc>
-                <a:spcPct val="110000"/>
-              </a:lnSpc>
-              <a:buNone/>
-            </a:pPr>
-            <a:r>
-              <a:rPr lang="th-TH" sz="1200" dirty="0">
-                <a:solidFill>
-                  <a:srgbClr val="FFFFFF"/>
-                </a:solidFill>
-                <a:latin typeface="+mn-lt"/>
-                <a:ea typeface="+mn-ea"/>
-                <a:cs typeface="+mn-cs"/>
-              </a:rPr>
-              <a:t>ระบบ ERP ปัจจุบัน</a:t>
-            </a:r>
-          </a:p>
-        </p:txBody>
-      </p:sp>
-      <p:sp>
-        <p:nvSpPr>
-          <p:cNvPr id="13" name="Box 2"/>
-          <p:cNvSpPr/>
-          <p:nvPr/>
-        </p:nvSpPr>
-        <p:spPr>
-          <a:xfrm>
-            <a:off x="3840480" y="3223260"/>
-            <a:ext cx="2011680" cy="731520"/>
-          </a:xfrm>
-          <a:prstGeom prst="rect">
-            <a:avLst/>
-          </a:prstGeom>
-          <a:solidFill>
-            <a:srgbClr val="FFFFFF"/>
-          </a:solidFill>
-          <a:ln w="12700">
-            <a:solidFill>
-              <a:srgbClr val="2A5EA0"/>
-            </a:solidFill>
-          </a:ln>
-        </p:spPr>
-        <p:txBody>
-          <a:bodyPr wrap="square" anchor="ctr" lIns="0" tIns="0" rIns="0" bIns="0" rtlCol="0"/>
-          <a:lstStyle/>
-          <a:p>
-            <a:pPr algn="ctr" marL="0" indent="0">
-              <a:lnSpc>
-                <a:spcPct val="110000"/>
-              </a:lnSpc>
-              <a:buNone/>
-            </a:pPr>
-            <a:r>
-              <a:rPr lang="th-TH" sz="1200" dirty="0">
-                <a:solidFill>
-                  <a:srgbClr val="333333"/>
-                </a:solidFill>
-                <a:latin typeface="+mn-lt"/>
-                <a:ea typeface="+mn-ea"/>
-                <a:cs typeface="+mn-cs"/>
-              </a:rPr>
-              <a:t>คิวเอกสารกลาง</a:t>
-            </a:r>
-          </a:p>
-        </p:txBody>
-      </p:sp>
-      <p:sp>
-        <p:nvSpPr>
-          <p:cNvPr id="113" name="Box 2 Tab"/>
-          <p:cNvSpPr/>
-          <p:nvPr/>
-        </p:nvSpPr>
-        <p:spPr>
-          <a:xfrm>
-            <a:off x="3954780" y="3337560"/>
-            <a:ext cx="205740" cy="45720"/>
-          </a:xfrm>
-          <a:prstGeom prst="rect">
-            <a:avLst/>
-          </a:prstGeom>
-          <a:solidFill>
-            <a:srgbClr val="2A5EA0"/>
-          </a:solidFill>
-          <a:ln>
-            <a:noFill/>
-          </a:ln>
-        </p:spPr>
-        <p:txBody>
-          <a:bodyPr/>
-          <a:lstStyle/>
-          <a:p>
-            <a:endParaRPr lang="th-TH"/>
-          </a:p>
-        </p:txBody>
-      </p:sp>
-      <p:sp>
-        <p:nvSpPr>
-          <p:cNvPr id="14" name="Box 3"/>
-          <p:cNvSpPr/>
-          <p:nvPr/>
-        </p:nvSpPr>
-        <p:spPr>
-          <a:xfrm>
-            <a:off x="6537960" y="3223260"/>
-            <a:ext cx="2011680" cy="731520"/>
-          </a:xfrm>
-          <a:prstGeom prst="rect">
-            <a:avLst/>
-          </a:prstGeom>
-          <a:solidFill>
-            <a:srgbClr val="FFFFFF"/>
-          </a:solidFill>
-          <a:ln w="12700">
-            <a:solidFill>
-              <a:srgbClr val="BB731B"/>
-            </a:solidFill>
-          </a:ln>
-        </p:spPr>
-        <p:txBody>
-          <a:bodyPr wrap="square" anchor="ctr" lIns="0" tIns="0" rIns="0" bIns="0" rtlCol="0"/>
-          <a:lstStyle/>
-          <a:p>
-            <a:pPr algn="ctr" marL="0" indent="0">
-              <a:lnSpc>
-                <a:spcPct val="110000"/>
-              </a:lnSpc>
-              <a:buNone/>
-            </a:pPr>
-            <a:r>
-              <a:rPr lang="th-TH" sz="1200" dirty="0">
-                <a:solidFill>
-                  <a:srgbClr val="333333"/>
-                </a:solidFill>
-                <a:latin typeface="+mn-lt"/>
-                <a:ea typeface="+mn-ea"/>
-                <a:cs typeface="+mn-cs"/>
-              </a:rPr>
-              <a:t>ตัวตรวจกฎธุรกิจ</a:t>
-            </a:r>
-          </a:p>
-        </p:txBody>
-      </p:sp>
-      <p:sp>
-        <p:nvSpPr>
-          <p:cNvPr id="114" name="Box 3 Tab"/>
-          <p:cNvSpPr/>
-          <p:nvPr/>
-        </p:nvSpPr>
-        <p:spPr>
-          <a:xfrm>
-            <a:off x="6652260" y="3337560"/>
-            <a:ext cx="205740" cy="45720"/>
-          </a:xfrm>
-          <a:prstGeom prst="rect">
-            <a:avLst/>
-          </a:prstGeom>
-          <a:solidFill>
-            <a:srgbClr val="BB731B"/>
-          </a:solidFill>
-          <a:ln>
-            <a:noFill/>
-          </a:ln>
-        </p:spPr>
-        <p:txBody>
-          <a:bodyPr/>
-          <a:lstStyle/>
-          <a:p>
-            <a:endParaRPr lang="th-TH"/>
-          </a:p>
-        </p:txBody>
-      </p:sp>
-      <p:sp>
-        <p:nvSpPr>
-          <p:cNvPr id="15" name="Box 4"/>
-          <p:cNvSpPr/>
-          <p:nvPr/>
-        </p:nvSpPr>
-        <p:spPr>
-          <a:xfrm>
-            <a:off x="9235440" y="3223260"/>
-            <a:ext cx="2011680" cy="731520"/>
-          </a:xfrm>
-          <a:prstGeom prst="rect">
-            <a:avLst/>
-          </a:prstGeom>
-          <a:solidFill>
-            <a:srgbClr val="23436D"/>
-          </a:solidFill>
-          <a:ln>
-            <a:noFill/>
-          </a:ln>
-        </p:spPr>
-        <p:txBody>
-          <a:bodyPr wrap="square" anchor="ctr" lIns="0" tIns="0" rIns="0" bIns="0" rtlCol="0"/>
-          <a:lstStyle/>
-          <a:p>
-            <a:pPr algn="ctr" marL="0" indent="0">
-              <a:lnSpc>
-                <a:spcPct val="110000"/>
-              </a:lnSpc>
-              <a:buNone/>
-            </a:pPr>
-            <a:r>
-              <a:rPr lang="th-TH" sz="1200" dirty="0">
-                <a:solidFill>
-                  <a:srgbClr val="FFFFFF"/>
-                </a:solidFill>
-                <a:latin typeface="+mn-lt"/>
-                <a:ea typeface="+mn-ea"/>
-                <a:cs typeface="+mn-cs"/>
-              </a:rPr>
-              <a:t>ระบบบัญชี</a:t>
-            </a:r>
-          </a:p>
-        </p:txBody>
-      </p:sp>
-      <p:sp>
-        <p:nvSpPr>
-          <p:cNvPr id="16" name="Link 1"/>
-          <p:cNvSpPr/>
-          <p:nvPr/>
-        </p:nvSpPr>
-        <p:spPr>
-          <a:xfrm>
-            <a:off x="3268980" y="3589020"/>
-            <a:ext cx="457200" cy="0"/>
-          </a:xfrm>
-          <a:prstGeom prst="line">
-            <a:avLst/>
-          </a:prstGeom>
-          <a:noFill/>
-          <a:ln w="15875" cap="flat">
-            <a:solidFill>
-              <a:srgbClr val="216B7F"/>
-            </a:solidFill>
-            <a:prstDash val="solid"/>
-            <a:tailEnd type="triangle" w="med" len="med"/>
-          </a:ln>
-        </p:spPr>
-        <p:txBody>
-          <a:bodyPr/>
-          <a:lstStyle/>
-          <a:p>
-            <a:endParaRPr lang="th-TH"/>
-          </a:p>
-        </p:txBody>
-      </p:sp>
-      <p:sp>
-        <p:nvSpPr>
-          <p:cNvPr id="17" name="Link 2"/>
-          <p:cNvSpPr/>
-          <p:nvPr/>
-        </p:nvSpPr>
-        <p:spPr>
-          <a:xfrm>
-            <a:off x="5966460" y="3589020"/>
-            <a:ext cx="457200" cy="0"/>
-          </a:xfrm>
-          <a:prstGeom prst="line">
-            <a:avLst/>
-          </a:prstGeom>
-          <a:noFill/>
-          <a:ln w="15875" cap="flat">
-            <a:solidFill>
-              <a:srgbClr val="216B7F"/>
-            </a:solidFill>
-            <a:prstDash val="solid"/>
-            <a:tailEnd type="triangle" w="med" len="med"/>
-          </a:ln>
-        </p:spPr>
-        <p:txBody>
-          <a:bodyPr/>
-          <a:lstStyle/>
-          <a:p>
-            <a:endParaRPr lang="th-TH"/>
-          </a:p>
-        </p:txBody>
-      </p:sp>
-      <p:sp>
-        <p:nvSpPr>
-          <p:cNvPr id="18" name="Link 3"/>
-          <p:cNvSpPr/>
-          <p:nvPr/>
-        </p:nvSpPr>
-        <p:spPr>
-          <a:xfrm>
-            <a:off x="8663940" y="3589020"/>
-            <a:ext cx="457200" cy="0"/>
-          </a:xfrm>
-          <a:prstGeom prst="line">
-            <a:avLst/>
-          </a:prstGeom>
-          <a:noFill/>
-          <a:ln w="15875" cap="flat">
-            <a:solidFill>
-              <a:srgbClr val="216B7F"/>
-            </a:solidFill>
-            <a:prstDash val="solid"/>
-            <a:tailEnd type="triangle" w="med" len="med"/>
-          </a:ln>
-        </p:spPr>
-        <p:txBody>
-          <a:bodyPr/>
-          <a:lstStyle/>
-          <a:p>
-            <a:endParaRPr lang="th-TH"/>
-          </a:p>
-        </p:txBody>
-      </p:sp>
-      <p:sp>
-        <p:nvSpPr>
-          <p:cNvPr id="19" name="Edge Label"/>
-          <p:cNvSpPr/>
-          <p:nvPr/>
-        </p:nvSpPr>
-        <p:spPr>
-          <a:xfrm>
-            <a:off x="5806440" y="3268980"/>
-            <a:ext cx="822960" cy="228600"/>
-          </a:xfrm>
-          <a:prstGeom prst="rect">
-            <a:avLst/>
-          </a:prstGeom>
-          <a:noFill/>
-          <a:ln>
-            <a:noFill/>
-          </a:ln>
-        </p:spPr>
-        <p:txBody>
-          <a:bodyPr wrap="square" anchor="ctr" lIns="0" tIns="0" rIns="0" bIns="0" rtlCol="0"/>
-          <a:lstStyle/>
-          <a:p>
-            <a:pPr algn="ctr" marL="0" indent="0">
-              <a:lnSpc>
-                <a:spcPct val="100000"/>
-              </a:lnSpc>
-              <a:buNone/>
-            </a:pPr>
-            <a:r>
-              <a:rPr lang="th-TH" sz="1000" dirty="0">
-                <a:solidFill>
-                  <a:srgbClr val="5F5F5F"/>
-                </a:solidFill>
-                <a:latin typeface="+mn-lt"/>
-                <a:ea typeface="+mn-ea"/>
-                <a:cs typeface="+mn-cs"/>
-              </a:rPr>
-              <a:t>ผ่านกฎ</a:t>
-            </a:r>
-          </a:p>
-        </p:txBody>
-      </p:sp>
-    </p:spTree>
-  </p:cSld>
-  <p:clrMapOvr>
-    <a:masterClrMapping/>
-  </p:clrMapOvr>
-</p:sld>
-</file>
-
-<file path=ppt/slides/slide13.xml><?xml version="1.0" encoding="utf-8"?>
 <p:sld xmlns:a="http://schemas.openxmlformats.org/drawingml/2006/main" xmlns:r="http://schemas.openxmlformats.org/officeDocument/2006/relationships" xmlns:p="http://schemas.openxmlformats.org/presentationml/2006/main">
   <p:cSld name="">
     <p:spTree>
@@ -33574,6 +33561,174 @@
 </p:sld>
 </file>
 
+<file path=ppt/slides/slide13.xml><?xml version="1.0" encoding="utf-8"?>
+<p:sld xmlns:a="http://schemas.openxmlformats.org/drawingml/2006/main" xmlns:r="http://schemas.openxmlformats.org/officeDocument/2006/relationships" xmlns:p="http://schemas.openxmlformats.org/presentationml/2006/main">
+  <p:cSld name="">
+    <p:spTree>
+      <p:nvGrpSpPr>
+        <p:cNvPr id="1" name=""/>
+        <p:cNvGrpSpPr/>
+        <p:nvPr/>
+      </p:nvGrpSpPr>
+      <p:grpSpPr>
+        <a:xfrm>
+          <a:off x="0" y="0"/>
+          <a:ext cx="0" cy="0"/>
+          <a:chOff x="0" y="0"/>
+          <a:chExt cx="0" cy="0"/>
+        </a:xfrm>
+      </p:grpSpPr>
+      <p:sp>
+        <p:nvSpPr>
+          <p:cNvPr id="2" name="Title"/>
+          <p:cNvSpPr>
+            <a:spLocks noGrp="1"/>
+          </p:cNvSpPr>
+          <p:nvPr>
+            <p:ph type="title"/>
+          </p:nvPr>
+        </p:nvSpPr>
+        <p:spPr/>
+        <p:txBody>
+          <a:bodyPr/>
+          <a:lstStyle/>
+          <a:p>
+            <a:pPr/>
+            <a:r>
+              <a:rPr lang="th-TH" dirty="0"/>
+              <a:t>ข้อเสนอนี้ครอบคลุมงานบัญชีสามหมวด ไม่รวมเงินเดือน</a:t>
+            </a:r>
+          </a:p>
+        </p:txBody>
+      </p:sp>
+      <p:sp>
+        <p:nvSpPr>
+          <p:cNvPr id="3" name="LH"/>
+          <p:cNvSpPr>
+            <a:spLocks noGrp="1"/>
+          </p:cNvSpPr>
+          <p:nvPr>
+            <p:ph type="body" idx="3"/>
+          </p:nvPr>
+        </p:nvSpPr>
+        <p:spPr/>
+        <p:txBody>
+          <a:bodyPr/>
+          <a:lstStyle/>
+          <a:p>
+            <a:pPr/>
+            <a:r>
+              <a:rPr lang="th-TH" dirty="0"/>
+              <a:t>รวมในข้อเสนอ</a:t>
+            </a:r>
+          </a:p>
+        </p:txBody>
+      </p:sp>
+      <p:sp>
+        <p:nvSpPr>
+          <p:cNvPr id="4" name="L"/>
+          <p:cNvSpPr>
+            <a:spLocks noGrp="1"/>
+          </p:cNvSpPr>
+          <p:nvPr>
+            <p:ph type="body" idx="1"/>
+          </p:nvPr>
+        </p:nvSpPr>
+        <p:spPr/>
+        <p:txBody>
+          <a:bodyPr/>
+          <a:lstStyle/>
+          <a:p>
+            <a:pPr/>
+            <a:r>
+              <a:rPr lang="th-TH" dirty="0"/>
+              <a:t>เจ้าหนี้ ลูกหนี้ และบัญชีแยกประเภท</a:t>
+            </a:r>
+          </a:p>
+          <a:p>
+            <a:pPr/>
+            <a:r>
+              <a:rPr lang="th-TH" dirty="0"/>
+              <a:t>ตัวเชื่อม ERP เดิม และคิวเอกสารกลาง</a:t>
+            </a:r>
+          </a:p>
+          <a:p>
+            <a:pPr/>
+            <a:r>
+              <a:rPr lang="th-TH" dirty="0"/>
+              <a:t>อบรมผู้ใช้และผู้ดูแลระบบ 2 หลักสูตร</a:t>
+            </a:r>
+          </a:p>
+        </p:txBody>
+      </p:sp>
+      <p:sp>
+        <p:nvSpPr>
+          <p:cNvPr id="5" name="RH"/>
+          <p:cNvSpPr>
+            <a:spLocks noGrp="1"/>
+          </p:cNvSpPr>
+          <p:nvPr>
+            <p:ph type="body" idx="4"/>
+          </p:nvPr>
+        </p:nvSpPr>
+        <p:spPr/>
+        <p:txBody>
+          <a:bodyPr/>
+          <a:lstStyle/>
+          <a:p>
+            <a:pPr/>
+            <a:r>
+              <a:rPr lang="th-TH" dirty="0"/>
+              <a:t>ไม่รวมในข้อเสนอ</a:t>
+            </a:r>
+          </a:p>
+        </p:txBody>
+      </p:sp>
+      <p:sp>
+        <p:nvSpPr>
+          <p:cNvPr id="6" name="R"/>
+          <p:cNvSpPr>
+            <a:spLocks noGrp="1"/>
+          </p:cNvSpPr>
+          <p:nvPr>
+            <p:ph type="body" idx="2"/>
+          </p:nvPr>
+        </p:nvSpPr>
+        <p:spPr/>
+        <p:txBody>
+          <a:bodyPr/>
+          <a:lstStyle/>
+          <a:p>
+            <a:pPr/>
+            <a:r>
+              <a:rPr lang="th-TH" dirty="0"/>
+              <a:t>ระบบเงินเดือนและภาษีหัก ณ ที่จ่ายพนักงาน</a:t>
+            </a:r>
+          </a:p>
+          <a:p>
+            <a:pPr/>
+            <a:r>
+              <a:rPr lang="th-TH" dirty="0"/>
+              <a:t>ย้ายข้อมูลย้อนหลังเกิน 2 ปี</a:t>
+            </a:r>
+          </a:p>
+          <a:p>
+            <a:pPr/>
+            <a:r>
+              <a:rPr lang="th-TH" dirty="0"/>
+              <a:t>ค่าไลเซนส์ ERP ที่ลูกค้ามีอยู่แล้ว</a:t>
+            </a:r>
+          </a:p>
+        </p:txBody>
+      </p:sp>
+    </p:spTree>
+  </p:cSld>
+  <p:clrMapOvr>
+    <a:masterClrMapping/>
+  </p:clrMapOvr>
+</p:sld>
+</file>
+
 <file path=ppt/slides/slide14.xml><?xml version="1.0" encoding="utf-8"?>
 <p:sld xmlns:a="http://schemas.openxmlformats.org/drawingml/2006/main" xmlns:r="http://schemas.openxmlformats.org/officeDocument/2006/relationships" xmlns:p="http://schemas.openxmlformats.org/presentationml/2006/main">
   <p:cSld name="">
@@ -37724,7 +37879,7 @@
             <a:pPr/>
             <a:r>
               <a:rPr lang="th-TH" dirty="0"/>
-              <a:t>5. Implementation Stage</a:t>
+              <a:t>เฟสแรกเตรียมเครื่องสองชุดให้พร้อมก่อนเริ่มพัฒนา</a:t>
             </a:r>
           </a:p>
         </p:txBody>
@@ -37977,7 +38132,7 @@
             <a:pPr/>
             <a:r>
               <a:rPr lang="th-TH" dirty="0"/>
-              <a:t>8. Project Training</a:t>
+              <a:t>อบรมสองหลักสูตรจบก่อนวันขึ้นระบบ</a:t>
             </a:r>
           </a:p>
         </p:txBody>
@@ -38017,7 +38172,7 @@
         </p:nvGraphicFramePr>
         <p:xfrm>
           <a:off x="914400" y="2240280"/>
-          <a:ext cx="8092440" cy="1051560"/>
+          <a:ext cx="10363200" cy="1051560"/>
         </p:xfrm>
         <a:graphic>
           <a:graphicData uri="http://schemas.openxmlformats.org/drawingml/2006/table">
@@ -38026,10 +38181,10 @@
                 <a:tableStyleId>{9C1E7B34-52D8-4A61-B0F7-3E5A2C81D046}</a:tableStyleId>
               </a:tblPr>
               <a:tblGrid>
-                <a:gridCol w="1600200"/>
-                <a:gridCol w="3200400"/>
+                <a:gridCol w="2011680"/>
+                <a:gridCol w="4206240"/>
                 <a:gridCol w="1188720"/>
-                <a:gridCol w="2103120"/>
+                <a:gridCol w="2956560"/>
               </a:tblGrid>
               <a:tr h="347472">
                 <a:tc>
@@ -38346,7 +38501,7 @@
             <a:pPr/>
             <a:r>
               <a:rPr lang="th-TH" dirty="0"/>
-              <a:t>อบรมสองหลักสูตร รวม 8 ชั่วโมง จบภายในสัปดาห์เดียวก่อนวันขึ้นระบบ</a:t>
+              <a:t>รวม 8 ชั่วโมงในสัปดาห์เดียว งานบัญชีไม่ต้องหยุดระหว่างอบรม</a:t>
             </a:r>
           </a:p>
         </p:txBody>
@@ -40282,19 +40437,19 @@
             <a:pPr/>
             <a:r>
               <a:rPr lang="th-TH" dirty="0"/>
-              <a:t>ก่อนและหลังใช้บริการ</a:t>
-            </a:r>
-          </a:p>
-        </p:txBody>
-      </p:sp>
-      <p:sp>
-        <p:nvSpPr>
-          <p:cNvPr id="3" name="LH"/>
-          <p:cNvSpPr>
-            <a:spLocks noGrp="1"/>
-          </p:cNvSpPr>
-          <p:nvPr>
-            <p:ph type="body" idx="3"/>
+              <a:t>สี่ผลลัพธ์ที่ข้อเสนอนี้ให้</a:t>
+            </a:r>
+          </a:p>
+        </p:txBody>
+      </p:sp>
+      <p:sp>
+        <p:nvSpPr>
+          <p:cNvPr id="3" name="N0"/>
+          <p:cNvSpPr>
+            <a:spLocks noGrp="1"/>
+          </p:cNvSpPr>
+          <p:nvPr>
+            <p:ph type="body" idx="20"/>
           </p:nvPr>
         </p:nvSpPr>
         <p:spPr/>
@@ -40305,19 +40460,19 @@
             <a:pPr/>
             <a:r>
               <a:rPr lang="th-TH" dirty="0"/>
-              <a:t>ก่อน</a:t>
-            </a:r>
-          </a:p>
-        </p:txBody>
-      </p:sp>
-      <p:sp>
-        <p:nvSpPr>
-          <p:cNvPr id="4" name="L"/>
-          <p:cNvSpPr>
-            <a:spLocks noGrp="1"/>
-          </p:cNvSpPr>
-          <p:nvPr>
-            <p:ph type="body" idx="1"/>
+              <a:t>01</a:t>
+            </a:r>
+          </a:p>
+        </p:txBody>
+      </p:sp>
+      <p:sp>
+        <p:nvSpPr>
+          <p:cNvPr id="4" name="H0"/>
+          <p:cNvSpPr>
+            <a:spLocks noGrp="1"/>
+          </p:cNvSpPr>
+          <p:nvPr>
+            <p:ph type="body" idx="21"/>
           </p:nvPr>
         </p:nvSpPr>
         <p:spPr/>
@@ -40328,26 +40483,42 @@
             <a:pPr/>
             <a:r>
               <a:rPr lang="th-TH" dirty="0"/>
-              <a:t>ระบบล่มบ่อย ไม่มีคนดูแลประจำ</a:t>
-            </a:r>
-          </a:p>
+              <a:t>ลดงานคีย์ซ้ำ</a:t>
+            </a:r>
+          </a:p>
+        </p:txBody>
+      </p:sp>
+      <p:sp>
+        <p:nvSpPr>
+          <p:cNvPr id="5" name="B0"/>
+          <p:cNvSpPr>
+            <a:spLocks noGrp="1"/>
+          </p:cNvSpPr>
+          <p:nvPr>
+            <p:ph type="body" idx="22"/>
+          </p:nvPr>
+        </p:nvSpPr>
+        <p:spPr/>
+        <p:txBody>
+          <a:bodyPr/>
+          <a:lstStyle/>
           <a:p>
             <a:pPr/>
             <a:r>
               <a:rPr lang="th-TH" dirty="0"/>
-              <a:t>ค่าใช้จ่ายไม่แน่นอน</a:t>
-            </a:r>
-          </a:p>
-        </p:txBody>
-      </p:sp>
-      <p:sp>
-        <p:nvSpPr>
-          <p:cNvPr id="5" name="RH"/>
-          <p:cNvSpPr>
-            <a:spLocks noGrp="1"/>
-          </p:cNvSpPr>
-          <p:nvPr>
-            <p:ph type="body" idx="4"/>
+              <a:t>รับเอกสารเข้าระบบเดียว แล้วกระจายต่อให้ทุกปลายทางอัตโนมัติ</a:t>
+            </a:r>
+          </a:p>
+        </p:txBody>
+      </p:sp>
+      <p:sp>
+        <p:nvSpPr>
+          <p:cNvPr id="6" name="N1"/>
+          <p:cNvSpPr>
+            <a:spLocks noGrp="1"/>
+          </p:cNvSpPr>
+          <p:nvPr>
+            <p:ph type="body" idx="23"/>
           </p:nvPr>
         </p:nvSpPr>
         <p:spPr/>
@@ -40358,19 +40529,19 @@
             <a:pPr/>
             <a:r>
               <a:rPr lang="th-TH" dirty="0"/>
-              <a:t>หลัง</a:t>
-            </a:r>
-          </a:p>
-        </p:txBody>
-      </p:sp>
-      <p:sp>
-        <p:nvSpPr>
-          <p:cNvPr id="6" name="R"/>
-          <p:cNvSpPr>
-            <a:spLocks noGrp="1"/>
-          </p:cNvSpPr>
-          <p:nvPr>
-            <p:ph type="body" idx="2"/>
+              <a:t>02</a:t>
+            </a:r>
+          </a:p>
+        </p:txBody>
+      </p:sp>
+      <p:sp>
+        <p:nvSpPr>
+          <p:cNvPr id="7" name="H1"/>
+          <p:cNvSpPr>
+            <a:spLocks noGrp="1"/>
+          </p:cNvSpPr>
+          <p:nvPr>
+            <p:ph type="body" idx="24"/>
           </p:nvPr>
         </p:nvSpPr>
         <p:spPr/>
@@ -40381,14 +40552,214 @@
             <a:pPr/>
             <a:r>
               <a:rPr lang="th-TH" dirty="0"/>
-              <a:t>มอนิเตอร์ 24 ชั่วโมง แจ้งเตือนอัตโนมัติ</a:t>
-            </a:r>
-          </a:p>
+              <a:t>ตรวจสอบได้</a:t>
+            </a:r>
+          </a:p>
+        </p:txBody>
+      </p:sp>
+      <p:sp>
+        <p:nvSpPr>
+          <p:cNvPr id="8" name="B1"/>
+          <p:cNvSpPr>
+            <a:spLocks noGrp="1"/>
+          </p:cNvSpPr>
+          <p:nvPr>
+            <p:ph type="body" idx="25"/>
+          </p:nvPr>
+        </p:nvSpPr>
+        <p:spPr/>
+        <p:txBody>
+          <a:bodyPr/>
+          <a:lstStyle/>
           <a:p>
             <a:pPr/>
             <a:r>
               <a:rPr lang="th-TH" dirty="0"/>
-              <a:t>ค่าใช้จ่ายคงที่ต่อเดือน</a:t>
+              <a:t>ทุกรายการมี audit trail ผู้ทำ เวลา และค่าก่อนหลัง</a:t>
+            </a:r>
+          </a:p>
+        </p:txBody>
+      </p:sp>
+      <p:sp>
+        <p:nvSpPr>
+          <p:cNvPr id="9" name="N2"/>
+          <p:cNvSpPr>
+            <a:spLocks noGrp="1"/>
+          </p:cNvSpPr>
+          <p:nvPr>
+            <p:ph type="body" idx="26"/>
+          </p:nvPr>
+        </p:nvSpPr>
+        <p:spPr/>
+        <p:txBody>
+          <a:bodyPr/>
+          <a:lstStyle/>
+          <a:p>
+            <a:pPr/>
+            <a:r>
+              <a:rPr lang="th-TH" dirty="0"/>
+              <a:t>03</a:t>
+            </a:r>
+          </a:p>
+        </p:txBody>
+      </p:sp>
+      <p:sp>
+        <p:nvSpPr>
+          <p:cNvPr id="10" name="H2"/>
+          <p:cNvSpPr>
+            <a:spLocks noGrp="1"/>
+          </p:cNvSpPr>
+          <p:nvPr>
+            <p:ph type="body" idx="27"/>
+          </p:nvPr>
+        </p:nvSpPr>
+        <p:spPr/>
+        <p:txBody>
+          <a:bodyPr/>
+          <a:lstStyle/>
+          <a:p>
+            <a:pPr/>
+            <a:r>
+              <a:rPr lang="th-TH" dirty="0"/>
+              <a:t>ปิดงบเร็วขึ้น</a:t>
+            </a:r>
+          </a:p>
+        </p:txBody>
+      </p:sp>
+      <p:sp>
+        <p:nvSpPr>
+          <p:cNvPr id="11" name="B2"/>
+          <p:cNvSpPr>
+            <a:spLocks noGrp="1"/>
+          </p:cNvSpPr>
+          <p:nvPr>
+            <p:ph type="body" idx="28"/>
+          </p:nvPr>
+        </p:nvSpPr>
+        <p:spPr/>
+        <p:txBody>
+          <a:bodyPr/>
+          <a:lstStyle/>
+          <a:p>
+            <a:pPr/>
+            <a:r>
+              <a:rPr lang="th-TH" dirty="0"/>
+              <a:t>กระทบยอดอัตโนมัติรายวัน ไม่ต้องรอสิ้นเดือน</a:t>
+            </a:r>
+          </a:p>
+        </p:txBody>
+      </p:sp>
+      <p:sp>
+        <p:nvSpPr>
+          <p:cNvPr id="12" name="N3"/>
+          <p:cNvSpPr>
+            <a:spLocks noGrp="1"/>
+          </p:cNvSpPr>
+          <p:nvPr>
+            <p:ph type="body" idx="29"/>
+          </p:nvPr>
+        </p:nvSpPr>
+        <p:spPr/>
+        <p:txBody>
+          <a:bodyPr/>
+          <a:lstStyle/>
+          <a:p>
+            <a:pPr/>
+            <a:r>
+              <a:rPr lang="th-TH" dirty="0"/>
+              <a:t>04</a:t>
+            </a:r>
+          </a:p>
+        </p:txBody>
+      </p:sp>
+      <p:sp>
+        <p:nvSpPr>
+          <p:cNvPr id="13" name="H3"/>
+          <p:cNvSpPr>
+            <a:spLocks noGrp="1"/>
+          </p:cNvSpPr>
+          <p:nvPr>
+            <p:ph type="body" idx="30"/>
+          </p:nvPr>
+        </p:nvSpPr>
+        <p:spPr/>
+        <p:txBody>
+          <a:bodyPr/>
+          <a:lstStyle/>
+          <a:p>
+            <a:pPr/>
+            <a:r>
+              <a:rPr lang="th-TH" dirty="0"/>
+              <a:t>ขยายต่อได้</a:t>
+            </a:r>
+          </a:p>
+        </p:txBody>
+      </p:sp>
+      <p:sp>
+        <p:nvSpPr>
+          <p:cNvPr id="14" name="B3"/>
+          <p:cNvSpPr>
+            <a:spLocks noGrp="1"/>
+          </p:cNvSpPr>
+          <p:nvPr>
+            <p:ph type="body" idx="31"/>
+          </p:nvPr>
+        </p:nvSpPr>
+        <p:spPr/>
+        <p:txBody>
+          <a:bodyPr/>
+          <a:lstStyle/>
+          <a:p>
+            <a:pPr/>
+            <a:r>
+              <a:rPr lang="th-TH" dirty="0"/>
+              <a:t>เพิ่มกระบวนการใหม่โดยไม่แก้ของเดิม</a:t>
+            </a:r>
+          </a:p>
+        </p:txBody>
+      </p:sp>
+      <p:sp>
+        <p:nvSpPr>
+          <p:cNvPr id="15" name="BL"/>
+          <p:cNvSpPr>
+            <a:spLocks noGrp="1"/>
+          </p:cNvSpPr>
+          <p:nvPr>
+            <p:ph type="body" idx="32"/>
+          </p:nvPr>
+        </p:nvSpPr>
+        <p:spPr/>
+        <p:txBody>
+          <a:bodyPr/>
+          <a:lstStyle/>
+          <a:p>
+            <a:pPr/>
+            <a:r>
+              <a:rPr lang="th-TH" dirty="0"/>
+              <a:t>สรุป</a:t>
+            </a:r>
+          </a:p>
+        </p:txBody>
+      </p:sp>
+      <p:sp>
+        <p:nvSpPr>
+          <p:cNvPr id="16" name="BC"/>
+          <p:cNvSpPr>
+            <a:spLocks noGrp="1"/>
+          </p:cNvSpPr>
+          <p:nvPr>
+            <p:ph type="body" idx="33"/>
+          </p:nvPr>
+        </p:nvSpPr>
+        <p:spPr/>
+        <p:txBody>
+          <a:bodyPr/>
+          <a:lstStyle/>
+          <a:p>
+            <a:pPr/>
+            <a:r>
+              <a:rPr lang="th-TH" dirty="0"/>
+              <a:t>ทั้งสี่ข้อมาจากการแก้จุดเดียวกัน คือรวมจุดรับเอกสาร</a:t>
             </a:r>
           </a:p>
         </p:txBody>
@@ -40436,19 +40807,19 @@
             <a:pPr/>
             <a:r>
               <a:rPr lang="th-TH" dirty="0"/>
-              <a:t>สี่ผลลัพธ์ที่ข้อเสนอนี้ให้</a:t>
-            </a:r>
-          </a:p>
-        </p:txBody>
-      </p:sp>
-      <p:sp>
-        <p:nvSpPr>
-          <p:cNvPr id="3" name="N0"/>
-          <p:cNvSpPr>
-            <a:spLocks noGrp="1"/>
-          </p:cNvSpPr>
-          <p:nvPr>
-            <p:ph type="body" idx="20"/>
+              <a:t>วิธีการทำงาน</a:t>
+            </a:r>
+          </a:p>
+        </p:txBody>
+      </p:sp>
+      <p:sp>
+        <p:nvSpPr>
+          <p:cNvPr id="3" name="Cap"/>
+          <p:cNvSpPr>
+            <a:spLocks noGrp="1"/>
+          </p:cNvSpPr>
+          <p:nvPr>
+            <p:ph type="body" idx="2"/>
           </p:nvPr>
         </p:nvSpPr>
         <p:spPr/>
@@ -40459,306 +40830,7 @@
             <a:pPr/>
             <a:r>
               <a:rPr lang="th-TH" dirty="0"/>
-              <a:t>01</a:t>
-            </a:r>
-          </a:p>
-        </p:txBody>
-      </p:sp>
-      <p:sp>
-        <p:nvSpPr>
-          <p:cNvPr id="4" name="H0"/>
-          <p:cNvSpPr>
-            <a:spLocks noGrp="1"/>
-          </p:cNvSpPr>
-          <p:nvPr>
-            <p:ph type="body" idx="21"/>
-          </p:nvPr>
-        </p:nvSpPr>
-        <p:spPr/>
-        <p:txBody>
-          <a:bodyPr/>
-          <a:lstStyle/>
-          <a:p>
-            <a:pPr/>
-            <a:r>
-              <a:rPr lang="th-TH" dirty="0"/>
-              <a:t>ลดงานคีย์ซ้ำ</a:t>
-            </a:r>
-          </a:p>
-        </p:txBody>
-      </p:sp>
-      <p:sp>
-        <p:nvSpPr>
-          <p:cNvPr id="5" name="B0"/>
-          <p:cNvSpPr>
-            <a:spLocks noGrp="1"/>
-          </p:cNvSpPr>
-          <p:nvPr>
-            <p:ph type="body" idx="22"/>
-          </p:nvPr>
-        </p:nvSpPr>
-        <p:spPr/>
-        <p:txBody>
-          <a:bodyPr/>
-          <a:lstStyle/>
-          <a:p>
-            <a:pPr/>
-            <a:r>
-              <a:rPr lang="th-TH" dirty="0"/>
-              <a:t>รับเอกสารเข้าระบบเดียว แล้วกระจายต่อให้ทุกปลายทางอัตโนมัติ</a:t>
-            </a:r>
-          </a:p>
-        </p:txBody>
-      </p:sp>
-      <p:sp>
-        <p:nvSpPr>
-          <p:cNvPr id="6" name="N1"/>
-          <p:cNvSpPr>
-            <a:spLocks noGrp="1"/>
-          </p:cNvSpPr>
-          <p:nvPr>
-            <p:ph type="body" idx="23"/>
-          </p:nvPr>
-        </p:nvSpPr>
-        <p:spPr/>
-        <p:txBody>
-          <a:bodyPr/>
-          <a:lstStyle/>
-          <a:p>
-            <a:pPr/>
-            <a:r>
-              <a:rPr lang="th-TH" dirty="0"/>
-              <a:t>02</a:t>
-            </a:r>
-          </a:p>
-        </p:txBody>
-      </p:sp>
-      <p:sp>
-        <p:nvSpPr>
-          <p:cNvPr id="7" name="H1"/>
-          <p:cNvSpPr>
-            <a:spLocks noGrp="1"/>
-          </p:cNvSpPr>
-          <p:nvPr>
-            <p:ph type="body" idx="24"/>
-          </p:nvPr>
-        </p:nvSpPr>
-        <p:spPr/>
-        <p:txBody>
-          <a:bodyPr/>
-          <a:lstStyle/>
-          <a:p>
-            <a:pPr/>
-            <a:r>
-              <a:rPr lang="th-TH" dirty="0"/>
-              <a:t>ตรวจสอบได้</a:t>
-            </a:r>
-          </a:p>
-        </p:txBody>
-      </p:sp>
-      <p:sp>
-        <p:nvSpPr>
-          <p:cNvPr id="8" name="B1"/>
-          <p:cNvSpPr>
-            <a:spLocks noGrp="1"/>
-          </p:cNvSpPr>
-          <p:nvPr>
-            <p:ph type="body" idx="25"/>
-          </p:nvPr>
-        </p:nvSpPr>
-        <p:spPr/>
-        <p:txBody>
-          <a:bodyPr/>
-          <a:lstStyle/>
-          <a:p>
-            <a:pPr/>
-            <a:r>
-              <a:rPr lang="th-TH" dirty="0"/>
-              <a:t>ทุกรายการมี audit trail ผู้ทำ เวลา และค่าก่อนหลัง</a:t>
-            </a:r>
-          </a:p>
-        </p:txBody>
-      </p:sp>
-      <p:sp>
-        <p:nvSpPr>
-          <p:cNvPr id="9" name="N2"/>
-          <p:cNvSpPr>
-            <a:spLocks noGrp="1"/>
-          </p:cNvSpPr>
-          <p:nvPr>
-            <p:ph type="body" idx="26"/>
-          </p:nvPr>
-        </p:nvSpPr>
-        <p:spPr/>
-        <p:txBody>
-          <a:bodyPr/>
-          <a:lstStyle/>
-          <a:p>
-            <a:pPr/>
-            <a:r>
-              <a:rPr lang="th-TH" dirty="0"/>
-              <a:t>03</a:t>
-            </a:r>
-          </a:p>
-        </p:txBody>
-      </p:sp>
-      <p:sp>
-        <p:nvSpPr>
-          <p:cNvPr id="10" name="H2"/>
-          <p:cNvSpPr>
-            <a:spLocks noGrp="1"/>
-          </p:cNvSpPr>
-          <p:nvPr>
-            <p:ph type="body" idx="27"/>
-          </p:nvPr>
-        </p:nvSpPr>
-        <p:spPr/>
-        <p:txBody>
-          <a:bodyPr/>
-          <a:lstStyle/>
-          <a:p>
-            <a:pPr/>
-            <a:r>
-              <a:rPr lang="th-TH" dirty="0"/>
-              <a:t>ปิดงบเร็วขึ้น</a:t>
-            </a:r>
-          </a:p>
-        </p:txBody>
-      </p:sp>
-      <p:sp>
-        <p:nvSpPr>
-          <p:cNvPr id="11" name="B2"/>
-          <p:cNvSpPr>
-            <a:spLocks noGrp="1"/>
-          </p:cNvSpPr>
-          <p:nvPr>
-            <p:ph type="body" idx="28"/>
-          </p:nvPr>
-        </p:nvSpPr>
-        <p:spPr/>
-        <p:txBody>
-          <a:bodyPr/>
-          <a:lstStyle/>
-          <a:p>
-            <a:pPr/>
-            <a:r>
-              <a:rPr lang="th-TH" dirty="0"/>
-              <a:t>กระทบยอดอัตโนมัติรายวัน ไม่ต้องรอสิ้นเดือน</a:t>
-            </a:r>
-          </a:p>
-        </p:txBody>
-      </p:sp>
-      <p:sp>
-        <p:nvSpPr>
-          <p:cNvPr id="12" name="N3"/>
-          <p:cNvSpPr>
-            <a:spLocks noGrp="1"/>
-          </p:cNvSpPr>
-          <p:nvPr>
-            <p:ph type="body" idx="29"/>
-          </p:nvPr>
-        </p:nvSpPr>
-        <p:spPr/>
-        <p:txBody>
-          <a:bodyPr/>
-          <a:lstStyle/>
-          <a:p>
-            <a:pPr/>
-            <a:r>
-              <a:rPr lang="th-TH" dirty="0"/>
-              <a:t>04</a:t>
-            </a:r>
-          </a:p>
-        </p:txBody>
-      </p:sp>
-      <p:sp>
-        <p:nvSpPr>
-          <p:cNvPr id="13" name="H3"/>
-          <p:cNvSpPr>
-            <a:spLocks noGrp="1"/>
-          </p:cNvSpPr>
-          <p:nvPr>
-            <p:ph type="body" idx="30"/>
-          </p:nvPr>
-        </p:nvSpPr>
-        <p:spPr/>
-        <p:txBody>
-          <a:bodyPr/>
-          <a:lstStyle/>
-          <a:p>
-            <a:pPr/>
-            <a:r>
-              <a:rPr lang="th-TH" dirty="0"/>
-              <a:t>ขยายต่อได้</a:t>
-            </a:r>
-          </a:p>
-        </p:txBody>
-      </p:sp>
-      <p:sp>
-        <p:nvSpPr>
-          <p:cNvPr id="14" name="B3"/>
-          <p:cNvSpPr>
-            <a:spLocks noGrp="1"/>
-          </p:cNvSpPr>
-          <p:nvPr>
-            <p:ph type="body" idx="31"/>
-          </p:nvPr>
-        </p:nvSpPr>
-        <p:spPr/>
-        <p:txBody>
-          <a:bodyPr/>
-          <a:lstStyle/>
-          <a:p>
-            <a:pPr/>
-            <a:r>
-              <a:rPr lang="th-TH" dirty="0"/>
-              <a:t>เพิ่มกระบวนการใหม่โดยไม่แก้ของเดิม</a:t>
-            </a:r>
-          </a:p>
-        </p:txBody>
-      </p:sp>
-      <p:sp>
-        <p:nvSpPr>
-          <p:cNvPr id="15" name="BL"/>
-          <p:cNvSpPr>
-            <a:spLocks noGrp="1"/>
-          </p:cNvSpPr>
-          <p:nvPr>
-            <p:ph type="body" idx="32"/>
-          </p:nvPr>
-        </p:nvSpPr>
-        <p:spPr/>
-        <p:txBody>
-          <a:bodyPr/>
-          <a:lstStyle/>
-          <a:p>
-            <a:pPr/>
-            <a:r>
-              <a:rPr lang="th-TH" dirty="0"/>
-              <a:t>สรุป</a:t>
-            </a:r>
-          </a:p>
-        </p:txBody>
-      </p:sp>
-      <p:sp>
-        <p:nvSpPr>
-          <p:cNvPr id="16" name="BC"/>
-          <p:cNvSpPr>
-            <a:spLocks noGrp="1"/>
-          </p:cNvSpPr>
-          <p:nvPr>
-            <p:ph type="body" idx="33"/>
-          </p:nvPr>
-        </p:nvSpPr>
-        <p:spPr/>
-        <p:txBody>
-          <a:bodyPr/>
-          <a:lstStyle/>
-          <a:p>
-            <a:pPr/>
-            <a:r>
-              <a:rPr lang="th-TH" dirty="0"/>
-              <a:t>ทั้งสี่ข้อมาจากการแก้จุดเดียวกัน คือรวมจุดรับเอกสาร</a:t>
+              <a:t>กระบวนการ สถาปัตยกรรม และขอบเขตที่ตกลงกัน</a:t>
             </a:r>
           </a:p>
         </p:txBody>
